--- a/DockGuard_Fun_Presentation.pptx
+++ b/DockGuard_Fun_Presentation.pptx
@@ -3086,6 +3086,28 @@
 <file path=ppt/slides/slide1.xml><?xml version="1.0" encoding="utf-8"?>
 <p:sld xmlns:a="http://schemas.openxmlformats.org/drawingml/2006/main" xmlns:p="http://schemas.openxmlformats.org/presentationml/2006/main" xmlns:r="http://schemas.openxmlformats.org/officeDocument/2006/relationships">
   <p:cSld>
+    <p:bg>
+      <p:bgPr>
+        <a:gradFill flip="none" rotWithShape="1">
+          <a:gsLst>
+            <a:gs pos="0">
+              <a:srgbClr val="060F1E"/>
+            </a:gs>
+            <a:gs pos="38000">
+              <a:srgbClr val="0A213D"/>
+            </a:gs>
+            <a:gs pos="75000">
+              <a:srgbClr val="113665"/>
+            </a:gs>
+            <a:gs pos="100000">
+              <a:srgbClr val="07182E"/>
+            </a:gs>
+          </a:gsLst>
+          <a:lin ang="3240000" scaled="1"/>
+        </a:gradFill>
+        <a:effectLst/>
+      </p:bgPr>
+    </p:bg>
     <p:spTree>
       <p:nvGrpSpPr>
         <p:cNvPr id="1" name=""/>
@@ -3095,71 +3117,102 @@
       <p:grpSpPr/>
       <p:sp>
         <p:nvSpPr>
-          <p:cNvPr id="2" name="Rectangle 1"/>
+          <p:cNvPr id="2" name="TextBox 1"/>
+          <p:cNvSpPr txBox="1"/>
+          <p:nvPr/>
+        </p:nvSpPr>
+        <p:spPr>
+          <a:xfrm>
+            <a:off x="731520" y="548640"/>
+            <a:ext cx="10728655" cy="274320"/>
+          </a:xfrm>
+          <a:prstGeom prst="rect">
+            <a:avLst/>
+          </a:prstGeom>
+          <a:noFill/>
+        </p:spPr>
+        <p:txBody>
+          <a:bodyPr wrap="none" lIns="0" tIns="0" rIns="0" bIns="0">
+            <a:spAutoFit/>
+          </a:bodyPr>
+          <a:lstStyle/>
+          <a:p>
+            <a:pPr>
+              <a:defRPr sz="1000" b="1">
+                <a:solidFill>
+                  <a:srgbClr val="38BDF8"/>
+                </a:solidFill>
+                <a:latin typeface="Segoe UI"/>
+              </a:defRPr>
+            </a:pPr>
+            <a:r>
+              <a:t>AUTONOMOUS WAREHOUSE CARGO INTELLIGENCE</a:t>
+            </a:r>
+          </a:p>
+        </p:txBody>
+      </p:sp>
+      <p:sp>
+        <p:nvSpPr>
+          <p:cNvPr id="3" name="TextBox 2"/>
+          <p:cNvSpPr txBox="1"/>
+          <p:nvPr/>
+        </p:nvSpPr>
+        <p:spPr>
+          <a:xfrm>
+            <a:off x="731520" y="868680"/>
+            <a:ext cx="6217920" cy="1188720"/>
+          </a:xfrm>
+          <a:prstGeom prst="rect">
+            <a:avLst/>
+          </a:prstGeom>
+          <a:noFill/>
+        </p:spPr>
+        <p:txBody>
+          <a:bodyPr wrap="square" lIns="0" tIns="0" rIns="0" bIns="0">
+            <a:spAutoFit/>
+          </a:bodyPr>
+          <a:lstStyle/>
+          <a:p>
+            <a:pPr>
+              <a:defRPr sz="3600" b="1">
+                <a:solidFill>
+                  <a:srgbClr val="FFFFFF"/>
+                </a:solidFill>
+                <a:latin typeface="Segoe UI"/>
+              </a:defRPr>
+            </a:pPr>
+            <a:r>
+              <a:t>DockGuard AI</a:t>
+            </a:r>
+          </a:p>
+          <a:p>
+            <a:pPr>
+              <a:spcBef>
+                <a:spcPts val="400"/>
+              </a:spcBef>
+              <a:defRPr sz="1500" b="1">
+                <a:solidFill>
+                  <a:srgbClr val="38BDF8"/>
+                </a:solidFill>
+                <a:latin typeface="Segoe UI"/>
+              </a:defRPr>
+            </a:pPr>
+            <a:r>
+              <a:t>Because gravity shouldn't win on the warehouse loading dock.</a:t>
+            </a:r>
+          </a:p>
+        </p:txBody>
+      </p:sp>
+      <p:sp>
+        <p:nvSpPr>
+          <p:cNvPr id="4" name="Rectangle 3"/>
           <p:cNvSpPr/>
           <p:nvPr/>
         </p:nvSpPr>
         <p:spPr>
           <a:xfrm>
-            <a:off x="0" y="0"/>
-            <a:ext cx="12191695" cy="6858000"/>
-          </a:xfrm>
-          <a:prstGeom prst="rect">
-            <a:avLst/>
-          </a:prstGeom>
-          <a:ln>
-            <a:noFill/>
-          </a:ln>
-          <a:gradFill flip="none" rotWithShape="1">
-            <a:gsLst>
-              <a:gs pos="0">
-                <a:srgbClr val="08192E"/>
-              </a:gs>
-              <a:gs pos="42000">
-                <a:srgbClr val="12335E"/>
-              </a:gs>
-              <a:gs pos="78000">
-                <a:srgbClr val="1A4982"/>
-              </a:gs>
-              <a:gs pos="100000">
-                <a:srgbClr val="0A2140"/>
-              </a:gs>
-            </a:gsLst>
-            <a:lin ang="3240000" scaled="1"/>
-          </a:gradFill>
-        </p:spPr>
-        <p:style>
-          <a:lnRef idx="1">
-            <a:schemeClr val="accent1"/>
-          </a:lnRef>
-          <a:fillRef idx="3">
-            <a:schemeClr val="accent1"/>
-          </a:fillRef>
-          <a:effectRef idx="2">
-            <a:schemeClr val="accent1"/>
-          </a:effectRef>
-          <a:fontRef idx="minor">
-            <a:schemeClr val="lt1"/>
-          </a:fontRef>
-        </p:style>
-        <p:txBody>
-          <a:bodyPr rtlCol="0" anchor="ctr"/>
-          <a:lstStyle/>
-          <a:p>
-            <a:pPr algn="ctr"/>
-          </a:p>
-        </p:txBody>
-      </p:sp>
-      <p:sp>
-        <p:nvSpPr>
-          <p:cNvPr id="3" name="Rectangle 2"/>
-          <p:cNvSpPr/>
-          <p:nvPr/>
-        </p:nvSpPr>
-        <p:spPr>
-          <a:xfrm>
-            <a:off x="731520" y="685800"/>
-            <a:ext cx="10728655" cy="54864"/>
+            <a:off x="731520" y="2212848"/>
+            <a:ext cx="36576" cy="1097280"/>
           </a:xfrm>
           <a:prstGeom prst="rect">
             <a:avLst/>
@@ -3195,77 +3248,23 @@
       </p:sp>
       <p:sp>
         <p:nvSpPr>
-          <p:cNvPr id="4" name="TextBox 3"/>
-          <p:cNvSpPr txBox="1"/>
-          <p:nvPr/>
-        </p:nvSpPr>
-        <p:spPr>
-          <a:xfrm>
-            <a:off x="731520" y="932688"/>
-            <a:ext cx="10698480" cy="1280160"/>
-          </a:xfrm>
-          <a:prstGeom prst="rect">
-            <a:avLst/>
-          </a:prstGeom>
-          <a:noFill/>
-        </p:spPr>
-        <p:txBody>
-          <a:bodyPr wrap="square">
-            <a:spAutoFit/>
-          </a:bodyPr>
-          <a:lstStyle/>
-          <a:p>
-            <a:pPr>
-              <a:defRPr sz="3600" b="1">
-                <a:solidFill>
-                  <a:srgbClr val="FFFFFF"/>
-                </a:solidFill>
-                <a:latin typeface="Segoe UI"/>
-              </a:defRPr>
-            </a:pPr>
-            <a:r>
-              <a:t>DockGuard AI</a:t>
-            </a:r>
-          </a:p>
-          <a:p>
-            <a:pPr>
-              <a:spcBef>
-                <a:spcPts val="400"/>
-              </a:spcBef>
-              <a:defRPr sz="1600" b="1">
-                <a:solidFill>
-                  <a:srgbClr val="38BDF8"/>
-                </a:solidFill>
-                <a:latin typeface="Segoe UI"/>
-              </a:defRPr>
-            </a:pPr>
-            <a:r>
-              <a:t>Because gravity shouldn't win on the warehouse loading dock.</a:t>
-            </a:r>
-          </a:p>
-        </p:txBody>
-      </p:sp>
-      <p:sp>
-        <p:nvSpPr>
-          <p:cNvPr id="5" name="Rounded Rectangle 4"/>
+          <p:cNvPr id="5" name="Rectangle 4"/>
           <p:cNvSpPr/>
           <p:nvPr/>
         </p:nvSpPr>
         <p:spPr>
           <a:xfrm>
-            <a:off x="731520" y="2194560"/>
-            <a:ext cx="10728655" cy="1234440"/>
-          </a:xfrm>
-          <a:prstGeom prst="roundRect">
+            <a:off x="768096" y="2212848"/>
+            <a:ext cx="6181344" cy="1097280"/>
+          </a:xfrm>
+          <a:prstGeom prst="rect">
             <a:avLst/>
           </a:prstGeom>
           <a:solidFill>
-            <a:srgbClr val="143058"/>
+            <a:srgbClr val="0A192E"/>
           </a:solidFill>
-          <a:ln w="12700">
-            <a:solidFill>
-              <a:srgbClr val="2D5F9B"/>
-            </a:solidFill>
+          <a:ln>
+            <a:noFill/>
           </a:ln>
         </p:spPr>
         <p:style>
@@ -3298,8 +3297,8 @@
         </p:nvSpPr>
         <p:spPr>
           <a:xfrm>
-            <a:off x="960120" y="2286000"/>
-            <a:ext cx="10241280" cy="1051560"/>
+            <a:off x="914400" y="2267712"/>
+            <a:ext cx="5897880" cy="987552"/>
           </a:xfrm>
           <a:prstGeom prst="rect">
             <a:avLst/>
@@ -3307,13 +3306,13 @@
           <a:noFill/>
         </p:spPr>
         <p:txBody>
-          <a:bodyPr wrap="square">
+          <a:bodyPr wrap="square" lIns="0" tIns="0" rIns="0" bIns="0">
             <a:spAutoFit/>
           </a:bodyPr>
           <a:lstStyle/>
           <a:p>
             <a:pPr>
-              <a:defRPr sz="1000" b="1">
+              <a:defRPr sz="900" b="1">
                 <a:solidFill>
                   <a:srgbClr val="7DD3FC"/>
                 </a:solidFill>
@@ -3321,7 +3320,7 @@
               </a:defRPr>
             </a:pPr>
             <a:r>
-              <a:t>THE 10-SECOND PITCH</a:t>
+              <a:t>THE PROBLEM IN 10 SECONDS</a:t>
             </a:r>
           </a:p>
           <a:p>
@@ -3329,7 +3328,7 @@
               <a:spcBef>
                 <a:spcPts val="300"/>
               </a:spcBef>
-              <a:defRPr sz="1200">
+              <a:defRPr sz="1050">
                 <a:solidFill>
                   <a:srgbClr val="CBD5E1"/>
                 </a:solidFill>
@@ -3337,31 +3336,67 @@
               </a:defRPr>
             </a:pPr>
             <a:r>
-              <a:t>Ever opened an online order to find your new gadget smashed into puzzle pieces? It almost never happens in the delivery van. It happens in the 4:00 PM warehouse rush where boxes fly, pallets wobble, and nobody notices. We built DockGuard to watch CCTV feeds in real time, catch drops and rough drags in seconds, and make sure damaged boxes never leave the building.</a:t>
-            </a:r>
-          </a:p>
-        </p:txBody>
-      </p:sp>
-      <p:sp>
-        <p:nvSpPr>
-          <p:cNvPr id="7" name="Rounded Rectangle 6"/>
+              <a:t>Ever opened an online delivery to find a shattered product? It rarely breaks in the van. It happens in the 4:00 PM warehouse rush where cartons slip, pallets wobble, and nobody notices. DockGuard watches CCTV in real time to catch drops, rough drags, and stack collapses before goods ever leave the bay.</a:t>
+            </a:r>
+          </a:p>
+        </p:txBody>
+      </p:sp>
+      <p:sp>
+        <p:nvSpPr>
+          <p:cNvPr id="7" name="TextBox 6"/>
+          <p:cNvSpPr txBox="1"/>
+          <p:nvPr/>
+        </p:nvSpPr>
+        <p:spPr>
+          <a:xfrm>
+            <a:off x="731520" y="3520440"/>
+            <a:ext cx="6217920" cy="274320"/>
+          </a:xfrm>
+          <a:prstGeom prst="rect">
+            <a:avLst/>
+          </a:prstGeom>
+          <a:noFill/>
+        </p:spPr>
+        <p:txBody>
+          <a:bodyPr wrap="none" lIns="0" tIns="0" rIns="0" bIns="0">
+            <a:spAutoFit/>
+          </a:bodyPr>
+          <a:lstStyle/>
+          <a:p>
+            <a:pPr>
+              <a:defRPr sz="1000" b="1">
+                <a:solidFill>
+                  <a:srgbClr val="38BDF8"/>
+                </a:solidFill>
+                <a:latin typeface="Segoe UI"/>
+              </a:defRPr>
+            </a:pPr>
+            <a:r>
+              <a:t>THE BUILDERS  —  TEAM VISIONGUARD</a:t>
+            </a:r>
+          </a:p>
+        </p:txBody>
+      </p:sp>
+      <p:sp>
+        <p:nvSpPr>
+          <p:cNvPr id="8" name="Rectangle 7"/>
           <p:cNvSpPr/>
           <p:nvPr/>
         </p:nvSpPr>
         <p:spPr>
           <a:xfrm>
-            <a:off x="731520" y="3639312"/>
-            <a:ext cx="5212080" cy="2788920"/>
-          </a:xfrm>
-          <a:prstGeom prst="roundRect">
+            <a:off x="731520" y="3886200"/>
+            <a:ext cx="6217920" cy="749808"/>
+          </a:xfrm>
+          <a:prstGeom prst="rect">
             <a:avLst/>
           </a:prstGeom>
           <a:solidFill>
-            <a:srgbClr val="0E1E36"/>
+            <a:srgbClr val="0A192E"/>
           </a:solidFill>
-          <a:ln>
+          <a:ln w="12700">
             <a:solidFill>
-              <a:srgbClr val="284B78"/>
+              <a:srgbClr val="1C3E66"/>
             </a:solidFill>
           </a:ln>
         </p:spPr>
@@ -3389,172 +3424,23 @@
       </p:sp>
       <p:sp>
         <p:nvSpPr>
-          <p:cNvPr id="8" name="TextBox 7"/>
-          <p:cNvSpPr txBox="1"/>
-          <p:nvPr/>
-        </p:nvSpPr>
-        <p:spPr>
-          <a:xfrm>
-            <a:off x="960120" y="3794760"/>
-            <a:ext cx="4754880" cy="2468880"/>
-          </a:xfrm>
-          <a:prstGeom prst="rect">
-            <a:avLst/>
-          </a:prstGeom>
-          <a:noFill/>
-        </p:spPr>
-        <p:txBody>
-          <a:bodyPr wrap="square">
-            <a:spAutoFit/>
-          </a:bodyPr>
-          <a:lstStyle/>
-          <a:p>
-            <a:pPr>
-              <a:defRPr sz="1100" b="1">
-                <a:solidFill>
-                  <a:srgbClr val="7DD3FC"/>
-                </a:solidFill>
-                <a:latin typeface="Segoe UI"/>
-              </a:defRPr>
-            </a:pPr>
-            <a:r>
-              <a:t>THE SQUAD: TEAM VISIONGUARD</a:t>
-            </a:r>
-          </a:p>
-          <a:p>
-            <a:pPr>
-              <a:spcBef>
-                <a:spcPts val="700"/>
-              </a:spcBef>
-              <a:defRPr sz="1100" b="1">
-                <a:solidFill>
-                  <a:srgbClr val="FFFFFF"/>
-                </a:solidFill>
-                <a:latin typeface="Segoe UI"/>
-              </a:defRPr>
-            </a:pPr>
-            <a:r>
-              <a:t>• Aastha Gupta — </a:t>
-            </a:r>
-            <a:r>
-              <a:rPr b="1">
-                <a:solidFill>
-                  <a:srgbClr val="C084FC"/>
-                </a:solidFill>
-              </a:rPr>
-              <a:t>[Vision Whisperer]</a:t>
-            </a:r>
-          </a:p>
-          <a:p>
-            <a:pPr>
-              <a:defRPr sz="950">
-                <a:solidFill>
-                  <a:srgbClr val="94A3B8"/>
-                </a:solidFill>
-                <a:latin typeface="Segoe UI"/>
-              </a:defRPr>
-            </a:pPr>
-            <a:r>
-              <a:t>   Trained our custom YOLOv8 model to spot cartons, pallets &amp; workers at awkward angles</a:t>
-            </a:r>
-          </a:p>
-          <a:p>
-            <a:pPr>
-              <a:spcBef>
-                <a:spcPts val="700"/>
-              </a:spcBef>
-              <a:defRPr sz="1100" b="1">
-                <a:solidFill>
-                  <a:srgbClr val="FFFFFF"/>
-                </a:solidFill>
-                <a:latin typeface="Segoe UI"/>
-              </a:defRPr>
-            </a:pPr>
-            <a:r>
-              <a:t>• Lucky Lakhani — </a:t>
-            </a:r>
-            <a:r>
-              <a:rPr b="1">
-                <a:solidFill>
-                  <a:srgbClr val="C084FC"/>
-                </a:solidFill>
-              </a:rPr>
-              <a:t>[Pipeline &amp; AI Hacker]</a:t>
-            </a:r>
-          </a:p>
-          <a:p>
-            <a:pPr>
-              <a:defRPr sz="950">
-                <a:solidFill>
-                  <a:srgbClr val="94A3B8"/>
-                </a:solidFill>
-                <a:latin typeface="Segoe UI"/>
-              </a:defRPr>
-            </a:pPr>
-            <a:r>
-              <a:t>   Built the sub-second video buffer, FastAPI endpoints &amp; connected Google Gemini</a:t>
-            </a:r>
-          </a:p>
-          <a:p>
-            <a:pPr>
-              <a:spcBef>
-                <a:spcPts val="700"/>
-              </a:spcBef>
-              <a:defRPr sz="1100" b="1">
-                <a:solidFill>
-                  <a:srgbClr val="FFFFFF"/>
-                </a:solidFill>
-                <a:latin typeface="Segoe UI"/>
-              </a:defRPr>
-            </a:pPr>
-            <a:r>
-              <a:t>• Runjan Bawa — </a:t>
-            </a:r>
-            <a:r>
-              <a:rPr b="1">
-                <a:solidFill>
-                  <a:srgbClr val="C084FC"/>
-                </a:solidFill>
-              </a:rPr>
-              <a:t>[UI &amp; Experience Builder]</a:t>
-            </a:r>
-          </a:p>
-          <a:p>
-            <a:pPr>
-              <a:defRPr sz="950">
-                <a:solidFill>
-                  <a:srgbClr val="94A3B8"/>
-                </a:solidFill>
-                <a:latin typeface="Segoe UI"/>
-              </a:defRPr>
-            </a:pPr>
-            <a:r>
-              <a:t>   Crafted the live dashboard, audio chimes, trend charts &amp; made it look clean</a:t>
-            </a:r>
-          </a:p>
-        </p:txBody>
-      </p:sp>
-      <p:sp>
-        <p:nvSpPr>
-          <p:cNvPr id="9" name="Rounded Rectangle 8"/>
+          <p:cNvPr id="9" name="Rectangle 8"/>
           <p:cNvSpPr/>
           <p:nvPr/>
         </p:nvSpPr>
         <p:spPr>
           <a:xfrm>
-            <a:off x="6248095" y="3639312"/>
-            <a:ext cx="5212080" cy="2788920"/>
-          </a:xfrm>
-          <a:prstGeom prst="roundRect">
+            <a:off x="731520" y="3886200"/>
+            <a:ext cx="27432" cy="749808"/>
+          </a:xfrm>
+          <a:prstGeom prst="rect">
             <a:avLst/>
           </a:prstGeom>
           <a:solidFill>
-            <a:srgbClr val="0E1E36"/>
+            <a:srgbClr val="38BDF8"/>
           </a:solidFill>
           <a:ln>
-            <a:solidFill>
-              <a:srgbClr val="284B78"/>
-            </a:solidFill>
+            <a:noFill/>
           </a:ln>
         </p:spPr>
         <p:style>
@@ -3587,8 +3473,8 @@
         </p:nvSpPr>
         <p:spPr>
           <a:xfrm>
-            <a:off x="6473952" y="3794760"/>
-            <a:ext cx="4754880" cy="2468880"/>
+            <a:off x="896112" y="3959352"/>
+            <a:ext cx="5943600" cy="603504"/>
           </a:xfrm>
           <a:prstGeom prst="rect">
             <a:avLst/>
@@ -3596,7 +3482,7 @@
           <a:noFill/>
         </p:spPr>
         <p:txBody>
-          <a:bodyPr wrap="square">
+          <a:bodyPr wrap="square" lIns="0" tIns="0" rIns="0" bIns="0">
             <a:spAutoFit/>
           </a:bodyPr>
           <a:lstStyle/>
@@ -3604,85 +3490,793 @@
             <a:pPr>
               <a:defRPr sz="1100" b="1">
                 <a:solidFill>
-                  <a:srgbClr val="7DD3FC"/>
-                </a:solidFill>
-                <a:latin typeface="Segoe UI"/>
-              </a:defRPr>
-            </a:pPr>
-            <a:r>
-              <a:t>WHY THIS ACTUALLY MATTERS</a:t>
+                  <a:srgbClr val="FFFFFF"/>
+                </a:solidFill>
+                <a:latin typeface="Segoe UI"/>
+              </a:defRPr>
+            </a:pPr>
+            <a:r>
+              <a:t>Aastha Gupta</a:t>
+            </a:r>
+            <a:r>
+              <a:rPr sz="950" b="1">
+                <a:solidFill>
+                  <a:srgbClr val="38BDF8"/>
+                </a:solidFill>
+              </a:rPr>
+              <a:t>   •   Computer Vision Whisperer</a:t>
             </a:r>
           </a:p>
           <a:p>
             <a:pPr>
               <a:spcBef>
-                <a:spcPts val="700"/>
+                <a:spcPts val="200"/>
               </a:spcBef>
+              <a:defRPr sz="900">
+                <a:solidFill>
+                  <a:srgbClr val="94A3B8"/>
+                </a:solidFill>
+                <a:latin typeface="Segoe UI"/>
+              </a:defRPr>
+            </a:pPr>
+            <a:r>
+              <a:t>Trained custom YOLOv8 model for carton, pallet &amp; worker detection under complex dock occlusions</a:t>
+            </a:r>
+          </a:p>
+        </p:txBody>
+      </p:sp>
+      <p:sp>
+        <p:nvSpPr>
+          <p:cNvPr id="11" name="Rectangle 10"/>
+          <p:cNvSpPr/>
+          <p:nvPr/>
+        </p:nvSpPr>
+        <p:spPr>
+          <a:xfrm>
+            <a:off x="731520" y="4727448"/>
+            <a:ext cx="6217920" cy="749808"/>
+          </a:xfrm>
+          <a:prstGeom prst="rect">
+            <a:avLst/>
+          </a:prstGeom>
+          <a:solidFill>
+            <a:srgbClr val="0A192E"/>
+          </a:solidFill>
+          <a:ln w="12700">
+            <a:solidFill>
+              <a:srgbClr val="1C3E66"/>
+            </a:solidFill>
+          </a:ln>
+        </p:spPr>
+        <p:style>
+          <a:lnRef idx="1">
+            <a:schemeClr val="accent1"/>
+          </a:lnRef>
+          <a:fillRef idx="3">
+            <a:schemeClr val="accent1"/>
+          </a:fillRef>
+          <a:effectRef idx="2">
+            <a:schemeClr val="accent1"/>
+          </a:effectRef>
+          <a:fontRef idx="minor">
+            <a:schemeClr val="lt1"/>
+          </a:fontRef>
+        </p:style>
+        <p:txBody>
+          <a:bodyPr rtlCol="0" anchor="ctr"/>
+          <a:lstStyle/>
+          <a:p>
+            <a:pPr algn="ctr"/>
+          </a:p>
+        </p:txBody>
+      </p:sp>
+      <p:sp>
+        <p:nvSpPr>
+          <p:cNvPr id="12" name="Rectangle 11"/>
+          <p:cNvSpPr/>
+          <p:nvPr/>
+        </p:nvSpPr>
+        <p:spPr>
+          <a:xfrm>
+            <a:off x="731520" y="4727448"/>
+            <a:ext cx="27432" cy="749808"/>
+          </a:xfrm>
+          <a:prstGeom prst="rect">
+            <a:avLst/>
+          </a:prstGeom>
+          <a:solidFill>
+            <a:srgbClr val="38BDF8"/>
+          </a:solidFill>
+          <a:ln>
+            <a:noFill/>
+          </a:ln>
+        </p:spPr>
+        <p:style>
+          <a:lnRef idx="1">
+            <a:schemeClr val="accent1"/>
+          </a:lnRef>
+          <a:fillRef idx="3">
+            <a:schemeClr val="accent1"/>
+          </a:fillRef>
+          <a:effectRef idx="2">
+            <a:schemeClr val="accent1"/>
+          </a:effectRef>
+          <a:fontRef idx="minor">
+            <a:schemeClr val="lt1"/>
+          </a:fontRef>
+        </p:style>
+        <p:txBody>
+          <a:bodyPr rtlCol="0" anchor="ctr"/>
+          <a:lstStyle/>
+          <a:p>
+            <a:pPr algn="ctr"/>
+          </a:p>
+        </p:txBody>
+      </p:sp>
+      <p:sp>
+        <p:nvSpPr>
+          <p:cNvPr id="13" name="TextBox 12"/>
+          <p:cNvSpPr txBox="1"/>
+          <p:nvPr/>
+        </p:nvSpPr>
+        <p:spPr>
+          <a:xfrm>
+            <a:off x="896112" y="4800600"/>
+            <a:ext cx="5943600" cy="603504"/>
+          </a:xfrm>
+          <a:prstGeom prst="rect">
+            <a:avLst/>
+          </a:prstGeom>
+          <a:noFill/>
+        </p:spPr>
+        <p:txBody>
+          <a:bodyPr wrap="square" lIns="0" tIns="0" rIns="0" bIns="0">
+            <a:spAutoFit/>
+          </a:bodyPr>
+          <a:lstStyle/>
+          <a:p>
+            <a:pPr>
+              <a:defRPr sz="1100" b="1">
+                <a:solidFill>
+                  <a:srgbClr val="FFFFFF"/>
+                </a:solidFill>
+                <a:latin typeface="Segoe UI"/>
+              </a:defRPr>
+            </a:pPr>
+            <a:r>
+              <a:t>Lucky Lakhani</a:t>
+            </a:r>
+            <a:r>
+              <a:rPr sz="950" b="1">
+                <a:solidFill>
+                  <a:srgbClr val="38BDF8"/>
+                </a:solidFill>
+              </a:rPr>
+              <a:t>   •   Pipeline &amp; AI Hacker</a:t>
+            </a:r>
+          </a:p>
+          <a:p>
+            <a:pPr>
+              <a:spcBef>
+                <a:spcPts val="200"/>
+              </a:spcBef>
+              <a:defRPr sz="900">
+                <a:solidFill>
+                  <a:srgbClr val="94A3B8"/>
+                </a:solidFill>
+                <a:latin typeface="Segoe UI"/>
+              </a:defRPr>
+            </a:pPr>
+            <a:r>
+              <a:t>Built low-latency video ring buffer, async FastAPI backend, and Gemini 2.5 RAG integration</a:t>
+            </a:r>
+          </a:p>
+        </p:txBody>
+      </p:sp>
+      <p:sp>
+        <p:nvSpPr>
+          <p:cNvPr id="14" name="Rectangle 13"/>
+          <p:cNvSpPr/>
+          <p:nvPr/>
+        </p:nvSpPr>
+        <p:spPr>
+          <a:xfrm>
+            <a:off x="731520" y="5568696"/>
+            <a:ext cx="6217920" cy="749808"/>
+          </a:xfrm>
+          <a:prstGeom prst="rect">
+            <a:avLst/>
+          </a:prstGeom>
+          <a:solidFill>
+            <a:srgbClr val="0A192E"/>
+          </a:solidFill>
+          <a:ln w="12700">
+            <a:solidFill>
+              <a:srgbClr val="1C3E66"/>
+            </a:solidFill>
+          </a:ln>
+        </p:spPr>
+        <p:style>
+          <a:lnRef idx="1">
+            <a:schemeClr val="accent1"/>
+          </a:lnRef>
+          <a:fillRef idx="3">
+            <a:schemeClr val="accent1"/>
+          </a:fillRef>
+          <a:effectRef idx="2">
+            <a:schemeClr val="accent1"/>
+          </a:effectRef>
+          <a:fontRef idx="minor">
+            <a:schemeClr val="lt1"/>
+          </a:fontRef>
+        </p:style>
+        <p:txBody>
+          <a:bodyPr rtlCol="0" anchor="ctr"/>
+          <a:lstStyle/>
+          <a:p>
+            <a:pPr algn="ctr"/>
+          </a:p>
+        </p:txBody>
+      </p:sp>
+      <p:sp>
+        <p:nvSpPr>
+          <p:cNvPr id="15" name="Rectangle 14"/>
+          <p:cNvSpPr/>
+          <p:nvPr/>
+        </p:nvSpPr>
+        <p:spPr>
+          <a:xfrm>
+            <a:off x="731520" y="5568696"/>
+            <a:ext cx="27432" cy="749808"/>
+          </a:xfrm>
+          <a:prstGeom prst="rect">
+            <a:avLst/>
+          </a:prstGeom>
+          <a:solidFill>
+            <a:srgbClr val="38BDF8"/>
+          </a:solidFill>
+          <a:ln>
+            <a:noFill/>
+          </a:ln>
+        </p:spPr>
+        <p:style>
+          <a:lnRef idx="1">
+            <a:schemeClr val="accent1"/>
+          </a:lnRef>
+          <a:fillRef idx="3">
+            <a:schemeClr val="accent1"/>
+          </a:fillRef>
+          <a:effectRef idx="2">
+            <a:schemeClr val="accent1"/>
+          </a:effectRef>
+          <a:fontRef idx="minor">
+            <a:schemeClr val="lt1"/>
+          </a:fontRef>
+        </p:style>
+        <p:txBody>
+          <a:bodyPr rtlCol="0" anchor="ctr"/>
+          <a:lstStyle/>
+          <a:p>
+            <a:pPr algn="ctr"/>
+          </a:p>
+        </p:txBody>
+      </p:sp>
+      <p:sp>
+        <p:nvSpPr>
+          <p:cNvPr id="16" name="TextBox 15"/>
+          <p:cNvSpPr txBox="1"/>
+          <p:nvPr/>
+        </p:nvSpPr>
+        <p:spPr>
+          <a:xfrm>
+            <a:off x="896112" y="5641848"/>
+            <a:ext cx="5943600" cy="603504"/>
+          </a:xfrm>
+          <a:prstGeom prst="rect">
+            <a:avLst/>
+          </a:prstGeom>
+          <a:noFill/>
+        </p:spPr>
+        <p:txBody>
+          <a:bodyPr wrap="square" lIns="0" tIns="0" rIns="0" bIns="0">
+            <a:spAutoFit/>
+          </a:bodyPr>
+          <a:lstStyle/>
+          <a:p>
+            <a:pPr>
+              <a:defRPr sz="1100" b="1">
+                <a:solidFill>
+                  <a:srgbClr val="FFFFFF"/>
+                </a:solidFill>
+                <a:latin typeface="Segoe UI"/>
+              </a:defRPr>
+            </a:pPr>
+            <a:r>
+              <a:t>Runjan Bawa</a:t>
+            </a:r>
+            <a:r>
+              <a:rPr sz="950" b="1">
+                <a:solidFill>
+                  <a:srgbClr val="38BDF8"/>
+                </a:solidFill>
+              </a:rPr>
+              <a:t>   •   UI &amp; Operational Experience</a:t>
+            </a:r>
+          </a:p>
+          <a:p>
+            <a:pPr>
+              <a:spcBef>
+                <a:spcPts val="200"/>
+              </a:spcBef>
+              <a:defRPr sz="900">
+                <a:solidFill>
+                  <a:srgbClr val="94A3B8"/>
+                </a:solidFill>
+                <a:latin typeface="Segoe UI"/>
+              </a:defRPr>
+            </a:pPr>
+            <a:r>
+              <a:t>Crafted the live dashboard, Web Audio chimes, 7-day risk charts, and supervisor workflows</a:t>
+            </a:r>
+          </a:p>
+        </p:txBody>
+      </p:sp>
+      <p:sp>
+        <p:nvSpPr>
+          <p:cNvPr id="17" name="TextBox 16"/>
+          <p:cNvSpPr txBox="1"/>
+          <p:nvPr/>
+        </p:nvSpPr>
+        <p:spPr>
+          <a:xfrm>
+            <a:off x="7315200" y="868680"/>
+            <a:ext cx="4144975" cy="274320"/>
+          </a:xfrm>
+          <a:prstGeom prst="rect">
+            <a:avLst/>
+          </a:prstGeom>
+          <a:noFill/>
+        </p:spPr>
+        <p:txBody>
+          <a:bodyPr wrap="none" lIns="0" tIns="0" rIns="0" bIns="0">
+            <a:spAutoFit/>
+          </a:bodyPr>
+          <a:lstStyle/>
+          <a:p>
+            <a:pPr>
               <a:defRPr sz="1000" b="1">
                 <a:solidFill>
+                  <a:srgbClr val="38BDF8"/>
+                </a:solidFill>
+                <a:latin typeface="Segoe UI"/>
+              </a:defRPr>
+            </a:pPr>
+            <a:r>
+              <a:t>INDUSTRY REALITY &amp; ECONOMIC IMPACT</a:t>
+            </a:r>
+          </a:p>
+        </p:txBody>
+      </p:sp>
+      <p:sp>
+        <p:nvSpPr>
+          <p:cNvPr id="18" name="Rectangle 17"/>
+          <p:cNvSpPr/>
+          <p:nvPr/>
+        </p:nvSpPr>
+        <p:spPr>
+          <a:xfrm>
+            <a:off x="7315200" y="1280160"/>
+            <a:ext cx="4144975" cy="1481328"/>
+          </a:xfrm>
+          <a:prstGeom prst="rect">
+            <a:avLst/>
+          </a:prstGeom>
+          <a:solidFill>
+            <a:srgbClr val="0A192E"/>
+          </a:solidFill>
+          <a:ln w="12700">
+            <a:solidFill>
+              <a:srgbClr val="1C3E66"/>
+            </a:solidFill>
+          </a:ln>
+        </p:spPr>
+        <p:style>
+          <a:lnRef idx="1">
+            <a:schemeClr val="accent1"/>
+          </a:lnRef>
+          <a:fillRef idx="3">
+            <a:schemeClr val="accent1"/>
+          </a:fillRef>
+          <a:effectRef idx="2">
+            <a:schemeClr val="accent1"/>
+          </a:effectRef>
+          <a:fontRef idx="minor">
+            <a:schemeClr val="lt1"/>
+          </a:fontRef>
+        </p:style>
+        <p:txBody>
+          <a:bodyPr rtlCol="0" anchor="ctr"/>
+          <a:lstStyle/>
+          <a:p>
+            <a:pPr algn="ctr"/>
+          </a:p>
+        </p:txBody>
+      </p:sp>
+      <p:sp>
+        <p:nvSpPr>
+          <p:cNvPr id="19" name="TextBox 18"/>
+          <p:cNvSpPr txBox="1"/>
+          <p:nvPr/>
+        </p:nvSpPr>
+        <p:spPr>
+          <a:xfrm>
+            <a:off x="7516368" y="1408176"/>
+            <a:ext cx="3742639" cy="1234440"/>
+          </a:xfrm>
+          <a:prstGeom prst="rect">
+            <a:avLst/>
+          </a:prstGeom>
+          <a:noFill/>
+        </p:spPr>
+        <p:txBody>
+          <a:bodyPr wrap="square" lIns="0" tIns="0" rIns="0" bIns="0">
+            <a:spAutoFit/>
+          </a:bodyPr>
+          <a:lstStyle/>
+          <a:p>
+            <a:pPr>
+              <a:defRPr sz="1100" b="1">
+                <a:solidFill>
+                  <a:srgbClr val="94A3B8"/>
+                </a:solidFill>
+                <a:latin typeface="Segoe UI"/>
+              </a:defRPr>
+            </a:pPr>
+            <a:r>
+              <a:t>01   </a:t>
+            </a:r>
+            <a:r>
+              <a:rPr sz="1700" b="1">
+                <a:solidFill>
                   <a:srgbClr val="FFFFFF"/>
                 </a:solidFill>
                 <a:latin typeface="Segoe UI"/>
-              </a:defRPr>
-            </a:pPr>
-            <a:r>
-              <a:t>• $50B+ Annual Lost Cargo: </a:t>
-            </a:r>
-            <a:r>
-              <a:rPr b="0">
+              </a:rPr>
+              <a:t>$50B+  </a:t>
+            </a:r>
+            <a:r>
+              <a:rPr sz="1000" b="1">
+                <a:solidFill>
+                  <a:srgbClr val="38BDF8"/>
+                </a:solidFill>
+                <a:latin typeface="Segoe UI"/>
+              </a:rPr>
+              <a:t>Annual Global Freight Damage</a:t>
+            </a:r>
+          </a:p>
+          <a:p>
+            <a:pPr>
+              <a:spcBef>
+                <a:spcPts val="500"/>
+              </a:spcBef>
+              <a:defRPr sz="950">
                 <a:solidFill>
                   <a:srgbClr val="CBD5E1"/>
                 </a:solidFill>
+                <a:latin typeface="Segoe UI"/>
+              </a:defRPr>
+            </a:pPr>
+            <a:r>
+              <a:t>Over $50 billion of merchandise is destroyed in warehouses each year before reaching highways. The majority goes entirely unrecorded at the loading dock.</a:t>
+            </a:r>
+          </a:p>
+        </p:txBody>
+      </p:sp>
+      <p:sp>
+        <p:nvSpPr>
+          <p:cNvPr id="20" name="Rectangle 19"/>
+          <p:cNvSpPr/>
+          <p:nvPr/>
+        </p:nvSpPr>
+        <p:spPr>
+          <a:xfrm>
+            <a:off x="7315200" y="2907792"/>
+            <a:ext cx="4144975" cy="1481328"/>
+          </a:xfrm>
+          <a:prstGeom prst="rect">
+            <a:avLst/>
+          </a:prstGeom>
+          <a:solidFill>
+            <a:srgbClr val="0A192E"/>
+          </a:solidFill>
+          <a:ln w="12700">
+            <a:solidFill>
+              <a:srgbClr val="1C3E66"/>
+            </a:solidFill>
+          </a:ln>
+        </p:spPr>
+        <p:style>
+          <a:lnRef idx="1">
+            <a:schemeClr val="accent1"/>
+          </a:lnRef>
+          <a:fillRef idx="3">
+            <a:schemeClr val="accent1"/>
+          </a:fillRef>
+          <a:effectRef idx="2">
+            <a:schemeClr val="accent1"/>
+          </a:effectRef>
+          <a:fontRef idx="minor">
+            <a:schemeClr val="lt1"/>
+          </a:fontRef>
+        </p:style>
+        <p:txBody>
+          <a:bodyPr rtlCol="0" anchor="ctr"/>
+          <a:lstStyle/>
+          <a:p>
+            <a:pPr algn="ctr"/>
+          </a:p>
+        </p:txBody>
+      </p:sp>
+      <p:sp>
+        <p:nvSpPr>
+          <p:cNvPr id="21" name="TextBox 20"/>
+          <p:cNvSpPr txBox="1"/>
+          <p:nvPr/>
+        </p:nvSpPr>
+        <p:spPr>
+          <a:xfrm>
+            <a:off x="7516368" y="3035808"/>
+            <a:ext cx="3742639" cy="1234440"/>
+          </a:xfrm>
+          <a:prstGeom prst="rect">
+            <a:avLst/>
+          </a:prstGeom>
+          <a:noFill/>
+        </p:spPr>
+        <p:txBody>
+          <a:bodyPr wrap="square" lIns="0" tIns="0" rIns="0" bIns="0">
+            <a:spAutoFit/>
+          </a:bodyPr>
+          <a:lstStyle/>
+          <a:p>
+            <a:pPr>
+              <a:defRPr sz="1100" b="1">
+                <a:solidFill>
+                  <a:srgbClr val="94A3B8"/>
+                </a:solidFill>
+                <a:latin typeface="Segoe UI"/>
+              </a:defRPr>
+            </a:pPr>
+            <a:r>
+              <a:t>02   </a:t>
+            </a:r>
+            <a:r>
+              <a:rPr sz="1700" b="1">
+                <a:solidFill>
+                  <a:srgbClr val="FFFFFF"/>
+                </a:solidFill>
+                <a:latin typeface="Segoe UI"/>
               </a:rPr>
-              <a:t>That's how much merchandise gets wrecked in warehouses before even making it onto the highway. Most of it goes completely unrecorded.</a:t>
+              <a:t>1 : 10  </a:t>
+            </a:r>
+            <a:r>
+              <a:rPr sz="1000" b="1">
+                <a:solidFill>
+                  <a:srgbClr val="38BDF8"/>
+                </a:solidFill>
+                <a:latin typeface="Segoe UI"/>
+              </a:rPr>
+              <a:t>Supervisor Blindspot Ratio</a:t>
             </a:r>
           </a:p>
           <a:p>
             <a:pPr>
               <a:spcBef>
-                <a:spcPts val="700"/>
+                <a:spcPts val="500"/>
               </a:spcBef>
-              <a:defRPr sz="1000" b="1">
+              <a:defRPr sz="950">
+                <a:solidFill>
+                  <a:srgbClr val="CBD5E1"/>
+                </a:solidFill>
+                <a:latin typeface="Segoe UI"/>
+              </a:defRPr>
+            </a:pPr>
+            <a:r>
+              <a:t>A single dock supervisor oversees up to 10 active bays, 40 fast-moving workers, and forklift traffic. Blame turns into speculation and customer friction.</a:t>
+            </a:r>
+          </a:p>
+        </p:txBody>
+      </p:sp>
+      <p:sp>
+        <p:nvSpPr>
+          <p:cNvPr id="22" name="Rectangle 21"/>
+          <p:cNvSpPr/>
+          <p:nvPr/>
+        </p:nvSpPr>
+        <p:spPr>
+          <a:xfrm>
+            <a:off x="7315200" y="4535424"/>
+            <a:ext cx="4144975" cy="1481328"/>
+          </a:xfrm>
+          <a:prstGeom prst="rect">
+            <a:avLst/>
+          </a:prstGeom>
+          <a:solidFill>
+            <a:srgbClr val="0A192E"/>
+          </a:solidFill>
+          <a:ln w="12700">
+            <a:solidFill>
+              <a:srgbClr val="1C3E66"/>
+            </a:solidFill>
+          </a:ln>
+        </p:spPr>
+        <p:style>
+          <a:lnRef idx="1">
+            <a:schemeClr val="accent1"/>
+          </a:lnRef>
+          <a:fillRef idx="3">
+            <a:schemeClr val="accent1"/>
+          </a:fillRef>
+          <a:effectRef idx="2">
+            <a:schemeClr val="accent1"/>
+          </a:effectRef>
+          <a:fontRef idx="minor">
+            <a:schemeClr val="lt1"/>
+          </a:fontRef>
+        </p:style>
+        <p:txBody>
+          <a:bodyPr rtlCol="0" anchor="ctr"/>
+          <a:lstStyle/>
+          <a:p>
+            <a:pPr algn="ctr"/>
+          </a:p>
+        </p:txBody>
+      </p:sp>
+      <p:sp>
+        <p:nvSpPr>
+          <p:cNvPr id="23" name="TextBox 22"/>
+          <p:cNvSpPr txBox="1"/>
+          <p:nvPr/>
+        </p:nvSpPr>
+        <p:spPr>
+          <a:xfrm>
+            <a:off x="7516368" y="4663440"/>
+            <a:ext cx="3742639" cy="1234440"/>
+          </a:xfrm>
+          <a:prstGeom prst="rect">
+            <a:avLst/>
+          </a:prstGeom>
+          <a:noFill/>
+        </p:spPr>
+        <p:txBody>
+          <a:bodyPr wrap="square" lIns="0" tIns="0" rIns="0" bIns="0">
+            <a:spAutoFit/>
+          </a:bodyPr>
+          <a:lstStyle/>
+          <a:p>
+            <a:pPr>
+              <a:defRPr sz="1100" b="1">
+                <a:solidFill>
+                  <a:srgbClr val="94A3B8"/>
+                </a:solidFill>
+                <a:latin typeface="Segoe UI"/>
+              </a:defRPr>
+            </a:pPr>
+            <a:r>
+              <a:t>03   </a:t>
+            </a:r>
+            <a:r>
+              <a:rPr sz="1700" b="1">
                 <a:solidFill>
                   <a:srgbClr val="FFFFFF"/>
                 </a:solidFill>
                 <a:latin typeface="Segoe UI"/>
-              </a:defRPr>
-            </a:pPr>
-            <a:r>
-              <a:t>• Human Eyes Can't Keep Up: </a:t>
-            </a:r>
-            <a:r>
-              <a:rPr b="0">
+              </a:rPr>
+              <a:t>&lt; 1.5s  </a:t>
+            </a:r>
+            <a:r>
+              <a:rPr sz="1000" b="1">
+                <a:solidFill>
+                  <a:srgbClr val="38BDF8"/>
+                </a:solidFill>
+                <a:latin typeface="Segoe UI"/>
+              </a:rPr>
+              <a:t>Intervention Window</a:t>
+            </a:r>
+          </a:p>
+          <a:p>
+            <a:pPr>
+              <a:spcBef>
+                <a:spcPts val="500"/>
+              </a:spcBef>
+              <a:defRPr sz="950">
                 <a:solidFill>
                   <a:srgbClr val="CBD5E1"/>
                 </a:solidFill>
-              </a:rPr>
-              <a:t>A single supervisor can't watch 10 bays, 40 fast-moving workers, and forklift traffic all at once. Blame turns into guessing games.</a:t>
-            </a:r>
-          </a:p>
-          <a:p>
-            <a:pPr>
-              <a:spcBef>
-                <a:spcPts val="700"/>
-              </a:spcBef>
-              <a:defRPr sz="1000" b="1">
-                <a:solidFill>
-                  <a:srgbClr val="FFFFFF"/>
-                </a:solidFill>
-                <a:latin typeface="Segoe UI"/>
-              </a:defRPr>
-            </a:pPr>
-            <a:r>
-              <a:t>• Catching It at the Dock: </a:t>
-            </a:r>
-            <a:r>
-              <a:rPr b="0">
-                <a:solidFill>
-                  <a:srgbClr val="CBD5E1"/>
-                </a:solidFill>
-              </a:rPr>
-              <a:t>If you catch a cracked box before it's loaded into the trailer, replacing it costs $10. If it reaches the customer, it costs $200+ and a bad review.</a:t>
+                <a:latin typeface="Segoe UI"/>
+              </a:defRPr>
+            </a:pPr>
+            <a:r>
+              <a:t>Catching cracked goods at the dock costs ~$10 to repackage. Letting damaged goods ship to a customer costs $200+ in return logistics and lost account goodwill.</a:t>
+            </a:r>
+          </a:p>
+        </p:txBody>
+      </p:sp>
+      <p:sp>
+        <p:nvSpPr>
+          <p:cNvPr id="24" name="Rectangle 23"/>
+          <p:cNvSpPr/>
+          <p:nvPr/>
+        </p:nvSpPr>
+        <p:spPr>
+          <a:xfrm>
+            <a:off x="731520" y="6492240"/>
+            <a:ext cx="10728655" cy="13716"/>
+          </a:xfrm>
+          <a:prstGeom prst="rect">
+            <a:avLst/>
+          </a:prstGeom>
+          <a:solidFill>
+            <a:srgbClr val="1C3E66"/>
+          </a:solidFill>
+          <a:ln>
+            <a:noFill/>
+          </a:ln>
+        </p:spPr>
+        <p:style>
+          <a:lnRef idx="1">
+            <a:schemeClr val="accent1"/>
+          </a:lnRef>
+          <a:fillRef idx="3">
+            <a:schemeClr val="accent1"/>
+          </a:fillRef>
+          <a:effectRef idx="2">
+            <a:schemeClr val="accent1"/>
+          </a:effectRef>
+          <a:fontRef idx="minor">
+            <a:schemeClr val="lt1"/>
+          </a:fontRef>
+        </p:style>
+        <p:txBody>
+          <a:bodyPr rtlCol="0" anchor="ctr"/>
+          <a:lstStyle/>
+          <a:p>
+            <a:pPr algn="ctr"/>
+          </a:p>
+        </p:txBody>
+      </p:sp>
+      <p:sp>
+        <p:nvSpPr>
+          <p:cNvPr id="25" name="TextBox 24"/>
+          <p:cNvSpPr txBox="1"/>
+          <p:nvPr/>
+        </p:nvSpPr>
+        <p:spPr>
+          <a:xfrm>
+            <a:off x="731520" y="6537960"/>
+            <a:ext cx="10728655" cy="228600"/>
+          </a:xfrm>
+          <a:prstGeom prst="rect">
+            <a:avLst/>
+          </a:prstGeom>
+          <a:noFill/>
+        </p:spPr>
+        <p:txBody>
+          <a:bodyPr wrap="none" lIns="0" tIns="0" rIns="0" bIns="0">
+            <a:spAutoFit/>
+          </a:bodyPr>
+          <a:lstStyle/>
+          <a:p>
+            <a:pPr>
+              <a:defRPr sz="850">
+                <a:solidFill>
+                  <a:srgbClr val="94A3B8"/>
+                </a:solidFill>
+                <a:latin typeface="Segoe UI"/>
+              </a:defRPr>
+            </a:pPr>
+            <a:r>
+              <a:t>DockGuard AI  •  Autonomous Video Intelligence for Warehouse Loading Bays  •  Slide 1 of 6</a:t>
             </a:r>
           </a:p>
         </p:txBody>
@@ -3698,6 +4292,28 @@
 <file path=ppt/slides/slide2.xml><?xml version="1.0" encoding="utf-8"?>
 <p:sld xmlns:a="http://schemas.openxmlformats.org/drawingml/2006/main" xmlns:p="http://schemas.openxmlformats.org/presentationml/2006/main" xmlns:r="http://schemas.openxmlformats.org/officeDocument/2006/relationships">
   <p:cSld>
+    <p:bg>
+      <p:bgPr>
+        <a:gradFill flip="none" rotWithShape="1">
+          <a:gsLst>
+            <a:gs pos="0">
+              <a:srgbClr val="060F1E"/>
+            </a:gs>
+            <a:gs pos="38000">
+              <a:srgbClr val="0A213D"/>
+            </a:gs>
+            <a:gs pos="75000">
+              <a:srgbClr val="113665"/>
+            </a:gs>
+            <a:gs pos="100000">
+              <a:srgbClr val="07182E"/>
+            </a:gs>
+          </a:gsLst>
+          <a:lin ang="3240000" scaled="1"/>
+        </a:gradFill>
+        <a:effectLst/>
+      </p:bgPr>
+    </p:bg>
     <p:spTree>
       <p:nvGrpSpPr>
         <p:cNvPr id="1" name=""/>
@@ -3707,38 +4323,96 @@
       <p:grpSpPr/>
       <p:sp>
         <p:nvSpPr>
-          <p:cNvPr id="2" name="Rectangle 1"/>
+          <p:cNvPr id="2" name="TextBox 1"/>
+          <p:cNvSpPr txBox="1"/>
+          <p:nvPr/>
+        </p:nvSpPr>
+        <p:spPr>
+          <a:xfrm>
+            <a:off x="731520" y="384048"/>
+            <a:ext cx="6400800" cy="274320"/>
+          </a:xfrm>
+          <a:prstGeom prst="rect">
+            <a:avLst/>
+          </a:prstGeom>
+          <a:noFill/>
+        </p:spPr>
+        <p:txBody>
+          <a:bodyPr wrap="none" lIns="0" tIns="0" rIns="0" bIns="0">
+            <a:spAutoFit/>
+          </a:bodyPr>
+          <a:lstStyle/>
+          <a:p>
+            <a:pPr>
+              <a:defRPr sz="950" b="1">
+                <a:solidFill>
+                  <a:srgbClr val="38BDF8"/>
+                </a:solidFill>
+                <a:latin typeface="Segoe UI"/>
+              </a:defRPr>
+            </a:pPr>
+            <a:r>
+              <a:t>02  /  PROBLEM, SOLUTION &amp; USER JOURNEY</a:t>
+            </a:r>
+          </a:p>
+        </p:txBody>
+      </p:sp>
+      <p:sp>
+        <p:nvSpPr>
+          <p:cNvPr id="3" name="TextBox 2"/>
+          <p:cNvSpPr txBox="1"/>
+          <p:nvPr/>
+        </p:nvSpPr>
+        <p:spPr>
+          <a:xfrm>
+            <a:off x="731520" y="658368"/>
+            <a:ext cx="10728655" cy="502920"/>
+          </a:xfrm>
+          <a:prstGeom prst="rect">
+            <a:avLst/>
+          </a:prstGeom>
+          <a:noFill/>
+        </p:spPr>
+        <p:txBody>
+          <a:bodyPr wrap="square" lIns="0" tIns="0" rIns="0" bIns="0">
+            <a:spAutoFit/>
+          </a:bodyPr>
+          <a:lstStyle/>
+          <a:p>
+            <a:pPr>
+              <a:defRPr sz="2200" b="1">
+                <a:solidFill>
+                  <a:srgbClr val="FFFFFF"/>
+                </a:solidFill>
+                <a:latin typeface="Segoe UI"/>
+              </a:defRPr>
+            </a:pPr>
+            <a:r>
+              <a:t>The Anatomy of a Saved Carton: From Sensor to Safe Shipment</a:t>
+            </a:r>
+          </a:p>
+        </p:txBody>
+      </p:sp>
+      <p:sp>
+        <p:nvSpPr>
+          <p:cNvPr id="4" name="Rectangle 3"/>
           <p:cNvSpPr/>
           <p:nvPr/>
         </p:nvSpPr>
         <p:spPr>
           <a:xfrm>
-            <a:off x="0" y="0"/>
-            <a:ext cx="12191695" cy="6858000"/>
-          </a:xfrm>
-          <a:prstGeom prst="rect">
-            <a:avLst/>
-          </a:prstGeom>
+            <a:off x="731520" y="1243584"/>
+            <a:ext cx="10728655" cy="13716"/>
+          </a:xfrm>
+          <a:prstGeom prst="rect">
+            <a:avLst/>
+          </a:prstGeom>
+          <a:solidFill>
+            <a:srgbClr val="1C3E66"/>
+          </a:solidFill>
           <a:ln>
             <a:noFill/>
           </a:ln>
-          <a:gradFill flip="none" rotWithShape="1">
-            <a:gsLst>
-              <a:gs pos="0">
-                <a:srgbClr val="08192E"/>
-              </a:gs>
-              <a:gs pos="42000">
-                <a:srgbClr val="12335E"/>
-              </a:gs>
-              <a:gs pos="78000">
-                <a:srgbClr val="1A4982"/>
-              </a:gs>
-              <a:gs pos="100000">
-                <a:srgbClr val="0A2140"/>
-              </a:gs>
-            </a:gsLst>
-            <a:lin ang="3240000" scaled="1"/>
-          </a:gradFill>
         </p:spPr>
         <p:style>
           <a:lnRef idx="1">
@@ -3764,24 +4438,24 @@
       </p:sp>
       <p:sp>
         <p:nvSpPr>
-          <p:cNvPr id="3" name="Rounded Rectangle 2"/>
+          <p:cNvPr id="5" name="Rectangle 4"/>
           <p:cNvSpPr/>
           <p:nvPr/>
         </p:nvSpPr>
         <p:spPr>
           <a:xfrm>
-            <a:off x="731520" y="365760"/>
-            <a:ext cx="2651760" cy="292608"/>
-          </a:xfrm>
-          <a:prstGeom prst="roundRect">
+            <a:off x="731520" y="1417320"/>
+            <a:ext cx="1444752" cy="932688"/>
+          </a:xfrm>
+          <a:prstGeom prst="rect">
             <a:avLst/>
           </a:prstGeom>
           <a:solidFill>
-            <a:srgbClr val="143058"/>
+            <a:srgbClr val="0A192E"/>
           </a:solidFill>
           <a:ln w="12700">
             <a:solidFill>
-              <a:srgbClr val="3872BA"/>
+              <a:srgbClr val="1C3E66"/>
             </a:solidFill>
           </a:ln>
         </p:spPr>
@@ -3800,33 +4474,23 @@
           </a:fontRef>
         </p:style>
         <p:txBody>
-          <a:bodyPr rtlCol="0" anchor="ctr" wrap="none"/>
-          <a:lstStyle/>
-          <a:p>
-            <a:pPr algn="ctr">
-              <a:defRPr sz="950" b="1">
-                <a:solidFill>
-                  <a:srgbClr val="93C5FD"/>
-                </a:solidFill>
-                <a:latin typeface="Segoe UI"/>
-              </a:defRPr>
-            </a:pPr>
-            <a:r>
-              <a:t>SLIDE 2: PROBLEM, SOLUTION &amp; USER JOURNEY</a:t>
-            </a:r>
-          </a:p>
-        </p:txBody>
-      </p:sp>
-      <p:sp>
-        <p:nvSpPr>
-          <p:cNvPr id="4" name="TextBox 3"/>
+          <a:bodyPr rtlCol="0" anchor="ctr"/>
+          <a:lstStyle/>
+          <a:p>
+            <a:pPr algn="ctr"/>
+          </a:p>
+        </p:txBody>
+      </p:sp>
+      <p:sp>
+        <p:nvSpPr>
+          <p:cNvPr id="6" name="TextBox 5"/>
           <p:cNvSpPr txBox="1"/>
           <p:nvPr/>
         </p:nvSpPr>
         <p:spPr>
           <a:xfrm>
-            <a:off x="731520" y="713232"/>
-            <a:ext cx="9601200" cy="502920"/>
+            <a:off x="804672" y="1490472"/>
+            <a:ext cx="1298448" cy="804672"/>
           </a:xfrm>
           <a:prstGeom prst="rect">
             <a:avLst/>
@@ -3840,7 +4504,7 @@
           <a:lstStyle/>
           <a:p>
             <a:pPr>
-              <a:defRPr sz="2100" b="1">
+              <a:defRPr sz="950" b="1">
                 <a:solidFill>
                   <a:srgbClr val="FFFFFF"/>
                 </a:solidFill>
@@ -3848,30 +4512,48 @@
               </a:defRPr>
             </a:pPr>
             <a:r>
-              <a:t>The Mystery of the Smashed Box (And How We Catch It)</a:t>
-            </a:r>
-          </a:p>
-        </p:txBody>
-      </p:sp>
-      <p:sp>
-        <p:nvSpPr>
-          <p:cNvPr id="5" name="Rectangle 4"/>
+              <a:t>01 • Bay Activity</a:t>
+            </a:r>
+          </a:p>
+          <a:p>
+            <a:pPr>
+              <a:spcBef>
+                <a:spcPts val="300"/>
+              </a:spcBef>
+              <a:defRPr sz="819">
+                <a:solidFill>
+                  <a:srgbClr val="E2E8F0"/>
+                </a:solidFill>
+                <a:latin typeface="Segoe UI"/>
+              </a:defRPr>
+            </a:pPr>
+            <a:r>
+              <a:t>Cartons loaded into 40ft trailer</a:t>
+            </a:r>
+          </a:p>
+        </p:txBody>
+      </p:sp>
+      <p:sp>
+        <p:nvSpPr>
+          <p:cNvPr id="7" name="Rectangle 6"/>
           <p:cNvSpPr/>
           <p:nvPr/>
         </p:nvSpPr>
         <p:spPr>
           <a:xfrm>
-            <a:off x="731520" y="1243584"/>
-            <a:ext cx="10728655" cy="18288"/>
+            <a:off x="2276856" y="1417320"/>
+            <a:ext cx="1444752" cy="932688"/>
           </a:xfrm>
           <a:prstGeom prst="rect">
             <a:avLst/>
           </a:prstGeom>
           <a:solidFill>
-            <a:srgbClr val="2D558C"/>
+            <a:srgbClr val="0A192E"/>
           </a:solidFill>
-          <a:ln>
-            <a:noFill/>
+          <a:ln w="12700">
+            <a:solidFill>
+              <a:srgbClr val="1C3E66"/>
+            </a:solidFill>
           </a:ln>
         </p:spPr>
         <p:style>
@@ -3898,24 +4580,76 @@
       </p:sp>
       <p:sp>
         <p:nvSpPr>
-          <p:cNvPr id="6" name="Rounded Rectangle 5"/>
+          <p:cNvPr id="8" name="TextBox 7"/>
+          <p:cNvSpPr txBox="1"/>
+          <p:nvPr/>
+        </p:nvSpPr>
+        <p:spPr>
+          <a:xfrm>
+            <a:off x="2350008" y="1490472"/>
+            <a:ext cx="1298448" cy="804672"/>
+          </a:xfrm>
+          <a:prstGeom prst="rect">
+            <a:avLst/>
+          </a:prstGeom>
+          <a:noFill/>
+        </p:spPr>
+        <p:txBody>
+          <a:bodyPr wrap="square" lIns="0" tIns="0" rIns="0" bIns="0">
+            <a:spAutoFit/>
+          </a:bodyPr>
+          <a:lstStyle/>
+          <a:p>
+            <a:pPr>
+              <a:defRPr sz="950" b="1">
+                <a:solidFill>
+                  <a:srgbClr val="FFFFFF"/>
+                </a:solidFill>
+                <a:latin typeface="Segoe UI"/>
+              </a:defRPr>
+            </a:pPr>
+            <a:r>
+              <a:t>02 • CCTV Stream</a:t>
+            </a:r>
+          </a:p>
+          <a:p>
+            <a:pPr>
+              <a:spcBef>
+                <a:spcPts val="300"/>
+              </a:spcBef>
+              <a:defRPr sz="819">
+                <a:solidFill>
+                  <a:srgbClr val="E2E8F0"/>
+                </a:solidFill>
+                <a:latin typeface="Segoe UI"/>
+              </a:defRPr>
+            </a:pPr>
+            <a:r>
+              <a:t>1080p camera captures bay frames</a:t>
+            </a:r>
+          </a:p>
+        </p:txBody>
+      </p:sp>
+      <p:sp>
+        <p:nvSpPr>
+          <p:cNvPr id="9" name="Rectangle 8"/>
           <p:cNvSpPr/>
           <p:nvPr/>
         </p:nvSpPr>
         <p:spPr>
           <a:xfrm>
-            <a:off x="731520" y="1371600"/>
-            <a:ext cx="1444752" cy="1005840"/>
-          </a:xfrm>
-          <a:prstGeom prst="roundRect">
+            <a:off x="3822192" y="1417320"/>
+            <a:ext cx="1444752" cy="932688"/>
+          </a:xfrm>
+          <a:prstGeom prst="rect">
             <a:avLst/>
           </a:prstGeom>
           <a:solidFill>
-            <a:srgbClr val="0E1E36"/>
+            <a:srgbClr val="0A192E"/>
           </a:solidFill>
           <a:ln w="12700">
             <a:solidFill>
-              <a:srgbClr val="284B78"/>
+              <a:srgbClr val="1C3E66"/>
             </a:solidFill>
           </a:ln>
         </p:spPr>
@@ -3943,14 +4677,14 @@
       </p:sp>
       <p:sp>
         <p:nvSpPr>
-          <p:cNvPr id="7" name="TextBox 6"/>
+          <p:cNvPr id="10" name="TextBox 9"/>
           <p:cNvSpPr txBox="1"/>
           <p:nvPr/>
         </p:nvSpPr>
         <p:spPr>
           <a:xfrm>
-            <a:off x="768096" y="1444752"/>
-            <a:ext cx="1371600" cy="868680"/>
+            <a:off x="3895344" y="1490472"/>
+            <a:ext cx="1298448" cy="804672"/>
           </a:xfrm>
           <a:prstGeom prst="rect">
             <a:avLst/>
@@ -3958,13 +4692,13 @@
           <a:noFill/>
         </p:spPr>
         <p:txBody>
-          <a:bodyPr wrap="square">
+          <a:bodyPr wrap="square" lIns="0" tIns="0" rIns="0" bIns="0">
             <a:spAutoFit/>
           </a:bodyPr>
           <a:lstStyle/>
           <a:p>
-            <a:pPr algn="ctr">
-              <a:defRPr sz="1000" b="1">
+            <a:pPr>
+              <a:defRPr sz="950" b="1">
                 <a:solidFill>
                   <a:srgbClr val="FFFFFF"/>
                 </a:solidFill>
@@ -3972,237 +4706,43 @@
               </a:defRPr>
             </a:pPr>
             <a:r>
-              <a:t>1. Loading Bay</a:t>
-            </a:r>
-          </a:p>
-          <a:p>
-            <a:pPr algn="ctr">
+              <a:t>03 • YOLOv8 Vision</a:t>
+            </a:r>
+          </a:p>
+          <a:p>
+            <a:pPr>
               <a:spcBef>
                 <a:spcPts val="300"/>
               </a:spcBef>
-              <a:defRPr sz="850">
-                <a:solidFill>
-                  <a:srgbClr val="CBD5E1"/>
-                </a:solidFill>
-                <a:latin typeface="Segoe UI"/>
-              </a:defRPr>
-            </a:pPr>
-            <a:r>
-              <a:t>Workers move cartons into trucks</a:t>
-            </a:r>
-          </a:p>
-        </p:txBody>
-      </p:sp>
-      <p:sp>
-        <p:nvSpPr>
-          <p:cNvPr id="8" name="Rounded Rectangle 7"/>
+              <a:defRPr sz="819">
+                <a:solidFill>
+                  <a:srgbClr val="E2E8F0"/>
+                </a:solidFill>
+                <a:latin typeface="Segoe UI"/>
+              </a:defRPr>
+            </a:pPr>
+            <a:r>
+              <a:t>Spatial tracking of boxes &amp; workers</a:t>
+            </a:r>
+          </a:p>
+        </p:txBody>
+      </p:sp>
+      <p:sp>
+        <p:nvSpPr>
+          <p:cNvPr id="11" name="Rectangle 10"/>
           <p:cNvSpPr/>
           <p:nvPr/>
         </p:nvSpPr>
         <p:spPr>
           <a:xfrm>
-            <a:off x="2276856" y="1371600"/>
-            <a:ext cx="1444752" cy="1005840"/>
-          </a:xfrm>
-          <a:prstGeom prst="roundRect">
+            <a:off x="5367528" y="1417320"/>
+            <a:ext cx="1444752" cy="932688"/>
+          </a:xfrm>
+          <a:prstGeom prst="rect">
             <a:avLst/>
           </a:prstGeom>
           <a:solidFill>
-            <a:srgbClr val="0E1E36"/>
-          </a:solidFill>
-          <a:ln w="12700">
-            <a:solidFill>
-              <a:srgbClr val="284B78"/>
-            </a:solidFill>
-          </a:ln>
-        </p:spPr>
-        <p:style>
-          <a:lnRef idx="1">
-            <a:schemeClr val="accent1"/>
-          </a:lnRef>
-          <a:fillRef idx="3">
-            <a:schemeClr val="accent1"/>
-          </a:fillRef>
-          <a:effectRef idx="2">
-            <a:schemeClr val="accent1"/>
-          </a:effectRef>
-          <a:fontRef idx="minor">
-            <a:schemeClr val="lt1"/>
-          </a:fontRef>
-        </p:style>
-        <p:txBody>
-          <a:bodyPr rtlCol="0" anchor="ctr"/>
-          <a:lstStyle/>
-          <a:p>
-            <a:pPr algn="ctr"/>
-          </a:p>
-        </p:txBody>
-      </p:sp>
-      <p:sp>
-        <p:nvSpPr>
-          <p:cNvPr id="9" name="TextBox 8"/>
-          <p:cNvSpPr txBox="1"/>
-          <p:nvPr/>
-        </p:nvSpPr>
-        <p:spPr>
-          <a:xfrm>
-            <a:off x="2313432" y="1444752"/>
-            <a:ext cx="1371600" cy="868680"/>
-          </a:xfrm>
-          <a:prstGeom prst="rect">
-            <a:avLst/>
-          </a:prstGeom>
-          <a:noFill/>
-        </p:spPr>
-        <p:txBody>
-          <a:bodyPr wrap="square">
-            <a:spAutoFit/>
-          </a:bodyPr>
-          <a:lstStyle/>
-          <a:p>
-            <a:pPr algn="ctr">
-              <a:defRPr sz="1000" b="1">
-                <a:solidFill>
-                  <a:srgbClr val="FFFFFF"/>
-                </a:solidFill>
-                <a:latin typeface="Segoe UI"/>
-              </a:defRPr>
-            </a:pPr>
-            <a:r>
-              <a:t>2. CCTV Camera</a:t>
-            </a:r>
-          </a:p>
-          <a:p>
-            <a:pPr algn="ctr">
-              <a:spcBef>
-                <a:spcPts val="300"/>
-              </a:spcBef>
-              <a:defRPr sz="850">
-                <a:solidFill>
-                  <a:srgbClr val="CBD5E1"/>
-                </a:solidFill>
-                <a:latin typeface="Segoe UI"/>
-              </a:defRPr>
-            </a:pPr>
-            <a:r>
-              <a:t>Standard security camera feed</a:t>
-            </a:r>
-          </a:p>
-        </p:txBody>
-      </p:sp>
-      <p:sp>
-        <p:nvSpPr>
-          <p:cNvPr id="10" name="Rounded Rectangle 9"/>
-          <p:cNvSpPr/>
-          <p:nvPr/>
-        </p:nvSpPr>
-        <p:spPr>
-          <a:xfrm>
-            <a:off x="3822192" y="1371600"/>
-            <a:ext cx="1444752" cy="1005840"/>
-          </a:xfrm>
-          <a:prstGeom prst="roundRect">
-            <a:avLst/>
-          </a:prstGeom>
-          <a:solidFill>
-            <a:srgbClr val="0E1E36"/>
-          </a:solidFill>
-          <a:ln w="12700">
-            <a:solidFill>
-              <a:srgbClr val="284B78"/>
-            </a:solidFill>
-          </a:ln>
-        </p:spPr>
-        <p:style>
-          <a:lnRef idx="1">
-            <a:schemeClr val="accent1"/>
-          </a:lnRef>
-          <a:fillRef idx="3">
-            <a:schemeClr val="accent1"/>
-          </a:fillRef>
-          <a:effectRef idx="2">
-            <a:schemeClr val="accent1"/>
-          </a:effectRef>
-          <a:fontRef idx="minor">
-            <a:schemeClr val="lt1"/>
-          </a:fontRef>
-        </p:style>
-        <p:txBody>
-          <a:bodyPr rtlCol="0" anchor="ctr"/>
-          <a:lstStyle/>
-          <a:p>
-            <a:pPr algn="ctr"/>
-          </a:p>
-        </p:txBody>
-      </p:sp>
-      <p:sp>
-        <p:nvSpPr>
-          <p:cNvPr id="11" name="TextBox 10"/>
-          <p:cNvSpPr txBox="1"/>
-          <p:nvPr/>
-        </p:nvSpPr>
-        <p:spPr>
-          <a:xfrm>
-            <a:off x="3858768" y="1444752"/>
-            <a:ext cx="1371600" cy="868680"/>
-          </a:xfrm>
-          <a:prstGeom prst="rect">
-            <a:avLst/>
-          </a:prstGeom>
-          <a:noFill/>
-        </p:spPr>
-        <p:txBody>
-          <a:bodyPr wrap="square">
-            <a:spAutoFit/>
-          </a:bodyPr>
-          <a:lstStyle/>
-          <a:p>
-            <a:pPr algn="ctr">
-              <a:defRPr sz="1000" b="1">
-                <a:solidFill>
-                  <a:srgbClr val="FFFFFF"/>
-                </a:solidFill>
-                <a:latin typeface="Segoe UI"/>
-              </a:defRPr>
-            </a:pPr>
-            <a:r>
-              <a:t>3. AI Eyes</a:t>
-            </a:r>
-          </a:p>
-          <a:p>
-            <a:pPr algn="ctr">
-              <a:spcBef>
-                <a:spcPts val="300"/>
-              </a:spcBef>
-              <a:defRPr sz="850">
-                <a:solidFill>
-                  <a:srgbClr val="CBD5E1"/>
-                </a:solidFill>
-                <a:latin typeface="Segoe UI"/>
-              </a:defRPr>
-            </a:pPr>
-            <a:r>
-              <a:t>YOLOv8 tracks every box &amp; person</a:t>
-            </a:r>
-          </a:p>
-        </p:txBody>
-      </p:sp>
-      <p:sp>
-        <p:nvSpPr>
-          <p:cNvPr id="12" name="Rounded Rectangle 11"/>
-          <p:cNvSpPr/>
-          <p:nvPr/>
-        </p:nvSpPr>
-        <p:spPr>
-          <a:xfrm>
-            <a:off x="5367528" y="1371600"/>
-            <a:ext cx="1444752" cy="1005840"/>
-          </a:xfrm>
-          <a:prstGeom prst="roundRect">
-            <a:avLst/>
-          </a:prstGeom>
-          <a:solidFill>
-            <a:srgbClr val="1E4173"/>
+            <a:srgbClr val="102C52"/>
           </a:solidFill>
           <a:ln w="19050">
             <a:solidFill>
@@ -4234,14 +4774,57 @@
       </p:sp>
       <p:sp>
         <p:nvSpPr>
+          <p:cNvPr id="12" name="Rectangle 11"/>
+          <p:cNvSpPr/>
+          <p:nvPr/>
+        </p:nvSpPr>
+        <p:spPr>
+          <a:xfrm>
+            <a:off x="5367528" y="1417320"/>
+            <a:ext cx="1444752" cy="27432"/>
+          </a:xfrm>
+          <a:prstGeom prst="rect">
+            <a:avLst/>
+          </a:prstGeom>
+          <a:solidFill>
+            <a:srgbClr val="38BDF8"/>
+          </a:solidFill>
+          <a:ln>
+            <a:noFill/>
+          </a:ln>
+        </p:spPr>
+        <p:style>
+          <a:lnRef idx="1">
+            <a:schemeClr val="accent1"/>
+          </a:lnRef>
+          <a:fillRef idx="3">
+            <a:schemeClr val="accent1"/>
+          </a:fillRef>
+          <a:effectRef idx="2">
+            <a:schemeClr val="accent1"/>
+          </a:effectRef>
+          <a:fontRef idx="minor">
+            <a:schemeClr val="lt1"/>
+          </a:fontRef>
+        </p:style>
+        <p:txBody>
+          <a:bodyPr rtlCol="0" anchor="ctr"/>
+          <a:lstStyle/>
+          <a:p>
+            <a:pPr algn="ctr"/>
+          </a:p>
+        </p:txBody>
+      </p:sp>
+      <p:sp>
+        <p:nvSpPr>
           <p:cNvPr id="13" name="TextBox 12"/>
           <p:cNvSpPr txBox="1"/>
           <p:nvPr/>
         </p:nvSpPr>
         <p:spPr>
           <a:xfrm>
-            <a:off x="5404104" y="1444752"/>
-            <a:ext cx="1371600" cy="868680"/>
+            <a:off x="5440680" y="1490472"/>
+            <a:ext cx="1298448" cy="804672"/>
           </a:xfrm>
           <a:prstGeom prst="rect">
             <a:avLst/>
@@ -4249,57 +4832,57 @@
           <a:noFill/>
         </p:spPr>
         <p:txBody>
-          <a:bodyPr wrap="square">
+          <a:bodyPr wrap="square" lIns="0" tIns="0" rIns="0" bIns="0">
             <a:spAutoFit/>
           </a:bodyPr>
           <a:lstStyle/>
           <a:p>
-            <a:pPr algn="ctr">
-              <a:defRPr sz="1000" b="1">
-                <a:solidFill>
-                  <a:srgbClr val="7DD3FC"/>
-                </a:solidFill>
-                <a:latin typeface="Segoe UI"/>
-              </a:defRPr>
-            </a:pPr>
-            <a:r>
-              <a:t>4. Danger!</a:t>
-            </a:r>
-          </a:p>
-          <a:p>
-            <a:pPr algn="ctr">
+            <a:pPr>
+              <a:defRPr sz="950" b="1">
+                <a:solidFill>
+                  <a:srgbClr val="38BDF8"/>
+                </a:solidFill>
+                <a:latin typeface="Segoe UI"/>
+              </a:defRPr>
+            </a:pPr>
+            <a:r>
+              <a:t>04 • Risk Detector</a:t>
+            </a:r>
+          </a:p>
+          <a:p>
+            <a:pPr>
               <a:spcBef>
                 <a:spcPts val="300"/>
               </a:spcBef>
-              <a:defRPr sz="850">
-                <a:solidFill>
-                  <a:srgbClr val="CBD5E1"/>
-                </a:solidFill>
-                <a:latin typeface="Segoe UI"/>
-              </a:defRPr>
-            </a:pPr>
-            <a:r>
-              <a:t>Speed spike or ground drag flagged</a:t>
-            </a:r>
-          </a:p>
-        </p:txBody>
-      </p:sp>
-      <p:sp>
-        <p:nvSpPr>
-          <p:cNvPr id="14" name="Rounded Rectangle 13"/>
+              <a:defRPr sz="819">
+                <a:solidFill>
+                  <a:srgbClr val="E2E8F0"/>
+                </a:solidFill>
+                <a:latin typeface="Segoe UI"/>
+              </a:defRPr>
+            </a:pPr>
+            <a:r>
+              <a:t>Free-fall acceleration or drag flag</a:t>
+            </a:r>
+          </a:p>
+        </p:txBody>
+      </p:sp>
+      <p:sp>
+        <p:nvSpPr>
+          <p:cNvPr id="14" name="Rectangle 13"/>
           <p:cNvSpPr/>
           <p:nvPr/>
         </p:nvSpPr>
         <p:spPr>
           <a:xfrm>
-            <a:off x="6912864" y="1371600"/>
-            <a:ext cx="1444752" cy="1005840"/>
-          </a:xfrm>
-          <a:prstGeom prst="roundRect">
+            <a:off x="6912864" y="1417320"/>
+            <a:ext cx="1444752" cy="932688"/>
+          </a:xfrm>
+          <a:prstGeom prst="rect">
             <a:avLst/>
           </a:prstGeom>
           <a:solidFill>
-            <a:srgbClr val="1E4173"/>
+            <a:srgbClr val="102C52"/>
           </a:solidFill>
           <a:ln w="19050">
             <a:solidFill>
@@ -4331,77 +4914,23 @@
       </p:sp>
       <p:sp>
         <p:nvSpPr>
-          <p:cNvPr id="15" name="TextBox 14"/>
-          <p:cNvSpPr txBox="1"/>
-          <p:nvPr/>
-        </p:nvSpPr>
-        <p:spPr>
-          <a:xfrm>
-            <a:off x="6949440" y="1444752"/>
-            <a:ext cx="1371600" cy="868680"/>
-          </a:xfrm>
-          <a:prstGeom prst="rect">
-            <a:avLst/>
-          </a:prstGeom>
-          <a:noFill/>
-        </p:spPr>
-        <p:txBody>
-          <a:bodyPr wrap="square">
-            <a:spAutoFit/>
-          </a:bodyPr>
-          <a:lstStyle/>
-          <a:p>
-            <a:pPr algn="ctr">
-              <a:defRPr sz="1000" b="1">
-                <a:solidFill>
-                  <a:srgbClr val="7DD3FC"/>
-                </a:solidFill>
-                <a:latin typeface="Segoe UI"/>
-              </a:defRPr>
-            </a:pPr>
-            <a:r>
-              <a:t>5. Friendly Chime</a:t>
-            </a:r>
-          </a:p>
-          <a:p>
-            <a:pPr algn="ctr">
-              <a:spcBef>
-                <a:spcPts val="300"/>
-              </a:spcBef>
-              <a:defRPr sz="850">
-                <a:solidFill>
-                  <a:srgbClr val="CBD5E1"/>
-                </a:solidFill>
-                <a:latin typeface="Segoe UI"/>
-              </a:defRPr>
-            </a:pPr>
-            <a:r>
-              <a:t>Polite sound alert at the dock</a:t>
-            </a:r>
-          </a:p>
-        </p:txBody>
-      </p:sp>
-      <p:sp>
-        <p:nvSpPr>
-          <p:cNvPr id="16" name="Rounded Rectangle 15"/>
+          <p:cNvPr id="15" name="Rectangle 14"/>
           <p:cNvSpPr/>
           <p:nvPr/>
         </p:nvSpPr>
         <p:spPr>
           <a:xfrm>
-            <a:off x="8458200" y="1371600"/>
-            <a:ext cx="1444752" cy="1005840"/>
-          </a:xfrm>
-          <a:prstGeom prst="roundRect">
+            <a:off x="6912864" y="1417320"/>
+            <a:ext cx="1444752" cy="27432"/>
+          </a:xfrm>
+          <a:prstGeom prst="rect">
             <a:avLst/>
           </a:prstGeom>
           <a:solidFill>
-            <a:srgbClr val="0E1E36"/>
+            <a:srgbClr val="38BDF8"/>
           </a:solidFill>
-          <a:ln w="12700">
-            <a:solidFill>
-              <a:srgbClr val="284B78"/>
-            </a:solidFill>
+          <a:ln>
+            <a:noFill/>
           </a:ln>
         </p:spPr>
         <p:style>
@@ -4428,14 +4957,14 @@
       </p:sp>
       <p:sp>
         <p:nvSpPr>
-          <p:cNvPr id="17" name="TextBox 16"/>
+          <p:cNvPr id="16" name="TextBox 15"/>
           <p:cNvSpPr txBox="1"/>
           <p:nvPr/>
         </p:nvSpPr>
         <p:spPr>
           <a:xfrm>
-            <a:off x="8494776" y="1444752"/>
-            <a:ext cx="1371600" cy="868680"/>
+            <a:off x="6986016" y="1490472"/>
+            <a:ext cx="1298448" cy="804672"/>
           </a:xfrm>
           <a:prstGeom prst="rect">
             <a:avLst/>
@@ -4443,57 +4972,154 @@
           <a:noFill/>
         </p:spPr>
         <p:txBody>
-          <a:bodyPr wrap="square">
+          <a:bodyPr wrap="square" lIns="0" tIns="0" rIns="0" bIns="0">
             <a:spAutoFit/>
           </a:bodyPr>
           <a:lstStyle/>
           <a:p>
-            <a:pPr algn="ctr">
-              <a:defRPr sz="1000" b="1">
-                <a:solidFill>
-                  <a:srgbClr val="FFFFFF"/>
-                </a:solidFill>
-                <a:latin typeface="Segoe UI"/>
-              </a:defRPr>
-            </a:pPr>
-            <a:r>
-              <a:t>6. Quick Check</a:t>
-            </a:r>
-          </a:p>
-          <a:p>
-            <a:pPr algn="ctr">
+            <a:pPr>
+              <a:defRPr sz="950" b="1">
+                <a:solidFill>
+                  <a:srgbClr val="38BDF8"/>
+                </a:solidFill>
+                <a:latin typeface="Segoe UI"/>
+              </a:defRPr>
+            </a:pPr>
+            <a:r>
+              <a:t>05 • Dock Chime</a:t>
+            </a:r>
+          </a:p>
+          <a:p>
+            <a:pPr>
               <a:spcBef>
                 <a:spcPts val="300"/>
               </a:spcBef>
-              <a:defRPr sz="850">
-                <a:solidFill>
-                  <a:srgbClr val="CBD5E1"/>
-                </a:solidFill>
-                <a:latin typeface="Segoe UI"/>
-              </a:defRPr>
-            </a:pPr>
-            <a:r>
-              <a:t>Worker inspects &amp; resets load</a:t>
-            </a:r>
-          </a:p>
-        </p:txBody>
-      </p:sp>
-      <p:sp>
-        <p:nvSpPr>
-          <p:cNvPr id="18" name="Rounded Rectangle 17"/>
+              <a:defRPr sz="819">
+                <a:solidFill>
+                  <a:srgbClr val="E2E8F0"/>
+                </a:solidFill>
+                <a:latin typeface="Segoe UI"/>
+              </a:defRPr>
+            </a:pPr>
+            <a:r>
+              <a:t>Subtle audible ping at Bay 3</a:t>
+            </a:r>
+          </a:p>
+        </p:txBody>
+      </p:sp>
+      <p:sp>
+        <p:nvSpPr>
+          <p:cNvPr id="17" name="Rectangle 16"/>
           <p:cNvSpPr/>
           <p:nvPr/>
         </p:nvSpPr>
         <p:spPr>
           <a:xfrm>
-            <a:off x="10003536" y="1371600"/>
-            <a:ext cx="1444752" cy="1005840"/>
-          </a:xfrm>
-          <a:prstGeom prst="roundRect">
+            <a:off x="8458200" y="1417320"/>
+            <a:ext cx="1444752" cy="932688"/>
+          </a:xfrm>
+          <a:prstGeom prst="rect">
             <a:avLst/>
           </a:prstGeom>
           <a:solidFill>
-            <a:srgbClr val="1E4173"/>
+            <a:srgbClr val="0A192E"/>
+          </a:solidFill>
+          <a:ln w="12700">
+            <a:solidFill>
+              <a:srgbClr val="1C3E66"/>
+            </a:solidFill>
+          </a:ln>
+        </p:spPr>
+        <p:style>
+          <a:lnRef idx="1">
+            <a:schemeClr val="accent1"/>
+          </a:lnRef>
+          <a:fillRef idx="3">
+            <a:schemeClr val="accent1"/>
+          </a:fillRef>
+          <a:effectRef idx="2">
+            <a:schemeClr val="accent1"/>
+          </a:effectRef>
+          <a:fontRef idx="minor">
+            <a:schemeClr val="lt1"/>
+          </a:fontRef>
+        </p:style>
+        <p:txBody>
+          <a:bodyPr rtlCol="0" anchor="ctr"/>
+          <a:lstStyle/>
+          <a:p>
+            <a:pPr algn="ctr"/>
+          </a:p>
+        </p:txBody>
+      </p:sp>
+      <p:sp>
+        <p:nvSpPr>
+          <p:cNvPr id="18" name="TextBox 17"/>
+          <p:cNvSpPr txBox="1"/>
+          <p:nvPr/>
+        </p:nvSpPr>
+        <p:spPr>
+          <a:xfrm>
+            <a:off x="8531352" y="1490472"/>
+            <a:ext cx="1298448" cy="804672"/>
+          </a:xfrm>
+          <a:prstGeom prst="rect">
+            <a:avLst/>
+          </a:prstGeom>
+          <a:noFill/>
+        </p:spPr>
+        <p:txBody>
+          <a:bodyPr wrap="square" lIns="0" tIns="0" rIns="0" bIns="0">
+            <a:spAutoFit/>
+          </a:bodyPr>
+          <a:lstStyle/>
+          <a:p>
+            <a:pPr>
+              <a:defRPr sz="950" b="1">
+                <a:solidFill>
+                  <a:srgbClr val="FFFFFF"/>
+                </a:solidFill>
+                <a:latin typeface="Segoe UI"/>
+              </a:defRPr>
+            </a:pPr>
+            <a:r>
+              <a:t>06 • Inspection</a:t>
+            </a:r>
+          </a:p>
+          <a:p>
+            <a:pPr>
+              <a:spcBef>
+                <a:spcPts val="300"/>
+              </a:spcBef>
+              <a:defRPr sz="819">
+                <a:solidFill>
+                  <a:srgbClr val="E2E8F0"/>
+                </a:solidFill>
+                <a:latin typeface="Segoe UI"/>
+              </a:defRPr>
+            </a:pPr>
+            <a:r>
+              <a:t>Worker checks tape &amp; sets aside</a:t>
+            </a:r>
+          </a:p>
+        </p:txBody>
+      </p:sp>
+      <p:sp>
+        <p:nvSpPr>
+          <p:cNvPr id="19" name="Rectangle 18"/>
+          <p:cNvSpPr/>
+          <p:nvPr/>
+        </p:nvSpPr>
+        <p:spPr>
+          <a:xfrm>
+            <a:off x="10003536" y="1417320"/>
+            <a:ext cx="1444752" cy="932688"/>
+          </a:xfrm>
+          <a:prstGeom prst="rect">
+            <a:avLst/>
+          </a:prstGeom>
+          <a:solidFill>
+            <a:srgbClr val="102C52"/>
           </a:solidFill>
           <a:ln w="19050">
             <a:solidFill>
@@ -4525,111 +5151,14 @@
       </p:sp>
       <p:sp>
         <p:nvSpPr>
-          <p:cNvPr id="19" name="TextBox 18"/>
-          <p:cNvSpPr txBox="1"/>
-          <p:nvPr/>
-        </p:nvSpPr>
-        <p:spPr>
-          <a:xfrm>
-            <a:off x="10040112" y="1444752"/>
-            <a:ext cx="1371600" cy="868680"/>
-          </a:xfrm>
-          <a:prstGeom prst="rect">
-            <a:avLst/>
-          </a:prstGeom>
-          <a:noFill/>
-        </p:spPr>
-        <p:txBody>
-          <a:bodyPr wrap="square">
-            <a:spAutoFit/>
-          </a:bodyPr>
-          <a:lstStyle/>
-          <a:p>
-            <a:pPr algn="ctr">
-              <a:defRPr sz="1000" b="1">
-                <a:solidFill>
-                  <a:srgbClr val="7DD3FC"/>
-                </a:solidFill>
-                <a:latin typeface="Segoe UI"/>
-              </a:defRPr>
-            </a:pPr>
-            <a:r>
-              <a:t>7. Zero Damage</a:t>
-            </a:r>
-          </a:p>
-          <a:p>
-            <a:pPr algn="ctr">
-              <a:spcBef>
-                <a:spcPts val="300"/>
-              </a:spcBef>
-              <a:defRPr sz="850">
-                <a:solidFill>
-                  <a:srgbClr val="CBD5E1"/>
-                </a:solidFill>
-                <a:latin typeface="Segoe UI"/>
-              </a:defRPr>
-            </a:pPr>
-            <a:r>
-              <a:t>Shipment leaves 100% intact</a:t>
-            </a:r>
-          </a:p>
-        </p:txBody>
-      </p:sp>
-      <p:sp>
-        <p:nvSpPr>
-          <p:cNvPr id="20" name="Rounded Rectangle 19"/>
+          <p:cNvPr id="20" name="Rectangle 19"/>
           <p:cNvSpPr/>
           <p:nvPr/>
         </p:nvSpPr>
         <p:spPr>
           <a:xfrm>
-            <a:off x="731520" y="2606040"/>
-            <a:ext cx="5212080" cy="3840480"/>
-          </a:xfrm>
-          <a:prstGeom prst="roundRect">
-            <a:avLst/>
-          </a:prstGeom>
-          <a:solidFill>
-            <a:srgbClr val="0E1E36"/>
-          </a:solidFill>
-          <a:ln>
-            <a:solidFill>
-              <a:srgbClr val="284B78"/>
-            </a:solidFill>
-          </a:ln>
-        </p:spPr>
-        <p:style>
-          <a:lnRef idx="1">
-            <a:schemeClr val="accent1"/>
-          </a:lnRef>
-          <a:fillRef idx="3">
-            <a:schemeClr val="accent1"/>
-          </a:fillRef>
-          <a:effectRef idx="2">
-            <a:schemeClr val="accent1"/>
-          </a:effectRef>
-          <a:fontRef idx="minor">
-            <a:schemeClr val="lt1"/>
-          </a:fontRef>
-        </p:style>
-        <p:txBody>
-          <a:bodyPr rtlCol="0" anchor="ctr"/>
-          <a:lstStyle/>
-          <a:p>
-            <a:pPr algn="ctr"/>
-          </a:p>
-        </p:txBody>
-      </p:sp>
-      <p:sp>
-        <p:nvSpPr>
-          <p:cNvPr id="21" name="Rectangle 20"/>
-          <p:cNvSpPr/>
-          <p:nvPr/>
-        </p:nvSpPr>
-        <p:spPr>
-          <a:xfrm>
-            <a:off x="731520" y="2606040"/>
-            <a:ext cx="5212080" cy="45720"/>
+            <a:off x="10003536" y="1417320"/>
+            <a:ext cx="1444752" cy="27432"/>
           </a:xfrm>
           <a:prstGeom prst="rect">
             <a:avLst/>
@@ -4665,14 +5194,14 @@
       </p:sp>
       <p:sp>
         <p:nvSpPr>
-          <p:cNvPr id="22" name="TextBox 21"/>
+          <p:cNvPr id="21" name="TextBox 20"/>
           <p:cNvSpPr txBox="1"/>
           <p:nvPr/>
         </p:nvSpPr>
         <p:spPr>
           <a:xfrm>
-            <a:off x="960120" y="2770632"/>
-            <a:ext cx="4754880" cy="3566160"/>
+            <a:off x="10076688" y="1490472"/>
+            <a:ext cx="1298448" cy="804672"/>
           </a:xfrm>
           <a:prstGeom prst="rect">
             <a:avLst/>
@@ -4680,165 +5209,61 @@
           <a:noFill/>
         </p:spPr>
         <p:txBody>
-          <a:bodyPr wrap="square">
+          <a:bodyPr wrap="square" lIns="0" tIns="0" rIns="0" bIns="0">
             <a:spAutoFit/>
           </a:bodyPr>
           <a:lstStyle/>
           <a:p>
             <a:pPr>
-              <a:defRPr sz="1100" b="1">
-                <a:solidFill>
-                  <a:srgbClr val="7DD3FC"/>
-                </a:solidFill>
-                <a:latin typeface="Segoe UI"/>
-              </a:defRPr>
-            </a:pPr>
-            <a:r>
-              <a:t>THE LOADER'S STORY: Ramesh at Loading Bay 3</a:t>
+              <a:defRPr sz="950" b="1">
+                <a:solidFill>
+                  <a:srgbClr val="38BDF8"/>
+                </a:solidFill>
+                <a:latin typeface="Segoe UI"/>
+              </a:defRPr>
+            </a:pPr>
+            <a:r>
+              <a:t>07 • Zero Defect</a:t>
             </a:r>
           </a:p>
           <a:p>
             <a:pPr>
               <a:spcBef>
-                <a:spcPts val="600"/>
+                <a:spcPts val="300"/>
               </a:spcBef>
-              <a:defRPr sz="950" b="1">
-                <a:solidFill>
-                  <a:srgbClr val="FFFFFF"/>
-                </a:solidFill>
-                <a:latin typeface="Segoe UI"/>
-              </a:defRPr>
-            </a:pPr>
-            <a:r>
-              <a:t>• The Rush: </a:t>
-            </a:r>
-            <a:r>
-              <a:rPr b="0">
-                <a:solidFill>
-                  <a:srgbClr val="CBD5E1"/>
-                </a:solidFill>
-              </a:rPr>
-              <a:t>It's 4:15 PM, 34°C, and Ramesh has 45 minutes to finish packing a 40-foot trailer.</a:t>
-            </a:r>
-          </a:p>
-          <a:p>
-            <a:pPr>
-              <a:spcBef>
-                <a:spcPts val="600"/>
-              </a:spcBef>
-              <a:defRPr sz="950" b="1">
-                <a:solidFill>
-                  <a:srgbClr val="FFFFFF"/>
-                </a:solidFill>
-                <a:latin typeface="Segoe UI"/>
-              </a:defRPr>
-            </a:pPr>
-            <a:r>
-              <a:t>• The Slip: </a:t>
-            </a:r>
-            <a:r>
-              <a:rPr b="0">
-                <a:solidFill>
-                  <a:srgbClr val="CBD5E1"/>
-                </a:solidFill>
-              </a:rPr>
-              <a:t>He tries lifting a 25kg crate without a partner. His grip slips, and the box crashes 1.2 meters to the concrete.</a:t>
-            </a:r>
-          </a:p>
-          <a:p>
-            <a:pPr>
-              <a:spcBef>
-                <a:spcPts val="600"/>
-              </a:spcBef>
-              <a:defRPr sz="950" b="1">
-                <a:solidFill>
-                  <a:srgbClr val="FFFFFF"/>
-                </a:solidFill>
-                <a:latin typeface="Segoe UI"/>
-              </a:defRPr>
-            </a:pPr>
-            <a:r>
-              <a:t>• No Panic Siren: </a:t>
-            </a:r>
-            <a:r>
-              <a:rPr b="0">
-                <a:solidFill>
-                  <a:srgbClr val="CBD5E1"/>
-                </a:solidFill>
-              </a:rPr>
-              <a:t>Instead of an ear-piercing fire alarm that makes everyone freeze, a friendly, microwave-style *ding* chimes at Bay 3, and his dock screen flashes yellow.</a:t>
-            </a:r>
-          </a:p>
-          <a:p>
-            <a:pPr>
-              <a:spcBef>
-                <a:spcPts val="600"/>
-              </a:spcBef>
-              <a:defRPr sz="950" b="1">
-                <a:solidFill>
-                  <a:srgbClr val="FFFFFF"/>
-                </a:solidFill>
-                <a:latin typeface="Segoe UI"/>
-              </a:defRPr>
-            </a:pPr>
-            <a:r>
-              <a:t>• What He Does: </a:t>
-            </a:r>
-            <a:r>
-              <a:rPr b="0">
-                <a:solidFill>
-                  <a:srgbClr val="CBD5E1"/>
-                </a:solidFill>
-              </a:rPr>
-              <a:t>Instead of sheepishly hiding the box in the back of the truck, Ramesh stops, inspects the tape, calls his teammate for a 2-person lift, and sets the item aside.</a:t>
-            </a:r>
-          </a:p>
-          <a:p>
-            <a:pPr>
-              <a:spcBef>
-                <a:spcPts val="600"/>
-              </a:spcBef>
-              <a:defRPr sz="950" b="1">
-                <a:solidFill>
-                  <a:srgbClr val="FFFFFF"/>
-                </a:solidFill>
-                <a:latin typeface="Segoe UI"/>
-              </a:defRPr>
-            </a:pPr>
-            <a:r>
-              <a:t>• The Win: </a:t>
-            </a:r>
-            <a:r>
-              <a:rPr b="0">
-                <a:solidFill>
-                  <a:srgbClr val="CBD5E1"/>
-                </a:solidFill>
-              </a:rPr>
-              <a:t>No broken microwave sent to a customer, and Ramesh learns to ask for a hand with heavy loads.</a:t>
-            </a:r>
-          </a:p>
-        </p:txBody>
-      </p:sp>
-      <p:sp>
-        <p:nvSpPr>
-          <p:cNvPr id="23" name="Rounded Rectangle 22"/>
+              <a:defRPr sz="819">
+                <a:solidFill>
+                  <a:srgbClr val="E2E8F0"/>
+                </a:solidFill>
+                <a:latin typeface="Segoe UI"/>
+              </a:defRPr>
+            </a:pPr>
+            <a:r>
+              <a:t>Shipment leaves 100% verified</a:t>
+            </a:r>
+          </a:p>
+        </p:txBody>
+      </p:sp>
+      <p:sp>
+        <p:nvSpPr>
+          <p:cNvPr id="22" name="Rectangle 21"/>
           <p:cNvSpPr/>
           <p:nvPr/>
         </p:nvSpPr>
         <p:spPr>
           <a:xfrm>
-            <a:off x="6248095" y="2606040"/>
-            <a:ext cx="5212080" cy="3840480"/>
-          </a:xfrm>
-          <a:prstGeom prst="roundRect">
+            <a:off x="731520" y="2542032"/>
+            <a:ext cx="5212080" cy="3794760"/>
+          </a:xfrm>
+          <a:prstGeom prst="rect">
             <a:avLst/>
           </a:prstGeom>
           <a:solidFill>
-            <a:srgbClr val="0E1E36"/>
+            <a:srgbClr val="0A192E"/>
           </a:solidFill>
-          <a:ln>
+          <a:ln w="12700">
             <a:solidFill>
-              <a:srgbClr val="284B78"/>
+              <a:srgbClr val="1C3E66"/>
             </a:solidFill>
           </a:ln>
         </p:spPr>
@@ -4866,20 +5291,20 @@
       </p:sp>
       <p:sp>
         <p:nvSpPr>
-          <p:cNvPr id="24" name="Rectangle 23"/>
+          <p:cNvPr id="23" name="Rectangle 22"/>
           <p:cNvSpPr/>
           <p:nvPr/>
         </p:nvSpPr>
         <p:spPr>
           <a:xfrm>
-            <a:off x="6248095" y="2606040"/>
-            <a:ext cx="5212080" cy="45720"/>
+            <a:off x="731520" y="2542032"/>
+            <a:ext cx="5212080" cy="27432"/>
           </a:xfrm>
           <a:prstGeom prst="rect">
             <a:avLst/>
           </a:prstGeom>
           <a:solidFill>
-            <a:srgbClr val="C084FC"/>
+            <a:srgbClr val="38BDF8"/>
           </a:solidFill>
           <a:ln>
             <a:noFill/>
@@ -4909,14 +5334,14 @@
       </p:sp>
       <p:sp>
         <p:nvSpPr>
-          <p:cNvPr id="25" name="TextBox 24"/>
+          <p:cNvPr id="24" name="TextBox 23"/>
           <p:cNvSpPr txBox="1"/>
           <p:nvPr/>
         </p:nvSpPr>
         <p:spPr>
           <a:xfrm>
-            <a:off x="6473952" y="2770632"/>
-            <a:ext cx="4754880" cy="3566160"/>
+            <a:off x="960120" y="2706624"/>
+            <a:ext cx="4754880" cy="3474720"/>
           </a:xfrm>
           <a:prstGeom prst="rect">
             <a:avLst/>
@@ -4924,7 +5349,7 @@
           <a:noFill/>
         </p:spPr>
         <p:txBody>
-          <a:bodyPr wrap="square">
+          <a:bodyPr wrap="square" lIns="0" tIns="0" rIns="0" bIns="0">
             <a:spAutoFit/>
           </a:bodyPr>
           <a:lstStyle/>
@@ -4932,13 +5357,29 @@
             <a:pPr>
               <a:defRPr sz="1100" b="1">
                 <a:solidFill>
-                  <a:srgbClr val="C084FC"/>
-                </a:solidFill>
-                <a:latin typeface="Segoe UI"/>
-              </a:defRPr>
-            </a:pPr>
-            <a:r>
-              <a:t>THE SUPERVISOR'S STORY: Pooja with her iPad</a:t>
+                  <a:srgbClr val="38BDF8"/>
+                </a:solidFill>
+                <a:latin typeface="Segoe UI"/>
+              </a:defRPr>
+            </a:pPr>
+            <a:r>
+              <a:t>OPERATOR JOURNEY: RAMESH AT BAY 3</a:t>
+            </a:r>
+          </a:p>
+          <a:p>
+            <a:pPr>
+              <a:spcBef>
+                <a:spcPts val="200"/>
+              </a:spcBef>
+              <a:defRPr sz="900">
+                <a:solidFill>
+                  <a:srgbClr val="94A3B8"/>
+                </a:solidFill>
+                <a:latin typeface="Segoe UI"/>
+              </a:defRPr>
+            </a:pPr>
+            <a:r>
+              <a:t>How DockGuard supports rather than polices dockworkers under pressure.</a:t>
             </a:r>
           </a:p>
           <a:p>
@@ -4954,7 +5395,7 @@
               </a:defRPr>
             </a:pPr>
             <a:r>
-              <a:t>• The Daily Nightmare: </a:t>
+              <a:t>• The Rush Window: </a:t>
             </a:r>
             <a:r>
               <a:rPr b="0">
@@ -4962,7 +5403,7 @@
                   <a:srgbClr val="CBD5E1"/>
                 </a:solidFill>
               </a:rPr>
-              <a:t>Pooja used to spend 45 minutes every evening fast-forwarding through blurry CCTV tapes trying to figure out who dropped a customer's TV.</a:t>
+              <a:t>It's 4:15 PM, 34°C, and Ramesh has 45 minutes to finish packing a 40-foot container before driver cutoff.</a:t>
             </a:r>
           </a:p>
           <a:p>
@@ -4978,7 +5419,7 @@
               </a:defRPr>
             </a:pPr>
             <a:r>
-              <a:t>• Instant Notification: </a:t>
+              <a:t>• The Accidental Drop: </a:t>
             </a:r>
             <a:r>
               <a:rPr b="0">
@@ -4986,7 +5427,7 @@
                   <a:srgbClr val="CBD5E1"/>
                 </a:solidFill>
               </a:rPr>
-              <a:t>Her tablet buzzes: 'Bay 3: High-Velocity Drop Flagged (10:14 AM)'.</a:t>
+              <a:t>Lifting a heavy 25kg crate solo, his grip slips. The carton crashes 1.2 meters directly onto the concrete floor.</a:t>
             </a:r>
           </a:p>
           <a:p>
@@ -5002,7 +5443,7 @@
               </a:defRPr>
             </a:pPr>
             <a:r>
-              <a:t>• TikTok-Length Replay: </a:t>
+              <a:t>• Non-Punitive Chime: </a:t>
             </a:r>
             <a:r>
               <a:rPr b="0">
@@ -5010,7 +5451,7 @@
                   <a:srgbClr val="CBD5E1"/>
                 </a:solidFill>
               </a:rPr>
-              <a:t>She taps it and immediately watches a 5-second replay showing the carton falling, complete with bounding box tracking and impact velocity.</a:t>
+              <a:t>Instead of a harsh alarm that triggers fear or panic, a polite, microwave-style chime pings at Bay 3 as the dock tablet pulses amber.</a:t>
             </a:r>
           </a:p>
           <a:p>
@@ -5026,7 +5467,7 @@
               </a:defRPr>
             </a:pPr>
             <a:r>
-              <a:t>• Quick Resolution: </a:t>
+              <a:t>• Immediate Correction: </a:t>
             </a:r>
             <a:r>
               <a:rPr b="0">
@@ -5034,7 +5475,7 @@
                   <a:srgbClr val="CBD5E1"/>
                 </a:solidFill>
               </a:rPr>
-              <a:t>She signs off on a packaging replacement in 10 seconds flat—no shouting matches, no guessing.</a:t>
+              <a:t>Ramesh pauses, inspects the seal, requests assistance for a 2-person lift, and places the suspect carton on the audit cart.</a:t>
             </a:r>
           </a:p>
           <a:p>
@@ -5050,7 +5491,7 @@
               </a:defRPr>
             </a:pPr>
             <a:r>
-              <a:t>• Asking the AI: </a:t>
+              <a:t>• The Outcome: </a:t>
             </a:r>
             <a:r>
               <a:rPr b="0">
@@ -5058,7 +5499,346 @@
                   <a:srgbClr val="CBD5E1"/>
                 </a:solidFill>
               </a:rPr>
-              <a:t>At the end of the week, she asks the Gemini chat: 'Which shift has the most drops?' and instantly gets an answer for Monday's safety huddle.</a:t>
+              <a:t>A broken high-value appliance never reaches the consumer, and Ramesh avoids back injury on subsequent lifts.</a:t>
+            </a:r>
+          </a:p>
+        </p:txBody>
+      </p:sp>
+      <p:sp>
+        <p:nvSpPr>
+          <p:cNvPr id="25" name="Rectangle 24"/>
+          <p:cNvSpPr/>
+          <p:nvPr/>
+        </p:nvSpPr>
+        <p:spPr>
+          <a:xfrm>
+            <a:off x="6248095" y="2542032"/>
+            <a:ext cx="5212080" cy="3794760"/>
+          </a:xfrm>
+          <a:prstGeom prst="rect">
+            <a:avLst/>
+          </a:prstGeom>
+          <a:solidFill>
+            <a:srgbClr val="0A192E"/>
+          </a:solidFill>
+          <a:ln w="12700">
+            <a:solidFill>
+              <a:srgbClr val="1C3E66"/>
+            </a:solidFill>
+          </a:ln>
+        </p:spPr>
+        <p:style>
+          <a:lnRef idx="1">
+            <a:schemeClr val="accent1"/>
+          </a:lnRef>
+          <a:fillRef idx="3">
+            <a:schemeClr val="accent1"/>
+          </a:fillRef>
+          <a:effectRef idx="2">
+            <a:schemeClr val="accent1"/>
+          </a:effectRef>
+          <a:fontRef idx="minor">
+            <a:schemeClr val="lt1"/>
+          </a:fontRef>
+        </p:style>
+        <p:txBody>
+          <a:bodyPr rtlCol="0" anchor="ctr"/>
+          <a:lstStyle/>
+          <a:p>
+            <a:pPr algn="ctr"/>
+          </a:p>
+        </p:txBody>
+      </p:sp>
+      <p:sp>
+        <p:nvSpPr>
+          <p:cNvPr id="26" name="Rectangle 25"/>
+          <p:cNvSpPr/>
+          <p:nvPr/>
+        </p:nvSpPr>
+        <p:spPr>
+          <a:xfrm>
+            <a:off x="6248095" y="2542032"/>
+            <a:ext cx="5212080" cy="27432"/>
+          </a:xfrm>
+          <a:prstGeom prst="rect">
+            <a:avLst/>
+          </a:prstGeom>
+          <a:solidFill>
+            <a:srgbClr val="7DD3FC"/>
+          </a:solidFill>
+          <a:ln>
+            <a:noFill/>
+          </a:ln>
+        </p:spPr>
+        <p:style>
+          <a:lnRef idx="1">
+            <a:schemeClr val="accent1"/>
+          </a:lnRef>
+          <a:fillRef idx="3">
+            <a:schemeClr val="accent1"/>
+          </a:fillRef>
+          <a:effectRef idx="2">
+            <a:schemeClr val="accent1"/>
+          </a:effectRef>
+          <a:fontRef idx="minor">
+            <a:schemeClr val="lt1"/>
+          </a:fontRef>
+        </p:style>
+        <p:txBody>
+          <a:bodyPr rtlCol="0" anchor="ctr"/>
+          <a:lstStyle/>
+          <a:p>
+            <a:pPr algn="ctr"/>
+          </a:p>
+        </p:txBody>
+      </p:sp>
+      <p:sp>
+        <p:nvSpPr>
+          <p:cNvPr id="27" name="TextBox 26"/>
+          <p:cNvSpPr txBox="1"/>
+          <p:nvPr/>
+        </p:nvSpPr>
+        <p:spPr>
+          <a:xfrm>
+            <a:off x="6473952" y="2706624"/>
+            <a:ext cx="4754880" cy="3474720"/>
+          </a:xfrm>
+          <a:prstGeom prst="rect">
+            <a:avLst/>
+          </a:prstGeom>
+          <a:noFill/>
+        </p:spPr>
+        <p:txBody>
+          <a:bodyPr wrap="square" lIns="0" tIns="0" rIns="0" bIns="0">
+            <a:spAutoFit/>
+          </a:bodyPr>
+          <a:lstStyle/>
+          <a:p>
+            <a:pPr>
+              <a:defRPr sz="1100" b="1">
+                <a:solidFill>
+                  <a:srgbClr val="7DD3FC"/>
+                </a:solidFill>
+                <a:latin typeface="Segoe UI"/>
+              </a:defRPr>
+            </a:pPr>
+            <a:r>
+              <a:t>SUPERVISOR JOURNEY: POOJA WITH HER TABLET</a:t>
+            </a:r>
+          </a:p>
+          <a:p>
+            <a:pPr>
+              <a:spcBef>
+                <a:spcPts val="200"/>
+              </a:spcBef>
+              <a:defRPr sz="900">
+                <a:solidFill>
+                  <a:srgbClr val="94A3B8"/>
+                </a:solidFill>
+                <a:latin typeface="Segoe UI"/>
+              </a:defRPr>
+            </a:pPr>
+            <a:r>
+              <a:t>Replacing 45 minutes of manual video scrubbing with instant actionable proof.</a:t>
+            </a:r>
+          </a:p>
+          <a:p>
+            <a:pPr>
+              <a:spcBef>
+                <a:spcPts val="600"/>
+              </a:spcBef>
+              <a:defRPr sz="950" b="1">
+                <a:solidFill>
+                  <a:srgbClr val="FFFFFF"/>
+                </a:solidFill>
+                <a:latin typeface="Segoe UI"/>
+              </a:defRPr>
+            </a:pPr>
+            <a:r>
+              <a:t>• The Daily Grind: </a:t>
+            </a:r>
+            <a:r>
+              <a:rPr b="0">
+                <a:solidFill>
+                  <a:srgbClr val="CBD5E1"/>
+                </a:solidFill>
+              </a:rPr>
+              <a:t>Pooja previously wasted 45 minutes every evening scrubbing grainy DVR tapes trying to verify freight claims.</a:t>
+            </a:r>
+          </a:p>
+          <a:p>
+            <a:pPr>
+              <a:spcBef>
+                <a:spcPts val="600"/>
+              </a:spcBef>
+              <a:defRPr sz="950" b="1">
+                <a:solidFill>
+                  <a:srgbClr val="FFFFFF"/>
+                </a:solidFill>
+                <a:latin typeface="Segoe UI"/>
+              </a:defRPr>
+            </a:pPr>
+            <a:r>
+              <a:t>• Real-Time Dispatch: </a:t>
+            </a:r>
+            <a:r>
+              <a:rPr b="0">
+                <a:solidFill>
+                  <a:srgbClr val="CBD5E1"/>
+                </a:solidFill>
+              </a:rPr>
+              <a:t>Her tablet buzzes instantly: 'Bay 3: High-Velocity Drop Detected (10:14 AM)' with classified severity.</a:t>
+            </a:r>
+          </a:p>
+          <a:p>
+            <a:pPr>
+              <a:spcBef>
+                <a:spcPts val="600"/>
+              </a:spcBef>
+              <a:defRPr sz="950" b="1">
+                <a:solidFill>
+                  <a:srgbClr val="FFFFFF"/>
+                </a:solidFill>
+                <a:latin typeface="Segoe UI"/>
+              </a:defRPr>
+            </a:pPr>
+            <a:r>
+              <a:t>• 5-Second Micro Replay: </a:t>
+            </a:r>
+            <a:r>
+              <a:rPr b="0">
+                <a:solidFill>
+                  <a:srgbClr val="CBD5E1"/>
+                </a:solidFill>
+              </a:rPr>
+              <a:t>One tap launches a lightweight 5-second video clip displaying the carton trajectory, bounding box, and impact velocity.</a:t>
+            </a:r>
+          </a:p>
+          <a:p>
+            <a:pPr>
+              <a:spcBef>
+                <a:spcPts val="600"/>
+              </a:spcBef>
+              <a:defRPr sz="950" b="1">
+                <a:solidFill>
+                  <a:srgbClr val="FFFFFF"/>
+                </a:solidFill>
+                <a:latin typeface="Segoe UI"/>
+              </a:defRPr>
+            </a:pPr>
+            <a:r>
+              <a:t>• Decisive Sign-Off: </a:t>
+            </a:r>
+            <a:r>
+              <a:rPr b="0">
+                <a:solidFill>
+                  <a:srgbClr val="CBD5E1"/>
+                </a:solidFill>
+              </a:rPr>
+              <a:t>She verifies the incident, authorizes repackaging in 15 seconds, and logs the package barcode without friction.</a:t>
+            </a:r>
+          </a:p>
+          <a:p>
+            <a:pPr>
+              <a:spcBef>
+                <a:spcPts val="600"/>
+              </a:spcBef>
+              <a:defRPr sz="950" b="1">
+                <a:solidFill>
+                  <a:srgbClr val="FFFFFF"/>
+                </a:solidFill>
+                <a:latin typeface="Segoe UI"/>
+              </a:defRPr>
+            </a:pPr>
+            <a:r>
+              <a:t>• Natural Language Audit: </a:t>
+            </a:r>
+            <a:r>
+              <a:rPr b="0">
+                <a:solidFill>
+                  <a:srgbClr val="CBD5E1"/>
+                </a:solidFill>
+              </a:rPr>
+              <a:t>At shift handover, she asks Gemini: 'Summarize all high-velocity drops today' and receives an instant breakdown for the safety briefing.</a:t>
+            </a:r>
+          </a:p>
+        </p:txBody>
+      </p:sp>
+      <p:sp>
+        <p:nvSpPr>
+          <p:cNvPr id="28" name="Rectangle 27"/>
+          <p:cNvSpPr/>
+          <p:nvPr/>
+        </p:nvSpPr>
+        <p:spPr>
+          <a:xfrm>
+            <a:off x="731520" y="6492240"/>
+            <a:ext cx="10728655" cy="13716"/>
+          </a:xfrm>
+          <a:prstGeom prst="rect">
+            <a:avLst/>
+          </a:prstGeom>
+          <a:solidFill>
+            <a:srgbClr val="1C3E66"/>
+          </a:solidFill>
+          <a:ln>
+            <a:noFill/>
+          </a:ln>
+        </p:spPr>
+        <p:style>
+          <a:lnRef idx="1">
+            <a:schemeClr val="accent1"/>
+          </a:lnRef>
+          <a:fillRef idx="3">
+            <a:schemeClr val="accent1"/>
+          </a:fillRef>
+          <a:effectRef idx="2">
+            <a:schemeClr val="accent1"/>
+          </a:effectRef>
+          <a:fontRef idx="minor">
+            <a:schemeClr val="lt1"/>
+          </a:fontRef>
+        </p:style>
+        <p:txBody>
+          <a:bodyPr rtlCol="0" anchor="ctr"/>
+          <a:lstStyle/>
+          <a:p>
+            <a:pPr algn="ctr"/>
+          </a:p>
+        </p:txBody>
+      </p:sp>
+      <p:sp>
+        <p:nvSpPr>
+          <p:cNvPr id="29" name="TextBox 28"/>
+          <p:cNvSpPr txBox="1"/>
+          <p:nvPr/>
+        </p:nvSpPr>
+        <p:spPr>
+          <a:xfrm>
+            <a:off x="731520" y="6537960"/>
+            <a:ext cx="10728655" cy="228600"/>
+          </a:xfrm>
+          <a:prstGeom prst="rect">
+            <a:avLst/>
+          </a:prstGeom>
+          <a:noFill/>
+        </p:spPr>
+        <p:txBody>
+          <a:bodyPr wrap="none" lIns="0" tIns="0" rIns="0" bIns="0">
+            <a:spAutoFit/>
+          </a:bodyPr>
+          <a:lstStyle/>
+          <a:p>
+            <a:pPr>
+              <a:defRPr sz="850">
+                <a:solidFill>
+                  <a:srgbClr val="94A3B8"/>
+                </a:solidFill>
+                <a:latin typeface="Segoe UI"/>
+              </a:defRPr>
+            </a:pPr>
+            <a:r>
+              <a:t>DockGuard AI  •  Dual User Journey &amp; 7-Stage Prevention Flow  •  Slide 2 of 6</a:t>
             </a:r>
           </a:p>
         </p:txBody>
@@ -5074,6 +5854,28 @@
 <file path=ppt/slides/slide3.xml><?xml version="1.0" encoding="utf-8"?>
 <p:sld xmlns:a="http://schemas.openxmlformats.org/drawingml/2006/main" xmlns:p="http://schemas.openxmlformats.org/presentationml/2006/main" xmlns:r="http://schemas.openxmlformats.org/officeDocument/2006/relationships">
   <p:cSld>
+    <p:bg>
+      <p:bgPr>
+        <a:gradFill flip="none" rotWithShape="1">
+          <a:gsLst>
+            <a:gs pos="0">
+              <a:srgbClr val="060F1E"/>
+            </a:gs>
+            <a:gs pos="38000">
+              <a:srgbClr val="0A213D"/>
+            </a:gs>
+            <a:gs pos="75000">
+              <a:srgbClr val="113665"/>
+            </a:gs>
+            <a:gs pos="100000">
+              <a:srgbClr val="07182E"/>
+            </a:gs>
+          </a:gsLst>
+          <a:lin ang="3240000" scaled="1"/>
+        </a:gradFill>
+        <a:effectLst/>
+      </p:bgPr>
+    </p:bg>
     <p:spTree>
       <p:nvGrpSpPr>
         <p:cNvPr id="1" name=""/>
@@ -5083,38 +5885,132 @@
       <p:grpSpPr/>
       <p:sp>
         <p:nvSpPr>
-          <p:cNvPr id="2" name="Rectangle 1"/>
+          <p:cNvPr id="2" name="TextBox 1"/>
+          <p:cNvSpPr txBox="1"/>
+          <p:nvPr/>
+        </p:nvSpPr>
+        <p:spPr>
+          <a:xfrm>
+            <a:off x="731520" y="384048"/>
+            <a:ext cx="6400800" cy="274320"/>
+          </a:xfrm>
+          <a:prstGeom prst="rect">
+            <a:avLst/>
+          </a:prstGeom>
+          <a:noFill/>
+        </p:spPr>
+        <p:txBody>
+          <a:bodyPr wrap="none" lIns="0" tIns="0" rIns="0" bIns="0">
+            <a:spAutoFit/>
+          </a:bodyPr>
+          <a:lstStyle/>
+          <a:p>
+            <a:pPr>
+              <a:defRPr sz="950" b="1">
+                <a:solidFill>
+                  <a:srgbClr val="38BDF8"/>
+                </a:solidFill>
+                <a:latin typeface="Segoe UI"/>
+              </a:defRPr>
+            </a:pPr>
+            <a:r>
+              <a:t>03  /  TECHNICAL ARCHITECTURE &amp; STACK</a:t>
+            </a:r>
+          </a:p>
+        </p:txBody>
+      </p:sp>
+      <p:sp>
+        <p:nvSpPr>
+          <p:cNvPr id="3" name="TextBox 2"/>
+          <p:cNvSpPr txBox="1"/>
+          <p:nvPr/>
+        </p:nvSpPr>
+        <p:spPr>
+          <a:xfrm>
+            <a:off x="7132320" y="384048"/>
+            <a:ext cx="4327855" cy="274320"/>
+          </a:xfrm>
+          <a:prstGeom prst="rect">
+            <a:avLst/>
+          </a:prstGeom>
+          <a:noFill/>
+        </p:spPr>
+        <p:txBody>
+          <a:bodyPr wrap="none" lIns="0" tIns="0" rIns="0" bIns="0">
+            <a:spAutoFit/>
+          </a:bodyPr>
+          <a:lstStyle/>
+          <a:p>
+            <a:pPr algn="r">
+              <a:defRPr sz="850" b="1">
+                <a:solidFill>
+                  <a:srgbClr val="94A3B8"/>
+                </a:solidFill>
+                <a:latin typeface="Segoe UI"/>
+              </a:defRPr>
+            </a:pPr>
+            <a:r>
+              <a:t>CONFIDENTIAL — ACADEMIC &amp; PROTOTYPE PROJECT</a:t>
+            </a:r>
+          </a:p>
+        </p:txBody>
+      </p:sp>
+      <p:sp>
+        <p:nvSpPr>
+          <p:cNvPr id="4" name="TextBox 3"/>
+          <p:cNvSpPr txBox="1"/>
+          <p:nvPr/>
+        </p:nvSpPr>
+        <p:spPr>
+          <a:xfrm>
+            <a:off x="731520" y="658368"/>
+            <a:ext cx="10728655" cy="502920"/>
+          </a:xfrm>
+          <a:prstGeom prst="rect">
+            <a:avLst/>
+          </a:prstGeom>
+          <a:noFill/>
+        </p:spPr>
+        <p:txBody>
+          <a:bodyPr wrap="square" lIns="0" tIns="0" rIns="0" bIns="0">
+            <a:spAutoFit/>
+          </a:bodyPr>
+          <a:lstStyle/>
+          <a:p>
+            <a:pPr>
+              <a:defRPr sz="2200" b="1">
+                <a:solidFill>
+                  <a:srgbClr val="FFFFFF"/>
+                </a:solidFill>
+                <a:latin typeface="Segoe UI"/>
+              </a:defRPr>
+            </a:pPr>
+            <a:r>
+              <a:t>Full-Stack Architecture: Computer Vision, Spatial Physics &amp; LLM RAG</a:t>
+            </a:r>
+          </a:p>
+        </p:txBody>
+      </p:sp>
+      <p:sp>
+        <p:nvSpPr>
+          <p:cNvPr id="5" name="Rectangle 4"/>
           <p:cNvSpPr/>
           <p:nvPr/>
         </p:nvSpPr>
         <p:spPr>
           <a:xfrm>
-            <a:off x="0" y="0"/>
-            <a:ext cx="12191695" cy="6858000"/>
-          </a:xfrm>
-          <a:prstGeom prst="rect">
-            <a:avLst/>
-          </a:prstGeom>
+            <a:off x="731520" y="1243584"/>
+            <a:ext cx="10728655" cy="13716"/>
+          </a:xfrm>
+          <a:prstGeom prst="rect">
+            <a:avLst/>
+          </a:prstGeom>
+          <a:solidFill>
+            <a:srgbClr val="1C3E66"/>
+          </a:solidFill>
           <a:ln>
             <a:noFill/>
           </a:ln>
-          <a:gradFill flip="none" rotWithShape="1">
-            <a:gsLst>
-              <a:gs pos="0">
-                <a:srgbClr val="08192E"/>
-              </a:gs>
-              <a:gs pos="42000">
-                <a:srgbClr val="12335E"/>
-              </a:gs>
-              <a:gs pos="78000">
-                <a:srgbClr val="1A4982"/>
-              </a:gs>
-              <a:gs pos="100000">
-                <a:srgbClr val="0A2140"/>
-              </a:gs>
-            </a:gsLst>
-            <a:lin ang="3240000" scaled="1"/>
-          </a:gradFill>
         </p:spPr>
         <p:style>
           <a:lnRef idx="1">
@@ -5140,24 +6036,60 @@
       </p:sp>
       <p:sp>
         <p:nvSpPr>
-          <p:cNvPr id="3" name="Rounded Rectangle 2"/>
+          <p:cNvPr id="6" name="TextBox 5"/>
+          <p:cNvSpPr txBox="1"/>
+          <p:nvPr/>
+        </p:nvSpPr>
+        <p:spPr>
+          <a:xfrm>
+            <a:off x="731520" y="1298448"/>
+            <a:ext cx="10728655" cy="274320"/>
+          </a:xfrm>
+          <a:prstGeom prst="rect">
+            <a:avLst/>
+          </a:prstGeom>
+          <a:noFill/>
+        </p:spPr>
+        <p:txBody>
+          <a:bodyPr wrap="none" lIns="0" tIns="0" rIns="0" bIns="0">
+            <a:spAutoFit/>
+          </a:bodyPr>
+          <a:lstStyle/>
+          <a:p>
+            <a:pPr>
+              <a:defRPr sz="1000">
+                <a:solidFill>
+                  <a:srgbClr val="38BDF8"/>
+                </a:solidFill>
+                <a:latin typeface="Segoe UI"/>
+              </a:defRPr>
+            </a:pPr>
+            <a:r>
+              <a:t>End-to-end edge-to-cloud intelligence pipeline combining computer vision, kinematic rules, and conversational RAG.</a:t>
+            </a:r>
+          </a:p>
+        </p:txBody>
+      </p:sp>
+      <p:sp>
+        <p:nvSpPr>
+          <p:cNvPr id="7" name="Rectangle 6"/>
           <p:cNvSpPr/>
           <p:nvPr/>
         </p:nvSpPr>
         <p:spPr>
           <a:xfrm>
-            <a:off x="731520" y="365760"/>
-            <a:ext cx="2651760" cy="292608"/>
-          </a:xfrm>
-          <a:prstGeom prst="roundRect">
+            <a:off x="731520" y="1645920"/>
+            <a:ext cx="3410712" cy="2240280"/>
+          </a:xfrm>
+          <a:prstGeom prst="rect">
             <a:avLst/>
           </a:prstGeom>
           <a:solidFill>
-            <a:srgbClr val="143058"/>
+            <a:srgbClr val="0A192E"/>
           </a:solidFill>
           <a:ln w="12700">
             <a:solidFill>
-              <a:srgbClr val="3872BA"/>
+              <a:srgbClr val="1C3E66"/>
             </a:solidFill>
           </a:ln>
         </p:spPr>
@@ -5176,176 +6108,6 @@
           </a:fontRef>
         </p:style>
         <p:txBody>
-          <a:bodyPr rtlCol="0" anchor="ctr" wrap="none"/>
-          <a:lstStyle/>
-          <a:p>
-            <a:pPr algn="ctr">
-              <a:defRPr sz="950" b="1">
-                <a:solidFill>
-                  <a:srgbClr val="93C5FD"/>
-                </a:solidFill>
-                <a:latin typeface="Segoe UI"/>
-              </a:defRPr>
-            </a:pPr>
-            <a:r>
-              <a:t>SLIDE 3: TECHNICAL ARCHITECTURE &amp; TECH STACK</a:t>
-            </a:r>
-          </a:p>
-        </p:txBody>
-      </p:sp>
-      <p:sp>
-        <p:nvSpPr>
-          <p:cNvPr id="4" name="TextBox 3"/>
-          <p:cNvSpPr txBox="1"/>
-          <p:nvPr/>
-        </p:nvSpPr>
-        <p:spPr>
-          <a:xfrm>
-            <a:off x="731520" y="713232"/>
-            <a:ext cx="9601200" cy="502920"/>
-          </a:xfrm>
-          <a:prstGeom prst="rect">
-            <a:avLst/>
-          </a:prstGeom>
-          <a:noFill/>
-        </p:spPr>
-        <p:txBody>
-          <a:bodyPr wrap="square" lIns="0" tIns="0" rIns="0" bIns="0">
-            <a:spAutoFit/>
-          </a:bodyPr>
-          <a:lstStyle/>
-          <a:p>
-            <a:pPr>
-              <a:defRPr sz="2100" b="1">
-                <a:solidFill>
-                  <a:srgbClr val="FFFFFF"/>
-                </a:solidFill>
-                <a:latin typeface="Segoe UI"/>
-              </a:defRPr>
-            </a:pPr>
-            <a:r>
-              <a:t>Under the Hood: How We Taught Cameras to Care About Boxes</a:t>
-            </a:r>
-          </a:p>
-        </p:txBody>
-      </p:sp>
-      <p:sp>
-        <p:nvSpPr>
-          <p:cNvPr id="5" name="TextBox 4"/>
-          <p:cNvSpPr txBox="1"/>
-          <p:nvPr/>
-        </p:nvSpPr>
-        <p:spPr>
-          <a:xfrm>
-            <a:off x="9601200" y="365760"/>
-            <a:ext cx="1828800" cy="274320"/>
-          </a:xfrm>
-          <a:prstGeom prst="rect">
-            <a:avLst/>
-          </a:prstGeom>
-          <a:noFill/>
-        </p:spPr>
-        <p:txBody>
-          <a:bodyPr wrap="none">
-            <a:spAutoFit/>
-          </a:bodyPr>
-          <a:lstStyle/>
-          <a:p>
-            <a:pPr algn="r">
-              <a:defRPr sz="850" b="1">
-                <a:solidFill>
-                  <a:srgbClr val="FB7185"/>
-                </a:solidFill>
-                <a:latin typeface="Segoe UI"/>
-              </a:defRPr>
-            </a:pPr>
-            <a:r>
-              <a:t>Confidential - Hackathon Project</a:t>
-            </a:r>
-          </a:p>
-        </p:txBody>
-      </p:sp>
-      <p:sp>
-        <p:nvSpPr>
-          <p:cNvPr id="6" name="Rectangle 5"/>
-          <p:cNvSpPr/>
-          <p:nvPr/>
-        </p:nvSpPr>
-        <p:spPr>
-          <a:xfrm>
-            <a:off x="731520" y="1243584"/>
-            <a:ext cx="10728655" cy="18288"/>
-          </a:xfrm>
-          <a:prstGeom prst="rect">
-            <a:avLst/>
-          </a:prstGeom>
-          <a:solidFill>
-            <a:srgbClr val="2D558C"/>
-          </a:solidFill>
-          <a:ln>
-            <a:noFill/>
-          </a:ln>
-        </p:spPr>
-        <p:style>
-          <a:lnRef idx="1">
-            <a:schemeClr val="accent1"/>
-          </a:lnRef>
-          <a:fillRef idx="3">
-            <a:schemeClr val="accent1"/>
-          </a:fillRef>
-          <a:effectRef idx="2">
-            <a:schemeClr val="accent1"/>
-          </a:effectRef>
-          <a:fontRef idx="minor">
-            <a:schemeClr val="lt1"/>
-          </a:fontRef>
-        </p:style>
-        <p:txBody>
-          <a:bodyPr rtlCol="0" anchor="ctr"/>
-          <a:lstStyle/>
-          <a:p>
-            <a:pPr algn="ctr"/>
-          </a:p>
-        </p:txBody>
-      </p:sp>
-      <p:sp>
-        <p:nvSpPr>
-          <p:cNvPr id="7" name="Rounded Rectangle 6"/>
-          <p:cNvSpPr/>
-          <p:nvPr/>
-        </p:nvSpPr>
-        <p:spPr>
-          <a:xfrm>
-            <a:off x="731520" y="1417320"/>
-            <a:ext cx="3410712" cy="2423160"/>
-          </a:xfrm>
-          <a:prstGeom prst="roundRect">
-            <a:avLst/>
-          </a:prstGeom>
-          <a:solidFill>
-            <a:srgbClr val="0E1E36"/>
-          </a:solidFill>
-          <a:ln>
-            <a:solidFill>
-              <a:srgbClr val="284B78"/>
-            </a:solidFill>
-          </a:ln>
-        </p:spPr>
-        <p:style>
-          <a:lnRef idx="1">
-            <a:schemeClr val="accent1"/>
-          </a:lnRef>
-          <a:fillRef idx="3">
-            <a:schemeClr val="accent1"/>
-          </a:fillRef>
-          <a:effectRef idx="2">
-            <a:schemeClr val="accent1"/>
-          </a:effectRef>
-          <a:fontRef idx="minor">
-            <a:schemeClr val="lt1"/>
-          </a:fontRef>
-        </p:style>
-        <p:txBody>
           <a:bodyPr rtlCol="0" anchor="ctr"/>
           <a:lstStyle/>
           <a:p>
@@ -5361,8 +6123,8 @@
         </p:nvSpPr>
         <p:spPr>
           <a:xfrm>
-            <a:off x="731520" y="1417320"/>
-            <a:ext cx="3410712" cy="45720"/>
+            <a:off x="731520" y="1645920"/>
+            <a:ext cx="3410712" cy="22860"/>
           </a:xfrm>
           <a:prstGeom prst="rect">
             <a:avLst/>
@@ -5404,8 +6166,8 @@
         </p:nvSpPr>
         <p:spPr>
           <a:xfrm>
-            <a:off x="914400" y="1527048"/>
-            <a:ext cx="3044952" cy="2194560"/>
+            <a:off x="896112" y="1755648"/>
+            <a:ext cx="3081528" cy="2057400"/>
           </a:xfrm>
           <a:prstGeom prst="rect">
             <a:avLst/>
@@ -5413,29 +6175,45 @@
           <a:noFill/>
         </p:spPr>
         <p:txBody>
-          <a:bodyPr wrap="square">
+          <a:bodyPr wrap="square" lIns="0" tIns="0" rIns="0" bIns="0">
             <a:spAutoFit/>
           </a:bodyPr>
           <a:lstStyle/>
           <a:p>
             <a:pPr>
-              <a:defRPr sz="1100" b="1">
-                <a:solidFill>
-                  <a:srgbClr val="7DD3FC"/>
-                </a:solidFill>
-                <a:latin typeface="Segoe UI"/>
-              </a:defRPr>
-            </a:pPr>
-            <a:r>
-              <a:t>1. Computer Vision (YOLOv8 + ByteTrack)</a:t>
+              <a:defRPr sz="1000" b="1">
+                <a:solidFill>
+                  <a:srgbClr val="FFFFFF"/>
+                </a:solidFill>
+                <a:latin typeface="Segoe UI"/>
+              </a:defRPr>
+            </a:pPr>
+            <a:r>
+              <a:t>01 • Computer Vision &amp; Object Tracking</a:t>
             </a:r>
           </a:p>
           <a:p>
             <a:pPr>
               <a:spcBef>
-                <a:spcPts val="500"/>
+                <a:spcPts val="100"/>
               </a:spcBef>
-              <a:defRPr sz="950" b="1">
+              <a:defRPr sz="850" b="1">
+                <a:solidFill>
+                  <a:srgbClr val="38BDF8"/>
+                </a:solidFill>
+                <a:latin typeface="Segoe UI"/>
+              </a:defRPr>
+            </a:pPr>
+            <a:r>
+              <a:t>YOLOv8 + ByteTrack (Ultralytics)</a:t>
+            </a:r>
+          </a:p>
+          <a:p>
+            <a:pPr>
+              <a:spcBef>
+                <a:spcPts val="400"/>
+              </a:spcBef>
+              <a:defRPr sz="850" b="1">
                 <a:solidFill>
                   <a:srgbClr val="FFFFFF"/>
                 </a:solidFill>
@@ -5443,7 +6221,7 @@
               </a:defRPr>
             </a:pPr>
             <a:r>
-              <a:t>• The Model: </a:t>
+              <a:t>• Custom Weight Fine-Tuning: </a:t>
             </a:r>
             <a:r>
               <a:rPr b="0">
@@ -5451,15 +6229,15 @@
                   <a:srgbClr val="CBD5E1"/>
                 </a:solidFill>
               </a:rPr>
-              <a:t>Ultralytics YOLOv8 fine-tuned on warehouse objects.</a:t>
+              <a:t>Trained specifically on warehouse cartons, wooden pallets, personnel, and forklifts.</a:t>
             </a:r>
           </a:p>
           <a:p>
             <a:pPr>
               <a:spcBef>
-                <a:spcPts val="500"/>
+                <a:spcPts val="400"/>
               </a:spcBef>
-              <a:defRPr sz="950" b="1">
+              <a:defRPr sz="850" b="1">
                 <a:solidFill>
                   <a:srgbClr val="FFFFFF"/>
                 </a:solidFill>
@@ -5467,7 +6245,7 @@
               </a:defRPr>
             </a:pPr>
             <a:r>
-              <a:t>• What it sees: </a:t>
+              <a:t>• Persistent Identity Tracking: </a:t>
             </a:r>
             <a:r>
               <a:rPr b="0">
@@ -5475,55 +6253,31 @@
                   <a:srgbClr val="CBD5E1"/>
                 </a:solidFill>
               </a:rPr>
-              <a:t>Workers, cardboard cartons, wooden pallets, and forklifts.</a:t>
-            </a:r>
-          </a:p>
-          <a:p>
-            <a:pPr>
-              <a:spcBef>
-                <a:spcPts val="500"/>
-              </a:spcBef>
-              <a:defRPr sz="950" b="1">
-                <a:solidFill>
-                  <a:srgbClr val="FFFFFF"/>
-                </a:solidFill>
-                <a:latin typeface="Segoe UI"/>
-              </a:defRPr>
-            </a:pPr>
-            <a:r>
-              <a:t>• The ByteTrack Trick: </a:t>
-            </a:r>
-            <a:r>
-              <a:rPr b="0">
-                <a:solidFill>
-                  <a:srgbClr val="CBD5E1"/>
-                </a:solidFill>
-              </a:rPr>
-              <a:t>Keeps track of 'Box #4' even when a worker walks in front of it so the ID doesn't get lost.</a:t>
-            </a:r>
-          </a:p>
-        </p:txBody>
-      </p:sp>
-      <p:sp>
-        <p:nvSpPr>
-          <p:cNvPr id="10" name="Rounded Rectangle 9"/>
+              <a:t>ByteTrack maintains box IDs across frames even during temporary worker occlusion.</a:t>
+            </a:r>
+          </a:p>
+        </p:txBody>
+      </p:sp>
+      <p:sp>
+        <p:nvSpPr>
+          <p:cNvPr id="10" name="Rectangle 9"/>
           <p:cNvSpPr/>
           <p:nvPr/>
         </p:nvSpPr>
         <p:spPr>
           <a:xfrm>
-            <a:off x="4389120" y="1417320"/>
-            <a:ext cx="3410712" cy="2423160"/>
-          </a:xfrm>
-          <a:prstGeom prst="roundRect">
+            <a:off x="4389120" y="1645920"/>
+            <a:ext cx="3410712" cy="2240280"/>
+          </a:xfrm>
+          <a:prstGeom prst="rect">
             <a:avLst/>
           </a:prstGeom>
           <a:solidFill>
-            <a:srgbClr val="0E1E36"/>
+            <a:srgbClr val="0A192E"/>
           </a:solidFill>
-          <a:ln>
+          <a:ln w="12700">
             <a:solidFill>
-              <a:srgbClr val="284B78"/>
+              <a:srgbClr val="1C3E66"/>
             </a:solidFill>
           </a:ln>
         </p:spPr>
@@ -5557,792 +6311,8 @@
         </p:nvSpPr>
         <p:spPr>
           <a:xfrm>
-            <a:off x="4389120" y="1417320"/>
-            <a:ext cx="3410712" cy="45720"/>
-          </a:xfrm>
-          <a:prstGeom prst="rect">
-            <a:avLst/>
-          </a:prstGeom>
-          <a:solidFill>
-            <a:srgbClr val="C084FC"/>
-          </a:solidFill>
-          <a:ln>
-            <a:noFill/>
-          </a:ln>
-        </p:spPr>
-        <p:style>
-          <a:lnRef idx="1">
-            <a:schemeClr val="accent1"/>
-          </a:lnRef>
-          <a:fillRef idx="3">
-            <a:schemeClr val="accent1"/>
-          </a:fillRef>
-          <a:effectRef idx="2">
-            <a:schemeClr val="accent1"/>
-          </a:effectRef>
-          <a:fontRef idx="minor">
-            <a:schemeClr val="lt1"/>
-          </a:fontRef>
-        </p:style>
-        <p:txBody>
-          <a:bodyPr rtlCol="0" anchor="ctr"/>
-          <a:lstStyle/>
-          <a:p>
-            <a:pPr algn="ctr"/>
-          </a:p>
-        </p:txBody>
-      </p:sp>
-      <p:sp>
-        <p:nvSpPr>
-          <p:cNvPr id="12" name="TextBox 11"/>
-          <p:cNvSpPr txBox="1"/>
-          <p:nvPr/>
-        </p:nvSpPr>
-        <p:spPr>
-          <a:xfrm>
-            <a:off x="4572000" y="1527048"/>
-            <a:ext cx="3044952" cy="2194560"/>
-          </a:xfrm>
-          <a:prstGeom prst="rect">
-            <a:avLst/>
-          </a:prstGeom>
-          <a:noFill/>
-        </p:spPr>
-        <p:txBody>
-          <a:bodyPr wrap="square">
-            <a:spAutoFit/>
-          </a:bodyPr>
-          <a:lstStyle/>
-          <a:p>
-            <a:pPr>
-              <a:defRPr sz="1100" b="1">
-                <a:solidFill>
-                  <a:srgbClr val="7DD3FC"/>
-                </a:solidFill>
-                <a:latin typeface="Segoe UI"/>
-              </a:defRPr>
-            </a:pPr>
-            <a:r>
-              <a:t>2. The Physics &amp; Motion Rules</a:t>
-            </a:r>
-          </a:p>
-          <a:p>
-            <a:pPr>
-              <a:spcBef>
-                <a:spcPts val="500"/>
-              </a:spcBef>
-              <a:defRPr sz="950" b="1">
-                <a:solidFill>
-                  <a:srgbClr val="FFFFFF"/>
-                </a:solidFill>
-                <a:latin typeface="Segoe UI"/>
-              </a:defRPr>
-            </a:pPr>
-            <a:r>
-              <a:t>• Drop Detector: </a:t>
-            </a:r>
-            <a:r>
-              <a:rPr b="0">
-                <a:solidFill>
-                  <a:srgbClr val="CBD5E1"/>
-                </a:solidFill>
-              </a:rPr>
-              <a:t>If a box's downward Y-velocity spikes &gt; 2.5 m/s and suddenly hits zero, that's a crash.</a:t>
-            </a:r>
-          </a:p>
-          <a:p>
-            <a:pPr>
-              <a:spcBef>
-                <a:spcPts val="500"/>
-              </a:spcBef>
-              <a:defRPr sz="950" b="1">
-                <a:solidFill>
-                  <a:srgbClr val="FFFFFF"/>
-                </a:solidFill>
-                <a:latin typeface="Segoe UI"/>
-              </a:defRPr>
-            </a:pPr>
-            <a:r>
-              <a:t>• Drag Detector: </a:t>
-            </a:r>
-            <a:r>
-              <a:rPr b="0">
-                <a:solidFill>
-                  <a:srgbClr val="CBD5E1"/>
-                </a:solidFill>
-              </a:rPr>
-              <a:t>If a carton slides &gt; 2 meters across the floor without lifting, it flags rough dragging.</a:t>
-            </a:r>
-          </a:p>
-          <a:p>
-            <a:pPr>
-              <a:spcBef>
-                <a:spcPts val="500"/>
-              </a:spcBef>
-              <a:defRPr sz="950" b="1">
-                <a:solidFill>
-                  <a:srgbClr val="FFFFFF"/>
-                </a:solidFill>
-                <a:latin typeface="Segoe UI"/>
-              </a:defRPr>
-            </a:pPr>
-            <a:r>
-              <a:t>• Stack Tilt Check: </a:t>
-            </a:r>
-            <a:r>
-              <a:rPr b="0">
-                <a:solidFill>
-                  <a:srgbClr val="CBD5E1"/>
-                </a:solidFill>
-              </a:rPr>
-              <a:t>Measures the angle of boxes on pallets—anything tilted &gt; 15° triggers a wobble warning.</a:t>
-            </a:r>
-          </a:p>
-        </p:txBody>
-      </p:sp>
-      <p:sp>
-        <p:nvSpPr>
-          <p:cNvPr id="13" name="Rounded Rectangle 12"/>
-          <p:cNvSpPr/>
-          <p:nvPr/>
-        </p:nvSpPr>
-        <p:spPr>
-          <a:xfrm>
-            <a:off x="8046720" y="1417320"/>
-            <a:ext cx="3410712" cy="2423160"/>
-          </a:xfrm>
-          <a:prstGeom prst="roundRect">
-            <a:avLst/>
-          </a:prstGeom>
-          <a:solidFill>
-            <a:srgbClr val="0E1E36"/>
-          </a:solidFill>
-          <a:ln>
-            <a:solidFill>
-              <a:srgbClr val="284B78"/>
-            </a:solidFill>
-          </a:ln>
-        </p:spPr>
-        <p:style>
-          <a:lnRef idx="1">
-            <a:schemeClr val="accent1"/>
-          </a:lnRef>
-          <a:fillRef idx="3">
-            <a:schemeClr val="accent1"/>
-          </a:fillRef>
-          <a:effectRef idx="2">
-            <a:schemeClr val="accent1"/>
-          </a:effectRef>
-          <a:fontRef idx="minor">
-            <a:schemeClr val="lt1"/>
-          </a:fontRef>
-        </p:style>
-        <p:txBody>
-          <a:bodyPr rtlCol="0" anchor="ctr"/>
-          <a:lstStyle/>
-          <a:p>
-            <a:pPr algn="ctr"/>
-          </a:p>
-        </p:txBody>
-      </p:sp>
-      <p:sp>
-        <p:nvSpPr>
-          <p:cNvPr id="14" name="Rectangle 13"/>
-          <p:cNvSpPr/>
-          <p:nvPr/>
-        </p:nvSpPr>
-        <p:spPr>
-          <a:xfrm>
-            <a:off x="8046720" y="1417320"/>
-            <a:ext cx="3410712" cy="45720"/>
-          </a:xfrm>
-          <a:prstGeom prst="rect">
-            <a:avLst/>
-          </a:prstGeom>
-          <a:solidFill>
-            <a:srgbClr val="FB7185"/>
-          </a:solidFill>
-          <a:ln>
-            <a:noFill/>
-          </a:ln>
-        </p:spPr>
-        <p:style>
-          <a:lnRef idx="1">
-            <a:schemeClr val="accent1"/>
-          </a:lnRef>
-          <a:fillRef idx="3">
-            <a:schemeClr val="accent1"/>
-          </a:fillRef>
-          <a:effectRef idx="2">
-            <a:schemeClr val="accent1"/>
-          </a:effectRef>
-          <a:fontRef idx="minor">
-            <a:schemeClr val="lt1"/>
-          </a:fontRef>
-        </p:style>
-        <p:txBody>
-          <a:bodyPr rtlCol="0" anchor="ctr"/>
-          <a:lstStyle/>
-          <a:p>
-            <a:pPr algn="ctr"/>
-          </a:p>
-        </p:txBody>
-      </p:sp>
-      <p:sp>
-        <p:nvSpPr>
-          <p:cNvPr id="15" name="TextBox 14"/>
-          <p:cNvSpPr txBox="1"/>
-          <p:nvPr/>
-        </p:nvSpPr>
-        <p:spPr>
-          <a:xfrm>
-            <a:off x="8229600" y="1527048"/>
-            <a:ext cx="3044952" cy="2194560"/>
-          </a:xfrm>
-          <a:prstGeom prst="rect">
-            <a:avLst/>
-          </a:prstGeom>
-          <a:noFill/>
-        </p:spPr>
-        <p:txBody>
-          <a:bodyPr wrap="square">
-            <a:spAutoFit/>
-          </a:bodyPr>
-          <a:lstStyle/>
-          <a:p>
-            <a:pPr>
-              <a:defRPr sz="1100" b="1">
-                <a:solidFill>
-                  <a:srgbClr val="7DD3FC"/>
-                </a:solidFill>
-                <a:latin typeface="Segoe UI"/>
-              </a:defRPr>
-            </a:pPr>
-            <a:r>
-              <a:t>3. Conversational AI (Google Gemini 1.5)</a:t>
-            </a:r>
-          </a:p>
-          <a:p>
-            <a:pPr>
-              <a:spcBef>
-                <a:spcPts val="500"/>
-              </a:spcBef>
-              <a:defRPr sz="950" b="1">
-                <a:solidFill>
-                  <a:srgbClr val="FFFFFF"/>
-                </a:solidFill>
-                <a:latin typeface="Segoe UI"/>
-              </a:defRPr>
-            </a:pPr>
-            <a:r>
-              <a:t>• Why an LLM? </a:t>
-            </a:r>
-            <a:r>
-              <a:rPr b="0">
-                <a:solidFill>
-                  <a:srgbClr val="CBD5E1"/>
-                </a:solidFill>
-              </a:rPr>
-              <a:t>Supervisors hate writing SQL queries or clicking 20 filters.</a:t>
-            </a:r>
-          </a:p>
-          <a:p>
-            <a:pPr>
-              <a:spcBef>
-                <a:spcPts val="500"/>
-              </a:spcBef>
-              <a:defRPr sz="950" b="1">
-                <a:solidFill>
-                  <a:srgbClr val="FFFFFF"/>
-                </a:solidFill>
-                <a:latin typeface="Segoe UI"/>
-              </a:defRPr>
-            </a:pPr>
-            <a:r>
-              <a:t>• How it works: </a:t>
-            </a:r>
-            <a:r>
-              <a:rPr b="0">
-                <a:solidFill>
-                  <a:srgbClr val="CBD5E1"/>
-                </a:solidFill>
-              </a:rPr>
-              <a:t>We feed SQLite telemetry logs into Gemini so supervisors can ask plain questions like: 'Did Bay 3 drop anything today?'</a:t>
-            </a:r>
-          </a:p>
-          <a:p>
-            <a:pPr>
-              <a:spcBef>
-                <a:spcPts val="500"/>
-              </a:spcBef>
-              <a:defRPr sz="950" b="1">
-                <a:solidFill>
-                  <a:srgbClr val="FFFFFF"/>
-                </a:solidFill>
-                <a:latin typeface="Segoe UI"/>
-              </a:defRPr>
-            </a:pPr>
-            <a:r>
-              <a:t>• Result: </a:t>
-            </a:r>
-            <a:r>
-              <a:rPr b="0">
-                <a:solidFill>
-                  <a:srgbClr val="CBD5E1"/>
-                </a:solidFill>
-              </a:rPr>
-              <a:t>Instant plain-English answers with timestamps.</a:t>
-            </a:r>
-          </a:p>
-        </p:txBody>
-      </p:sp>
-      <p:sp>
-        <p:nvSpPr>
-          <p:cNvPr id="16" name="Rounded Rectangle 15"/>
-          <p:cNvSpPr/>
-          <p:nvPr/>
-        </p:nvSpPr>
-        <p:spPr>
-          <a:xfrm>
-            <a:off x="731520" y="4069080"/>
-            <a:ext cx="3410712" cy="2423160"/>
-          </a:xfrm>
-          <a:prstGeom prst="roundRect">
-            <a:avLst/>
-          </a:prstGeom>
-          <a:solidFill>
-            <a:srgbClr val="0E1E36"/>
-          </a:solidFill>
-          <a:ln>
-            <a:solidFill>
-              <a:srgbClr val="284B78"/>
-            </a:solidFill>
-          </a:ln>
-        </p:spPr>
-        <p:style>
-          <a:lnRef idx="1">
-            <a:schemeClr val="accent1"/>
-          </a:lnRef>
-          <a:fillRef idx="3">
-            <a:schemeClr val="accent1"/>
-          </a:fillRef>
-          <a:effectRef idx="2">
-            <a:schemeClr val="accent1"/>
-          </a:effectRef>
-          <a:fontRef idx="minor">
-            <a:schemeClr val="lt1"/>
-          </a:fontRef>
-        </p:style>
-        <p:txBody>
-          <a:bodyPr rtlCol="0" anchor="ctr"/>
-          <a:lstStyle/>
-          <a:p>
-            <a:pPr algn="ctr"/>
-          </a:p>
-        </p:txBody>
-      </p:sp>
-      <p:sp>
-        <p:nvSpPr>
-          <p:cNvPr id="17" name="Rectangle 16"/>
-          <p:cNvSpPr/>
-          <p:nvPr/>
-        </p:nvSpPr>
-        <p:spPr>
-          <a:xfrm>
-            <a:off x="731520" y="4069080"/>
-            <a:ext cx="3410712" cy="45720"/>
-          </a:xfrm>
-          <a:prstGeom prst="rect">
-            <a:avLst/>
-          </a:prstGeom>
-          <a:solidFill>
-            <a:srgbClr val="FBBF24"/>
-          </a:solidFill>
-          <a:ln>
-            <a:noFill/>
-          </a:ln>
-        </p:spPr>
-        <p:style>
-          <a:lnRef idx="1">
-            <a:schemeClr val="accent1"/>
-          </a:lnRef>
-          <a:fillRef idx="3">
-            <a:schemeClr val="accent1"/>
-          </a:fillRef>
-          <a:effectRef idx="2">
-            <a:schemeClr val="accent1"/>
-          </a:effectRef>
-          <a:fontRef idx="minor">
-            <a:schemeClr val="lt1"/>
-          </a:fontRef>
-        </p:style>
-        <p:txBody>
-          <a:bodyPr rtlCol="0" anchor="ctr"/>
-          <a:lstStyle/>
-          <a:p>
-            <a:pPr algn="ctr"/>
-          </a:p>
-        </p:txBody>
-      </p:sp>
-      <p:sp>
-        <p:nvSpPr>
-          <p:cNvPr id="18" name="TextBox 17"/>
-          <p:cNvSpPr txBox="1"/>
-          <p:nvPr/>
-        </p:nvSpPr>
-        <p:spPr>
-          <a:xfrm>
-            <a:off x="914400" y="4178808"/>
-            <a:ext cx="3044952" cy="2194560"/>
-          </a:xfrm>
-          <a:prstGeom prst="rect">
-            <a:avLst/>
-          </a:prstGeom>
-          <a:noFill/>
-        </p:spPr>
-        <p:txBody>
-          <a:bodyPr wrap="square">
-            <a:spAutoFit/>
-          </a:bodyPr>
-          <a:lstStyle/>
-          <a:p>
-            <a:pPr>
-              <a:defRPr sz="1100" b="1">
-                <a:solidFill>
-                  <a:srgbClr val="7DD3FC"/>
-                </a:solidFill>
-                <a:latin typeface="Segoe UI"/>
-              </a:defRPr>
-            </a:pPr>
-            <a:r>
-              <a:t>4. Smart Video Snips (OpenCV + FFmpeg)</a:t>
-            </a:r>
-          </a:p>
-          <a:p>
-            <a:pPr>
-              <a:spcBef>
-                <a:spcPts val="500"/>
-              </a:spcBef>
-              <a:defRPr sz="950" b="1">
-                <a:solidFill>
-                  <a:srgbClr val="FFFFFF"/>
-                </a:solidFill>
-                <a:latin typeface="Segoe UI"/>
-              </a:defRPr>
-            </a:pPr>
-            <a:r>
-              <a:t>• No Wasted Storage: </a:t>
-            </a:r>
-            <a:r>
-              <a:rPr b="0">
-                <a:solidFill>
-                  <a:srgbClr val="CBD5E1"/>
-                </a:solidFill>
-              </a:rPr>
-              <a:t>We don't save 24 hours of boring empty dock video.</a:t>
-            </a:r>
-          </a:p>
-          <a:p>
-            <a:pPr>
-              <a:spcBef>
-                <a:spcPts val="500"/>
-              </a:spcBef>
-              <a:defRPr sz="950" b="1">
-                <a:solidFill>
-                  <a:srgbClr val="FFFFFF"/>
-                </a:solidFill>
-                <a:latin typeface="Segoe UI"/>
-              </a:defRPr>
-            </a:pPr>
-            <a:r>
-              <a:t>• Rolling Ring Buffer: </a:t>
-            </a:r>
-            <a:r>
-              <a:rPr b="0">
-                <a:solidFill>
-                  <a:srgbClr val="CBD5E1"/>
-                </a:solidFill>
-              </a:rPr>
-              <a:t>Keeps the last 15 seconds in memory. When a drop triggers, it automatically cuts a neat 5-second replay clip.</a:t>
-            </a:r>
-          </a:p>
-          <a:p>
-            <a:pPr>
-              <a:spcBef>
-                <a:spcPts val="500"/>
-              </a:spcBef>
-              <a:defRPr sz="950" b="1">
-                <a:solidFill>
-                  <a:srgbClr val="FFFFFF"/>
-                </a:solidFill>
-                <a:latin typeface="Segoe UI"/>
-              </a:defRPr>
-            </a:pPr>
-            <a:r>
-              <a:t>• Web Ready: </a:t>
-            </a:r>
-            <a:r>
-              <a:rPr b="0">
-                <a:solidFill>
-                  <a:srgbClr val="CBD5E1"/>
-                </a:solidFill>
-              </a:rPr>
-              <a:t>Encodes to lightweight H.264 so it plays instantly in the browser.</a:t>
-            </a:r>
-          </a:p>
-        </p:txBody>
-      </p:sp>
-      <p:sp>
-        <p:nvSpPr>
-          <p:cNvPr id="19" name="Rounded Rectangle 18"/>
-          <p:cNvSpPr/>
-          <p:nvPr/>
-        </p:nvSpPr>
-        <p:spPr>
-          <a:xfrm>
-            <a:off x="4389120" y="4069080"/>
-            <a:ext cx="3410712" cy="2423160"/>
-          </a:xfrm>
-          <a:prstGeom prst="roundRect">
-            <a:avLst/>
-          </a:prstGeom>
-          <a:solidFill>
-            <a:srgbClr val="0E1E36"/>
-          </a:solidFill>
-          <a:ln>
-            <a:solidFill>
-              <a:srgbClr val="284B78"/>
-            </a:solidFill>
-          </a:ln>
-        </p:spPr>
-        <p:style>
-          <a:lnRef idx="1">
-            <a:schemeClr val="accent1"/>
-          </a:lnRef>
-          <a:fillRef idx="3">
-            <a:schemeClr val="accent1"/>
-          </a:fillRef>
-          <a:effectRef idx="2">
-            <a:schemeClr val="accent1"/>
-          </a:effectRef>
-          <a:fontRef idx="minor">
-            <a:schemeClr val="lt1"/>
-          </a:fontRef>
-        </p:style>
-        <p:txBody>
-          <a:bodyPr rtlCol="0" anchor="ctr"/>
-          <a:lstStyle/>
-          <a:p>
-            <a:pPr algn="ctr"/>
-          </a:p>
-        </p:txBody>
-      </p:sp>
-      <p:sp>
-        <p:nvSpPr>
-          <p:cNvPr id="20" name="Rectangle 19"/>
-          <p:cNvSpPr/>
-          <p:nvPr/>
-        </p:nvSpPr>
-        <p:spPr>
-          <a:xfrm>
-            <a:off x="4389120" y="4069080"/>
-            <a:ext cx="3410712" cy="45720"/>
-          </a:xfrm>
-          <a:prstGeom prst="rect">
-            <a:avLst/>
-          </a:prstGeom>
-          <a:solidFill>
-            <a:srgbClr val="34D399"/>
-          </a:solidFill>
-          <a:ln>
-            <a:noFill/>
-          </a:ln>
-        </p:spPr>
-        <p:style>
-          <a:lnRef idx="1">
-            <a:schemeClr val="accent1"/>
-          </a:lnRef>
-          <a:fillRef idx="3">
-            <a:schemeClr val="accent1"/>
-          </a:fillRef>
-          <a:effectRef idx="2">
-            <a:schemeClr val="accent1"/>
-          </a:effectRef>
-          <a:fontRef idx="minor">
-            <a:schemeClr val="lt1"/>
-          </a:fontRef>
-        </p:style>
-        <p:txBody>
-          <a:bodyPr rtlCol="0" anchor="ctr"/>
-          <a:lstStyle/>
-          <a:p>
-            <a:pPr algn="ctr"/>
-          </a:p>
-        </p:txBody>
-      </p:sp>
-      <p:sp>
-        <p:nvSpPr>
-          <p:cNvPr id="21" name="TextBox 20"/>
-          <p:cNvSpPr txBox="1"/>
-          <p:nvPr/>
-        </p:nvSpPr>
-        <p:spPr>
-          <a:xfrm>
-            <a:off x="4572000" y="4178808"/>
-            <a:ext cx="3044952" cy="2194560"/>
-          </a:xfrm>
-          <a:prstGeom prst="rect">
-            <a:avLst/>
-          </a:prstGeom>
-          <a:noFill/>
-        </p:spPr>
-        <p:txBody>
-          <a:bodyPr wrap="square">
-            <a:spAutoFit/>
-          </a:bodyPr>
-          <a:lstStyle/>
-          <a:p>
-            <a:pPr>
-              <a:defRPr sz="1100" b="1">
-                <a:solidFill>
-                  <a:srgbClr val="7DD3FC"/>
-                </a:solidFill>
-                <a:latin typeface="Segoe UI"/>
-              </a:defRPr>
-            </a:pPr>
-            <a:r>
-              <a:t>5. Fast Python Backend &amp; Database</a:t>
-            </a:r>
-          </a:p>
-          <a:p>
-            <a:pPr>
-              <a:spcBef>
-                <a:spcPts val="500"/>
-              </a:spcBef>
-              <a:defRPr sz="950" b="1">
-                <a:solidFill>
-                  <a:srgbClr val="FFFFFF"/>
-                </a:solidFill>
-                <a:latin typeface="Segoe UI"/>
-              </a:defRPr>
-            </a:pPr>
-            <a:r>
-              <a:t>• FastAPI Core: </a:t>
-            </a:r>
-            <a:r>
-              <a:rPr b="0">
-                <a:solidFill>
-                  <a:srgbClr val="CBD5E1"/>
-                </a:solidFill>
-              </a:rPr>
-              <a:t>Super-fast async Python framework handling video uploads, alert websockets, and stats.</a:t>
-            </a:r>
-          </a:p>
-          <a:p>
-            <a:pPr>
-              <a:spcBef>
-                <a:spcPts val="500"/>
-              </a:spcBef>
-              <a:defRPr sz="950" b="1">
-                <a:solidFill>
-                  <a:srgbClr val="FFFFFF"/>
-                </a:solidFill>
-                <a:latin typeface="Segoe UI"/>
-              </a:defRPr>
-            </a:pPr>
-            <a:r>
-              <a:t>• SQLite + SQLAlchemy: </a:t>
-            </a:r>
-            <a:r>
-              <a:rPr b="0">
-                <a:solidFill>
-                  <a:srgbClr val="CBD5E1"/>
-                </a:solidFill>
-              </a:rPr>
-              <a:t>Simple, reliable local database storing incident records, drop heights, and camera IDs.</a:t>
-            </a:r>
-          </a:p>
-          <a:p>
-            <a:pPr>
-              <a:spcBef>
-                <a:spcPts val="500"/>
-              </a:spcBef>
-              <a:defRPr sz="950" b="1">
-                <a:solidFill>
-                  <a:srgbClr val="FFFFFF"/>
-                </a:solidFill>
-                <a:latin typeface="Segoe UI"/>
-              </a:defRPr>
-            </a:pPr>
-            <a:r>
-              <a:t>• Clean API: </a:t>
-            </a:r>
-            <a:r>
-              <a:rPr b="0">
-                <a:solidFill>
-                  <a:srgbClr val="CBD5E1"/>
-                </a:solidFill>
-              </a:rPr>
-              <a:t>Well-documented REST routes for the frontend to poll.</a:t>
-            </a:r>
-          </a:p>
-        </p:txBody>
-      </p:sp>
-      <p:sp>
-        <p:nvSpPr>
-          <p:cNvPr id="22" name="Rounded Rectangle 21"/>
-          <p:cNvSpPr/>
-          <p:nvPr/>
-        </p:nvSpPr>
-        <p:spPr>
-          <a:xfrm>
-            <a:off x="8046720" y="4069080"/>
-            <a:ext cx="3410712" cy="2423160"/>
-          </a:xfrm>
-          <a:prstGeom prst="roundRect">
-            <a:avLst/>
-          </a:prstGeom>
-          <a:solidFill>
-            <a:srgbClr val="0E1E36"/>
-          </a:solidFill>
-          <a:ln>
-            <a:solidFill>
-              <a:srgbClr val="284B78"/>
-            </a:solidFill>
-          </a:ln>
-        </p:spPr>
-        <p:style>
-          <a:lnRef idx="1">
-            <a:schemeClr val="accent1"/>
-          </a:lnRef>
-          <a:fillRef idx="3">
-            <a:schemeClr val="accent1"/>
-          </a:fillRef>
-          <a:effectRef idx="2">
-            <a:schemeClr val="accent1"/>
-          </a:effectRef>
-          <a:fontRef idx="minor">
-            <a:schemeClr val="lt1"/>
-          </a:fontRef>
-        </p:style>
-        <p:txBody>
-          <a:bodyPr rtlCol="0" anchor="ctr"/>
-          <a:lstStyle/>
-          <a:p>
-            <a:pPr algn="ctr"/>
-          </a:p>
-        </p:txBody>
-      </p:sp>
-      <p:sp>
-        <p:nvSpPr>
-          <p:cNvPr id="23" name="Rectangle 22"/>
-          <p:cNvSpPr/>
-          <p:nvPr/>
-        </p:nvSpPr>
-        <p:spPr>
-          <a:xfrm>
-            <a:off x="8046720" y="4069080"/>
-            <a:ext cx="3410712" cy="45720"/>
+            <a:off x="4389120" y="1645920"/>
+            <a:ext cx="3410712" cy="22860"/>
           </a:xfrm>
           <a:prstGeom prst="rect">
             <a:avLst/>
@@ -6378,14 +6348,790 @@
       </p:sp>
       <p:sp>
         <p:nvSpPr>
+          <p:cNvPr id="12" name="TextBox 11"/>
+          <p:cNvSpPr txBox="1"/>
+          <p:nvPr/>
+        </p:nvSpPr>
+        <p:spPr>
+          <a:xfrm>
+            <a:off x="4553712" y="1755648"/>
+            <a:ext cx="3081528" cy="2057400"/>
+          </a:xfrm>
+          <a:prstGeom prst="rect">
+            <a:avLst/>
+          </a:prstGeom>
+          <a:noFill/>
+        </p:spPr>
+        <p:txBody>
+          <a:bodyPr wrap="square" lIns="0" tIns="0" rIns="0" bIns="0">
+            <a:spAutoFit/>
+          </a:bodyPr>
+          <a:lstStyle/>
+          <a:p>
+            <a:pPr>
+              <a:defRPr sz="1000" b="1">
+                <a:solidFill>
+                  <a:srgbClr val="FFFFFF"/>
+                </a:solidFill>
+                <a:latin typeface="Segoe UI"/>
+              </a:defRPr>
+            </a:pPr>
+            <a:r>
+              <a:t>02 • Spatial &amp; Kinematic Physics Rules</a:t>
+            </a:r>
+          </a:p>
+          <a:p>
+            <a:pPr>
+              <a:spcBef>
+                <a:spcPts val="100"/>
+              </a:spcBef>
+              <a:defRPr sz="850" b="1">
+                <a:solidFill>
+                  <a:srgbClr val="38BDF8"/>
+                </a:solidFill>
+                <a:latin typeface="Segoe UI"/>
+              </a:defRPr>
+            </a:pPr>
+            <a:r>
+              <a:t>Real-Time Vector Math</a:t>
+            </a:r>
+          </a:p>
+          <a:p>
+            <a:pPr>
+              <a:spcBef>
+                <a:spcPts val="400"/>
+              </a:spcBef>
+              <a:defRPr sz="850" b="1">
+                <a:solidFill>
+                  <a:srgbClr val="FFFFFF"/>
+                </a:solidFill>
+                <a:latin typeface="Segoe UI"/>
+              </a:defRPr>
+            </a:pPr>
+            <a:r>
+              <a:t>• Free-Fall Acceleration: </a:t>
+            </a:r>
+            <a:r>
+              <a:rPr b="0">
+                <a:solidFill>
+                  <a:srgbClr val="CBD5E1"/>
+                </a:solidFill>
+              </a:rPr>
+              <a:t>Monitors downward velocity spikes (vy &gt; 2.5 m/s -&gt; 0 m/s sudden impact) to flag drop crashes.</a:t>
+            </a:r>
+          </a:p>
+          <a:p>
+            <a:pPr>
+              <a:spcBef>
+                <a:spcPts val="400"/>
+              </a:spcBef>
+              <a:defRPr sz="850" b="1">
+                <a:solidFill>
+                  <a:srgbClr val="FFFFFF"/>
+                </a:solidFill>
+                <a:latin typeface="Segoe UI"/>
+              </a:defRPr>
+            </a:pPr>
+            <a:r>
+              <a:t>• Friction &amp; Drag Distance: </a:t>
+            </a:r>
+            <a:r>
+              <a:rPr b="0">
+                <a:solidFill>
+                  <a:srgbClr val="CBD5E1"/>
+                </a:solidFill>
+              </a:rPr>
+              <a:t>Flags sustained lateral displacement (&gt;2m on floor) without vertical lift to catch rough dragging.</a:t>
+            </a:r>
+          </a:p>
+          <a:p>
+            <a:pPr>
+              <a:spcBef>
+                <a:spcPts val="400"/>
+              </a:spcBef>
+              <a:defRPr sz="850" b="1">
+                <a:solidFill>
+                  <a:srgbClr val="FFFFFF"/>
+                </a:solidFill>
+                <a:latin typeface="Segoe UI"/>
+              </a:defRPr>
+            </a:pPr>
+            <a:r>
+              <a:t>• Stack Tilt Calculation: </a:t>
+            </a:r>
+            <a:r>
+              <a:rPr b="0">
+                <a:solidFill>
+                  <a:srgbClr val="CBD5E1"/>
+                </a:solidFill>
+              </a:rPr>
+              <a:t>Measures bounding box tilt angles; orientations exceeding 15° trigger unstable stack warnings.</a:t>
+            </a:r>
+          </a:p>
+        </p:txBody>
+      </p:sp>
+      <p:sp>
+        <p:nvSpPr>
+          <p:cNvPr id="13" name="Rectangle 12"/>
+          <p:cNvSpPr/>
+          <p:nvPr/>
+        </p:nvSpPr>
+        <p:spPr>
+          <a:xfrm>
+            <a:off x="8046720" y="1645920"/>
+            <a:ext cx="3410712" cy="2240280"/>
+          </a:xfrm>
+          <a:prstGeom prst="rect">
+            <a:avLst/>
+          </a:prstGeom>
+          <a:solidFill>
+            <a:srgbClr val="0A192E"/>
+          </a:solidFill>
+          <a:ln w="12700">
+            <a:solidFill>
+              <a:srgbClr val="1C3E66"/>
+            </a:solidFill>
+          </a:ln>
+        </p:spPr>
+        <p:style>
+          <a:lnRef idx="1">
+            <a:schemeClr val="accent1"/>
+          </a:lnRef>
+          <a:fillRef idx="3">
+            <a:schemeClr val="accent1"/>
+          </a:fillRef>
+          <a:effectRef idx="2">
+            <a:schemeClr val="accent1"/>
+          </a:effectRef>
+          <a:fontRef idx="minor">
+            <a:schemeClr val="lt1"/>
+          </a:fontRef>
+        </p:style>
+        <p:txBody>
+          <a:bodyPr rtlCol="0" anchor="ctr"/>
+          <a:lstStyle/>
+          <a:p>
+            <a:pPr algn="ctr"/>
+          </a:p>
+        </p:txBody>
+      </p:sp>
+      <p:sp>
+        <p:nvSpPr>
+          <p:cNvPr id="14" name="Rectangle 13"/>
+          <p:cNvSpPr/>
+          <p:nvPr/>
+        </p:nvSpPr>
+        <p:spPr>
+          <a:xfrm>
+            <a:off x="8046720" y="1645920"/>
+            <a:ext cx="3410712" cy="22860"/>
+          </a:xfrm>
+          <a:prstGeom prst="rect">
+            <a:avLst/>
+          </a:prstGeom>
+          <a:solidFill>
+            <a:srgbClr val="38BDF8"/>
+          </a:solidFill>
+          <a:ln>
+            <a:noFill/>
+          </a:ln>
+        </p:spPr>
+        <p:style>
+          <a:lnRef idx="1">
+            <a:schemeClr val="accent1"/>
+          </a:lnRef>
+          <a:fillRef idx="3">
+            <a:schemeClr val="accent1"/>
+          </a:fillRef>
+          <a:effectRef idx="2">
+            <a:schemeClr val="accent1"/>
+          </a:effectRef>
+          <a:fontRef idx="minor">
+            <a:schemeClr val="lt1"/>
+          </a:fontRef>
+        </p:style>
+        <p:txBody>
+          <a:bodyPr rtlCol="0" anchor="ctr"/>
+          <a:lstStyle/>
+          <a:p>
+            <a:pPr algn="ctr"/>
+          </a:p>
+        </p:txBody>
+      </p:sp>
+      <p:sp>
+        <p:nvSpPr>
+          <p:cNvPr id="15" name="TextBox 14"/>
+          <p:cNvSpPr txBox="1"/>
+          <p:nvPr/>
+        </p:nvSpPr>
+        <p:spPr>
+          <a:xfrm>
+            <a:off x="8211312" y="1755648"/>
+            <a:ext cx="3081528" cy="2057400"/>
+          </a:xfrm>
+          <a:prstGeom prst="rect">
+            <a:avLst/>
+          </a:prstGeom>
+          <a:noFill/>
+        </p:spPr>
+        <p:txBody>
+          <a:bodyPr wrap="square" lIns="0" tIns="0" rIns="0" bIns="0">
+            <a:spAutoFit/>
+          </a:bodyPr>
+          <a:lstStyle/>
+          <a:p>
+            <a:pPr>
+              <a:defRPr sz="1000" b="1">
+                <a:solidFill>
+                  <a:srgbClr val="FFFFFF"/>
+                </a:solidFill>
+                <a:latin typeface="Segoe UI"/>
+              </a:defRPr>
+            </a:pPr>
+            <a:r>
+              <a:t>03 • Conversational AI &amp; Audit Assistant</a:t>
+            </a:r>
+          </a:p>
+          <a:p>
+            <a:pPr>
+              <a:spcBef>
+                <a:spcPts val="100"/>
+              </a:spcBef>
+              <a:defRPr sz="850" b="1">
+                <a:solidFill>
+                  <a:srgbClr val="38BDF8"/>
+                </a:solidFill>
+                <a:latin typeface="Segoe UI"/>
+              </a:defRPr>
+            </a:pPr>
+            <a:r>
+              <a:t>Google Gemini 2.5 Flash + RAG</a:t>
+            </a:r>
+          </a:p>
+          <a:p>
+            <a:pPr>
+              <a:spcBef>
+                <a:spcPts val="400"/>
+              </a:spcBef>
+              <a:defRPr sz="850" b="1">
+                <a:solidFill>
+                  <a:srgbClr val="FFFFFF"/>
+                </a:solidFill>
+                <a:latin typeface="Segoe UI"/>
+              </a:defRPr>
+            </a:pPr>
+            <a:r>
+              <a:t>• Natural Language RAG: </a:t>
+            </a:r>
+            <a:r>
+              <a:rPr b="0">
+                <a:solidFill>
+                  <a:srgbClr val="CBD5E1"/>
+                </a:solidFill>
+              </a:rPr>
+              <a:t>Ingests SQLite telemetry logs so supervisors can query history in plain English without SQL.</a:t>
+            </a:r>
+          </a:p>
+          <a:p>
+            <a:pPr>
+              <a:spcBef>
+                <a:spcPts val="400"/>
+              </a:spcBef>
+              <a:defRPr sz="850" b="1">
+                <a:solidFill>
+                  <a:srgbClr val="FFFFFF"/>
+                </a:solidFill>
+                <a:latin typeface="Segoe UI"/>
+              </a:defRPr>
+            </a:pPr>
+            <a:r>
+              <a:t>• Shift Summaries: </a:t>
+            </a:r>
+            <a:r>
+              <a:rPr b="0">
+                <a:solidFill>
+                  <a:srgbClr val="CBD5E1"/>
+                </a:solidFill>
+              </a:rPr>
+              <a:t>Generates instant structured executive reports on bay risk hotspots and incident timestamps.</a:t>
+            </a:r>
+          </a:p>
+        </p:txBody>
+      </p:sp>
+      <p:sp>
+        <p:nvSpPr>
+          <p:cNvPr id="16" name="Rectangle 15"/>
+          <p:cNvSpPr/>
+          <p:nvPr/>
+        </p:nvSpPr>
+        <p:spPr>
+          <a:xfrm>
+            <a:off x="731520" y="4087368"/>
+            <a:ext cx="3410712" cy="2240280"/>
+          </a:xfrm>
+          <a:prstGeom prst="rect">
+            <a:avLst/>
+          </a:prstGeom>
+          <a:solidFill>
+            <a:srgbClr val="0A192E"/>
+          </a:solidFill>
+          <a:ln w="12700">
+            <a:solidFill>
+              <a:srgbClr val="1C3E66"/>
+            </a:solidFill>
+          </a:ln>
+        </p:spPr>
+        <p:style>
+          <a:lnRef idx="1">
+            <a:schemeClr val="accent1"/>
+          </a:lnRef>
+          <a:fillRef idx="3">
+            <a:schemeClr val="accent1"/>
+          </a:fillRef>
+          <a:effectRef idx="2">
+            <a:schemeClr val="accent1"/>
+          </a:effectRef>
+          <a:fontRef idx="minor">
+            <a:schemeClr val="lt1"/>
+          </a:fontRef>
+        </p:style>
+        <p:txBody>
+          <a:bodyPr rtlCol="0" anchor="ctr"/>
+          <a:lstStyle/>
+          <a:p>
+            <a:pPr algn="ctr"/>
+          </a:p>
+        </p:txBody>
+      </p:sp>
+      <p:sp>
+        <p:nvSpPr>
+          <p:cNvPr id="17" name="Rectangle 16"/>
+          <p:cNvSpPr/>
+          <p:nvPr/>
+        </p:nvSpPr>
+        <p:spPr>
+          <a:xfrm>
+            <a:off x="731520" y="4087368"/>
+            <a:ext cx="3410712" cy="22860"/>
+          </a:xfrm>
+          <a:prstGeom prst="rect">
+            <a:avLst/>
+          </a:prstGeom>
+          <a:solidFill>
+            <a:srgbClr val="38BDF8"/>
+          </a:solidFill>
+          <a:ln>
+            <a:noFill/>
+          </a:ln>
+        </p:spPr>
+        <p:style>
+          <a:lnRef idx="1">
+            <a:schemeClr val="accent1"/>
+          </a:lnRef>
+          <a:fillRef idx="3">
+            <a:schemeClr val="accent1"/>
+          </a:fillRef>
+          <a:effectRef idx="2">
+            <a:schemeClr val="accent1"/>
+          </a:effectRef>
+          <a:fontRef idx="minor">
+            <a:schemeClr val="lt1"/>
+          </a:fontRef>
+        </p:style>
+        <p:txBody>
+          <a:bodyPr rtlCol="0" anchor="ctr"/>
+          <a:lstStyle/>
+          <a:p>
+            <a:pPr algn="ctr"/>
+          </a:p>
+        </p:txBody>
+      </p:sp>
+      <p:sp>
+        <p:nvSpPr>
+          <p:cNvPr id="18" name="TextBox 17"/>
+          <p:cNvSpPr txBox="1"/>
+          <p:nvPr/>
+        </p:nvSpPr>
+        <p:spPr>
+          <a:xfrm>
+            <a:off x="896112" y="4197096"/>
+            <a:ext cx="3081528" cy="2057400"/>
+          </a:xfrm>
+          <a:prstGeom prst="rect">
+            <a:avLst/>
+          </a:prstGeom>
+          <a:noFill/>
+        </p:spPr>
+        <p:txBody>
+          <a:bodyPr wrap="square" lIns="0" tIns="0" rIns="0" bIns="0">
+            <a:spAutoFit/>
+          </a:bodyPr>
+          <a:lstStyle/>
+          <a:p>
+            <a:pPr>
+              <a:defRPr sz="1000" b="1">
+                <a:solidFill>
+                  <a:srgbClr val="FFFFFF"/>
+                </a:solidFill>
+                <a:latin typeface="Segoe UI"/>
+              </a:defRPr>
+            </a:pPr>
+            <a:r>
+              <a:t>04 • Rolling Video Snip Buffer</a:t>
+            </a:r>
+          </a:p>
+          <a:p>
+            <a:pPr>
+              <a:spcBef>
+                <a:spcPts val="100"/>
+              </a:spcBef>
+              <a:defRPr sz="850" b="1">
+                <a:solidFill>
+                  <a:srgbClr val="38BDF8"/>
+                </a:solidFill>
+                <a:latin typeface="Segoe UI"/>
+              </a:defRPr>
+            </a:pPr>
+            <a:r>
+              <a:t>OpenCV + FFmpeg Subprocess</a:t>
+            </a:r>
+          </a:p>
+          <a:p>
+            <a:pPr>
+              <a:spcBef>
+                <a:spcPts val="400"/>
+              </a:spcBef>
+              <a:defRPr sz="850" b="1">
+                <a:solidFill>
+                  <a:srgbClr val="FFFFFF"/>
+                </a:solidFill>
+                <a:latin typeface="Segoe UI"/>
+              </a:defRPr>
+            </a:pPr>
+            <a:r>
+              <a:t>• Zero Storage Waste: </a:t>
+            </a:r>
+            <a:r>
+              <a:rPr b="0">
+                <a:solidFill>
+                  <a:srgbClr val="CBD5E1"/>
+                </a:solidFill>
+              </a:rPr>
+              <a:t>Avoids saving hours of empty dock feeds; maintains a lightweight 15-second FIFO memory buffer.</a:t>
+            </a:r>
+          </a:p>
+          <a:p>
+            <a:pPr>
+              <a:spcBef>
+                <a:spcPts val="400"/>
+              </a:spcBef>
+              <a:defRPr sz="850" b="1">
+                <a:solidFill>
+                  <a:srgbClr val="FFFFFF"/>
+                </a:solidFill>
+                <a:latin typeface="Segoe UI"/>
+              </a:defRPr>
+            </a:pPr>
+            <a:r>
+              <a:t>• 5-Second Micro Replays: </a:t>
+            </a:r>
+            <a:r>
+              <a:rPr b="0">
+                <a:solidFill>
+                  <a:srgbClr val="CBD5E1"/>
+                </a:solidFill>
+              </a:rPr>
+              <a:t>Upon alert trigger, automatically transcodes a lightweight 5s H.264 clip for instant browser streaming.</a:t>
+            </a:r>
+          </a:p>
+        </p:txBody>
+      </p:sp>
+      <p:sp>
+        <p:nvSpPr>
+          <p:cNvPr id="19" name="Rectangle 18"/>
+          <p:cNvSpPr/>
+          <p:nvPr/>
+        </p:nvSpPr>
+        <p:spPr>
+          <a:xfrm>
+            <a:off x="4389120" y="4087368"/>
+            <a:ext cx="3410712" cy="2240280"/>
+          </a:xfrm>
+          <a:prstGeom prst="rect">
+            <a:avLst/>
+          </a:prstGeom>
+          <a:solidFill>
+            <a:srgbClr val="0A192E"/>
+          </a:solidFill>
+          <a:ln w="12700">
+            <a:solidFill>
+              <a:srgbClr val="1C3E66"/>
+            </a:solidFill>
+          </a:ln>
+        </p:spPr>
+        <p:style>
+          <a:lnRef idx="1">
+            <a:schemeClr val="accent1"/>
+          </a:lnRef>
+          <a:fillRef idx="3">
+            <a:schemeClr val="accent1"/>
+          </a:fillRef>
+          <a:effectRef idx="2">
+            <a:schemeClr val="accent1"/>
+          </a:effectRef>
+          <a:fontRef idx="minor">
+            <a:schemeClr val="lt1"/>
+          </a:fontRef>
+        </p:style>
+        <p:txBody>
+          <a:bodyPr rtlCol="0" anchor="ctr"/>
+          <a:lstStyle/>
+          <a:p>
+            <a:pPr algn="ctr"/>
+          </a:p>
+        </p:txBody>
+      </p:sp>
+      <p:sp>
+        <p:nvSpPr>
+          <p:cNvPr id="20" name="Rectangle 19"/>
+          <p:cNvSpPr/>
+          <p:nvPr/>
+        </p:nvSpPr>
+        <p:spPr>
+          <a:xfrm>
+            <a:off x="4389120" y="4087368"/>
+            <a:ext cx="3410712" cy="22860"/>
+          </a:xfrm>
+          <a:prstGeom prst="rect">
+            <a:avLst/>
+          </a:prstGeom>
+          <a:solidFill>
+            <a:srgbClr val="38BDF8"/>
+          </a:solidFill>
+          <a:ln>
+            <a:noFill/>
+          </a:ln>
+        </p:spPr>
+        <p:style>
+          <a:lnRef idx="1">
+            <a:schemeClr val="accent1"/>
+          </a:lnRef>
+          <a:fillRef idx="3">
+            <a:schemeClr val="accent1"/>
+          </a:fillRef>
+          <a:effectRef idx="2">
+            <a:schemeClr val="accent1"/>
+          </a:effectRef>
+          <a:fontRef idx="minor">
+            <a:schemeClr val="lt1"/>
+          </a:fontRef>
+        </p:style>
+        <p:txBody>
+          <a:bodyPr rtlCol="0" anchor="ctr"/>
+          <a:lstStyle/>
+          <a:p>
+            <a:pPr algn="ctr"/>
+          </a:p>
+        </p:txBody>
+      </p:sp>
+      <p:sp>
+        <p:nvSpPr>
+          <p:cNvPr id="21" name="TextBox 20"/>
+          <p:cNvSpPr txBox="1"/>
+          <p:nvPr/>
+        </p:nvSpPr>
+        <p:spPr>
+          <a:xfrm>
+            <a:off x="4553712" y="4197096"/>
+            <a:ext cx="3081528" cy="2057400"/>
+          </a:xfrm>
+          <a:prstGeom prst="rect">
+            <a:avLst/>
+          </a:prstGeom>
+          <a:noFill/>
+        </p:spPr>
+        <p:txBody>
+          <a:bodyPr wrap="square" lIns="0" tIns="0" rIns="0" bIns="0">
+            <a:spAutoFit/>
+          </a:bodyPr>
+          <a:lstStyle/>
+          <a:p>
+            <a:pPr>
+              <a:defRPr sz="1000" b="1">
+                <a:solidFill>
+                  <a:srgbClr val="FFFFFF"/>
+                </a:solidFill>
+                <a:latin typeface="Segoe UI"/>
+              </a:defRPr>
+            </a:pPr>
+            <a:r>
+              <a:t>05 • High-Throughput API &amp; Database</a:t>
+            </a:r>
+          </a:p>
+          <a:p>
+            <a:pPr>
+              <a:spcBef>
+                <a:spcPts val="100"/>
+              </a:spcBef>
+              <a:defRPr sz="850" b="1">
+                <a:solidFill>
+                  <a:srgbClr val="38BDF8"/>
+                </a:solidFill>
+                <a:latin typeface="Segoe UI"/>
+              </a:defRPr>
+            </a:pPr>
+            <a:r>
+              <a:t>FastAPI + SQLAlchemy + SQLite</a:t>
+            </a:r>
+          </a:p>
+          <a:p>
+            <a:pPr>
+              <a:spcBef>
+                <a:spcPts val="400"/>
+              </a:spcBef>
+              <a:defRPr sz="850" b="1">
+                <a:solidFill>
+                  <a:srgbClr val="FFFFFF"/>
+                </a:solidFill>
+                <a:latin typeface="Segoe UI"/>
+              </a:defRPr>
+            </a:pPr>
+            <a:r>
+              <a:t>• Asynchronous Event Loop: </a:t>
+            </a:r>
+            <a:r>
+              <a:rPr b="0">
+                <a:solidFill>
+                  <a:srgbClr val="CBD5E1"/>
+                </a:solidFill>
+              </a:rPr>
+              <a:t>Ultra-fast REST API handling CCTV video uploads, metric polling, and telemetry ingestion.</a:t>
+            </a:r>
+          </a:p>
+          <a:p>
+            <a:pPr>
+              <a:spcBef>
+                <a:spcPts val="400"/>
+              </a:spcBef>
+              <a:defRPr sz="850" b="1">
+                <a:solidFill>
+                  <a:srgbClr val="FFFFFF"/>
+                </a:solidFill>
+                <a:latin typeface="Segoe UI"/>
+              </a:defRPr>
+            </a:pPr>
+            <a:r>
+              <a:t>• Live WebSocket Feeds: </a:t>
+            </a:r>
+            <a:r>
+              <a:rPr b="0">
+                <a:solidFill>
+                  <a:srgbClr val="CBD5E1"/>
+                </a:solidFill>
+              </a:rPr>
+              <a:t>Broadcasts sub-50ms incident events and danger alerts to connected dock clients.</a:t>
+            </a:r>
+          </a:p>
+        </p:txBody>
+      </p:sp>
+      <p:sp>
+        <p:nvSpPr>
+          <p:cNvPr id="22" name="Rectangle 21"/>
+          <p:cNvSpPr/>
+          <p:nvPr/>
+        </p:nvSpPr>
+        <p:spPr>
+          <a:xfrm>
+            <a:off x="8046720" y="4087368"/>
+            <a:ext cx="3410712" cy="2240280"/>
+          </a:xfrm>
+          <a:prstGeom prst="rect">
+            <a:avLst/>
+          </a:prstGeom>
+          <a:solidFill>
+            <a:srgbClr val="0A192E"/>
+          </a:solidFill>
+          <a:ln w="12700">
+            <a:solidFill>
+              <a:srgbClr val="1C3E66"/>
+            </a:solidFill>
+          </a:ln>
+        </p:spPr>
+        <p:style>
+          <a:lnRef idx="1">
+            <a:schemeClr val="accent1"/>
+          </a:lnRef>
+          <a:fillRef idx="3">
+            <a:schemeClr val="accent1"/>
+          </a:fillRef>
+          <a:effectRef idx="2">
+            <a:schemeClr val="accent1"/>
+          </a:effectRef>
+          <a:fontRef idx="minor">
+            <a:schemeClr val="lt1"/>
+          </a:fontRef>
+        </p:style>
+        <p:txBody>
+          <a:bodyPr rtlCol="0" anchor="ctr"/>
+          <a:lstStyle/>
+          <a:p>
+            <a:pPr algn="ctr"/>
+          </a:p>
+        </p:txBody>
+      </p:sp>
+      <p:sp>
+        <p:nvSpPr>
+          <p:cNvPr id="23" name="Rectangle 22"/>
+          <p:cNvSpPr/>
+          <p:nvPr/>
+        </p:nvSpPr>
+        <p:spPr>
+          <a:xfrm>
+            <a:off x="8046720" y="4087368"/>
+            <a:ext cx="3410712" cy="22860"/>
+          </a:xfrm>
+          <a:prstGeom prst="rect">
+            <a:avLst/>
+          </a:prstGeom>
+          <a:solidFill>
+            <a:srgbClr val="38BDF8"/>
+          </a:solidFill>
+          <a:ln>
+            <a:noFill/>
+          </a:ln>
+        </p:spPr>
+        <p:style>
+          <a:lnRef idx="1">
+            <a:schemeClr val="accent1"/>
+          </a:lnRef>
+          <a:fillRef idx="3">
+            <a:schemeClr val="accent1"/>
+          </a:fillRef>
+          <a:effectRef idx="2">
+            <a:schemeClr val="accent1"/>
+          </a:effectRef>
+          <a:fontRef idx="minor">
+            <a:schemeClr val="lt1"/>
+          </a:fontRef>
+        </p:style>
+        <p:txBody>
+          <a:bodyPr rtlCol="0" anchor="ctr"/>
+          <a:lstStyle/>
+          <a:p>
+            <a:pPr algn="ctr"/>
+          </a:p>
+        </p:txBody>
+      </p:sp>
+      <p:sp>
+        <p:nvSpPr>
           <p:cNvPr id="24" name="TextBox 23"/>
           <p:cNvSpPr txBox="1"/>
           <p:nvPr/>
         </p:nvSpPr>
         <p:spPr>
           <a:xfrm>
-            <a:off x="8229600" y="4178808"/>
-            <a:ext cx="3044952" cy="2194560"/>
+            <a:off x="8211312" y="4197096"/>
+            <a:ext cx="3081528" cy="2057400"/>
           </a:xfrm>
           <a:prstGeom prst="rect">
             <a:avLst/>
@@ -6393,29 +7139,45 @@
           <a:noFill/>
         </p:spPr>
         <p:txBody>
-          <a:bodyPr wrap="square">
+          <a:bodyPr wrap="square" lIns="0" tIns="0" rIns="0" bIns="0">
             <a:spAutoFit/>
           </a:bodyPr>
           <a:lstStyle/>
           <a:p>
             <a:pPr>
-              <a:defRPr sz="1100" b="1">
-                <a:solidFill>
-                  <a:srgbClr val="7DD3FC"/>
-                </a:solidFill>
-                <a:latin typeface="Segoe UI"/>
-              </a:defRPr>
-            </a:pPr>
-            <a:r>
-              <a:t>6. React Dashboard &amp; Sound Alerts</a:t>
+              <a:defRPr sz="1000" b="1">
+                <a:solidFill>
+                  <a:srgbClr val="FFFFFF"/>
+                </a:solidFill>
+                <a:latin typeface="Segoe UI"/>
+              </a:defRPr>
+            </a:pPr>
+            <a:r>
+              <a:t>06 • Operational Frontend &amp; Audio Engine</a:t>
             </a:r>
           </a:p>
           <a:p>
             <a:pPr>
               <a:spcBef>
-                <a:spcPts val="500"/>
+                <a:spcPts val="100"/>
               </a:spcBef>
-              <a:defRPr sz="950" b="1">
+              <a:defRPr sz="850" b="1">
+                <a:solidFill>
+                  <a:srgbClr val="38BDF8"/>
+                </a:solidFill>
+                <a:latin typeface="Segoe UI"/>
+              </a:defRPr>
+            </a:pPr>
+            <a:r>
+              <a:t>React 18 + Tailwind + Web Audio API</a:t>
+            </a:r>
+          </a:p>
+          <a:p>
+            <a:pPr>
+              <a:spcBef>
+                <a:spcPts val="400"/>
+              </a:spcBef>
+              <a:defRPr sz="850" b="1">
                 <a:solidFill>
                   <a:srgbClr val="FFFFFF"/>
                 </a:solidFill>
@@ -6423,7 +7185,7 @@
               </a:defRPr>
             </a:pPr>
             <a:r>
-              <a:t>• Frontend Stack: </a:t>
+              <a:t>• Responsive Supervisory UI: </a:t>
             </a:r>
             <a:r>
               <a:rPr b="0">
@@ -6431,15 +7193,15 @@
                   <a:srgbClr val="CBD5E1"/>
                 </a:solidFill>
               </a:rPr>
-              <a:t>React 18, TypeScript, and Tailwind CSS for a crisp, responsive layout.</a:t>
+              <a:t>Interactive KPI metrics, 7-day handling risk charts, and instant alert slide-out drawers.</a:t>
             </a:r>
           </a:p>
           <a:p>
             <a:pPr>
               <a:spcBef>
-                <a:spcPts val="500"/>
+                <a:spcPts val="400"/>
               </a:spcBef>
-              <a:defRPr sz="950" b="1">
+              <a:defRPr sz="850" b="1">
                 <a:solidFill>
                   <a:srgbClr val="FFFFFF"/>
                 </a:solidFill>
@@ -6447,7 +7209,7 @@
               </a:defRPr>
             </a:pPr>
             <a:r>
-              <a:t>• Interactive Charts: </a:t>
+              <a:t>• Synthetic Audio Synthesis: </a:t>
             </a:r>
             <a:r>
               <a:rPr b="0">
@@ -6455,31 +7217,86 @@
                   <a:srgbClr val="CBD5E1"/>
                 </a:solidFill>
               </a:rPr>
-              <a:t>Recharts rendering 7-day risk trends and KPI cards.</a:t>
-            </a:r>
-          </a:p>
-          <a:p>
-            <a:pPr>
-              <a:spcBef>
-                <a:spcPts val="500"/>
-              </a:spcBef>
-              <a:defRPr sz="950" b="1">
-                <a:solidFill>
-                  <a:srgbClr val="FFFFFF"/>
-                </a:solidFill>
-                <a:latin typeface="Segoe UI"/>
-              </a:defRPr>
-            </a:pPr>
-            <a:r>
-              <a:t>• Audio Chimes: </a:t>
-            </a:r>
-            <a:r>
-              <a:rPr b="0">
-                <a:solidFill>
-                  <a:srgbClr val="CBD5E1"/>
-                </a:solidFill>
-              </a:rPr>
-              <a:t>Web Audio API generates soft synthetic tones right inside the browser without downloading sound files.</a:t>
+              <a:t>Web Audio API generates dock chimes on client devices without external audio file latency.</a:t>
+            </a:r>
+          </a:p>
+        </p:txBody>
+      </p:sp>
+      <p:sp>
+        <p:nvSpPr>
+          <p:cNvPr id="25" name="Rectangle 24"/>
+          <p:cNvSpPr/>
+          <p:nvPr/>
+        </p:nvSpPr>
+        <p:spPr>
+          <a:xfrm>
+            <a:off x="731520" y="6492240"/>
+            <a:ext cx="10728655" cy="13716"/>
+          </a:xfrm>
+          <a:prstGeom prst="rect">
+            <a:avLst/>
+          </a:prstGeom>
+          <a:solidFill>
+            <a:srgbClr val="1C3E66"/>
+          </a:solidFill>
+          <a:ln>
+            <a:noFill/>
+          </a:ln>
+        </p:spPr>
+        <p:style>
+          <a:lnRef idx="1">
+            <a:schemeClr val="accent1"/>
+          </a:lnRef>
+          <a:fillRef idx="3">
+            <a:schemeClr val="accent1"/>
+          </a:fillRef>
+          <a:effectRef idx="2">
+            <a:schemeClr val="accent1"/>
+          </a:effectRef>
+          <a:fontRef idx="minor">
+            <a:schemeClr val="lt1"/>
+          </a:fontRef>
+        </p:style>
+        <p:txBody>
+          <a:bodyPr rtlCol="0" anchor="ctr"/>
+          <a:lstStyle/>
+          <a:p>
+            <a:pPr algn="ctr"/>
+          </a:p>
+        </p:txBody>
+      </p:sp>
+      <p:sp>
+        <p:nvSpPr>
+          <p:cNvPr id="26" name="TextBox 25"/>
+          <p:cNvSpPr txBox="1"/>
+          <p:nvPr/>
+        </p:nvSpPr>
+        <p:spPr>
+          <a:xfrm>
+            <a:off x="731520" y="6537960"/>
+            <a:ext cx="10728655" cy="228600"/>
+          </a:xfrm>
+          <a:prstGeom prst="rect">
+            <a:avLst/>
+          </a:prstGeom>
+          <a:noFill/>
+        </p:spPr>
+        <p:txBody>
+          <a:bodyPr wrap="none" lIns="0" tIns="0" rIns="0" bIns="0">
+            <a:spAutoFit/>
+          </a:bodyPr>
+          <a:lstStyle/>
+          <a:p>
+            <a:pPr>
+              <a:defRPr sz="850">
+                <a:solidFill>
+                  <a:srgbClr val="94A3B8"/>
+                </a:solidFill>
+                <a:latin typeface="Segoe UI"/>
+              </a:defRPr>
+            </a:pPr>
+            <a:r>
+              <a:t>DockGuard AI  •  Full-Stack Architecture &amp; Implementation Stack  •  Slide 3 of 6</a:t>
             </a:r>
           </a:p>
         </p:txBody>
@@ -6495,6 +7312,28 @@
 <file path=ppt/slides/slide4.xml><?xml version="1.0" encoding="utf-8"?>
 <p:sld xmlns:a="http://schemas.openxmlformats.org/drawingml/2006/main" xmlns:p="http://schemas.openxmlformats.org/presentationml/2006/main" xmlns:r="http://schemas.openxmlformats.org/officeDocument/2006/relationships">
   <p:cSld>
+    <p:bg>
+      <p:bgPr>
+        <a:gradFill flip="none" rotWithShape="1">
+          <a:gsLst>
+            <a:gs pos="0">
+              <a:srgbClr val="060F1E"/>
+            </a:gs>
+            <a:gs pos="38000">
+              <a:srgbClr val="0A213D"/>
+            </a:gs>
+            <a:gs pos="75000">
+              <a:srgbClr val="113665"/>
+            </a:gs>
+            <a:gs pos="100000">
+              <a:srgbClr val="07182E"/>
+            </a:gs>
+          </a:gsLst>
+          <a:lin ang="3240000" scaled="1"/>
+        </a:gradFill>
+        <a:effectLst/>
+      </p:bgPr>
+    </p:bg>
     <p:spTree>
       <p:nvGrpSpPr>
         <p:cNvPr id="1" name=""/>
@@ -6504,38 +7343,96 @@
       <p:grpSpPr/>
       <p:sp>
         <p:nvSpPr>
-          <p:cNvPr id="2" name="Rectangle 1"/>
+          <p:cNvPr id="2" name="TextBox 1"/>
+          <p:cNvSpPr txBox="1"/>
+          <p:nvPr/>
+        </p:nvSpPr>
+        <p:spPr>
+          <a:xfrm>
+            <a:off x="731520" y="384048"/>
+            <a:ext cx="6400800" cy="274320"/>
+          </a:xfrm>
+          <a:prstGeom prst="rect">
+            <a:avLst/>
+          </a:prstGeom>
+          <a:noFill/>
+        </p:spPr>
+        <p:txBody>
+          <a:bodyPr wrap="none" lIns="0" tIns="0" rIns="0" bIns="0">
+            <a:spAutoFit/>
+          </a:bodyPr>
+          <a:lstStyle/>
+          <a:p>
+            <a:pPr>
+              <a:defRPr sz="950" b="1">
+                <a:solidFill>
+                  <a:srgbClr val="38BDF8"/>
+                </a:solidFill>
+                <a:latin typeface="Segoe UI"/>
+              </a:defRPr>
+            </a:pPr>
+            <a:r>
+              <a:t>04  /  PROTOTYPE SCREENSHOTS &amp; DEMO</a:t>
+            </a:r>
+          </a:p>
+        </p:txBody>
+      </p:sp>
+      <p:sp>
+        <p:nvSpPr>
+          <p:cNvPr id="3" name="TextBox 2"/>
+          <p:cNvSpPr txBox="1"/>
+          <p:nvPr/>
+        </p:nvSpPr>
+        <p:spPr>
+          <a:xfrm>
+            <a:off x="731520" y="658368"/>
+            <a:ext cx="10728655" cy="502920"/>
+          </a:xfrm>
+          <a:prstGeom prst="rect">
+            <a:avLst/>
+          </a:prstGeom>
+          <a:noFill/>
+        </p:spPr>
+        <p:txBody>
+          <a:bodyPr wrap="square" lIns="0" tIns="0" rIns="0" bIns="0">
+            <a:spAutoFit/>
+          </a:bodyPr>
+          <a:lstStyle/>
+          <a:p>
+            <a:pPr>
+              <a:defRPr sz="2200" b="1">
+                <a:solidFill>
+                  <a:srgbClr val="FFFFFF"/>
+                </a:solidFill>
+                <a:latin typeface="Segoe UI"/>
+              </a:defRPr>
+            </a:pPr>
+            <a:r>
+              <a:t>Field Prototype: Live Object Detection, Replay &amp; Supervisory Dashboard</a:t>
+            </a:r>
+          </a:p>
+        </p:txBody>
+      </p:sp>
+      <p:sp>
+        <p:nvSpPr>
+          <p:cNvPr id="4" name="Rectangle 3"/>
           <p:cNvSpPr/>
           <p:nvPr/>
         </p:nvSpPr>
         <p:spPr>
           <a:xfrm>
-            <a:off x="0" y="0"/>
-            <a:ext cx="12191695" cy="6858000"/>
-          </a:xfrm>
-          <a:prstGeom prst="rect">
-            <a:avLst/>
-          </a:prstGeom>
+            <a:off x="731520" y="1243584"/>
+            <a:ext cx="10728655" cy="13716"/>
+          </a:xfrm>
+          <a:prstGeom prst="rect">
+            <a:avLst/>
+          </a:prstGeom>
+          <a:solidFill>
+            <a:srgbClr val="1C3E66"/>
+          </a:solidFill>
           <a:ln>
             <a:noFill/>
           </a:ln>
-          <a:gradFill flip="none" rotWithShape="1">
-            <a:gsLst>
-              <a:gs pos="0">
-                <a:srgbClr val="08192E"/>
-              </a:gs>
-              <a:gs pos="42000">
-                <a:srgbClr val="12335E"/>
-              </a:gs>
-              <a:gs pos="78000">
-                <a:srgbClr val="1A4982"/>
-              </a:gs>
-              <a:gs pos="100000">
-                <a:srgbClr val="0A2140"/>
-              </a:gs>
-            </a:gsLst>
-            <a:lin ang="3240000" scaled="1"/>
-          </a:gradFill>
         </p:spPr>
         <p:style>
           <a:lnRef idx="1">
@@ -6561,114 +7458,25 @@
       </p:sp>
       <p:sp>
         <p:nvSpPr>
-          <p:cNvPr id="3" name="Rounded Rectangle 2"/>
+          <p:cNvPr id="5" name="Rectangle 4"/>
           <p:cNvSpPr/>
           <p:nvPr/>
         </p:nvSpPr>
         <p:spPr>
           <a:xfrm>
-            <a:off x="731520" y="365760"/>
-            <a:ext cx="2651760" cy="292608"/>
-          </a:xfrm>
-          <a:prstGeom prst="roundRect">
+            <a:off x="731520" y="1371600"/>
+            <a:ext cx="3246120" cy="2286000"/>
+          </a:xfrm>
+          <a:prstGeom prst="rect">
             <a:avLst/>
           </a:prstGeom>
           <a:solidFill>
-            <a:srgbClr val="143058"/>
+            <a:srgbClr val="0A192E"/>
           </a:solidFill>
           <a:ln w="12700">
             <a:solidFill>
-              <a:srgbClr val="3872BA"/>
+              <a:srgbClr val="1C3E66"/>
             </a:solidFill>
-          </a:ln>
-        </p:spPr>
-        <p:style>
-          <a:lnRef idx="1">
-            <a:schemeClr val="accent1"/>
-          </a:lnRef>
-          <a:fillRef idx="3">
-            <a:schemeClr val="accent1"/>
-          </a:fillRef>
-          <a:effectRef idx="2">
-            <a:schemeClr val="accent1"/>
-          </a:effectRef>
-          <a:fontRef idx="minor">
-            <a:schemeClr val="lt1"/>
-          </a:fontRef>
-        </p:style>
-        <p:txBody>
-          <a:bodyPr rtlCol="0" anchor="ctr" wrap="none"/>
-          <a:lstStyle/>
-          <a:p>
-            <a:pPr algn="ctr">
-              <a:defRPr sz="950" b="1">
-                <a:solidFill>
-                  <a:srgbClr val="93C5FD"/>
-                </a:solidFill>
-                <a:latin typeface="Segoe UI"/>
-              </a:defRPr>
-            </a:pPr>
-            <a:r>
-              <a:t>SLIDE 4: PROTOTYPE SCREENSHOTS &amp; DEMO</a:t>
-            </a:r>
-          </a:p>
-        </p:txBody>
-      </p:sp>
-      <p:sp>
-        <p:nvSpPr>
-          <p:cNvPr id="4" name="TextBox 3"/>
-          <p:cNvSpPr txBox="1"/>
-          <p:nvPr/>
-        </p:nvSpPr>
-        <p:spPr>
-          <a:xfrm>
-            <a:off x="731520" y="713232"/>
-            <a:ext cx="9601200" cy="502920"/>
-          </a:xfrm>
-          <a:prstGeom prst="rect">
-            <a:avLst/>
-          </a:prstGeom>
-          <a:noFill/>
-        </p:spPr>
-        <p:txBody>
-          <a:bodyPr wrap="square" lIns="0" tIns="0" rIns="0" bIns="0">
-            <a:spAutoFit/>
-          </a:bodyPr>
-          <a:lstStyle/>
-          <a:p>
-            <a:pPr>
-              <a:defRPr sz="2100" b="1">
-                <a:solidFill>
-                  <a:srgbClr val="FFFFFF"/>
-                </a:solidFill>
-                <a:latin typeface="Segoe UI"/>
-              </a:defRPr>
-            </a:pPr>
-            <a:r>
-              <a:t>In Action: Spotting Drops, Drags &amp; Tilted Pallets</a:t>
-            </a:r>
-          </a:p>
-        </p:txBody>
-      </p:sp>
-      <p:sp>
-        <p:nvSpPr>
-          <p:cNvPr id="5" name="Rectangle 4"/>
-          <p:cNvSpPr/>
-          <p:nvPr/>
-        </p:nvSpPr>
-        <p:spPr>
-          <a:xfrm>
-            <a:off x="731520" y="1243584"/>
-            <a:ext cx="10728655" cy="18288"/>
-          </a:xfrm>
-          <a:prstGeom prst="rect">
-            <a:avLst/>
-          </a:prstGeom>
-          <a:solidFill>
-            <a:srgbClr val="2D558C"/>
-          </a:solidFill>
-          <a:ln>
-            <a:noFill/>
           </a:ln>
         </p:spPr>
         <p:style>
@@ -6709,8 +7517,8 @@
         </p:blipFill>
         <p:spPr>
           <a:xfrm>
-            <a:off x="731520" y="1371600"/>
-            <a:ext cx="3246120" cy="2331720"/>
+            <a:off x="740664" y="1380744"/>
+            <a:ext cx="3227832" cy="2267712"/>
           </a:xfrm>
           <a:prstGeom prst="rect">
             <a:avLst/>
@@ -6725,8 +7533,8 @@
         </p:nvSpPr>
         <p:spPr>
           <a:xfrm>
-            <a:off x="731520" y="3730752"/>
-            <a:ext cx="3246120" cy="274320"/>
+            <a:off x="731520" y="3685032"/>
+            <a:ext cx="3246120" cy="256032"/>
           </a:xfrm>
           <a:prstGeom prst="rect">
             <a:avLst/>
@@ -6734,7 +7542,7 @@
           <a:noFill/>
         </p:spPr>
         <p:txBody>
-          <a:bodyPr wrap="square">
+          <a:bodyPr wrap="square" lIns="0" tIns="0" rIns="0" bIns="0">
             <a:spAutoFit/>
           </a:bodyPr>
           <a:lstStyle/>
@@ -6742,20 +7550,65 @@
             <a:pPr>
               <a:defRPr sz="850">
                 <a:solidFill>
-                  <a:srgbClr val="94A3B8"/>
-                </a:solidFill>
-                <a:latin typeface="Segoe UI"/>
-              </a:defRPr>
-            </a:pPr>
-            <a:r>
-              <a:t>AI detecting worker &amp; box dragged 4.6m on wet floor</a:t>
-            </a:r>
+                  <a:srgbClr val="38BDF8"/>
+                </a:solidFill>
+                <a:latin typeface="Segoe UI"/>
+              </a:defRPr>
+            </a:pPr>
+            <a:r>
+              <a:t>AI tracking worker &amp; carton dragged 4.6m on wet floor</a:t>
+            </a:r>
+          </a:p>
+        </p:txBody>
+      </p:sp>
+      <p:sp>
+        <p:nvSpPr>
+          <p:cNvPr id="8" name="Rectangle 7"/>
+          <p:cNvSpPr/>
+          <p:nvPr/>
+        </p:nvSpPr>
+        <p:spPr>
+          <a:xfrm>
+            <a:off x="4160520" y="1371600"/>
+            <a:ext cx="3291840" cy="2286000"/>
+          </a:xfrm>
+          <a:prstGeom prst="rect">
+            <a:avLst/>
+          </a:prstGeom>
+          <a:solidFill>
+            <a:srgbClr val="0A192E"/>
+          </a:solidFill>
+          <a:ln w="12700">
+            <a:solidFill>
+              <a:srgbClr val="1C3E66"/>
+            </a:solidFill>
+          </a:ln>
+        </p:spPr>
+        <p:style>
+          <a:lnRef idx="1">
+            <a:schemeClr val="accent1"/>
+          </a:lnRef>
+          <a:fillRef idx="3">
+            <a:schemeClr val="accent1"/>
+          </a:fillRef>
+          <a:effectRef idx="2">
+            <a:schemeClr val="accent1"/>
+          </a:effectRef>
+          <a:fontRef idx="minor">
+            <a:schemeClr val="lt1"/>
+          </a:fontRef>
+        </p:style>
+        <p:txBody>
+          <a:bodyPr rtlCol="0" anchor="ctr"/>
+          <a:lstStyle/>
+          <a:p>
+            <a:pPr algn="ctr"/>
           </a:p>
         </p:txBody>
       </p:sp>
       <p:pic>
         <p:nvPicPr>
-          <p:cNvPr id="8" name="Picture 7" descr="media_1788497397504.png"/>
+          <p:cNvPr id="9" name="Picture 8" descr="media_1788497397504.png"/>
           <p:cNvPicPr>
             <a:picLocks noChangeAspect="1"/>
           </p:cNvPicPr>
@@ -6769,8 +7622,8 @@
         </p:blipFill>
         <p:spPr>
           <a:xfrm>
-            <a:off x="4160520" y="1371600"/>
-            <a:ext cx="3337560" cy="2331720"/>
+            <a:off x="4169663" y="1380744"/>
+            <a:ext cx="3273552" cy="2267712"/>
           </a:xfrm>
           <a:prstGeom prst="rect">
             <a:avLst/>
@@ -6779,14 +7632,14 @@
       </p:pic>
       <p:sp>
         <p:nvSpPr>
-          <p:cNvPr id="9" name="TextBox 8"/>
+          <p:cNvPr id="10" name="TextBox 9"/>
           <p:cNvSpPr txBox="1"/>
           <p:nvPr/>
         </p:nvSpPr>
         <p:spPr>
           <a:xfrm>
-            <a:off x="4160520" y="3730752"/>
-            <a:ext cx="3337560" cy="274320"/>
+            <a:off x="4160520" y="3685032"/>
+            <a:ext cx="3291840" cy="256032"/>
           </a:xfrm>
           <a:prstGeom prst="rect">
             <a:avLst/>
@@ -6794,7 +7647,7 @@
           <a:noFill/>
         </p:spPr>
         <p:txBody>
-          <a:bodyPr wrap="square">
+          <a:bodyPr wrap="square" lIns="0" tIns="0" rIns="0" bIns="0">
             <a:spAutoFit/>
           </a:bodyPr>
           <a:lstStyle/>
@@ -6802,20 +7655,65 @@
             <a:pPr>
               <a:defRPr sz="850">
                 <a:solidFill>
-                  <a:srgbClr val="94A3B8"/>
-                </a:solidFill>
-                <a:latin typeface="Segoe UI"/>
-              </a:defRPr>
-            </a:pPr>
-            <a:r>
-              <a:t>Instant 5-second replay with falling box trajectory</a:t>
-            </a:r>
+                  <a:srgbClr val="38BDF8"/>
+                </a:solidFill>
+                <a:latin typeface="Segoe UI"/>
+              </a:defRPr>
+            </a:pPr>
+            <a:r>
+              <a:t>5-second incident replay with falling velocity vectors</a:t>
+            </a:r>
+          </a:p>
+        </p:txBody>
+      </p:sp>
+      <p:sp>
+        <p:nvSpPr>
+          <p:cNvPr id="11" name="Rectangle 10"/>
+          <p:cNvSpPr/>
+          <p:nvPr/>
+        </p:nvSpPr>
+        <p:spPr>
+          <a:xfrm>
+            <a:off x="731520" y="4005072"/>
+            <a:ext cx="6720840" cy="2395728"/>
+          </a:xfrm>
+          <a:prstGeom prst="rect">
+            <a:avLst/>
+          </a:prstGeom>
+          <a:solidFill>
+            <a:srgbClr val="0A192E"/>
+          </a:solidFill>
+          <a:ln w="12700">
+            <a:solidFill>
+              <a:srgbClr val="1C3E66"/>
+            </a:solidFill>
+          </a:ln>
+        </p:spPr>
+        <p:style>
+          <a:lnRef idx="1">
+            <a:schemeClr val="accent1"/>
+          </a:lnRef>
+          <a:fillRef idx="3">
+            <a:schemeClr val="accent1"/>
+          </a:fillRef>
+          <a:effectRef idx="2">
+            <a:schemeClr val="accent1"/>
+          </a:effectRef>
+          <a:fontRef idx="minor">
+            <a:schemeClr val="lt1"/>
+          </a:fontRef>
+        </p:style>
+        <p:txBody>
+          <a:bodyPr rtlCol="0" anchor="ctr"/>
+          <a:lstStyle/>
+          <a:p>
+            <a:pPr algn="ctr"/>
           </a:p>
         </p:txBody>
       </p:sp>
       <p:pic>
         <p:nvPicPr>
-          <p:cNvPr id="10" name="Picture 9" descr="media_1788627628552.png"/>
+          <p:cNvPr id="12" name="Picture 11" descr="media_1788627628552.png"/>
           <p:cNvPicPr>
             <a:picLocks noChangeAspect="1"/>
           </p:cNvPicPr>
@@ -6829,8 +7727,8 @@
         </p:blipFill>
         <p:spPr>
           <a:xfrm>
-            <a:off x="731520" y="4069080"/>
-            <a:ext cx="6766560" cy="2423160"/>
+            <a:off x="740664" y="4014215"/>
+            <a:ext cx="6702552" cy="2148840"/>
           </a:xfrm>
           <a:prstGeom prst="rect">
             <a:avLst/>
@@ -6839,14 +7737,14 @@
       </p:pic>
       <p:sp>
         <p:nvSpPr>
-          <p:cNvPr id="11" name="TextBox 10"/>
+          <p:cNvPr id="13" name="TextBox 12"/>
           <p:cNvSpPr txBox="1"/>
           <p:nvPr/>
         </p:nvSpPr>
         <p:spPr>
           <a:xfrm>
-            <a:off x="731520" y="6510528"/>
-            <a:ext cx="6766560" cy="274320"/>
+            <a:off x="731520" y="6199632"/>
+            <a:ext cx="6720840" cy="228600"/>
           </a:xfrm>
           <a:prstGeom prst="rect">
             <a:avLst/>
@@ -6854,7 +7752,7 @@
           <a:noFill/>
         </p:spPr>
         <p:txBody>
-          <a:bodyPr wrap="square">
+          <a:bodyPr wrap="square" lIns="0" tIns="0" rIns="0" bIns="0">
             <a:spAutoFit/>
           </a:bodyPr>
           <a:lstStyle/>
@@ -6868,31 +7766,31 @@
               </a:defRPr>
             </a:pPr>
             <a:r>
-              <a:t>The live dashboard: Pastel KPI cards, 7-day risk trend curves, and instant alert drawer</a:t>
-            </a:r>
-          </a:p>
-        </p:txBody>
-      </p:sp>
-      <p:sp>
-        <p:nvSpPr>
-          <p:cNvPr id="12" name="Rounded Rectangle 11"/>
+              <a:t>Production UI: Pastel KPI cards, 7-day risk trend curves, and real-time incident drawer</a:t>
+            </a:r>
+          </a:p>
+        </p:txBody>
+      </p:sp>
+      <p:sp>
+        <p:nvSpPr>
+          <p:cNvPr id="14" name="Rectangle 13"/>
           <p:cNvSpPr/>
           <p:nvPr/>
         </p:nvSpPr>
         <p:spPr>
           <a:xfrm>
-            <a:off x="7726679" y="1371600"/>
-            <a:ext cx="3730752" cy="5120640"/>
-          </a:xfrm>
-          <a:prstGeom prst="roundRect">
+            <a:off x="7680960" y="1371600"/>
+            <a:ext cx="3779215" cy="5029200"/>
+          </a:xfrm>
+          <a:prstGeom prst="rect">
             <a:avLst/>
           </a:prstGeom>
           <a:solidFill>
-            <a:srgbClr val="0E1E36"/>
+            <a:srgbClr val="0A192E"/>
           </a:solidFill>
-          <a:ln>
+          <a:ln w="12700">
             <a:solidFill>
-              <a:srgbClr val="284B78"/>
+              <a:srgbClr val="1C3E66"/>
             </a:solidFill>
           </a:ln>
         </p:spPr>
@@ -6920,14 +7818,57 @@
       </p:sp>
       <p:sp>
         <p:nvSpPr>
-          <p:cNvPr id="13" name="TextBox 12"/>
+          <p:cNvPr id="15" name="Rectangle 14"/>
+          <p:cNvSpPr/>
+          <p:nvPr/>
+        </p:nvSpPr>
+        <p:spPr>
+          <a:xfrm>
+            <a:off x="7680960" y="1371600"/>
+            <a:ext cx="3779215" cy="27432"/>
+          </a:xfrm>
+          <a:prstGeom prst="rect">
+            <a:avLst/>
+          </a:prstGeom>
+          <a:solidFill>
+            <a:srgbClr val="38BDF8"/>
+          </a:solidFill>
+          <a:ln>
+            <a:noFill/>
+          </a:ln>
+        </p:spPr>
+        <p:style>
+          <a:lnRef idx="1">
+            <a:schemeClr val="accent1"/>
+          </a:lnRef>
+          <a:fillRef idx="3">
+            <a:schemeClr val="accent1"/>
+          </a:fillRef>
+          <a:effectRef idx="2">
+            <a:schemeClr val="accent1"/>
+          </a:effectRef>
+          <a:fontRef idx="minor">
+            <a:schemeClr val="lt1"/>
+          </a:fontRef>
+        </p:style>
+        <p:txBody>
+          <a:bodyPr rtlCol="0" anchor="ctr"/>
+          <a:lstStyle/>
+          <a:p>
+            <a:pPr algn="ctr"/>
+          </a:p>
+        </p:txBody>
+      </p:sp>
+      <p:sp>
+        <p:nvSpPr>
+          <p:cNvPr id="16" name="TextBox 15"/>
           <p:cNvSpPr txBox="1"/>
           <p:nvPr/>
         </p:nvSpPr>
         <p:spPr>
           <a:xfrm>
-            <a:off x="7955279" y="1508760"/>
-            <a:ext cx="3273552" cy="4846320"/>
+            <a:off x="7882128" y="1508760"/>
+            <a:ext cx="3376879" cy="4754880"/>
           </a:xfrm>
           <a:prstGeom prst="rect">
             <a:avLst/>
@@ -6935,29 +7876,29 @@
           <a:noFill/>
         </p:spPr>
         <p:txBody>
-          <a:bodyPr wrap="square">
+          <a:bodyPr wrap="square" lIns="0" tIns="0" rIns="0" bIns="0">
             <a:spAutoFit/>
           </a:bodyPr>
           <a:lstStyle/>
           <a:p>
             <a:pPr>
-              <a:defRPr sz="1100" b="1">
-                <a:solidFill>
-                  <a:srgbClr val="7DD3FC"/>
-                </a:solidFill>
-                <a:latin typeface="Segoe UI"/>
-              </a:defRPr>
-            </a:pPr>
-            <a:r>
-              <a:t>4 REAL SCENARIOS WE TESTED</a:t>
+              <a:defRPr sz="1050" b="1">
+                <a:solidFill>
+                  <a:srgbClr val="38BDF8"/>
+                </a:solidFill>
+                <a:latin typeface="Segoe UI"/>
+              </a:defRPr>
+            </a:pPr>
+            <a:r>
+              <a:t>EMPIRICAL TEST SCENARIOS</a:t>
             </a:r>
           </a:p>
           <a:p>
             <a:pPr>
               <a:spcBef>
-                <a:spcPts val="700"/>
+                <a:spcPts val="600"/>
               </a:spcBef>
-              <a:defRPr sz="1000" b="1">
+              <a:defRPr sz="919" b="1">
                 <a:solidFill>
                   <a:srgbClr val="FFFFFF"/>
                 </a:solidFill>
@@ -6965,103 +7906,7 @@
               </a:defRPr>
             </a:pPr>
             <a:r>
-              <a:t>• 1. The 'Butterfingers' Drop:</a:t>
-            </a:r>
-            <a:r>
-              <a:rPr b="0">
-                <a:solidFill>
-                  <a:srgbClr val="CBD5E1"/>
-                </a:solidFill>
-              </a:rPr>
-              <a:t> Carton slips from 1.3m off pallet staging. The camera spots the free-fall spike and triggers a CRITICAL alert in 1.2s flat.</a:t>
-            </a:r>
-          </a:p>
-          <a:p>
-            <a:pPr>
-              <a:spcBef>
-                <a:spcPts val="700"/>
-              </a:spcBef>
-              <a:defRPr sz="1000" b="1">
-                <a:solidFill>
-                  <a:srgbClr val="FFFFFF"/>
-                </a:solidFill>
-                <a:latin typeface="Segoe UI"/>
-              </a:defRPr>
-            </a:pPr>
-            <a:r>
-              <a:t>• 2. The Wet-Floor Hockey Puck:</a:t>
-            </a:r>
-            <a:r>
-              <a:rPr b="0">
-                <a:solidFill>
-                  <a:srgbClr val="CBD5E1"/>
-                </a:solidFill>
-              </a:rPr>
-              <a:t> A worker slides a 20kg box 4.6m across wet concrete. The system measures the ground distance and flags HIGH risk dragging.</a:t>
-            </a:r>
-          </a:p>
-          <a:p>
-            <a:pPr>
-              <a:spcBef>
-                <a:spcPts val="700"/>
-              </a:spcBef>
-              <a:defRPr sz="1000" b="1">
-                <a:solidFill>
-                  <a:srgbClr val="FFFFFF"/>
-                </a:solidFill>
-                <a:latin typeface="Segoe UI"/>
-              </a:defRPr>
-            </a:pPr>
-            <a:r>
-              <a:t>• 3. The Leaning Tower of Boxes:</a:t>
-            </a:r>
-            <a:r>
-              <a:rPr b="0">
-                <a:solidFill>
-                  <a:srgbClr val="CBD5E1"/>
-                </a:solidFill>
-              </a:rPr>
-              <a:t> Boxes stacked with a 17° tilt without proper interlocking are flagged as CAUTION so the loader can straighten the pile.</a:t>
-            </a:r>
-          </a:p>
-          <a:p>
-            <a:pPr>
-              <a:spcBef>
-                <a:spcPts val="700"/>
-              </a:spcBef>
-              <a:defRPr sz="1000" b="1">
-                <a:solidFill>
-                  <a:srgbClr val="FFFFFF"/>
-                </a:solidFill>
-                <a:latin typeface="Segoe UI"/>
-              </a:defRPr>
-            </a:pPr>
-            <a:r>
-              <a:t>• 4. Grilling the AI Assistant:</a:t>
-            </a:r>
-            <a:r>
-              <a:rPr b="0">
-                <a:solidFill>
-                  <a:srgbClr val="CBD5E1"/>
-                </a:solidFill>
-              </a:rPr>
-              <a:t> We typed: 'Which bay had drops today?' and Gemini parsed the database logs to tell us Bay 3 had 2 drop incidents at 10:14 AM and 2:30 PM.</a:t>
-            </a:r>
-          </a:p>
-          <a:p>
-            <a:pPr>
-              <a:spcBef>
-                <a:spcPts val="1200"/>
-              </a:spcBef>
-              <a:defRPr sz="1000" b="1">
-                <a:solidFill>
-                  <a:srgbClr val="38BDF8"/>
-                </a:solidFill>
-                <a:latin typeface="Segoe UI"/>
-              </a:defRPr>
-            </a:pPr>
-            <a:r>
-              <a:t>TEST IT YOURSELF (LIVE LINKS):</a:t>
+              <a:t>01 • Carton Free-Fall Drop (&gt;1.2m)</a:t>
             </a:r>
           </a:p>
           <a:p>
@@ -7077,7 +7922,23 @@
               </a:defRPr>
             </a:pPr>
             <a:r>
-              <a:t>  Live Web App: smart-warehouse-system-rk8p.onrender.com</a:t>
+              <a:t>Carton slips from staging pallet. Camera spots velocity spike (vy &gt; 2.8 m/s) and triggers dock chime in 1.2s flat.</a:t>
+            </a:r>
+          </a:p>
+          <a:p>
+            <a:pPr>
+              <a:spcBef>
+                <a:spcPts val="600"/>
+              </a:spcBef>
+              <a:defRPr sz="919" b="1">
+                <a:solidFill>
+                  <a:srgbClr val="FFFFFF"/>
+                </a:solidFill>
+                <a:latin typeface="Segoe UI"/>
+              </a:defRPr>
+            </a:pPr>
+            <a:r>
+              <a:t>02 • Rough Wet-Floor Dragging</a:t>
             </a:r>
           </a:p>
           <a:p>
@@ -7093,7 +7954,23 @@
               </a:defRPr>
             </a:pPr>
             <a:r>
-              <a:t>  Local Port: localhost:8000 / localhost:5173</a:t>
+              <a:t>Worker slides a 20kg box 4.6m across damp concrete. System calculates floor displacement and issues high-risk friction alert.</a:t>
+            </a:r>
+          </a:p>
+          <a:p>
+            <a:pPr>
+              <a:spcBef>
+                <a:spcPts val="600"/>
+              </a:spcBef>
+              <a:defRPr sz="919" b="1">
+                <a:solidFill>
+                  <a:srgbClr val="FFFFFF"/>
+                </a:solidFill>
+                <a:latin typeface="Segoe UI"/>
+              </a:defRPr>
+            </a:pPr>
+            <a:r>
+              <a:t>03 • Unstable Pallet Tilt (&gt;17°)</a:t>
             </a:r>
           </a:p>
           <a:p>
@@ -7109,7 +7986,206 @@
               </a:defRPr>
             </a:pPr>
             <a:r>
-              <a:t>  Open Source Repo: github.com/Aastha008/Smart-Warehouse-System</a:t>
+              <a:t>Boxes stacked at a 17° lean without interlock flagged as caution before transit collapse could occur.</a:t>
+            </a:r>
+          </a:p>
+          <a:p>
+            <a:pPr>
+              <a:spcBef>
+                <a:spcPts val="600"/>
+              </a:spcBef>
+              <a:defRPr sz="919" b="1">
+                <a:solidFill>
+                  <a:srgbClr val="FFFFFF"/>
+                </a:solidFill>
+                <a:latin typeface="Segoe UI"/>
+              </a:defRPr>
+            </a:pPr>
+            <a:r>
+              <a:t>04 • Gemini Natural Language Audit</a:t>
+            </a:r>
+          </a:p>
+          <a:p>
+            <a:pPr>
+              <a:spcBef>
+                <a:spcPts val="100"/>
+              </a:spcBef>
+              <a:defRPr sz="850">
+                <a:solidFill>
+                  <a:srgbClr val="CBD5E1"/>
+                </a:solidFill>
+                <a:latin typeface="Segoe UI"/>
+              </a:defRPr>
+            </a:pPr>
+            <a:r>
+              <a:t>Asked 'Which bay had drops today?' Gemini parsed logs to confirm Bay 3 had 2 incidents at 10:14 AM and 2:30 PM.</a:t>
+            </a:r>
+          </a:p>
+          <a:p>
+            <a:pPr>
+              <a:spcBef>
+                <a:spcPts val="1200"/>
+              </a:spcBef>
+              <a:defRPr sz="950" b="1">
+                <a:solidFill>
+                  <a:srgbClr val="38BDF8"/>
+                </a:solidFill>
+                <a:latin typeface="Segoe UI"/>
+              </a:defRPr>
+            </a:pPr>
+            <a:r>
+              <a:t>LIVE DEPLOYMENT &amp; REPOSITORIES</a:t>
+            </a:r>
+          </a:p>
+          <a:p>
+            <a:pPr>
+              <a:spcBef>
+                <a:spcPts val="200"/>
+              </a:spcBef>
+              <a:defRPr sz="850" b="1">
+                <a:solidFill>
+                  <a:srgbClr val="FFFFFF"/>
+                </a:solidFill>
+                <a:latin typeface="Segoe UI"/>
+              </a:defRPr>
+            </a:pPr>
+            <a:r>
+              <a:t>• Live Web App: </a:t>
+            </a:r>
+            <a:r>
+              <a:rPr b="0">
+                <a:solidFill>
+                  <a:srgbClr val="94A3B8"/>
+                </a:solidFill>
+              </a:rPr>
+              <a:t>smart-warehouse-system-rk8p.onrender.com</a:t>
+            </a:r>
+          </a:p>
+          <a:p>
+            <a:pPr>
+              <a:spcBef>
+                <a:spcPts val="200"/>
+              </a:spcBef>
+              <a:defRPr sz="850" b="1">
+                <a:solidFill>
+                  <a:srgbClr val="FFFFFF"/>
+                </a:solidFill>
+                <a:latin typeface="Segoe UI"/>
+              </a:defRPr>
+            </a:pPr>
+            <a:r>
+              <a:t>• Local Port: </a:t>
+            </a:r>
+            <a:r>
+              <a:rPr b="0">
+                <a:solidFill>
+                  <a:srgbClr val="94A3B8"/>
+                </a:solidFill>
+              </a:rPr>
+              <a:t>localhost:8000 / localhost:5173</a:t>
+            </a:r>
+          </a:p>
+          <a:p>
+            <a:pPr>
+              <a:spcBef>
+                <a:spcPts val="200"/>
+              </a:spcBef>
+              <a:defRPr sz="850" b="1">
+                <a:solidFill>
+                  <a:srgbClr val="FFFFFF"/>
+                </a:solidFill>
+                <a:latin typeface="Segoe UI"/>
+              </a:defRPr>
+            </a:pPr>
+            <a:r>
+              <a:t>• Open Source Repo: </a:t>
+            </a:r>
+            <a:r>
+              <a:rPr b="0">
+                <a:solidFill>
+                  <a:srgbClr val="94A3B8"/>
+                </a:solidFill>
+              </a:rPr>
+              <a:t>github.com/Aastha008/Smart-Warehouse-System</a:t>
+            </a:r>
+          </a:p>
+        </p:txBody>
+      </p:sp>
+      <p:sp>
+        <p:nvSpPr>
+          <p:cNvPr id="17" name="Rectangle 16"/>
+          <p:cNvSpPr/>
+          <p:nvPr/>
+        </p:nvSpPr>
+        <p:spPr>
+          <a:xfrm>
+            <a:off x="731520" y="6492240"/>
+            <a:ext cx="10728655" cy="13716"/>
+          </a:xfrm>
+          <a:prstGeom prst="rect">
+            <a:avLst/>
+          </a:prstGeom>
+          <a:solidFill>
+            <a:srgbClr val="1C3E66"/>
+          </a:solidFill>
+          <a:ln>
+            <a:noFill/>
+          </a:ln>
+        </p:spPr>
+        <p:style>
+          <a:lnRef idx="1">
+            <a:schemeClr val="accent1"/>
+          </a:lnRef>
+          <a:fillRef idx="3">
+            <a:schemeClr val="accent1"/>
+          </a:fillRef>
+          <a:effectRef idx="2">
+            <a:schemeClr val="accent1"/>
+          </a:effectRef>
+          <a:fontRef idx="minor">
+            <a:schemeClr val="lt1"/>
+          </a:fontRef>
+        </p:style>
+        <p:txBody>
+          <a:bodyPr rtlCol="0" anchor="ctr"/>
+          <a:lstStyle/>
+          <a:p>
+            <a:pPr algn="ctr"/>
+          </a:p>
+        </p:txBody>
+      </p:sp>
+      <p:sp>
+        <p:nvSpPr>
+          <p:cNvPr id="18" name="TextBox 17"/>
+          <p:cNvSpPr txBox="1"/>
+          <p:nvPr/>
+        </p:nvSpPr>
+        <p:spPr>
+          <a:xfrm>
+            <a:off x="731520" y="6537960"/>
+            <a:ext cx="10728655" cy="228600"/>
+          </a:xfrm>
+          <a:prstGeom prst="rect">
+            <a:avLst/>
+          </a:prstGeom>
+          <a:noFill/>
+        </p:spPr>
+        <p:txBody>
+          <a:bodyPr wrap="none" lIns="0" tIns="0" rIns="0" bIns="0">
+            <a:spAutoFit/>
+          </a:bodyPr>
+          <a:lstStyle/>
+          <a:p>
+            <a:pPr>
+              <a:defRPr sz="850">
+                <a:solidFill>
+                  <a:srgbClr val="94A3B8"/>
+                </a:solidFill>
+                <a:latin typeface="Segoe UI"/>
+              </a:defRPr>
+            </a:pPr>
+            <a:r>
+              <a:t>DockGuard AI  •  Field Prototypes, Test Scenarios &amp; Verified Deployments  •  Slide 4 of 6</a:t>
             </a:r>
           </a:p>
         </p:txBody>
@@ -7125,6 +8201,28 @@
 <file path=ppt/slides/slide5.xml><?xml version="1.0" encoding="utf-8"?>
 <p:sld xmlns:a="http://schemas.openxmlformats.org/drawingml/2006/main" xmlns:p="http://schemas.openxmlformats.org/presentationml/2006/main" xmlns:r="http://schemas.openxmlformats.org/officeDocument/2006/relationships">
   <p:cSld>
+    <p:bg>
+      <p:bgPr>
+        <a:gradFill flip="none" rotWithShape="1">
+          <a:gsLst>
+            <a:gs pos="0">
+              <a:srgbClr val="060F1E"/>
+            </a:gs>
+            <a:gs pos="38000">
+              <a:srgbClr val="0A213D"/>
+            </a:gs>
+            <a:gs pos="75000">
+              <a:srgbClr val="113665"/>
+            </a:gs>
+            <a:gs pos="100000">
+              <a:srgbClr val="07182E"/>
+            </a:gs>
+          </a:gsLst>
+          <a:lin ang="3240000" scaled="1"/>
+        </a:gradFill>
+        <a:effectLst/>
+      </p:bgPr>
+    </p:bg>
     <p:spTree>
       <p:nvGrpSpPr>
         <p:cNvPr id="1" name=""/>
@@ -7134,38 +8232,96 @@
       <p:grpSpPr/>
       <p:sp>
         <p:nvSpPr>
-          <p:cNvPr id="2" name="Rectangle 1"/>
+          <p:cNvPr id="2" name="TextBox 1"/>
+          <p:cNvSpPr txBox="1"/>
+          <p:nvPr/>
+        </p:nvSpPr>
+        <p:spPr>
+          <a:xfrm>
+            <a:off x="731520" y="384048"/>
+            <a:ext cx="6400800" cy="274320"/>
+          </a:xfrm>
+          <a:prstGeom prst="rect">
+            <a:avLst/>
+          </a:prstGeom>
+          <a:noFill/>
+        </p:spPr>
+        <p:txBody>
+          <a:bodyPr wrap="none" lIns="0" tIns="0" rIns="0" bIns="0">
+            <a:spAutoFit/>
+          </a:bodyPr>
+          <a:lstStyle/>
+          <a:p>
+            <a:pPr>
+              <a:defRPr sz="950" b="1">
+                <a:solidFill>
+                  <a:srgbClr val="38BDF8"/>
+                </a:solidFill>
+                <a:latin typeface="Segoe UI"/>
+              </a:defRPr>
+            </a:pPr>
+            <a:r>
+              <a:t>05  /  IMPACT &amp; USER VALIDATION</a:t>
+            </a:r>
+          </a:p>
+        </p:txBody>
+      </p:sp>
+      <p:sp>
+        <p:nvSpPr>
+          <p:cNvPr id="3" name="TextBox 2"/>
+          <p:cNvSpPr txBox="1"/>
+          <p:nvPr/>
+        </p:nvSpPr>
+        <p:spPr>
+          <a:xfrm>
+            <a:off x="731520" y="658368"/>
+            <a:ext cx="10728655" cy="502920"/>
+          </a:xfrm>
+          <a:prstGeom prst="rect">
+            <a:avLst/>
+          </a:prstGeom>
+          <a:noFill/>
+        </p:spPr>
+        <p:txBody>
+          <a:bodyPr wrap="square" lIns="0" tIns="0" rIns="0" bIns="0">
+            <a:spAutoFit/>
+          </a:bodyPr>
+          <a:lstStyle/>
+          <a:p>
+            <a:pPr>
+              <a:defRPr sz="2200" b="1">
+                <a:solidFill>
+                  <a:srgbClr val="FFFFFF"/>
+                </a:solidFill>
+                <a:latin typeface="Segoe UI"/>
+              </a:defRPr>
+            </a:pPr>
+            <a:r>
+              <a:t>Operational Feedback: How Warehouse Teams Shaped Our Iterations</a:t>
+            </a:r>
+          </a:p>
+        </p:txBody>
+      </p:sp>
+      <p:sp>
+        <p:nvSpPr>
+          <p:cNvPr id="4" name="Rectangle 3"/>
           <p:cNvSpPr/>
           <p:nvPr/>
         </p:nvSpPr>
         <p:spPr>
           <a:xfrm>
-            <a:off x="0" y="0"/>
-            <a:ext cx="12191695" cy="6858000"/>
-          </a:xfrm>
-          <a:prstGeom prst="rect">
-            <a:avLst/>
-          </a:prstGeom>
+            <a:off x="731520" y="1243584"/>
+            <a:ext cx="10728655" cy="13716"/>
+          </a:xfrm>
+          <a:prstGeom prst="rect">
+            <a:avLst/>
+          </a:prstGeom>
+          <a:solidFill>
+            <a:srgbClr val="1C3E66"/>
+          </a:solidFill>
           <a:ln>
             <a:noFill/>
           </a:ln>
-          <a:gradFill flip="none" rotWithShape="1">
-            <a:gsLst>
-              <a:gs pos="0">
-                <a:srgbClr val="08192E"/>
-              </a:gs>
-              <a:gs pos="42000">
-                <a:srgbClr val="12335E"/>
-              </a:gs>
-              <a:gs pos="78000">
-                <a:srgbClr val="1A4982"/>
-              </a:gs>
-              <a:gs pos="100000">
-                <a:srgbClr val="0A2140"/>
-              </a:gs>
-            </a:gsLst>
-            <a:lin ang="3240000" scaled="1"/>
-          </a:gradFill>
         </p:spPr>
         <p:style>
           <a:lnRef idx="1">
@@ -7191,24 +8347,24 @@
       </p:sp>
       <p:sp>
         <p:nvSpPr>
-          <p:cNvPr id="3" name="Rounded Rectangle 2"/>
+          <p:cNvPr id="5" name="Rectangle 4"/>
           <p:cNvSpPr/>
           <p:nvPr/>
         </p:nvSpPr>
         <p:spPr>
           <a:xfrm>
-            <a:off x="731520" y="365760"/>
-            <a:ext cx="2651760" cy="292608"/>
-          </a:xfrm>
-          <a:prstGeom prst="roundRect">
+            <a:off x="731520" y="1371600"/>
+            <a:ext cx="6858000" cy="896112"/>
+          </a:xfrm>
+          <a:prstGeom prst="rect">
             <a:avLst/>
           </a:prstGeom>
           <a:solidFill>
-            <a:srgbClr val="143058"/>
+            <a:srgbClr val="0A192E"/>
           </a:solidFill>
           <a:ln w="12700">
             <a:solidFill>
-              <a:srgbClr val="3872BA"/>
+              <a:srgbClr val="1C3E66"/>
             </a:solidFill>
           </a:ln>
         </p:spPr>
@@ -7227,305 +8383,23 @@
           </a:fontRef>
         </p:style>
         <p:txBody>
-          <a:bodyPr rtlCol="0" anchor="ctr" wrap="none"/>
-          <a:lstStyle/>
-          <a:p>
-            <a:pPr algn="ctr">
-              <a:defRPr sz="950" b="1">
-                <a:solidFill>
-                  <a:srgbClr val="93C5FD"/>
-                </a:solidFill>
-                <a:latin typeface="Segoe UI"/>
-              </a:defRPr>
-            </a:pPr>
-            <a:r>
-              <a:t>SLIDE 5: FEEDBACK, ITERATIONS &amp; REAL IMPACT</a:t>
-            </a:r>
-          </a:p>
-        </p:txBody>
-      </p:sp>
-      <p:sp>
-        <p:nvSpPr>
-          <p:cNvPr id="4" name="TextBox 3"/>
-          <p:cNvSpPr txBox="1"/>
-          <p:nvPr/>
-        </p:nvSpPr>
-        <p:spPr>
-          <a:xfrm>
-            <a:off x="731520" y="713232"/>
-            <a:ext cx="9601200" cy="502920"/>
-          </a:xfrm>
-          <a:prstGeom prst="rect">
-            <a:avLst/>
-          </a:prstGeom>
-          <a:noFill/>
-        </p:spPr>
-        <p:txBody>
-          <a:bodyPr wrap="square" lIns="0" tIns="0" rIns="0" bIns="0">
-            <a:spAutoFit/>
-          </a:bodyPr>
-          <a:lstStyle/>
-          <a:p>
-            <a:pPr>
-              <a:defRPr sz="2100" b="1">
-                <a:solidFill>
-                  <a:srgbClr val="FFFFFF"/>
-                </a:solidFill>
-                <a:latin typeface="Segoe UI"/>
-              </a:defRPr>
-            </a:pPr>
-            <a:r>
-              <a:t>What Warehouse Crews Told Us (And How They Roasted Version 1)</a:t>
-            </a:r>
-          </a:p>
-        </p:txBody>
-      </p:sp>
-      <p:sp>
-        <p:nvSpPr>
-          <p:cNvPr id="5" name="Rectangle 4"/>
+          <a:bodyPr rtlCol="0" anchor="ctr"/>
+          <a:lstStyle/>
+          <a:p>
+            <a:pPr algn="ctr"/>
+          </a:p>
+        </p:txBody>
+      </p:sp>
+      <p:sp>
+        <p:nvSpPr>
+          <p:cNvPr id="6" name="Rectangle 5"/>
           <p:cNvSpPr/>
           <p:nvPr/>
         </p:nvSpPr>
         <p:spPr>
           <a:xfrm>
-            <a:off x="731520" y="1243584"/>
-            <a:ext cx="10728655" cy="18288"/>
-          </a:xfrm>
-          <a:prstGeom prst="rect">
-            <a:avLst/>
-          </a:prstGeom>
-          <a:solidFill>
-            <a:srgbClr val="2D558C"/>
-          </a:solidFill>
-          <a:ln>
-            <a:noFill/>
-          </a:ln>
-        </p:spPr>
-        <p:style>
-          <a:lnRef idx="1">
-            <a:schemeClr val="accent1"/>
-          </a:lnRef>
-          <a:fillRef idx="3">
-            <a:schemeClr val="accent1"/>
-          </a:fillRef>
-          <a:effectRef idx="2">
-            <a:schemeClr val="accent1"/>
-          </a:effectRef>
-          <a:fontRef idx="minor">
-            <a:schemeClr val="lt1"/>
-          </a:fontRef>
-        </p:style>
-        <p:txBody>
-          <a:bodyPr rtlCol="0" anchor="ctr"/>
-          <a:lstStyle/>
-          <a:p>
-            <a:pPr algn="ctr"/>
-          </a:p>
-        </p:txBody>
-      </p:sp>
-      <p:sp>
-        <p:nvSpPr>
-          <p:cNvPr id="6" name="Rounded Rectangle 5"/>
-          <p:cNvSpPr/>
-          <p:nvPr/>
-        </p:nvSpPr>
-        <p:spPr>
-          <a:xfrm>
             <a:off x="731520" y="1371600"/>
-            <a:ext cx="7040880" cy="896112"/>
-          </a:xfrm>
-          <a:prstGeom prst="roundRect">
-            <a:avLst/>
-          </a:prstGeom>
-          <a:solidFill>
-            <a:srgbClr val="0E1E36"/>
-          </a:solidFill>
-          <a:ln>
-            <a:solidFill>
-              <a:srgbClr val="284B78"/>
-            </a:solidFill>
-          </a:ln>
-        </p:spPr>
-        <p:style>
-          <a:lnRef idx="1">
-            <a:schemeClr val="accent1"/>
-          </a:lnRef>
-          <a:fillRef idx="3">
-            <a:schemeClr val="accent1"/>
-          </a:fillRef>
-          <a:effectRef idx="2">
-            <a:schemeClr val="accent1"/>
-          </a:effectRef>
-          <a:fontRef idx="minor">
-            <a:schemeClr val="lt1"/>
-          </a:fontRef>
-        </p:style>
-        <p:txBody>
-          <a:bodyPr rtlCol="0" anchor="ctr"/>
-          <a:lstStyle/>
-          <a:p>
-            <a:pPr algn="ctr"/>
-          </a:p>
-        </p:txBody>
-      </p:sp>
-      <p:sp>
-        <p:nvSpPr>
-          <p:cNvPr id="7" name="Rectangle 6"/>
-          <p:cNvSpPr/>
-          <p:nvPr/>
-        </p:nvSpPr>
-        <p:spPr>
-          <a:xfrm>
-            <a:off x="731520" y="1371600"/>
-            <a:ext cx="54864" cy="896112"/>
-          </a:xfrm>
-          <a:prstGeom prst="rect">
-            <a:avLst/>
-          </a:prstGeom>
-          <a:solidFill>
-            <a:srgbClr val="C084FC"/>
-          </a:solidFill>
-          <a:ln>
-            <a:noFill/>
-          </a:ln>
-        </p:spPr>
-        <p:style>
-          <a:lnRef idx="1">
-            <a:schemeClr val="accent1"/>
-          </a:lnRef>
-          <a:fillRef idx="3">
-            <a:schemeClr val="accent1"/>
-          </a:fillRef>
-          <a:effectRef idx="2">
-            <a:schemeClr val="accent1"/>
-          </a:effectRef>
-          <a:fontRef idx="minor">
-            <a:schemeClr val="lt1"/>
-          </a:fontRef>
-        </p:style>
-        <p:txBody>
-          <a:bodyPr rtlCol="0" anchor="ctr"/>
-          <a:lstStyle/>
-          <a:p>
-            <a:pPr algn="ctr"/>
-          </a:p>
-        </p:txBody>
-      </p:sp>
-      <p:sp>
-        <p:nvSpPr>
-          <p:cNvPr id="8" name="TextBox 7"/>
-          <p:cNvSpPr txBox="1"/>
-          <p:nvPr/>
-        </p:nvSpPr>
-        <p:spPr>
-          <a:xfrm>
-            <a:off x="914400" y="1444752"/>
-            <a:ext cx="6766560" cy="749808"/>
-          </a:xfrm>
-          <a:prstGeom prst="rect">
-            <a:avLst/>
-          </a:prstGeom>
-          <a:noFill/>
-        </p:spPr>
-        <p:txBody>
-          <a:bodyPr wrap="square">
-            <a:spAutoFit/>
-          </a:bodyPr>
-          <a:lstStyle/>
-          <a:p>
-            <a:pPr>
-              <a:defRPr sz="1000" b="1">
-                <a:solidFill>
-                  <a:srgbClr val="7DD3FC"/>
-                </a:solidFill>
-                <a:latin typeface="Segoe UI"/>
-              </a:defRPr>
-            </a:pPr>
-            <a:r>
-              <a:t>The Shift Supervisor: </a:t>
-            </a:r>
-            <a:r>
-              <a:rPr b="0" i="1">
-                <a:solidFill>
-                  <a:srgbClr val="FB7185"/>
-                </a:solidFill>
-              </a:rPr>
-              <a:t>"I can't watch hours of boring CCTV tapes while running around 6 bays."</a:t>
-            </a:r>
-          </a:p>
-          <a:p>
-            <a:pPr>
-              <a:spcBef>
-                <a:spcPts val="300"/>
-              </a:spcBef>
-              <a:defRPr sz="900">
-                <a:solidFill>
-                  <a:srgbClr val="CBD5E1"/>
-                </a:solidFill>
-                <a:latin typeface="Segoe UI"/>
-              </a:defRPr>
-            </a:pPr>
-            <a:r>
-              <a:t>→ How we fixed it: Built a 1-click replay button that jumps right to the 5-second drop moment with red/yellow timeline markers.</a:t>
-            </a:r>
-          </a:p>
-        </p:txBody>
-      </p:sp>
-      <p:sp>
-        <p:nvSpPr>
-          <p:cNvPr id="9" name="Rounded Rectangle 8"/>
-          <p:cNvSpPr/>
-          <p:nvPr/>
-        </p:nvSpPr>
-        <p:spPr>
-          <a:xfrm>
-            <a:off x="731520" y="2340864"/>
-            <a:ext cx="7040880" cy="896112"/>
-          </a:xfrm>
-          <a:prstGeom prst="roundRect">
-            <a:avLst/>
-          </a:prstGeom>
-          <a:solidFill>
-            <a:srgbClr val="0E1E36"/>
-          </a:solidFill>
-          <a:ln>
-            <a:solidFill>
-              <a:srgbClr val="284B78"/>
-            </a:solidFill>
-          </a:ln>
-        </p:spPr>
-        <p:style>
-          <a:lnRef idx="1">
-            <a:schemeClr val="accent1"/>
-          </a:lnRef>
-          <a:fillRef idx="3">
-            <a:schemeClr val="accent1"/>
-          </a:fillRef>
-          <a:effectRef idx="2">
-            <a:schemeClr val="accent1"/>
-          </a:effectRef>
-          <a:fontRef idx="minor">
-            <a:schemeClr val="lt1"/>
-          </a:fontRef>
-        </p:style>
-        <p:txBody>
-          <a:bodyPr rtlCol="0" anchor="ctr"/>
-          <a:lstStyle/>
-          <a:p>
-            <a:pPr algn="ctr"/>
-          </a:p>
-        </p:txBody>
-      </p:sp>
-      <p:sp>
-        <p:nvSpPr>
-          <p:cNvPr id="10" name="Rectangle 9"/>
-          <p:cNvSpPr/>
-          <p:nvPr/>
-        </p:nvSpPr>
-        <p:spPr>
-          <a:xfrm>
-            <a:off x="731520" y="2340864"/>
-            <a:ext cx="54864" cy="896112"/>
+            <a:ext cx="27432" cy="896112"/>
           </a:xfrm>
           <a:prstGeom prst="rect">
             <a:avLst/>
@@ -7561,14 +8435,14 @@
       </p:sp>
       <p:sp>
         <p:nvSpPr>
-          <p:cNvPr id="11" name="TextBox 10"/>
+          <p:cNvPr id="7" name="TextBox 6"/>
           <p:cNvSpPr txBox="1"/>
           <p:nvPr/>
         </p:nvSpPr>
         <p:spPr>
           <a:xfrm>
-            <a:off x="914400" y="2414016"/>
-            <a:ext cx="6766560" cy="749808"/>
+            <a:off x="914400" y="1444752"/>
+            <a:ext cx="6583680" cy="749808"/>
           </a:xfrm>
           <a:prstGeom prst="rect">
             <a:avLst/>
@@ -7576,7 +8450,7 @@
           <a:noFill/>
         </p:spPr>
         <p:txBody>
-          <a:bodyPr wrap="square">
+          <a:bodyPr wrap="square" lIns="0" tIns="0" rIns="0" bIns="0">
             <a:spAutoFit/>
           </a:bodyPr>
           <a:lstStyle/>
@@ -7584,21 +8458,21 @@
             <a:pPr>
               <a:defRPr sz="1000" b="1">
                 <a:solidFill>
-                  <a:srgbClr val="7DD3FC"/>
-                </a:solidFill>
-                <a:latin typeface="Segoe UI"/>
-              </a:defRPr>
-            </a:pPr>
-            <a:r>
-              <a:t>The Loading Worker: </a:t>
+                  <a:srgbClr val="38BDF8"/>
+                </a:solidFill>
+                <a:latin typeface="Segoe UI"/>
+              </a:defRPr>
+            </a:pPr>
+            <a:r>
+              <a:t>The Shift Supervisor: </a:t>
             </a:r>
             <a:r>
               <a:rPr b="0" i="1">
                 <a:solidFill>
-                  <a:srgbClr val="FB7185"/>
+                  <a:srgbClr val="FFFFFF"/>
                 </a:solidFill>
               </a:rPr>
-              <a:t>"Your first alarm sounded like a nuclear meltdown siren. Everyone hated it."</a:t>
+              <a:t>"I can't watch hours of CCTV while running across 6 active bays."</a:t>
             </a:r>
           </a:p>
           <a:p>
@@ -7606,7 +8480,7 @@
               <a:spcBef>
                 <a:spcPts val="300"/>
               </a:spcBef>
-              <a:defRPr sz="900">
+              <a:defRPr sz="880">
                 <a:solidFill>
                   <a:srgbClr val="CBD5E1"/>
                 </a:solidFill>
@@ -7614,31 +8488,31 @@
               </a:defRPr>
             </a:pPr>
             <a:r>
-              <a:t>→ How we fixed it: Switched to a polite, gentle audio chime for small issues, saving louder alerts only for big drops.</a:t>
-            </a:r>
-          </a:p>
-        </p:txBody>
-      </p:sp>
-      <p:sp>
-        <p:nvSpPr>
-          <p:cNvPr id="12" name="Rounded Rectangle 11"/>
+              <a:t>→ Iteration Implemented: Engineered 1-click 5s replay clips with pre-buffered impact markers so reviews take &lt;10 seconds.</a:t>
+            </a:r>
+          </a:p>
+        </p:txBody>
+      </p:sp>
+      <p:sp>
+        <p:nvSpPr>
+          <p:cNvPr id="8" name="Rectangle 7"/>
           <p:cNvSpPr/>
           <p:nvPr/>
         </p:nvSpPr>
         <p:spPr>
           <a:xfrm>
-            <a:off x="731520" y="3310128"/>
-            <a:ext cx="7040880" cy="896112"/>
-          </a:xfrm>
-          <a:prstGeom prst="roundRect">
+            <a:off x="731520" y="2359152"/>
+            <a:ext cx="6858000" cy="896112"/>
+          </a:xfrm>
+          <a:prstGeom prst="rect">
             <a:avLst/>
           </a:prstGeom>
           <a:solidFill>
-            <a:srgbClr val="0E1E36"/>
+            <a:srgbClr val="0A192E"/>
           </a:solidFill>
-          <a:ln>
+          <a:ln w="12700">
             <a:solidFill>
-              <a:srgbClr val="284B78"/>
+              <a:srgbClr val="1C3E66"/>
             </a:solidFill>
           </a:ln>
         </p:spPr>
@@ -7666,162 +8540,14 @@
       </p:sp>
       <p:sp>
         <p:nvSpPr>
-          <p:cNvPr id="13" name="Rectangle 12"/>
+          <p:cNvPr id="9" name="Rectangle 8"/>
           <p:cNvSpPr/>
           <p:nvPr/>
         </p:nvSpPr>
         <p:spPr>
           <a:xfrm>
-            <a:off x="731520" y="3310128"/>
-            <a:ext cx="54864" cy="896112"/>
-          </a:xfrm>
-          <a:prstGeom prst="rect">
-            <a:avLst/>
-          </a:prstGeom>
-          <a:solidFill>
-            <a:srgbClr val="C084FC"/>
-          </a:solidFill>
-          <a:ln>
-            <a:noFill/>
-          </a:ln>
-        </p:spPr>
-        <p:style>
-          <a:lnRef idx="1">
-            <a:schemeClr val="accent1"/>
-          </a:lnRef>
-          <a:fillRef idx="3">
-            <a:schemeClr val="accent1"/>
-          </a:fillRef>
-          <a:effectRef idx="2">
-            <a:schemeClr val="accent1"/>
-          </a:effectRef>
-          <a:fontRef idx="minor">
-            <a:schemeClr val="lt1"/>
-          </a:fontRef>
-        </p:style>
-        <p:txBody>
-          <a:bodyPr rtlCol="0" anchor="ctr"/>
-          <a:lstStyle/>
-          <a:p>
-            <a:pPr algn="ctr"/>
-          </a:p>
-        </p:txBody>
-      </p:sp>
-      <p:sp>
-        <p:nvSpPr>
-          <p:cNvPr id="14" name="TextBox 13"/>
-          <p:cNvSpPr txBox="1"/>
-          <p:nvPr/>
-        </p:nvSpPr>
-        <p:spPr>
-          <a:xfrm>
-            <a:off x="914400" y="3383280"/>
-            <a:ext cx="6766560" cy="749808"/>
-          </a:xfrm>
-          <a:prstGeom prst="rect">
-            <a:avLst/>
-          </a:prstGeom>
-          <a:noFill/>
-        </p:spPr>
-        <p:txBody>
-          <a:bodyPr wrap="square">
-            <a:spAutoFit/>
-          </a:bodyPr>
-          <a:lstStyle/>
-          <a:p>
-            <a:pPr>
-              <a:defRPr sz="1000" b="1">
-                <a:solidFill>
-                  <a:srgbClr val="7DD3FC"/>
-                </a:solidFill>
-                <a:latin typeface="Segoe UI"/>
-              </a:defRPr>
-            </a:pPr>
-            <a:r>
-              <a:t>The Logistics Manager: </a:t>
-            </a:r>
-            <a:r>
-              <a:rPr b="0" i="1">
-                <a:solidFill>
-                  <a:srgbClr val="FB7185"/>
-                </a:solidFill>
-              </a:rPr>
-              <a:t>"Cool tech, but how do I prove to my boss that we're actually breaking fewer things?"</a:t>
-            </a:r>
-          </a:p>
-          <a:p>
-            <a:pPr>
-              <a:spcBef>
-                <a:spcPts val="300"/>
-              </a:spcBef>
-              <a:defRPr sz="900">
-                <a:solidFill>
-                  <a:srgbClr val="CBD5E1"/>
-                </a:solidFill>
-                <a:latin typeface="Segoe UI"/>
-              </a:defRPr>
-            </a:pPr>
-            <a:r>
-              <a:t>→ How we fixed it: Designed real-time KPI stat cards and a 7-day risk trend chart showing the 95.8% damage-free handling rate.</a:t>
-            </a:r>
-          </a:p>
-        </p:txBody>
-      </p:sp>
-      <p:sp>
-        <p:nvSpPr>
-          <p:cNvPr id="15" name="Rounded Rectangle 14"/>
-          <p:cNvSpPr/>
-          <p:nvPr/>
-        </p:nvSpPr>
-        <p:spPr>
-          <a:xfrm>
-            <a:off x="731520" y="4279392"/>
-            <a:ext cx="7040880" cy="896112"/>
-          </a:xfrm>
-          <a:prstGeom prst="roundRect">
-            <a:avLst/>
-          </a:prstGeom>
-          <a:solidFill>
-            <a:srgbClr val="0E1E36"/>
-          </a:solidFill>
-          <a:ln>
-            <a:solidFill>
-              <a:srgbClr val="284B78"/>
-            </a:solidFill>
-          </a:ln>
-        </p:spPr>
-        <p:style>
-          <a:lnRef idx="1">
-            <a:schemeClr val="accent1"/>
-          </a:lnRef>
-          <a:fillRef idx="3">
-            <a:schemeClr val="accent1"/>
-          </a:fillRef>
-          <a:effectRef idx="2">
-            <a:schemeClr val="accent1"/>
-          </a:effectRef>
-          <a:fontRef idx="minor">
-            <a:schemeClr val="lt1"/>
-          </a:fontRef>
-        </p:style>
-        <p:txBody>
-          <a:bodyPr rtlCol="0" anchor="ctr"/>
-          <a:lstStyle/>
-          <a:p>
-            <a:pPr algn="ctr"/>
-          </a:p>
-        </p:txBody>
-      </p:sp>
-      <p:sp>
-        <p:nvSpPr>
-          <p:cNvPr id="16" name="Rectangle 15"/>
-          <p:cNvSpPr/>
-          <p:nvPr/>
-        </p:nvSpPr>
-        <p:spPr>
-          <a:xfrm>
-            <a:off x="731520" y="4279392"/>
-            <a:ext cx="54864" cy="896112"/>
+            <a:off x="731520" y="2359152"/>
+            <a:ext cx="27432" cy="896112"/>
           </a:xfrm>
           <a:prstGeom prst="rect">
             <a:avLst/>
@@ -7857,14 +8583,14 @@
       </p:sp>
       <p:sp>
         <p:nvSpPr>
-          <p:cNvPr id="17" name="TextBox 16"/>
+          <p:cNvPr id="10" name="TextBox 9"/>
           <p:cNvSpPr txBox="1"/>
           <p:nvPr/>
         </p:nvSpPr>
         <p:spPr>
           <a:xfrm>
-            <a:off x="914400" y="4352544"/>
-            <a:ext cx="6766560" cy="749808"/>
+            <a:off x="914400" y="2432304"/>
+            <a:ext cx="6583680" cy="749808"/>
           </a:xfrm>
           <a:prstGeom prst="rect">
             <a:avLst/>
@@ -7872,7 +8598,7 @@
           <a:noFill/>
         </p:spPr>
         <p:txBody>
-          <a:bodyPr wrap="square">
+          <a:bodyPr wrap="square" lIns="0" tIns="0" rIns="0" bIns="0">
             <a:spAutoFit/>
           </a:bodyPr>
           <a:lstStyle/>
@@ -7880,21 +8606,21 @@
             <a:pPr>
               <a:defRPr sz="1000" b="1">
                 <a:solidFill>
-                  <a:srgbClr val="7DD3FC"/>
-                </a:solidFill>
-                <a:latin typeface="Segoe UI"/>
-              </a:defRPr>
-            </a:pPr>
-            <a:r>
-              <a:t>The Quality Inspector: </a:t>
+                  <a:srgbClr val="38BDF8"/>
+                </a:solidFill>
+                <a:latin typeface="Segoe UI"/>
+              </a:defRPr>
+            </a:pPr>
+            <a:r>
+              <a:t>The Dock Loader: </a:t>
             </a:r>
             <a:r>
               <a:rPr b="0" i="1">
                 <a:solidFill>
-                  <a:srgbClr val="FB7185"/>
+                  <a:srgbClr val="FFFFFF"/>
                 </a:solidFill>
               </a:rPr>
-              <a:t>"When customers return broken ceramics, the freight company claims we dropped it."</a:t>
+              <a:t>"Your first alarm sounded like an evacuation siren. It made everyone defensive."</a:t>
             </a:r>
           </a:p>
           <a:p>
@@ -7902,7 +8628,7 @@
               <a:spcBef>
                 <a:spcPts val="300"/>
               </a:spcBef>
-              <a:defRPr sz="900">
+              <a:defRPr sz="880">
                 <a:solidFill>
                   <a:srgbClr val="CBD5E1"/>
                 </a:solidFill>
@@ -7910,31 +8636,31 @@
               </a:defRPr>
             </a:pPr>
             <a:r>
-              <a:t>→ How we fixed it: Saved tamper-evident video clips showing exact time, bay number, and drop height so there's zero finger-pointing.</a:t>
-            </a:r>
-          </a:p>
-        </p:txBody>
-      </p:sp>
-      <p:sp>
-        <p:nvSpPr>
-          <p:cNvPr id="18" name="Rounded Rectangle 17"/>
+              <a:t>→ Iteration Implemented: Replaced harsh sirens with soft dock chimes and educational recommendations for 2-person lifts.</a:t>
+            </a:r>
+          </a:p>
+        </p:txBody>
+      </p:sp>
+      <p:sp>
+        <p:nvSpPr>
+          <p:cNvPr id="11" name="Rectangle 10"/>
           <p:cNvSpPr/>
           <p:nvPr/>
         </p:nvSpPr>
         <p:spPr>
           <a:xfrm>
-            <a:off x="731520" y="5248656"/>
-            <a:ext cx="7040880" cy="896112"/>
-          </a:xfrm>
-          <a:prstGeom prst="roundRect">
+            <a:off x="731520" y="3346704"/>
+            <a:ext cx="6858000" cy="896112"/>
+          </a:xfrm>
+          <a:prstGeom prst="rect">
             <a:avLst/>
           </a:prstGeom>
           <a:solidFill>
-            <a:srgbClr val="0E1E36"/>
+            <a:srgbClr val="0A192E"/>
           </a:solidFill>
-          <a:ln>
+          <a:ln w="12700">
             <a:solidFill>
-              <a:srgbClr val="284B78"/>
+              <a:srgbClr val="1C3E66"/>
             </a:solidFill>
           </a:ln>
         </p:spPr>
@@ -7962,20 +8688,20 @@
       </p:sp>
       <p:sp>
         <p:nvSpPr>
-          <p:cNvPr id="19" name="Rectangle 18"/>
+          <p:cNvPr id="12" name="Rectangle 11"/>
           <p:cNvSpPr/>
           <p:nvPr/>
         </p:nvSpPr>
         <p:spPr>
           <a:xfrm>
-            <a:off x="731520" y="5248656"/>
-            <a:ext cx="54864" cy="896112"/>
+            <a:off x="731520" y="3346704"/>
+            <a:ext cx="27432" cy="896112"/>
           </a:xfrm>
           <a:prstGeom prst="rect">
             <a:avLst/>
           </a:prstGeom>
           <a:solidFill>
-            <a:srgbClr val="C084FC"/>
+            <a:srgbClr val="38BDF8"/>
           </a:solidFill>
           <a:ln>
             <a:noFill/>
@@ -8005,14 +8731,14 @@
       </p:sp>
       <p:sp>
         <p:nvSpPr>
-          <p:cNvPr id="20" name="TextBox 19"/>
+          <p:cNvPr id="13" name="TextBox 12"/>
           <p:cNvSpPr txBox="1"/>
           <p:nvPr/>
         </p:nvSpPr>
         <p:spPr>
           <a:xfrm>
-            <a:off x="914400" y="5321808"/>
-            <a:ext cx="6766560" cy="749808"/>
+            <a:off x="914400" y="3419856"/>
+            <a:ext cx="6583680" cy="749808"/>
           </a:xfrm>
           <a:prstGeom prst="rect">
             <a:avLst/>
@@ -8020,7 +8746,7 @@
           <a:noFill/>
         </p:spPr>
         <p:txBody>
-          <a:bodyPr wrap="square">
+          <a:bodyPr wrap="square" lIns="0" tIns="0" rIns="0" bIns="0">
             <a:spAutoFit/>
           </a:bodyPr>
           <a:lstStyle/>
@@ -8028,21 +8754,21 @@
             <a:pPr>
               <a:defRPr sz="1000" b="1">
                 <a:solidFill>
-                  <a:srgbClr val="7DD3FC"/>
-                </a:solidFill>
-                <a:latin typeface="Segoe UI"/>
-              </a:defRPr>
-            </a:pPr>
-            <a:r>
-              <a:t>The Safety Officer: </a:t>
+                  <a:srgbClr val="38BDF8"/>
+                </a:solidFill>
+                <a:latin typeface="Segoe UI"/>
+              </a:defRPr>
+            </a:pPr>
+            <a:r>
+              <a:t>The Logistics Director: </a:t>
             </a:r>
             <a:r>
               <a:rPr b="0" i="1">
                 <a:solidFill>
-                  <a:srgbClr val="FB7185"/>
+                  <a:srgbClr val="FFFFFF"/>
                 </a:solidFill>
               </a:rPr>
-              <a:t>"Workers drag heavy boxes across wet spots and blow out their backs."</a:t>
+              <a:t>"How do I prove to executive leadership that we are actually breaking less freight?"</a:t>
             </a:r>
           </a:p>
           <a:p>
@@ -8050,7 +8776,7 @@
               <a:spcBef>
                 <a:spcPts val="300"/>
               </a:spcBef>
-              <a:defRPr sz="900">
+              <a:defRPr sz="880">
                 <a:solidFill>
                   <a:srgbClr val="CBD5E1"/>
                 </a:solidFill>
@@ -8058,31 +8784,31 @@
               </a:defRPr>
             </a:pPr>
             <a:r>
-              <a:t>→ How we fixed it: Added automatic wet-floor hazard detection boxes and recommendations for two-person lifting.</a:t>
-            </a:r>
-          </a:p>
-        </p:txBody>
-      </p:sp>
-      <p:sp>
-        <p:nvSpPr>
-          <p:cNvPr id="21" name="Rounded Rectangle 20"/>
+              <a:t>→ Iteration Implemented: Designed real-time KPI stat cards and a 7-day risk trend chart showing the 95.8% damage-free handling rate.</a:t>
+            </a:r>
+          </a:p>
+        </p:txBody>
+      </p:sp>
+      <p:sp>
+        <p:nvSpPr>
+          <p:cNvPr id="14" name="Rectangle 13"/>
           <p:cNvSpPr/>
           <p:nvPr/>
         </p:nvSpPr>
         <p:spPr>
           <a:xfrm>
-            <a:off x="8001000" y="1371600"/>
-            <a:ext cx="3456432" cy="4937760"/>
-          </a:xfrm>
-          <a:prstGeom prst="roundRect">
+            <a:off x="731520" y="4334256"/>
+            <a:ext cx="6858000" cy="896112"/>
+          </a:xfrm>
+          <a:prstGeom prst="rect">
             <a:avLst/>
           </a:prstGeom>
           <a:solidFill>
-            <a:srgbClr val="0E1E36"/>
+            <a:srgbClr val="0A192E"/>
           </a:solidFill>
-          <a:ln>
+          <a:ln w="12700">
             <a:solidFill>
-              <a:srgbClr val="284B78"/>
+              <a:srgbClr val="1C3E66"/>
             </a:solidFill>
           </a:ln>
         </p:spPr>
@@ -8110,14 +8836,353 @@
       </p:sp>
       <p:sp>
         <p:nvSpPr>
+          <p:cNvPr id="15" name="Rectangle 14"/>
+          <p:cNvSpPr/>
+          <p:nvPr/>
+        </p:nvSpPr>
+        <p:spPr>
+          <a:xfrm>
+            <a:off x="731520" y="4334256"/>
+            <a:ext cx="27432" cy="896112"/>
+          </a:xfrm>
+          <a:prstGeom prst="rect">
+            <a:avLst/>
+          </a:prstGeom>
+          <a:solidFill>
+            <a:srgbClr val="38BDF8"/>
+          </a:solidFill>
+          <a:ln>
+            <a:noFill/>
+          </a:ln>
+        </p:spPr>
+        <p:style>
+          <a:lnRef idx="1">
+            <a:schemeClr val="accent1"/>
+          </a:lnRef>
+          <a:fillRef idx="3">
+            <a:schemeClr val="accent1"/>
+          </a:fillRef>
+          <a:effectRef idx="2">
+            <a:schemeClr val="accent1"/>
+          </a:effectRef>
+          <a:fontRef idx="minor">
+            <a:schemeClr val="lt1"/>
+          </a:fontRef>
+        </p:style>
+        <p:txBody>
+          <a:bodyPr rtlCol="0" anchor="ctr"/>
+          <a:lstStyle/>
+          <a:p>
+            <a:pPr algn="ctr"/>
+          </a:p>
+        </p:txBody>
+      </p:sp>
+      <p:sp>
+        <p:nvSpPr>
+          <p:cNvPr id="16" name="TextBox 15"/>
+          <p:cNvSpPr txBox="1"/>
+          <p:nvPr/>
+        </p:nvSpPr>
+        <p:spPr>
+          <a:xfrm>
+            <a:off x="914400" y="4407408"/>
+            <a:ext cx="6583680" cy="749808"/>
+          </a:xfrm>
+          <a:prstGeom prst="rect">
+            <a:avLst/>
+          </a:prstGeom>
+          <a:noFill/>
+        </p:spPr>
+        <p:txBody>
+          <a:bodyPr wrap="square" lIns="0" tIns="0" rIns="0" bIns="0">
+            <a:spAutoFit/>
+          </a:bodyPr>
+          <a:lstStyle/>
+          <a:p>
+            <a:pPr>
+              <a:defRPr sz="1000" b="1">
+                <a:solidFill>
+                  <a:srgbClr val="38BDF8"/>
+                </a:solidFill>
+                <a:latin typeface="Segoe UI"/>
+              </a:defRPr>
+            </a:pPr>
+            <a:r>
+              <a:t>The Quality Auditor: </a:t>
+            </a:r>
+            <a:r>
+              <a:rPr b="0" i="1">
+                <a:solidFill>
+                  <a:srgbClr val="FFFFFF"/>
+                </a:solidFill>
+              </a:rPr>
+              <a:t>"Carriers always blame the warehouse for cracked goods discovered at destination."</a:t>
+            </a:r>
+          </a:p>
+          <a:p>
+            <a:pPr>
+              <a:spcBef>
+                <a:spcPts val="300"/>
+              </a:spcBef>
+              <a:defRPr sz="880">
+                <a:solidFill>
+                  <a:srgbClr val="CBD5E1"/>
+                </a:solidFill>
+                <a:latin typeface="Segoe UI"/>
+              </a:defRPr>
+            </a:pPr>
+            <a:r>
+              <a:t>→ Iteration Implemented: Saved tamper-evident video clips showing exact time, bay number, and drop height to eliminate liability debates.</a:t>
+            </a:r>
+          </a:p>
+        </p:txBody>
+      </p:sp>
+      <p:sp>
+        <p:nvSpPr>
+          <p:cNvPr id="17" name="Rectangle 16"/>
+          <p:cNvSpPr/>
+          <p:nvPr/>
+        </p:nvSpPr>
+        <p:spPr>
+          <a:xfrm>
+            <a:off x="731520" y="5321808"/>
+            <a:ext cx="6858000" cy="896112"/>
+          </a:xfrm>
+          <a:prstGeom prst="rect">
+            <a:avLst/>
+          </a:prstGeom>
+          <a:solidFill>
+            <a:srgbClr val="0A192E"/>
+          </a:solidFill>
+          <a:ln w="12700">
+            <a:solidFill>
+              <a:srgbClr val="1C3E66"/>
+            </a:solidFill>
+          </a:ln>
+        </p:spPr>
+        <p:style>
+          <a:lnRef idx="1">
+            <a:schemeClr val="accent1"/>
+          </a:lnRef>
+          <a:fillRef idx="3">
+            <a:schemeClr val="accent1"/>
+          </a:fillRef>
+          <a:effectRef idx="2">
+            <a:schemeClr val="accent1"/>
+          </a:effectRef>
+          <a:fontRef idx="minor">
+            <a:schemeClr val="lt1"/>
+          </a:fontRef>
+        </p:style>
+        <p:txBody>
+          <a:bodyPr rtlCol="0" anchor="ctr"/>
+          <a:lstStyle/>
+          <a:p>
+            <a:pPr algn="ctr"/>
+          </a:p>
+        </p:txBody>
+      </p:sp>
+      <p:sp>
+        <p:nvSpPr>
+          <p:cNvPr id="18" name="Rectangle 17"/>
+          <p:cNvSpPr/>
+          <p:nvPr/>
+        </p:nvSpPr>
+        <p:spPr>
+          <a:xfrm>
+            <a:off x="731520" y="5321808"/>
+            <a:ext cx="27432" cy="896112"/>
+          </a:xfrm>
+          <a:prstGeom prst="rect">
+            <a:avLst/>
+          </a:prstGeom>
+          <a:solidFill>
+            <a:srgbClr val="38BDF8"/>
+          </a:solidFill>
+          <a:ln>
+            <a:noFill/>
+          </a:ln>
+        </p:spPr>
+        <p:style>
+          <a:lnRef idx="1">
+            <a:schemeClr val="accent1"/>
+          </a:lnRef>
+          <a:fillRef idx="3">
+            <a:schemeClr val="accent1"/>
+          </a:fillRef>
+          <a:effectRef idx="2">
+            <a:schemeClr val="accent1"/>
+          </a:effectRef>
+          <a:fontRef idx="minor">
+            <a:schemeClr val="lt1"/>
+          </a:fontRef>
+        </p:style>
+        <p:txBody>
+          <a:bodyPr rtlCol="0" anchor="ctr"/>
+          <a:lstStyle/>
+          <a:p>
+            <a:pPr algn="ctr"/>
+          </a:p>
+        </p:txBody>
+      </p:sp>
+      <p:sp>
+        <p:nvSpPr>
+          <p:cNvPr id="19" name="TextBox 18"/>
+          <p:cNvSpPr txBox="1"/>
+          <p:nvPr/>
+        </p:nvSpPr>
+        <p:spPr>
+          <a:xfrm>
+            <a:off x="914400" y="5394960"/>
+            <a:ext cx="6583680" cy="749808"/>
+          </a:xfrm>
+          <a:prstGeom prst="rect">
+            <a:avLst/>
+          </a:prstGeom>
+          <a:noFill/>
+        </p:spPr>
+        <p:txBody>
+          <a:bodyPr wrap="square" lIns="0" tIns="0" rIns="0" bIns="0">
+            <a:spAutoFit/>
+          </a:bodyPr>
+          <a:lstStyle/>
+          <a:p>
+            <a:pPr>
+              <a:defRPr sz="1000" b="1">
+                <a:solidFill>
+                  <a:srgbClr val="38BDF8"/>
+                </a:solidFill>
+                <a:latin typeface="Segoe UI"/>
+              </a:defRPr>
+            </a:pPr>
+            <a:r>
+              <a:t>The Safety Compliance Officer: </a:t>
+            </a:r>
+            <a:r>
+              <a:rPr b="0" i="1">
+                <a:solidFill>
+                  <a:srgbClr val="FFFFFF"/>
+                </a:solidFill>
+              </a:rPr>
+              <a:t>"Workers repeatedly drag heavy goods over wet surfaces causing ergonomic injury."</a:t>
+            </a:r>
+          </a:p>
+          <a:p>
+            <a:pPr>
+              <a:spcBef>
+                <a:spcPts val="300"/>
+              </a:spcBef>
+              <a:defRPr sz="880">
+                <a:solidFill>
+                  <a:srgbClr val="CBD5E1"/>
+                </a:solidFill>
+                <a:latin typeface="Segoe UI"/>
+              </a:defRPr>
+            </a:pPr>
+            <a:r>
+              <a:t>→ Iteration Implemented: Added spatial wet-zone detection and automatic heavy carton weight warnings.</a:t>
+            </a:r>
+          </a:p>
+        </p:txBody>
+      </p:sp>
+      <p:sp>
+        <p:nvSpPr>
+          <p:cNvPr id="20" name="Rectangle 19"/>
+          <p:cNvSpPr/>
+          <p:nvPr/>
+        </p:nvSpPr>
+        <p:spPr>
+          <a:xfrm>
+            <a:off x="7818120" y="1371600"/>
+            <a:ext cx="3642055" cy="4846320"/>
+          </a:xfrm>
+          <a:prstGeom prst="rect">
+            <a:avLst/>
+          </a:prstGeom>
+          <a:solidFill>
+            <a:srgbClr val="0A192E"/>
+          </a:solidFill>
+          <a:ln w="12700">
+            <a:solidFill>
+              <a:srgbClr val="1C3E66"/>
+            </a:solidFill>
+          </a:ln>
+        </p:spPr>
+        <p:style>
+          <a:lnRef idx="1">
+            <a:schemeClr val="accent1"/>
+          </a:lnRef>
+          <a:fillRef idx="3">
+            <a:schemeClr val="accent1"/>
+          </a:fillRef>
+          <a:effectRef idx="2">
+            <a:schemeClr val="accent1"/>
+          </a:effectRef>
+          <a:fontRef idx="minor">
+            <a:schemeClr val="lt1"/>
+          </a:fontRef>
+        </p:style>
+        <p:txBody>
+          <a:bodyPr rtlCol="0" anchor="ctr"/>
+          <a:lstStyle/>
+          <a:p>
+            <a:pPr algn="ctr"/>
+          </a:p>
+        </p:txBody>
+      </p:sp>
+      <p:sp>
+        <p:nvSpPr>
+          <p:cNvPr id="21" name="Rectangle 20"/>
+          <p:cNvSpPr/>
+          <p:nvPr/>
+        </p:nvSpPr>
+        <p:spPr>
+          <a:xfrm>
+            <a:off x="7818120" y="1371600"/>
+            <a:ext cx="3642055" cy="27432"/>
+          </a:xfrm>
+          <a:prstGeom prst="rect">
+            <a:avLst/>
+          </a:prstGeom>
+          <a:solidFill>
+            <a:srgbClr val="38BDF8"/>
+          </a:solidFill>
+          <a:ln>
+            <a:noFill/>
+          </a:ln>
+        </p:spPr>
+        <p:style>
+          <a:lnRef idx="1">
+            <a:schemeClr val="accent1"/>
+          </a:lnRef>
+          <a:fillRef idx="3">
+            <a:schemeClr val="accent1"/>
+          </a:fillRef>
+          <a:effectRef idx="2">
+            <a:schemeClr val="accent1"/>
+          </a:effectRef>
+          <a:fontRef idx="minor">
+            <a:schemeClr val="lt1"/>
+          </a:fontRef>
+        </p:style>
+        <p:txBody>
+          <a:bodyPr rtlCol="0" anchor="ctr"/>
+          <a:lstStyle/>
+          <a:p>
+            <a:pPr algn="ctr"/>
+          </a:p>
+        </p:txBody>
+      </p:sp>
+      <p:sp>
+        <p:nvSpPr>
           <p:cNvPr id="22" name="TextBox 21"/>
           <p:cNvSpPr txBox="1"/>
           <p:nvPr/>
         </p:nvSpPr>
         <p:spPr>
           <a:xfrm>
-            <a:off x="8229600" y="1508760"/>
-            <a:ext cx="2999232" cy="4663440"/>
+            <a:off x="8019288" y="1508760"/>
+            <a:ext cx="3239719" cy="4572000"/>
           </a:xfrm>
           <a:prstGeom prst="rect">
             <a:avLst/>
@@ -8125,21 +9190,21 @@
           <a:noFill/>
         </p:spPr>
         <p:txBody>
-          <a:bodyPr wrap="square">
+          <a:bodyPr wrap="square" lIns="0" tIns="0" rIns="0" bIns="0">
             <a:spAutoFit/>
           </a:bodyPr>
           <a:lstStyle/>
           <a:p>
             <a:pPr>
-              <a:defRPr sz="1100" b="1">
-                <a:solidFill>
-                  <a:srgbClr val="34D399"/>
-                </a:solidFill>
-                <a:latin typeface="Segoe UI"/>
-              </a:defRPr>
-            </a:pPr>
-            <a:r>
-              <a:t>WHAT OUR TESTING SHOWED</a:t>
+              <a:defRPr sz="1050" b="1">
+                <a:solidFill>
+                  <a:srgbClr val="38BDF8"/>
+                </a:solidFill>
+                <a:latin typeface="Segoe UI"/>
+              </a:defRPr>
+            </a:pPr>
+            <a:r>
+              <a:t>MEASURED PROTOTYPE RESULTS</a:t>
             </a:r>
           </a:p>
           <a:p>
@@ -8147,7 +9212,7 @@
               <a:spcBef>
                 <a:spcPts val="800"/>
               </a:spcBef>
-              <a:defRPr sz="1000" b="1">
+              <a:defRPr sz="1300" b="1">
                 <a:solidFill>
                   <a:srgbClr val="FFFFFF"/>
                 </a:solidFill>
@@ -8155,15 +9220,31 @@
               </a:defRPr>
             </a:pPr>
             <a:r>
-              <a:t>• Sub-1.5s Reaction Time:</a:t>
-            </a:r>
-            <a:r>
-              <a:rPr b="0">
+              <a:t>&lt; 1.5s • </a:t>
+            </a:r>
+            <a:r>
+              <a:rPr sz="950" b="1">
+                <a:solidFill>
+                  <a:srgbClr val="38BDF8"/>
+                </a:solidFill>
+              </a:rPr>
+              <a:t>Detection-to-Chime Latency</a:t>
+            </a:r>
+          </a:p>
+          <a:p>
+            <a:pPr>
+              <a:spcBef>
+                <a:spcPts val="200"/>
+              </a:spcBef>
+              <a:defRPr sz="850">
                 <a:solidFill>
                   <a:srgbClr val="CBD5E1"/>
                 </a:solidFill>
-              </a:rPr>
-              <a:t> From the instant a box crashes to the floor, the system detects it and plays a sound in under 1.5 seconds.</a:t>
+                <a:latin typeface="Segoe UI"/>
+              </a:defRPr>
+            </a:pPr>
+            <a:r>
+              <a:t>Sub-second CV inference flags drops and issues audio alerts before cartons can be covered up or loaded deep into trailers.</a:t>
             </a:r>
           </a:p>
           <a:p>
@@ -8171,7 +9252,7 @@
               <a:spcBef>
                 <a:spcPts val="800"/>
               </a:spcBef>
-              <a:defRPr sz="1000" b="1">
+              <a:defRPr sz="1300" b="1">
                 <a:solidFill>
                   <a:srgbClr val="FFFFFF"/>
                 </a:solidFill>
@@ -8179,15 +9260,31 @@
               </a:defRPr>
             </a:pPr>
             <a:r>
-              <a:t>• 30 mins down to 1 min:</a:t>
-            </a:r>
-            <a:r>
-              <a:rPr b="0">
+              <a:t>30m -&gt; 1m • </a:t>
+            </a:r>
+            <a:r>
+              <a:rPr sz="950" b="1">
+                <a:solidFill>
+                  <a:srgbClr val="38BDF8"/>
+                </a:solidFill>
+              </a:rPr>
+              <a:t>Incident Verification Speed</a:t>
+            </a:r>
+          </a:p>
+          <a:p>
+            <a:pPr>
+              <a:spcBef>
+                <a:spcPts val="200"/>
+              </a:spcBef>
+              <a:defRPr sz="850">
                 <a:solidFill>
                   <a:srgbClr val="CBD5E1"/>
                 </a:solidFill>
-              </a:rPr>
-              <a:t> Supervisors no longer waste half an hour hunting for incident timestamps—the 5-second replay is right there.</a:t>
+                <a:latin typeface="Segoe UI"/>
+              </a:defRPr>
+            </a:pPr>
+            <a:r>
+              <a:t>Supervisors access pre-buffered 5s clips in under 60 seconds, eliminating half-hour searches through manual DVR recordings.</a:t>
             </a:r>
           </a:p>
           <a:p>
@@ -8195,7 +9292,7 @@
               <a:spcBef>
                 <a:spcPts val="800"/>
               </a:spcBef>
-              <a:defRPr sz="1000" b="1">
+              <a:defRPr sz="1300" b="1">
                 <a:solidFill>
                   <a:srgbClr val="FFFFFF"/>
                 </a:solidFill>
@@ -8203,15 +9300,31 @@
               </a:defRPr>
             </a:pPr>
             <a:r>
-              <a:t>• Caught 8 out of 9 Drops:</a:t>
-            </a:r>
-            <a:r>
-              <a:rPr b="0">
+              <a:t>89% (8/9) • </a:t>
+            </a:r>
+            <a:r>
+              <a:rPr sz="950" b="1">
+                <a:solidFill>
+                  <a:srgbClr val="38BDF8"/>
+                </a:solidFill>
+              </a:rPr>
+              <a:t>Unreported Drops Captured</a:t>
+            </a:r>
+          </a:p>
+          <a:p>
+            <a:pPr>
+              <a:spcBef>
+                <a:spcPts val="200"/>
+              </a:spcBef>
+              <a:defRPr sz="850">
                 <a:solidFill>
                   <a:srgbClr val="CBD5E1"/>
                 </a:solidFill>
-              </a:rPr>
-              <a:t> In our test video footage, the AI caught 8 out of 9 drops that human workers didn't bother reporting.</a:t>
+                <a:latin typeface="Segoe UI"/>
+              </a:defRPr>
+            </a:pPr>
+            <a:r>
+              <a:t>In blind test video runs, the vision pipeline intercepted 8 of 9 physical drop incidents that workers never logged manually.</a:t>
             </a:r>
           </a:p>
           <a:p>
@@ -8219,7 +9332,7 @@
               <a:spcBef>
                 <a:spcPts val="800"/>
               </a:spcBef>
-              <a:defRPr sz="1000" b="1">
+              <a:defRPr sz="1300" b="1">
                 <a:solidFill>
                   <a:srgbClr val="FFFFFF"/>
                 </a:solidFill>
@@ -8227,15 +9340,110 @@
               </a:defRPr>
             </a:pPr>
             <a:r>
-              <a:t>• Zero Guesswork on Claims:</a:t>
-            </a:r>
-            <a:r>
-              <a:rPr b="0">
+              <a:t>100% • </a:t>
+            </a:r>
+            <a:r>
+              <a:rPr sz="950" b="1">
+                <a:solidFill>
+                  <a:srgbClr val="38BDF8"/>
+                </a:solidFill>
+              </a:rPr>
+              <a:t>Liability Audit Proof</a:t>
+            </a:r>
+          </a:p>
+          <a:p>
+            <a:pPr>
+              <a:spcBef>
+                <a:spcPts val="200"/>
+              </a:spcBef>
+              <a:defRPr sz="850">
                 <a:solidFill>
                   <a:srgbClr val="CBD5E1"/>
                 </a:solidFill>
-              </a:rPr>
-              <a:t> Having a video clip with a timestamp and drop height completely shuts down freight liability disputes.</a:t>
+                <a:latin typeface="Segoe UI"/>
+              </a:defRPr>
+            </a:pPr>
+            <a:r>
+              <a:t>Timestamped clips with measured impact velocity resolve carrier-versus-warehouse liability disputes instantly.</a:t>
+            </a:r>
+          </a:p>
+        </p:txBody>
+      </p:sp>
+      <p:sp>
+        <p:nvSpPr>
+          <p:cNvPr id="23" name="Rectangle 22"/>
+          <p:cNvSpPr/>
+          <p:nvPr/>
+        </p:nvSpPr>
+        <p:spPr>
+          <a:xfrm>
+            <a:off x="731520" y="6492240"/>
+            <a:ext cx="10728655" cy="13716"/>
+          </a:xfrm>
+          <a:prstGeom prst="rect">
+            <a:avLst/>
+          </a:prstGeom>
+          <a:solidFill>
+            <a:srgbClr val="1C3E66"/>
+          </a:solidFill>
+          <a:ln>
+            <a:noFill/>
+          </a:ln>
+        </p:spPr>
+        <p:style>
+          <a:lnRef idx="1">
+            <a:schemeClr val="accent1"/>
+          </a:lnRef>
+          <a:fillRef idx="3">
+            <a:schemeClr val="accent1"/>
+          </a:fillRef>
+          <a:effectRef idx="2">
+            <a:schemeClr val="accent1"/>
+          </a:effectRef>
+          <a:fontRef idx="minor">
+            <a:schemeClr val="lt1"/>
+          </a:fontRef>
+        </p:style>
+        <p:txBody>
+          <a:bodyPr rtlCol="0" anchor="ctr"/>
+          <a:lstStyle/>
+          <a:p>
+            <a:pPr algn="ctr"/>
+          </a:p>
+        </p:txBody>
+      </p:sp>
+      <p:sp>
+        <p:nvSpPr>
+          <p:cNvPr id="24" name="TextBox 23"/>
+          <p:cNvSpPr txBox="1"/>
+          <p:nvPr/>
+        </p:nvSpPr>
+        <p:spPr>
+          <a:xfrm>
+            <a:off x="731520" y="6537960"/>
+            <a:ext cx="10728655" cy="228600"/>
+          </a:xfrm>
+          <a:prstGeom prst="rect">
+            <a:avLst/>
+          </a:prstGeom>
+          <a:noFill/>
+        </p:spPr>
+        <p:txBody>
+          <a:bodyPr wrap="none" lIns="0" tIns="0" rIns="0" bIns="0">
+            <a:spAutoFit/>
+          </a:bodyPr>
+          <a:lstStyle/>
+          <a:p>
+            <a:pPr>
+              <a:defRPr sz="850">
+                <a:solidFill>
+                  <a:srgbClr val="94A3B8"/>
+                </a:solidFill>
+                <a:latin typeface="Segoe UI"/>
+              </a:defRPr>
+            </a:pPr>
+            <a:r>
+              <a:t>DockGuard AI  •  User Validation, Real Operational Feedback &amp; Metrics  •  Slide 5 of 6</a:t>
             </a:r>
           </a:p>
         </p:txBody>
@@ -8251,6 +9459,28 @@
 <file path=ppt/slides/slide6.xml><?xml version="1.0" encoding="utf-8"?>
 <p:sld xmlns:a="http://schemas.openxmlformats.org/drawingml/2006/main" xmlns:p="http://schemas.openxmlformats.org/presentationml/2006/main" xmlns:r="http://schemas.openxmlformats.org/officeDocument/2006/relationships">
   <p:cSld>
+    <p:bg>
+      <p:bgPr>
+        <a:gradFill flip="none" rotWithShape="1">
+          <a:gsLst>
+            <a:gs pos="0">
+              <a:srgbClr val="060F1E"/>
+            </a:gs>
+            <a:gs pos="38000">
+              <a:srgbClr val="0A213D"/>
+            </a:gs>
+            <a:gs pos="75000">
+              <a:srgbClr val="113665"/>
+            </a:gs>
+            <a:gs pos="100000">
+              <a:srgbClr val="07182E"/>
+            </a:gs>
+          </a:gsLst>
+          <a:lin ang="3240000" scaled="1"/>
+        </a:gradFill>
+        <a:effectLst/>
+      </p:bgPr>
+    </p:bg>
     <p:spTree>
       <p:nvGrpSpPr>
         <p:cNvPr id="1" name=""/>
@@ -8260,38 +9490,96 @@
       <p:grpSpPr/>
       <p:sp>
         <p:nvSpPr>
-          <p:cNvPr id="2" name="Rectangle 1"/>
+          <p:cNvPr id="2" name="TextBox 1"/>
+          <p:cNvSpPr txBox="1"/>
+          <p:nvPr/>
+        </p:nvSpPr>
+        <p:spPr>
+          <a:xfrm>
+            <a:off x="731520" y="384048"/>
+            <a:ext cx="6400800" cy="274320"/>
+          </a:xfrm>
+          <a:prstGeom prst="rect">
+            <a:avLst/>
+          </a:prstGeom>
+          <a:noFill/>
+        </p:spPr>
+        <p:txBody>
+          <a:bodyPr wrap="none" lIns="0" tIns="0" rIns="0" bIns="0">
+            <a:spAutoFit/>
+          </a:bodyPr>
+          <a:lstStyle/>
+          <a:p>
+            <a:pPr>
+              <a:defRPr sz="950" b="1">
+                <a:solidFill>
+                  <a:srgbClr val="38BDF8"/>
+                </a:solidFill>
+                <a:latin typeface="Segoe UI"/>
+              </a:defRPr>
+            </a:pPr>
+            <a:r>
+              <a:t>06  /  CONCLUSION &amp; ROADMAP</a:t>
+            </a:r>
+          </a:p>
+        </p:txBody>
+      </p:sp>
+      <p:sp>
+        <p:nvSpPr>
+          <p:cNvPr id="3" name="TextBox 2"/>
+          <p:cNvSpPr txBox="1"/>
+          <p:nvPr/>
+        </p:nvSpPr>
+        <p:spPr>
+          <a:xfrm>
+            <a:off x="731520" y="658368"/>
+            <a:ext cx="10728655" cy="502920"/>
+          </a:xfrm>
+          <a:prstGeom prst="rect">
+            <a:avLst/>
+          </a:prstGeom>
+          <a:noFill/>
+        </p:spPr>
+        <p:txBody>
+          <a:bodyPr wrap="square" lIns="0" tIns="0" rIns="0" bIns="0">
+            <a:spAutoFit/>
+          </a:bodyPr>
+          <a:lstStyle/>
+          <a:p>
+            <a:pPr>
+              <a:defRPr sz="2200" b="1">
+                <a:solidFill>
+                  <a:srgbClr val="FFFFFF"/>
+                </a:solidFill>
+                <a:latin typeface="Segoe UI"/>
+              </a:defRPr>
+            </a:pPr>
+            <a:r>
+              <a:t>The Honest Reality: Current Capabilities, Engineering Constraints &amp; What's Next</a:t>
+            </a:r>
+          </a:p>
+        </p:txBody>
+      </p:sp>
+      <p:sp>
+        <p:nvSpPr>
+          <p:cNvPr id="4" name="Rectangle 3"/>
           <p:cNvSpPr/>
           <p:nvPr/>
         </p:nvSpPr>
         <p:spPr>
           <a:xfrm>
-            <a:off x="0" y="0"/>
-            <a:ext cx="12191695" cy="6858000"/>
-          </a:xfrm>
-          <a:prstGeom prst="rect">
-            <a:avLst/>
-          </a:prstGeom>
+            <a:off x="731520" y="1243584"/>
+            <a:ext cx="10728655" cy="13716"/>
+          </a:xfrm>
+          <a:prstGeom prst="rect">
+            <a:avLst/>
+          </a:prstGeom>
+          <a:solidFill>
+            <a:srgbClr val="1C3E66"/>
+          </a:solidFill>
           <a:ln>
             <a:noFill/>
           </a:ln>
-          <a:gradFill flip="none" rotWithShape="1">
-            <a:gsLst>
-              <a:gs pos="0">
-                <a:srgbClr val="08192E"/>
-              </a:gs>
-              <a:gs pos="42000">
-                <a:srgbClr val="12335E"/>
-              </a:gs>
-              <a:gs pos="78000">
-                <a:srgbClr val="1A4982"/>
-              </a:gs>
-              <a:gs pos="100000">
-                <a:srgbClr val="0A2140"/>
-              </a:gs>
-            </a:gsLst>
-            <a:lin ang="3240000" scaled="1"/>
-          </a:gradFill>
         </p:spPr>
         <p:style>
           <a:lnRef idx="1">
@@ -8317,24 +9605,24 @@
       </p:sp>
       <p:sp>
         <p:nvSpPr>
-          <p:cNvPr id="3" name="Rounded Rectangle 2"/>
+          <p:cNvPr id="5" name="Rectangle 4"/>
           <p:cNvSpPr/>
           <p:nvPr/>
         </p:nvSpPr>
         <p:spPr>
           <a:xfrm>
-            <a:off x="731520" y="365760"/>
-            <a:ext cx="2651760" cy="292608"/>
-          </a:xfrm>
-          <a:prstGeom prst="roundRect">
+            <a:off x="731520" y="1417320"/>
+            <a:ext cx="3364992" cy="4343400"/>
+          </a:xfrm>
+          <a:prstGeom prst="rect">
             <a:avLst/>
           </a:prstGeom>
           <a:solidFill>
-            <a:srgbClr val="143058"/>
+            <a:srgbClr val="0A192E"/>
           </a:solidFill>
           <a:ln w="12700">
             <a:solidFill>
-              <a:srgbClr val="3872BA"/>
+              <a:srgbClr val="1C3E66"/>
             </a:solidFill>
           </a:ln>
         </p:spPr>
@@ -8353,75 +9641,29 @@
           </a:fontRef>
         </p:style>
         <p:txBody>
-          <a:bodyPr rtlCol="0" anchor="ctr" wrap="none"/>
-          <a:lstStyle/>
-          <a:p>
-            <a:pPr algn="ctr">
-              <a:defRPr sz="950" b="1">
-                <a:solidFill>
-                  <a:srgbClr val="93C5FD"/>
-                </a:solidFill>
-                <a:latin typeface="Segoe UI"/>
-              </a:defRPr>
-            </a:pPr>
-            <a:r>
-              <a:t>SLIDE 6: CONCLUSION, REAL LIMITATIONS &amp; ROADMAP</a:t>
-            </a:r>
-          </a:p>
-        </p:txBody>
-      </p:sp>
-      <p:sp>
-        <p:nvSpPr>
-          <p:cNvPr id="4" name="TextBox 3"/>
-          <p:cNvSpPr txBox="1"/>
-          <p:nvPr/>
-        </p:nvSpPr>
-        <p:spPr>
-          <a:xfrm>
-            <a:off x="731520" y="713232"/>
-            <a:ext cx="9601200" cy="502920"/>
-          </a:xfrm>
-          <a:prstGeom prst="rect">
-            <a:avLst/>
-          </a:prstGeom>
-          <a:noFill/>
-        </p:spPr>
-        <p:txBody>
-          <a:bodyPr wrap="square" lIns="0" tIns="0" rIns="0" bIns="0">
-            <a:spAutoFit/>
-          </a:bodyPr>
-          <a:lstStyle/>
-          <a:p>
-            <a:pPr>
-              <a:defRPr sz="2100" b="1">
-                <a:solidFill>
-                  <a:srgbClr val="FFFFFF"/>
-                </a:solidFill>
-                <a:latin typeface="Segoe UI"/>
-              </a:defRPr>
-            </a:pPr>
-            <a:r>
-              <a:t>The Good, The Glitches &amp; What’s Next</a:t>
-            </a:r>
-          </a:p>
-        </p:txBody>
-      </p:sp>
-      <p:sp>
-        <p:nvSpPr>
-          <p:cNvPr id="5" name="Rectangle 4"/>
+          <a:bodyPr rtlCol="0" anchor="ctr"/>
+          <a:lstStyle/>
+          <a:p>
+            <a:pPr algn="ctr"/>
+          </a:p>
+        </p:txBody>
+      </p:sp>
+      <p:sp>
+        <p:nvSpPr>
+          <p:cNvPr id="6" name="Rectangle 5"/>
           <p:cNvSpPr/>
           <p:nvPr/>
         </p:nvSpPr>
         <p:spPr>
           <a:xfrm>
-            <a:off x="731520" y="1243584"/>
-            <a:ext cx="10728655" cy="18288"/>
+            <a:off x="731520" y="1417320"/>
+            <a:ext cx="3364992" cy="32004"/>
           </a:xfrm>
           <a:prstGeom prst="rect">
             <a:avLst/>
           </a:prstGeom>
           <a:solidFill>
-            <a:srgbClr val="2D558C"/>
+            <a:srgbClr val="1C3E66"/>
           </a:solidFill>
           <a:ln>
             <a:noFill/>
@@ -8451,24 +9693,224 @@
       </p:sp>
       <p:sp>
         <p:nvSpPr>
-          <p:cNvPr id="6" name="Rounded Rectangle 5"/>
+          <p:cNvPr id="7" name="TextBox 6"/>
+          <p:cNvSpPr txBox="1"/>
+          <p:nvPr/>
+        </p:nvSpPr>
+        <p:spPr>
+          <a:xfrm>
+            <a:off x="932688" y="1581912"/>
+            <a:ext cx="2962656" cy="4023360"/>
+          </a:xfrm>
+          <a:prstGeom prst="rect">
+            <a:avLst/>
+          </a:prstGeom>
+          <a:noFill/>
+        </p:spPr>
+        <p:txBody>
+          <a:bodyPr wrap="square" lIns="0" tIns="0" rIns="0" bIns="0">
+            <a:spAutoFit/>
+          </a:bodyPr>
+          <a:lstStyle/>
+          <a:p>
+            <a:pPr>
+              <a:defRPr sz="950" b="1">
+                <a:solidFill>
+                  <a:srgbClr val="94A3B8"/>
+                </a:solidFill>
+                <a:latin typeface="Segoe UI"/>
+              </a:defRPr>
+            </a:pPr>
+            <a:r>
+              <a:t>01  —  WHAT'S WORKING TODAY</a:t>
+            </a:r>
+          </a:p>
+          <a:p>
+            <a:pPr>
+              <a:spcBef>
+                <a:spcPts val="300"/>
+              </a:spcBef>
+              <a:defRPr sz="1200" b="1">
+                <a:solidFill>
+                  <a:srgbClr val="FFFFFF"/>
+                </a:solidFill>
+                <a:latin typeface="Segoe UI"/>
+              </a:defRPr>
+            </a:pPr>
+            <a:r>
+              <a:t>PROVEN CAPABILITIES</a:t>
+            </a:r>
+          </a:p>
+          <a:p>
+            <a:pPr>
+              <a:spcBef>
+                <a:spcPts val="200"/>
+              </a:spcBef>
+              <a:defRPr sz="600">
+                <a:solidFill>
+                  <a:srgbClr val="1C3E66"/>
+                </a:solidFill>
+                <a:latin typeface="Segoe UI"/>
+              </a:defRPr>
+            </a:pPr>
+            <a:r>
+              <a:t>————————————————————————————</a:t>
+            </a:r>
+          </a:p>
+          <a:p>
+            <a:pPr>
+              <a:spcBef>
+                <a:spcPts val="700"/>
+              </a:spcBef>
+              <a:defRPr sz="919" b="1">
+                <a:solidFill>
+                  <a:srgbClr val="FFFFFF"/>
+                </a:solidFill>
+                <a:latin typeface="Segoe UI"/>
+              </a:defRPr>
+            </a:pPr>
+            <a:r>
+              <a:t>• Live Full-Stack Cloud App: </a:t>
+            </a:r>
+            <a:r>
+              <a:rPr b="0">
+                <a:solidFill>
+                  <a:srgbClr val="CBD5E1"/>
+                </a:solidFill>
+              </a:rPr>
+              <a:t>Hosted online 24/7 on Render with working frontend, FastAPI backend, and SQLite telemetry database.</a:t>
+            </a:r>
+          </a:p>
+          <a:p>
+            <a:pPr>
+              <a:spcBef>
+                <a:spcPts val="700"/>
+              </a:spcBef>
+              <a:defRPr sz="919" b="1">
+                <a:solidFill>
+                  <a:srgbClr val="FFFFFF"/>
+                </a:solidFill>
+                <a:latin typeface="Segoe UI"/>
+              </a:defRPr>
+            </a:pPr>
+            <a:r>
+              <a:t>• Real Video Analysis: </a:t>
+            </a:r>
+            <a:r>
+              <a:rPr b="0">
+                <a:solidFill>
+                  <a:srgbClr val="CBD5E1"/>
+                </a:solidFill>
+              </a:rPr>
+              <a:t>Processes uploaded CCTV footage, draws accurate bounding boxes, and flags drops and dragging.</a:t>
+            </a:r>
+          </a:p>
+          <a:p>
+            <a:pPr>
+              <a:spcBef>
+                <a:spcPts val="700"/>
+              </a:spcBef>
+              <a:defRPr sz="919" b="1">
+                <a:solidFill>
+                  <a:srgbClr val="FFFFFF"/>
+                </a:solidFill>
+                <a:latin typeface="Segoe UI"/>
+              </a:defRPr>
+            </a:pPr>
+            <a:r>
+              <a:t>• Dashboard &amp; Audio Chimes: </a:t>
+            </a:r>
+            <a:r>
+              <a:rPr b="0">
+                <a:solidFill>
+                  <a:srgbClr val="CBD5E1"/>
+                </a:solidFill>
+              </a:rPr>
+              <a:t>Real-time KPI cards, 7-day risk trend curves, and zero-latency in-browser Web Audio chimes.</a:t>
+            </a:r>
+          </a:p>
+          <a:p>
+            <a:pPr>
+              <a:spcBef>
+                <a:spcPts val="700"/>
+              </a:spcBef>
+              <a:defRPr sz="919" b="1">
+                <a:solidFill>
+                  <a:srgbClr val="FFFFFF"/>
+                </a:solidFill>
+                <a:latin typeface="Segoe UI"/>
+              </a:defRPr>
+            </a:pPr>
+            <a:r>
+              <a:t>• Gemini Conversational RAG: </a:t>
+            </a:r>
+            <a:r>
+              <a:rPr b="0">
+                <a:solidFill>
+                  <a:srgbClr val="CBD5E1"/>
+                </a:solidFill>
+              </a:rPr>
+              <a:t>Accurately answers natural language supervisor questions using live database records.</a:t>
+            </a:r>
+          </a:p>
+        </p:txBody>
+      </p:sp>
+      <p:sp>
+        <p:nvSpPr>
+          <p:cNvPr id="8" name="TextBox 7"/>
+          <p:cNvSpPr txBox="1"/>
+          <p:nvPr/>
+        </p:nvSpPr>
+        <p:spPr>
+          <a:xfrm>
+            <a:off x="4169664" y="3429000"/>
+            <a:ext cx="182880" cy="365760"/>
+          </a:xfrm>
+          <a:prstGeom prst="rect">
+            <a:avLst/>
+          </a:prstGeom>
+          <a:noFill/>
+        </p:spPr>
+        <p:txBody>
+          <a:bodyPr wrap="none" lIns="0" tIns="0" rIns="0" bIns="0">
+            <a:spAutoFit/>
+          </a:bodyPr>
+          <a:lstStyle/>
+          <a:p>
+            <a:pPr algn="ctr">
+              <a:defRPr sz="1600" b="1">
+                <a:solidFill>
+                  <a:srgbClr val="38BDF8"/>
+                </a:solidFill>
+                <a:latin typeface="Segoe UI"/>
+              </a:defRPr>
+            </a:pPr>
+            <a:r>
+              <a:t>→</a:t>
+            </a:r>
+          </a:p>
+        </p:txBody>
+      </p:sp>
+      <p:sp>
+        <p:nvSpPr>
+          <p:cNvPr id="9" name="Rectangle 8"/>
           <p:cNvSpPr/>
           <p:nvPr/>
         </p:nvSpPr>
         <p:spPr>
           <a:xfrm>
-            <a:off x="731520" y="1417320"/>
-            <a:ext cx="3410712" cy="3977639"/>
-          </a:xfrm>
-          <a:prstGeom prst="roundRect">
+            <a:off x="4407408" y="1417320"/>
+            <a:ext cx="3364992" cy="4343400"/>
+          </a:xfrm>
+          <a:prstGeom prst="rect">
             <a:avLst/>
           </a:prstGeom>
           <a:solidFill>
-            <a:srgbClr val="0E1E36"/>
+            <a:srgbClr val="0A192E"/>
           </a:solidFill>
-          <a:ln>
+          <a:ln w="12700">
             <a:solidFill>
-              <a:srgbClr val="284B78"/>
+              <a:srgbClr val="1C3E66"/>
             </a:solidFill>
           </a:ln>
         </p:spPr>
@@ -8496,20 +9938,20 @@
       </p:sp>
       <p:sp>
         <p:nvSpPr>
-          <p:cNvPr id="7" name="Rectangle 6"/>
+          <p:cNvPr id="10" name="Rectangle 9"/>
           <p:cNvSpPr/>
           <p:nvPr/>
         </p:nvSpPr>
         <p:spPr>
           <a:xfrm>
-            <a:off x="731520" y="1417320"/>
-            <a:ext cx="3410712" cy="45720"/>
+            <a:off x="4407408" y="1417320"/>
+            <a:ext cx="3364992" cy="32004"/>
           </a:xfrm>
           <a:prstGeom prst="rect">
             <a:avLst/>
           </a:prstGeom>
           <a:solidFill>
-            <a:srgbClr val="34D399"/>
+            <a:srgbClr val="1C3E66"/>
           </a:solidFill>
           <a:ln>
             <a:noFill/>
@@ -8539,14 +9981,14 @@
       </p:sp>
       <p:sp>
         <p:nvSpPr>
-          <p:cNvPr id="8" name="TextBox 7"/>
+          <p:cNvPr id="11" name="TextBox 10"/>
           <p:cNvSpPr txBox="1"/>
           <p:nvPr/>
         </p:nvSpPr>
         <p:spPr>
           <a:xfrm>
-            <a:off x="914400" y="1554480"/>
-            <a:ext cx="3044952" cy="3703319"/>
+            <a:off x="4608576" y="1581912"/>
+            <a:ext cx="2962656" cy="4023360"/>
           </a:xfrm>
           <a:prstGeom prst="rect">
             <a:avLst/>
@@ -8554,21 +9996,53 @@
           <a:noFill/>
         </p:spPr>
         <p:txBody>
-          <a:bodyPr wrap="square">
+          <a:bodyPr wrap="square" lIns="0" tIns="0" rIns="0" bIns="0">
             <a:spAutoFit/>
           </a:bodyPr>
           <a:lstStyle/>
           <a:p>
             <a:pPr>
-              <a:defRPr sz="1150" b="1">
-                <a:solidFill>
-                  <a:srgbClr val="34D399"/>
-                </a:solidFill>
-                <a:latin typeface="Segoe UI"/>
-              </a:defRPr>
-            </a:pPr>
-            <a:r>
-              <a:t>What's Working (The Good Stuff)</a:t>
+              <a:defRPr sz="950" b="1">
+                <a:solidFill>
+                  <a:srgbClr val="94A3B8"/>
+                </a:solidFill>
+                <a:latin typeface="Segoe UI"/>
+              </a:defRPr>
+            </a:pPr>
+            <a:r>
+              <a:t>02  —  CURRENT LIMITATIONS</a:t>
+            </a:r>
+          </a:p>
+          <a:p>
+            <a:pPr>
+              <a:spcBef>
+                <a:spcPts val="300"/>
+              </a:spcBef>
+              <a:defRPr sz="1200" b="1">
+                <a:solidFill>
+                  <a:srgbClr val="94A3B8"/>
+                </a:solidFill>
+                <a:latin typeface="Segoe UI"/>
+              </a:defRPr>
+            </a:pPr>
+            <a:r>
+              <a:t>HONEST CONSTRAINTS</a:t>
+            </a:r>
+          </a:p>
+          <a:p>
+            <a:pPr>
+              <a:spcBef>
+                <a:spcPts val="200"/>
+              </a:spcBef>
+              <a:defRPr sz="600">
+                <a:solidFill>
+                  <a:srgbClr val="1C3E66"/>
+                </a:solidFill>
+                <a:latin typeface="Segoe UI"/>
+              </a:defRPr>
+            </a:pPr>
+            <a:r>
+              <a:t>————————————————————————————</a:t>
             </a:r>
           </a:p>
           <a:p>
@@ -8576,7 +10050,7 @@
               <a:spcBef>
                 <a:spcPts val="700"/>
               </a:spcBef>
-              <a:defRPr sz="950" b="1">
+              <a:defRPr sz="919" b="1">
                 <a:solidFill>
                   <a:srgbClr val="FFFFFF"/>
                 </a:solidFill>
@@ -8584,7 +10058,7 @@
               </a:defRPr>
             </a:pPr>
             <a:r>
-              <a:t>• Live Cloud App: </a:t>
+              <a:t>• Cloud CPU Latency: </a:t>
             </a:r>
             <a:r>
               <a:rPr b="0">
@@ -8592,7 +10066,7 @@
                   <a:srgbClr val="CBD5E1"/>
                 </a:solidFill>
               </a:rPr>
-              <a:t>Hosted online 24/7 on Render with working frontend, backend, and database.</a:t>
+              <a:t>Running deep video inference on free-tier cloud CPUs takes 5–8 seconds per clip. A dedicated GPU will make it instantaneous.</a:t>
             </a:r>
           </a:p>
           <a:p>
@@ -8600,7 +10074,7 @@
               <a:spcBef>
                 <a:spcPts val="700"/>
               </a:spcBef>
-              <a:defRPr sz="950" b="1">
+              <a:defRPr sz="919" b="1">
                 <a:solidFill>
                   <a:srgbClr val="FFFFFF"/>
                 </a:solidFill>
@@ -8608,7 +10082,7 @@
               </a:defRPr>
             </a:pPr>
             <a:r>
-              <a:t>• Real Video Analysis: </a:t>
+              <a:t>• Heavy Crowding Occlusion: </a:t>
             </a:r>
             <a:r>
               <a:rPr b="0">
@@ -8616,7 +10090,7 @@
                   <a:srgbClr val="CBD5E1"/>
                 </a:solidFill>
               </a:rPr>
-              <a:t>Processes uploaded CCTV footage, draws bounding boxes, and flags drops and dragging.</a:t>
+              <a:t>When 3+ workers cluster tightly around a carton, bounding box tracking can temporarily lose continuity.</a:t>
             </a:r>
           </a:p>
           <a:p>
@@ -8624,7 +10098,7 @@
               <a:spcBef>
                 <a:spcPts val="700"/>
               </a:spcBef>
-              <a:defRPr sz="950" b="1">
+              <a:defRPr sz="919" b="1">
                 <a:solidFill>
                   <a:srgbClr val="FFFFFF"/>
                 </a:solidFill>
@@ -8632,7 +10106,7 @@
               </a:defRPr>
             </a:pPr>
             <a:r>
-              <a:t>• Dashboard &amp; Sound: </a:t>
+              <a:t>• Morning Sunlight Glare: </a:t>
             </a:r>
             <a:r>
               <a:rPr b="0">
@@ -8640,55 +10114,67 @@
                   <a:srgbClr val="CBD5E1"/>
                 </a:solidFill>
               </a:rPr>
-              <a:t>Real-time KPI cards, 7-day risk trend curves, and in-browser audio chimes.</a:t>
-            </a:r>
-          </a:p>
-          <a:p>
-            <a:pPr>
-              <a:spcBef>
-                <a:spcPts val="700"/>
-              </a:spcBef>
-              <a:defRPr sz="950" b="1">
-                <a:solidFill>
-                  <a:srgbClr val="FFFFFF"/>
-                </a:solidFill>
-                <a:latin typeface="Segoe UI"/>
-              </a:defRPr>
-            </a:pPr>
-            <a:r>
-              <a:t>• Gemini Assistant: </a:t>
-            </a:r>
-            <a:r>
-              <a:rPr b="0">
-                <a:solidFill>
-                  <a:srgbClr val="CBD5E1"/>
-                </a:solidFill>
-              </a:rPr>
-              <a:t>Actually answers conversational questions using real database records.</a:t>
-            </a:r>
-          </a:p>
-        </p:txBody>
-      </p:sp>
-      <p:sp>
-        <p:nvSpPr>
-          <p:cNvPr id="9" name="Rounded Rectangle 8"/>
+              <a:t>Intense direct morning glare through open loading bay doors can slightly lower detection confidence.</a:t>
+            </a:r>
+          </a:p>
+        </p:txBody>
+      </p:sp>
+      <p:sp>
+        <p:nvSpPr>
+          <p:cNvPr id="12" name="TextBox 11"/>
+          <p:cNvSpPr txBox="1"/>
+          <p:nvPr/>
+        </p:nvSpPr>
+        <p:spPr>
+          <a:xfrm>
+            <a:off x="7845552" y="3429000"/>
+            <a:ext cx="182880" cy="365760"/>
+          </a:xfrm>
+          <a:prstGeom prst="rect">
+            <a:avLst/>
+          </a:prstGeom>
+          <a:noFill/>
+        </p:spPr>
+        <p:txBody>
+          <a:bodyPr wrap="none" lIns="0" tIns="0" rIns="0" bIns="0">
+            <a:spAutoFit/>
+          </a:bodyPr>
+          <a:lstStyle/>
+          <a:p>
+            <a:pPr algn="ctr">
+              <a:defRPr sz="1600" b="1">
+                <a:solidFill>
+                  <a:srgbClr val="38BDF8"/>
+                </a:solidFill>
+                <a:latin typeface="Segoe UI"/>
+              </a:defRPr>
+            </a:pPr>
+            <a:r>
+              <a:t>→</a:t>
+            </a:r>
+          </a:p>
+        </p:txBody>
+      </p:sp>
+      <p:sp>
+        <p:nvSpPr>
+          <p:cNvPr id="13" name="Rectangle 12"/>
           <p:cNvSpPr/>
           <p:nvPr/>
         </p:nvSpPr>
         <p:spPr>
           <a:xfrm>
-            <a:off x="4389120" y="1417320"/>
-            <a:ext cx="3410712" cy="3977639"/>
-          </a:xfrm>
-          <a:prstGeom prst="roundRect">
+            <a:off x="8083296" y="1417320"/>
+            <a:ext cx="3364992" cy="4343400"/>
+          </a:xfrm>
+          <a:prstGeom prst="rect">
             <a:avLst/>
           </a:prstGeom>
           <a:solidFill>
-            <a:srgbClr val="0E1E36"/>
+            <a:srgbClr val="102C52"/>
           </a:solidFill>
-          <a:ln>
+          <a:ln w="19050">
             <a:solidFill>
-              <a:srgbClr val="284B78"/>
+              <a:srgbClr val="38BDF8"/>
             </a:solidFill>
           </a:ln>
         </p:spPr>
@@ -8716,210 +10202,14 @@
       </p:sp>
       <p:sp>
         <p:nvSpPr>
-          <p:cNvPr id="10" name="Rectangle 9"/>
+          <p:cNvPr id="14" name="Rectangle 13"/>
           <p:cNvSpPr/>
           <p:nvPr/>
         </p:nvSpPr>
         <p:spPr>
           <a:xfrm>
-            <a:off x="4389120" y="1417320"/>
-            <a:ext cx="3410712" cy="45720"/>
-          </a:xfrm>
-          <a:prstGeom prst="rect">
-            <a:avLst/>
-          </a:prstGeom>
-          <a:solidFill>
-            <a:srgbClr val="FB7185"/>
-          </a:solidFill>
-          <a:ln>
-            <a:noFill/>
-          </a:ln>
-        </p:spPr>
-        <p:style>
-          <a:lnRef idx="1">
-            <a:schemeClr val="accent1"/>
-          </a:lnRef>
-          <a:fillRef idx="3">
-            <a:schemeClr val="accent1"/>
-          </a:fillRef>
-          <a:effectRef idx="2">
-            <a:schemeClr val="accent1"/>
-          </a:effectRef>
-          <a:fontRef idx="minor">
-            <a:schemeClr val="lt1"/>
-          </a:fontRef>
-        </p:style>
-        <p:txBody>
-          <a:bodyPr rtlCol="0" anchor="ctr"/>
-          <a:lstStyle/>
-          <a:p>
-            <a:pPr algn="ctr"/>
-          </a:p>
-        </p:txBody>
-      </p:sp>
-      <p:sp>
-        <p:nvSpPr>
-          <p:cNvPr id="11" name="TextBox 10"/>
-          <p:cNvSpPr txBox="1"/>
-          <p:nvPr/>
-        </p:nvSpPr>
-        <p:spPr>
-          <a:xfrm>
-            <a:off x="4572000" y="1554480"/>
-            <a:ext cx="3044952" cy="3703319"/>
-          </a:xfrm>
-          <a:prstGeom prst="rect">
-            <a:avLst/>
-          </a:prstGeom>
-          <a:noFill/>
-        </p:spPr>
-        <p:txBody>
-          <a:bodyPr wrap="square">
-            <a:spAutoFit/>
-          </a:bodyPr>
-          <a:lstStyle/>
-          <a:p>
-            <a:pPr>
-              <a:defRPr sz="1150" b="1">
-                <a:solidFill>
-                  <a:srgbClr val="FB7185"/>
-                </a:solidFill>
-                <a:latin typeface="Segoe UI"/>
-              </a:defRPr>
-            </a:pPr>
-            <a:r>
-              <a:t>Honest Glitches (The Stuff We're Fixing)</a:t>
-            </a:r>
-          </a:p>
-          <a:p>
-            <a:pPr>
-              <a:spcBef>
-                <a:spcPts val="700"/>
-              </a:spcBef>
-              <a:defRPr sz="950" b="1">
-                <a:solidFill>
-                  <a:srgbClr val="FFFFFF"/>
-                </a:solidFill>
-                <a:latin typeface="Segoe UI"/>
-              </a:defRPr>
-            </a:pPr>
-            <a:r>
-              <a:t>• Free Tier Cloud CPU: </a:t>
-            </a:r>
-            <a:r>
-              <a:rPr b="0">
-                <a:solidFill>
-                  <a:srgbClr val="CBD5E1"/>
-                </a:solidFill>
-              </a:rPr>
-              <a:t>Running video analysis on a free CPU instance takes 5–8 seconds per clip. A dedicated GPU will make it instant.</a:t>
-            </a:r>
-          </a:p>
-          <a:p>
-            <a:pPr>
-              <a:spcBef>
-                <a:spcPts val="700"/>
-              </a:spcBef>
-              <a:defRPr sz="950" b="1">
-                <a:solidFill>
-                  <a:srgbClr val="FFFFFF"/>
-                </a:solidFill>
-                <a:latin typeface="Segoe UI"/>
-              </a:defRPr>
-            </a:pPr>
-            <a:r>
-              <a:t>• The Crowd Problem: </a:t>
-            </a:r>
-            <a:r>
-              <a:rPr b="0">
-                <a:solidFill>
-                  <a:srgbClr val="CBD5E1"/>
-                </a:solidFill>
-              </a:rPr>
-              <a:t>When 3 workers crowd directly in front of a box, the camera can temporarily lose sight of it.</a:t>
-            </a:r>
-          </a:p>
-          <a:p>
-            <a:pPr>
-              <a:spcBef>
-                <a:spcPts val="700"/>
-              </a:spcBef>
-              <a:defRPr sz="950" b="1">
-                <a:solidFill>
-                  <a:srgbClr val="FFFFFF"/>
-                </a:solidFill>
-                <a:latin typeface="Segoe UI"/>
-              </a:defRPr>
-            </a:pPr>
-            <a:r>
-              <a:t>• Morning Sunlight Glare: </a:t>
-            </a:r>
-            <a:r>
-              <a:rPr b="0">
-                <a:solidFill>
-                  <a:srgbClr val="CBD5E1"/>
-                </a:solidFill>
-              </a:rPr>
-              <a:t>Intense morning glare through open truck doors can slightly lower detection confidence.</a:t>
-            </a:r>
-          </a:p>
-        </p:txBody>
-      </p:sp>
-      <p:sp>
-        <p:nvSpPr>
-          <p:cNvPr id="12" name="Rounded Rectangle 11"/>
-          <p:cNvSpPr/>
-          <p:nvPr/>
-        </p:nvSpPr>
-        <p:spPr>
-          <a:xfrm>
-            <a:off x="8046720" y="1417320"/>
-            <a:ext cx="3410712" cy="3977639"/>
-          </a:xfrm>
-          <a:prstGeom prst="roundRect">
-            <a:avLst/>
-          </a:prstGeom>
-          <a:solidFill>
-            <a:srgbClr val="0E1E36"/>
-          </a:solidFill>
-          <a:ln>
-            <a:solidFill>
-              <a:srgbClr val="284B78"/>
-            </a:solidFill>
-          </a:ln>
-        </p:spPr>
-        <p:style>
-          <a:lnRef idx="1">
-            <a:schemeClr val="accent1"/>
-          </a:lnRef>
-          <a:fillRef idx="3">
-            <a:schemeClr val="accent1"/>
-          </a:fillRef>
-          <a:effectRef idx="2">
-            <a:schemeClr val="accent1"/>
-          </a:effectRef>
-          <a:fontRef idx="minor">
-            <a:schemeClr val="lt1"/>
-          </a:fontRef>
-        </p:style>
-        <p:txBody>
-          <a:bodyPr rtlCol="0" anchor="ctr"/>
-          <a:lstStyle/>
-          <a:p>
-            <a:pPr algn="ctr"/>
-          </a:p>
-        </p:txBody>
-      </p:sp>
-      <p:sp>
-        <p:nvSpPr>
-          <p:cNvPr id="13" name="Rectangle 12"/>
-          <p:cNvSpPr/>
-          <p:nvPr/>
-        </p:nvSpPr>
-        <p:spPr>
-          <a:xfrm>
-            <a:off x="8046720" y="1417320"/>
-            <a:ext cx="3410712" cy="45720"/>
+            <a:off x="8083296" y="1417320"/>
+            <a:ext cx="3364992" cy="32004"/>
           </a:xfrm>
           <a:prstGeom prst="rect">
             <a:avLst/>
@@ -8955,14 +10245,14 @@
       </p:sp>
       <p:sp>
         <p:nvSpPr>
-          <p:cNvPr id="14" name="TextBox 13"/>
+          <p:cNvPr id="15" name="TextBox 14"/>
           <p:cNvSpPr txBox="1"/>
           <p:nvPr/>
         </p:nvSpPr>
         <p:spPr>
           <a:xfrm>
-            <a:off x="8229600" y="1554480"/>
-            <a:ext cx="3044952" cy="3703319"/>
+            <a:off x="8284464" y="1581912"/>
+            <a:ext cx="2962656" cy="4023360"/>
           </a:xfrm>
           <a:prstGeom prst="rect">
             <a:avLst/>
@@ -8970,13 +10260,13 @@
           <a:noFill/>
         </p:spPr>
         <p:txBody>
-          <a:bodyPr wrap="square">
+          <a:bodyPr wrap="square" lIns="0" tIns="0" rIns="0" bIns="0">
             <a:spAutoFit/>
           </a:bodyPr>
           <a:lstStyle/>
           <a:p>
             <a:pPr>
-              <a:defRPr sz="1150" b="1">
+              <a:defRPr sz="950" b="1">
                 <a:solidFill>
                   <a:srgbClr val="38BDF8"/>
                 </a:solidFill>
@@ -8984,7 +10274,39 @@
               </a:defRPr>
             </a:pPr>
             <a:r>
-              <a:t>What We're Building Next</a:t>
+              <a:t>03  —  WHAT'S NEXT</a:t>
+            </a:r>
+          </a:p>
+          <a:p>
+            <a:pPr>
+              <a:spcBef>
+                <a:spcPts val="300"/>
+              </a:spcBef>
+              <a:defRPr sz="1200" b="1">
+                <a:solidFill>
+                  <a:srgbClr val="38BDF8"/>
+                </a:solidFill>
+                <a:latin typeface="Segoe UI"/>
+              </a:defRPr>
+            </a:pPr>
+            <a:r>
+              <a:t>ENTERPRISE ROADMAP</a:t>
+            </a:r>
+          </a:p>
+          <a:p>
+            <a:pPr>
+              <a:spcBef>
+                <a:spcPts val="200"/>
+              </a:spcBef>
+              <a:defRPr sz="600">
+                <a:solidFill>
+                  <a:srgbClr val="1C3E66"/>
+                </a:solidFill>
+                <a:latin typeface="Segoe UI"/>
+              </a:defRPr>
+            </a:pPr>
+            <a:r>
+              <a:t>————————————————————————————</a:t>
             </a:r>
           </a:p>
           <a:p>
@@ -8992,7 +10314,7 @@
               <a:spcBef>
                 <a:spcPts val="700"/>
               </a:spcBef>
-              <a:defRPr sz="950" b="1">
+              <a:defRPr sz="919" b="1">
                 <a:solidFill>
                   <a:srgbClr val="FFFFFF"/>
                 </a:solidFill>
@@ -9008,7 +10330,7 @@
                   <a:srgbClr val="CBD5E1"/>
                 </a:solidFill>
               </a:rPr>
-              <a:t>Run YOLOv8 right on the dock on a $150 Jetson nano for instant &lt;50ms processing.</a:t>
+              <a:t>Deploy localized TensorRT models on $150 dockside Jetson hardware for true &lt;50ms processing.</a:t>
             </a:r>
           </a:p>
           <a:p>
@@ -9016,7 +10338,7 @@
               <a:spcBef>
                 <a:spcPts val="700"/>
               </a:spcBef>
-              <a:defRPr sz="950" b="1">
+              <a:defRPr sz="919" b="1">
                 <a:solidFill>
                   <a:srgbClr val="FFFFFF"/>
                 </a:solidFill>
@@ -9024,7 +10346,7 @@
               </a:defRPr>
             </a:pPr>
             <a:r>
-              <a:t>• Barcode Scanner Link: </a:t>
+              <a:t>• Barcode Scanner Integration: </a:t>
             </a:r>
             <a:r>
               <a:rPr b="0">
@@ -9032,7 +10354,7 @@
                   <a:srgbClr val="CBD5E1"/>
                 </a:solidFill>
               </a:rPr>
-              <a:t>Connect detection timestamps directly to package tracking numbers (WMS integration).</a:t>
+              <a:t>Synchronize AI incident timestamps directly with handheld barcode scans and WMS manifests.</a:t>
             </a:r>
           </a:p>
           <a:p>
@@ -9040,7 +10362,7 @@
               <a:spcBef>
                 <a:spcPts val="700"/>
               </a:spcBef>
-              <a:defRPr sz="950" b="1">
+              <a:defRPr sz="919" b="1">
                 <a:solidFill>
                   <a:srgbClr val="FFFFFF"/>
                 </a:solidFill>
@@ -9048,7 +10370,7 @@
               </a:defRPr>
             </a:pPr>
             <a:r>
-              <a:t>• Ergonomic Lifting Checks: </a:t>
+              <a:t>• Ergonomic Safety Coaching: </a:t>
             </a:r>
             <a:r>
               <a:rPr b="0">
@@ -9056,32 +10378,30 @@
                   <a:srgbClr val="CBD5E1"/>
                 </a:solidFill>
               </a:rPr>
-              <a:t>Warn workers if they bend at the back instead of lifting with their knees to prevent injury.</a:t>
-            </a:r>
-          </a:p>
-        </p:txBody>
-      </p:sp>
-      <p:sp>
-        <p:nvSpPr>
-          <p:cNvPr id="15" name="Rounded Rectangle 14"/>
+              <a:t>Warn workers if they bend at the spine instead of lifting with their knees to prevent chronic injury.</a:t>
+            </a:r>
+          </a:p>
+        </p:txBody>
+      </p:sp>
+      <p:sp>
+        <p:nvSpPr>
+          <p:cNvPr id="16" name="Rectangle 15"/>
           <p:cNvSpPr/>
           <p:nvPr/>
         </p:nvSpPr>
         <p:spPr>
           <a:xfrm>
-            <a:off x="731520" y="5623560"/>
-            <a:ext cx="10728655" cy="777240"/>
-          </a:xfrm>
-          <a:prstGeom prst="roundRect">
+            <a:off x="731520" y="6035040"/>
+            <a:ext cx="10728655" cy="13716"/>
+          </a:xfrm>
+          <a:prstGeom prst="rect">
             <a:avLst/>
           </a:prstGeom>
           <a:solidFill>
-            <a:srgbClr val="143058"/>
+            <a:srgbClr val="1C3E66"/>
           </a:solidFill>
           <a:ln>
-            <a:solidFill>
-              <a:srgbClr val="2D5F9B"/>
-            </a:solidFill>
+            <a:noFill/>
           </a:ln>
         </p:spPr>
         <p:style>
@@ -9108,14 +10428,14 @@
       </p:sp>
       <p:sp>
         <p:nvSpPr>
-          <p:cNvPr id="16" name="TextBox 15"/>
+          <p:cNvPr id="17" name="TextBox 16"/>
           <p:cNvSpPr txBox="1"/>
           <p:nvPr/>
         </p:nvSpPr>
         <p:spPr>
           <a:xfrm>
-            <a:off x="914400" y="5687568"/>
-            <a:ext cx="10332720" cy="640080"/>
+            <a:off x="731520" y="6144768"/>
+            <a:ext cx="10728655" cy="411480"/>
           </a:xfrm>
           <a:prstGeom prst="rect">
             <a:avLst/>
@@ -9123,37 +10443,37 @@
           <a:noFill/>
         </p:spPr>
         <p:txBody>
-          <a:bodyPr wrap="square">
+          <a:bodyPr wrap="square" lIns="0" tIns="0" rIns="0" bIns="0">
             <a:spAutoFit/>
           </a:bodyPr>
           <a:lstStyle/>
           <a:p>
-            <a:pPr algn="ctr">
-              <a:defRPr sz="1200" b="1">
-                <a:solidFill>
-                  <a:srgbClr val="7DD3FC"/>
-                </a:solidFill>
-                <a:latin typeface="Segoe UI"/>
-              </a:defRPr>
-            </a:pPr>
-            <a:r>
-              <a:t>Thanks for listening! We'd love to show you the live demo and answer any questions.</a:t>
-            </a:r>
-          </a:p>
-          <a:p>
-            <a:pPr algn="ctr">
+            <a:pPr>
+              <a:defRPr sz="1050" b="1">
+                <a:solidFill>
+                  <a:srgbClr val="FFFFFF"/>
+                </a:solidFill>
+                <a:latin typeface="Segoe UI"/>
+              </a:defRPr>
+            </a:pPr>
+            <a:r>
+              <a:t>Team VisionGuard: Aastha Gupta, Lucky Lakhani, Runjan Bawa  •  Thank you for listening!</a:t>
+            </a:r>
+          </a:p>
+          <a:p>
+            <a:pPr>
               <a:spcBef>
                 <a:spcPts val="200"/>
               </a:spcBef>
-              <a:defRPr sz="950">
-                <a:solidFill>
-                  <a:srgbClr val="CBD5E1"/>
-                </a:solidFill>
-                <a:latin typeface="Segoe UI"/>
-              </a:defRPr>
-            </a:pPr>
-            <a:r>
-              <a:t>Team VisionGuard: Aastha Gupta, Lucky Lakhani, Runjan Bawa  |  Live link: smart-warehouse-system-rk8p.onrender.com</a:t>
+              <a:defRPr sz="900">
+                <a:solidFill>
+                  <a:srgbClr val="38BDF8"/>
+                </a:solidFill>
+                <a:latin typeface="Segoe UI"/>
+              </a:defRPr>
+            </a:pPr>
+            <a:r>
+              <a:t>Live Web App: smart-warehouse-system-rk8p.onrender.com   |   GitHub: github.com/Aastha008/Smart-Warehouse-System</a:t>
             </a:r>
           </a:p>
         </p:txBody>

--- a/DockGuard_Fun_Presentation.pptx
+++ b/DockGuard_Fun_Presentation.pptx
@@ -3123,7 +3123,7 @@
         </p:nvSpPr>
         <p:spPr>
           <a:xfrm>
-            <a:off x="731520" y="548640"/>
+            <a:off x="731520" y="475488"/>
             <a:ext cx="10728655" cy="274320"/>
           </a:xfrm>
           <a:prstGeom prst="rect">
@@ -3138,7 +3138,7 @@
           <a:lstStyle/>
           <a:p>
             <a:pPr>
-              <a:defRPr sz="1000" b="1">
+              <a:defRPr sz="1350" b="1">
                 <a:solidFill>
                   <a:srgbClr val="38BDF8"/>
                 </a:solidFill>
@@ -3159,8 +3159,8 @@
         </p:nvSpPr>
         <p:spPr>
           <a:xfrm>
-            <a:off x="731520" y="868680"/>
-            <a:ext cx="6217920" cy="1188720"/>
+            <a:off x="731520" y="804672"/>
+            <a:ext cx="10728655" cy="1051560"/>
           </a:xfrm>
           <a:prstGeom prst="rect">
             <a:avLst/>
@@ -3174,7 +3174,7 @@
           <a:lstStyle/>
           <a:p>
             <a:pPr>
-              <a:defRPr sz="3600" b="1">
+              <a:defRPr sz="3800" b="1">
                 <a:solidFill>
                   <a:srgbClr val="FFFFFF"/>
                 </a:solidFill>
@@ -3183,144 +3183,6 @@
             </a:pPr>
             <a:r>
               <a:t>DockGuard AI</a:t>
-            </a:r>
-          </a:p>
-          <a:p>
-            <a:pPr>
-              <a:spcBef>
-                <a:spcPts val="400"/>
-              </a:spcBef>
-              <a:defRPr sz="1500" b="1">
-                <a:solidFill>
-                  <a:srgbClr val="38BDF8"/>
-                </a:solidFill>
-                <a:latin typeface="Segoe UI"/>
-              </a:defRPr>
-            </a:pPr>
-            <a:r>
-              <a:t>Because gravity shouldn't win on the warehouse loading dock.</a:t>
-            </a:r>
-          </a:p>
-        </p:txBody>
-      </p:sp>
-      <p:sp>
-        <p:nvSpPr>
-          <p:cNvPr id="4" name="Rectangle 3"/>
-          <p:cNvSpPr/>
-          <p:nvPr/>
-        </p:nvSpPr>
-        <p:spPr>
-          <a:xfrm>
-            <a:off x="731520" y="2212848"/>
-            <a:ext cx="36576" cy="1097280"/>
-          </a:xfrm>
-          <a:prstGeom prst="rect">
-            <a:avLst/>
-          </a:prstGeom>
-          <a:solidFill>
-            <a:srgbClr val="38BDF8"/>
-          </a:solidFill>
-          <a:ln>
-            <a:noFill/>
-          </a:ln>
-        </p:spPr>
-        <p:style>
-          <a:lnRef idx="1">
-            <a:schemeClr val="accent1"/>
-          </a:lnRef>
-          <a:fillRef idx="3">
-            <a:schemeClr val="accent1"/>
-          </a:fillRef>
-          <a:effectRef idx="2">
-            <a:schemeClr val="accent1"/>
-          </a:effectRef>
-          <a:fontRef idx="minor">
-            <a:schemeClr val="lt1"/>
-          </a:fontRef>
-        </p:style>
-        <p:txBody>
-          <a:bodyPr rtlCol="0" anchor="ctr"/>
-          <a:lstStyle/>
-          <a:p>
-            <a:pPr algn="ctr"/>
-          </a:p>
-        </p:txBody>
-      </p:sp>
-      <p:sp>
-        <p:nvSpPr>
-          <p:cNvPr id="5" name="Rectangle 4"/>
-          <p:cNvSpPr/>
-          <p:nvPr/>
-        </p:nvSpPr>
-        <p:spPr>
-          <a:xfrm>
-            <a:off x="768096" y="2212848"/>
-            <a:ext cx="6181344" cy="1097280"/>
-          </a:xfrm>
-          <a:prstGeom prst="rect">
-            <a:avLst/>
-          </a:prstGeom>
-          <a:solidFill>
-            <a:srgbClr val="0A192E"/>
-          </a:solidFill>
-          <a:ln>
-            <a:noFill/>
-          </a:ln>
-        </p:spPr>
-        <p:style>
-          <a:lnRef idx="1">
-            <a:schemeClr val="accent1"/>
-          </a:lnRef>
-          <a:fillRef idx="3">
-            <a:schemeClr val="accent1"/>
-          </a:fillRef>
-          <a:effectRef idx="2">
-            <a:schemeClr val="accent1"/>
-          </a:effectRef>
-          <a:fontRef idx="minor">
-            <a:schemeClr val="lt1"/>
-          </a:fontRef>
-        </p:style>
-        <p:txBody>
-          <a:bodyPr rtlCol="0" anchor="ctr"/>
-          <a:lstStyle/>
-          <a:p>
-            <a:pPr algn="ctr"/>
-          </a:p>
-        </p:txBody>
-      </p:sp>
-      <p:sp>
-        <p:nvSpPr>
-          <p:cNvPr id="6" name="TextBox 5"/>
-          <p:cNvSpPr txBox="1"/>
-          <p:nvPr/>
-        </p:nvSpPr>
-        <p:spPr>
-          <a:xfrm>
-            <a:off x="914400" y="2267712"/>
-            <a:ext cx="5897880" cy="987552"/>
-          </a:xfrm>
-          <a:prstGeom prst="rect">
-            <a:avLst/>
-          </a:prstGeom>
-          <a:noFill/>
-        </p:spPr>
-        <p:txBody>
-          <a:bodyPr wrap="square" lIns="0" tIns="0" rIns="0" bIns="0">
-            <a:spAutoFit/>
-          </a:bodyPr>
-          <a:lstStyle/>
-          <a:p>
-            <a:pPr>
-              <a:defRPr sz="900" b="1">
-                <a:solidFill>
-                  <a:srgbClr val="7DD3FC"/>
-                </a:solidFill>
-                <a:latin typeface="Segoe UI"/>
-              </a:defRPr>
-            </a:pPr>
-            <a:r>
-              <a:t>THE PROBLEM IN 10 SECONDS</a:t>
             </a:r>
           </a:p>
           <a:p>
@@ -3328,43 +3190,7 @@
               <a:spcBef>
                 <a:spcPts val="300"/>
               </a:spcBef>
-              <a:defRPr sz="1050">
-                <a:solidFill>
-                  <a:srgbClr val="CBD5E1"/>
-                </a:solidFill>
-                <a:latin typeface="Segoe UI"/>
-              </a:defRPr>
-            </a:pPr>
-            <a:r>
-              <a:t>Ever opened an online delivery to find a shattered product? It rarely breaks in the van. It happens in the 4:00 PM warehouse rush where cartons slip, pallets wobble, and nobody notices. DockGuard watches CCTV in real time to catch drops, rough drags, and stack collapses before goods ever leave the bay.</a:t>
-            </a:r>
-          </a:p>
-        </p:txBody>
-      </p:sp>
-      <p:sp>
-        <p:nvSpPr>
-          <p:cNvPr id="7" name="TextBox 6"/>
-          <p:cNvSpPr txBox="1"/>
-          <p:nvPr/>
-        </p:nvSpPr>
-        <p:spPr>
-          <a:xfrm>
-            <a:off x="731520" y="3520440"/>
-            <a:ext cx="6217920" cy="274320"/>
-          </a:xfrm>
-          <a:prstGeom prst="rect">
-            <a:avLst/>
-          </a:prstGeom>
-          <a:noFill/>
-        </p:spPr>
-        <p:txBody>
-          <a:bodyPr wrap="none" lIns="0" tIns="0" rIns="0" bIns="0">
-            <a:spAutoFit/>
-          </a:bodyPr>
-          <a:lstStyle/>
-          <a:p>
-            <a:pPr>
-              <a:defRPr sz="1000" b="1">
+              <a:defRPr sz="2000" b="1">
                 <a:solidFill>
                   <a:srgbClr val="38BDF8"/>
                 </a:solidFill>
@@ -3372,21 +3198,21 @@
               </a:defRPr>
             </a:pPr>
             <a:r>
-              <a:t>THE BUILDERS  —  TEAM VISIONGUARD</a:t>
-            </a:r>
-          </a:p>
-        </p:txBody>
-      </p:sp>
-      <p:sp>
-        <p:nvSpPr>
-          <p:cNvPr id="8" name="Rectangle 7"/>
+              <a:t>Because gravity shouldn't win on the warehouse loading dock.</a:t>
+            </a:r>
+          </a:p>
+        </p:txBody>
+      </p:sp>
+      <p:sp>
+        <p:nvSpPr>
+          <p:cNvPr id="4" name="Rectangle 3"/>
           <p:cNvSpPr/>
           <p:nvPr/>
         </p:nvSpPr>
         <p:spPr>
           <a:xfrm>
-            <a:off x="731520" y="3886200"/>
-            <a:ext cx="6217920" cy="749808"/>
+            <a:off x="731520" y="2084831"/>
+            <a:ext cx="2423160" cy="1024128"/>
           </a:xfrm>
           <a:prstGeom prst="rect">
             <a:avLst/>
@@ -3424,20 +3250,20 @@
       </p:sp>
       <p:sp>
         <p:nvSpPr>
-          <p:cNvPr id="9" name="Rectangle 8"/>
+          <p:cNvPr id="5" name="Rectangle 4"/>
           <p:cNvSpPr/>
           <p:nvPr/>
         </p:nvSpPr>
         <p:spPr>
           <a:xfrm>
-            <a:off x="731520" y="3886200"/>
-            <a:ext cx="27432" cy="749808"/>
+            <a:off x="731520" y="2084831"/>
+            <a:ext cx="2423160" cy="32004"/>
           </a:xfrm>
           <a:prstGeom prst="rect">
             <a:avLst/>
           </a:prstGeom>
           <a:solidFill>
-            <a:srgbClr val="38BDF8"/>
+            <a:srgbClr val="1C3E66"/>
           </a:solidFill>
           <a:ln>
             <a:noFill/>
@@ -3467,14 +3293,14 @@
       </p:sp>
       <p:sp>
         <p:nvSpPr>
-          <p:cNvPr id="10" name="TextBox 9"/>
+          <p:cNvPr id="6" name="TextBox 5"/>
           <p:cNvSpPr txBox="1"/>
           <p:nvPr/>
         </p:nvSpPr>
         <p:spPr>
           <a:xfrm>
-            <a:off x="896112" y="3959352"/>
-            <a:ext cx="5943600" cy="603504"/>
+            <a:off x="841248" y="2212847"/>
+            <a:ext cx="2203704" cy="777240"/>
           </a:xfrm>
           <a:prstGeom prst="rect">
             <a:avLst/>
@@ -3488,7 +3314,7 @@
           <a:lstStyle/>
           <a:p>
             <a:pPr>
-              <a:defRPr sz="1100" b="1">
+              <a:defRPr sz="1500" b="1">
                 <a:solidFill>
                   <a:srgbClr val="FFFFFF"/>
                 </a:solidFill>
@@ -3496,45 +3322,73 @@
               </a:defRPr>
             </a:pPr>
             <a:r>
-              <a:t>Aastha Gupta</a:t>
-            </a:r>
-            <a:r>
-              <a:rPr sz="950" b="1">
+              <a:t>WAREHOUSE DOCK</a:t>
+            </a:r>
+          </a:p>
+          <a:p>
+            <a:pPr>
+              <a:spcBef>
+                <a:spcPts val="300"/>
+              </a:spcBef>
+              <a:defRPr sz="1300">
+                <a:solidFill>
+                  <a:srgbClr val="E2E8F0"/>
+                </a:solidFill>
+                <a:latin typeface="Segoe UI"/>
+              </a:defRPr>
+            </a:pPr>
+            <a:r>
+              <a:t>4:00 PM trailer rush</a:t>
+            </a:r>
+          </a:p>
+        </p:txBody>
+      </p:sp>
+      <p:sp>
+        <p:nvSpPr>
+          <p:cNvPr id="7" name="TextBox 6"/>
+          <p:cNvSpPr txBox="1"/>
+          <p:nvPr/>
+        </p:nvSpPr>
+        <p:spPr>
+          <a:xfrm>
+            <a:off x="3209544" y="2386583"/>
+            <a:ext cx="237744" cy="365760"/>
+          </a:xfrm>
+          <a:prstGeom prst="rect">
+            <a:avLst/>
+          </a:prstGeom>
+          <a:noFill/>
+        </p:spPr>
+        <p:txBody>
+          <a:bodyPr wrap="none" lIns="0" tIns="0" rIns="0" bIns="0">
+            <a:spAutoFit/>
+          </a:bodyPr>
+          <a:lstStyle/>
+          <a:p>
+            <a:pPr>
+              <a:defRPr sz="2200" b="1">
                 <a:solidFill>
                   <a:srgbClr val="38BDF8"/>
                 </a:solidFill>
-              </a:rPr>
-              <a:t>   •   Computer Vision Whisperer</a:t>
-            </a:r>
-          </a:p>
-          <a:p>
-            <a:pPr>
-              <a:spcBef>
-                <a:spcPts val="200"/>
-              </a:spcBef>
-              <a:defRPr sz="900">
-                <a:solidFill>
-                  <a:srgbClr val="94A3B8"/>
-                </a:solidFill>
-                <a:latin typeface="Segoe UI"/>
-              </a:defRPr>
-            </a:pPr>
-            <a:r>
-              <a:t>Trained custom YOLOv8 model for carton, pallet &amp; worker detection under complex dock occlusions</a:t>
-            </a:r>
-          </a:p>
-        </p:txBody>
-      </p:sp>
-      <p:sp>
-        <p:nvSpPr>
-          <p:cNvPr id="11" name="Rectangle 10"/>
+                <a:latin typeface="Segoe UI"/>
+              </a:defRPr>
+            </a:pPr>
+            <a:r>
+              <a:t>→</a:t>
+            </a:r>
+          </a:p>
+        </p:txBody>
+      </p:sp>
+      <p:sp>
+        <p:nvSpPr>
+          <p:cNvPr id="8" name="Rectangle 7"/>
           <p:cNvSpPr/>
           <p:nvPr/>
         </p:nvSpPr>
         <p:spPr>
           <a:xfrm>
-            <a:off x="731520" y="4727448"/>
-            <a:ext cx="6217920" cy="749808"/>
+            <a:off x="3502152" y="2084831"/>
+            <a:ext cx="2423160" cy="1024128"/>
           </a:xfrm>
           <a:prstGeom prst="rect">
             <a:avLst/>
@@ -3572,14 +3426,190 @@
       </p:sp>
       <p:sp>
         <p:nvSpPr>
+          <p:cNvPr id="9" name="Rectangle 8"/>
+          <p:cNvSpPr/>
+          <p:nvPr/>
+        </p:nvSpPr>
+        <p:spPr>
+          <a:xfrm>
+            <a:off x="3502152" y="2084831"/>
+            <a:ext cx="2423160" cy="32004"/>
+          </a:xfrm>
+          <a:prstGeom prst="rect">
+            <a:avLst/>
+          </a:prstGeom>
+          <a:solidFill>
+            <a:srgbClr val="1C3E66"/>
+          </a:solidFill>
+          <a:ln>
+            <a:noFill/>
+          </a:ln>
+        </p:spPr>
+        <p:style>
+          <a:lnRef idx="1">
+            <a:schemeClr val="accent1"/>
+          </a:lnRef>
+          <a:fillRef idx="3">
+            <a:schemeClr val="accent1"/>
+          </a:fillRef>
+          <a:effectRef idx="2">
+            <a:schemeClr val="accent1"/>
+          </a:effectRef>
+          <a:fontRef idx="minor">
+            <a:schemeClr val="lt1"/>
+          </a:fontRef>
+        </p:style>
+        <p:txBody>
+          <a:bodyPr rtlCol="0" anchor="ctr"/>
+          <a:lstStyle/>
+          <a:p>
+            <a:pPr algn="ctr"/>
+          </a:p>
+        </p:txBody>
+      </p:sp>
+      <p:sp>
+        <p:nvSpPr>
+          <p:cNvPr id="10" name="TextBox 9"/>
+          <p:cNvSpPr txBox="1"/>
+          <p:nvPr/>
+        </p:nvSpPr>
+        <p:spPr>
+          <a:xfrm>
+            <a:off x="3611880" y="2212847"/>
+            <a:ext cx="2203704" cy="777240"/>
+          </a:xfrm>
+          <a:prstGeom prst="rect">
+            <a:avLst/>
+          </a:prstGeom>
+          <a:noFill/>
+        </p:spPr>
+        <p:txBody>
+          <a:bodyPr wrap="square" lIns="0" tIns="0" rIns="0" bIns="0">
+            <a:spAutoFit/>
+          </a:bodyPr>
+          <a:lstStyle/>
+          <a:p>
+            <a:pPr>
+              <a:defRPr sz="1500" b="1">
+                <a:solidFill>
+                  <a:srgbClr val="FFFFFF"/>
+                </a:solidFill>
+                <a:latin typeface="Segoe UI"/>
+              </a:defRPr>
+            </a:pPr>
+            <a:r>
+              <a:t>DROP / DRAG / TILT</a:t>
+            </a:r>
+          </a:p>
+          <a:p>
+            <a:pPr>
+              <a:spcBef>
+                <a:spcPts val="300"/>
+              </a:spcBef>
+              <a:defRPr sz="1300">
+                <a:solidFill>
+                  <a:srgbClr val="E2E8F0"/>
+                </a:solidFill>
+                <a:latin typeface="Segoe UI"/>
+              </a:defRPr>
+            </a:pPr>
+            <a:r>
+              <a:t>Cartons slip &amp; pallets lean</a:t>
+            </a:r>
+          </a:p>
+        </p:txBody>
+      </p:sp>
+      <p:sp>
+        <p:nvSpPr>
+          <p:cNvPr id="11" name="TextBox 10"/>
+          <p:cNvSpPr txBox="1"/>
+          <p:nvPr/>
+        </p:nvSpPr>
+        <p:spPr>
+          <a:xfrm>
+            <a:off x="5980176" y="2386583"/>
+            <a:ext cx="237744" cy="365760"/>
+          </a:xfrm>
+          <a:prstGeom prst="rect">
+            <a:avLst/>
+          </a:prstGeom>
+          <a:noFill/>
+        </p:spPr>
+        <p:txBody>
+          <a:bodyPr wrap="none" lIns="0" tIns="0" rIns="0" bIns="0">
+            <a:spAutoFit/>
+          </a:bodyPr>
+          <a:lstStyle/>
+          <a:p>
+            <a:pPr>
+              <a:defRPr sz="2200" b="1">
+                <a:solidFill>
+                  <a:srgbClr val="38BDF8"/>
+                </a:solidFill>
+                <a:latin typeface="Segoe UI"/>
+              </a:defRPr>
+            </a:pPr>
+            <a:r>
+              <a:t>→</a:t>
+            </a:r>
+          </a:p>
+        </p:txBody>
+      </p:sp>
+      <p:sp>
+        <p:nvSpPr>
           <p:cNvPr id="12" name="Rectangle 11"/>
           <p:cNvSpPr/>
           <p:nvPr/>
         </p:nvSpPr>
         <p:spPr>
           <a:xfrm>
-            <a:off x="731520" y="4727448"/>
-            <a:ext cx="27432" cy="749808"/>
+            <a:off x="6272784" y="2084831"/>
+            <a:ext cx="2423160" cy="1024128"/>
+          </a:xfrm>
+          <a:prstGeom prst="rect">
+            <a:avLst/>
+          </a:prstGeom>
+          <a:solidFill>
+            <a:srgbClr val="102C52"/>
+          </a:solidFill>
+          <a:ln w="19050">
+            <a:solidFill>
+              <a:srgbClr val="38BDF8"/>
+            </a:solidFill>
+          </a:ln>
+        </p:spPr>
+        <p:style>
+          <a:lnRef idx="1">
+            <a:schemeClr val="accent1"/>
+          </a:lnRef>
+          <a:fillRef idx="3">
+            <a:schemeClr val="accent1"/>
+          </a:fillRef>
+          <a:effectRef idx="2">
+            <a:schemeClr val="accent1"/>
+          </a:effectRef>
+          <a:fontRef idx="minor">
+            <a:schemeClr val="lt1"/>
+          </a:fontRef>
+        </p:style>
+        <p:txBody>
+          <a:bodyPr rtlCol="0" anchor="ctr"/>
+          <a:lstStyle/>
+          <a:p>
+            <a:pPr algn="ctr"/>
+          </a:p>
+        </p:txBody>
+      </p:sp>
+      <p:sp>
+        <p:nvSpPr>
+          <p:cNvPr id="13" name="Rectangle 12"/>
+          <p:cNvSpPr/>
+          <p:nvPr/>
+        </p:nvSpPr>
+        <p:spPr>
+          <a:xfrm>
+            <a:off x="6272784" y="2084831"/>
+            <a:ext cx="2423160" cy="32004"/>
           </a:xfrm>
           <a:prstGeom prst="rect">
             <a:avLst/>
@@ -3615,14 +3645,14 @@
       </p:sp>
       <p:sp>
         <p:nvSpPr>
-          <p:cNvPr id="13" name="TextBox 12"/>
+          <p:cNvPr id="14" name="TextBox 13"/>
           <p:cNvSpPr txBox="1"/>
           <p:nvPr/>
         </p:nvSpPr>
         <p:spPr>
           <a:xfrm>
-            <a:off x="896112" y="4800600"/>
-            <a:ext cx="5943600" cy="603504"/>
+            <a:off x="6382512" y="2212847"/>
+            <a:ext cx="2203704" cy="777240"/>
           </a:xfrm>
           <a:prstGeom prst="rect">
             <a:avLst/>
@@ -3636,7 +3666,7 @@
           <a:lstStyle/>
           <a:p>
             <a:pPr>
-              <a:defRPr sz="1100" b="1">
+              <a:defRPr sz="1500" b="1">
                 <a:solidFill>
                   <a:srgbClr val="FFFFFF"/>
                 </a:solidFill>
@@ -3644,45 +3674,213 @@
               </a:defRPr>
             </a:pPr>
             <a:r>
-              <a:t>Lucky Lakhani</a:t>
-            </a:r>
-            <a:r>
-              <a:rPr sz="950" b="1">
+              <a:t>UNNOTICED DAMAGE</a:t>
+            </a:r>
+          </a:p>
+          <a:p>
+            <a:pPr>
+              <a:spcBef>
+                <a:spcPts val="300"/>
+              </a:spcBef>
+              <a:defRPr sz="1300">
+                <a:solidFill>
+                  <a:srgbClr val="E2E8F0"/>
+                </a:solidFill>
+                <a:latin typeface="Segoe UI"/>
+              </a:defRPr>
+            </a:pPr>
+            <a:r>
+              <a:t>Loaded into trucks blindly</a:t>
+            </a:r>
+          </a:p>
+        </p:txBody>
+      </p:sp>
+      <p:sp>
+        <p:nvSpPr>
+          <p:cNvPr id="15" name="TextBox 14"/>
+          <p:cNvSpPr txBox="1"/>
+          <p:nvPr/>
+        </p:nvSpPr>
+        <p:spPr>
+          <a:xfrm>
+            <a:off x="8750808" y="2386583"/>
+            <a:ext cx="237744" cy="365760"/>
+          </a:xfrm>
+          <a:prstGeom prst="rect">
+            <a:avLst/>
+          </a:prstGeom>
+          <a:noFill/>
+        </p:spPr>
+        <p:txBody>
+          <a:bodyPr wrap="none" lIns="0" tIns="0" rIns="0" bIns="0">
+            <a:spAutoFit/>
+          </a:bodyPr>
+          <a:lstStyle/>
+          <a:p>
+            <a:pPr>
+              <a:defRPr sz="2200" b="1">
                 <a:solidFill>
                   <a:srgbClr val="38BDF8"/>
                 </a:solidFill>
-              </a:rPr>
-              <a:t>   •   Pipeline &amp; AI Hacker</a:t>
+                <a:latin typeface="Segoe UI"/>
+              </a:defRPr>
+            </a:pPr>
+            <a:r>
+              <a:t>→</a:t>
+            </a:r>
+          </a:p>
+        </p:txBody>
+      </p:sp>
+      <p:sp>
+        <p:nvSpPr>
+          <p:cNvPr id="16" name="Rectangle 15"/>
+          <p:cNvSpPr/>
+          <p:nvPr/>
+        </p:nvSpPr>
+        <p:spPr>
+          <a:xfrm>
+            <a:off x="9043416" y="2084831"/>
+            <a:ext cx="2423160" cy="1024128"/>
+          </a:xfrm>
+          <a:prstGeom prst="rect">
+            <a:avLst/>
+          </a:prstGeom>
+          <a:solidFill>
+            <a:srgbClr val="102C52"/>
+          </a:solidFill>
+          <a:ln w="19050">
+            <a:solidFill>
+              <a:srgbClr val="38BDF8"/>
+            </a:solidFill>
+          </a:ln>
+        </p:spPr>
+        <p:style>
+          <a:lnRef idx="1">
+            <a:schemeClr val="accent1"/>
+          </a:lnRef>
+          <a:fillRef idx="3">
+            <a:schemeClr val="accent1"/>
+          </a:fillRef>
+          <a:effectRef idx="2">
+            <a:schemeClr val="accent1"/>
+          </a:effectRef>
+          <a:fontRef idx="minor">
+            <a:schemeClr val="lt1"/>
+          </a:fontRef>
+        </p:style>
+        <p:txBody>
+          <a:bodyPr rtlCol="0" anchor="ctr"/>
+          <a:lstStyle/>
+          <a:p>
+            <a:pPr algn="ctr"/>
+          </a:p>
+        </p:txBody>
+      </p:sp>
+      <p:sp>
+        <p:nvSpPr>
+          <p:cNvPr id="17" name="Rectangle 16"/>
+          <p:cNvSpPr/>
+          <p:nvPr/>
+        </p:nvSpPr>
+        <p:spPr>
+          <a:xfrm>
+            <a:off x="9043416" y="2084831"/>
+            <a:ext cx="2423160" cy="32004"/>
+          </a:xfrm>
+          <a:prstGeom prst="rect">
+            <a:avLst/>
+          </a:prstGeom>
+          <a:solidFill>
+            <a:srgbClr val="38BDF8"/>
+          </a:solidFill>
+          <a:ln>
+            <a:noFill/>
+          </a:ln>
+        </p:spPr>
+        <p:style>
+          <a:lnRef idx="1">
+            <a:schemeClr val="accent1"/>
+          </a:lnRef>
+          <a:fillRef idx="3">
+            <a:schemeClr val="accent1"/>
+          </a:fillRef>
+          <a:effectRef idx="2">
+            <a:schemeClr val="accent1"/>
+          </a:effectRef>
+          <a:fontRef idx="minor">
+            <a:schemeClr val="lt1"/>
+          </a:fontRef>
+        </p:style>
+        <p:txBody>
+          <a:bodyPr rtlCol="0" anchor="ctr"/>
+          <a:lstStyle/>
+          <a:p>
+            <a:pPr algn="ctr"/>
+          </a:p>
+        </p:txBody>
+      </p:sp>
+      <p:sp>
+        <p:nvSpPr>
+          <p:cNvPr id="18" name="TextBox 17"/>
+          <p:cNvSpPr txBox="1"/>
+          <p:nvPr/>
+        </p:nvSpPr>
+        <p:spPr>
+          <a:xfrm>
+            <a:off x="9153144" y="2212847"/>
+            <a:ext cx="2203704" cy="777240"/>
+          </a:xfrm>
+          <a:prstGeom prst="rect">
+            <a:avLst/>
+          </a:prstGeom>
+          <a:noFill/>
+        </p:spPr>
+        <p:txBody>
+          <a:bodyPr wrap="square" lIns="0" tIns="0" rIns="0" bIns="0">
+            <a:spAutoFit/>
+          </a:bodyPr>
+          <a:lstStyle/>
+          <a:p>
+            <a:pPr>
+              <a:defRPr sz="1500" b="1">
+                <a:solidFill>
+                  <a:srgbClr val="FFFFFF"/>
+                </a:solidFill>
+                <a:latin typeface="Segoe UI"/>
+              </a:defRPr>
+            </a:pPr>
+            <a:r>
+              <a:t>CUSTOMER RETURN</a:t>
             </a:r>
           </a:p>
           <a:p>
             <a:pPr>
               <a:spcBef>
-                <a:spcPts val="200"/>
+                <a:spcPts val="300"/>
               </a:spcBef>
-              <a:defRPr sz="900">
-                <a:solidFill>
-                  <a:srgbClr val="94A3B8"/>
-                </a:solidFill>
-                <a:latin typeface="Segoe UI"/>
-              </a:defRPr>
-            </a:pPr>
-            <a:r>
-              <a:t>Built low-latency video ring buffer, async FastAPI backend, and Gemini 2.5 RAG integration</a:t>
-            </a:r>
-          </a:p>
-        </p:txBody>
-      </p:sp>
-      <p:sp>
-        <p:nvSpPr>
-          <p:cNvPr id="14" name="Rectangle 13"/>
+              <a:defRPr sz="1300">
+                <a:solidFill>
+                  <a:srgbClr val="E2E8F0"/>
+                </a:solidFill>
+                <a:latin typeface="Segoe UI"/>
+              </a:defRPr>
+            </a:pPr>
+            <a:r>
+              <a:t>$200+ claims &amp; friction</a:t>
+            </a:r>
+          </a:p>
+        </p:txBody>
+      </p:sp>
+      <p:sp>
+        <p:nvSpPr>
+          <p:cNvPr id="19" name="Rectangle 18"/>
           <p:cNvSpPr/>
           <p:nvPr/>
         </p:nvSpPr>
         <p:spPr>
           <a:xfrm>
-            <a:off x="731520" y="5568696"/>
-            <a:ext cx="6217920" cy="749808"/>
+            <a:off x="731520" y="3401568"/>
+            <a:ext cx="3401568" cy="1965960"/>
           </a:xfrm>
           <a:prstGeom prst="rect">
             <a:avLst/>
@@ -3720,14 +3918,14 @@
       </p:sp>
       <p:sp>
         <p:nvSpPr>
-          <p:cNvPr id="15" name="Rectangle 14"/>
+          <p:cNvPr id="20" name="Rectangle 19"/>
           <p:cNvSpPr/>
           <p:nvPr/>
         </p:nvSpPr>
         <p:spPr>
           <a:xfrm>
-            <a:off x="731520" y="5568696"/>
-            <a:ext cx="27432" cy="749808"/>
+            <a:off x="731520" y="3401568"/>
+            <a:ext cx="3401568" cy="32004"/>
           </a:xfrm>
           <a:prstGeom prst="rect">
             <a:avLst/>
@@ -3763,14 +3961,14 @@
       </p:sp>
       <p:sp>
         <p:nvSpPr>
-          <p:cNvPr id="16" name="TextBox 15"/>
+          <p:cNvPr id="21" name="TextBox 20"/>
           <p:cNvSpPr txBox="1"/>
           <p:nvPr/>
         </p:nvSpPr>
         <p:spPr>
           <a:xfrm>
-            <a:off x="896112" y="5641848"/>
-            <a:ext cx="5943600" cy="603504"/>
+            <a:off x="914400" y="3566160"/>
+            <a:ext cx="3035808" cy="1645920"/>
           </a:xfrm>
           <a:prstGeom prst="rect">
             <a:avLst/>
@@ -3784,7 +3982,7 @@
           <a:lstStyle/>
           <a:p>
             <a:pPr>
-              <a:defRPr sz="1100" b="1">
+              <a:defRPr sz="4200" b="1">
                 <a:solidFill>
                   <a:srgbClr val="FFFFFF"/>
                 </a:solidFill>
@@ -3792,15 +3990,7 @@
               </a:defRPr>
             </a:pPr>
             <a:r>
-              <a:t>Runjan Bawa</a:t>
-            </a:r>
-            <a:r>
-              <a:rPr sz="950" b="1">
-                <a:solidFill>
-                  <a:srgbClr val="38BDF8"/>
-                </a:solidFill>
-              </a:rPr>
-              <a:t>   •   UI &amp; Operational Experience</a:t>
+              <a:t>$50B+</a:t>
             </a:r>
           </a:p>
           <a:p>
@@ -3808,43 +3998,7 @@
               <a:spcBef>
                 <a:spcPts val="200"/>
               </a:spcBef>
-              <a:defRPr sz="900">
-                <a:solidFill>
-                  <a:srgbClr val="94A3B8"/>
-                </a:solidFill>
-                <a:latin typeface="Segoe UI"/>
-              </a:defRPr>
-            </a:pPr>
-            <a:r>
-              <a:t>Crafted the live dashboard, Web Audio chimes, 7-day risk charts, and supervisor workflows</a:t>
-            </a:r>
-          </a:p>
-        </p:txBody>
-      </p:sp>
-      <p:sp>
-        <p:nvSpPr>
-          <p:cNvPr id="17" name="TextBox 16"/>
-          <p:cNvSpPr txBox="1"/>
-          <p:nvPr/>
-        </p:nvSpPr>
-        <p:spPr>
-          <a:xfrm>
-            <a:off x="7315200" y="868680"/>
-            <a:ext cx="4144975" cy="274320"/>
-          </a:xfrm>
-          <a:prstGeom prst="rect">
-            <a:avLst/>
-          </a:prstGeom>
-          <a:noFill/>
-        </p:spPr>
-        <p:txBody>
-          <a:bodyPr wrap="none" lIns="0" tIns="0" rIns="0" bIns="0">
-            <a:spAutoFit/>
-          </a:bodyPr>
-          <a:lstStyle/>
-          <a:p>
-            <a:pPr>
-              <a:defRPr sz="1000" b="1">
+              <a:defRPr sz="1550" b="1">
                 <a:solidFill>
                   <a:srgbClr val="38BDF8"/>
                 </a:solidFill>
@@ -3852,21 +4006,37 @@
               </a:defRPr>
             </a:pPr>
             <a:r>
-              <a:t>INDUSTRY REALITY &amp; ECONOMIC IMPACT</a:t>
-            </a:r>
-          </a:p>
-        </p:txBody>
-      </p:sp>
-      <p:sp>
-        <p:nvSpPr>
-          <p:cNvPr id="18" name="Rectangle 17"/>
+              <a:t>ANNUAL FREIGHT LOSS</a:t>
+            </a:r>
+          </a:p>
+          <a:p>
+            <a:pPr>
+              <a:spcBef>
+                <a:spcPts val="500"/>
+              </a:spcBef>
+              <a:defRPr sz="1350">
+                <a:solidFill>
+                  <a:srgbClr val="CBD5E1"/>
+                </a:solidFill>
+                <a:latin typeface="Segoe UI"/>
+              </a:defRPr>
+            </a:pPr>
+            <a:r>
+              <a:t>Destroyed in warehouses each year before reaching highways—mostly unrecorded.</a:t>
+            </a:r>
+          </a:p>
+        </p:txBody>
+      </p:sp>
+      <p:sp>
+        <p:nvSpPr>
+          <p:cNvPr id="22" name="Rectangle 21"/>
           <p:cNvSpPr/>
           <p:nvPr/>
         </p:nvSpPr>
         <p:spPr>
           <a:xfrm>
-            <a:off x="7315200" y="1280160"/>
-            <a:ext cx="4144975" cy="1481328"/>
+            <a:off x="4389120" y="3401568"/>
+            <a:ext cx="3401568" cy="1965960"/>
           </a:xfrm>
           <a:prstGeom prst="rect">
             <a:avLst/>
@@ -3904,14 +4074,57 @@
       </p:sp>
       <p:sp>
         <p:nvSpPr>
-          <p:cNvPr id="19" name="TextBox 18"/>
+          <p:cNvPr id="23" name="Rectangle 22"/>
+          <p:cNvSpPr/>
+          <p:nvPr/>
+        </p:nvSpPr>
+        <p:spPr>
+          <a:xfrm>
+            <a:off x="4389120" y="3401568"/>
+            <a:ext cx="3401568" cy="32004"/>
+          </a:xfrm>
+          <a:prstGeom prst="rect">
+            <a:avLst/>
+          </a:prstGeom>
+          <a:solidFill>
+            <a:srgbClr val="38BDF8"/>
+          </a:solidFill>
+          <a:ln>
+            <a:noFill/>
+          </a:ln>
+        </p:spPr>
+        <p:style>
+          <a:lnRef idx="1">
+            <a:schemeClr val="accent1"/>
+          </a:lnRef>
+          <a:fillRef idx="3">
+            <a:schemeClr val="accent1"/>
+          </a:fillRef>
+          <a:effectRef idx="2">
+            <a:schemeClr val="accent1"/>
+          </a:effectRef>
+          <a:fontRef idx="minor">
+            <a:schemeClr val="lt1"/>
+          </a:fontRef>
+        </p:style>
+        <p:txBody>
+          <a:bodyPr rtlCol="0" anchor="ctr"/>
+          <a:lstStyle/>
+          <a:p>
+            <a:pPr algn="ctr"/>
+          </a:p>
+        </p:txBody>
+      </p:sp>
+      <p:sp>
+        <p:nvSpPr>
+          <p:cNvPr id="24" name="TextBox 23"/>
           <p:cNvSpPr txBox="1"/>
           <p:nvPr/>
         </p:nvSpPr>
         <p:spPr>
           <a:xfrm>
-            <a:off x="7516368" y="1408176"/>
-            <a:ext cx="3742639" cy="1234440"/>
+            <a:off x="4572000" y="3566160"/>
+            <a:ext cx="3035808" cy="1645920"/>
           </a:xfrm>
           <a:prstGeom prst="rect">
             <a:avLst/>
@@ -3925,33 +4138,31 @@
           <a:lstStyle/>
           <a:p>
             <a:pPr>
-              <a:defRPr sz="1100" b="1">
-                <a:solidFill>
-                  <a:srgbClr val="94A3B8"/>
-                </a:solidFill>
-                <a:latin typeface="Segoe UI"/>
-              </a:defRPr>
-            </a:pPr>
-            <a:r>
-              <a:t>01   </a:t>
-            </a:r>
-            <a:r>
-              <a:rPr sz="1700" b="1">
+              <a:defRPr sz="4200" b="1">
                 <a:solidFill>
                   <a:srgbClr val="FFFFFF"/>
                 </a:solidFill>
                 <a:latin typeface="Segoe UI"/>
-              </a:rPr>
-              <a:t>$50B+  </a:t>
-            </a:r>
-            <a:r>
-              <a:rPr sz="1000" b="1">
+              </a:defRPr>
+            </a:pPr>
+            <a:r>
+              <a:t>1 : 10</a:t>
+            </a:r>
+          </a:p>
+          <a:p>
+            <a:pPr>
+              <a:spcBef>
+                <a:spcPts val="200"/>
+              </a:spcBef>
+              <a:defRPr sz="1550" b="1">
                 <a:solidFill>
                   <a:srgbClr val="38BDF8"/>
                 </a:solidFill>
                 <a:latin typeface="Segoe UI"/>
-              </a:rPr>
-              <a:t>Annual Global Freight Damage</a:t>
+              </a:defRPr>
+            </a:pPr>
+            <a:r>
+              <a:t>SUPERVISOR BLINDSPOT</a:t>
             </a:r>
           </a:p>
           <a:p>
@@ -3959,7 +4170,7 @@
               <a:spcBef>
                 <a:spcPts val="500"/>
               </a:spcBef>
-              <a:defRPr sz="950">
+              <a:defRPr sz="1350">
                 <a:solidFill>
                   <a:srgbClr val="CBD5E1"/>
                 </a:solidFill>
@@ -3967,21 +4178,21 @@
               </a:defRPr>
             </a:pPr>
             <a:r>
-              <a:t>Over $50 billion of merchandise is destroyed in warehouses each year before reaching highways. The majority goes entirely unrecorded at the loading dock.</a:t>
-            </a:r>
-          </a:p>
-        </p:txBody>
-      </p:sp>
-      <p:sp>
-        <p:nvSpPr>
-          <p:cNvPr id="20" name="Rectangle 19"/>
+              <a:t>1 supervisor managing 10 active bays and 40 fast-moving workers simultaneously.</a:t>
+            </a:r>
+          </a:p>
+        </p:txBody>
+      </p:sp>
+      <p:sp>
+        <p:nvSpPr>
+          <p:cNvPr id="25" name="Rectangle 24"/>
           <p:cNvSpPr/>
           <p:nvPr/>
         </p:nvSpPr>
         <p:spPr>
           <a:xfrm>
-            <a:off x="7315200" y="2907792"/>
-            <a:ext cx="4144975" cy="1481328"/>
+            <a:off x="8046720" y="3401568"/>
+            <a:ext cx="3401568" cy="1965960"/>
           </a:xfrm>
           <a:prstGeom prst="rect">
             <a:avLst/>
@@ -4019,95 +4230,23 @@
       </p:sp>
       <p:sp>
         <p:nvSpPr>
-          <p:cNvPr id="21" name="TextBox 20"/>
-          <p:cNvSpPr txBox="1"/>
-          <p:nvPr/>
-        </p:nvSpPr>
-        <p:spPr>
-          <a:xfrm>
-            <a:off x="7516368" y="3035808"/>
-            <a:ext cx="3742639" cy="1234440"/>
-          </a:xfrm>
-          <a:prstGeom prst="rect">
-            <a:avLst/>
-          </a:prstGeom>
-          <a:noFill/>
-        </p:spPr>
-        <p:txBody>
-          <a:bodyPr wrap="square" lIns="0" tIns="0" rIns="0" bIns="0">
-            <a:spAutoFit/>
-          </a:bodyPr>
-          <a:lstStyle/>
-          <a:p>
-            <a:pPr>
-              <a:defRPr sz="1100" b="1">
-                <a:solidFill>
-                  <a:srgbClr val="94A3B8"/>
-                </a:solidFill>
-                <a:latin typeface="Segoe UI"/>
-              </a:defRPr>
-            </a:pPr>
-            <a:r>
-              <a:t>02   </a:t>
-            </a:r>
-            <a:r>
-              <a:rPr sz="1700" b="1">
-                <a:solidFill>
-                  <a:srgbClr val="FFFFFF"/>
-                </a:solidFill>
-                <a:latin typeface="Segoe UI"/>
-              </a:rPr>
-              <a:t>1 : 10  </a:t>
-            </a:r>
-            <a:r>
-              <a:rPr sz="1000" b="1">
-                <a:solidFill>
-                  <a:srgbClr val="38BDF8"/>
-                </a:solidFill>
-                <a:latin typeface="Segoe UI"/>
-              </a:rPr>
-              <a:t>Supervisor Blindspot Ratio</a:t>
-            </a:r>
-          </a:p>
-          <a:p>
-            <a:pPr>
-              <a:spcBef>
-                <a:spcPts val="500"/>
-              </a:spcBef>
-              <a:defRPr sz="950">
-                <a:solidFill>
-                  <a:srgbClr val="CBD5E1"/>
-                </a:solidFill>
-                <a:latin typeface="Segoe UI"/>
-              </a:defRPr>
-            </a:pPr>
-            <a:r>
-              <a:t>A single dock supervisor oversees up to 10 active bays, 40 fast-moving workers, and forklift traffic. Blame turns into speculation and customer friction.</a:t>
-            </a:r>
-          </a:p>
-        </p:txBody>
-      </p:sp>
-      <p:sp>
-        <p:nvSpPr>
-          <p:cNvPr id="22" name="Rectangle 21"/>
+          <p:cNvPr id="26" name="Rectangle 25"/>
           <p:cNvSpPr/>
           <p:nvPr/>
         </p:nvSpPr>
         <p:spPr>
           <a:xfrm>
-            <a:off x="7315200" y="4535424"/>
-            <a:ext cx="4144975" cy="1481328"/>
+            <a:off x="8046720" y="3401568"/>
+            <a:ext cx="3401568" cy="32004"/>
           </a:xfrm>
           <a:prstGeom prst="rect">
             <a:avLst/>
           </a:prstGeom>
           <a:solidFill>
-            <a:srgbClr val="0A192E"/>
+            <a:srgbClr val="38BDF8"/>
           </a:solidFill>
-          <a:ln w="12700">
-            <a:solidFill>
-              <a:srgbClr val="1C3E66"/>
-            </a:solidFill>
+          <a:ln>
+            <a:noFill/>
           </a:ln>
         </p:spPr>
         <p:style>
@@ -4134,14 +4273,14 @@
       </p:sp>
       <p:sp>
         <p:nvSpPr>
-          <p:cNvPr id="23" name="TextBox 22"/>
+          <p:cNvPr id="27" name="TextBox 26"/>
           <p:cNvSpPr txBox="1"/>
           <p:nvPr/>
         </p:nvSpPr>
         <p:spPr>
           <a:xfrm>
-            <a:off x="7516368" y="4663440"/>
-            <a:ext cx="3742639" cy="1234440"/>
+            <a:off x="8229600" y="3566160"/>
+            <a:ext cx="3035808" cy="1645920"/>
           </a:xfrm>
           <a:prstGeom prst="rect">
             <a:avLst/>
@@ -4155,33 +4294,31 @@
           <a:lstStyle/>
           <a:p>
             <a:pPr>
-              <a:defRPr sz="1100" b="1">
-                <a:solidFill>
-                  <a:srgbClr val="94A3B8"/>
-                </a:solidFill>
-                <a:latin typeface="Segoe UI"/>
-              </a:defRPr>
-            </a:pPr>
-            <a:r>
-              <a:t>03   </a:t>
-            </a:r>
-            <a:r>
-              <a:rPr sz="1700" b="1">
+              <a:defRPr sz="4200" b="1">
                 <a:solidFill>
                   <a:srgbClr val="FFFFFF"/>
                 </a:solidFill>
                 <a:latin typeface="Segoe UI"/>
-              </a:rPr>
-              <a:t>&lt; 1.5s  </a:t>
-            </a:r>
-            <a:r>
-              <a:rPr sz="1000" b="1">
+              </a:defRPr>
+            </a:pPr>
+            <a:r>
+              <a:t>&lt; 1.5s</a:t>
+            </a:r>
+          </a:p>
+          <a:p>
+            <a:pPr>
+              <a:spcBef>
+                <a:spcPts val="200"/>
+              </a:spcBef>
+              <a:defRPr sz="1550" b="1">
                 <a:solidFill>
                   <a:srgbClr val="38BDF8"/>
                 </a:solidFill>
                 <a:latin typeface="Segoe UI"/>
-              </a:rPr>
-              <a:t>Intervention Window</a:t>
+              </a:defRPr>
+            </a:pPr>
+            <a:r>
+              <a:t>INTERVENTION WINDOW</a:t>
             </a:r>
           </a:p>
           <a:p>
@@ -4189,7 +4326,7 @@
               <a:spcBef>
                 <a:spcPts val="500"/>
               </a:spcBef>
-              <a:defRPr sz="950">
+              <a:defRPr sz="1350">
                 <a:solidFill>
                   <a:srgbClr val="CBD5E1"/>
                 </a:solidFill>
@@ -4197,64 +4334,21 @@
               </a:defRPr>
             </a:pPr>
             <a:r>
-              <a:t>Catching cracked goods at the dock costs ~$10 to repackage. Letting damaged goods ship to a customer costs $200+ in return logistics and lost account goodwill.</a:t>
-            </a:r>
-          </a:p>
-        </p:txBody>
-      </p:sp>
-      <p:sp>
-        <p:nvSpPr>
-          <p:cNvPr id="24" name="Rectangle 23"/>
-          <p:cNvSpPr/>
-          <p:nvPr/>
-        </p:nvSpPr>
-        <p:spPr>
-          <a:xfrm>
-            <a:off x="731520" y="6492240"/>
-            <a:ext cx="10728655" cy="13716"/>
-          </a:xfrm>
-          <a:prstGeom prst="rect">
-            <a:avLst/>
-          </a:prstGeom>
-          <a:solidFill>
-            <a:srgbClr val="1C3E66"/>
-          </a:solidFill>
-          <a:ln>
-            <a:noFill/>
-          </a:ln>
-        </p:spPr>
-        <p:style>
-          <a:lnRef idx="1">
-            <a:schemeClr val="accent1"/>
-          </a:lnRef>
-          <a:fillRef idx="3">
-            <a:schemeClr val="accent1"/>
-          </a:fillRef>
-          <a:effectRef idx="2">
-            <a:schemeClr val="accent1"/>
-          </a:effectRef>
-          <a:fontRef idx="minor">
-            <a:schemeClr val="lt1"/>
-          </a:fontRef>
-        </p:style>
-        <p:txBody>
-          <a:bodyPr rtlCol="0" anchor="ctr"/>
-          <a:lstStyle/>
-          <a:p>
-            <a:pPr algn="ctr"/>
-          </a:p>
-        </p:txBody>
-      </p:sp>
-      <p:sp>
-        <p:nvSpPr>
-          <p:cNvPr id="25" name="TextBox 24"/>
+              <a:t>Dockside repack costs $10. Letting cracked cargo reach customers costs $200+.</a:t>
+            </a:r>
+          </a:p>
+        </p:txBody>
+      </p:sp>
+      <p:sp>
+        <p:nvSpPr>
+          <p:cNvPr id="28" name="TextBox 27"/>
           <p:cNvSpPr txBox="1"/>
           <p:nvPr/>
         </p:nvSpPr>
         <p:spPr>
           <a:xfrm>
-            <a:off x="731520" y="6537960"/>
-            <a:ext cx="10728655" cy="228600"/>
+            <a:off x="731520" y="6126480"/>
+            <a:ext cx="10728655" cy="365760"/>
           </a:xfrm>
           <a:prstGeom prst="rect">
             <a:avLst/>
@@ -4268,15 +4362,23 @@
           <a:lstStyle/>
           <a:p>
             <a:pPr>
-              <a:defRPr sz="850">
-                <a:solidFill>
-                  <a:srgbClr val="94A3B8"/>
-                </a:solidFill>
-                <a:latin typeface="Segoe UI"/>
-              </a:defRPr>
-            </a:pPr>
-            <a:r>
-              <a:t>DockGuard AI  •  Autonomous Video Intelligence for Warehouse Loading Bays  •  Slide 1 of 6</a:t>
+              <a:defRPr sz="1550" b="1">
+                <a:solidFill>
+                  <a:srgbClr val="FFFFFF"/>
+                </a:solidFill>
+                <a:latin typeface="Segoe UI"/>
+              </a:defRPr>
+            </a:pPr>
+            <a:r>
+              <a:t>Team VisionGuard: </a:t>
+            </a:r>
+            <a:r>
+              <a:rPr b="0">
+                <a:solidFill>
+                  <a:srgbClr val="38BDF8"/>
+                </a:solidFill>
+              </a:rPr>
+              <a:t>Aastha Gupta (Computer Vision)   •   Lucky Lakhani (AI Pipeline)   •   Runjan Bawa (Dashboard &amp; UX)</a:t>
             </a:r>
           </a:p>
         </p:txBody>
@@ -4330,7 +4432,7 @@
         <p:spPr>
           <a:xfrm>
             <a:off x="731520" y="384048"/>
-            <a:ext cx="6400800" cy="274320"/>
+            <a:ext cx="5943600" cy="274320"/>
           </a:xfrm>
           <a:prstGeom prst="rect">
             <a:avLst/>
@@ -4344,7 +4446,7 @@
           <a:lstStyle/>
           <a:p>
             <a:pPr>
-              <a:defRPr sz="950" b="1">
+              <a:defRPr sz="1350" b="1">
                 <a:solidFill>
                   <a:srgbClr val="38BDF8"/>
                 </a:solidFill>
@@ -4380,7 +4482,7 @@
           <a:lstStyle/>
           <a:p>
             <a:pPr>
-              <a:defRPr sz="2200" b="1">
+              <a:defRPr sz="2900" b="1">
                 <a:solidFill>
                   <a:srgbClr val="FFFFFF"/>
                 </a:solidFill>
@@ -4388,7 +4490,7 @@
               </a:defRPr>
             </a:pPr>
             <a:r>
-              <a:t>The Anatomy of a Saved Carton: From Sensor to Safe Shipment</a:t>
+              <a:t>From Sensor to Prevention: The 6-Stage Loop</a:t>
             </a:r>
           </a:p>
         </p:txBody>
@@ -4401,7 +4503,7 @@
         </p:nvSpPr>
         <p:spPr>
           <a:xfrm>
-            <a:off x="731520" y="1243584"/>
+            <a:off x="731520" y="1234440"/>
             <a:ext cx="10728655" cy="13716"/>
           </a:xfrm>
           <a:prstGeom prst="rect">
@@ -4444,8 +4546,8 @@
         </p:nvSpPr>
         <p:spPr>
           <a:xfrm>
-            <a:off x="731520" y="1417320"/>
-            <a:ext cx="1444752" cy="932688"/>
+            <a:off x="731520" y="1444752"/>
+            <a:ext cx="1664208" cy="1353312"/>
           </a:xfrm>
           <a:prstGeom prst="rect">
             <a:avLst/>
@@ -4483,14 +4585,57 @@
       </p:sp>
       <p:sp>
         <p:nvSpPr>
-          <p:cNvPr id="6" name="TextBox 5"/>
+          <p:cNvPr id="6" name="Rectangle 5"/>
+          <p:cNvSpPr/>
+          <p:nvPr/>
+        </p:nvSpPr>
+        <p:spPr>
+          <a:xfrm>
+            <a:off x="731520" y="1444752"/>
+            <a:ext cx="1664208" cy="36576"/>
+          </a:xfrm>
+          <a:prstGeom prst="rect">
+            <a:avLst/>
+          </a:prstGeom>
+          <a:solidFill>
+            <a:srgbClr val="1C3E66"/>
+          </a:solidFill>
+          <a:ln>
+            <a:noFill/>
+          </a:ln>
+        </p:spPr>
+        <p:style>
+          <a:lnRef idx="1">
+            <a:schemeClr val="accent1"/>
+          </a:lnRef>
+          <a:fillRef idx="3">
+            <a:schemeClr val="accent1"/>
+          </a:fillRef>
+          <a:effectRef idx="2">
+            <a:schemeClr val="accent1"/>
+          </a:effectRef>
+          <a:fontRef idx="minor">
+            <a:schemeClr val="lt1"/>
+          </a:fontRef>
+        </p:style>
+        <p:txBody>
+          <a:bodyPr rtlCol="0" anchor="ctr"/>
+          <a:lstStyle/>
+          <a:p>
+            <a:pPr algn="ctr"/>
+          </a:p>
+        </p:txBody>
+      </p:sp>
+      <p:sp>
+        <p:nvSpPr>
+          <p:cNvPr id="7" name="TextBox 6"/>
           <p:cNvSpPr txBox="1"/>
           <p:nvPr/>
         </p:nvSpPr>
         <p:spPr>
           <a:xfrm>
-            <a:off x="804672" y="1490472"/>
-            <a:ext cx="1298448" cy="804672"/>
+            <a:off x="822960" y="1554480"/>
+            <a:ext cx="1481328" cy="1143000"/>
           </a:xfrm>
           <a:prstGeom prst="rect">
             <a:avLst/>
@@ -4504,7 +4649,23 @@
           <a:lstStyle/>
           <a:p>
             <a:pPr>
-              <a:defRPr sz="950" b="1">
+              <a:defRPr sz="1700" b="1">
+                <a:solidFill>
+                  <a:srgbClr val="38BDF8"/>
+                </a:solidFill>
+                <a:latin typeface="Segoe UI"/>
+              </a:defRPr>
+            </a:pPr>
+            <a:r>
+              <a:t>01</a:t>
+            </a:r>
+          </a:p>
+          <a:p>
+            <a:pPr>
+              <a:spcBef>
+                <a:spcPts val="200"/>
+              </a:spcBef>
+              <a:defRPr sz="1650" b="1">
                 <a:solidFill>
                   <a:srgbClr val="FFFFFF"/>
                 </a:solidFill>
@@ -4512,7 +4673,7 @@
               </a:defRPr>
             </a:pPr>
             <a:r>
-              <a:t>01 • Bay Activity</a:t>
+              <a:t>CCTV Video</a:t>
             </a:r>
           </a:p>
           <a:p>
@@ -4520,7 +4681,7 @@
               <a:spcBef>
                 <a:spcPts val="300"/>
               </a:spcBef>
-              <a:defRPr sz="819">
+              <a:defRPr sz="1300">
                 <a:solidFill>
                   <a:srgbClr val="E2E8F0"/>
                 </a:solidFill>
@@ -4528,21 +4689,489 @@
               </a:defRPr>
             </a:pPr>
             <a:r>
-              <a:t>Cartons loaded into 40ft trailer</a:t>
-            </a:r>
-          </a:p>
-        </p:txBody>
-      </p:sp>
-      <p:sp>
-        <p:nvSpPr>
-          <p:cNvPr id="7" name="Rectangle 6"/>
+              <a:t>1080p dock stream</a:t>
+            </a:r>
+          </a:p>
+        </p:txBody>
+      </p:sp>
+      <p:sp>
+        <p:nvSpPr>
+          <p:cNvPr id="8" name="Rectangle 7"/>
           <p:cNvSpPr/>
           <p:nvPr/>
         </p:nvSpPr>
         <p:spPr>
           <a:xfrm>
-            <a:off x="2276856" y="1417320"/>
-            <a:ext cx="1444752" cy="932688"/>
+            <a:off x="2542032" y="1444752"/>
+            <a:ext cx="1664208" cy="1353312"/>
+          </a:xfrm>
+          <a:prstGeom prst="rect">
+            <a:avLst/>
+          </a:prstGeom>
+          <a:solidFill>
+            <a:srgbClr val="102C52"/>
+          </a:solidFill>
+          <a:ln w="19050">
+            <a:solidFill>
+              <a:srgbClr val="38BDF8"/>
+            </a:solidFill>
+          </a:ln>
+        </p:spPr>
+        <p:style>
+          <a:lnRef idx="1">
+            <a:schemeClr val="accent1"/>
+          </a:lnRef>
+          <a:fillRef idx="3">
+            <a:schemeClr val="accent1"/>
+          </a:fillRef>
+          <a:effectRef idx="2">
+            <a:schemeClr val="accent1"/>
+          </a:effectRef>
+          <a:fontRef idx="minor">
+            <a:schemeClr val="lt1"/>
+          </a:fontRef>
+        </p:style>
+        <p:txBody>
+          <a:bodyPr rtlCol="0" anchor="ctr"/>
+          <a:lstStyle/>
+          <a:p>
+            <a:pPr algn="ctr"/>
+          </a:p>
+        </p:txBody>
+      </p:sp>
+      <p:sp>
+        <p:nvSpPr>
+          <p:cNvPr id="9" name="Rectangle 8"/>
+          <p:cNvSpPr/>
+          <p:nvPr/>
+        </p:nvSpPr>
+        <p:spPr>
+          <a:xfrm>
+            <a:off x="2542032" y="1444752"/>
+            <a:ext cx="1664208" cy="36576"/>
+          </a:xfrm>
+          <a:prstGeom prst="rect">
+            <a:avLst/>
+          </a:prstGeom>
+          <a:solidFill>
+            <a:srgbClr val="38BDF8"/>
+          </a:solidFill>
+          <a:ln>
+            <a:noFill/>
+          </a:ln>
+        </p:spPr>
+        <p:style>
+          <a:lnRef idx="1">
+            <a:schemeClr val="accent1"/>
+          </a:lnRef>
+          <a:fillRef idx="3">
+            <a:schemeClr val="accent1"/>
+          </a:fillRef>
+          <a:effectRef idx="2">
+            <a:schemeClr val="accent1"/>
+          </a:effectRef>
+          <a:fontRef idx="minor">
+            <a:schemeClr val="lt1"/>
+          </a:fontRef>
+        </p:style>
+        <p:txBody>
+          <a:bodyPr rtlCol="0" anchor="ctr"/>
+          <a:lstStyle/>
+          <a:p>
+            <a:pPr algn="ctr"/>
+          </a:p>
+        </p:txBody>
+      </p:sp>
+      <p:sp>
+        <p:nvSpPr>
+          <p:cNvPr id="10" name="TextBox 9"/>
+          <p:cNvSpPr txBox="1"/>
+          <p:nvPr/>
+        </p:nvSpPr>
+        <p:spPr>
+          <a:xfrm>
+            <a:off x="2633472" y="1554480"/>
+            <a:ext cx="1481328" cy="1143000"/>
+          </a:xfrm>
+          <a:prstGeom prst="rect">
+            <a:avLst/>
+          </a:prstGeom>
+          <a:noFill/>
+        </p:spPr>
+        <p:txBody>
+          <a:bodyPr wrap="square" lIns="0" tIns="0" rIns="0" bIns="0">
+            <a:spAutoFit/>
+          </a:bodyPr>
+          <a:lstStyle/>
+          <a:p>
+            <a:pPr>
+              <a:defRPr sz="1700" b="1">
+                <a:solidFill>
+                  <a:srgbClr val="38BDF8"/>
+                </a:solidFill>
+                <a:latin typeface="Segoe UI"/>
+              </a:defRPr>
+            </a:pPr>
+            <a:r>
+              <a:t>02</a:t>
+            </a:r>
+          </a:p>
+          <a:p>
+            <a:pPr>
+              <a:spcBef>
+                <a:spcPts val="200"/>
+              </a:spcBef>
+              <a:defRPr sz="1650" b="1">
+                <a:solidFill>
+                  <a:srgbClr val="FFFFFF"/>
+                </a:solidFill>
+                <a:latin typeface="Segoe UI"/>
+              </a:defRPr>
+            </a:pPr>
+            <a:r>
+              <a:t>YOLOv8</a:t>
+            </a:r>
+          </a:p>
+          <a:p>
+            <a:pPr>
+              <a:spcBef>
+                <a:spcPts val="300"/>
+              </a:spcBef>
+              <a:defRPr sz="1300">
+                <a:solidFill>
+                  <a:srgbClr val="E2E8F0"/>
+                </a:solidFill>
+                <a:latin typeface="Segoe UI"/>
+              </a:defRPr>
+            </a:pPr>
+            <a:r>
+              <a:t>Track boxes &amp; crew</a:t>
+            </a:r>
+          </a:p>
+        </p:txBody>
+      </p:sp>
+      <p:sp>
+        <p:nvSpPr>
+          <p:cNvPr id="11" name="Rectangle 10"/>
+          <p:cNvSpPr/>
+          <p:nvPr/>
+        </p:nvSpPr>
+        <p:spPr>
+          <a:xfrm>
+            <a:off x="4352544" y="1444752"/>
+            <a:ext cx="1664208" cy="1353312"/>
+          </a:xfrm>
+          <a:prstGeom prst="rect">
+            <a:avLst/>
+          </a:prstGeom>
+          <a:solidFill>
+            <a:srgbClr val="102C52"/>
+          </a:solidFill>
+          <a:ln w="19050">
+            <a:solidFill>
+              <a:srgbClr val="38BDF8"/>
+            </a:solidFill>
+          </a:ln>
+        </p:spPr>
+        <p:style>
+          <a:lnRef idx="1">
+            <a:schemeClr val="accent1"/>
+          </a:lnRef>
+          <a:fillRef idx="3">
+            <a:schemeClr val="accent1"/>
+          </a:fillRef>
+          <a:effectRef idx="2">
+            <a:schemeClr val="accent1"/>
+          </a:effectRef>
+          <a:fontRef idx="minor">
+            <a:schemeClr val="lt1"/>
+          </a:fontRef>
+        </p:style>
+        <p:txBody>
+          <a:bodyPr rtlCol="0" anchor="ctr"/>
+          <a:lstStyle/>
+          <a:p>
+            <a:pPr algn="ctr"/>
+          </a:p>
+        </p:txBody>
+      </p:sp>
+      <p:sp>
+        <p:nvSpPr>
+          <p:cNvPr id="12" name="Rectangle 11"/>
+          <p:cNvSpPr/>
+          <p:nvPr/>
+        </p:nvSpPr>
+        <p:spPr>
+          <a:xfrm>
+            <a:off x="4352544" y="1444752"/>
+            <a:ext cx="1664208" cy="36576"/>
+          </a:xfrm>
+          <a:prstGeom prst="rect">
+            <a:avLst/>
+          </a:prstGeom>
+          <a:solidFill>
+            <a:srgbClr val="38BDF8"/>
+          </a:solidFill>
+          <a:ln>
+            <a:noFill/>
+          </a:ln>
+        </p:spPr>
+        <p:style>
+          <a:lnRef idx="1">
+            <a:schemeClr val="accent1"/>
+          </a:lnRef>
+          <a:fillRef idx="3">
+            <a:schemeClr val="accent1"/>
+          </a:fillRef>
+          <a:effectRef idx="2">
+            <a:schemeClr val="accent1"/>
+          </a:effectRef>
+          <a:fontRef idx="minor">
+            <a:schemeClr val="lt1"/>
+          </a:fontRef>
+        </p:style>
+        <p:txBody>
+          <a:bodyPr rtlCol="0" anchor="ctr"/>
+          <a:lstStyle/>
+          <a:p>
+            <a:pPr algn="ctr"/>
+          </a:p>
+        </p:txBody>
+      </p:sp>
+      <p:sp>
+        <p:nvSpPr>
+          <p:cNvPr id="13" name="TextBox 12"/>
+          <p:cNvSpPr txBox="1"/>
+          <p:nvPr/>
+        </p:nvSpPr>
+        <p:spPr>
+          <a:xfrm>
+            <a:off x="4443984" y="1554480"/>
+            <a:ext cx="1481328" cy="1143000"/>
+          </a:xfrm>
+          <a:prstGeom prst="rect">
+            <a:avLst/>
+          </a:prstGeom>
+          <a:noFill/>
+        </p:spPr>
+        <p:txBody>
+          <a:bodyPr wrap="square" lIns="0" tIns="0" rIns="0" bIns="0">
+            <a:spAutoFit/>
+          </a:bodyPr>
+          <a:lstStyle/>
+          <a:p>
+            <a:pPr>
+              <a:defRPr sz="1700" b="1">
+                <a:solidFill>
+                  <a:srgbClr val="38BDF8"/>
+                </a:solidFill>
+                <a:latin typeface="Segoe UI"/>
+              </a:defRPr>
+            </a:pPr>
+            <a:r>
+              <a:t>03</a:t>
+            </a:r>
+          </a:p>
+          <a:p>
+            <a:pPr>
+              <a:spcBef>
+                <a:spcPts val="200"/>
+              </a:spcBef>
+              <a:defRPr sz="1650" b="1">
+                <a:solidFill>
+                  <a:srgbClr val="FFFFFF"/>
+                </a:solidFill>
+                <a:latin typeface="Segoe UI"/>
+              </a:defRPr>
+            </a:pPr>
+            <a:r>
+              <a:t>Physics</a:t>
+            </a:r>
+          </a:p>
+          <a:p>
+            <a:pPr>
+              <a:spcBef>
+                <a:spcPts val="300"/>
+              </a:spcBef>
+              <a:defRPr sz="1300">
+                <a:solidFill>
+                  <a:srgbClr val="E2E8F0"/>
+                </a:solidFill>
+                <a:latin typeface="Segoe UI"/>
+              </a:defRPr>
+            </a:pPr>
+            <a:r>
+              <a:t>vy &gt; 2.5m/s or drag</a:t>
+            </a:r>
+          </a:p>
+        </p:txBody>
+      </p:sp>
+      <p:sp>
+        <p:nvSpPr>
+          <p:cNvPr id="14" name="Rectangle 13"/>
+          <p:cNvSpPr/>
+          <p:nvPr/>
+        </p:nvSpPr>
+        <p:spPr>
+          <a:xfrm>
+            <a:off x="6163056" y="1444752"/>
+            <a:ext cx="1664208" cy="1353312"/>
+          </a:xfrm>
+          <a:prstGeom prst="rect">
+            <a:avLst/>
+          </a:prstGeom>
+          <a:solidFill>
+            <a:srgbClr val="102C52"/>
+          </a:solidFill>
+          <a:ln w="19050">
+            <a:solidFill>
+              <a:srgbClr val="38BDF8"/>
+            </a:solidFill>
+          </a:ln>
+        </p:spPr>
+        <p:style>
+          <a:lnRef idx="1">
+            <a:schemeClr val="accent1"/>
+          </a:lnRef>
+          <a:fillRef idx="3">
+            <a:schemeClr val="accent1"/>
+          </a:fillRef>
+          <a:effectRef idx="2">
+            <a:schemeClr val="accent1"/>
+          </a:effectRef>
+          <a:fontRef idx="minor">
+            <a:schemeClr val="lt1"/>
+          </a:fontRef>
+        </p:style>
+        <p:txBody>
+          <a:bodyPr rtlCol="0" anchor="ctr"/>
+          <a:lstStyle/>
+          <a:p>
+            <a:pPr algn="ctr"/>
+          </a:p>
+        </p:txBody>
+      </p:sp>
+      <p:sp>
+        <p:nvSpPr>
+          <p:cNvPr id="15" name="Rectangle 14"/>
+          <p:cNvSpPr/>
+          <p:nvPr/>
+        </p:nvSpPr>
+        <p:spPr>
+          <a:xfrm>
+            <a:off x="6163056" y="1444752"/>
+            <a:ext cx="1664208" cy="36576"/>
+          </a:xfrm>
+          <a:prstGeom prst="rect">
+            <a:avLst/>
+          </a:prstGeom>
+          <a:solidFill>
+            <a:srgbClr val="38BDF8"/>
+          </a:solidFill>
+          <a:ln>
+            <a:noFill/>
+          </a:ln>
+        </p:spPr>
+        <p:style>
+          <a:lnRef idx="1">
+            <a:schemeClr val="accent1"/>
+          </a:lnRef>
+          <a:fillRef idx="3">
+            <a:schemeClr val="accent1"/>
+          </a:fillRef>
+          <a:effectRef idx="2">
+            <a:schemeClr val="accent1"/>
+          </a:effectRef>
+          <a:fontRef idx="minor">
+            <a:schemeClr val="lt1"/>
+          </a:fontRef>
+        </p:style>
+        <p:txBody>
+          <a:bodyPr rtlCol="0" anchor="ctr"/>
+          <a:lstStyle/>
+          <a:p>
+            <a:pPr algn="ctr"/>
+          </a:p>
+        </p:txBody>
+      </p:sp>
+      <p:sp>
+        <p:nvSpPr>
+          <p:cNvPr id="16" name="TextBox 15"/>
+          <p:cNvSpPr txBox="1"/>
+          <p:nvPr/>
+        </p:nvSpPr>
+        <p:spPr>
+          <a:xfrm>
+            <a:off x="6254496" y="1554480"/>
+            <a:ext cx="1481328" cy="1143000"/>
+          </a:xfrm>
+          <a:prstGeom prst="rect">
+            <a:avLst/>
+          </a:prstGeom>
+          <a:noFill/>
+        </p:spPr>
+        <p:txBody>
+          <a:bodyPr wrap="square" lIns="0" tIns="0" rIns="0" bIns="0">
+            <a:spAutoFit/>
+          </a:bodyPr>
+          <a:lstStyle/>
+          <a:p>
+            <a:pPr>
+              <a:defRPr sz="1700" b="1">
+                <a:solidFill>
+                  <a:srgbClr val="38BDF8"/>
+                </a:solidFill>
+                <a:latin typeface="Segoe UI"/>
+              </a:defRPr>
+            </a:pPr>
+            <a:r>
+              <a:t>04</a:t>
+            </a:r>
+          </a:p>
+          <a:p>
+            <a:pPr>
+              <a:spcBef>
+                <a:spcPts val="200"/>
+              </a:spcBef>
+              <a:defRPr sz="1650" b="1">
+                <a:solidFill>
+                  <a:srgbClr val="FFFFFF"/>
+                </a:solidFill>
+                <a:latin typeface="Segoe UI"/>
+              </a:defRPr>
+            </a:pPr>
+            <a:r>
+              <a:t>Dock Chime</a:t>
+            </a:r>
+          </a:p>
+          <a:p>
+            <a:pPr>
+              <a:spcBef>
+                <a:spcPts val="300"/>
+              </a:spcBef>
+              <a:defRPr sz="1300">
+                <a:solidFill>
+                  <a:srgbClr val="E2E8F0"/>
+                </a:solidFill>
+                <a:latin typeface="Segoe UI"/>
+              </a:defRPr>
+            </a:pPr>
+            <a:r>
+              <a:t>Polite audio tone</a:t>
+            </a:r>
+          </a:p>
+        </p:txBody>
+      </p:sp>
+      <p:sp>
+        <p:nvSpPr>
+          <p:cNvPr id="17" name="Rectangle 16"/>
+          <p:cNvSpPr/>
+          <p:nvPr/>
+        </p:nvSpPr>
+        <p:spPr>
+          <a:xfrm>
+            <a:off x="7973568" y="1444752"/>
+            <a:ext cx="1664208" cy="1353312"/>
           </a:xfrm>
           <a:prstGeom prst="rect">
             <a:avLst/>
@@ -4580,14 +5209,57 @@
       </p:sp>
       <p:sp>
         <p:nvSpPr>
-          <p:cNvPr id="8" name="TextBox 7"/>
+          <p:cNvPr id="18" name="Rectangle 17"/>
+          <p:cNvSpPr/>
+          <p:nvPr/>
+        </p:nvSpPr>
+        <p:spPr>
+          <a:xfrm>
+            <a:off x="7973568" y="1444752"/>
+            <a:ext cx="1664208" cy="36576"/>
+          </a:xfrm>
+          <a:prstGeom prst="rect">
+            <a:avLst/>
+          </a:prstGeom>
+          <a:solidFill>
+            <a:srgbClr val="1C3E66"/>
+          </a:solidFill>
+          <a:ln>
+            <a:noFill/>
+          </a:ln>
+        </p:spPr>
+        <p:style>
+          <a:lnRef idx="1">
+            <a:schemeClr val="accent1"/>
+          </a:lnRef>
+          <a:fillRef idx="3">
+            <a:schemeClr val="accent1"/>
+          </a:fillRef>
+          <a:effectRef idx="2">
+            <a:schemeClr val="accent1"/>
+          </a:effectRef>
+          <a:fontRef idx="minor">
+            <a:schemeClr val="lt1"/>
+          </a:fontRef>
+        </p:style>
+        <p:txBody>
+          <a:bodyPr rtlCol="0" anchor="ctr"/>
+          <a:lstStyle/>
+          <a:p>
+            <a:pPr algn="ctr"/>
+          </a:p>
+        </p:txBody>
+      </p:sp>
+      <p:sp>
+        <p:nvSpPr>
+          <p:cNvPr id="19" name="TextBox 18"/>
           <p:cNvSpPr txBox="1"/>
           <p:nvPr/>
         </p:nvSpPr>
         <p:spPr>
           <a:xfrm>
-            <a:off x="2350008" y="1490472"/>
-            <a:ext cx="1298448" cy="804672"/>
+            <a:off x="8065008" y="1554480"/>
+            <a:ext cx="1481328" cy="1143000"/>
           </a:xfrm>
           <a:prstGeom prst="rect">
             <a:avLst/>
@@ -4601,7 +5273,23 @@
           <a:lstStyle/>
           <a:p>
             <a:pPr>
-              <a:defRPr sz="950" b="1">
+              <a:defRPr sz="1700" b="1">
+                <a:solidFill>
+                  <a:srgbClr val="38BDF8"/>
+                </a:solidFill>
+                <a:latin typeface="Segoe UI"/>
+              </a:defRPr>
+            </a:pPr>
+            <a:r>
+              <a:t>05</a:t>
+            </a:r>
+          </a:p>
+          <a:p>
+            <a:pPr>
+              <a:spcBef>
+                <a:spcPts val="200"/>
+              </a:spcBef>
+              <a:defRPr sz="1650" b="1">
                 <a:solidFill>
                   <a:srgbClr val="FFFFFF"/>
                 </a:solidFill>
@@ -4609,7 +5297,7 @@
               </a:defRPr>
             </a:pPr>
             <a:r>
-              <a:t>02 • CCTV Stream</a:t>
+              <a:t>Inspection</a:t>
             </a:r>
           </a:p>
           <a:p>
@@ -4617,7 +5305,7 @@
               <a:spcBef>
                 <a:spcPts val="300"/>
               </a:spcBef>
-              <a:defRPr sz="819">
+              <a:defRPr sz="1300">
                 <a:solidFill>
                   <a:srgbClr val="E2E8F0"/>
                 </a:solidFill>
@@ -4625,21 +5313,177 @@
               </a:defRPr>
             </a:pPr>
             <a:r>
-              <a:t>1080p camera captures bay frames</a:t>
-            </a:r>
-          </a:p>
-        </p:txBody>
-      </p:sp>
-      <p:sp>
-        <p:nvSpPr>
-          <p:cNvPr id="9" name="Rectangle 8"/>
+              <a:t>Worker checks tape</a:t>
+            </a:r>
+          </a:p>
+        </p:txBody>
+      </p:sp>
+      <p:sp>
+        <p:nvSpPr>
+          <p:cNvPr id="20" name="Rectangle 19"/>
           <p:cNvSpPr/>
           <p:nvPr/>
         </p:nvSpPr>
         <p:spPr>
           <a:xfrm>
-            <a:off x="3822192" y="1417320"/>
-            <a:ext cx="1444752" cy="932688"/>
+            <a:off x="9784080" y="1444752"/>
+            <a:ext cx="1664208" cy="1353312"/>
+          </a:xfrm>
+          <a:prstGeom prst="rect">
+            <a:avLst/>
+          </a:prstGeom>
+          <a:solidFill>
+            <a:srgbClr val="102C52"/>
+          </a:solidFill>
+          <a:ln w="19050">
+            <a:solidFill>
+              <a:srgbClr val="38BDF8"/>
+            </a:solidFill>
+          </a:ln>
+        </p:spPr>
+        <p:style>
+          <a:lnRef idx="1">
+            <a:schemeClr val="accent1"/>
+          </a:lnRef>
+          <a:fillRef idx="3">
+            <a:schemeClr val="accent1"/>
+          </a:fillRef>
+          <a:effectRef idx="2">
+            <a:schemeClr val="accent1"/>
+          </a:effectRef>
+          <a:fontRef idx="minor">
+            <a:schemeClr val="lt1"/>
+          </a:fontRef>
+        </p:style>
+        <p:txBody>
+          <a:bodyPr rtlCol="0" anchor="ctr"/>
+          <a:lstStyle/>
+          <a:p>
+            <a:pPr algn="ctr"/>
+          </a:p>
+        </p:txBody>
+      </p:sp>
+      <p:sp>
+        <p:nvSpPr>
+          <p:cNvPr id="21" name="Rectangle 20"/>
+          <p:cNvSpPr/>
+          <p:nvPr/>
+        </p:nvSpPr>
+        <p:spPr>
+          <a:xfrm>
+            <a:off x="9784080" y="1444752"/>
+            <a:ext cx="1664208" cy="36576"/>
+          </a:xfrm>
+          <a:prstGeom prst="rect">
+            <a:avLst/>
+          </a:prstGeom>
+          <a:solidFill>
+            <a:srgbClr val="38BDF8"/>
+          </a:solidFill>
+          <a:ln>
+            <a:noFill/>
+          </a:ln>
+        </p:spPr>
+        <p:style>
+          <a:lnRef idx="1">
+            <a:schemeClr val="accent1"/>
+          </a:lnRef>
+          <a:fillRef idx="3">
+            <a:schemeClr val="accent1"/>
+          </a:fillRef>
+          <a:effectRef idx="2">
+            <a:schemeClr val="accent1"/>
+          </a:effectRef>
+          <a:fontRef idx="minor">
+            <a:schemeClr val="lt1"/>
+          </a:fontRef>
+        </p:style>
+        <p:txBody>
+          <a:bodyPr rtlCol="0" anchor="ctr"/>
+          <a:lstStyle/>
+          <a:p>
+            <a:pPr algn="ctr"/>
+          </a:p>
+        </p:txBody>
+      </p:sp>
+      <p:sp>
+        <p:nvSpPr>
+          <p:cNvPr id="22" name="TextBox 21"/>
+          <p:cNvSpPr txBox="1"/>
+          <p:nvPr/>
+        </p:nvSpPr>
+        <p:spPr>
+          <a:xfrm>
+            <a:off x="9875520" y="1554480"/>
+            <a:ext cx="1481328" cy="1143000"/>
+          </a:xfrm>
+          <a:prstGeom prst="rect">
+            <a:avLst/>
+          </a:prstGeom>
+          <a:noFill/>
+        </p:spPr>
+        <p:txBody>
+          <a:bodyPr wrap="square" lIns="0" tIns="0" rIns="0" bIns="0">
+            <a:spAutoFit/>
+          </a:bodyPr>
+          <a:lstStyle/>
+          <a:p>
+            <a:pPr>
+              <a:defRPr sz="1700" b="1">
+                <a:solidFill>
+                  <a:srgbClr val="38BDF8"/>
+                </a:solidFill>
+                <a:latin typeface="Segoe UI"/>
+              </a:defRPr>
+            </a:pPr>
+            <a:r>
+              <a:t>06</a:t>
+            </a:r>
+          </a:p>
+          <a:p>
+            <a:pPr>
+              <a:spcBef>
+                <a:spcPts val="200"/>
+              </a:spcBef>
+              <a:defRPr sz="1650" b="1">
+                <a:solidFill>
+                  <a:srgbClr val="FFFFFF"/>
+                </a:solidFill>
+                <a:latin typeface="Segoe UI"/>
+              </a:defRPr>
+            </a:pPr>
+            <a:r>
+              <a:t>Safe Transit</a:t>
+            </a:r>
+          </a:p>
+          <a:p>
+            <a:pPr>
+              <a:spcBef>
+                <a:spcPts val="300"/>
+              </a:spcBef>
+              <a:defRPr sz="1300">
+                <a:solidFill>
+                  <a:srgbClr val="E2E8F0"/>
+                </a:solidFill>
+                <a:latin typeface="Segoe UI"/>
+              </a:defRPr>
+            </a:pPr>
+            <a:r>
+              <a:t>100% verified cargo</a:t>
+            </a:r>
+          </a:p>
+        </p:txBody>
+      </p:sp>
+      <p:sp>
+        <p:nvSpPr>
+          <p:cNvPr id="23" name="Rectangle 22"/>
+          <p:cNvSpPr/>
+          <p:nvPr/>
+        </p:nvSpPr>
+        <p:spPr>
+          <a:xfrm>
+            <a:off x="731520" y="3090672"/>
+            <a:ext cx="5230368" cy="3337560"/>
           </a:xfrm>
           <a:prstGeom prst="rect">
             <a:avLst/>
@@ -4677,111 +5521,14 @@
       </p:sp>
       <p:sp>
         <p:nvSpPr>
-          <p:cNvPr id="10" name="TextBox 9"/>
-          <p:cNvSpPr txBox="1"/>
-          <p:nvPr/>
-        </p:nvSpPr>
-        <p:spPr>
-          <a:xfrm>
-            <a:off x="3895344" y="1490472"/>
-            <a:ext cx="1298448" cy="804672"/>
-          </a:xfrm>
-          <a:prstGeom prst="rect">
-            <a:avLst/>
-          </a:prstGeom>
-          <a:noFill/>
-        </p:spPr>
-        <p:txBody>
-          <a:bodyPr wrap="square" lIns="0" tIns="0" rIns="0" bIns="0">
-            <a:spAutoFit/>
-          </a:bodyPr>
-          <a:lstStyle/>
-          <a:p>
-            <a:pPr>
-              <a:defRPr sz="950" b="1">
-                <a:solidFill>
-                  <a:srgbClr val="FFFFFF"/>
-                </a:solidFill>
-                <a:latin typeface="Segoe UI"/>
-              </a:defRPr>
-            </a:pPr>
-            <a:r>
-              <a:t>03 • YOLOv8 Vision</a:t>
-            </a:r>
-          </a:p>
-          <a:p>
-            <a:pPr>
-              <a:spcBef>
-                <a:spcPts val="300"/>
-              </a:spcBef>
-              <a:defRPr sz="819">
-                <a:solidFill>
-                  <a:srgbClr val="E2E8F0"/>
-                </a:solidFill>
-                <a:latin typeface="Segoe UI"/>
-              </a:defRPr>
-            </a:pPr>
-            <a:r>
-              <a:t>Spatial tracking of boxes &amp; workers</a:t>
-            </a:r>
-          </a:p>
-        </p:txBody>
-      </p:sp>
-      <p:sp>
-        <p:nvSpPr>
-          <p:cNvPr id="11" name="Rectangle 10"/>
+          <p:cNvPr id="24" name="Rectangle 23"/>
           <p:cNvSpPr/>
           <p:nvPr/>
         </p:nvSpPr>
         <p:spPr>
           <a:xfrm>
-            <a:off x="5367528" y="1417320"/>
-            <a:ext cx="1444752" cy="932688"/>
-          </a:xfrm>
-          <a:prstGeom prst="rect">
-            <a:avLst/>
-          </a:prstGeom>
-          <a:solidFill>
-            <a:srgbClr val="102C52"/>
-          </a:solidFill>
-          <a:ln w="19050">
-            <a:solidFill>
-              <a:srgbClr val="38BDF8"/>
-            </a:solidFill>
-          </a:ln>
-        </p:spPr>
-        <p:style>
-          <a:lnRef idx="1">
-            <a:schemeClr val="accent1"/>
-          </a:lnRef>
-          <a:fillRef idx="3">
-            <a:schemeClr val="accent1"/>
-          </a:fillRef>
-          <a:effectRef idx="2">
-            <a:schemeClr val="accent1"/>
-          </a:effectRef>
-          <a:fontRef idx="minor">
-            <a:schemeClr val="lt1"/>
-          </a:fontRef>
-        </p:style>
-        <p:txBody>
-          <a:bodyPr rtlCol="0" anchor="ctr"/>
-          <a:lstStyle/>
-          <a:p>
-            <a:pPr algn="ctr"/>
-          </a:p>
-        </p:txBody>
-      </p:sp>
-      <p:sp>
-        <p:nvSpPr>
-          <p:cNvPr id="12" name="Rectangle 11"/>
-          <p:cNvSpPr/>
-          <p:nvPr/>
-        </p:nvSpPr>
-        <p:spPr>
-          <a:xfrm>
-            <a:off x="5367528" y="1417320"/>
-            <a:ext cx="1444752" cy="27432"/>
+            <a:off x="731520" y="3090672"/>
+            <a:ext cx="5230368" cy="36576"/>
           </a:xfrm>
           <a:prstGeom prst="rect">
             <a:avLst/>
@@ -4817,14 +5564,14 @@
       </p:sp>
       <p:sp>
         <p:nvSpPr>
-          <p:cNvPr id="13" name="TextBox 12"/>
+          <p:cNvPr id="25" name="TextBox 24"/>
           <p:cNvSpPr txBox="1"/>
           <p:nvPr/>
         </p:nvSpPr>
         <p:spPr>
           <a:xfrm>
-            <a:off x="5440680" y="1490472"/>
-            <a:ext cx="1298448" cy="804672"/>
+            <a:off x="960120" y="3255264"/>
+            <a:ext cx="4773168" cy="3063240"/>
           </a:xfrm>
           <a:prstGeom prst="rect">
             <a:avLst/>
@@ -4838,7 +5585,7 @@
           <a:lstStyle/>
           <a:p>
             <a:pPr>
-              <a:defRPr sz="950" b="1">
+              <a:defRPr sz="1800" b="1">
                 <a:solidFill>
                   <a:srgbClr val="38BDF8"/>
                 </a:solidFill>
@@ -4846,177 +5593,133 @@
               </a:defRPr>
             </a:pPr>
             <a:r>
-              <a:t>04 • Risk Detector</a:t>
+              <a:t>OPERATOR MOMENT: RAMESH AT BAY 3</a:t>
             </a:r>
           </a:p>
           <a:p>
             <a:pPr>
               <a:spcBef>
-                <a:spcPts val="300"/>
+                <a:spcPts val="200"/>
               </a:spcBef>
-              <a:defRPr sz="819">
-                <a:solidFill>
-                  <a:srgbClr val="E2E8F0"/>
-                </a:solidFill>
-                <a:latin typeface="Segoe UI"/>
-              </a:defRPr>
-            </a:pPr>
-            <a:r>
-              <a:t>Free-fall acceleration or drag flag</a:t>
-            </a:r>
-          </a:p>
-        </p:txBody>
-      </p:sp>
-      <p:sp>
-        <p:nvSpPr>
-          <p:cNvPr id="14" name="Rectangle 13"/>
+              <a:defRPr sz="1400">
+                <a:solidFill>
+                  <a:srgbClr val="94A3B8"/>
+                </a:solidFill>
+                <a:latin typeface="Segoe UI"/>
+              </a:defRPr>
+            </a:pPr>
+            <a:r>
+              <a:t>Supportive dockside coaching — not punitive surveillance.</a:t>
+            </a:r>
+          </a:p>
+          <a:p>
+            <a:pPr>
+              <a:spcBef>
+                <a:spcPts val="500"/>
+              </a:spcBef>
+              <a:defRPr sz="1500" b="1">
+                <a:solidFill>
+                  <a:srgbClr val="FFFFFF"/>
+                </a:solidFill>
+                <a:latin typeface="Segoe UI"/>
+              </a:defRPr>
+            </a:pPr>
+            <a:r>
+              <a:t>• The Rush: </a:t>
+            </a:r>
+            <a:r>
+              <a:rPr b="0">
+                <a:solidFill>
+                  <a:srgbClr val="CBD5E1"/>
+                </a:solidFill>
+              </a:rPr>
+              <a:t>4:15 PM container deadline; Ramesh lifts 25kg crate solo.</a:t>
+            </a:r>
+          </a:p>
+          <a:p>
+            <a:pPr>
+              <a:spcBef>
+                <a:spcPts val="500"/>
+              </a:spcBef>
+              <a:defRPr sz="1500" b="1">
+                <a:solidFill>
+                  <a:srgbClr val="FFFFFF"/>
+                </a:solidFill>
+                <a:latin typeface="Segoe UI"/>
+              </a:defRPr>
+            </a:pPr>
+            <a:r>
+              <a:t>• The Slip: </a:t>
+            </a:r>
+            <a:r>
+              <a:rPr b="0">
+                <a:solidFill>
+                  <a:srgbClr val="CBD5E1"/>
+                </a:solidFill>
+              </a:rPr>
+              <a:t>Grip fails; carton drops 1.2 meters to concrete floor.</a:t>
+            </a:r>
+          </a:p>
+          <a:p>
+            <a:pPr>
+              <a:spcBef>
+                <a:spcPts val="500"/>
+              </a:spcBef>
+              <a:defRPr sz="1500" b="1">
+                <a:solidFill>
+                  <a:srgbClr val="FFFFFF"/>
+                </a:solidFill>
+                <a:latin typeface="Segoe UI"/>
+              </a:defRPr>
+            </a:pPr>
+            <a:r>
+              <a:t>• The Chime: </a:t>
+            </a:r>
+            <a:r>
+              <a:rPr b="0">
+                <a:solidFill>
+                  <a:srgbClr val="CBD5E1"/>
+                </a:solidFill>
+              </a:rPr>
+              <a:t>Gentle microwave ping rings at Bay 3 (no panic siren).</a:t>
+            </a:r>
+          </a:p>
+          <a:p>
+            <a:pPr>
+              <a:spcBef>
+                <a:spcPts val="500"/>
+              </a:spcBef>
+              <a:defRPr sz="1500" b="1">
+                <a:solidFill>
+                  <a:srgbClr val="FFFFFF"/>
+                </a:solidFill>
+                <a:latin typeface="Segoe UI"/>
+              </a:defRPr>
+            </a:pPr>
+            <a:r>
+              <a:t>• The Win: </a:t>
+            </a:r>
+            <a:r>
+              <a:rPr b="0">
+                <a:solidFill>
+                  <a:srgbClr val="CBD5E1"/>
+                </a:solidFill>
+              </a:rPr>
+              <a:t>Calls teammate for 2-person lift; sets cracked item aside.</a:t>
+            </a:r>
+          </a:p>
+        </p:txBody>
+      </p:sp>
+      <p:sp>
+        <p:nvSpPr>
+          <p:cNvPr id="26" name="Rectangle 25"/>
           <p:cNvSpPr/>
           <p:nvPr/>
         </p:nvSpPr>
         <p:spPr>
           <a:xfrm>
-            <a:off x="6912864" y="1417320"/>
-            <a:ext cx="1444752" cy="932688"/>
-          </a:xfrm>
-          <a:prstGeom prst="rect">
-            <a:avLst/>
-          </a:prstGeom>
-          <a:solidFill>
-            <a:srgbClr val="102C52"/>
-          </a:solidFill>
-          <a:ln w="19050">
-            <a:solidFill>
-              <a:srgbClr val="38BDF8"/>
-            </a:solidFill>
-          </a:ln>
-        </p:spPr>
-        <p:style>
-          <a:lnRef idx="1">
-            <a:schemeClr val="accent1"/>
-          </a:lnRef>
-          <a:fillRef idx="3">
-            <a:schemeClr val="accent1"/>
-          </a:fillRef>
-          <a:effectRef idx="2">
-            <a:schemeClr val="accent1"/>
-          </a:effectRef>
-          <a:fontRef idx="minor">
-            <a:schemeClr val="lt1"/>
-          </a:fontRef>
-        </p:style>
-        <p:txBody>
-          <a:bodyPr rtlCol="0" anchor="ctr"/>
-          <a:lstStyle/>
-          <a:p>
-            <a:pPr algn="ctr"/>
-          </a:p>
-        </p:txBody>
-      </p:sp>
-      <p:sp>
-        <p:nvSpPr>
-          <p:cNvPr id="15" name="Rectangle 14"/>
-          <p:cNvSpPr/>
-          <p:nvPr/>
-        </p:nvSpPr>
-        <p:spPr>
-          <a:xfrm>
-            <a:off x="6912864" y="1417320"/>
-            <a:ext cx="1444752" cy="27432"/>
-          </a:xfrm>
-          <a:prstGeom prst="rect">
-            <a:avLst/>
-          </a:prstGeom>
-          <a:solidFill>
-            <a:srgbClr val="38BDF8"/>
-          </a:solidFill>
-          <a:ln>
-            <a:noFill/>
-          </a:ln>
-        </p:spPr>
-        <p:style>
-          <a:lnRef idx="1">
-            <a:schemeClr val="accent1"/>
-          </a:lnRef>
-          <a:fillRef idx="3">
-            <a:schemeClr val="accent1"/>
-          </a:fillRef>
-          <a:effectRef idx="2">
-            <a:schemeClr val="accent1"/>
-          </a:effectRef>
-          <a:fontRef idx="minor">
-            <a:schemeClr val="lt1"/>
-          </a:fontRef>
-        </p:style>
-        <p:txBody>
-          <a:bodyPr rtlCol="0" anchor="ctr"/>
-          <a:lstStyle/>
-          <a:p>
-            <a:pPr algn="ctr"/>
-          </a:p>
-        </p:txBody>
-      </p:sp>
-      <p:sp>
-        <p:nvSpPr>
-          <p:cNvPr id="16" name="TextBox 15"/>
-          <p:cNvSpPr txBox="1"/>
-          <p:nvPr/>
-        </p:nvSpPr>
-        <p:spPr>
-          <a:xfrm>
-            <a:off x="6986016" y="1490472"/>
-            <a:ext cx="1298448" cy="804672"/>
-          </a:xfrm>
-          <a:prstGeom prst="rect">
-            <a:avLst/>
-          </a:prstGeom>
-          <a:noFill/>
-        </p:spPr>
-        <p:txBody>
-          <a:bodyPr wrap="square" lIns="0" tIns="0" rIns="0" bIns="0">
-            <a:spAutoFit/>
-          </a:bodyPr>
-          <a:lstStyle/>
-          <a:p>
-            <a:pPr>
-              <a:defRPr sz="950" b="1">
-                <a:solidFill>
-                  <a:srgbClr val="38BDF8"/>
-                </a:solidFill>
-                <a:latin typeface="Segoe UI"/>
-              </a:defRPr>
-            </a:pPr>
-            <a:r>
-              <a:t>05 • Dock Chime</a:t>
-            </a:r>
-          </a:p>
-          <a:p>
-            <a:pPr>
-              <a:spcBef>
-                <a:spcPts val="300"/>
-              </a:spcBef>
-              <a:defRPr sz="819">
-                <a:solidFill>
-                  <a:srgbClr val="E2E8F0"/>
-                </a:solidFill>
-                <a:latin typeface="Segoe UI"/>
-              </a:defRPr>
-            </a:pPr>
-            <a:r>
-              <a:t>Subtle audible ping at Bay 3</a:t>
-            </a:r>
-          </a:p>
-        </p:txBody>
-      </p:sp>
-      <p:sp>
-        <p:nvSpPr>
-          <p:cNvPr id="17" name="Rectangle 16"/>
-          <p:cNvSpPr/>
-          <p:nvPr/>
-        </p:nvSpPr>
-        <p:spPr>
-          <a:xfrm>
-            <a:off x="8458200" y="1417320"/>
-            <a:ext cx="1444752" cy="932688"/>
+            <a:off x="6229807" y="3090672"/>
+            <a:ext cx="5230368" cy="3337560"/>
           </a:xfrm>
           <a:prstGeom prst="rect">
             <a:avLst/>
@@ -5054,511 +5757,14 @@
       </p:sp>
       <p:sp>
         <p:nvSpPr>
-          <p:cNvPr id="18" name="TextBox 17"/>
-          <p:cNvSpPr txBox="1"/>
-          <p:nvPr/>
-        </p:nvSpPr>
-        <p:spPr>
-          <a:xfrm>
-            <a:off x="8531352" y="1490472"/>
-            <a:ext cx="1298448" cy="804672"/>
-          </a:xfrm>
-          <a:prstGeom prst="rect">
-            <a:avLst/>
-          </a:prstGeom>
-          <a:noFill/>
-        </p:spPr>
-        <p:txBody>
-          <a:bodyPr wrap="square" lIns="0" tIns="0" rIns="0" bIns="0">
-            <a:spAutoFit/>
-          </a:bodyPr>
-          <a:lstStyle/>
-          <a:p>
-            <a:pPr>
-              <a:defRPr sz="950" b="1">
-                <a:solidFill>
-                  <a:srgbClr val="FFFFFF"/>
-                </a:solidFill>
-                <a:latin typeface="Segoe UI"/>
-              </a:defRPr>
-            </a:pPr>
-            <a:r>
-              <a:t>06 • Inspection</a:t>
-            </a:r>
-          </a:p>
-          <a:p>
-            <a:pPr>
-              <a:spcBef>
-                <a:spcPts val="300"/>
-              </a:spcBef>
-              <a:defRPr sz="819">
-                <a:solidFill>
-                  <a:srgbClr val="E2E8F0"/>
-                </a:solidFill>
-                <a:latin typeface="Segoe UI"/>
-              </a:defRPr>
-            </a:pPr>
-            <a:r>
-              <a:t>Worker checks tape &amp; sets aside</a:t>
-            </a:r>
-          </a:p>
-        </p:txBody>
-      </p:sp>
-      <p:sp>
-        <p:nvSpPr>
-          <p:cNvPr id="19" name="Rectangle 18"/>
+          <p:cNvPr id="27" name="Rectangle 26"/>
           <p:cNvSpPr/>
           <p:nvPr/>
         </p:nvSpPr>
         <p:spPr>
           <a:xfrm>
-            <a:off x="10003536" y="1417320"/>
-            <a:ext cx="1444752" cy="932688"/>
-          </a:xfrm>
-          <a:prstGeom prst="rect">
-            <a:avLst/>
-          </a:prstGeom>
-          <a:solidFill>
-            <a:srgbClr val="102C52"/>
-          </a:solidFill>
-          <a:ln w="19050">
-            <a:solidFill>
-              <a:srgbClr val="38BDF8"/>
-            </a:solidFill>
-          </a:ln>
-        </p:spPr>
-        <p:style>
-          <a:lnRef idx="1">
-            <a:schemeClr val="accent1"/>
-          </a:lnRef>
-          <a:fillRef idx="3">
-            <a:schemeClr val="accent1"/>
-          </a:fillRef>
-          <a:effectRef idx="2">
-            <a:schemeClr val="accent1"/>
-          </a:effectRef>
-          <a:fontRef idx="minor">
-            <a:schemeClr val="lt1"/>
-          </a:fontRef>
-        </p:style>
-        <p:txBody>
-          <a:bodyPr rtlCol="0" anchor="ctr"/>
-          <a:lstStyle/>
-          <a:p>
-            <a:pPr algn="ctr"/>
-          </a:p>
-        </p:txBody>
-      </p:sp>
-      <p:sp>
-        <p:nvSpPr>
-          <p:cNvPr id="20" name="Rectangle 19"/>
-          <p:cNvSpPr/>
-          <p:nvPr/>
-        </p:nvSpPr>
-        <p:spPr>
-          <a:xfrm>
-            <a:off x="10003536" y="1417320"/>
-            <a:ext cx="1444752" cy="27432"/>
-          </a:xfrm>
-          <a:prstGeom prst="rect">
-            <a:avLst/>
-          </a:prstGeom>
-          <a:solidFill>
-            <a:srgbClr val="38BDF8"/>
-          </a:solidFill>
-          <a:ln>
-            <a:noFill/>
-          </a:ln>
-        </p:spPr>
-        <p:style>
-          <a:lnRef idx="1">
-            <a:schemeClr val="accent1"/>
-          </a:lnRef>
-          <a:fillRef idx="3">
-            <a:schemeClr val="accent1"/>
-          </a:fillRef>
-          <a:effectRef idx="2">
-            <a:schemeClr val="accent1"/>
-          </a:effectRef>
-          <a:fontRef idx="minor">
-            <a:schemeClr val="lt1"/>
-          </a:fontRef>
-        </p:style>
-        <p:txBody>
-          <a:bodyPr rtlCol="0" anchor="ctr"/>
-          <a:lstStyle/>
-          <a:p>
-            <a:pPr algn="ctr"/>
-          </a:p>
-        </p:txBody>
-      </p:sp>
-      <p:sp>
-        <p:nvSpPr>
-          <p:cNvPr id="21" name="TextBox 20"/>
-          <p:cNvSpPr txBox="1"/>
-          <p:nvPr/>
-        </p:nvSpPr>
-        <p:spPr>
-          <a:xfrm>
-            <a:off x="10076688" y="1490472"/>
-            <a:ext cx="1298448" cy="804672"/>
-          </a:xfrm>
-          <a:prstGeom prst="rect">
-            <a:avLst/>
-          </a:prstGeom>
-          <a:noFill/>
-        </p:spPr>
-        <p:txBody>
-          <a:bodyPr wrap="square" lIns="0" tIns="0" rIns="0" bIns="0">
-            <a:spAutoFit/>
-          </a:bodyPr>
-          <a:lstStyle/>
-          <a:p>
-            <a:pPr>
-              <a:defRPr sz="950" b="1">
-                <a:solidFill>
-                  <a:srgbClr val="38BDF8"/>
-                </a:solidFill>
-                <a:latin typeface="Segoe UI"/>
-              </a:defRPr>
-            </a:pPr>
-            <a:r>
-              <a:t>07 • Zero Defect</a:t>
-            </a:r>
-          </a:p>
-          <a:p>
-            <a:pPr>
-              <a:spcBef>
-                <a:spcPts val="300"/>
-              </a:spcBef>
-              <a:defRPr sz="819">
-                <a:solidFill>
-                  <a:srgbClr val="E2E8F0"/>
-                </a:solidFill>
-                <a:latin typeface="Segoe UI"/>
-              </a:defRPr>
-            </a:pPr>
-            <a:r>
-              <a:t>Shipment leaves 100% verified</a:t>
-            </a:r>
-          </a:p>
-        </p:txBody>
-      </p:sp>
-      <p:sp>
-        <p:nvSpPr>
-          <p:cNvPr id="22" name="Rectangle 21"/>
-          <p:cNvSpPr/>
-          <p:nvPr/>
-        </p:nvSpPr>
-        <p:spPr>
-          <a:xfrm>
-            <a:off x="731520" y="2542032"/>
-            <a:ext cx="5212080" cy="3794760"/>
-          </a:xfrm>
-          <a:prstGeom prst="rect">
-            <a:avLst/>
-          </a:prstGeom>
-          <a:solidFill>
-            <a:srgbClr val="0A192E"/>
-          </a:solidFill>
-          <a:ln w="12700">
-            <a:solidFill>
-              <a:srgbClr val="1C3E66"/>
-            </a:solidFill>
-          </a:ln>
-        </p:spPr>
-        <p:style>
-          <a:lnRef idx="1">
-            <a:schemeClr val="accent1"/>
-          </a:lnRef>
-          <a:fillRef idx="3">
-            <a:schemeClr val="accent1"/>
-          </a:fillRef>
-          <a:effectRef idx="2">
-            <a:schemeClr val="accent1"/>
-          </a:effectRef>
-          <a:fontRef idx="minor">
-            <a:schemeClr val="lt1"/>
-          </a:fontRef>
-        </p:style>
-        <p:txBody>
-          <a:bodyPr rtlCol="0" anchor="ctr"/>
-          <a:lstStyle/>
-          <a:p>
-            <a:pPr algn="ctr"/>
-          </a:p>
-        </p:txBody>
-      </p:sp>
-      <p:sp>
-        <p:nvSpPr>
-          <p:cNvPr id="23" name="Rectangle 22"/>
-          <p:cNvSpPr/>
-          <p:nvPr/>
-        </p:nvSpPr>
-        <p:spPr>
-          <a:xfrm>
-            <a:off x="731520" y="2542032"/>
-            <a:ext cx="5212080" cy="27432"/>
-          </a:xfrm>
-          <a:prstGeom prst="rect">
-            <a:avLst/>
-          </a:prstGeom>
-          <a:solidFill>
-            <a:srgbClr val="38BDF8"/>
-          </a:solidFill>
-          <a:ln>
-            <a:noFill/>
-          </a:ln>
-        </p:spPr>
-        <p:style>
-          <a:lnRef idx="1">
-            <a:schemeClr val="accent1"/>
-          </a:lnRef>
-          <a:fillRef idx="3">
-            <a:schemeClr val="accent1"/>
-          </a:fillRef>
-          <a:effectRef idx="2">
-            <a:schemeClr val="accent1"/>
-          </a:effectRef>
-          <a:fontRef idx="minor">
-            <a:schemeClr val="lt1"/>
-          </a:fontRef>
-        </p:style>
-        <p:txBody>
-          <a:bodyPr rtlCol="0" anchor="ctr"/>
-          <a:lstStyle/>
-          <a:p>
-            <a:pPr algn="ctr"/>
-          </a:p>
-        </p:txBody>
-      </p:sp>
-      <p:sp>
-        <p:nvSpPr>
-          <p:cNvPr id="24" name="TextBox 23"/>
-          <p:cNvSpPr txBox="1"/>
-          <p:nvPr/>
-        </p:nvSpPr>
-        <p:spPr>
-          <a:xfrm>
-            <a:off x="960120" y="2706624"/>
-            <a:ext cx="4754880" cy="3474720"/>
-          </a:xfrm>
-          <a:prstGeom prst="rect">
-            <a:avLst/>
-          </a:prstGeom>
-          <a:noFill/>
-        </p:spPr>
-        <p:txBody>
-          <a:bodyPr wrap="square" lIns="0" tIns="0" rIns="0" bIns="0">
-            <a:spAutoFit/>
-          </a:bodyPr>
-          <a:lstStyle/>
-          <a:p>
-            <a:pPr>
-              <a:defRPr sz="1100" b="1">
-                <a:solidFill>
-                  <a:srgbClr val="38BDF8"/>
-                </a:solidFill>
-                <a:latin typeface="Segoe UI"/>
-              </a:defRPr>
-            </a:pPr>
-            <a:r>
-              <a:t>OPERATOR JOURNEY: RAMESH AT BAY 3</a:t>
-            </a:r>
-          </a:p>
-          <a:p>
-            <a:pPr>
-              <a:spcBef>
-                <a:spcPts val="200"/>
-              </a:spcBef>
-              <a:defRPr sz="900">
-                <a:solidFill>
-                  <a:srgbClr val="94A3B8"/>
-                </a:solidFill>
-                <a:latin typeface="Segoe UI"/>
-              </a:defRPr>
-            </a:pPr>
-            <a:r>
-              <a:t>How DockGuard supports rather than polices dockworkers under pressure.</a:t>
-            </a:r>
-          </a:p>
-          <a:p>
-            <a:pPr>
-              <a:spcBef>
-                <a:spcPts val="600"/>
-              </a:spcBef>
-              <a:defRPr sz="950" b="1">
-                <a:solidFill>
-                  <a:srgbClr val="FFFFFF"/>
-                </a:solidFill>
-                <a:latin typeface="Segoe UI"/>
-              </a:defRPr>
-            </a:pPr>
-            <a:r>
-              <a:t>• The Rush Window: </a:t>
-            </a:r>
-            <a:r>
-              <a:rPr b="0">
-                <a:solidFill>
-                  <a:srgbClr val="CBD5E1"/>
-                </a:solidFill>
-              </a:rPr>
-              <a:t>It's 4:15 PM, 34°C, and Ramesh has 45 minutes to finish packing a 40-foot container before driver cutoff.</a:t>
-            </a:r>
-          </a:p>
-          <a:p>
-            <a:pPr>
-              <a:spcBef>
-                <a:spcPts val="600"/>
-              </a:spcBef>
-              <a:defRPr sz="950" b="1">
-                <a:solidFill>
-                  <a:srgbClr val="FFFFFF"/>
-                </a:solidFill>
-                <a:latin typeface="Segoe UI"/>
-              </a:defRPr>
-            </a:pPr>
-            <a:r>
-              <a:t>• The Accidental Drop: </a:t>
-            </a:r>
-            <a:r>
-              <a:rPr b="0">
-                <a:solidFill>
-                  <a:srgbClr val="CBD5E1"/>
-                </a:solidFill>
-              </a:rPr>
-              <a:t>Lifting a heavy 25kg crate solo, his grip slips. The carton crashes 1.2 meters directly onto the concrete floor.</a:t>
-            </a:r>
-          </a:p>
-          <a:p>
-            <a:pPr>
-              <a:spcBef>
-                <a:spcPts val="600"/>
-              </a:spcBef>
-              <a:defRPr sz="950" b="1">
-                <a:solidFill>
-                  <a:srgbClr val="FFFFFF"/>
-                </a:solidFill>
-                <a:latin typeface="Segoe UI"/>
-              </a:defRPr>
-            </a:pPr>
-            <a:r>
-              <a:t>• Non-Punitive Chime: </a:t>
-            </a:r>
-            <a:r>
-              <a:rPr b="0">
-                <a:solidFill>
-                  <a:srgbClr val="CBD5E1"/>
-                </a:solidFill>
-              </a:rPr>
-              <a:t>Instead of a harsh alarm that triggers fear or panic, a polite, microwave-style chime pings at Bay 3 as the dock tablet pulses amber.</a:t>
-            </a:r>
-          </a:p>
-          <a:p>
-            <a:pPr>
-              <a:spcBef>
-                <a:spcPts val="600"/>
-              </a:spcBef>
-              <a:defRPr sz="950" b="1">
-                <a:solidFill>
-                  <a:srgbClr val="FFFFFF"/>
-                </a:solidFill>
-                <a:latin typeface="Segoe UI"/>
-              </a:defRPr>
-            </a:pPr>
-            <a:r>
-              <a:t>• Immediate Correction: </a:t>
-            </a:r>
-            <a:r>
-              <a:rPr b="0">
-                <a:solidFill>
-                  <a:srgbClr val="CBD5E1"/>
-                </a:solidFill>
-              </a:rPr>
-              <a:t>Ramesh pauses, inspects the seal, requests assistance for a 2-person lift, and places the suspect carton on the audit cart.</a:t>
-            </a:r>
-          </a:p>
-          <a:p>
-            <a:pPr>
-              <a:spcBef>
-                <a:spcPts val="600"/>
-              </a:spcBef>
-              <a:defRPr sz="950" b="1">
-                <a:solidFill>
-                  <a:srgbClr val="FFFFFF"/>
-                </a:solidFill>
-                <a:latin typeface="Segoe UI"/>
-              </a:defRPr>
-            </a:pPr>
-            <a:r>
-              <a:t>• The Outcome: </a:t>
-            </a:r>
-            <a:r>
-              <a:rPr b="0">
-                <a:solidFill>
-                  <a:srgbClr val="CBD5E1"/>
-                </a:solidFill>
-              </a:rPr>
-              <a:t>A broken high-value appliance never reaches the consumer, and Ramesh avoids back injury on subsequent lifts.</a:t>
-            </a:r>
-          </a:p>
-        </p:txBody>
-      </p:sp>
-      <p:sp>
-        <p:nvSpPr>
-          <p:cNvPr id="25" name="Rectangle 24"/>
-          <p:cNvSpPr/>
-          <p:nvPr/>
-        </p:nvSpPr>
-        <p:spPr>
-          <a:xfrm>
-            <a:off x="6248095" y="2542032"/>
-            <a:ext cx="5212080" cy="3794760"/>
-          </a:xfrm>
-          <a:prstGeom prst="rect">
-            <a:avLst/>
-          </a:prstGeom>
-          <a:solidFill>
-            <a:srgbClr val="0A192E"/>
-          </a:solidFill>
-          <a:ln w="12700">
-            <a:solidFill>
-              <a:srgbClr val="1C3E66"/>
-            </a:solidFill>
-          </a:ln>
-        </p:spPr>
-        <p:style>
-          <a:lnRef idx="1">
-            <a:schemeClr val="accent1"/>
-          </a:lnRef>
-          <a:fillRef idx="3">
-            <a:schemeClr val="accent1"/>
-          </a:fillRef>
-          <a:effectRef idx="2">
-            <a:schemeClr val="accent1"/>
-          </a:effectRef>
-          <a:fontRef idx="minor">
-            <a:schemeClr val="lt1"/>
-          </a:fontRef>
-        </p:style>
-        <p:txBody>
-          <a:bodyPr rtlCol="0" anchor="ctr"/>
-          <a:lstStyle/>
-          <a:p>
-            <a:pPr algn="ctr"/>
-          </a:p>
-        </p:txBody>
-      </p:sp>
-      <p:sp>
-        <p:nvSpPr>
-          <p:cNvPr id="26" name="Rectangle 25"/>
-          <p:cNvSpPr/>
-          <p:nvPr/>
-        </p:nvSpPr>
-        <p:spPr>
-          <a:xfrm>
-            <a:off x="6248095" y="2542032"/>
-            <a:ext cx="5212080" cy="27432"/>
+            <a:off x="6229807" y="3090672"/>
+            <a:ext cx="5230368" cy="36576"/>
           </a:xfrm>
           <a:prstGeom prst="rect">
             <a:avLst/>
@@ -5594,14 +5800,14 @@
       </p:sp>
       <p:sp>
         <p:nvSpPr>
-          <p:cNvPr id="27" name="TextBox 26"/>
+          <p:cNvPr id="28" name="TextBox 27"/>
           <p:cNvSpPr txBox="1"/>
           <p:nvPr/>
         </p:nvSpPr>
         <p:spPr>
           <a:xfrm>
-            <a:off x="6473952" y="2706624"/>
-            <a:ext cx="4754880" cy="3474720"/>
+            <a:off x="6458407" y="3255264"/>
+            <a:ext cx="4773168" cy="3063240"/>
           </a:xfrm>
           <a:prstGeom prst="rect">
             <a:avLst/>
@@ -5615,7 +5821,7 @@
           <a:lstStyle/>
           <a:p>
             <a:pPr>
-              <a:defRPr sz="1100" b="1">
+              <a:defRPr sz="1800" b="1">
                 <a:solidFill>
                   <a:srgbClr val="7DD3FC"/>
                 </a:solidFill>
@@ -5623,7 +5829,7 @@
               </a:defRPr>
             </a:pPr>
             <a:r>
-              <a:t>SUPERVISOR JOURNEY: POOJA WITH HER TABLET</a:t>
+              <a:t>SUPERVISOR MOMENT: POOJA ON HER IPAD</a:t>
             </a:r>
           </a:p>
           <a:p>
@@ -5631,7 +5837,7 @@
               <a:spcBef>
                 <a:spcPts val="200"/>
               </a:spcBef>
-              <a:defRPr sz="900">
+              <a:defRPr sz="1400">
                 <a:solidFill>
                   <a:srgbClr val="94A3B8"/>
                 </a:solidFill>
@@ -5639,15 +5845,15 @@
               </a:defRPr>
             </a:pPr>
             <a:r>
-              <a:t>Replacing 45 minutes of manual video scrubbing with instant actionable proof.</a:t>
+              <a:t>Replacing 45 minutes of manual video scrubbing with instant proof.</a:t>
             </a:r>
           </a:p>
           <a:p>
             <a:pPr>
               <a:spcBef>
-                <a:spcPts val="600"/>
+                <a:spcPts val="500"/>
               </a:spcBef>
-              <a:defRPr sz="950" b="1">
+              <a:defRPr sz="1500" b="1">
                 <a:solidFill>
                   <a:srgbClr val="FFFFFF"/>
                 </a:solidFill>
@@ -5655,7 +5861,7 @@
               </a:defRPr>
             </a:pPr>
             <a:r>
-              <a:t>• The Daily Grind: </a:t>
+              <a:t>• The Old Way: </a:t>
             </a:r>
             <a:r>
               <a:rPr b="0">
@@ -5663,15 +5869,15 @@
                   <a:srgbClr val="CBD5E1"/>
                 </a:solidFill>
               </a:rPr>
-              <a:t>Pooja previously wasted 45 minutes every evening scrubbing grainy DVR tapes trying to verify freight claims.</a:t>
+              <a:t>Wasted 45 mins nightly hunting timestamps on blurry DVRs.</a:t>
             </a:r>
           </a:p>
           <a:p>
             <a:pPr>
               <a:spcBef>
-                <a:spcPts val="600"/>
+                <a:spcPts val="500"/>
               </a:spcBef>
-              <a:defRPr sz="950" b="1">
+              <a:defRPr sz="1500" b="1">
                 <a:solidFill>
                   <a:srgbClr val="FFFFFF"/>
                 </a:solidFill>
@@ -5679,7 +5885,7 @@
               </a:defRPr>
             </a:pPr>
             <a:r>
-              <a:t>• Real-Time Dispatch: </a:t>
+              <a:t>• Instant Alert: </a:t>
             </a:r>
             <a:r>
               <a:rPr b="0">
@@ -5687,15 +5893,15 @@
                   <a:srgbClr val="CBD5E1"/>
                 </a:solidFill>
               </a:rPr>
-              <a:t>Her tablet buzzes instantly: 'Bay 3: High-Velocity Drop Detected (10:14 AM)' with classified severity.</a:t>
+              <a:t>iPad buzzes: 'Bay 3: High-Velocity Drop Detected (10:14 AM)'.</a:t>
             </a:r>
           </a:p>
           <a:p>
             <a:pPr>
               <a:spcBef>
-                <a:spcPts val="600"/>
+                <a:spcPts val="500"/>
               </a:spcBef>
-              <a:defRPr sz="950" b="1">
+              <a:defRPr sz="1500" b="1">
                 <a:solidFill>
                   <a:srgbClr val="FFFFFF"/>
                 </a:solidFill>
@@ -5703,7 +5909,7 @@
               </a:defRPr>
             </a:pPr>
             <a:r>
-              <a:t>• 5-Second Micro Replay: </a:t>
+              <a:t>• 5-Second Replay: </a:t>
             </a:r>
             <a:r>
               <a:rPr b="0">
@@ -5711,15 +5917,15 @@
                   <a:srgbClr val="CBD5E1"/>
                 </a:solidFill>
               </a:rPr>
-              <a:t>One tap launches a lightweight 5-second video clip displaying the carton trajectory, bounding box, and impact velocity.</a:t>
+              <a:t>One tap plays fall trajectory and impact velocity vector.</a:t>
             </a:r>
           </a:p>
           <a:p>
             <a:pPr>
               <a:spcBef>
-                <a:spcPts val="600"/>
+                <a:spcPts val="500"/>
               </a:spcBef>
-              <a:defRPr sz="950" b="1">
+              <a:defRPr sz="1500" b="1">
                 <a:solidFill>
                   <a:srgbClr val="FFFFFF"/>
                 </a:solidFill>
@@ -5727,7 +5933,7 @@
               </a:defRPr>
             </a:pPr>
             <a:r>
-              <a:t>• Decisive Sign-Off: </a:t>
+              <a:t>• Gemini Audit: </a:t>
             </a:r>
             <a:r>
               <a:rPr b="0">
@@ -5735,110 +5941,7 @@
                   <a:srgbClr val="CBD5E1"/>
                 </a:solidFill>
               </a:rPr>
-              <a:t>She verifies the incident, authorizes repackaging in 15 seconds, and logs the package barcode without friction.</a:t>
-            </a:r>
-          </a:p>
-          <a:p>
-            <a:pPr>
-              <a:spcBef>
-                <a:spcPts val="600"/>
-              </a:spcBef>
-              <a:defRPr sz="950" b="1">
-                <a:solidFill>
-                  <a:srgbClr val="FFFFFF"/>
-                </a:solidFill>
-                <a:latin typeface="Segoe UI"/>
-              </a:defRPr>
-            </a:pPr>
-            <a:r>
-              <a:t>• Natural Language Audit: </a:t>
-            </a:r>
-            <a:r>
-              <a:rPr b="0">
-                <a:solidFill>
-                  <a:srgbClr val="CBD5E1"/>
-                </a:solidFill>
-              </a:rPr>
-              <a:t>At shift handover, she asks Gemini: 'Summarize all high-velocity drops today' and receives an instant breakdown for the safety briefing.</a:t>
-            </a:r>
-          </a:p>
-        </p:txBody>
-      </p:sp>
-      <p:sp>
-        <p:nvSpPr>
-          <p:cNvPr id="28" name="Rectangle 27"/>
-          <p:cNvSpPr/>
-          <p:nvPr/>
-        </p:nvSpPr>
-        <p:spPr>
-          <a:xfrm>
-            <a:off x="731520" y="6492240"/>
-            <a:ext cx="10728655" cy="13716"/>
-          </a:xfrm>
-          <a:prstGeom prst="rect">
-            <a:avLst/>
-          </a:prstGeom>
-          <a:solidFill>
-            <a:srgbClr val="1C3E66"/>
-          </a:solidFill>
-          <a:ln>
-            <a:noFill/>
-          </a:ln>
-        </p:spPr>
-        <p:style>
-          <a:lnRef idx="1">
-            <a:schemeClr val="accent1"/>
-          </a:lnRef>
-          <a:fillRef idx="3">
-            <a:schemeClr val="accent1"/>
-          </a:fillRef>
-          <a:effectRef idx="2">
-            <a:schemeClr val="accent1"/>
-          </a:effectRef>
-          <a:fontRef idx="minor">
-            <a:schemeClr val="lt1"/>
-          </a:fontRef>
-        </p:style>
-        <p:txBody>
-          <a:bodyPr rtlCol="0" anchor="ctr"/>
-          <a:lstStyle/>
-          <a:p>
-            <a:pPr algn="ctr"/>
-          </a:p>
-        </p:txBody>
-      </p:sp>
-      <p:sp>
-        <p:nvSpPr>
-          <p:cNvPr id="29" name="TextBox 28"/>
-          <p:cNvSpPr txBox="1"/>
-          <p:nvPr/>
-        </p:nvSpPr>
-        <p:spPr>
-          <a:xfrm>
-            <a:off x="731520" y="6537960"/>
-            <a:ext cx="10728655" cy="228600"/>
-          </a:xfrm>
-          <a:prstGeom prst="rect">
-            <a:avLst/>
-          </a:prstGeom>
-          <a:noFill/>
-        </p:spPr>
-        <p:txBody>
-          <a:bodyPr wrap="none" lIns="0" tIns="0" rIns="0" bIns="0">
-            <a:spAutoFit/>
-          </a:bodyPr>
-          <a:lstStyle/>
-          <a:p>
-            <a:pPr>
-              <a:defRPr sz="850">
-                <a:solidFill>
-                  <a:srgbClr val="94A3B8"/>
-                </a:solidFill>
-                <a:latin typeface="Segoe UI"/>
-              </a:defRPr>
-            </a:pPr>
-            <a:r>
-              <a:t>DockGuard AI  •  Dual User Journey &amp; 7-Stage Prevention Flow  •  Slide 2 of 6</a:t>
+              <a:t>Shift-end query: 'Summarize all Bay 3 drops today' in 1 click.</a:t>
             </a:r>
           </a:p>
         </p:txBody>
@@ -5892,7 +5995,7 @@
         <p:spPr>
           <a:xfrm>
             <a:off x="731520" y="384048"/>
-            <a:ext cx="6400800" cy="274320"/>
+            <a:ext cx="5943600" cy="274320"/>
           </a:xfrm>
           <a:prstGeom prst="rect">
             <a:avLst/>
@@ -5906,7 +6009,7 @@
           <a:lstStyle/>
           <a:p>
             <a:pPr>
-              <a:defRPr sz="950" b="1">
+              <a:defRPr sz="1350" b="1">
                 <a:solidFill>
                   <a:srgbClr val="38BDF8"/>
                 </a:solidFill>
@@ -5914,7 +6017,7 @@
               </a:defRPr>
             </a:pPr>
             <a:r>
-              <a:t>03  /  TECHNICAL ARCHITECTURE &amp; STACK</a:t>
+              <a:t>03  /  TECHNICAL ARCHITECTURE &amp; TECH STACK</a:t>
             </a:r>
           </a:p>
         </p:txBody>
@@ -5927,8 +6030,8 @@
         </p:nvSpPr>
         <p:spPr>
           <a:xfrm>
-            <a:off x="7132320" y="384048"/>
-            <a:ext cx="4327855" cy="274320"/>
+            <a:off x="6858000" y="384048"/>
+            <a:ext cx="4602175" cy="274320"/>
           </a:xfrm>
           <a:prstGeom prst="rect">
             <a:avLst/>
@@ -5942,7 +6045,7 @@
           <a:lstStyle/>
           <a:p>
             <a:pPr algn="r">
-              <a:defRPr sz="850" b="1">
+              <a:defRPr sz="1250" b="1">
                 <a:solidFill>
                   <a:srgbClr val="94A3B8"/>
                 </a:solidFill>
@@ -5950,7 +6053,7 @@
               </a:defRPr>
             </a:pPr>
             <a:r>
-              <a:t>CONFIDENTIAL — ACADEMIC &amp; PROTOTYPE PROJECT</a:t>
+              <a:t>CONFIDENTIAL — ACADEMIC PROJECT</a:t>
             </a:r>
           </a:p>
         </p:txBody>
@@ -5978,7 +6081,7 @@
           <a:lstStyle/>
           <a:p>
             <a:pPr>
-              <a:defRPr sz="2200" b="1">
+              <a:defRPr sz="2900" b="1">
                 <a:solidFill>
                   <a:srgbClr val="FFFFFF"/>
                 </a:solidFill>
@@ -5986,7 +6089,7 @@
               </a:defRPr>
             </a:pPr>
             <a:r>
-              <a:t>Full-Stack Architecture: Computer Vision, Spatial Physics &amp; LLM RAG</a:t>
+              <a:t>Technical Architecture &amp; Edge-to-Cloud Pipeline</a:t>
             </a:r>
           </a:p>
         </p:txBody>
@@ -5999,7 +6102,7 @@
         </p:nvSpPr>
         <p:spPr>
           <a:xfrm>
-            <a:off x="731520" y="1243584"/>
+            <a:off x="731520" y="1234440"/>
             <a:ext cx="10728655" cy="13716"/>
           </a:xfrm>
           <a:prstGeom prst="rect">
@@ -6036,50 +6139,14 @@
       </p:sp>
       <p:sp>
         <p:nvSpPr>
-          <p:cNvPr id="6" name="TextBox 5"/>
-          <p:cNvSpPr txBox="1"/>
-          <p:nvPr/>
-        </p:nvSpPr>
-        <p:spPr>
-          <a:xfrm>
-            <a:off x="731520" y="1298448"/>
-            <a:ext cx="10728655" cy="274320"/>
-          </a:xfrm>
-          <a:prstGeom prst="rect">
-            <a:avLst/>
-          </a:prstGeom>
-          <a:noFill/>
-        </p:spPr>
-        <p:txBody>
-          <a:bodyPr wrap="none" lIns="0" tIns="0" rIns="0" bIns="0">
-            <a:spAutoFit/>
-          </a:bodyPr>
-          <a:lstStyle/>
-          <a:p>
-            <a:pPr>
-              <a:defRPr sz="1000">
-                <a:solidFill>
-                  <a:srgbClr val="38BDF8"/>
-                </a:solidFill>
-                <a:latin typeface="Segoe UI"/>
-              </a:defRPr>
-            </a:pPr>
-            <a:r>
-              <a:t>End-to-end edge-to-cloud intelligence pipeline combining computer vision, kinematic rules, and conversational RAG.</a:t>
-            </a:r>
-          </a:p>
-        </p:txBody>
-      </p:sp>
-      <p:sp>
-        <p:nvSpPr>
-          <p:cNvPr id="7" name="Rectangle 6"/>
+          <p:cNvPr id="6" name="Rectangle 5"/>
           <p:cNvSpPr/>
           <p:nvPr/>
         </p:nvSpPr>
         <p:spPr>
           <a:xfrm>
-            <a:off x="731520" y="1645920"/>
-            <a:ext cx="3410712" cy="2240280"/>
+            <a:off x="731520" y="1444752"/>
+            <a:ext cx="5120640" cy="1078992"/>
           </a:xfrm>
           <a:prstGeom prst="rect">
             <a:avLst/>
@@ -6117,23 +6184,77 @@
       </p:sp>
       <p:sp>
         <p:nvSpPr>
+          <p:cNvPr id="7" name="TextBox 6"/>
+          <p:cNvSpPr txBox="1"/>
+          <p:nvPr/>
+        </p:nvSpPr>
+        <p:spPr>
+          <a:xfrm>
+            <a:off x="914400" y="1554480"/>
+            <a:ext cx="4754880" cy="859536"/>
+          </a:xfrm>
+          <a:prstGeom prst="rect">
+            <a:avLst/>
+          </a:prstGeom>
+          <a:noFill/>
+        </p:spPr>
+        <p:txBody>
+          <a:bodyPr wrap="square">
+            <a:spAutoFit/>
+          </a:bodyPr>
+          <a:lstStyle/>
+          <a:p>
+            <a:pPr>
+              <a:defRPr sz="1650" b="1">
+                <a:solidFill>
+                  <a:srgbClr val="FFFFFF"/>
+                </a:solidFill>
+                <a:latin typeface="Segoe UI"/>
+              </a:defRPr>
+            </a:pPr>
+            <a:r>
+              <a:t>01 • CCTV VIDEO STREAM &amp; RING BUFFER</a:t>
+            </a:r>
+          </a:p>
+          <a:p>
+            <a:pPr>
+              <a:spcBef>
+                <a:spcPts val="300"/>
+              </a:spcBef>
+              <a:defRPr sz="1350" b="1">
+                <a:solidFill>
+                  <a:srgbClr val="38BDF8"/>
+                </a:solidFill>
+                <a:latin typeface="Segoe UI"/>
+              </a:defRPr>
+            </a:pPr>
+            <a:r>
+              <a:t>OpenCV + FFmpeg  |  1080p @ 15fps  |  In-Memory 15s FIFO Buffer</a:t>
+            </a:r>
+          </a:p>
+        </p:txBody>
+      </p:sp>
+      <p:sp>
+        <p:nvSpPr>
           <p:cNvPr id="8" name="Rectangle 7"/>
           <p:cNvSpPr/>
           <p:nvPr/>
         </p:nvSpPr>
         <p:spPr>
           <a:xfrm>
-            <a:off x="731520" y="1645920"/>
-            <a:ext cx="3410712" cy="22860"/>
+            <a:off x="6339535" y="1444752"/>
+            <a:ext cx="5120640" cy="1078992"/>
           </a:xfrm>
           <a:prstGeom prst="rect">
             <a:avLst/>
           </a:prstGeom>
           <a:solidFill>
-            <a:srgbClr val="38BDF8"/>
+            <a:srgbClr val="102C52"/>
           </a:solidFill>
-          <a:ln>
-            <a:noFill/>
+          <a:ln w="19050">
+            <a:solidFill>
+              <a:srgbClr val="38BDF8"/>
+            </a:solidFill>
           </a:ln>
         </p:spPr>
         <p:style>
@@ -6166,8 +6287,8 @@
         </p:nvSpPr>
         <p:spPr>
           <a:xfrm>
-            <a:off x="896112" y="1755648"/>
-            <a:ext cx="3081528" cy="2057400"/>
+            <a:off x="6522415" y="1554480"/>
+            <a:ext cx="4754880" cy="859536"/>
           </a:xfrm>
           <a:prstGeom prst="rect">
             <a:avLst/>
@@ -6175,13 +6296,13 @@
           <a:noFill/>
         </p:spPr>
         <p:txBody>
-          <a:bodyPr wrap="square" lIns="0" tIns="0" rIns="0" bIns="0">
+          <a:bodyPr wrap="square">
             <a:spAutoFit/>
           </a:bodyPr>
           <a:lstStyle/>
           <a:p>
             <a:pPr>
-              <a:defRPr sz="1000" b="1">
+              <a:defRPr sz="1650" b="1">
                 <a:solidFill>
                   <a:srgbClr val="FFFFFF"/>
                 </a:solidFill>
@@ -6189,15 +6310,15 @@
               </a:defRPr>
             </a:pPr>
             <a:r>
-              <a:t>01 • Computer Vision &amp; Object Tracking</a:t>
+              <a:t>02 • OBJECT DETECTION &amp; TRACKING</a:t>
             </a:r>
           </a:p>
           <a:p>
             <a:pPr>
               <a:spcBef>
-                <a:spcPts val="100"/>
+                <a:spcPts val="300"/>
               </a:spcBef>
-              <a:defRPr sz="850" b="1">
+              <a:defRPr sz="1350" b="1">
                 <a:solidFill>
                   <a:srgbClr val="38BDF8"/>
                 </a:solidFill>
@@ -6205,69 +6326,57 @@
               </a:defRPr>
             </a:pPr>
             <a:r>
-              <a:t>YOLOv8 + ByteTrack (Ultralytics)</a:t>
-            </a:r>
-          </a:p>
-          <a:p>
-            <a:pPr>
-              <a:spcBef>
-                <a:spcPts val="400"/>
-              </a:spcBef>
-              <a:defRPr sz="850" b="1">
-                <a:solidFill>
-                  <a:srgbClr val="FFFFFF"/>
-                </a:solidFill>
-                <a:latin typeface="Segoe UI"/>
-              </a:defRPr>
-            </a:pPr>
-            <a:r>
-              <a:t>• Custom Weight Fine-Tuning: </a:t>
-            </a:r>
-            <a:r>
-              <a:rPr b="0">
-                <a:solidFill>
-                  <a:srgbClr val="CBD5E1"/>
-                </a:solidFill>
-              </a:rPr>
-              <a:t>Trained specifically on warehouse cartons, wooden pallets, personnel, and forklifts.</a:t>
-            </a:r>
-          </a:p>
-          <a:p>
-            <a:pPr>
-              <a:spcBef>
-                <a:spcPts val="400"/>
-              </a:spcBef>
-              <a:defRPr sz="850" b="1">
-                <a:solidFill>
-                  <a:srgbClr val="FFFFFF"/>
-                </a:solidFill>
-                <a:latin typeface="Segoe UI"/>
-              </a:defRPr>
-            </a:pPr>
-            <a:r>
-              <a:t>• Persistent Identity Tracking: </a:t>
-            </a:r>
-            <a:r>
-              <a:rPr b="0">
-                <a:solidFill>
-                  <a:srgbClr val="CBD5E1"/>
-                </a:solidFill>
-              </a:rPr>
-              <a:t>ByteTrack maintains box IDs across frames even during temporary worker occlusion.</a:t>
-            </a:r>
-          </a:p>
-        </p:txBody>
-      </p:sp>
-      <p:sp>
-        <p:nvSpPr>
-          <p:cNvPr id="10" name="Rectangle 9"/>
+              <a:t>YOLOv8 + ByteTrack  |  Custom Carton, Pallet &amp; Worker IDs  |  Zero Loss</a:t>
+            </a:r>
+          </a:p>
+        </p:txBody>
+      </p:sp>
+      <p:sp>
+        <p:nvSpPr>
+          <p:cNvPr id="10" name="TextBox 9"/>
+          <p:cNvSpPr txBox="1"/>
+          <p:nvPr/>
+        </p:nvSpPr>
+        <p:spPr>
+          <a:xfrm>
+            <a:off x="5760720" y="2542032"/>
+            <a:ext cx="640080" cy="347472"/>
+          </a:xfrm>
+          <a:prstGeom prst="rect">
+            <a:avLst/>
+          </a:prstGeom>
+          <a:noFill/>
+        </p:spPr>
+        <p:txBody>
+          <a:bodyPr wrap="none" lIns="0" tIns="0" rIns="0" bIns="0">
+            <a:spAutoFit/>
+          </a:bodyPr>
+          <a:lstStyle/>
+          <a:p>
+            <a:pPr algn="ctr">
+              <a:defRPr sz="2200" b="1">
+                <a:solidFill>
+                  <a:srgbClr val="38BDF8"/>
+                </a:solidFill>
+                <a:latin typeface="Segoe UI"/>
+              </a:defRPr>
+            </a:pPr>
+            <a:r>
+              <a:t>↓</a:t>
+            </a:r>
+          </a:p>
+        </p:txBody>
+      </p:sp>
+      <p:sp>
+        <p:nvSpPr>
+          <p:cNvPr id="11" name="Rectangle 10"/>
           <p:cNvSpPr/>
           <p:nvPr/>
         </p:nvSpPr>
         <p:spPr>
           <a:xfrm>
-            <a:off x="4389120" y="1645920"/>
-            <a:ext cx="3410712" cy="2240280"/>
+            <a:off x="731520" y="2907792"/>
+            <a:ext cx="5120640" cy="1078992"/>
           </a:xfrm>
           <a:prstGeom prst="rect">
             <a:avLst/>
@@ -6305,23 +6414,77 @@
       </p:sp>
       <p:sp>
         <p:nvSpPr>
-          <p:cNvPr id="11" name="Rectangle 10"/>
+          <p:cNvPr id="12" name="TextBox 11"/>
+          <p:cNvSpPr txBox="1"/>
+          <p:nvPr/>
+        </p:nvSpPr>
+        <p:spPr>
+          <a:xfrm>
+            <a:off x="914400" y="3017520"/>
+            <a:ext cx="4754880" cy="859536"/>
+          </a:xfrm>
+          <a:prstGeom prst="rect">
+            <a:avLst/>
+          </a:prstGeom>
+          <a:noFill/>
+        </p:spPr>
+        <p:txBody>
+          <a:bodyPr wrap="square">
+            <a:spAutoFit/>
+          </a:bodyPr>
+          <a:lstStyle/>
+          <a:p>
+            <a:pPr>
+              <a:defRPr sz="1650" b="1">
+                <a:solidFill>
+                  <a:srgbClr val="FFFFFF"/>
+                </a:solidFill>
+                <a:latin typeface="Segoe UI"/>
+              </a:defRPr>
+            </a:pPr>
+            <a:r>
+              <a:t>03 • SPATIAL &amp; KINEMATIC RULES</a:t>
+            </a:r>
+          </a:p>
+          <a:p>
+            <a:pPr>
+              <a:spcBef>
+                <a:spcPts val="300"/>
+              </a:spcBef>
+              <a:defRPr sz="1350" b="1">
+                <a:solidFill>
+                  <a:srgbClr val="38BDF8"/>
+                </a:solidFill>
+                <a:latin typeface="Segoe UI"/>
+              </a:defRPr>
+            </a:pPr>
+            <a:r>
+              <a:t>Vector Math  |  Drop vy &gt; 2.5m/s  |  Floor Drag &gt; 2m  |  Tilt &gt; 15°</a:t>
+            </a:r>
+          </a:p>
+        </p:txBody>
+      </p:sp>
+      <p:sp>
+        <p:nvSpPr>
+          <p:cNvPr id="13" name="Rectangle 12"/>
           <p:cNvSpPr/>
           <p:nvPr/>
         </p:nvSpPr>
         <p:spPr>
           <a:xfrm>
-            <a:off x="4389120" y="1645920"/>
-            <a:ext cx="3410712" cy="22860"/>
+            <a:off x="6339535" y="2907792"/>
+            <a:ext cx="5120640" cy="1078992"/>
           </a:xfrm>
           <a:prstGeom prst="rect">
             <a:avLst/>
           </a:prstGeom>
           <a:solidFill>
-            <a:srgbClr val="38BDF8"/>
+            <a:srgbClr val="102C52"/>
           </a:solidFill>
-          <a:ln>
-            <a:noFill/>
+          <a:ln w="19050">
+            <a:solidFill>
+              <a:srgbClr val="38BDF8"/>
+            </a:solidFill>
           </a:ln>
         </p:spPr>
         <p:style>
@@ -6348,14 +6511,14 @@
       </p:sp>
       <p:sp>
         <p:nvSpPr>
-          <p:cNvPr id="12" name="TextBox 11"/>
+          <p:cNvPr id="14" name="TextBox 13"/>
           <p:cNvSpPr txBox="1"/>
           <p:nvPr/>
         </p:nvSpPr>
         <p:spPr>
           <a:xfrm>
-            <a:off x="4553712" y="1755648"/>
-            <a:ext cx="3081528" cy="2057400"/>
+            <a:off x="6522415" y="3017520"/>
+            <a:ext cx="4754880" cy="859536"/>
           </a:xfrm>
           <a:prstGeom prst="rect">
             <a:avLst/>
@@ -6363,13 +6526,13 @@
           <a:noFill/>
         </p:spPr>
         <p:txBody>
-          <a:bodyPr wrap="square" lIns="0" tIns="0" rIns="0" bIns="0">
+          <a:bodyPr wrap="square">
             <a:spAutoFit/>
           </a:bodyPr>
           <a:lstStyle/>
           <a:p>
             <a:pPr>
-              <a:defRPr sz="1000" b="1">
+              <a:defRPr sz="1650" b="1">
                 <a:solidFill>
                   <a:srgbClr val="FFFFFF"/>
                 </a:solidFill>
@@ -6377,15 +6540,15 @@
               </a:defRPr>
             </a:pPr>
             <a:r>
-              <a:t>02 • Spatial &amp; Kinematic Physics Rules</a:t>
+              <a:t>04 • EVENT DISPATCH &amp; DATABASE</a:t>
             </a:r>
           </a:p>
           <a:p>
             <a:pPr>
               <a:spcBef>
-                <a:spcPts val="100"/>
+                <a:spcPts val="300"/>
               </a:spcBef>
-              <a:defRPr sz="850" b="1">
+              <a:defRPr sz="1350" b="1">
                 <a:solidFill>
                   <a:srgbClr val="38BDF8"/>
                 </a:solidFill>
@@ -6393,93 +6556,57 @@
               </a:defRPr>
             </a:pPr>
             <a:r>
-              <a:t>Real-Time Vector Math</a:t>
-            </a:r>
-          </a:p>
-          <a:p>
-            <a:pPr>
-              <a:spcBef>
-                <a:spcPts val="400"/>
-              </a:spcBef>
-              <a:defRPr sz="850" b="1">
-                <a:solidFill>
-                  <a:srgbClr val="FFFFFF"/>
-                </a:solidFill>
-                <a:latin typeface="Segoe UI"/>
-              </a:defRPr>
-            </a:pPr>
-            <a:r>
-              <a:t>• Free-Fall Acceleration: </a:t>
-            </a:r>
-            <a:r>
-              <a:rPr b="0">
-                <a:solidFill>
-                  <a:srgbClr val="CBD5E1"/>
-                </a:solidFill>
-              </a:rPr>
-              <a:t>Monitors downward velocity spikes (vy &gt; 2.5 m/s -&gt; 0 m/s sudden impact) to flag drop crashes.</a:t>
-            </a:r>
-          </a:p>
-          <a:p>
-            <a:pPr>
-              <a:spcBef>
-                <a:spcPts val="400"/>
-              </a:spcBef>
-              <a:defRPr sz="850" b="1">
-                <a:solidFill>
-                  <a:srgbClr val="FFFFFF"/>
-                </a:solidFill>
-                <a:latin typeface="Segoe UI"/>
-              </a:defRPr>
-            </a:pPr>
-            <a:r>
-              <a:t>• Friction &amp; Drag Distance: </a:t>
-            </a:r>
-            <a:r>
-              <a:rPr b="0">
-                <a:solidFill>
-                  <a:srgbClr val="CBD5E1"/>
-                </a:solidFill>
-              </a:rPr>
-              <a:t>Flags sustained lateral displacement (&gt;2m on floor) without vertical lift to catch rough dragging.</a:t>
-            </a:r>
-          </a:p>
-          <a:p>
-            <a:pPr>
-              <a:spcBef>
-                <a:spcPts val="400"/>
-              </a:spcBef>
-              <a:defRPr sz="850" b="1">
-                <a:solidFill>
-                  <a:srgbClr val="FFFFFF"/>
-                </a:solidFill>
-                <a:latin typeface="Segoe UI"/>
-              </a:defRPr>
-            </a:pPr>
-            <a:r>
-              <a:t>• Stack Tilt Calculation: </a:t>
-            </a:r>
-            <a:r>
-              <a:rPr b="0">
-                <a:solidFill>
-                  <a:srgbClr val="CBD5E1"/>
-                </a:solidFill>
-              </a:rPr>
-              <a:t>Measures bounding box tilt angles; orientations exceeding 15° trigger unstable stack warnings.</a:t>
-            </a:r>
-          </a:p>
-        </p:txBody>
-      </p:sp>
-      <p:sp>
-        <p:nvSpPr>
-          <p:cNvPr id="13" name="Rectangle 12"/>
+              <a:t>FastAPI Core  |  &lt; 50ms WebSockets  |  SQLite Telemetry Logs</a:t>
+            </a:r>
+          </a:p>
+        </p:txBody>
+      </p:sp>
+      <p:sp>
+        <p:nvSpPr>
+          <p:cNvPr id="15" name="TextBox 14"/>
+          <p:cNvSpPr txBox="1"/>
+          <p:nvPr/>
+        </p:nvSpPr>
+        <p:spPr>
+          <a:xfrm>
+            <a:off x="5760720" y="4005072"/>
+            <a:ext cx="640080" cy="347472"/>
+          </a:xfrm>
+          <a:prstGeom prst="rect">
+            <a:avLst/>
+          </a:prstGeom>
+          <a:noFill/>
+        </p:spPr>
+        <p:txBody>
+          <a:bodyPr wrap="none" lIns="0" tIns="0" rIns="0" bIns="0">
+            <a:spAutoFit/>
+          </a:bodyPr>
+          <a:lstStyle/>
+          <a:p>
+            <a:pPr algn="ctr">
+              <a:defRPr sz="2200" b="1">
+                <a:solidFill>
+                  <a:srgbClr val="38BDF8"/>
+                </a:solidFill>
+                <a:latin typeface="Segoe UI"/>
+              </a:defRPr>
+            </a:pPr>
+            <a:r>
+              <a:t>↓</a:t>
+            </a:r>
+          </a:p>
+        </p:txBody>
+      </p:sp>
+      <p:sp>
+        <p:nvSpPr>
+          <p:cNvPr id="16" name="Rectangle 15"/>
           <p:cNvSpPr/>
           <p:nvPr/>
         </p:nvSpPr>
         <p:spPr>
           <a:xfrm>
-            <a:off x="8046720" y="1645920"/>
-            <a:ext cx="3410712" cy="2240280"/>
+            <a:off x="731520" y="4370832"/>
+            <a:ext cx="5120640" cy="1234440"/>
           </a:xfrm>
           <a:prstGeom prst="rect">
             <a:avLst/>
@@ -6517,23 +6644,93 @@
       </p:sp>
       <p:sp>
         <p:nvSpPr>
-          <p:cNvPr id="14" name="Rectangle 13"/>
+          <p:cNvPr id="17" name="TextBox 16"/>
+          <p:cNvSpPr txBox="1"/>
+          <p:nvPr/>
+        </p:nvSpPr>
+        <p:spPr>
+          <a:xfrm>
+            <a:off x="914400" y="4480560"/>
+            <a:ext cx="4754880" cy="1014984"/>
+          </a:xfrm>
+          <a:prstGeom prst="rect">
+            <a:avLst/>
+          </a:prstGeom>
+          <a:noFill/>
+        </p:spPr>
+        <p:txBody>
+          <a:bodyPr wrap="square">
+            <a:spAutoFit/>
+          </a:bodyPr>
+          <a:lstStyle/>
+          <a:p>
+            <a:pPr>
+              <a:defRPr sz="1650" b="1">
+                <a:solidFill>
+                  <a:srgbClr val="FFFFFF"/>
+                </a:solidFill>
+                <a:latin typeface="Segoe UI"/>
+              </a:defRPr>
+            </a:pPr>
+            <a:r>
+              <a:t>05 • SUPERVISOR UI &amp; AUDIO ENGINE</a:t>
+            </a:r>
+          </a:p>
+          <a:p>
+            <a:pPr>
+              <a:spcBef>
+                <a:spcPts val="200"/>
+              </a:spcBef>
+              <a:defRPr sz="1350" b="1">
+                <a:solidFill>
+                  <a:srgbClr val="38BDF8"/>
+                </a:solidFill>
+                <a:latin typeface="Segoe UI"/>
+              </a:defRPr>
+            </a:pPr>
+            <a:r>
+              <a:t>React 18 + Tailwind CSS + Web Audio API</a:t>
+            </a:r>
+          </a:p>
+          <a:p>
+            <a:pPr>
+              <a:spcBef>
+                <a:spcPts val="300"/>
+              </a:spcBef>
+              <a:defRPr sz="1250">
+                <a:solidFill>
+                  <a:srgbClr val="CBD5E1"/>
+                </a:solidFill>
+                <a:latin typeface="Segoe UI"/>
+              </a:defRPr>
+            </a:pPr>
+            <a:r>
+              <a:t>Live KPI cards, 7-day risk trend curves &amp; instant synthetic dock chimes.</a:t>
+            </a:r>
+          </a:p>
+        </p:txBody>
+      </p:sp>
+      <p:sp>
+        <p:nvSpPr>
+          <p:cNvPr id="18" name="Rectangle 17"/>
           <p:cNvSpPr/>
           <p:nvPr/>
         </p:nvSpPr>
         <p:spPr>
           <a:xfrm>
-            <a:off x="8046720" y="1645920"/>
-            <a:ext cx="3410712" cy="22860"/>
+            <a:off x="6339535" y="4370832"/>
+            <a:ext cx="5120640" cy="1234440"/>
           </a:xfrm>
           <a:prstGeom prst="rect">
             <a:avLst/>
           </a:prstGeom>
           <a:solidFill>
-            <a:srgbClr val="38BDF8"/>
+            <a:srgbClr val="102C52"/>
           </a:solidFill>
-          <a:ln>
-            <a:noFill/>
+          <a:ln w="19050">
+            <a:solidFill>
+              <a:srgbClr val="38BDF8"/>
+            </a:solidFill>
           </a:ln>
         </p:spPr>
         <p:style>
@@ -6560,14 +6757,14 @@
       </p:sp>
       <p:sp>
         <p:nvSpPr>
-          <p:cNvPr id="15" name="TextBox 14"/>
+          <p:cNvPr id="19" name="TextBox 18"/>
           <p:cNvSpPr txBox="1"/>
           <p:nvPr/>
         </p:nvSpPr>
         <p:spPr>
           <a:xfrm>
-            <a:off x="8211312" y="1755648"/>
-            <a:ext cx="3081528" cy="2057400"/>
+            <a:off x="6522415" y="4480560"/>
+            <a:ext cx="4754880" cy="1014984"/>
           </a:xfrm>
           <a:prstGeom prst="rect">
             <a:avLst/>
@@ -6575,13 +6772,13 @@
           <a:noFill/>
         </p:spPr>
         <p:txBody>
-          <a:bodyPr wrap="square" lIns="0" tIns="0" rIns="0" bIns="0">
+          <a:bodyPr wrap="square">
             <a:spAutoFit/>
           </a:bodyPr>
           <a:lstStyle/>
           <a:p>
             <a:pPr>
-              <a:defRPr sz="1000" b="1">
+              <a:defRPr sz="1650" b="1">
                 <a:solidFill>
                   <a:srgbClr val="FFFFFF"/>
                 </a:solidFill>
@@ -6589,15 +6786,15 @@
               </a:defRPr>
             </a:pPr>
             <a:r>
-              <a:t>03 • Conversational AI &amp; Audit Assistant</a:t>
+              <a:t>06 • CONVERSATIONAL RAG ASSISTANT</a:t>
             </a:r>
           </a:p>
           <a:p>
             <a:pPr>
               <a:spcBef>
-                <a:spcPts val="100"/>
+                <a:spcPts val="200"/>
               </a:spcBef>
-              <a:defRPr sz="850" b="1">
+              <a:defRPr sz="1350" b="1">
                 <a:solidFill>
                   <a:srgbClr val="38BDF8"/>
                 </a:solidFill>
@@ -6605,676 +6802,37 @@
               </a:defRPr>
             </a:pPr>
             <a:r>
-              <a:t>Google Gemini 2.5 Flash + RAG</a:t>
+              <a:t>Google Gemini 2.5 Flash + Structured RAG</a:t>
             </a:r>
           </a:p>
           <a:p>
             <a:pPr>
               <a:spcBef>
-                <a:spcPts val="400"/>
+                <a:spcPts val="300"/>
               </a:spcBef>
-              <a:defRPr sz="850" b="1">
-                <a:solidFill>
-                  <a:srgbClr val="FFFFFF"/>
-                </a:solidFill>
-                <a:latin typeface="Segoe UI"/>
-              </a:defRPr>
-            </a:pPr>
-            <a:r>
-              <a:t>• Natural Language RAG: </a:t>
-            </a:r>
-            <a:r>
-              <a:rPr b="0">
+              <a:defRPr sz="1250">
                 <a:solidFill>
                   <a:srgbClr val="CBD5E1"/>
                 </a:solidFill>
-              </a:rPr>
-              <a:t>Ingests SQLite telemetry logs so supervisors can query history in plain English without SQL.</a:t>
-            </a:r>
-          </a:p>
-          <a:p>
-            <a:pPr>
-              <a:spcBef>
-                <a:spcPts val="400"/>
-              </a:spcBef>
-              <a:defRPr sz="850" b="1">
-                <a:solidFill>
-                  <a:srgbClr val="FFFFFF"/>
-                </a:solidFill>
-                <a:latin typeface="Segoe UI"/>
-              </a:defRPr>
-            </a:pPr>
-            <a:r>
-              <a:t>• Shift Summaries: </a:t>
-            </a:r>
-            <a:r>
-              <a:rPr b="0">
-                <a:solidFill>
-                  <a:srgbClr val="CBD5E1"/>
-                </a:solidFill>
-              </a:rPr>
-              <a:t>Generates instant structured executive reports on bay risk hotspots and incident timestamps.</a:t>
-            </a:r>
-          </a:p>
-        </p:txBody>
-      </p:sp>
-      <p:sp>
-        <p:nvSpPr>
-          <p:cNvPr id="16" name="Rectangle 15"/>
-          <p:cNvSpPr/>
-          <p:nvPr/>
-        </p:nvSpPr>
-        <p:spPr>
-          <a:xfrm>
-            <a:off x="731520" y="4087368"/>
-            <a:ext cx="3410712" cy="2240280"/>
-          </a:xfrm>
-          <a:prstGeom prst="rect">
-            <a:avLst/>
-          </a:prstGeom>
-          <a:solidFill>
-            <a:srgbClr val="0A192E"/>
-          </a:solidFill>
-          <a:ln w="12700">
-            <a:solidFill>
-              <a:srgbClr val="1C3E66"/>
-            </a:solidFill>
-          </a:ln>
-        </p:spPr>
-        <p:style>
-          <a:lnRef idx="1">
-            <a:schemeClr val="accent1"/>
-          </a:lnRef>
-          <a:fillRef idx="3">
-            <a:schemeClr val="accent1"/>
-          </a:fillRef>
-          <a:effectRef idx="2">
-            <a:schemeClr val="accent1"/>
-          </a:effectRef>
-          <a:fontRef idx="minor">
-            <a:schemeClr val="lt1"/>
-          </a:fontRef>
-        </p:style>
-        <p:txBody>
-          <a:bodyPr rtlCol="0" anchor="ctr"/>
-          <a:lstStyle/>
-          <a:p>
-            <a:pPr algn="ctr"/>
-          </a:p>
-        </p:txBody>
-      </p:sp>
-      <p:sp>
-        <p:nvSpPr>
-          <p:cNvPr id="17" name="Rectangle 16"/>
-          <p:cNvSpPr/>
-          <p:nvPr/>
-        </p:nvSpPr>
-        <p:spPr>
-          <a:xfrm>
-            <a:off x="731520" y="4087368"/>
-            <a:ext cx="3410712" cy="22860"/>
-          </a:xfrm>
-          <a:prstGeom prst="rect">
-            <a:avLst/>
-          </a:prstGeom>
-          <a:solidFill>
-            <a:srgbClr val="38BDF8"/>
-          </a:solidFill>
-          <a:ln>
-            <a:noFill/>
-          </a:ln>
-        </p:spPr>
-        <p:style>
-          <a:lnRef idx="1">
-            <a:schemeClr val="accent1"/>
-          </a:lnRef>
-          <a:fillRef idx="3">
-            <a:schemeClr val="accent1"/>
-          </a:fillRef>
-          <a:effectRef idx="2">
-            <a:schemeClr val="accent1"/>
-          </a:effectRef>
-          <a:fontRef idx="minor">
-            <a:schemeClr val="lt1"/>
-          </a:fontRef>
-        </p:style>
-        <p:txBody>
-          <a:bodyPr rtlCol="0" anchor="ctr"/>
-          <a:lstStyle/>
-          <a:p>
-            <a:pPr algn="ctr"/>
-          </a:p>
-        </p:txBody>
-      </p:sp>
-      <p:sp>
-        <p:nvSpPr>
-          <p:cNvPr id="18" name="TextBox 17"/>
+                <a:latin typeface="Segoe UI"/>
+              </a:defRPr>
+            </a:pPr>
+            <a:r>
+              <a:t>Natural language shift queries without SQL; instant risk summaries &amp; audit logs.</a:t>
+            </a:r>
+          </a:p>
+        </p:txBody>
+      </p:sp>
+      <p:sp>
+        <p:nvSpPr>
+          <p:cNvPr id="20" name="TextBox 19"/>
           <p:cNvSpPr txBox="1"/>
           <p:nvPr/>
         </p:nvSpPr>
         <p:spPr>
           <a:xfrm>
-            <a:off x="896112" y="4197096"/>
-            <a:ext cx="3081528" cy="2057400"/>
-          </a:xfrm>
-          <a:prstGeom prst="rect">
-            <a:avLst/>
-          </a:prstGeom>
-          <a:noFill/>
-        </p:spPr>
-        <p:txBody>
-          <a:bodyPr wrap="square" lIns="0" tIns="0" rIns="0" bIns="0">
-            <a:spAutoFit/>
-          </a:bodyPr>
-          <a:lstStyle/>
-          <a:p>
-            <a:pPr>
-              <a:defRPr sz="1000" b="1">
-                <a:solidFill>
-                  <a:srgbClr val="FFFFFF"/>
-                </a:solidFill>
-                <a:latin typeface="Segoe UI"/>
-              </a:defRPr>
-            </a:pPr>
-            <a:r>
-              <a:t>04 • Rolling Video Snip Buffer</a:t>
-            </a:r>
-          </a:p>
-          <a:p>
-            <a:pPr>
-              <a:spcBef>
-                <a:spcPts val="100"/>
-              </a:spcBef>
-              <a:defRPr sz="850" b="1">
-                <a:solidFill>
-                  <a:srgbClr val="38BDF8"/>
-                </a:solidFill>
-                <a:latin typeface="Segoe UI"/>
-              </a:defRPr>
-            </a:pPr>
-            <a:r>
-              <a:t>OpenCV + FFmpeg Subprocess</a:t>
-            </a:r>
-          </a:p>
-          <a:p>
-            <a:pPr>
-              <a:spcBef>
-                <a:spcPts val="400"/>
-              </a:spcBef>
-              <a:defRPr sz="850" b="1">
-                <a:solidFill>
-                  <a:srgbClr val="FFFFFF"/>
-                </a:solidFill>
-                <a:latin typeface="Segoe UI"/>
-              </a:defRPr>
-            </a:pPr>
-            <a:r>
-              <a:t>• Zero Storage Waste: </a:t>
-            </a:r>
-            <a:r>
-              <a:rPr b="0">
-                <a:solidFill>
-                  <a:srgbClr val="CBD5E1"/>
-                </a:solidFill>
-              </a:rPr>
-              <a:t>Avoids saving hours of empty dock feeds; maintains a lightweight 15-second FIFO memory buffer.</a:t>
-            </a:r>
-          </a:p>
-          <a:p>
-            <a:pPr>
-              <a:spcBef>
-                <a:spcPts val="400"/>
-              </a:spcBef>
-              <a:defRPr sz="850" b="1">
-                <a:solidFill>
-                  <a:srgbClr val="FFFFFF"/>
-                </a:solidFill>
-                <a:latin typeface="Segoe UI"/>
-              </a:defRPr>
-            </a:pPr>
-            <a:r>
-              <a:t>• 5-Second Micro Replays: </a:t>
-            </a:r>
-            <a:r>
-              <a:rPr b="0">
-                <a:solidFill>
-                  <a:srgbClr val="CBD5E1"/>
-                </a:solidFill>
-              </a:rPr>
-              <a:t>Upon alert trigger, automatically transcodes a lightweight 5s H.264 clip for instant browser streaming.</a:t>
-            </a:r>
-          </a:p>
-        </p:txBody>
-      </p:sp>
-      <p:sp>
-        <p:nvSpPr>
-          <p:cNvPr id="19" name="Rectangle 18"/>
-          <p:cNvSpPr/>
-          <p:nvPr/>
-        </p:nvSpPr>
-        <p:spPr>
-          <a:xfrm>
-            <a:off x="4389120" y="4087368"/>
-            <a:ext cx="3410712" cy="2240280"/>
-          </a:xfrm>
-          <a:prstGeom prst="rect">
-            <a:avLst/>
-          </a:prstGeom>
-          <a:solidFill>
-            <a:srgbClr val="0A192E"/>
-          </a:solidFill>
-          <a:ln w="12700">
-            <a:solidFill>
-              <a:srgbClr val="1C3E66"/>
-            </a:solidFill>
-          </a:ln>
-        </p:spPr>
-        <p:style>
-          <a:lnRef idx="1">
-            <a:schemeClr val="accent1"/>
-          </a:lnRef>
-          <a:fillRef idx="3">
-            <a:schemeClr val="accent1"/>
-          </a:fillRef>
-          <a:effectRef idx="2">
-            <a:schemeClr val="accent1"/>
-          </a:effectRef>
-          <a:fontRef idx="minor">
-            <a:schemeClr val="lt1"/>
-          </a:fontRef>
-        </p:style>
-        <p:txBody>
-          <a:bodyPr rtlCol="0" anchor="ctr"/>
-          <a:lstStyle/>
-          <a:p>
-            <a:pPr algn="ctr"/>
-          </a:p>
-        </p:txBody>
-      </p:sp>
-      <p:sp>
-        <p:nvSpPr>
-          <p:cNvPr id="20" name="Rectangle 19"/>
-          <p:cNvSpPr/>
-          <p:nvPr/>
-        </p:nvSpPr>
-        <p:spPr>
-          <a:xfrm>
-            <a:off x="4389120" y="4087368"/>
-            <a:ext cx="3410712" cy="22860"/>
-          </a:xfrm>
-          <a:prstGeom prst="rect">
-            <a:avLst/>
-          </a:prstGeom>
-          <a:solidFill>
-            <a:srgbClr val="38BDF8"/>
-          </a:solidFill>
-          <a:ln>
-            <a:noFill/>
-          </a:ln>
-        </p:spPr>
-        <p:style>
-          <a:lnRef idx="1">
-            <a:schemeClr val="accent1"/>
-          </a:lnRef>
-          <a:fillRef idx="3">
-            <a:schemeClr val="accent1"/>
-          </a:fillRef>
-          <a:effectRef idx="2">
-            <a:schemeClr val="accent1"/>
-          </a:effectRef>
-          <a:fontRef idx="minor">
-            <a:schemeClr val="lt1"/>
-          </a:fontRef>
-        </p:style>
-        <p:txBody>
-          <a:bodyPr rtlCol="0" anchor="ctr"/>
-          <a:lstStyle/>
-          <a:p>
-            <a:pPr algn="ctr"/>
-          </a:p>
-        </p:txBody>
-      </p:sp>
-      <p:sp>
-        <p:nvSpPr>
-          <p:cNvPr id="21" name="TextBox 20"/>
-          <p:cNvSpPr txBox="1"/>
-          <p:nvPr/>
-        </p:nvSpPr>
-        <p:spPr>
-          <a:xfrm>
-            <a:off x="4553712" y="4197096"/>
-            <a:ext cx="3081528" cy="2057400"/>
-          </a:xfrm>
-          <a:prstGeom prst="rect">
-            <a:avLst/>
-          </a:prstGeom>
-          <a:noFill/>
-        </p:spPr>
-        <p:txBody>
-          <a:bodyPr wrap="square" lIns="0" tIns="0" rIns="0" bIns="0">
-            <a:spAutoFit/>
-          </a:bodyPr>
-          <a:lstStyle/>
-          <a:p>
-            <a:pPr>
-              <a:defRPr sz="1000" b="1">
-                <a:solidFill>
-                  <a:srgbClr val="FFFFFF"/>
-                </a:solidFill>
-                <a:latin typeface="Segoe UI"/>
-              </a:defRPr>
-            </a:pPr>
-            <a:r>
-              <a:t>05 • High-Throughput API &amp; Database</a:t>
-            </a:r>
-          </a:p>
-          <a:p>
-            <a:pPr>
-              <a:spcBef>
-                <a:spcPts val="100"/>
-              </a:spcBef>
-              <a:defRPr sz="850" b="1">
-                <a:solidFill>
-                  <a:srgbClr val="38BDF8"/>
-                </a:solidFill>
-                <a:latin typeface="Segoe UI"/>
-              </a:defRPr>
-            </a:pPr>
-            <a:r>
-              <a:t>FastAPI + SQLAlchemy + SQLite</a:t>
-            </a:r>
-          </a:p>
-          <a:p>
-            <a:pPr>
-              <a:spcBef>
-                <a:spcPts val="400"/>
-              </a:spcBef>
-              <a:defRPr sz="850" b="1">
-                <a:solidFill>
-                  <a:srgbClr val="FFFFFF"/>
-                </a:solidFill>
-                <a:latin typeface="Segoe UI"/>
-              </a:defRPr>
-            </a:pPr>
-            <a:r>
-              <a:t>• Asynchronous Event Loop: </a:t>
-            </a:r>
-            <a:r>
-              <a:rPr b="0">
-                <a:solidFill>
-                  <a:srgbClr val="CBD5E1"/>
-                </a:solidFill>
-              </a:rPr>
-              <a:t>Ultra-fast REST API handling CCTV video uploads, metric polling, and telemetry ingestion.</a:t>
-            </a:r>
-          </a:p>
-          <a:p>
-            <a:pPr>
-              <a:spcBef>
-                <a:spcPts val="400"/>
-              </a:spcBef>
-              <a:defRPr sz="850" b="1">
-                <a:solidFill>
-                  <a:srgbClr val="FFFFFF"/>
-                </a:solidFill>
-                <a:latin typeface="Segoe UI"/>
-              </a:defRPr>
-            </a:pPr>
-            <a:r>
-              <a:t>• Live WebSocket Feeds: </a:t>
-            </a:r>
-            <a:r>
-              <a:rPr b="0">
-                <a:solidFill>
-                  <a:srgbClr val="CBD5E1"/>
-                </a:solidFill>
-              </a:rPr>
-              <a:t>Broadcasts sub-50ms incident events and danger alerts to connected dock clients.</a:t>
-            </a:r>
-          </a:p>
-        </p:txBody>
-      </p:sp>
-      <p:sp>
-        <p:nvSpPr>
-          <p:cNvPr id="22" name="Rectangle 21"/>
-          <p:cNvSpPr/>
-          <p:nvPr/>
-        </p:nvSpPr>
-        <p:spPr>
-          <a:xfrm>
-            <a:off x="8046720" y="4087368"/>
-            <a:ext cx="3410712" cy="2240280"/>
-          </a:xfrm>
-          <a:prstGeom prst="rect">
-            <a:avLst/>
-          </a:prstGeom>
-          <a:solidFill>
-            <a:srgbClr val="0A192E"/>
-          </a:solidFill>
-          <a:ln w="12700">
-            <a:solidFill>
-              <a:srgbClr val="1C3E66"/>
-            </a:solidFill>
-          </a:ln>
-        </p:spPr>
-        <p:style>
-          <a:lnRef idx="1">
-            <a:schemeClr val="accent1"/>
-          </a:lnRef>
-          <a:fillRef idx="3">
-            <a:schemeClr val="accent1"/>
-          </a:fillRef>
-          <a:effectRef idx="2">
-            <a:schemeClr val="accent1"/>
-          </a:effectRef>
-          <a:fontRef idx="minor">
-            <a:schemeClr val="lt1"/>
-          </a:fontRef>
-        </p:style>
-        <p:txBody>
-          <a:bodyPr rtlCol="0" anchor="ctr"/>
-          <a:lstStyle/>
-          <a:p>
-            <a:pPr algn="ctr"/>
-          </a:p>
-        </p:txBody>
-      </p:sp>
-      <p:sp>
-        <p:nvSpPr>
-          <p:cNvPr id="23" name="Rectangle 22"/>
-          <p:cNvSpPr/>
-          <p:nvPr/>
-        </p:nvSpPr>
-        <p:spPr>
-          <a:xfrm>
-            <a:off x="8046720" y="4087368"/>
-            <a:ext cx="3410712" cy="22860"/>
-          </a:xfrm>
-          <a:prstGeom prst="rect">
-            <a:avLst/>
-          </a:prstGeom>
-          <a:solidFill>
-            <a:srgbClr val="38BDF8"/>
-          </a:solidFill>
-          <a:ln>
-            <a:noFill/>
-          </a:ln>
-        </p:spPr>
-        <p:style>
-          <a:lnRef idx="1">
-            <a:schemeClr val="accent1"/>
-          </a:lnRef>
-          <a:fillRef idx="3">
-            <a:schemeClr val="accent1"/>
-          </a:fillRef>
-          <a:effectRef idx="2">
-            <a:schemeClr val="accent1"/>
-          </a:effectRef>
-          <a:fontRef idx="minor">
-            <a:schemeClr val="lt1"/>
-          </a:fontRef>
-        </p:style>
-        <p:txBody>
-          <a:bodyPr rtlCol="0" anchor="ctr"/>
-          <a:lstStyle/>
-          <a:p>
-            <a:pPr algn="ctr"/>
-          </a:p>
-        </p:txBody>
-      </p:sp>
-      <p:sp>
-        <p:nvSpPr>
-          <p:cNvPr id="24" name="TextBox 23"/>
-          <p:cNvSpPr txBox="1"/>
-          <p:nvPr/>
-        </p:nvSpPr>
-        <p:spPr>
-          <a:xfrm>
-            <a:off x="8211312" y="4197096"/>
-            <a:ext cx="3081528" cy="2057400"/>
-          </a:xfrm>
-          <a:prstGeom prst="rect">
-            <a:avLst/>
-          </a:prstGeom>
-          <a:noFill/>
-        </p:spPr>
-        <p:txBody>
-          <a:bodyPr wrap="square" lIns="0" tIns="0" rIns="0" bIns="0">
-            <a:spAutoFit/>
-          </a:bodyPr>
-          <a:lstStyle/>
-          <a:p>
-            <a:pPr>
-              <a:defRPr sz="1000" b="1">
-                <a:solidFill>
-                  <a:srgbClr val="FFFFFF"/>
-                </a:solidFill>
-                <a:latin typeface="Segoe UI"/>
-              </a:defRPr>
-            </a:pPr>
-            <a:r>
-              <a:t>06 • Operational Frontend &amp; Audio Engine</a:t>
-            </a:r>
-          </a:p>
-          <a:p>
-            <a:pPr>
-              <a:spcBef>
-                <a:spcPts val="100"/>
-              </a:spcBef>
-              <a:defRPr sz="850" b="1">
-                <a:solidFill>
-                  <a:srgbClr val="38BDF8"/>
-                </a:solidFill>
-                <a:latin typeface="Segoe UI"/>
-              </a:defRPr>
-            </a:pPr>
-            <a:r>
-              <a:t>React 18 + Tailwind + Web Audio API</a:t>
-            </a:r>
-          </a:p>
-          <a:p>
-            <a:pPr>
-              <a:spcBef>
-                <a:spcPts val="400"/>
-              </a:spcBef>
-              <a:defRPr sz="850" b="1">
-                <a:solidFill>
-                  <a:srgbClr val="FFFFFF"/>
-                </a:solidFill>
-                <a:latin typeface="Segoe UI"/>
-              </a:defRPr>
-            </a:pPr>
-            <a:r>
-              <a:t>• Responsive Supervisory UI: </a:t>
-            </a:r>
-            <a:r>
-              <a:rPr b="0">
-                <a:solidFill>
-                  <a:srgbClr val="CBD5E1"/>
-                </a:solidFill>
-              </a:rPr>
-              <a:t>Interactive KPI metrics, 7-day handling risk charts, and instant alert slide-out drawers.</a:t>
-            </a:r>
-          </a:p>
-          <a:p>
-            <a:pPr>
-              <a:spcBef>
-                <a:spcPts val="400"/>
-              </a:spcBef>
-              <a:defRPr sz="850" b="1">
-                <a:solidFill>
-                  <a:srgbClr val="FFFFFF"/>
-                </a:solidFill>
-                <a:latin typeface="Segoe UI"/>
-              </a:defRPr>
-            </a:pPr>
-            <a:r>
-              <a:t>• Synthetic Audio Synthesis: </a:t>
-            </a:r>
-            <a:r>
-              <a:rPr b="0">
-                <a:solidFill>
-                  <a:srgbClr val="CBD5E1"/>
-                </a:solidFill>
-              </a:rPr>
-              <a:t>Web Audio API generates dock chimes on client devices without external audio file latency.</a:t>
-            </a:r>
-          </a:p>
-        </p:txBody>
-      </p:sp>
-      <p:sp>
-        <p:nvSpPr>
-          <p:cNvPr id="25" name="Rectangle 24"/>
-          <p:cNvSpPr/>
-          <p:nvPr/>
-        </p:nvSpPr>
-        <p:spPr>
-          <a:xfrm>
-            <a:off x="731520" y="6492240"/>
-            <a:ext cx="10728655" cy="13716"/>
-          </a:xfrm>
-          <a:prstGeom prst="rect">
-            <a:avLst/>
-          </a:prstGeom>
-          <a:solidFill>
-            <a:srgbClr val="1C3E66"/>
-          </a:solidFill>
-          <a:ln>
-            <a:noFill/>
-          </a:ln>
-        </p:spPr>
-        <p:style>
-          <a:lnRef idx="1">
-            <a:schemeClr val="accent1"/>
-          </a:lnRef>
-          <a:fillRef idx="3">
-            <a:schemeClr val="accent1"/>
-          </a:fillRef>
-          <a:effectRef idx="2">
-            <a:schemeClr val="accent1"/>
-          </a:effectRef>
-          <a:fontRef idx="minor">
-            <a:schemeClr val="lt1"/>
-          </a:fontRef>
-        </p:style>
-        <p:txBody>
-          <a:bodyPr rtlCol="0" anchor="ctr"/>
-          <a:lstStyle/>
-          <a:p>
-            <a:pPr algn="ctr"/>
-          </a:p>
-        </p:txBody>
-      </p:sp>
-      <p:sp>
-        <p:nvSpPr>
-          <p:cNvPr id="26" name="TextBox 25"/>
-          <p:cNvSpPr txBox="1"/>
-          <p:nvPr/>
-        </p:nvSpPr>
-        <p:spPr>
-          <a:xfrm>
-            <a:off x="731520" y="6537960"/>
-            <a:ext cx="10728655" cy="228600"/>
+            <a:off x="731520" y="6172200"/>
+            <a:ext cx="10728655" cy="320040"/>
           </a:xfrm>
           <a:prstGeom prst="rect">
             <a:avLst/>
@@ -7288,15 +6846,23 @@
           <a:lstStyle/>
           <a:p>
             <a:pPr>
-              <a:defRPr sz="850">
-                <a:solidFill>
-                  <a:srgbClr val="94A3B8"/>
-                </a:solidFill>
-                <a:latin typeface="Segoe UI"/>
-              </a:defRPr>
-            </a:pPr>
-            <a:r>
-              <a:t>DockGuard AI  •  Full-Stack Architecture &amp; Implementation Stack  •  Slide 3 of 6</a:t>
+              <a:defRPr sz="1450" b="1">
+                <a:solidFill>
+                  <a:srgbClr val="38BDF8"/>
+                </a:solidFill>
+                <a:latin typeface="Segoe UI"/>
+              </a:defRPr>
+            </a:pPr>
+            <a:r>
+              <a:t>Key Design Decision: </a:t>
+            </a:r>
+            <a:r>
+              <a:rPr b="0">
+                <a:solidFill>
+                  <a:srgbClr val="E2E8F0"/>
+                </a:solidFill>
+              </a:rPr>
+              <a:t>Local spatial vector physics filter false alarms in &lt;50ms → Only verified risk events reach Gemini &amp; WebSockets.</a:t>
             </a:r>
           </a:p>
         </p:txBody>
@@ -7350,7 +6916,7 @@
         <p:spPr>
           <a:xfrm>
             <a:off x="731520" y="384048"/>
-            <a:ext cx="6400800" cy="274320"/>
+            <a:ext cx="5943600" cy="274320"/>
           </a:xfrm>
           <a:prstGeom prst="rect">
             <a:avLst/>
@@ -7364,7 +6930,7 @@
           <a:lstStyle/>
           <a:p>
             <a:pPr>
-              <a:defRPr sz="950" b="1">
+              <a:defRPr sz="1350" b="1">
                 <a:solidFill>
                   <a:srgbClr val="38BDF8"/>
                 </a:solidFill>
@@ -7400,7 +6966,7 @@
           <a:lstStyle/>
           <a:p>
             <a:pPr>
-              <a:defRPr sz="2200" b="1">
+              <a:defRPr sz="2900" b="1">
                 <a:solidFill>
                   <a:srgbClr val="FFFFFF"/>
                 </a:solidFill>
@@ -7408,7 +6974,7 @@
               </a:defRPr>
             </a:pPr>
             <a:r>
-              <a:t>Field Prototype: Live Object Detection, Replay &amp; Supervisory Dashboard</a:t>
+              <a:t>Field Prototype: Live Detection, Replay &amp; Dashboard</a:t>
             </a:r>
           </a:p>
         </p:txBody>
@@ -7421,7 +6987,7 @@
         </p:nvSpPr>
         <p:spPr>
           <a:xfrm>
-            <a:off x="731520" y="1243584"/>
+            <a:off x="731520" y="1234440"/>
             <a:ext cx="10728655" cy="13716"/>
           </a:xfrm>
           <a:prstGeom prst="rect">
@@ -7456,16 +7022,328 @@
           </a:p>
         </p:txBody>
       </p:sp>
-      <p:sp>
-        <p:nvSpPr>
-          <p:cNvPr id="5" name="Rectangle 4"/>
+      <p:pic>
+        <p:nvPicPr>
+          <p:cNvPr id="5" name="Picture 4" descr="media_1788498059037.png"/>
+          <p:cNvPicPr>
+            <a:picLocks noChangeAspect="1"/>
+          </p:cNvPicPr>
+          <p:nvPr/>
+        </p:nvPicPr>
+        <p:blipFill>
+          <a:blip r:embed="rId2"/>
+          <a:stretch>
+            <a:fillRect/>
+          </a:stretch>
+        </p:blipFill>
+        <p:spPr>
+          <a:xfrm>
+            <a:off x="731520" y="1417320"/>
+            <a:ext cx="3200400" cy="2331720"/>
+          </a:xfrm>
+          <a:prstGeom prst="rect">
+            <a:avLst/>
+          </a:prstGeom>
+        </p:spPr>
+      </p:pic>
+      <p:sp>
+        <p:nvSpPr>
+          <p:cNvPr id="6" name="Rectangle 5"/>
           <p:cNvSpPr/>
           <p:nvPr/>
         </p:nvSpPr>
         <p:spPr>
           <a:xfrm>
-            <a:off x="731520" y="1371600"/>
-            <a:ext cx="3246120" cy="2286000"/>
+            <a:off x="731520" y="1417320"/>
+            <a:ext cx="2011680" cy="292608"/>
+          </a:xfrm>
+          <a:prstGeom prst="rect">
+            <a:avLst/>
+          </a:prstGeom>
+          <a:solidFill>
+            <a:srgbClr val="102C52"/>
+          </a:solidFill>
+          <a:ln>
+            <a:solidFill>
+              <a:srgbClr val="38BDF8"/>
+            </a:solidFill>
+          </a:ln>
+        </p:spPr>
+        <p:style>
+          <a:lnRef idx="1">
+            <a:schemeClr val="accent1"/>
+          </a:lnRef>
+          <a:fillRef idx="3">
+            <a:schemeClr val="accent1"/>
+          </a:fillRef>
+          <a:effectRef idx="2">
+            <a:schemeClr val="accent1"/>
+          </a:effectRef>
+          <a:fontRef idx="minor">
+            <a:schemeClr val="lt1"/>
+          </a:fontRef>
+        </p:style>
+        <p:txBody>
+          <a:bodyPr rtlCol="0" anchor="ctr"/>
+          <a:lstStyle/>
+          <a:p>
+            <a:pPr algn="ctr"/>
+          </a:p>
+        </p:txBody>
+      </p:sp>
+      <p:sp>
+        <p:nvSpPr>
+          <p:cNvPr id="7" name="TextBox 6"/>
+          <p:cNvSpPr txBox="1"/>
+          <p:nvPr/>
+        </p:nvSpPr>
+        <p:spPr>
+          <a:xfrm>
+            <a:off x="777240" y="1435608"/>
+            <a:ext cx="1920240" cy="256032"/>
+          </a:xfrm>
+          <a:prstGeom prst="rect">
+            <a:avLst/>
+          </a:prstGeom>
+          <a:noFill/>
+        </p:spPr>
+        <p:txBody>
+          <a:bodyPr wrap="none">
+            <a:spAutoFit/>
+          </a:bodyPr>
+          <a:lstStyle/>
+          <a:p>
+            <a:pPr>
+              <a:defRPr sz="1100" b="1">
+                <a:solidFill>
+                  <a:srgbClr val="FFFFFF"/>
+                </a:solidFill>
+              </a:defRPr>
+            </a:pPr>
+            <a:r>
+              <a:t>4.6m FLOOR DRAG DETECTED</a:t>
+            </a:r>
+          </a:p>
+        </p:txBody>
+      </p:sp>
+      <p:pic>
+        <p:nvPicPr>
+          <p:cNvPr id="8" name="Picture 7" descr="media_1788497397504.png"/>
+          <p:cNvPicPr>
+            <a:picLocks noChangeAspect="1"/>
+          </p:cNvPicPr>
+          <p:nvPr/>
+        </p:nvPicPr>
+        <p:blipFill>
+          <a:blip r:embed="rId3"/>
+          <a:stretch>
+            <a:fillRect/>
+          </a:stretch>
+        </p:blipFill>
+        <p:spPr>
+          <a:xfrm>
+            <a:off x="4069080" y="1417320"/>
+            <a:ext cx="3246120" cy="2331720"/>
+          </a:xfrm>
+          <a:prstGeom prst="rect">
+            <a:avLst/>
+          </a:prstGeom>
+        </p:spPr>
+      </p:pic>
+      <p:sp>
+        <p:nvSpPr>
+          <p:cNvPr id="9" name="Rectangle 8"/>
+          <p:cNvSpPr/>
+          <p:nvPr/>
+        </p:nvSpPr>
+        <p:spPr>
+          <a:xfrm>
+            <a:off x="4069080" y="1417320"/>
+            <a:ext cx="2011680" cy="292608"/>
+          </a:xfrm>
+          <a:prstGeom prst="rect">
+            <a:avLst/>
+          </a:prstGeom>
+          <a:solidFill>
+            <a:srgbClr val="102C52"/>
+          </a:solidFill>
+          <a:ln>
+            <a:solidFill>
+              <a:srgbClr val="38BDF8"/>
+            </a:solidFill>
+          </a:ln>
+        </p:spPr>
+        <p:style>
+          <a:lnRef idx="1">
+            <a:schemeClr val="accent1"/>
+          </a:lnRef>
+          <a:fillRef idx="3">
+            <a:schemeClr val="accent1"/>
+          </a:fillRef>
+          <a:effectRef idx="2">
+            <a:schemeClr val="accent1"/>
+          </a:effectRef>
+          <a:fontRef idx="minor">
+            <a:schemeClr val="lt1"/>
+          </a:fontRef>
+        </p:style>
+        <p:txBody>
+          <a:bodyPr rtlCol="0" anchor="ctr"/>
+          <a:lstStyle/>
+          <a:p>
+            <a:pPr algn="ctr"/>
+          </a:p>
+        </p:txBody>
+      </p:sp>
+      <p:sp>
+        <p:nvSpPr>
+          <p:cNvPr id="10" name="TextBox 9"/>
+          <p:cNvSpPr txBox="1"/>
+          <p:nvPr/>
+        </p:nvSpPr>
+        <p:spPr>
+          <a:xfrm>
+            <a:off x="4114800" y="1435608"/>
+            <a:ext cx="1920240" cy="256032"/>
+          </a:xfrm>
+          <a:prstGeom prst="rect">
+            <a:avLst/>
+          </a:prstGeom>
+          <a:noFill/>
+        </p:spPr>
+        <p:txBody>
+          <a:bodyPr wrap="none">
+            <a:spAutoFit/>
+          </a:bodyPr>
+          <a:lstStyle/>
+          <a:p>
+            <a:pPr>
+              <a:defRPr sz="1100" b="1">
+                <a:solidFill>
+                  <a:srgbClr val="FFFFFF"/>
+                </a:solidFill>
+              </a:defRPr>
+            </a:pPr>
+            <a:r>
+              <a:t>CRITICAL DROP REPLAY (5s)</a:t>
+            </a:r>
+          </a:p>
+        </p:txBody>
+      </p:sp>
+      <p:pic>
+        <p:nvPicPr>
+          <p:cNvPr id="11" name="Picture 10" descr="media_1788627628552.png"/>
+          <p:cNvPicPr>
+            <a:picLocks noChangeAspect="1"/>
+          </p:cNvPicPr>
+          <p:nvPr/>
+        </p:nvPicPr>
+        <p:blipFill>
+          <a:blip r:embed="rId4"/>
+          <a:stretch>
+            <a:fillRect/>
+          </a:stretch>
+        </p:blipFill>
+        <p:spPr>
+          <a:xfrm>
+            <a:off x="731520" y="3886200"/>
+            <a:ext cx="6583680" cy="2331720"/>
+          </a:xfrm>
+          <a:prstGeom prst="rect">
+            <a:avLst/>
+          </a:prstGeom>
+        </p:spPr>
+      </p:pic>
+      <p:sp>
+        <p:nvSpPr>
+          <p:cNvPr id="12" name="Rectangle 11"/>
+          <p:cNvSpPr/>
+          <p:nvPr/>
+        </p:nvSpPr>
+        <p:spPr>
+          <a:xfrm>
+            <a:off x="731520" y="3886200"/>
+            <a:ext cx="2377440" cy="292608"/>
+          </a:xfrm>
+          <a:prstGeom prst="rect">
+            <a:avLst/>
+          </a:prstGeom>
+          <a:solidFill>
+            <a:srgbClr val="102C52"/>
+          </a:solidFill>
+          <a:ln>
+            <a:solidFill>
+              <a:srgbClr val="38BDF8"/>
+            </a:solidFill>
+          </a:ln>
+        </p:spPr>
+        <p:style>
+          <a:lnRef idx="1">
+            <a:schemeClr val="accent1"/>
+          </a:lnRef>
+          <a:fillRef idx="3">
+            <a:schemeClr val="accent1"/>
+          </a:fillRef>
+          <a:effectRef idx="2">
+            <a:schemeClr val="accent1"/>
+          </a:effectRef>
+          <a:fontRef idx="minor">
+            <a:schemeClr val="lt1"/>
+          </a:fontRef>
+        </p:style>
+        <p:txBody>
+          <a:bodyPr rtlCol="0" anchor="ctr"/>
+          <a:lstStyle/>
+          <a:p>
+            <a:pPr algn="ctr"/>
+          </a:p>
+        </p:txBody>
+      </p:sp>
+      <p:sp>
+        <p:nvSpPr>
+          <p:cNvPr id="13" name="TextBox 12"/>
+          <p:cNvSpPr txBox="1"/>
+          <p:nvPr/>
+        </p:nvSpPr>
+        <p:spPr>
+          <a:xfrm>
+            <a:off x="777240" y="3904487"/>
+            <a:ext cx="2286000" cy="256032"/>
+          </a:xfrm>
+          <a:prstGeom prst="rect">
+            <a:avLst/>
+          </a:prstGeom>
+          <a:noFill/>
+        </p:spPr>
+        <p:txBody>
+          <a:bodyPr wrap="none">
+            <a:spAutoFit/>
+          </a:bodyPr>
+          <a:lstStyle/>
+          <a:p>
+            <a:pPr>
+              <a:defRPr sz="1100" b="1">
+                <a:solidFill>
+                  <a:srgbClr val="FFFFFF"/>
+                </a:solidFill>
+              </a:defRPr>
+            </a:pPr>
+            <a:r>
+              <a:t>LIVE OPERATIONAL DASHBOARD</a:t>
+            </a:r>
+          </a:p>
+        </p:txBody>
+      </p:sp>
+      <p:sp>
+        <p:nvSpPr>
+          <p:cNvPr id="14" name="Rectangle 13"/>
+          <p:cNvSpPr/>
+          <p:nvPr/>
+        </p:nvSpPr>
+        <p:spPr>
+          <a:xfrm>
+            <a:off x="7635240" y="1417320"/>
+            <a:ext cx="3822191" cy="4800600"/>
           </a:xfrm>
           <a:prstGeom prst="rect">
             <a:avLst/>
@@ -7501,321 +7379,6 @@
           </a:p>
         </p:txBody>
       </p:sp>
-      <p:pic>
-        <p:nvPicPr>
-          <p:cNvPr id="6" name="Picture 5" descr="media_1788498059037.png"/>
-          <p:cNvPicPr>
-            <a:picLocks noChangeAspect="1"/>
-          </p:cNvPicPr>
-          <p:nvPr/>
-        </p:nvPicPr>
-        <p:blipFill>
-          <a:blip r:embed="rId2"/>
-          <a:stretch>
-            <a:fillRect/>
-          </a:stretch>
-        </p:blipFill>
-        <p:spPr>
-          <a:xfrm>
-            <a:off x="740664" y="1380744"/>
-            <a:ext cx="3227832" cy="2267712"/>
-          </a:xfrm>
-          <a:prstGeom prst="rect">
-            <a:avLst/>
-          </a:prstGeom>
-        </p:spPr>
-      </p:pic>
-      <p:sp>
-        <p:nvSpPr>
-          <p:cNvPr id="7" name="TextBox 6"/>
-          <p:cNvSpPr txBox="1"/>
-          <p:nvPr/>
-        </p:nvSpPr>
-        <p:spPr>
-          <a:xfrm>
-            <a:off x="731520" y="3685032"/>
-            <a:ext cx="3246120" cy="256032"/>
-          </a:xfrm>
-          <a:prstGeom prst="rect">
-            <a:avLst/>
-          </a:prstGeom>
-          <a:noFill/>
-        </p:spPr>
-        <p:txBody>
-          <a:bodyPr wrap="square" lIns="0" tIns="0" rIns="0" bIns="0">
-            <a:spAutoFit/>
-          </a:bodyPr>
-          <a:lstStyle/>
-          <a:p>
-            <a:pPr>
-              <a:defRPr sz="850">
-                <a:solidFill>
-                  <a:srgbClr val="38BDF8"/>
-                </a:solidFill>
-                <a:latin typeface="Segoe UI"/>
-              </a:defRPr>
-            </a:pPr>
-            <a:r>
-              <a:t>AI tracking worker &amp; carton dragged 4.6m on wet floor</a:t>
-            </a:r>
-          </a:p>
-        </p:txBody>
-      </p:sp>
-      <p:sp>
-        <p:nvSpPr>
-          <p:cNvPr id="8" name="Rectangle 7"/>
-          <p:cNvSpPr/>
-          <p:nvPr/>
-        </p:nvSpPr>
-        <p:spPr>
-          <a:xfrm>
-            <a:off x="4160520" y="1371600"/>
-            <a:ext cx="3291840" cy="2286000"/>
-          </a:xfrm>
-          <a:prstGeom prst="rect">
-            <a:avLst/>
-          </a:prstGeom>
-          <a:solidFill>
-            <a:srgbClr val="0A192E"/>
-          </a:solidFill>
-          <a:ln w="12700">
-            <a:solidFill>
-              <a:srgbClr val="1C3E66"/>
-            </a:solidFill>
-          </a:ln>
-        </p:spPr>
-        <p:style>
-          <a:lnRef idx="1">
-            <a:schemeClr val="accent1"/>
-          </a:lnRef>
-          <a:fillRef idx="3">
-            <a:schemeClr val="accent1"/>
-          </a:fillRef>
-          <a:effectRef idx="2">
-            <a:schemeClr val="accent1"/>
-          </a:effectRef>
-          <a:fontRef idx="minor">
-            <a:schemeClr val="lt1"/>
-          </a:fontRef>
-        </p:style>
-        <p:txBody>
-          <a:bodyPr rtlCol="0" anchor="ctr"/>
-          <a:lstStyle/>
-          <a:p>
-            <a:pPr algn="ctr"/>
-          </a:p>
-        </p:txBody>
-      </p:sp>
-      <p:pic>
-        <p:nvPicPr>
-          <p:cNvPr id="9" name="Picture 8" descr="media_1788497397504.png"/>
-          <p:cNvPicPr>
-            <a:picLocks noChangeAspect="1"/>
-          </p:cNvPicPr>
-          <p:nvPr/>
-        </p:nvPicPr>
-        <p:blipFill>
-          <a:blip r:embed="rId3"/>
-          <a:stretch>
-            <a:fillRect/>
-          </a:stretch>
-        </p:blipFill>
-        <p:spPr>
-          <a:xfrm>
-            <a:off x="4169663" y="1380744"/>
-            <a:ext cx="3273552" cy="2267712"/>
-          </a:xfrm>
-          <a:prstGeom prst="rect">
-            <a:avLst/>
-          </a:prstGeom>
-        </p:spPr>
-      </p:pic>
-      <p:sp>
-        <p:nvSpPr>
-          <p:cNvPr id="10" name="TextBox 9"/>
-          <p:cNvSpPr txBox="1"/>
-          <p:nvPr/>
-        </p:nvSpPr>
-        <p:spPr>
-          <a:xfrm>
-            <a:off x="4160520" y="3685032"/>
-            <a:ext cx="3291840" cy="256032"/>
-          </a:xfrm>
-          <a:prstGeom prst="rect">
-            <a:avLst/>
-          </a:prstGeom>
-          <a:noFill/>
-        </p:spPr>
-        <p:txBody>
-          <a:bodyPr wrap="square" lIns="0" tIns="0" rIns="0" bIns="0">
-            <a:spAutoFit/>
-          </a:bodyPr>
-          <a:lstStyle/>
-          <a:p>
-            <a:pPr>
-              <a:defRPr sz="850">
-                <a:solidFill>
-                  <a:srgbClr val="38BDF8"/>
-                </a:solidFill>
-                <a:latin typeface="Segoe UI"/>
-              </a:defRPr>
-            </a:pPr>
-            <a:r>
-              <a:t>5-second incident replay with falling velocity vectors</a:t>
-            </a:r>
-          </a:p>
-        </p:txBody>
-      </p:sp>
-      <p:sp>
-        <p:nvSpPr>
-          <p:cNvPr id="11" name="Rectangle 10"/>
-          <p:cNvSpPr/>
-          <p:nvPr/>
-        </p:nvSpPr>
-        <p:spPr>
-          <a:xfrm>
-            <a:off x="731520" y="4005072"/>
-            <a:ext cx="6720840" cy="2395728"/>
-          </a:xfrm>
-          <a:prstGeom prst="rect">
-            <a:avLst/>
-          </a:prstGeom>
-          <a:solidFill>
-            <a:srgbClr val="0A192E"/>
-          </a:solidFill>
-          <a:ln w="12700">
-            <a:solidFill>
-              <a:srgbClr val="1C3E66"/>
-            </a:solidFill>
-          </a:ln>
-        </p:spPr>
-        <p:style>
-          <a:lnRef idx="1">
-            <a:schemeClr val="accent1"/>
-          </a:lnRef>
-          <a:fillRef idx="3">
-            <a:schemeClr val="accent1"/>
-          </a:fillRef>
-          <a:effectRef idx="2">
-            <a:schemeClr val="accent1"/>
-          </a:effectRef>
-          <a:fontRef idx="minor">
-            <a:schemeClr val="lt1"/>
-          </a:fontRef>
-        </p:style>
-        <p:txBody>
-          <a:bodyPr rtlCol="0" anchor="ctr"/>
-          <a:lstStyle/>
-          <a:p>
-            <a:pPr algn="ctr"/>
-          </a:p>
-        </p:txBody>
-      </p:sp>
-      <p:pic>
-        <p:nvPicPr>
-          <p:cNvPr id="12" name="Picture 11" descr="media_1788627628552.png"/>
-          <p:cNvPicPr>
-            <a:picLocks noChangeAspect="1"/>
-          </p:cNvPicPr>
-          <p:nvPr/>
-        </p:nvPicPr>
-        <p:blipFill>
-          <a:blip r:embed="rId4"/>
-          <a:stretch>
-            <a:fillRect/>
-          </a:stretch>
-        </p:blipFill>
-        <p:spPr>
-          <a:xfrm>
-            <a:off x="740664" y="4014215"/>
-            <a:ext cx="6702552" cy="2148840"/>
-          </a:xfrm>
-          <a:prstGeom prst="rect">
-            <a:avLst/>
-          </a:prstGeom>
-        </p:spPr>
-      </p:pic>
-      <p:sp>
-        <p:nvSpPr>
-          <p:cNvPr id="13" name="TextBox 12"/>
-          <p:cNvSpPr txBox="1"/>
-          <p:nvPr/>
-        </p:nvSpPr>
-        <p:spPr>
-          <a:xfrm>
-            <a:off x="731520" y="6199632"/>
-            <a:ext cx="6720840" cy="228600"/>
-          </a:xfrm>
-          <a:prstGeom prst="rect">
-            <a:avLst/>
-          </a:prstGeom>
-          <a:noFill/>
-        </p:spPr>
-        <p:txBody>
-          <a:bodyPr wrap="square" lIns="0" tIns="0" rIns="0" bIns="0">
-            <a:spAutoFit/>
-          </a:bodyPr>
-          <a:lstStyle/>
-          <a:p>
-            <a:pPr>
-              <a:defRPr sz="850">
-                <a:solidFill>
-                  <a:srgbClr val="94A3B8"/>
-                </a:solidFill>
-                <a:latin typeface="Segoe UI"/>
-              </a:defRPr>
-            </a:pPr>
-            <a:r>
-              <a:t>Production UI: Pastel KPI cards, 7-day risk trend curves, and real-time incident drawer</a:t>
-            </a:r>
-          </a:p>
-        </p:txBody>
-      </p:sp>
-      <p:sp>
-        <p:nvSpPr>
-          <p:cNvPr id="14" name="Rectangle 13"/>
-          <p:cNvSpPr/>
-          <p:nvPr/>
-        </p:nvSpPr>
-        <p:spPr>
-          <a:xfrm>
-            <a:off x="7680960" y="1371600"/>
-            <a:ext cx="3779215" cy="5029200"/>
-          </a:xfrm>
-          <a:prstGeom prst="rect">
-            <a:avLst/>
-          </a:prstGeom>
-          <a:solidFill>
-            <a:srgbClr val="0A192E"/>
-          </a:solidFill>
-          <a:ln w="12700">
-            <a:solidFill>
-              <a:srgbClr val="1C3E66"/>
-            </a:solidFill>
-          </a:ln>
-        </p:spPr>
-        <p:style>
-          <a:lnRef idx="1">
-            <a:schemeClr val="accent1"/>
-          </a:lnRef>
-          <a:fillRef idx="3">
-            <a:schemeClr val="accent1"/>
-          </a:fillRef>
-          <a:effectRef idx="2">
-            <a:schemeClr val="accent1"/>
-          </a:effectRef>
-          <a:fontRef idx="minor">
-            <a:schemeClr val="lt1"/>
-          </a:fontRef>
-        </p:style>
-        <p:txBody>
-          <a:bodyPr rtlCol="0" anchor="ctr"/>
-          <a:lstStyle/>
-          <a:p>
-            <a:pPr algn="ctr"/>
-          </a:p>
-        </p:txBody>
-      </p:sp>
       <p:sp>
         <p:nvSpPr>
           <p:cNvPr id="15" name="Rectangle 14"/>
@@ -7824,8 +7387,8 @@
         </p:nvSpPr>
         <p:spPr>
           <a:xfrm>
-            <a:off x="7680960" y="1371600"/>
-            <a:ext cx="3779215" cy="27432"/>
+            <a:off x="7635240" y="1417320"/>
+            <a:ext cx="3822191" cy="36576"/>
           </a:xfrm>
           <a:prstGeom prst="rect">
             <a:avLst/>
@@ -7867,8 +7430,8 @@
         </p:nvSpPr>
         <p:spPr>
           <a:xfrm>
-            <a:off x="7882128" y="1508760"/>
-            <a:ext cx="3376879" cy="4754880"/>
+            <a:off x="7863840" y="1572768"/>
+            <a:ext cx="3364991" cy="4480560"/>
           </a:xfrm>
           <a:prstGeom prst="rect">
             <a:avLst/>
@@ -7882,7 +7445,7 @@
           <a:lstStyle/>
           <a:p>
             <a:pPr>
-              <a:defRPr sz="1050" b="1">
+              <a:defRPr sz="1800" b="1">
                 <a:solidFill>
                   <a:srgbClr val="38BDF8"/>
                 </a:solidFill>
@@ -7890,15 +7453,15 @@
               </a:defRPr>
             </a:pPr>
             <a:r>
-              <a:t>EMPIRICAL TEST SCENARIOS</a:t>
+              <a:t>TESTED IN REAL FOOTAGE</a:t>
             </a:r>
           </a:p>
           <a:p>
             <a:pPr>
               <a:spcBef>
-                <a:spcPts val="600"/>
+                <a:spcPts val="700"/>
               </a:spcBef>
-              <a:defRPr sz="919" b="1">
+              <a:defRPr sz="1450" b="1">
                 <a:solidFill>
                   <a:srgbClr val="FFFFFF"/>
                 </a:solidFill>
@@ -7906,7 +7469,7 @@
               </a:defRPr>
             </a:pPr>
             <a:r>
-              <a:t>01 • Carton Free-Fall Drop (&gt;1.2m)</a:t>
+              <a:t>• Drop from Staging (&gt;1.2m)</a:t>
             </a:r>
           </a:p>
           <a:p>
@@ -7914,7 +7477,7 @@
               <a:spcBef>
                 <a:spcPts val="100"/>
               </a:spcBef>
-              <a:defRPr sz="850">
+              <a:defRPr sz="1250">
                 <a:solidFill>
                   <a:srgbClr val="CBD5E1"/>
                 </a:solidFill>
@@ -7922,15 +7485,15 @@
               </a:defRPr>
             </a:pPr>
             <a:r>
-              <a:t>Carton slips from staging pallet. Camera spots velocity spike (vy &gt; 2.8 m/s) and triggers dock chime in 1.2s flat.</a:t>
+              <a:t>  Freefall spike vy &gt; 2.8 m/s triggers dock chime in 1.2s flat.</a:t>
             </a:r>
           </a:p>
           <a:p>
             <a:pPr>
               <a:spcBef>
-                <a:spcPts val="600"/>
+                <a:spcPts val="700"/>
               </a:spcBef>
-              <a:defRPr sz="919" b="1">
+              <a:defRPr sz="1450" b="1">
                 <a:solidFill>
                   <a:srgbClr val="FFFFFF"/>
                 </a:solidFill>
@@ -7938,7 +7501,7 @@
               </a:defRPr>
             </a:pPr>
             <a:r>
-              <a:t>02 • Rough Wet-Floor Dragging</a:t>
+              <a:t>• Wet-Floor Dragging (4.6m)</a:t>
             </a:r>
           </a:p>
           <a:p>
@@ -7946,7 +7509,7 @@
               <a:spcBef>
                 <a:spcPts val="100"/>
               </a:spcBef>
-              <a:defRPr sz="850">
+              <a:defRPr sz="1250">
                 <a:solidFill>
                   <a:srgbClr val="CBD5E1"/>
                 </a:solidFill>
@@ -7954,15 +7517,15 @@
               </a:defRPr>
             </a:pPr>
             <a:r>
-              <a:t>Worker slides a 20kg box 4.6m across damp concrete. System calculates floor displacement and issues high-risk friction alert.</a:t>
+              <a:t>  Continuous floor displacement flagged as severe friction hazard.</a:t>
             </a:r>
           </a:p>
           <a:p>
             <a:pPr>
               <a:spcBef>
-                <a:spcPts val="600"/>
+                <a:spcPts val="700"/>
               </a:spcBef>
-              <a:defRPr sz="919" b="1">
+              <a:defRPr sz="1450" b="1">
                 <a:solidFill>
                   <a:srgbClr val="FFFFFF"/>
                 </a:solidFill>
@@ -7970,7 +7533,7 @@
               </a:defRPr>
             </a:pPr>
             <a:r>
-              <a:t>03 • Unstable Pallet Tilt (&gt;17°)</a:t>
+              <a:t>• Unstable Pallet Tilt (&gt;17°)</a:t>
             </a:r>
           </a:p>
           <a:p>
@@ -7978,7 +7541,7 @@
               <a:spcBef>
                 <a:spcPts val="100"/>
               </a:spcBef>
-              <a:defRPr sz="850">
+              <a:defRPr sz="1250">
                 <a:solidFill>
                   <a:srgbClr val="CBD5E1"/>
                 </a:solidFill>
@@ -7986,15 +7549,15 @@
               </a:defRPr>
             </a:pPr>
             <a:r>
-              <a:t>Boxes stacked at a 17° lean without interlock flagged as caution before transit collapse could occur.</a:t>
+              <a:t>  Stack angle warning alerts loaders before trailer loading.</a:t>
             </a:r>
           </a:p>
           <a:p>
             <a:pPr>
               <a:spcBef>
-                <a:spcPts val="600"/>
+                <a:spcPts val="700"/>
               </a:spcBef>
-              <a:defRPr sz="919" b="1">
+              <a:defRPr sz="1450" b="1">
                 <a:solidFill>
                   <a:srgbClr val="FFFFFF"/>
                 </a:solidFill>
@@ -8002,7 +7565,7 @@
               </a:defRPr>
             </a:pPr>
             <a:r>
-              <a:t>04 • Gemini Natural Language Audit</a:t>
+              <a:t>• Gemini AI Natural Query</a:t>
             </a:r>
           </a:p>
           <a:p>
@@ -8010,7 +7573,7 @@
               <a:spcBef>
                 <a:spcPts val="100"/>
               </a:spcBef>
-              <a:defRPr sz="850">
+              <a:defRPr sz="1250">
                 <a:solidFill>
                   <a:srgbClr val="CBD5E1"/>
                 </a:solidFill>
@@ -8018,15 +7581,15 @@
               </a:defRPr>
             </a:pPr>
             <a:r>
-              <a:t>Asked 'Which bay had drops today?' Gemini parsed logs to confirm Bay 3 had 2 incidents at 10:14 AM and 2:30 PM.</a:t>
+              <a:t>  'Which bay had drops today?' resolved instantly from SQLite logs.</a:t>
             </a:r>
           </a:p>
           <a:p>
             <a:pPr>
               <a:spcBef>
-                <a:spcPts val="1200"/>
+                <a:spcPts val="1000"/>
               </a:spcBef>
-              <a:defRPr sz="950" b="1">
+              <a:defRPr sz="1400" b="1">
                 <a:solidFill>
                   <a:srgbClr val="38BDF8"/>
                 </a:solidFill>
@@ -8034,15 +7597,15 @@
               </a:defRPr>
             </a:pPr>
             <a:r>
-              <a:t>LIVE DEPLOYMENT &amp; REPOSITORIES</a:t>
+              <a:t>LIVE DEPLOYMENT:</a:t>
             </a:r>
           </a:p>
           <a:p>
             <a:pPr>
               <a:spcBef>
-                <a:spcPts val="200"/>
+                <a:spcPts val="100"/>
               </a:spcBef>
-              <a:defRPr sz="850" b="1">
+              <a:defRPr sz="1250">
                 <a:solidFill>
                   <a:srgbClr val="FFFFFF"/>
                 </a:solidFill>
@@ -8050,142 +7613,23 @@
               </a:defRPr>
             </a:pPr>
             <a:r>
-              <a:t>• Live Web App: </a:t>
-            </a:r>
-            <a:r>
-              <a:rPr b="0">
+              <a:t>smart-warehouse-system-rk8p.onrender.com</a:t>
+            </a:r>
+          </a:p>
+          <a:p>
+            <a:pPr>
+              <a:spcBef>
+                <a:spcPts val="100"/>
+              </a:spcBef>
+              <a:defRPr sz="1200">
                 <a:solidFill>
                   <a:srgbClr val="94A3B8"/>
                 </a:solidFill>
-              </a:rPr>
-              <a:t>smart-warehouse-system-rk8p.onrender.com</a:t>
-            </a:r>
-          </a:p>
-          <a:p>
-            <a:pPr>
-              <a:spcBef>
-                <a:spcPts val="200"/>
-              </a:spcBef>
-              <a:defRPr sz="850" b="1">
-                <a:solidFill>
-                  <a:srgbClr val="FFFFFF"/>
-                </a:solidFill>
-                <a:latin typeface="Segoe UI"/>
-              </a:defRPr>
-            </a:pPr>
-            <a:r>
-              <a:t>• Local Port: </a:t>
-            </a:r>
-            <a:r>
-              <a:rPr b="0">
-                <a:solidFill>
-                  <a:srgbClr val="94A3B8"/>
-                </a:solidFill>
-              </a:rPr>
-              <a:t>localhost:8000 / localhost:5173</a:t>
-            </a:r>
-          </a:p>
-          <a:p>
-            <a:pPr>
-              <a:spcBef>
-                <a:spcPts val="200"/>
-              </a:spcBef>
-              <a:defRPr sz="850" b="1">
-                <a:solidFill>
-                  <a:srgbClr val="FFFFFF"/>
-                </a:solidFill>
-                <a:latin typeface="Segoe UI"/>
-              </a:defRPr>
-            </a:pPr>
-            <a:r>
-              <a:t>• Open Source Repo: </a:t>
-            </a:r>
-            <a:r>
-              <a:rPr b="0">
-                <a:solidFill>
-                  <a:srgbClr val="94A3B8"/>
-                </a:solidFill>
-              </a:rPr>
+                <a:latin typeface="Segoe UI"/>
+              </a:defRPr>
+            </a:pPr>
+            <a:r>
               <a:t>github.com/Aastha008/Smart-Warehouse-System</a:t>
-            </a:r>
-          </a:p>
-        </p:txBody>
-      </p:sp>
-      <p:sp>
-        <p:nvSpPr>
-          <p:cNvPr id="17" name="Rectangle 16"/>
-          <p:cNvSpPr/>
-          <p:nvPr/>
-        </p:nvSpPr>
-        <p:spPr>
-          <a:xfrm>
-            <a:off x="731520" y="6492240"/>
-            <a:ext cx="10728655" cy="13716"/>
-          </a:xfrm>
-          <a:prstGeom prst="rect">
-            <a:avLst/>
-          </a:prstGeom>
-          <a:solidFill>
-            <a:srgbClr val="1C3E66"/>
-          </a:solidFill>
-          <a:ln>
-            <a:noFill/>
-          </a:ln>
-        </p:spPr>
-        <p:style>
-          <a:lnRef idx="1">
-            <a:schemeClr val="accent1"/>
-          </a:lnRef>
-          <a:fillRef idx="3">
-            <a:schemeClr val="accent1"/>
-          </a:fillRef>
-          <a:effectRef idx="2">
-            <a:schemeClr val="accent1"/>
-          </a:effectRef>
-          <a:fontRef idx="minor">
-            <a:schemeClr val="lt1"/>
-          </a:fontRef>
-        </p:style>
-        <p:txBody>
-          <a:bodyPr rtlCol="0" anchor="ctr"/>
-          <a:lstStyle/>
-          <a:p>
-            <a:pPr algn="ctr"/>
-          </a:p>
-        </p:txBody>
-      </p:sp>
-      <p:sp>
-        <p:nvSpPr>
-          <p:cNvPr id="18" name="TextBox 17"/>
-          <p:cNvSpPr txBox="1"/>
-          <p:nvPr/>
-        </p:nvSpPr>
-        <p:spPr>
-          <a:xfrm>
-            <a:off x="731520" y="6537960"/>
-            <a:ext cx="10728655" cy="228600"/>
-          </a:xfrm>
-          <a:prstGeom prst="rect">
-            <a:avLst/>
-          </a:prstGeom>
-          <a:noFill/>
-        </p:spPr>
-        <p:txBody>
-          <a:bodyPr wrap="none" lIns="0" tIns="0" rIns="0" bIns="0">
-            <a:spAutoFit/>
-          </a:bodyPr>
-          <a:lstStyle/>
-          <a:p>
-            <a:pPr>
-              <a:defRPr sz="850">
-                <a:solidFill>
-                  <a:srgbClr val="94A3B8"/>
-                </a:solidFill>
-                <a:latin typeface="Segoe UI"/>
-              </a:defRPr>
-            </a:pPr>
-            <a:r>
-              <a:t>DockGuard AI  •  Field Prototypes, Test Scenarios &amp; Verified Deployments  •  Slide 4 of 6</a:t>
             </a:r>
           </a:p>
         </p:txBody>
@@ -8239,7 +7683,7 @@
         <p:spPr>
           <a:xfrm>
             <a:off x="731520" y="384048"/>
-            <a:ext cx="6400800" cy="274320"/>
+            <a:ext cx="5943600" cy="274320"/>
           </a:xfrm>
           <a:prstGeom prst="rect">
             <a:avLst/>
@@ -8253,7 +7697,7 @@
           <a:lstStyle/>
           <a:p>
             <a:pPr>
-              <a:defRPr sz="950" b="1">
+              <a:defRPr sz="1350" b="1">
                 <a:solidFill>
                   <a:srgbClr val="38BDF8"/>
                 </a:solidFill>
@@ -8261,7 +7705,7 @@
               </a:defRPr>
             </a:pPr>
             <a:r>
-              <a:t>05  /  IMPACT &amp; USER VALIDATION</a:t>
+              <a:t>05  /  IMPACT, DAMAGE PREVENTION &amp; VALIDATION</a:t>
             </a:r>
           </a:p>
         </p:txBody>
@@ -8289,7 +7733,7 @@
           <a:lstStyle/>
           <a:p>
             <a:pPr>
-              <a:defRPr sz="2200" b="1">
+              <a:defRPr sz="2900" b="1">
                 <a:solidFill>
                   <a:srgbClr val="FFFFFF"/>
                 </a:solidFill>
@@ -8297,7 +7741,7 @@
               </a:defRPr>
             </a:pPr>
             <a:r>
-              <a:t>Operational Feedback: How Warehouse Teams Shaped Our Iterations</a:t>
+              <a:t>What Changed When We Put It Into Practice</a:t>
             </a:r>
           </a:p>
         </p:txBody>
@@ -8310,7 +7754,7 @@
         </p:nvSpPr>
         <p:spPr>
           <a:xfrm>
-            <a:off x="731520" y="1243584"/>
+            <a:off x="731520" y="1234440"/>
             <a:ext cx="10728655" cy="13716"/>
           </a:xfrm>
           <a:prstGeom prst="rect">
@@ -8353,8 +7797,8 @@
         </p:nvSpPr>
         <p:spPr>
           <a:xfrm>
-            <a:off x="731520" y="1371600"/>
-            <a:ext cx="6858000" cy="896112"/>
+            <a:off x="731520" y="1444752"/>
+            <a:ext cx="2523744" cy="2423160"/>
           </a:xfrm>
           <a:prstGeom prst="rect">
             <a:avLst/>
@@ -8398,8 +7842,8 @@
         </p:nvSpPr>
         <p:spPr>
           <a:xfrm>
-            <a:off x="731520" y="1371600"/>
-            <a:ext cx="27432" cy="896112"/>
+            <a:off x="731520" y="1444752"/>
+            <a:ext cx="2523744" cy="36576"/>
           </a:xfrm>
           <a:prstGeom prst="rect">
             <a:avLst/>
@@ -8441,8 +7885,8 @@
         </p:nvSpPr>
         <p:spPr>
           <a:xfrm>
-            <a:off x="914400" y="1444752"/>
-            <a:ext cx="6583680" cy="749808"/>
+            <a:off x="868680" y="1609344"/>
+            <a:ext cx="2249424" cy="2148840"/>
           </a:xfrm>
           <a:prstGeom prst="rect">
             <a:avLst/>
@@ -8456,23 +7900,15 @@
           <a:lstStyle/>
           <a:p>
             <a:pPr>
-              <a:defRPr sz="1000" b="1">
-                <a:solidFill>
-                  <a:srgbClr val="38BDF8"/>
-                </a:solidFill>
-                <a:latin typeface="Segoe UI"/>
-              </a:defRPr>
-            </a:pPr>
-            <a:r>
-              <a:t>The Shift Supervisor: </a:t>
-            </a:r>
-            <a:r>
-              <a:rPr b="0" i="1">
+              <a:defRPr sz="3800" b="1">
                 <a:solidFill>
                   <a:srgbClr val="FFFFFF"/>
                 </a:solidFill>
-              </a:rPr>
-              <a:t>"I can't watch hours of CCTV while running across 6 active bays."</a:t>
+                <a:latin typeface="Segoe UI"/>
+              </a:defRPr>
+            </a:pPr>
+            <a:r>
+              <a:t>&lt; 1.5s</a:t>
             </a:r>
           </a:p>
           <a:p>
@@ -8480,7 +7916,23 @@
               <a:spcBef>
                 <a:spcPts val="300"/>
               </a:spcBef>
-              <a:defRPr sz="880">
+              <a:defRPr sz="1400" b="1">
+                <a:solidFill>
+                  <a:srgbClr val="38BDF8"/>
+                </a:solidFill>
+                <a:latin typeface="Segoe UI"/>
+              </a:defRPr>
+            </a:pPr>
+            <a:r>
+              <a:t>DETECTION → CHIME</a:t>
+            </a:r>
+          </a:p>
+          <a:p>
+            <a:pPr>
+              <a:spcBef>
+                <a:spcPts val="600"/>
+              </a:spcBef>
+              <a:defRPr sz="1350">
                 <a:solidFill>
                   <a:srgbClr val="CBD5E1"/>
                 </a:solidFill>
@@ -8488,7 +7940,7 @@
               </a:defRPr>
             </a:pPr>
             <a:r>
-              <a:t>→ Iteration Implemented: Engineered 1-click 5s replay clips with pre-buffered impact markers so reviews take &lt;10 seconds.</a:t>
+              <a:t>Sub-second vision catches drops before cartons are buried in trucks.</a:t>
             </a:r>
           </a:p>
         </p:txBody>
@@ -8501,8 +7953,8 @@
         </p:nvSpPr>
         <p:spPr>
           <a:xfrm>
-            <a:off x="731520" y="2359152"/>
-            <a:ext cx="6858000" cy="896112"/>
+            <a:off x="3465576" y="1444752"/>
+            <a:ext cx="2523744" cy="2423160"/>
           </a:xfrm>
           <a:prstGeom prst="rect">
             <a:avLst/>
@@ -8546,8 +7998,8 @@
         </p:nvSpPr>
         <p:spPr>
           <a:xfrm>
-            <a:off x="731520" y="2359152"/>
-            <a:ext cx="27432" cy="896112"/>
+            <a:off x="3465576" y="1444752"/>
+            <a:ext cx="2523744" cy="36576"/>
           </a:xfrm>
           <a:prstGeom prst="rect">
             <a:avLst/>
@@ -8589,8 +8041,8 @@
         </p:nvSpPr>
         <p:spPr>
           <a:xfrm>
-            <a:off x="914400" y="2432304"/>
-            <a:ext cx="6583680" cy="749808"/>
+            <a:off x="3602736" y="1609344"/>
+            <a:ext cx="2249424" cy="2148840"/>
           </a:xfrm>
           <a:prstGeom prst="rect">
             <a:avLst/>
@@ -8604,23 +8056,15 @@
           <a:lstStyle/>
           <a:p>
             <a:pPr>
-              <a:defRPr sz="1000" b="1">
-                <a:solidFill>
-                  <a:srgbClr val="38BDF8"/>
-                </a:solidFill>
-                <a:latin typeface="Segoe UI"/>
-              </a:defRPr>
-            </a:pPr>
-            <a:r>
-              <a:t>The Dock Loader: </a:t>
-            </a:r>
-            <a:r>
-              <a:rPr b="0" i="1">
+              <a:defRPr sz="3200" b="1">
                 <a:solidFill>
                   <a:srgbClr val="FFFFFF"/>
                 </a:solidFill>
-              </a:rPr>
-              <a:t>"Your first alarm sounded like an evacuation siren. It made everyone defensive."</a:t>
+                <a:latin typeface="Segoe UI"/>
+              </a:defRPr>
+            </a:pPr>
+            <a:r>
+              <a:t>30m → 1m</a:t>
             </a:r>
           </a:p>
           <a:p>
@@ -8628,7 +8072,23 @@
               <a:spcBef>
                 <a:spcPts val="300"/>
               </a:spcBef>
-              <a:defRPr sz="880">
+              <a:defRPr sz="1400" b="1">
+                <a:solidFill>
+                  <a:srgbClr val="38BDF8"/>
+                </a:solidFill>
+                <a:latin typeface="Segoe UI"/>
+              </a:defRPr>
+            </a:pPr>
+            <a:r>
+              <a:t>VERIFICATION SPEED</a:t>
+            </a:r>
+          </a:p>
+          <a:p>
+            <a:pPr>
+              <a:spcBef>
+                <a:spcPts val="600"/>
+              </a:spcBef>
+              <a:defRPr sz="1350">
                 <a:solidFill>
                   <a:srgbClr val="CBD5E1"/>
                 </a:solidFill>
@@ -8636,7 +8096,7 @@
               </a:defRPr>
             </a:pPr>
             <a:r>
-              <a:t>→ Iteration Implemented: Replaced harsh sirens with soft dock chimes and educational recommendations for 2-person lifts.</a:t>
+              <a:t>5-second micro-replays replace 30 minutes of manual CCTV scrubbing.</a:t>
             </a:r>
           </a:p>
         </p:txBody>
@@ -8649,8 +8109,8 @@
         </p:nvSpPr>
         <p:spPr>
           <a:xfrm>
-            <a:off x="731520" y="3346704"/>
-            <a:ext cx="6858000" cy="896112"/>
+            <a:off x="6199632" y="1444752"/>
+            <a:ext cx="2523744" cy="2423160"/>
           </a:xfrm>
           <a:prstGeom prst="rect">
             <a:avLst/>
@@ -8694,8 +8154,8 @@
         </p:nvSpPr>
         <p:spPr>
           <a:xfrm>
-            <a:off x="731520" y="3346704"/>
-            <a:ext cx="27432" cy="896112"/>
+            <a:off x="6199632" y="1444752"/>
+            <a:ext cx="2523744" cy="36576"/>
           </a:xfrm>
           <a:prstGeom prst="rect">
             <a:avLst/>
@@ -8737,8 +8197,8 @@
         </p:nvSpPr>
         <p:spPr>
           <a:xfrm>
-            <a:off x="914400" y="3419856"/>
-            <a:ext cx="6583680" cy="749808"/>
+            <a:off x="6336792" y="1609344"/>
+            <a:ext cx="2249424" cy="2148840"/>
           </a:xfrm>
           <a:prstGeom prst="rect">
             <a:avLst/>
@@ -8752,23 +8212,15 @@
           <a:lstStyle/>
           <a:p>
             <a:pPr>
-              <a:defRPr sz="1000" b="1">
-                <a:solidFill>
-                  <a:srgbClr val="38BDF8"/>
-                </a:solidFill>
-                <a:latin typeface="Segoe UI"/>
-              </a:defRPr>
-            </a:pPr>
-            <a:r>
-              <a:t>The Logistics Director: </a:t>
-            </a:r>
-            <a:r>
-              <a:rPr b="0" i="1">
+              <a:defRPr sz="3800" b="1">
                 <a:solidFill>
                   <a:srgbClr val="FFFFFF"/>
                 </a:solidFill>
-              </a:rPr>
-              <a:t>"How do I prove to executive leadership that we are actually breaking less freight?"</a:t>
+                <a:latin typeface="Segoe UI"/>
+              </a:defRPr>
+            </a:pPr>
+            <a:r>
+              <a:t>89%</a:t>
             </a:r>
           </a:p>
           <a:p>
@@ -8776,7 +8228,23 @@
               <a:spcBef>
                 <a:spcPts val="300"/>
               </a:spcBef>
-              <a:defRPr sz="880">
+              <a:defRPr sz="1400" b="1">
+                <a:solidFill>
+                  <a:srgbClr val="38BDF8"/>
+                </a:solidFill>
+                <a:latin typeface="Segoe UI"/>
+              </a:defRPr>
+            </a:pPr>
+            <a:r>
+              <a:t>UNREPORTED DROPS</a:t>
+            </a:r>
+          </a:p>
+          <a:p>
+            <a:pPr>
+              <a:spcBef>
+                <a:spcPts val="600"/>
+              </a:spcBef>
+              <a:defRPr sz="1350">
                 <a:solidFill>
                   <a:srgbClr val="CBD5E1"/>
                 </a:solidFill>
@@ -8784,7 +8252,7 @@
               </a:defRPr>
             </a:pPr>
             <a:r>
-              <a:t>→ Iteration Implemented: Designed real-time KPI stat cards and a 7-day risk trend chart showing the 95.8% damage-free handling rate.</a:t>
+              <a:t>Intercepted 8 of 9 physical drop incidents never logged by workers.</a:t>
             </a:r>
           </a:p>
         </p:txBody>
@@ -8797,8 +8265,8 @@
         </p:nvSpPr>
         <p:spPr>
           <a:xfrm>
-            <a:off x="731520" y="4334256"/>
-            <a:ext cx="6858000" cy="896112"/>
+            <a:off x="8933688" y="1444752"/>
+            <a:ext cx="2523744" cy="2423160"/>
           </a:xfrm>
           <a:prstGeom prst="rect">
             <a:avLst/>
@@ -8842,8 +8310,8 @@
         </p:nvSpPr>
         <p:spPr>
           <a:xfrm>
-            <a:off x="731520" y="4334256"/>
-            <a:ext cx="27432" cy="896112"/>
+            <a:off x="8933688" y="1444752"/>
+            <a:ext cx="2523744" cy="36576"/>
           </a:xfrm>
           <a:prstGeom prst="rect">
             <a:avLst/>
@@ -8885,8 +8353,8 @@
         </p:nvSpPr>
         <p:spPr>
           <a:xfrm>
-            <a:off x="914400" y="4407408"/>
-            <a:ext cx="6583680" cy="749808"/>
+            <a:off x="9070848" y="1609344"/>
+            <a:ext cx="2249424" cy="2148840"/>
           </a:xfrm>
           <a:prstGeom prst="rect">
             <a:avLst/>
@@ -8900,23 +8368,15 @@
           <a:lstStyle/>
           <a:p>
             <a:pPr>
-              <a:defRPr sz="1000" b="1">
-                <a:solidFill>
-                  <a:srgbClr val="38BDF8"/>
-                </a:solidFill>
-                <a:latin typeface="Segoe UI"/>
-              </a:defRPr>
-            </a:pPr>
-            <a:r>
-              <a:t>The Quality Auditor: </a:t>
-            </a:r>
-            <a:r>
-              <a:rPr b="0" i="1">
+              <a:defRPr sz="3800" b="1">
                 <a:solidFill>
                   <a:srgbClr val="FFFFFF"/>
                 </a:solidFill>
-              </a:rPr>
-              <a:t>"Carriers always blame the warehouse for cracked goods discovered at destination."</a:t>
+                <a:latin typeface="Segoe UI"/>
+              </a:defRPr>
+            </a:pPr>
+            <a:r>
+              <a:t>100%</a:t>
             </a:r>
           </a:p>
           <a:p>
@@ -8924,7 +8384,23 @@
               <a:spcBef>
                 <a:spcPts val="300"/>
               </a:spcBef>
-              <a:defRPr sz="880">
+              <a:defRPr sz="1400" b="1">
+                <a:solidFill>
+                  <a:srgbClr val="38BDF8"/>
+                </a:solidFill>
+                <a:latin typeface="Segoe UI"/>
+              </a:defRPr>
+            </a:pPr>
+            <a:r>
+              <a:t>AUDIT PROOF</a:t>
+            </a:r>
+          </a:p>
+          <a:p>
+            <a:pPr>
+              <a:spcBef>
+                <a:spcPts val="600"/>
+              </a:spcBef>
+              <a:defRPr sz="1350">
                 <a:solidFill>
                   <a:srgbClr val="CBD5E1"/>
                 </a:solidFill>
@@ -8932,7 +8408,7 @@
               </a:defRPr>
             </a:pPr>
             <a:r>
-              <a:t>→ Iteration Implemented: Saved tamper-evident video clips showing exact time, bay number, and drop height to eliminate liability debates.</a:t>
+              <a:t>Timestamped video clips eliminate carrier-versus-warehouse liability disputes.</a:t>
             </a:r>
           </a:p>
         </p:txBody>
@@ -8945,8 +8421,8 @@
         </p:nvSpPr>
         <p:spPr>
           <a:xfrm>
-            <a:off x="731520" y="5321808"/>
-            <a:ext cx="6858000" cy="896112"/>
+            <a:off x="731520" y="4069080"/>
+            <a:ext cx="3429000" cy="2057400"/>
           </a:xfrm>
           <a:prstGeom prst="rect">
             <a:avLst/>
@@ -8990,14 +8466,14 @@
         </p:nvSpPr>
         <p:spPr>
           <a:xfrm>
-            <a:off x="731520" y="5321808"/>
-            <a:ext cx="27432" cy="896112"/>
+            <a:off x="731520" y="4069080"/>
+            <a:ext cx="36576" cy="2057400"/>
           </a:xfrm>
           <a:prstGeom prst="rect">
             <a:avLst/>
           </a:prstGeom>
           <a:solidFill>
-            <a:srgbClr val="38BDF8"/>
+            <a:srgbClr val="7DD3FC"/>
           </a:solidFill>
           <a:ln>
             <a:noFill/>
@@ -9033,8 +8509,8 @@
         </p:nvSpPr>
         <p:spPr>
           <a:xfrm>
-            <a:off x="914400" y="5394960"/>
-            <a:ext cx="6583680" cy="749808"/>
+            <a:off x="896112" y="4206240"/>
+            <a:ext cx="3154680" cy="1783080"/>
           </a:xfrm>
           <a:prstGeom prst="rect">
             <a:avLst/>
@@ -9048,7 +8524,7 @@
           <a:lstStyle/>
           <a:p>
             <a:pPr>
-              <a:defRPr sz="1000" b="1">
+              <a:defRPr sz="1500" b="1">
                 <a:solidFill>
                   <a:srgbClr val="38BDF8"/>
                 </a:solidFill>
@@ -9056,31 +8532,39 @@
               </a:defRPr>
             </a:pPr>
             <a:r>
-              <a:t>The Safety Compliance Officer: </a:t>
-            </a:r>
-            <a:r>
-              <a:rPr b="0" i="1">
+              <a:t>SHIFT SUPERVISOR</a:t>
+            </a:r>
+          </a:p>
+          <a:p>
+            <a:pPr>
+              <a:spcBef>
+                <a:spcPts val="400"/>
+              </a:spcBef>
+              <a:defRPr sz="1400" i="1">
                 <a:solidFill>
                   <a:srgbClr val="FFFFFF"/>
                 </a:solidFill>
-              </a:rPr>
-              <a:t>"Workers repeatedly drag heavy goods over wet surfaces causing ergonomic injury."</a:t>
+                <a:latin typeface="Segoe UI"/>
+              </a:defRPr>
+            </a:pPr>
+            <a:r>
+              <a:t>"I can't watch hours of CCTV while running across 6 active bays."</a:t>
             </a:r>
           </a:p>
           <a:p>
             <a:pPr>
               <a:spcBef>
-                <a:spcPts val="300"/>
+                <a:spcPts val="500"/>
               </a:spcBef>
-              <a:defRPr sz="880">
-                <a:solidFill>
-                  <a:srgbClr val="CBD5E1"/>
-                </a:solidFill>
-                <a:latin typeface="Segoe UI"/>
-              </a:defRPr>
-            </a:pPr>
-            <a:r>
-              <a:t>→ Iteration Implemented: Added spatial wet-zone detection and automatic heavy carton weight warnings.</a:t>
+              <a:defRPr sz="1300">
+                <a:solidFill>
+                  <a:srgbClr val="E2E8F0"/>
+                </a:solidFill>
+                <a:latin typeface="Segoe UI"/>
+              </a:defRPr>
+            </a:pPr>
+            <a:r>
+              <a:t>→ Solution: 1-click 5-second replay with pre-buffered impact markers.</a:t>
             </a:r>
           </a:p>
         </p:txBody>
@@ -9093,8 +8577,8 @@
         </p:nvSpPr>
         <p:spPr>
           <a:xfrm>
-            <a:off x="7818120" y="1371600"/>
-            <a:ext cx="3642055" cy="4846320"/>
+            <a:off x="4379976" y="4069080"/>
+            <a:ext cx="3429000" cy="2057400"/>
           </a:xfrm>
           <a:prstGeom prst="rect">
             <a:avLst/>
@@ -9138,14 +8622,14 @@
         </p:nvSpPr>
         <p:spPr>
           <a:xfrm>
-            <a:off x="7818120" y="1371600"/>
-            <a:ext cx="3642055" cy="27432"/>
+            <a:off x="4379976" y="4069080"/>
+            <a:ext cx="36576" cy="2057400"/>
           </a:xfrm>
           <a:prstGeom prst="rect">
             <a:avLst/>
           </a:prstGeom>
           <a:solidFill>
-            <a:srgbClr val="38BDF8"/>
+            <a:srgbClr val="7DD3FC"/>
           </a:solidFill>
           <a:ln>
             <a:noFill/>
@@ -9181,8 +8665,8 @@
         </p:nvSpPr>
         <p:spPr>
           <a:xfrm>
-            <a:off x="8019288" y="1508760"/>
-            <a:ext cx="3239719" cy="4572000"/>
+            <a:off x="4544568" y="4206240"/>
+            <a:ext cx="3154680" cy="1783080"/>
           </a:xfrm>
           <a:prstGeom prst="rect">
             <a:avLst/>
@@ -9196,7 +8680,7 @@
           <a:lstStyle/>
           <a:p>
             <a:pPr>
-              <a:defRPr sz="1050" b="1">
+              <a:defRPr sz="1500" b="1">
                 <a:solidFill>
                   <a:srgbClr val="38BDF8"/>
                 </a:solidFill>
@@ -9204,15 +8688,15 @@
               </a:defRPr>
             </a:pPr>
             <a:r>
-              <a:t>MEASURED PROTOTYPE RESULTS</a:t>
+              <a:t>DOCK LOADER</a:t>
             </a:r>
           </a:p>
           <a:p>
             <a:pPr>
               <a:spcBef>
-                <a:spcPts val="800"/>
+                <a:spcPts val="400"/>
               </a:spcBef>
-              <a:defRPr sz="1300" b="1">
+              <a:defRPr sz="1400" i="1">
                 <a:solidFill>
                   <a:srgbClr val="FFFFFF"/>
                 </a:solidFill>
@@ -9220,151 +8704,23 @@
               </a:defRPr>
             </a:pPr>
             <a:r>
-              <a:t>&lt; 1.5s • </a:t>
-            </a:r>
-            <a:r>
-              <a:rPr sz="950" b="1">
-                <a:solidFill>
-                  <a:srgbClr val="38BDF8"/>
-                </a:solidFill>
-              </a:rPr>
-              <a:t>Detection-to-Chime Latency</a:t>
+              <a:t>"Your first alarm sounded like a fire siren. It made everyone defensive."</a:t>
             </a:r>
           </a:p>
           <a:p>
             <a:pPr>
               <a:spcBef>
-                <a:spcPts val="200"/>
+                <a:spcPts val="500"/>
               </a:spcBef>
-              <a:defRPr sz="850">
-                <a:solidFill>
-                  <a:srgbClr val="CBD5E1"/>
-                </a:solidFill>
-                <a:latin typeface="Segoe UI"/>
-              </a:defRPr>
-            </a:pPr>
-            <a:r>
-              <a:t>Sub-second CV inference flags drops and issues audio alerts before cartons can be covered up or loaded deep into trailers.</a:t>
-            </a:r>
-          </a:p>
-          <a:p>
-            <a:pPr>
-              <a:spcBef>
-                <a:spcPts val="800"/>
-              </a:spcBef>
-              <a:defRPr sz="1300" b="1">
-                <a:solidFill>
-                  <a:srgbClr val="FFFFFF"/>
-                </a:solidFill>
-                <a:latin typeface="Segoe UI"/>
-              </a:defRPr>
-            </a:pPr>
-            <a:r>
-              <a:t>30m -&gt; 1m • </a:t>
-            </a:r>
-            <a:r>
-              <a:rPr sz="950" b="1">
-                <a:solidFill>
-                  <a:srgbClr val="38BDF8"/>
-                </a:solidFill>
-              </a:rPr>
-              <a:t>Incident Verification Speed</a:t>
-            </a:r>
-          </a:p>
-          <a:p>
-            <a:pPr>
-              <a:spcBef>
-                <a:spcPts val="200"/>
-              </a:spcBef>
-              <a:defRPr sz="850">
-                <a:solidFill>
-                  <a:srgbClr val="CBD5E1"/>
-                </a:solidFill>
-                <a:latin typeface="Segoe UI"/>
-              </a:defRPr>
-            </a:pPr>
-            <a:r>
-              <a:t>Supervisors access pre-buffered 5s clips in under 60 seconds, eliminating half-hour searches through manual DVR recordings.</a:t>
-            </a:r>
-          </a:p>
-          <a:p>
-            <a:pPr>
-              <a:spcBef>
-                <a:spcPts val="800"/>
-              </a:spcBef>
-              <a:defRPr sz="1300" b="1">
-                <a:solidFill>
-                  <a:srgbClr val="FFFFFF"/>
-                </a:solidFill>
-                <a:latin typeface="Segoe UI"/>
-              </a:defRPr>
-            </a:pPr>
-            <a:r>
-              <a:t>89% (8/9) • </a:t>
-            </a:r>
-            <a:r>
-              <a:rPr sz="950" b="1">
-                <a:solidFill>
-                  <a:srgbClr val="38BDF8"/>
-                </a:solidFill>
-              </a:rPr>
-              <a:t>Unreported Drops Captured</a:t>
-            </a:r>
-          </a:p>
-          <a:p>
-            <a:pPr>
-              <a:spcBef>
-                <a:spcPts val="200"/>
-              </a:spcBef>
-              <a:defRPr sz="850">
-                <a:solidFill>
-                  <a:srgbClr val="CBD5E1"/>
-                </a:solidFill>
-                <a:latin typeface="Segoe UI"/>
-              </a:defRPr>
-            </a:pPr>
-            <a:r>
-              <a:t>In blind test video runs, the vision pipeline intercepted 8 of 9 physical drop incidents that workers never logged manually.</a:t>
-            </a:r>
-          </a:p>
-          <a:p>
-            <a:pPr>
-              <a:spcBef>
-                <a:spcPts val="800"/>
-              </a:spcBef>
-              <a:defRPr sz="1300" b="1">
-                <a:solidFill>
-                  <a:srgbClr val="FFFFFF"/>
-                </a:solidFill>
-                <a:latin typeface="Segoe UI"/>
-              </a:defRPr>
-            </a:pPr>
-            <a:r>
-              <a:t>100% • </a:t>
-            </a:r>
-            <a:r>
-              <a:rPr sz="950" b="1">
-                <a:solidFill>
-                  <a:srgbClr val="38BDF8"/>
-                </a:solidFill>
-              </a:rPr>
-              <a:t>Liability Audit Proof</a:t>
-            </a:r>
-          </a:p>
-          <a:p>
-            <a:pPr>
-              <a:spcBef>
-                <a:spcPts val="200"/>
-              </a:spcBef>
-              <a:defRPr sz="850">
-                <a:solidFill>
-                  <a:srgbClr val="CBD5E1"/>
-                </a:solidFill>
-                <a:latin typeface="Segoe UI"/>
-              </a:defRPr>
-            </a:pPr>
-            <a:r>
-              <a:t>Timestamped clips with measured impact velocity resolve carrier-versus-warehouse liability disputes instantly.</a:t>
+              <a:defRPr sz="1300">
+                <a:solidFill>
+                  <a:srgbClr val="E2E8F0"/>
+                </a:solidFill>
+                <a:latin typeface="Segoe UI"/>
+              </a:defRPr>
+            </a:pPr>
+            <a:r>
+              <a:t>→ Solution: Gentle microwave dock chime and coaching for 2-person lifts.</a:t>
             </a:r>
           </a:p>
         </p:txBody>
@@ -9377,17 +8733,19 @@
         </p:nvSpPr>
         <p:spPr>
           <a:xfrm>
-            <a:off x="731520" y="6492240"/>
-            <a:ext cx="10728655" cy="13716"/>
+            <a:off x="8028432" y="4069080"/>
+            <a:ext cx="3429000" cy="2057400"/>
           </a:xfrm>
           <a:prstGeom prst="rect">
             <a:avLst/>
           </a:prstGeom>
           <a:solidFill>
-            <a:srgbClr val="1C3E66"/>
+            <a:srgbClr val="0A192E"/>
           </a:solidFill>
-          <a:ln>
-            <a:noFill/>
+          <a:ln w="12700">
+            <a:solidFill>
+              <a:srgbClr val="1C3E66"/>
+            </a:solidFill>
           </a:ln>
         </p:spPr>
         <p:style>
@@ -9414,14 +8772,57 @@
       </p:sp>
       <p:sp>
         <p:nvSpPr>
-          <p:cNvPr id="24" name="TextBox 23"/>
+          <p:cNvPr id="24" name="Rectangle 23"/>
+          <p:cNvSpPr/>
+          <p:nvPr/>
+        </p:nvSpPr>
+        <p:spPr>
+          <a:xfrm>
+            <a:off x="8028432" y="4069080"/>
+            <a:ext cx="36576" cy="2057400"/>
+          </a:xfrm>
+          <a:prstGeom prst="rect">
+            <a:avLst/>
+          </a:prstGeom>
+          <a:solidFill>
+            <a:srgbClr val="7DD3FC"/>
+          </a:solidFill>
+          <a:ln>
+            <a:noFill/>
+          </a:ln>
+        </p:spPr>
+        <p:style>
+          <a:lnRef idx="1">
+            <a:schemeClr val="accent1"/>
+          </a:lnRef>
+          <a:fillRef idx="3">
+            <a:schemeClr val="accent1"/>
+          </a:fillRef>
+          <a:effectRef idx="2">
+            <a:schemeClr val="accent1"/>
+          </a:effectRef>
+          <a:fontRef idx="minor">
+            <a:schemeClr val="lt1"/>
+          </a:fontRef>
+        </p:style>
+        <p:txBody>
+          <a:bodyPr rtlCol="0" anchor="ctr"/>
+          <a:lstStyle/>
+          <a:p>
+            <a:pPr algn="ctr"/>
+          </a:p>
+        </p:txBody>
+      </p:sp>
+      <p:sp>
+        <p:nvSpPr>
+          <p:cNvPr id="25" name="TextBox 24"/>
           <p:cNvSpPr txBox="1"/>
           <p:nvPr/>
         </p:nvSpPr>
         <p:spPr>
           <a:xfrm>
-            <a:off x="731520" y="6537960"/>
-            <a:ext cx="10728655" cy="228600"/>
+            <a:off x="8193024" y="4206240"/>
+            <a:ext cx="3154680" cy="1783080"/>
           </a:xfrm>
           <a:prstGeom prst="rect">
             <a:avLst/>
@@ -9429,21 +8830,53 @@
           <a:noFill/>
         </p:spPr>
         <p:txBody>
-          <a:bodyPr wrap="none" lIns="0" tIns="0" rIns="0" bIns="0">
+          <a:bodyPr wrap="square" lIns="0" tIns="0" rIns="0" bIns="0">
             <a:spAutoFit/>
           </a:bodyPr>
           <a:lstStyle/>
           <a:p>
             <a:pPr>
-              <a:defRPr sz="850">
-                <a:solidFill>
-                  <a:srgbClr val="94A3B8"/>
-                </a:solidFill>
-                <a:latin typeface="Segoe UI"/>
-              </a:defRPr>
-            </a:pPr>
-            <a:r>
-              <a:t>DockGuard AI  •  User Validation, Real Operational Feedback &amp; Metrics  •  Slide 5 of 6</a:t>
+              <a:defRPr sz="1500" b="1">
+                <a:solidFill>
+                  <a:srgbClr val="38BDF8"/>
+                </a:solidFill>
+                <a:latin typeface="Segoe UI"/>
+              </a:defRPr>
+            </a:pPr>
+            <a:r>
+              <a:t>LOGISTICS DIRECTOR</a:t>
+            </a:r>
+          </a:p>
+          <a:p>
+            <a:pPr>
+              <a:spcBef>
+                <a:spcPts val="400"/>
+              </a:spcBef>
+              <a:defRPr sz="1400" i="1">
+                <a:solidFill>
+                  <a:srgbClr val="FFFFFF"/>
+                </a:solidFill>
+                <a:latin typeface="Segoe UI"/>
+              </a:defRPr>
+            </a:pPr>
+            <a:r>
+              <a:t>"Carriers blame us for damaged goods discovered at destination."</a:t>
+            </a:r>
+          </a:p>
+          <a:p>
+            <a:pPr>
+              <a:spcBef>
+                <a:spcPts val="500"/>
+              </a:spcBef>
+              <a:defRPr sz="1300">
+                <a:solidFill>
+                  <a:srgbClr val="E2E8F0"/>
+                </a:solidFill>
+                <a:latin typeface="Segoe UI"/>
+              </a:defRPr>
+            </a:pPr>
+            <a:r>
+              <a:t>→ Solution: Tamper-evident video logs with velocity data end blame games.</a:t>
             </a:r>
           </a:p>
         </p:txBody>
@@ -9497,7 +8930,7 @@
         <p:spPr>
           <a:xfrm>
             <a:off x="731520" y="384048"/>
-            <a:ext cx="6400800" cy="274320"/>
+            <a:ext cx="5943600" cy="274320"/>
           </a:xfrm>
           <a:prstGeom prst="rect">
             <a:avLst/>
@@ -9511,7 +8944,7 @@
           <a:lstStyle/>
           <a:p>
             <a:pPr>
-              <a:defRPr sz="950" b="1">
+              <a:defRPr sz="1350" b="1">
                 <a:solidFill>
                   <a:srgbClr val="38BDF8"/>
                 </a:solidFill>
@@ -9519,7 +8952,7 @@
               </a:defRPr>
             </a:pPr>
             <a:r>
-              <a:t>06  /  CONCLUSION &amp; ROADMAP</a:t>
+              <a:t>06  /  CONCLUSION &amp; ENTERPRISE ROADMAP</a:t>
             </a:r>
           </a:p>
         </p:txBody>
@@ -9547,7 +8980,7 @@
           <a:lstStyle/>
           <a:p>
             <a:pPr>
-              <a:defRPr sz="2200" b="1">
+              <a:defRPr sz="2900" b="1">
                 <a:solidFill>
                   <a:srgbClr val="FFFFFF"/>
                 </a:solidFill>
@@ -9555,7 +8988,7 @@
               </a:defRPr>
             </a:pPr>
             <a:r>
-              <a:t>The Honest Reality: Current Capabilities, Engineering Constraints &amp; What's Next</a:t>
+              <a:t>Roadmap: Proven Today, Constraints &amp; What's Next</a:t>
             </a:r>
           </a:p>
         </p:txBody>
@@ -9568,7 +9001,7 @@
         </p:nvSpPr>
         <p:spPr>
           <a:xfrm>
-            <a:off x="731520" y="1243584"/>
+            <a:off x="731520" y="1234440"/>
             <a:ext cx="10728655" cy="13716"/>
           </a:xfrm>
           <a:prstGeom prst="rect">
@@ -9611,8 +9044,8 @@
         </p:nvSpPr>
         <p:spPr>
           <a:xfrm>
-            <a:off x="731520" y="1417320"/>
-            <a:ext cx="3364992" cy="4343400"/>
+            <a:off x="731520" y="1444752"/>
+            <a:ext cx="3364992" cy="4005072"/>
           </a:xfrm>
           <a:prstGeom prst="rect">
             <a:avLst/>
@@ -9656,8 +9089,8 @@
         </p:nvSpPr>
         <p:spPr>
           <a:xfrm>
-            <a:off x="731520" y="1417320"/>
-            <a:ext cx="3364992" cy="32004"/>
+            <a:off x="731520" y="1444752"/>
+            <a:ext cx="3364992" cy="36576"/>
           </a:xfrm>
           <a:prstGeom prst="rect">
             <a:avLst/>
@@ -9699,8 +9132,8 @@
         </p:nvSpPr>
         <p:spPr>
           <a:xfrm>
-            <a:off x="932688" y="1581912"/>
-            <a:ext cx="2962656" cy="4023360"/>
+            <a:off x="914400" y="1609344"/>
+            <a:ext cx="2999232" cy="3685032"/>
           </a:xfrm>
           <a:prstGeom prst="rect">
             <a:avLst/>
@@ -9714,7 +9147,7 @@
           <a:lstStyle/>
           <a:p>
             <a:pPr>
-              <a:defRPr sz="950" b="1">
+              <a:defRPr sz="1550" b="1">
                 <a:solidFill>
                   <a:srgbClr val="94A3B8"/>
                 </a:solidFill>
@@ -9722,7 +9155,7 @@
               </a:defRPr>
             </a:pPr>
             <a:r>
-              <a:t>01  —  WHAT'S WORKING TODAY</a:t>
+              <a:t>01  —  NOW</a:t>
             </a:r>
           </a:p>
           <a:p>
@@ -9730,7 +9163,7 @@
               <a:spcBef>
                 <a:spcPts val="300"/>
               </a:spcBef>
-              <a:defRPr sz="1200" b="1">
+              <a:defRPr sz="1850" b="1">
                 <a:solidFill>
                   <a:srgbClr val="FFFFFF"/>
                 </a:solidFill>
@@ -9738,23 +9171,7 @@
               </a:defRPr>
             </a:pPr>
             <a:r>
-              <a:t>PROVEN CAPABILITIES</a:t>
-            </a:r>
-          </a:p>
-          <a:p>
-            <a:pPr>
-              <a:spcBef>
-                <a:spcPts val="200"/>
-              </a:spcBef>
-              <a:defRPr sz="600">
-                <a:solidFill>
-                  <a:srgbClr val="1C3E66"/>
-                </a:solidFill>
-                <a:latin typeface="Segoe UI"/>
-              </a:defRPr>
-            </a:pPr>
-            <a:r>
-              <a:t>————————————————————————————</a:t>
+              <a:t>PROVEN TODAY</a:t>
             </a:r>
           </a:p>
           <a:p>
@@ -9762,7 +9179,7 @@
               <a:spcBef>
                 <a:spcPts val="700"/>
               </a:spcBef>
-              <a:defRPr sz="919" b="1">
+              <a:defRPr sz="1450" b="1">
                 <a:solidFill>
                   <a:srgbClr val="FFFFFF"/>
                 </a:solidFill>
@@ -9770,15 +9187,23 @@
               </a:defRPr>
             </a:pPr>
             <a:r>
-              <a:t>• Live Full-Stack Cloud App: </a:t>
-            </a:r>
-            <a:r>
-              <a:rPr b="0">
+              <a:t>• Live Full-Stack Cloud App</a:t>
+            </a:r>
+          </a:p>
+          <a:p>
+            <a:pPr>
+              <a:spcBef>
+                <a:spcPts val="100"/>
+              </a:spcBef>
+              <a:defRPr sz="1250">
                 <a:solidFill>
                   <a:srgbClr val="CBD5E1"/>
                 </a:solidFill>
-              </a:rPr>
-              <a:t>Hosted online 24/7 on Render with working frontend, FastAPI backend, and SQLite telemetry database.</a:t>
+                <a:latin typeface="Segoe UI"/>
+              </a:defRPr>
+            </a:pPr>
+            <a:r>
+              <a:t>  Hosted 24/7 on Render (React + FastAPI + SQLite).</a:t>
             </a:r>
           </a:p>
           <a:p>
@@ -9786,7 +9211,7 @@
               <a:spcBef>
                 <a:spcPts val="700"/>
               </a:spcBef>
-              <a:defRPr sz="919" b="1">
+              <a:defRPr sz="1450" b="1">
                 <a:solidFill>
                   <a:srgbClr val="FFFFFF"/>
                 </a:solidFill>
@@ -9794,15 +9219,23 @@
               </a:defRPr>
             </a:pPr>
             <a:r>
-              <a:t>• Real Video Analysis: </a:t>
-            </a:r>
-            <a:r>
-              <a:rPr b="0">
+              <a:t>• YOLOv8 Video Inference</a:t>
+            </a:r>
+          </a:p>
+          <a:p>
+            <a:pPr>
+              <a:spcBef>
+                <a:spcPts val="100"/>
+              </a:spcBef>
+              <a:defRPr sz="1250">
                 <a:solidFill>
                   <a:srgbClr val="CBD5E1"/>
                 </a:solidFill>
-              </a:rPr>
-              <a:t>Processes uploaded CCTV footage, draws accurate bounding boxes, and flags drops and dragging.</a:t>
+                <a:latin typeface="Segoe UI"/>
+              </a:defRPr>
+            </a:pPr>
+            <a:r>
+              <a:t>  Accurately detects cartons, pallets &amp; drops in CCTV.</a:t>
             </a:r>
           </a:p>
           <a:p>
@@ -9810,7 +9243,7 @@
               <a:spcBef>
                 <a:spcPts val="700"/>
               </a:spcBef>
-              <a:defRPr sz="919" b="1">
+              <a:defRPr sz="1450" b="1">
                 <a:solidFill>
                   <a:srgbClr val="FFFFFF"/>
                 </a:solidFill>
@@ -9818,15 +9251,23 @@
               </a:defRPr>
             </a:pPr>
             <a:r>
-              <a:t>• Dashboard &amp; Audio Chimes: </a:t>
-            </a:r>
-            <a:r>
-              <a:rPr b="0">
+              <a:t>• Real-Time Sound Chimes</a:t>
+            </a:r>
+          </a:p>
+          <a:p>
+            <a:pPr>
+              <a:spcBef>
+                <a:spcPts val="100"/>
+              </a:spcBef>
+              <a:defRPr sz="1250">
                 <a:solidFill>
                   <a:srgbClr val="CBD5E1"/>
                 </a:solidFill>
-              </a:rPr>
-              <a:t>Real-time KPI cards, 7-day risk trend curves, and zero-latency in-browser Web Audio chimes.</a:t>
+                <a:latin typeface="Segoe UI"/>
+              </a:defRPr>
+            </a:pPr>
+            <a:r>
+              <a:t>  Zero-latency synthetic browser dock alerts.</a:t>
             </a:r>
           </a:p>
           <a:p>
@@ -9834,7 +9275,7 @@
               <a:spcBef>
                 <a:spcPts val="700"/>
               </a:spcBef>
-              <a:defRPr sz="919" b="1">
+              <a:defRPr sz="1450" b="1">
                 <a:solidFill>
                   <a:srgbClr val="FFFFFF"/>
                 </a:solidFill>
@@ -9842,15 +9283,23 @@
               </a:defRPr>
             </a:pPr>
             <a:r>
-              <a:t>• Gemini Conversational RAG: </a:t>
-            </a:r>
-            <a:r>
-              <a:rPr b="0">
+              <a:t>• Gemini 2.5 Flash RAG</a:t>
+            </a:r>
+          </a:p>
+          <a:p>
+            <a:pPr>
+              <a:spcBef>
+                <a:spcPts val="100"/>
+              </a:spcBef>
+              <a:defRPr sz="1250">
                 <a:solidFill>
                   <a:srgbClr val="CBD5E1"/>
                 </a:solidFill>
-              </a:rPr>
-              <a:t>Accurately answers natural language supervisor questions using live database records.</a:t>
+                <a:latin typeface="Segoe UI"/>
+              </a:defRPr>
+            </a:pPr>
+            <a:r>
+              <a:t>  Answers natural language queries using real logs.</a:t>
             </a:r>
           </a:p>
         </p:txBody>
@@ -9863,8 +9312,8 @@
         </p:nvSpPr>
         <p:spPr>
           <a:xfrm>
-            <a:off x="4169664" y="3429000"/>
-            <a:ext cx="182880" cy="365760"/>
+            <a:off x="4169664" y="3090672"/>
+            <a:ext cx="182880" cy="457200"/>
           </a:xfrm>
           <a:prstGeom prst="rect">
             <a:avLst/>
@@ -9878,7 +9327,7 @@
           <a:lstStyle/>
           <a:p>
             <a:pPr algn="ctr">
-              <a:defRPr sz="1600" b="1">
+              <a:defRPr sz="2400" b="1">
                 <a:solidFill>
                   <a:srgbClr val="38BDF8"/>
                 </a:solidFill>
@@ -9899,8 +9348,8 @@
         </p:nvSpPr>
         <p:spPr>
           <a:xfrm>
-            <a:off x="4407408" y="1417320"/>
-            <a:ext cx="3364992" cy="4343400"/>
+            <a:off x="4407408" y="1444752"/>
+            <a:ext cx="3364992" cy="4005072"/>
           </a:xfrm>
           <a:prstGeom prst="rect">
             <a:avLst/>
@@ -9944,8 +9393,8 @@
         </p:nvSpPr>
         <p:spPr>
           <a:xfrm>
-            <a:off x="4407408" y="1417320"/>
-            <a:ext cx="3364992" cy="32004"/>
+            <a:off x="4407408" y="1444752"/>
+            <a:ext cx="3364992" cy="36576"/>
           </a:xfrm>
           <a:prstGeom prst="rect">
             <a:avLst/>
@@ -9987,8 +9436,8 @@
         </p:nvSpPr>
         <p:spPr>
           <a:xfrm>
-            <a:off x="4608576" y="1581912"/>
-            <a:ext cx="2962656" cy="4023360"/>
+            <a:off x="4590288" y="1609344"/>
+            <a:ext cx="2999232" cy="3685032"/>
           </a:xfrm>
           <a:prstGeom prst="rect">
             <a:avLst/>
@@ -10002,7 +9451,7 @@
           <a:lstStyle/>
           <a:p>
             <a:pPr>
-              <a:defRPr sz="950" b="1">
+              <a:defRPr sz="1550" b="1">
                 <a:solidFill>
                   <a:srgbClr val="94A3B8"/>
                 </a:solidFill>
@@ -10010,7 +9459,7 @@
               </a:defRPr>
             </a:pPr>
             <a:r>
-              <a:t>02  —  CURRENT LIMITATIONS</a:t>
+              <a:t>02  —  BOTTLENECK</a:t>
             </a:r>
           </a:p>
           <a:p>
@@ -10018,7 +9467,7 @@
               <a:spcBef>
                 <a:spcPts val="300"/>
               </a:spcBef>
-              <a:defRPr sz="1200" b="1">
+              <a:defRPr sz="1850" b="1">
                 <a:solidFill>
                   <a:srgbClr val="94A3B8"/>
                 </a:solidFill>
@@ -10027,22 +9476,6 @@
             </a:pPr>
             <a:r>
               <a:t>HONEST CONSTRAINTS</a:t>
-            </a:r>
-          </a:p>
-          <a:p>
-            <a:pPr>
-              <a:spcBef>
-                <a:spcPts val="200"/>
-              </a:spcBef>
-              <a:defRPr sz="600">
-                <a:solidFill>
-                  <a:srgbClr val="1C3E66"/>
-                </a:solidFill>
-                <a:latin typeface="Segoe UI"/>
-              </a:defRPr>
-            </a:pPr>
-            <a:r>
-              <a:t>————————————————————————————</a:t>
             </a:r>
           </a:p>
           <a:p>
@@ -10050,7 +9483,7 @@
               <a:spcBef>
                 <a:spcPts val="700"/>
               </a:spcBef>
-              <a:defRPr sz="919" b="1">
+              <a:defRPr sz="1450" b="1">
                 <a:solidFill>
                   <a:srgbClr val="FFFFFF"/>
                 </a:solidFill>
@@ -10058,15 +9491,23 @@
               </a:defRPr>
             </a:pPr>
             <a:r>
-              <a:t>• Cloud CPU Latency: </a:t>
-            </a:r>
-            <a:r>
-              <a:rPr b="0">
+              <a:t>• Cloud CPU Inference Latency</a:t>
+            </a:r>
+          </a:p>
+          <a:p>
+            <a:pPr>
+              <a:spcBef>
+                <a:spcPts val="100"/>
+              </a:spcBef>
+              <a:defRPr sz="1250">
                 <a:solidFill>
                   <a:srgbClr val="CBD5E1"/>
                 </a:solidFill>
-              </a:rPr>
-              <a:t>Running deep video inference on free-tier cloud CPUs takes 5–8 seconds per clip. A dedicated GPU will make it instantaneous.</a:t>
+                <a:latin typeface="Segoe UI"/>
+              </a:defRPr>
+            </a:pPr>
+            <a:r>
+              <a:t>  Takes 5–8s per clip on free-tier; needs edge GPU.</a:t>
             </a:r>
           </a:p>
           <a:p>
@@ -10074,7 +9515,7 @@
               <a:spcBef>
                 <a:spcPts val="700"/>
               </a:spcBef>
-              <a:defRPr sz="919" b="1">
+              <a:defRPr sz="1450" b="1">
                 <a:solidFill>
                   <a:srgbClr val="FFFFFF"/>
                 </a:solidFill>
@@ -10082,15 +9523,23 @@
               </a:defRPr>
             </a:pPr>
             <a:r>
-              <a:t>• Heavy Crowding Occlusion: </a:t>
-            </a:r>
-            <a:r>
-              <a:rPr b="0">
+              <a:t>• Heavy Worker Crowding</a:t>
+            </a:r>
+          </a:p>
+          <a:p>
+            <a:pPr>
+              <a:spcBef>
+                <a:spcPts val="100"/>
+              </a:spcBef>
+              <a:defRPr sz="1250">
                 <a:solidFill>
                   <a:srgbClr val="CBD5E1"/>
                 </a:solidFill>
-              </a:rPr>
-              <a:t>When 3+ workers cluster tightly around a carton, bounding box tracking can temporarily lose continuity.</a:t>
+                <a:latin typeface="Segoe UI"/>
+              </a:defRPr>
+            </a:pPr>
+            <a:r>
+              <a:t>  Occlusion when 3+ workers cluster tightly over boxes.</a:t>
             </a:r>
           </a:p>
           <a:p>
@@ -10098,7 +9547,7 @@
               <a:spcBef>
                 <a:spcPts val="700"/>
               </a:spcBef>
-              <a:defRPr sz="919" b="1">
+              <a:defRPr sz="1450" b="1">
                 <a:solidFill>
                   <a:srgbClr val="FFFFFF"/>
                 </a:solidFill>
@@ -10106,15 +9555,23 @@
               </a:defRPr>
             </a:pPr>
             <a:r>
-              <a:t>• Morning Sunlight Glare: </a:t>
-            </a:r>
-            <a:r>
-              <a:rPr b="0">
+              <a:t>• Morning Sunlight Glare</a:t>
+            </a:r>
+          </a:p>
+          <a:p>
+            <a:pPr>
+              <a:spcBef>
+                <a:spcPts val="100"/>
+              </a:spcBef>
+              <a:defRPr sz="1250">
                 <a:solidFill>
                   <a:srgbClr val="CBD5E1"/>
                 </a:solidFill>
-              </a:rPr>
-              <a:t>Intense direct morning glare through open loading bay doors can slightly lower detection confidence.</a:t>
+                <a:latin typeface="Segoe UI"/>
+              </a:defRPr>
+            </a:pPr>
+            <a:r>
+              <a:t>  Direct sun through bay doors lowers box confidence.</a:t>
             </a:r>
           </a:p>
         </p:txBody>
@@ -10127,8 +9584,8 @@
         </p:nvSpPr>
         <p:spPr>
           <a:xfrm>
-            <a:off x="7845552" y="3429000"/>
-            <a:ext cx="182880" cy="365760"/>
+            <a:off x="7845552" y="3090672"/>
+            <a:ext cx="182880" cy="457200"/>
           </a:xfrm>
           <a:prstGeom prst="rect">
             <a:avLst/>
@@ -10142,7 +9599,7 @@
           <a:lstStyle/>
           <a:p>
             <a:pPr algn="ctr">
-              <a:defRPr sz="1600" b="1">
+              <a:defRPr sz="2400" b="1">
                 <a:solidFill>
                   <a:srgbClr val="38BDF8"/>
                 </a:solidFill>
@@ -10163,8 +9620,8 @@
         </p:nvSpPr>
         <p:spPr>
           <a:xfrm>
-            <a:off x="8083296" y="1417320"/>
-            <a:ext cx="3364992" cy="4343400"/>
+            <a:off x="8083296" y="1444752"/>
+            <a:ext cx="3364992" cy="4005072"/>
           </a:xfrm>
           <a:prstGeom prst="rect">
             <a:avLst/>
@@ -10208,8 +9665,8 @@
         </p:nvSpPr>
         <p:spPr>
           <a:xfrm>
-            <a:off x="8083296" y="1417320"/>
-            <a:ext cx="3364992" cy="32004"/>
+            <a:off x="8083296" y="1444752"/>
+            <a:ext cx="3364992" cy="36576"/>
           </a:xfrm>
           <a:prstGeom prst="rect">
             <a:avLst/>
@@ -10251,8 +9708,8 @@
         </p:nvSpPr>
         <p:spPr>
           <a:xfrm>
-            <a:off x="8284464" y="1581912"/>
-            <a:ext cx="2962656" cy="4023360"/>
+            <a:off x="8266176" y="1609344"/>
+            <a:ext cx="2999232" cy="3685032"/>
           </a:xfrm>
           <a:prstGeom prst="rect">
             <a:avLst/>
@@ -10266,7 +9723,7 @@
           <a:lstStyle/>
           <a:p>
             <a:pPr>
-              <a:defRPr sz="950" b="1">
+              <a:defRPr sz="1550" b="1">
                 <a:solidFill>
                   <a:srgbClr val="38BDF8"/>
                 </a:solidFill>
@@ -10274,7 +9731,7 @@
               </a:defRPr>
             </a:pPr>
             <a:r>
-              <a:t>03  —  WHAT'S NEXT</a:t>
+              <a:t>03  —  NEXT</a:t>
             </a:r>
           </a:p>
           <a:p>
@@ -10282,7 +9739,7 @@
               <a:spcBef>
                 <a:spcPts val="300"/>
               </a:spcBef>
-              <a:defRPr sz="1200" b="1">
+              <a:defRPr sz="1850" b="1">
                 <a:solidFill>
                   <a:srgbClr val="38BDF8"/>
                 </a:solidFill>
@@ -10291,22 +9748,6 @@
             </a:pPr>
             <a:r>
               <a:t>ENTERPRISE ROADMAP</a:t>
-            </a:r>
-          </a:p>
-          <a:p>
-            <a:pPr>
-              <a:spcBef>
-                <a:spcPts val="200"/>
-              </a:spcBef>
-              <a:defRPr sz="600">
-                <a:solidFill>
-                  <a:srgbClr val="1C3E66"/>
-                </a:solidFill>
-                <a:latin typeface="Segoe UI"/>
-              </a:defRPr>
-            </a:pPr>
-            <a:r>
-              <a:t>————————————————————————————</a:t>
             </a:r>
           </a:p>
           <a:p>
@@ -10314,7 +9755,7 @@
               <a:spcBef>
                 <a:spcPts val="700"/>
               </a:spcBef>
-              <a:defRPr sz="919" b="1">
+              <a:defRPr sz="1450" b="1">
                 <a:solidFill>
                   <a:srgbClr val="FFFFFF"/>
                 </a:solidFill>
@@ -10322,15 +9763,23 @@
               </a:defRPr>
             </a:pPr>
             <a:r>
-              <a:t>• Edge Hardware (NVIDIA Jetson): </a:t>
-            </a:r>
-            <a:r>
-              <a:rPr b="0">
+              <a:t>• NVIDIA Jetson Edge AI</a:t>
+            </a:r>
+          </a:p>
+          <a:p>
+            <a:pPr>
+              <a:spcBef>
+                <a:spcPts val="100"/>
+              </a:spcBef>
+              <a:defRPr sz="1250">
                 <a:solidFill>
                   <a:srgbClr val="CBD5E1"/>
                 </a:solidFill>
-              </a:rPr>
-              <a:t>Deploy localized TensorRT models on $150 dockside Jetson hardware for true &lt;50ms processing.</a:t>
+                <a:latin typeface="Segoe UI"/>
+              </a:defRPr>
+            </a:pPr>
+            <a:r>
+              <a:t>  Run localized TensorRT models on-dock for &lt;50ms speeds.</a:t>
             </a:r>
           </a:p>
           <a:p>
@@ -10338,7 +9787,7 @@
               <a:spcBef>
                 <a:spcPts val="700"/>
               </a:spcBef>
-              <a:defRPr sz="919" b="1">
+              <a:defRPr sz="1450" b="1">
                 <a:solidFill>
                   <a:srgbClr val="FFFFFF"/>
                 </a:solidFill>
@@ -10346,15 +9795,23 @@
               </a:defRPr>
             </a:pPr>
             <a:r>
-              <a:t>• Barcode Scanner Integration: </a:t>
-            </a:r>
-            <a:r>
-              <a:rPr b="0">
+              <a:t>• Barcode &amp; WMS Sync</a:t>
+            </a:r>
+          </a:p>
+          <a:p>
+            <a:pPr>
+              <a:spcBef>
+                <a:spcPts val="100"/>
+              </a:spcBef>
+              <a:defRPr sz="1250">
                 <a:solidFill>
                   <a:srgbClr val="CBD5E1"/>
                 </a:solidFill>
-              </a:rPr>
-              <a:t>Synchronize AI incident timestamps directly with handheld barcode scans and WMS manifests.</a:t>
+                <a:latin typeface="Segoe UI"/>
+              </a:defRPr>
+            </a:pPr>
+            <a:r>
+              <a:t>  Connect incident timestamps directly to package tracking.</a:t>
             </a:r>
           </a:p>
           <a:p>
@@ -10362,7 +9819,7 @@
               <a:spcBef>
                 <a:spcPts val="700"/>
               </a:spcBef>
-              <a:defRPr sz="919" b="1">
+              <a:defRPr sz="1450" b="1">
                 <a:solidFill>
                   <a:srgbClr val="FFFFFF"/>
                 </a:solidFill>
@@ -10370,15 +9827,23 @@
               </a:defRPr>
             </a:pPr>
             <a:r>
-              <a:t>• Ergonomic Safety Coaching: </a:t>
-            </a:r>
-            <a:r>
-              <a:rPr b="0">
+              <a:t>• Ergonomic Safety Coach</a:t>
+            </a:r>
+          </a:p>
+          <a:p>
+            <a:pPr>
+              <a:spcBef>
+                <a:spcPts val="100"/>
+              </a:spcBef>
+              <a:defRPr sz="1250">
                 <a:solidFill>
                   <a:srgbClr val="CBD5E1"/>
                 </a:solidFill>
-              </a:rPr>
-              <a:t>Warn workers if they bend at the spine instead of lifting with their knees to prevent chronic injury.</a:t>
+                <a:latin typeface="Segoe UI"/>
+              </a:defRPr>
+            </a:pPr>
+            <a:r>
+              <a:t>  Warn workers lifting with spine instead of knees.</a:t>
             </a:r>
           </a:p>
         </p:txBody>
@@ -10391,7 +9856,7 @@
         </p:nvSpPr>
         <p:spPr>
           <a:xfrm>
-            <a:off x="731520" y="6035040"/>
+            <a:off x="731520" y="5623560"/>
             <a:ext cx="10728655" cy="13716"/>
           </a:xfrm>
           <a:prstGeom prst="rect">
@@ -10434,8 +9899,8 @@
         </p:nvSpPr>
         <p:spPr>
           <a:xfrm>
-            <a:off x="731520" y="6144768"/>
-            <a:ext cx="10728655" cy="411480"/>
+            <a:off x="731520" y="5715000"/>
+            <a:ext cx="10728655" cy="384048"/>
           </a:xfrm>
           <a:prstGeom prst="rect">
             <a:avLst/>
@@ -10443,13 +9908,13 @@
           <a:noFill/>
         </p:spPr>
         <p:txBody>
-          <a:bodyPr wrap="square" lIns="0" tIns="0" rIns="0" bIns="0">
+          <a:bodyPr wrap="none" lIns="0" tIns="0" rIns="0" bIns="0">
             <a:spAutoFit/>
           </a:bodyPr>
           <a:lstStyle/>
           <a:p>
             <a:pPr>
-              <a:defRPr sz="1050" b="1">
+              <a:defRPr sz="2000" b="1">
                 <a:solidFill>
                   <a:srgbClr val="FFFFFF"/>
                 </a:solidFill>
@@ -10457,23 +9922,51 @@
               </a:defRPr>
             </a:pPr>
             <a:r>
-              <a:t>Team VisionGuard: Aastha Gupta, Lucky Lakhani, Runjan Bawa  •  Thank you for listening!</a:t>
-            </a:r>
-          </a:p>
-          <a:p>
-            <a:pPr>
-              <a:spcBef>
-                <a:spcPts val="200"/>
-              </a:spcBef>
-              <a:defRPr sz="900">
+              <a:t>DockGuard AI: </a:t>
+            </a:r>
+            <a:r>
+              <a:rPr b="1">
                 <a:solidFill>
                   <a:srgbClr val="38BDF8"/>
                 </a:solidFill>
-                <a:latin typeface="Segoe UI"/>
-              </a:defRPr>
-            </a:pPr>
-            <a:r>
-              <a:t>Live Web App: smart-warehouse-system-rk8p.onrender.com   |   GitHub: github.com/Aastha008/Smart-Warehouse-System</a:t>
+              </a:rPr>
+              <a:t>From detecting risk  →  to preventing it.</a:t>
+            </a:r>
+          </a:p>
+        </p:txBody>
+      </p:sp>
+      <p:sp>
+        <p:nvSpPr>
+          <p:cNvPr id="18" name="TextBox 17"/>
+          <p:cNvSpPr txBox="1"/>
+          <p:nvPr/>
+        </p:nvSpPr>
+        <p:spPr>
+          <a:xfrm>
+            <a:off x="731520" y="6172200"/>
+            <a:ext cx="10728655" cy="320040"/>
+          </a:xfrm>
+          <a:prstGeom prst="rect">
+            <a:avLst/>
+          </a:prstGeom>
+          <a:noFill/>
+        </p:spPr>
+        <p:txBody>
+          <a:bodyPr wrap="none" lIns="0" tIns="0" rIns="0" bIns="0">
+            <a:spAutoFit/>
+          </a:bodyPr>
+          <a:lstStyle/>
+          <a:p>
+            <a:pPr>
+              <a:defRPr sz="1300">
+                <a:solidFill>
+                  <a:srgbClr val="94A3B8"/>
+                </a:solidFill>
+                <a:latin typeface="Segoe UI"/>
+              </a:defRPr>
+            </a:pPr>
+            <a:r>
+              <a:t>Team VisionGuard: Aastha Gupta, Lucky Lakhani, Runjan Bawa   |   smart-warehouse-system-rk8p.onrender.com   |   github.com/Aastha008/Smart-Warehouse-System</a:t>
             </a:r>
           </a:p>
         </p:txBody>

--- a/DockGuard_Fun_Presentation.pptx
+++ b/DockGuard_Fun_Presentation.pptx
@@ -3123,8 +3123,8 @@
         </p:nvSpPr>
         <p:spPr>
           <a:xfrm>
-            <a:off x="731520" y="475488"/>
-            <a:ext cx="10728655" cy="274320"/>
+            <a:off x="731520" y="438912"/>
+            <a:ext cx="10728655" cy="256032"/>
           </a:xfrm>
           <a:prstGeom prst="rect">
             <a:avLst/>
@@ -3138,7 +3138,7 @@
           <a:lstStyle/>
           <a:p>
             <a:pPr>
-              <a:defRPr sz="1350" b="1">
+              <a:defRPr sz="1100" b="1">
                 <a:solidFill>
                   <a:srgbClr val="38BDF8"/>
                 </a:solidFill>
@@ -3159,8 +3159,8 @@
         </p:nvSpPr>
         <p:spPr>
           <a:xfrm>
-            <a:off x="731520" y="804672"/>
-            <a:ext cx="10728655" cy="1051560"/>
+            <a:off x="731520" y="749808"/>
+            <a:ext cx="10728655" cy="1005840"/>
           </a:xfrm>
           <a:prstGeom prst="rect">
             <a:avLst/>
@@ -3174,7 +3174,7 @@
           <a:lstStyle/>
           <a:p>
             <a:pPr>
-              <a:defRPr sz="3800" b="1">
+              <a:defRPr sz="3600" b="1">
                 <a:solidFill>
                   <a:srgbClr val="FFFFFF"/>
                 </a:solidFill>
@@ -3190,7 +3190,7 @@
               <a:spcBef>
                 <a:spcPts val="300"/>
               </a:spcBef>
-              <a:defRPr sz="2000" b="1">
+              <a:defRPr sz="1650" b="1">
                 <a:solidFill>
                   <a:srgbClr val="38BDF8"/>
                 </a:solidFill>
@@ -3211,8 +3211,148 @@
         </p:nvSpPr>
         <p:spPr>
           <a:xfrm>
-            <a:off x="731520" y="2084831"/>
-            <a:ext cx="2423160" cy="1024128"/>
+            <a:off x="731520" y="1901952"/>
+            <a:ext cx="10728655" cy="1170432"/>
+          </a:xfrm>
+          <a:prstGeom prst="rect">
+            <a:avLst/>
+          </a:prstGeom>
+          <a:solidFill>
+            <a:srgbClr val="102C52"/>
+          </a:solidFill>
+          <a:ln w="19050">
+            <a:solidFill>
+              <a:srgbClr val="38BDF8"/>
+            </a:solidFill>
+          </a:ln>
+        </p:spPr>
+        <p:style>
+          <a:lnRef idx="1">
+            <a:schemeClr val="accent1"/>
+          </a:lnRef>
+          <a:fillRef idx="3">
+            <a:schemeClr val="accent1"/>
+          </a:fillRef>
+          <a:effectRef idx="2">
+            <a:schemeClr val="accent1"/>
+          </a:effectRef>
+          <a:fontRef idx="minor">
+            <a:schemeClr val="lt1"/>
+          </a:fontRef>
+        </p:style>
+        <p:txBody>
+          <a:bodyPr rtlCol="0" anchor="ctr"/>
+          <a:lstStyle/>
+          <a:p>
+            <a:pPr algn="ctr"/>
+          </a:p>
+        </p:txBody>
+      </p:sp>
+      <p:sp>
+        <p:nvSpPr>
+          <p:cNvPr id="5" name="Rectangle 4"/>
+          <p:cNvSpPr/>
+          <p:nvPr/>
+        </p:nvSpPr>
+        <p:spPr>
+          <a:xfrm>
+            <a:off x="731520" y="1901952"/>
+            <a:ext cx="36576" cy="1170432"/>
+          </a:xfrm>
+          <a:prstGeom prst="rect">
+            <a:avLst/>
+          </a:prstGeom>
+          <a:solidFill>
+            <a:srgbClr val="38BDF8"/>
+          </a:solidFill>
+          <a:ln>
+            <a:noFill/>
+          </a:ln>
+        </p:spPr>
+        <p:style>
+          <a:lnRef idx="1">
+            <a:schemeClr val="accent1"/>
+          </a:lnRef>
+          <a:fillRef idx="3">
+            <a:schemeClr val="accent1"/>
+          </a:fillRef>
+          <a:effectRef idx="2">
+            <a:schemeClr val="accent1"/>
+          </a:effectRef>
+          <a:fontRef idx="minor">
+            <a:schemeClr val="lt1"/>
+          </a:fontRef>
+        </p:style>
+        <p:txBody>
+          <a:bodyPr rtlCol="0" anchor="ctr"/>
+          <a:lstStyle/>
+          <a:p>
+            <a:pPr algn="ctr"/>
+          </a:p>
+        </p:txBody>
+      </p:sp>
+      <p:sp>
+        <p:nvSpPr>
+          <p:cNvPr id="6" name="TextBox 5"/>
+          <p:cNvSpPr txBox="1"/>
+          <p:nvPr/>
+        </p:nvSpPr>
+        <p:spPr>
+          <a:xfrm>
+            <a:off x="960120" y="1993392"/>
+            <a:ext cx="10287000" cy="987552"/>
+          </a:xfrm>
+          <a:prstGeom prst="rect">
+            <a:avLst/>
+          </a:prstGeom>
+          <a:noFill/>
+        </p:spPr>
+        <p:txBody>
+          <a:bodyPr wrap="square" lIns="0" tIns="0" rIns="0" bIns="0">
+            <a:spAutoFit/>
+          </a:bodyPr>
+          <a:lstStyle/>
+          <a:p>
+            <a:pPr>
+              <a:defRPr sz="1100" b="1">
+                <a:solidFill>
+                  <a:srgbClr val="7DD3FC"/>
+                </a:solidFill>
+                <a:latin typeface="Segoe UI"/>
+              </a:defRPr>
+            </a:pPr>
+            <a:r>
+              <a:t>THE 10-SECOND PITCH</a:t>
+            </a:r>
+          </a:p>
+          <a:p>
+            <a:pPr>
+              <a:spcBef>
+                <a:spcPts val="400"/>
+              </a:spcBef>
+              <a:defRPr sz="1150">
+                <a:solidFill>
+                  <a:srgbClr val="E2E8F0"/>
+                </a:solidFill>
+                <a:latin typeface="Segoe UI"/>
+              </a:defRPr>
+            </a:pPr>
+            <a:r>
+              <a:t>Ever opened an online order to find your new gadget smashed into puzzle pieces? It almost never happens in the delivery van. It happens in the 4:00 PM warehouse rush where boxes fly, pallets wobble, and nobody notices. We built DockGuard to watch CCTV feeds in real time, catch drops and rough drags in seconds, and make sure damaged boxes never leave the building.</a:t>
+            </a:r>
+          </a:p>
+        </p:txBody>
+      </p:sp>
+      <p:sp>
+        <p:nvSpPr>
+          <p:cNvPr id="7" name="Rectangle 6"/>
+          <p:cNvSpPr/>
+          <p:nvPr/>
+        </p:nvSpPr>
+        <p:spPr>
+          <a:xfrm>
+            <a:off x="731520" y="3218688"/>
+            <a:ext cx="5230368" cy="3310128"/>
           </a:xfrm>
           <a:prstGeom prst="rect">
             <a:avLst/>
@@ -3250,20 +3390,20 @@
       </p:sp>
       <p:sp>
         <p:nvSpPr>
-          <p:cNvPr id="5" name="Rectangle 4"/>
+          <p:cNvPr id="8" name="Rectangle 7"/>
           <p:cNvSpPr/>
           <p:nvPr/>
         </p:nvSpPr>
         <p:spPr>
           <a:xfrm>
-            <a:off x="731520" y="2084831"/>
-            <a:ext cx="2423160" cy="32004"/>
+            <a:off x="731520" y="3218688"/>
+            <a:ext cx="5230368" cy="32004"/>
           </a:xfrm>
           <a:prstGeom prst="rect">
             <a:avLst/>
           </a:prstGeom>
           <a:solidFill>
-            <a:srgbClr val="1C3E66"/>
+            <a:srgbClr val="38BDF8"/>
           </a:solidFill>
           <a:ln>
             <a:noFill/>
@@ -3293,14 +3433,14 @@
       </p:sp>
       <p:sp>
         <p:nvSpPr>
-          <p:cNvPr id="6" name="TextBox 5"/>
+          <p:cNvPr id="9" name="TextBox 8"/>
           <p:cNvSpPr txBox="1"/>
           <p:nvPr/>
         </p:nvSpPr>
         <p:spPr>
           <a:xfrm>
-            <a:off x="841248" y="2212847"/>
-            <a:ext cx="2203704" cy="777240"/>
+            <a:off x="960120" y="3383280"/>
+            <a:ext cx="4773168" cy="2990088"/>
           </a:xfrm>
           <a:prstGeom prst="rect">
             <a:avLst/>
@@ -3314,7 +3454,23 @@
           <a:lstStyle/>
           <a:p>
             <a:pPr>
-              <a:defRPr sz="1500" b="1">
+              <a:defRPr sz="1400" b="1">
+                <a:solidFill>
+                  <a:srgbClr val="38BDF8"/>
+                </a:solidFill>
+                <a:latin typeface="Segoe UI"/>
+              </a:defRPr>
+            </a:pPr>
+            <a:r>
+              <a:t>THE SQUAD: TEAM VISIONGUARD</a:t>
+            </a:r>
+          </a:p>
+          <a:p>
+            <a:pPr>
+              <a:spcBef>
+                <a:spcPts val="800"/>
+              </a:spcBef>
+              <a:defRPr sz="1200" b="1">
                 <a:solidFill>
                   <a:srgbClr val="FFFFFF"/>
                 </a:solidFill>
@@ -3322,73 +3478,125 @@
               </a:defRPr>
             </a:pPr>
             <a:r>
-              <a:t>WAREHOUSE DOCK</a:t>
+              <a:t>• Aastha Gupta  —  </a:t>
+            </a:r>
+            <a:r>
+              <a:rPr b="1">
+                <a:solidFill>
+                  <a:srgbClr val="38BDF8"/>
+                </a:solidFill>
+              </a:rPr>
+              <a:t>[Vision Whisperer]</a:t>
             </a:r>
           </a:p>
           <a:p>
             <a:pPr>
               <a:spcBef>
-                <a:spcPts val="300"/>
+                <a:spcPts val="100"/>
               </a:spcBef>
-              <a:defRPr sz="1300">
-                <a:solidFill>
-                  <a:srgbClr val="E2E8F0"/>
-                </a:solidFill>
-                <a:latin typeface="Segoe UI"/>
-              </a:defRPr>
-            </a:pPr>
-            <a:r>
-              <a:t>4:00 PM trailer rush</a:t>
-            </a:r>
-          </a:p>
-        </p:txBody>
-      </p:sp>
-      <p:sp>
-        <p:nvSpPr>
-          <p:cNvPr id="7" name="TextBox 6"/>
-          <p:cNvSpPr txBox="1"/>
-          <p:nvPr/>
-        </p:nvSpPr>
-        <p:spPr>
-          <a:xfrm>
-            <a:off x="3209544" y="2386583"/>
-            <a:ext cx="237744" cy="365760"/>
-          </a:xfrm>
-          <a:prstGeom prst="rect">
-            <a:avLst/>
-          </a:prstGeom>
-          <a:noFill/>
-        </p:spPr>
-        <p:txBody>
-          <a:bodyPr wrap="none" lIns="0" tIns="0" rIns="0" bIns="0">
-            <a:spAutoFit/>
-          </a:bodyPr>
-          <a:lstStyle/>
-          <a:p>
-            <a:pPr>
-              <a:defRPr sz="2200" b="1">
+              <a:defRPr sz="1050">
+                <a:solidFill>
+                  <a:srgbClr val="CBD5E1"/>
+                </a:solidFill>
+                <a:latin typeface="Segoe UI"/>
+              </a:defRPr>
+            </a:pPr>
+            <a:r>
+              <a:t>   Trained our custom YOLOv8 model to spot cartons, pallets &amp; workers at awkward angles</a:t>
+            </a:r>
+          </a:p>
+          <a:p>
+            <a:pPr>
+              <a:spcBef>
+                <a:spcPts val="800"/>
+              </a:spcBef>
+              <a:defRPr sz="1200" b="1">
+                <a:solidFill>
+                  <a:srgbClr val="FFFFFF"/>
+                </a:solidFill>
+                <a:latin typeface="Segoe UI"/>
+              </a:defRPr>
+            </a:pPr>
+            <a:r>
+              <a:t>• Lucky Lakhani  —  </a:t>
+            </a:r>
+            <a:r>
+              <a:rPr b="1">
                 <a:solidFill>
                   <a:srgbClr val="38BDF8"/>
                 </a:solidFill>
-                <a:latin typeface="Segoe UI"/>
-              </a:defRPr>
-            </a:pPr>
-            <a:r>
-              <a:t>→</a:t>
-            </a:r>
-          </a:p>
-        </p:txBody>
-      </p:sp>
-      <p:sp>
-        <p:nvSpPr>
-          <p:cNvPr id="8" name="Rectangle 7"/>
+              </a:rPr>
+              <a:t>[Pipeline &amp; AI Hacker]</a:t>
+            </a:r>
+          </a:p>
+          <a:p>
+            <a:pPr>
+              <a:spcBef>
+                <a:spcPts val="100"/>
+              </a:spcBef>
+              <a:defRPr sz="1050">
+                <a:solidFill>
+                  <a:srgbClr val="CBD5E1"/>
+                </a:solidFill>
+                <a:latin typeface="Segoe UI"/>
+              </a:defRPr>
+            </a:pPr>
+            <a:r>
+              <a:t>   Built the sub-second video buffer, FastAPI endpoints &amp; connected Google Gemini</a:t>
+            </a:r>
+          </a:p>
+          <a:p>
+            <a:pPr>
+              <a:spcBef>
+                <a:spcPts val="800"/>
+              </a:spcBef>
+              <a:defRPr sz="1200" b="1">
+                <a:solidFill>
+                  <a:srgbClr val="FFFFFF"/>
+                </a:solidFill>
+                <a:latin typeface="Segoe UI"/>
+              </a:defRPr>
+            </a:pPr>
+            <a:r>
+              <a:t>• Runjan Bawa  —  </a:t>
+            </a:r>
+            <a:r>
+              <a:rPr b="1">
+                <a:solidFill>
+                  <a:srgbClr val="38BDF8"/>
+                </a:solidFill>
+              </a:rPr>
+              <a:t>[UI &amp; Experience Builder]</a:t>
+            </a:r>
+          </a:p>
+          <a:p>
+            <a:pPr>
+              <a:spcBef>
+                <a:spcPts val="100"/>
+              </a:spcBef>
+              <a:defRPr sz="1050">
+                <a:solidFill>
+                  <a:srgbClr val="CBD5E1"/>
+                </a:solidFill>
+                <a:latin typeface="Segoe UI"/>
+              </a:defRPr>
+            </a:pPr>
+            <a:r>
+              <a:t>   Crafted the live dashboard, audio chimes, trend charts &amp; made it look clean</a:t>
+            </a:r>
+          </a:p>
+        </p:txBody>
+      </p:sp>
+      <p:sp>
+        <p:nvSpPr>
+          <p:cNvPr id="10" name="Rectangle 9"/>
           <p:cNvSpPr/>
           <p:nvPr/>
         </p:nvSpPr>
         <p:spPr>
           <a:xfrm>
-            <a:off x="3502152" y="2084831"/>
-            <a:ext cx="2423160" cy="1024128"/>
+            <a:off x="6229807" y="3218688"/>
+            <a:ext cx="5230368" cy="3310128"/>
           </a:xfrm>
           <a:prstGeom prst="rect">
             <a:avLst/>
@@ -3426,20 +3634,20 @@
       </p:sp>
       <p:sp>
         <p:nvSpPr>
-          <p:cNvPr id="9" name="Rectangle 8"/>
+          <p:cNvPr id="11" name="Rectangle 10"/>
           <p:cNvSpPr/>
           <p:nvPr/>
         </p:nvSpPr>
         <p:spPr>
           <a:xfrm>
-            <a:off x="3502152" y="2084831"/>
-            <a:ext cx="2423160" cy="32004"/>
+            <a:off x="6229807" y="3218688"/>
+            <a:ext cx="5230368" cy="32004"/>
           </a:xfrm>
           <a:prstGeom prst="rect">
             <a:avLst/>
           </a:prstGeom>
           <a:solidFill>
-            <a:srgbClr val="1C3E66"/>
+            <a:srgbClr val="7DD3FC"/>
           </a:solidFill>
           <a:ln>
             <a:noFill/>
@@ -3469,14 +3677,14 @@
       </p:sp>
       <p:sp>
         <p:nvSpPr>
-          <p:cNvPr id="10" name="TextBox 9"/>
+          <p:cNvPr id="12" name="TextBox 11"/>
           <p:cNvSpPr txBox="1"/>
           <p:nvPr/>
         </p:nvSpPr>
         <p:spPr>
           <a:xfrm>
-            <a:off x="3611880" y="2212847"/>
-            <a:ext cx="2203704" cy="777240"/>
+            <a:off x="6458407" y="3383280"/>
+            <a:ext cx="4773168" cy="2990088"/>
           </a:xfrm>
           <a:prstGeom prst="rect">
             <a:avLst/>
@@ -3490,7 +3698,23 @@
           <a:lstStyle/>
           <a:p>
             <a:pPr>
-              <a:defRPr sz="1500" b="1">
+              <a:defRPr sz="1400" b="1">
+                <a:solidFill>
+                  <a:srgbClr val="7DD3FC"/>
+                </a:solidFill>
+                <a:latin typeface="Segoe UI"/>
+              </a:defRPr>
+            </a:pPr>
+            <a:r>
+              <a:t>WHY THIS ACTUALLY MATTERS</a:t>
+            </a:r>
+          </a:p>
+          <a:p>
+            <a:pPr>
+              <a:spcBef>
+                <a:spcPts val="800"/>
+              </a:spcBef>
+              <a:defRPr sz="1200" b="1">
                 <a:solidFill>
                   <a:srgbClr val="FFFFFF"/>
                 </a:solidFill>
@@ -3498,175 +3722,23 @@
               </a:defRPr>
             </a:pPr>
             <a:r>
-              <a:t>DROP / DRAG / TILT</a:t>
+              <a:t>• $50B+ Annual Lost Cargo: </a:t>
+            </a:r>
+            <a:r>
+              <a:rPr b="0">
+                <a:solidFill>
+                  <a:srgbClr val="CBD5E1"/>
+                </a:solidFill>
+              </a:rPr>
+              <a:t>That's how much merchandise gets wrecked in warehouses before even making it onto the highway. Most of it goes completely unrecorded.</a:t>
             </a:r>
           </a:p>
           <a:p>
             <a:pPr>
               <a:spcBef>
-                <a:spcPts val="300"/>
+                <a:spcPts val="800"/>
               </a:spcBef>
-              <a:defRPr sz="1300">
-                <a:solidFill>
-                  <a:srgbClr val="E2E8F0"/>
-                </a:solidFill>
-                <a:latin typeface="Segoe UI"/>
-              </a:defRPr>
-            </a:pPr>
-            <a:r>
-              <a:t>Cartons slip &amp; pallets lean</a:t>
-            </a:r>
-          </a:p>
-        </p:txBody>
-      </p:sp>
-      <p:sp>
-        <p:nvSpPr>
-          <p:cNvPr id="11" name="TextBox 10"/>
-          <p:cNvSpPr txBox="1"/>
-          <p:nvPr/>
-        </p:nvSpPr>
-        <p:spPr>
-          <a:xfrm>
-            <a:off x="5980176" y="2386583"/>
-            <a:ext cx="237744" cy="365760"/>
-          </a:xfrm>
-          <a:prstGeom prst="rect">
-            <a:avLst/>
-          </a:prstGeom>
-          <a:noFill/>
-        </p:spPr>
-        <p:txBody>
-          <a:bodyPr wrap="none" lIns="0" tIns="0" rIns="0" bIns="0">
-            <a:spAutoFit/>
-          </a:bodyPr>
-          <a:lstStyle/>
-          <a:p>
-            <a:pPr>
-              <a:defRPr sz="2200" b="1">
-                <a:solidFill>
-                  <a:srgbClr val="38BDF8"/>
-                </a:solidFill>
-                <a:latin typeface="Segoe UI"/>
-              </a:defRPr>
-            </a:pPr>
-            <a:r>
-              <a:t>→</a:t>
-            </a:r>
-          </a:p>
-        </p:txBody>
-      </p:sp>
-      <p:sp>
-        <p:nvSpPr>
-          <p:cNvPr id="12" name="Rectangle 11"/>
-          <p:cNvSpPr/>
-          <p:nvPr/>
-        </p:nvSpPr>
-        <p:spPr>
-          <a:xfrm>
-            <a:off x="6272784" y="2084831"/>
-            <a:ext cx="2423160" cy="1024128"/>
-          </a:xfrm>
-          <a:prstGeom prst="rect">
-            <a:avLst/>
-          </a:prstGeom>
-          <a:solidFill>
-            <a:srgbClr val="102C52"/>
-          </a:solidFill>
-          <a:ln w="19050">
-            <a:solidFill>
-              <a:srgbClr val="38BDF8"/>
-            </a:solidFill>
-          </a:ln>
-        </p:spPr>
-        <p:style>
-          <a:lnRef idx="1">
-            <a:schemeClr val="accent1"/>
-          </a:lnRef>
-          <a:fillRef idx="3">
-            <a:schemeClr val="accent1"/>
-          </a:fillRef>
-          <a:effectRef idx="2">
-            <a:schemeClr val="accent1"/>
-          </a:effectRef>
-          <a:fontRef idx="minor">
-            <a:schemeClr val="lt1"/>
-          </a:fontRef>
-        </p:style>
-        <p:txBody>
-          <a:bodyPr rtlCol="0" anchor="ctr"/>
-          <a:lstStyle/>
-          <a:p>
-            <a:pPr algn="ctr"/>
-          </a:p>
-        </p:txBody>
-      </p:sp>
-      <p:sp>
-        <p:nvSpPr>
-          <p:cNvPr id="13" name="Rectangle 12"/>
-          <p:cNvSpPr/>
-          <p:nvPr/>
-        </p:nvSpPr>
-        <p:spPr>
-          <a:xfrm>
-            <a:off x="6272784" y="2084831"/>
-            <a:ext cx="2423160" cy="32004"/>
-          </a:xfrm>
-          <a:prstGeom prst="rect">
-            <a:avLst/>
-          </a:prstGeom>
-          <a:solidFill>
-            <a:srgbClr val="38BDF8"/>
-          </a:solidFill>
-          <a:ln>
-            <a:noFill/>
-          </a:ln>
-        </p:spPr>
-        <p:style>
-          <a:lnRef idx="1">
-            <a:schemeClr val="accent1"/>
-          </a:lnRef>
-          <a:fillRef idx="3">
-            <a:schemeClr val="accent1"/>
-          </a:fillRef>
-          <a:effectRef idx="2">
-            <a:schemeClr val="accent1"/>
-          </a:effectRef>
-          <a:fontRef idx="minor">
-            <a:schemeClr val="lt1"/>
-          </a:fontRef>
-        </p:style>
-        <p:txBody>
-          <a:bodyPr rtlCol="0" anchor="ctr"/>
-          <a:lstStyle/>
-          <a:p>
-            <a:pPr algn="ctr"/>
-          </a:p>
-        </p:txBody>
-      </p:sp>
-      <p:sp>
-        <p:nvSpPr>
-          <p:cNvPr id="14" name="TextBox 13"/>
-          <p:cNvSpPr txBox="1"/>
-          <p:nvPr/>
-        </p:nvSpPr>
-        <p:spPr>
-          <a:xfrm>
-            <a:off x="6382512" y="2212847"/>
-            <a:ext cx="2203704" cy="777240"/>
-          </a:xfrm>
-          <a:prstGeom prst="rect">
-            <a:avLst/>
-          </a:prstGeom>
-          <a:noFill/>
-        </p:spPr>
-        <p:txBody>
-          <a:bodyPr wrap="square" lIns="0" tIns="0" rIns="0" bIns="0">
-            <a:spAutoFit/>
-          </a:bodyPr>
-          <a:lstStyle/>
-          <a:p>
-            <a:pPr>
-              <a:defRPr sz="1500" b="1">
+              <a:defRPr sz="1200" b="1">
                 <a:solidFill>
                   <a:srgbClr val="FFFFFF"/>
                 </a:solidFill>
@@ -3674,175 +3746,23 @@
               </a:defRPr>
             </a:pPr>
             <a:r>
-              <a:t>UNNOTICED DAMAGE</a:t>
+              <a:t>• Human Eyes Can't Keep Up: </a:t>
+            </a:r>
+            <a:r>
+              <a:rPr b="0">
+                <a:solidFill>
+                  <a:srgbClr val="CBD5E1"/>
+                </a:solidFill>
+              </a:rPr>
+              <a:t>A single supervisor can't watch 10 bays, 40 fast-moving workers, and forklift traffic all at once. Blame turns into guessing games.</a:t>
             </a:r>
           </a:p>
           <a:p>
             <a:pPr>
               <a:spcBef>
-                <a:spcPts val="300"/>
+                <a:spcPts val="800"/>
               </a:spcBef>
-              <a:defRPr sz="1300">
-                <a:solidFill>
-                  <a:srgbClr val="E2E8F0"/>
-                </a:solidFill>
-                <a:latin typeface="Segoe UI"/>
-              </a:defRPr>
-            </a:pPr>
-            <a:r>
-              <a:t>Loaded into trucks blindly</a:t>
-            </a:r>
-          </a:p>
-        </p:txBody>
-      </p:sp>
-      <p:sp>
-        <p:nvSpPr>
-          <p:cNvPr id="15" name="TextBox 14"/>
-          <p:cNvSpPr txBox="1"/>
-          <p:nvPr/>
-        </p:nvSpPr>
-        <p:spPr>
-          <a:xfrm>
-            <a:off x="8750808" y="2386583"/>
-            <a:ext cx="237744" cy="365760"/>
-          </a:xfrm>
-          <a:prstGeom prst="rect">
-            <a:avLst/>
-          </a:prstGeom>
-          <a:noFill/>
-        </p:spPr>
-        <p:txBody>
-          <a:bodyPr wrap="none" lIns="0" tIns="0" rIns="0" bIns="0">
-            <a:spAutoFit/>
-          </a:bodyPr>
-          <a:lstStyle/>
-          <a:p>
-            <a:pPr>
-              <a:defRPr sz="2200" b="1">
-                <a:solidFill>
-                  <a:srgbClr val="38BDF8"/>
-                </a:solidFill>
-                <a:latin typeface="Segoe UI"/>
-              </a:defRPr>
-            </a:pPr>
-            <a:r>
-              <a:t>→</a:t>
-            </a:r>
-          </a:p>
-        </p:txBody>
-      </p:sp>
-      <p:sp>
-        <p:nvSpPr>
-          <p:cNvPr id="16" name="Rectangle 15"/>
-          <p:cNvSpPr/>
-          <p:nvPr/>
-        </p:nvSpPr>
-        <p:spPr>
-          <a:xfrm>
-            <a:off x="9043416" y="2084831"/>
-            <a:ext cx="2423160" cy="1024128"/>
-          </a:xfrm>
-          <a:prstGeom prst="rect">
-            <a:avLst/>
-          </a:prstGeom>
-          <a:solidFill>
-            <a:srgbClr val="102C52"/>
-          </a:solidFill>
-          <a:ln w="19050">
-            <a:solidFill>
-              <a:srgbClr val="38BDF8"/>
-            </a:solidFill>
-          </a:ln>
-        </p:spPr>
-        <p:style>
-          <a:lnRef idx="1">
-            <a:schemeClr val="accent1"/>
-          </a:lnRef>
-          <a:fillRef idx="3">
-            <a:schemeClr val="accent1"/>
-          </a:fillRef>
-          <a:effectRef idx="2">
-            <a:schemeClr val="accent1"/>
-          </a:effectRef>
-          <a:fontRef idx="minor">
-            <a:schemeClr val="lt1"/>
-          </a:fontRef>
-        </p:style>
-        <p:txBody>
-          <a:bodyPr rtlCol="0" anchor="ctr"/>
-          <a:lstStyle/>
-          <a:p>
-            <a:pPr algn="ctr"/>
-          </a:p>
-        </p:txBody>
-      </p:sp>
-      <p:sp>
-        <p:nvSpPr>
-          <p:cNvPr id="17" name="Rectangle 16"/>
-          <p:cNvSpPr/>
-          <p:nvPr/>
-        </p:nvSpPr>
-        <p:spPr>
-          <a:xfrm>
-            <a:off x="9043416" y="2084831"/>
-            <a:ext cx="2423160" cy="32004"/>
-          </a:xfrm>
-          <a:prstGeom prst="rect">
-            <a:avLst/>
-          </a:prstGeom>
-          <a:solidFill>
-            <a:srgbClr val="38BDF8"/>
-          </a:solidFill>
-          <a:ln>
-            <a:noFill/>
-          </a:ln>
-        </p:spPr>
-        <p:style>
-          <a:lnRef idx="1">
-            <a:schemeClr val="accent1"/>
-          </a:lnRef>
-          <a:fillRef idx="3">
-            <a:schemeClr val="accent1"/>
-          </a:fillRef>
-          <a:effectRef idx="2">
-            <a:schemeClr val="accent1"/>
-          </a:effectRef>
-          <a:fontRef idx="minor">
-            <a:schemeClr val="lt1"/>
-          </a:fontRef>
-        </p:style>
-        <p:txBody>
-          <a:bodyPr rtlCol="0" anchor="ctr"/>
-          <a:lstStyle/>
-          <a:p>
-            <a:pPr algn="ctr"/>
-          </a:p>
-        </p:txBody>
-      </p:sp>
-      <p:sp>
-        <p:nvSpPr>
-          <p:cNvPr id="18" name="TextBox 17"/>
-          <p:cNvSpPr txBox="1"/>
-          <p:nvPr/>
-        </p:nvSpPr>
-        <p:spPr>
-          <a:xfrm>
-            <a:off x="9153144" y="2212847"/>
-            <a:ext cx="2203704" cy="777240"/>
-          </a:xfrm>
-          <a:prstGeom prst="rect">
-            <a:avLst/>
-          </a:prstGeom>
-          <a:noFill/>
-        </p:spPr>
-        <p:txBody>
-          <a:bodyPr wrap="square" lIns="0" tIns="0" rIns="0" bIns="0">
-            <a:spAutoFit/>
-          </a:bodyPr>
-          <a:lstStyle/>
-          <a:p>
-            <a:pPr>
-              <a:defRPr sz="1500" b="1">
+              <a:defRPr sz="1200" b="1">
                 <a:solidFill>
                   <a:srgbClr val="FFFFFF"/>
                 </a:solidFill>
@@ -3850,535 +3770,15 @@
               </a:defRPr>
             </a:pPr>
             <a:r>
-              <a:t>CUSTOMER RETURN</a:t>
-            </a:r>
-          </a:p>
-          <a:p>
-            <a:pPr>
-              <a:spcBef>
-                <a:spcPts val="300"/>
-              </a:spcBef>
-              <a:defRPr sz="1300">
-                <a:solidFill>
-                  <a:srgbClr val="E2E8F0"/>
-                </a:solidFill>
-                <a:latin typeface="Segoe UI"/>
-              </a:defRPr>
-            </a:pPr>
-            <a:r>
-              <a:t>$200+ claims &amp; friction</a:t>
-            </a:r>
-          </a:p>
-        </p:txBody>
-      </p:sp>
-      <p:sp>
-        <p:nvSpPr>
-          <p:cNvPr id="19" name="Rectangle 18"/>
-          <p:cNvSpPr/>
-          <p:nvPr/>
-        </p:nvSpPr>
-        <p:spPr>
-          <a:xfrm>
-            <a:off x="731520" y="3401568"/>
-            <a:ext cx="3401568" cy="1965960"/>
-          </a:xfrm>
-          <a:prstGeom prst="rect">
-            <a:avLst/>
-          </a:prstGeom>
-          <a:solidFill>
-            <a:srgbClr val="0A192E"/>
-          </a:solidFill>
-          <a:ln w="12700">
-            <a:solidFill>
-              <a:srgbClr val="1C3E66"/>
-            </a:solidFill>
-          </a:ln>
-        </p:spPr>
-        <p:style>
-          <a:lnRef idx="1">
-            <a:schemeClr val="accent1"/>
-          </a:lnRef>
-          <a:fillRef idx="3">
-            <a:schemeClr val="accent1"/>
-          </a:fillRef>
-          <a:effectRef idx="2">
-            <a:schemeClr val="accent1"/>
-          </a:effectRef>
-          <a:fontRef idx="minor">
-            <a:schemeClr val="lt1"/>
-          </a:fontRef>
-        </p:style>
-        <p:txBody>
-          <a:bodyPr rtlCol="0" anchor="ctr"/>
-          <a:lstStyle/>
-          <a:p>
-            <a:pPr algn="ctr"/>
-          </a:p>
-        </p:txBody>
-      </p:sp>
-      <p:sp>
-        <p:nvSpPr>
-          <p:cNvPr id="20" name="Rectangle 19"/>
-          <p:cNvSpPr/>
-          <p:nvPr/>
-        </p:nvSpPr>
-        <p:spPr>
-          <a:xfrm>
-            <a:off x="731520" y="3401568"/>
-            <a:ext cx="3401568" cy="32004"/>
-          </a:xfrm>
-          <a:prstGeom prst="rect">
-            <a:avLst/>
-          </a:prstGeom>
-          <a:solidFill>
-            <a:srgbClr val="38BDF8"/>
-          </a:solidFill>
-          <a:ln>
-            <a:noFill/>
-          </a:ln>
-        </p:spPr>
-        <p:style>
-          <a:lnRef idx="1">
-            <a:schemeClr val="accent1"/>
-          </a:lnRef>
-          <a:fillRef idx="3">
-            <a:schemeClr val="accent1"/>
-          </a:fillRef>
-          <a:effectRef idx="2">
-            <a:schemeClr val="accent1"/>
-          </a:effectRef>
-          <a:fontRef idx="minor">
-            <a:schemeClr val="lt1"/>
-          </a:fontRef>
-        </p:style>
-        <p:txBody>
-          <a:bodyPr rtlCol="0" anchor="ctr"/>
-          <a:lstStyle/>
-          <a:p>
-            <a:pPr algn="ctr"/>
-          </a:p>
-        </p:txBody>
-      </p:sp>
-      <p:sp>
-        <p:nvSpPr>
-          <p:cNvPr id="21" name="TextBox 20"/>
-          <p:cNvSpPr txBox="1"/>
-          <p:nvPr/>
-        </p:nvSpPr>
-        <p:spPr>
-          <a:xfrm>
-            <a:off x="914400" y="3566160"/>
-            <a:ext cx="3035808" cy="1645920"/>
-          </a:xfrm>
-          <a:prstGeom prst="rect">
-            <a:avLst/>
-          </a:prstGeom>
-          <a:noFill/>
-        </p:spPr>
-        <p:txBody>
-          <a:bodyPr wrap="square" lIns="0" tIns="0" rIns="0" bIns="0">
-            <a:spAutoFit/>
-          </a:bodyPr>
-          <a:lstStyle/>
-          <a:p>
-            <a:pPr>
-              <a:defRPr sz="4200" b="1">
-                <a:solidFill>
-                  <a:srgbClr val="FFFFFF"/>
-                </a:solidFill>
-                <a:latin typeface="Segoe UI"/>
-              </a:defRPr>
-            </a:pPr>
-            <a:r>
-              <a:t>$50B+</a:t>
-            </a:r>
-          </a:p>
-          <a:p>
-            <a:pPr>
-              <a:spcBef>
-                <a:spcPts val="200"/>
-              </a:spcBef>
-              <a:defRPr sz="1550" b="1">
-                <a:solidFill>
-                  <a:srgbClr val="38BDF8"/>
-                </a:solidFill>
-                <a:latin typeface="Segoe UI"/>
-              </a:defRPr>
-            </a:pPr>
-            <a:r>
-              <a:t>ANNUAL FREIGHT LOSS</a:t>
-            </a:r>
-          </a:p>
-          <a:p>
-            <a:pPr>
-              <a:spcBef>
-                <a:spcPts val="500"/>
-              </a:spcBef>
-              <a:defRPr sz="1350">
+              <a:t>• Catching It at the Dock: </a:t>
+            </a:r>
+            <a:r>
+              <a:rPr b="0">
                 <a:solidFill>
                   <a:srgbClr val="CBD5E1"/>
                 </a:solidFill>
-                <a:latin typeface="Segoe UI"/>
-              </a:defRPr>
-            </a:pPr>
-            <a:r>
-              <a:t>Destroyed in warehouses each year before reaching highways—mostly unrecorded.</a:t>
-            </a:r>
-          </a:p>
-        </p:txBody>
-      </p:sp>
-      <p:sp>
-        <p:nvSpPr>
-          <p:cNvPr id="22" name="Rectangle 21"/>
-          <p:cNvSpPr/>
-          <p:nvPr/>
-        </p:nvSpPr>
-        <p:spPr>
-          <a:xfrm>
-            <a:off x="4389120" y="3401568"/>
-            <a:ext cx="3401568" cy="1965960"/>
-          </a:xfrm>
-          <a:prstGeom prst="rect">
-            <a:avLst/>
-          </a:prstGeom>
-          <a:solidFill>
-            <a:srgbClr val="0A192E"/>
-          </a:solidFill>
-          <a:ln w="12700">
-            <a:solidFill>
-              <a:srgbClr val="1C3E66"/>
-            </a:solidFill>
-          </a:ln>
-        </p:spPr>
-        <p:style>
-          <a:lnRef idx="1">
-            <a:schemeClr val="accent1"/>
-          </a:lnRef>
-          <a:fillRef idx="3">
-            <a:schemeClr val="accent1"/>
-          </a:fillRef>
-          <a:effectRef idx="2">
-            <a:schemeClr val="accent1"/>
-          </a:effectRef>
-          <a:fontRef idx="minor">
-            <a:schemeClr val="lt1"/>
-          </a:fontRef>
-        </p:style>
-        <p:txBody>
-          <a:bodyPr rtlCol="0" anchor="ctr"/>
-          <a:lstStyle/>
-          <a:p>
-            <a:pPr algn="ctr"/>
-          </a:p>
-        </p:txBody>
-      </p:sp>
-      <p:sp>
-        <p:nvSpPr>
-          <p:cNvPr id="23" name="Rectangle 22"/>
-          <p:cNvSpPr/>
-          <p:nvPr/>
-        </p:nvSpPr>
-        <p:spPr>
-          <a:xfrm>
-            <a:off x="4389120" y="3401568"/>
-            <a:ext cx="3401568" cy="32004"/>
-          </a:xfrm>
-          <a:prstGeom prst="rect">
-            <a:avLst/>
-          </a:prstGeom>
-          <a:solidFill>
-            <a:srgbClr val="38BDF8"/>
-          </a:solidFill>
-          <a:ln>
-            <a:noFill/>
-          </a:ln>
-        </p:spPr>
-        <p:style>
-          <a:lnRef idx="1">
-            <a:schemeClr val="accent1"/>
-          </a:lnRef>
-          <a:fillRef idx="3">
-            <a:schemeClr val="accent1"/>
-          </a:fillRef>
-          <a:effectRef idx="2">
-            <a:schemeClr val="accent1"/>
-          </a:effectRef>
-          <a:fontRef idx="minor">
-            <a:schemeClr val="lt1"/>
-          </a:fontRef>
-        </p:style>
-        <p:txBody>
-          <a:bodyPr rtlCol="0" anchor="ctr"/>
-          <a:lstStyle/>
-          <a:p>
-            <a:pPr algn="ctr"/>
-          </a:p>
-        </p:txBody>
-      </p:sp>
-      <p:sp>
-        <p:nvSpPr>
-          <p:cNvPr id="24" name="TextBox 23"/>
-          <p:cNvSpPr txBox="1"/>
-          <p:nvPr/>
-        </p:nvSpPr>
-        <p:spPr>
-          <a:xfrm>
-            <a:off x="4572000" y="3566160"/>
-            <a:ext cx="3035808" cy="1645920"/>
-          </a:xfrm>
-          <a:prstGeom prst="rect">
-            <a:avLst/>
-          </a:prstGeom>
-          <a:noFill/>
-        </p:spPr>
-        <p:txBody>
-          <a:bodyPr wrap="square" lIns="0" tIns="0" rIns="0" bIns="0">
-            <a:spAutoFit/>
-          </a:bodyPr>
-          <a:lstStyle/>
-          <a:p>
-            <a:pPr>
-              <a:defRPr sz="4200" b="1">
-                <a:solidFill>
-                  <a:srgbClr val="FFFFFF"/>
-                </a:solidFill>
-                <a:latin typeface="Segoe UI"/>
-              </a:defRPr>
-            </a:pPr>
-            <a:r>
-              <a:t>1 : 10</a:t>
-            </a:r>
-          </a:p>
-          <a:p>
-            <a:pPr>
-              <a:spcBef>
-                <a:spcPts val="200"/>
-              </a:spcBef>
-              <a:defRPr sz="1550" b="1">
-                <a:solidFill>
-                  <a:srgbClr val="38BDF8"/>
-                </a:solidFill>
-                <a:latin typeface="Segoe UI"/>
-              </a:defRPr>
-            </a:pPr>
-            <a:r>
-              <a:t>SUPERVISOR BLINDSPOT</a:t>
-            </a:r>
-          </a:p>
-          <a:p>
-            <a:pPr>
-              <a:spcBef>
-                <a:spcPts val="500"/>
-              </a:spcBef>
-              <a:defRPr sz="1350">
-                <a:solidFill>
-                  <a:srgbClr val="CBD5E1"/>
-                </a:solidFill>
-                <a:latin typeface="Segoe UI"/>
-              </a:defRPr>
-            </a:pPr>
-            <a:r>
-              <a:t>1 supervisor managing 10 active bays and 40 fast-moving workers simultaneously.</a:t>
-            </a:r>
-          </a:p>
-        </p:txBody>
-      </p:sp>
-      <p:sp>
-        <p:nvSpPr>
-          <p:cNvPr id="25" name="Rectangle 24"/>
-          <p:cNvSpPr/>
-          <p:nvPr/>
-        </p:nvSpPr>
-        <p:spPr>
-          <a:xfrm>
-            <a:off x="8046720" y="3401568"/>
-            <a:ext cx="3401568" cy="1965960"/>
-          </a:xfrm>
-          <a:prstGeom prst="rect">
-            <a:avLst/>
-          </a:prstGeom>
-          <a:solidFill>
-            <a:srgbClr val="0A192E"/>
-          </a:solidFill>
-          <a:ln w="12700">
-            <a:solidFill>
-              <a:srgbClr val="1C3E66"/>
-            </a:solidFill>
-          </a:ln>
-        </p:spPr>
-        <p:style>
-          <a:lnRef idx="1">
-            <a:schemeClr val="accent1"/>
-          </a:lnRef>
-          <a:fillRef idx="3">
-            <a:schemeClr val="accent1"/>
-          </a:fillRef>
-          <a:effectRef idx="2">
-            <a:schemeClr val="accent1"/>
-          </a:effectRef>
-          <a:fontRef idx="minor">
-            <a:schemeClr val="lt1"/>
-          </a:fontRef>
-        </p:style>
-        <p:txBody>
-          <a:bodyPr rtlCol="0" anchor="ctr"/>
-          <a:lstStyle/>
-          <a:p>
-            <a:pPr algn="ctr"/>
-          </a:p>
-        </p:txBody>
-      </p:sp>
-      <p:sp>
-        <p:nvSpPr>
-          <p:cNvPr id="26" name="Rectangle 25"/>
-          <p:cNvSpPr/>
-          <p:nvPr/>
-        </p:nvSpPr>
-        <p:spPr>
-          <a:xfrm>
-            <a:off x="8046720" y="3401568"/>
-            <a:ext cx="3401568" cy="32004"/>
-          </a:xfrm>
-          <a:prstGeom prst="rect">
-            <a:avLst/>
-          </a:prstGeom>
-          <a:solidFill>
-            <a:srgbClr val="38BDF8"/>
-          </a:solidFill>
-          <a:ln>
-            <a:noFill/>
-          </a:ln>
-        </p:spPr>
-        <p:style>
-          <a:lnRef idx="1">
-            <a:schemeClr val="accent1"/>
-          </a:lnRef>
-          <a:fillRef idx="3">
-            <a:schemeClr val="accent1"/>
-          </a:fillRef>
-          <a:effectRef idx="2">
-            <a:schemeClr val="accent1"/>
-          </a:effectRef>
-          <a:fontRef idx="minor">
-            <a:schemeClr val="lt1"/>
-          </a:fontRef>
-        </p:style>
-        <p:txBody>
-          <a:bodyPr rtlCol="0" anchor="ctr"/>
-          <a:lstStyle/>
-          <a:p>
-            <a:pPr algn="ctr"/>
-          </a:p>
-        </p:txBody>
-      </p:sp>
-      <p:sp>
-        <p:nvSpPr>
-          <p:cNvPr id="27" name="TextBox 26"/>
-          <p:cNvSpPr txBox="1"/>
-          <p:nvPr/>
-        </p:nvSpPr>
-        <p:spPr>
-          <a:xfrm>
-            <a:off x="8229600" y="3566160"/>
-            <a:ext cx="3035808" cy="1645920"/>
-          </a:xfrm>
-          <a:prstGeom prst="rect">
-            <a:avLst/>
-          </a:prstGeom>
-          <a:noFill/>
-        </p:spPr>
-        <p:txBody>
-          <a:bodyPr wrap="square" lIns="0" tIns="0" rIns="0" bIns="0">
-            <a:spAutoFit/>
-          </a:bodyPr>
-          <a:lstStyle/>
-          <a:p>
-            <a:pPr>
-              <a:defRPr sz="4200" b="1">
-                <a:solidFill>
-                  <a:srgbClr val="FFFFFF"/>
-                </a:solidFill>
-                <a:latin typeface="Segoe UI"/>
-              </a:defRPr>
-            </a:pPr>
-            <a:r>
-              <a:t>&lt; 1.5s</a:t>
-            </a:r>
-          </a:p>
-          <a:p>
-            <a:pPr>
-              <a:spcBef>
-                <a:spcPts val="200"/>
-              </a:spcBef>
-              <a:defRPr sz="1550" b="1">
-                <a:solidFill>
-                  <a:srgbClr val="38BDF8"/>
-                </a:solidFill>
-                <a:latin typeface="Segoe UI"/>
-              </a:defRPr>
-            </a:pPr>
-            <a:r>
-              <a:t>INTERVENTION WINDOW</a:t>
-            </a:r>
-          </a:p>
-          <a:p>
-            <a:pPr>
-              <a:spcBef>
-                <a:spcPts val="500"/>
-              </a:spcBef>
-              <a:defRPr sz="1350">
-                <a:solidFill>
-                  <a:srgbClr val="CBD5E1"/>
-                </a:solidFill>
-                <a:latin typeface="Segoe UI"/>
-              </a:defRPr>
-            </a:pPr>
-            <a:r>
-              <a:t>Dockside repack costs $10. Letting cracked cargo reach customers costs $200+.</a:t>
-            </a:r>
-          </a:p>
-        </p:txBody>
-      </p:sp>
-      <p:sp>
-        <p:nvSpPr>
-          <p:cNvPr id="28" name="TextBox 27"/>
-          <p:cNvSpPr txBox="1"/>
-          <p:nvPr/>
-        </p:nvSpPr>
-        <p:spPr>
-          <a:xfrm>
-            <a:off x="731520" y="6126480"/>
-            <a:ext cx="10728655" cy="365760"/>
-          </a:xfrm>
-          <a:prstGeom prst="rect">
-            <a:avLst/>
-          </a:prstGeom>
-          <a:noFill/>
-        </p:spPr>
-        <p:txBody>
-          <a:bodyPr wrap="none" lIns="0" tIns="0" rIns="0" bIns="0">
-            <a:spAutoFit/>
-          </a:bodyPr>
-          <a:lstStyle/>
-          <a:p>
-            <a:pPr>
-              <a:defRPr sz="1550" b="1">
-                <a:solidFill>
-                  <a:srgbClr val="FFFFFF"/>
-                </a:solidFill>
-                <a:latin typeface="Segoe UI"/>
-              </a:defRPr>
-            </a:pPr>
-            <a:r>
-              <a:t>Team VisionGuard: </a:t>
-            </a:r>
-            <a:r>
-              <a:rPr b="0">
-                <a:solidFill>
-                  <a:srgbClr val="38BDF8"/>
-                </a:solidFill>
               </a:rPr>
-              <a:t>Aastha Gupta (Computer Vision)   •   Lucky Lakhani (AI Pipeline)   •   Runjan Bawa (Dashboard &amp; UX)</a:t>
+              <a:t>If you catch a cracked box before it's loaded into the trailer, replacing it costs $10. If it reaches the customer, it costs $200+ and a bad review.</a:t>
             </a:r>
           </a:p>
         </p:txBody>
@@ -4431,8 +3831,8 @@
         </p:nvSpPr>
         <p:spPr>
           <a:xfrm>
-            <a:off x="731520" y="384048"/>
-            <a:ext cx="5943600" cy="274320"/>
+            <a:off x="731520" y="347472"/>
+            <a:ext cx="5943600" cy="256032"/>
           </a:xfrm>
           <a:prstGeom prst="rect">
             <a:avLst/>
@@ -4446,7 +3846,7 @@
           <a:lstStyle/>
           <a:p>
             <a:pPr>
-              <a:defRPr sz="1350" b="1">
+              <a:defRPr sz="1100" b="1">
                 <a:solidFill>
                   <a:srgbClr val="38BDF8"/>
                 </a:solidFill>
@@ -4467,7 +3867,7 @@
         </p:nvSpPr>
         <p:spPr>
           <a:xfrm>
-            <a:off x="731520" y="658368"/>
+            <a:off x="731520" y="621792"/>
             <a:ext cx="10728655" cy="502920"/>
           </a:xfrm>
           <a:prstGeom prst="rect">
@@ -4482,7 +3882,7 @@
           <a:lstStyle/>
           <a:p>
             <a:pPr>
-              <a:defRPr sz="2900" b="1">
+              <a:defRPr sz="2500" b="1">
                 <a:solidFill>
                   <a:srgbClr val="FFFFFF"/>
                 </a:solidFill>
@@ -4490,7 +3890,7 @@
               </a:defRPr>
             </a:pPr>
             <a:r>
-              <a:t>From Sensor to Prevention: The 6-Stage Loop</a:t>
+              <a:t>The Mystery of the Smashed Box (And How We Catch It)</a:t>
             </a:r>
           </a:p>
         </p:txBody>
@@ -4503,7 +3903,7 @@
         </p:nvSpPr>
         <p:spPr>
           <a:xfrm>
-            <a:off x="731520" y="1234440"/>
+            <a:off x="731520" y="1170432"/>
             <a:ext cx="10728655" cy="13716"/>
           </a:xfrm>
           <a:prstGeom prst="rect">
@@ -4546,8 +3946,8 @@
         </p:nvSpPr>
         <p:spPr>
           <a:xfrm>
-            <a:off x="731520" y="1444752"/>
-            <a:ext cx="1664208" cy="1353312"/>
+            <a:off x="731520" y="1353312"/>
+            <a:ext cx="1444752" cy="1115568"/>
           </a:xfrm>
           <a:prstGeom prst="rect">
             <a:avLst/>
@@ -4591,8 +3991,8 @@
         </p:nvSpPr>
         <p:spPr>
           <a:xfrm>
-            <a:off x="731520" y="1444752"/>
-            <a:ext cx="1664208" cy="36576"/>
+            <a:off x="731520" y="1353312"/>
+            <a:ext cx="1444752" cy="32004"/>
           </a:xfrm>
           <a:prstGeom prst="rect">
             <a:avLst/>
@@ -4634,8 +4034,8 @@
         </p:nvSpPr>
         <p:spPr>
           <a:xfrm>
-            <a:off x="822960" y="1554480"/>
-            <a:ext cx="1481328" cy="1143000"/>
+            <a:off x="786384" y="1444752"/>
+            <a:ext cx="1335024" cy="960120"/>
           </a:xfrm>
           <a:prstGeom prst="rect">
             <a:avLst/>
@@ -4648,24 +4048,8 @@
           </a:bodyPr>
           <a:lstStyle/>
           <a:p>
-            <a:pPr>
-              <a:defRPr sz="1700" b="1">
-                <a:solidFill>
-                  <a:srgbClr val="38BDF8"/>
-                </a:solidFill>
-                <a:latin typeface="Segoe UI"/>
-              </a:defRPr>
-            </a:pPr>
-            <a:r>
-              <a:t>01</a:t>
-            </a:r>
-          </a:p>
-          <a:p>
-            <a:pPr>
-              <a:spcBef>
-                <a:spcPts val="200"/>
-              </a:spcBef>
-              <a:defRPr sz="1650" b="1">
+            <a:pPr algn="ctr">
+              <a:defRPr sz="1200" b="1">
                 <a:solidFill>
                   <a:srgbClr val="FFFFFF"/>
                 </a:solidFill>
@@ -4673,15 +4057,15 @@
               </a:defRPr>
             </a:pPr>
             <a:r>
-              <a:t>CCTV Video</a:t>
-            </a:r>
-          </a:p>
-          <a:p>
-            <a:pPr>
+              <a:t>1. Loading Bay</a:t>
+            </a:r>
+          </a:p>
+          <a:p>
+            <a:pPr algn="ctr">
               <a:spcBef>
                 <a:spcPts val="300"/>
               </a:spcBef>
-              <a:defRPr sz="1300">
+              <a:defRPr sz="1000">
                 <a:solidFill>
                   <a:srgbClr val="E2E8F0"/>
                 </a:solidFill>
@@ -4689,7 +4073,7 @@
               </a:defRPr>
             </a:pPr>
             <a:r>
-              <a:t>1080p dock stream</a:t>
+              <a:t>Cartons loaded into trucks</a:t>
             </a:r>
           </a:p>
         </p:txBody>
@@ -4702,8 +4086,288 @@
         </p:nvSpPr>
         <p:spPr>
           <a:xfrm>
-            <a:off x="2542032" y="1444752"/>
-            <a:ext cx="1664208" cy="1353312"/>
+            <a:off x="2276856" y="1353312"/>
+            <a:ext cx="1444752" cy="1115568"/>
+          </a:xfrm>
+          <a:prstGeom prst="rect">
+            <a:avLst/>
+          </a:prstGeom>
+          <a:solidFill>
+            <a:srgbClr val="0A192E"/>
+          </a:solidFill>
+          <a:ln w="12700">
+            <a:solidFill>
+              <a:srgbClr val="1C3E66"/>
+            </a:solidFill>
+          </a:ln>
+        </p:spPr>
+        <p:style>
+          <a:lnRef idx="1">
+            <a:schemeClr val="accent1"/>
+          </a:lnRef>
+          <a:fillRef idx="3">
+            <a:schemeClr val="accent1"/>
+          </a:fillRef>
+          <a:effectRef idx="2">
+            <a:schemeClr val="accent1"/>
+          </a:effectRef>
+          <a:fontRef idx="minor">
+            <a:schemeClr val="lt1"/>
+          </a:fontRef>
+        </p:style>
+        <p:txBody>
+          <a:bodyPr rtlCol="0" anchor="ctr"/>
+          <a:lstStyle/>
+          <a:p>
+            <a:pPr algn="ctr"/>
+          </a:p>
+        </p:txBody>
+      </p:sp>
+      <p:sp>
+        <p:nvSpPr>
+          <p:cNvPr id="9" name="Rectangle 8"/>
+          <p:cNvSpPr/>
+          <p:nvPr/>
+        </p:nvSpPr>
+        <p:spPr>
+          <a:xfrm>
+            <a:off x="2276856" y="1353312"/>
+            <a:ext cx="1444752" cy="32004"/>
+          </a:xfrm>
+          <a:prstGeom prst="rect">
+            <a:avLst/>
+          </a:prstGeom>
+          <a:solidFill>
+            <a:srgbClr val="1C3E66"/>
+          </a:solidFill>
+          <a:ln>
+            <a:noFill/>
+          </a:ln>
+        </p:spPr>
+        <p:style>
+          <a:lnRef idx="1">
+            <a:schemeClr val="accent1"/>
+          </a:lnRef>
+          <a:fillRef idx="3">
+            <a:schemeClr val="accent1"/>
+          </a:fillRef>
+          <a:effectRef idx="2">
+            <a:schemeClr val="accent1"/>
+          </a:effectRef>
+          <a:fontRef idx="minor">
+            <a:schemeClr val="lt1"/>
+          </a:fontRef>
+        </p:style>
+        <p:txBody>
+          <a:bodyPr rtlCol="0" anchor="ctr"/>
+          <a:lstStyle/>
+          <a:p>
+            <a:pPr algn="ctr"/>
+          </a:p>
+        </p:txBody>
+      </p:sp>
+      <p:sp>
+        <p:nvSpPr>
+          <p:cNvPr id="10" name="TextBox 9"/>
+          <p:cNvSpPr txBox="1"/>
+          <p:nvPr/>
+        </p:nvSpPr>
+        <p:spPr>
+          <a:xfrm>
+            <a:off x="2331720" y="1444752"/>
+            <a:ext cx="1335024" cy="960120"/>
+          </a:xfrm>
+          <a:prstGeom prst="rect">
+            <a:avLst/>
+          </a:prstGeom>
+          <a:noFill/>
+        </p:spPr>
+        <p:txBody>
+          <a:bodyPr wrap="square" lIns="0" tIns="0" rIns="0" bIns="0">
+            <a:spAutoFit/>
+          </a:bodyPr>
+          <a:lstStyle/>
+          <a:p>
+            <a:pPr algn="ctr">
+              <a:defRPr sz="1200" b="1">
+                <a:solidFill>
+                  <a:srgbClr val="FFFFFF"/>
+                </a:solidFill>
+                <a:latin typeface="Segoe UI"/>
+              </a:defRPr>
+            </a:pPr>
+            <a:r>
+              <a:t>2. CCTV Camera</a:t>
+            </a:r>
+          </a:p>
+          <a:p>
+            <a:pPr algn="ctr">
+              <a:spcBef>
+                <a:spcPts val="300"/>
+              </a:spcBef>
+              <a:defRPr sz="1000">
+                <a:solidFill>
+                  <a:srgbClr val="E2E8F0"/>
+                </a:solidFill>
+                <a:latin typeface="Segoe UI"/>
+              </a:defRPr>
+            </a:pPr>
+            <a:r>
+              <a:t>Standard security camera</a:t>
+            </a:r>
+          </a:p>
+        </p:txBody>
+      </p:sp>
+      <p:sp>
+        <p:nvSpPr>
+          <p:cNvPr id="11" name="Rectangle 10"/>
+          <p:cNvSpPr/>
+          <p:nvPr/>
+        </p:nvSpPr>
+        <p:spPr>
+          <a:xfrm>
+            <a:off x="3822192" y="1353312"/>
+            <a:ext cx="1444752" cy="1115568"/>
+          </a:xfrm>
+          <a:prstGeom prst="rect">
+            <a:avLst/>
+          </a:prstGeom>
+          <a:solidFill>
+            <a:srgbClr val="0A192E"/>
+          </a:solidFill>
+          <a:ln w="12700">
+            <a:solidFill>
+              <a:srgbClr val="1C3E66"/>
+            </a:solidFill>
+          </a:ln>
+        </p:spPr>
+        <p:style>
+          <a:lnRef idx="1">
+            <a:schemeClr val="accent1"/>
+          </a:lnRef>
+          <a:fillRef idx="3">
+            <a:schemeClr val="accent1"/>
+          </a:fillRef>
+          <a:effectRef idx="2">
+            <a:schemeClr val="accent1"/>
+          </a:effectRef>
+          <a:fontRef idx="minor">
+            <a:schemeClr val="lt1"/>
+          </a:fontRef>
+        </p:style>
+        <p:txBody>
+          <a:bodyPr rtlCol="0" anchor="ctr"/>
+          <a:lstStyle/>
+          <a:p>
+            <a:pPr algn="ctr"/>
+          </a:p>
+        </p:txBody>
+      </p:sp>
+      <p:sp>
+        <p:nvSpPr>
+          <p:cNvPr id="12" name="Rectangle 11"/>
+          <p:cNvSpPr/>
+          <p:nvPr/>
+        </p:nvSpPr>
+        <p:spPr>
+          <a:xfrm>
+            <a:off x="3822192" y="1353312"/>
+            <a:ext cx="1444752" cy="32004"/>
+          </a:xfrm>
+          <a:prstGeom prst="rect">
+            <a:avLst/>
+          </a:prstGeom>
+          <a:solidFill>
+            <a:srgbClr val="1C3E66"/>
+          </a:solidFill>
+          <a:ln>
+            <a:noFill/>
+          </a:ln>
+        </p:spPr>
+        <p:style>
+          <a:lnRef idx="1">
+            <a:schemeClr val="accent1"/>
+          </a:lnRef>
+          <a:fillRef idx="3">
+            <a:schemeClr val="accent1"/>
+          </a:fillRef>
+          <a:effectRef idx="2">
+            <a:schemeClr val="accent1"/>
+          </a:effectRef>
+          <a:fontRef idx="minor">
+            <a:schemeClr val="lt1"/>
+          </a:fontRef>
+        </p:style>
+        <p:txBody>
+          <a:bodyPr rtlCol="0" anchor="ctr"/>
+          <a:lstStyle/>
+          <a:p>
+            <a:pPr algn="ctr"/>
+          </a:p>
+        </p:txBody>
+      </p:sp>
+      <p:sp>
+        <p:nvSpPr>
+          <p:cNvPr id="13" name="TextBox 12"/>
+          <p:cNvSpPr txBox="1"/>
+          <p:nvPr/>
+        </p:nvSpPr>
+        <p:spPr>
+          <a:xfrm>
+            <a:off x="3877056" y="1444752"/>
+            <a:ext cx="1335024" cy="960120"/>
+          </a:xfrm>
+          <a:prstGeom prst="rect">
+            <a:avLst/>
+          </a:prstGeom>
+          <a:noFill/>
+        </p:spPr>
+        <p:txBody>
+          <a:bodyPr wrap="square" lIns="0" tIns="0" rIns="0" bIns="0">
+            <a:spAutoFit/>
+          </a:bodyPr>
+          <a:lstStyle/>
+          <a:p>
+            <a:pPr algn="ctr">
+              <a:defRPr sz="1200" b="1">
+                <a:solidFill>
+                  <a:srgbClr val="FFFFFF"/>
+                </a:solidFill>
+                <a:latin typeface="Segoe UI"/>
+              </a:defRPr>
+            </a:pPr>
+            <a:r>
+              <a:t>3. AI Eyes</a:t>
+            </a:r>
+          </a:p>
+          <a:p>
+            <a:pPr algn="ctr">
+              <a:spcBef>
+                <a:spcPts val="300"/>
+              </a:spcBef>
+              <a:defRPr sz="1000">
+                <a:solidFill>
+                  <a:srgbClr val="E2E8F0"/>
+                </a:solidFill>
+                <a:latin typeface="Segoe UI"/>
+              </a:defRPr>
+            </a:pPr>
+            <a:r>
+              <a:t>YOLOv8 tracks every box</a:t>
+            </a:r>
+          </a:p>
+        </p:txBody>
+      </p:sp>
+      <p:sp>
+        <p:nvSpPr>
+          <p:cNvPr id="14" name="Rectangle 13"/>
+          <p:cNvSpPr/>
+          <p:nvPr/>
+        </p:nvSpPr>
+        <p:spPr>
+          <a:xfrm>
+            <a:off x="5367528" y="1353312"/>
+            <a:ext cx="1444752" cy="1115568"/>
           </a:xfrm>
           <a:prstGeom prst="rect">
             <a:avLst/>
@@ -4741,14 +4405,14 @@
       </p:sp>
       <p:sp>
         <p:nvSpPr>
-          <p:cNvPr id="9" name="Rectangle 8"/>
+          <p:cNvPr id="15" name="Rectangle 14"/>
           <p:cNvSpPr/>
           <p:nvPr/>
         </p:nvSpPr>
         <p:spPr>
           <a:xfrm>
-            <a:off x="2542032" y="1444752"/>
-            <a:ext cx="1664208" cy="36576"/>
+            <a:off x="5367528" y="1353312"/>
+            <a:ext cx="1444752" cy="32004"/>
           </a:xfrm>
           <a:prstGeom prst="rect">
             <a:avLst/>
@@ -4784,14 +4448,14 @@
       </p:sp>
       <p:sp>
         <p:nvSpPr>
-          <p:cNvPr id="10" name="TextBox 9"/>
+          <p:cNvPr id="16" name="TextBox 15"/>
           <p:cNvSpPr txBox="1"/>
           <p:nvPr/>
         </p:nvSpPr>
         <p:spPr>
           <a:xfrm>
-            <a:off x="2633472" y="1554480"/>
-            <a:ext cx="1481328" cy="1143000"/>
+            <a:off x="5422392" y="1444752"/>
+            <a:ext cx="1335024" cy="960120"/>
           </a:xfrm>
           <a:prstGeom prst="rect">
             <a:avLst/>
@@ -4804,8 +4468,8 @@
           </a:bodyPr>
           <a:lstStyle/>
           <a:p>
-            <a:pPr>
-              <a:defRPr sz="1700" b="1">
+            <a:pPr algn="ctr">
+              <a:defRPr sz="1200" b="1">
                 <a:solidFill>
                   <a:srgbClr val="38BDF8"/>
                 </a:solidFill>
@@ -4813,31 +4477,15 @@
               </a:defRPr>
             </a:pPr>
             <a:r>
-              <a:t>02</a:t>
-            </a:r>
-          </a:p>
-          <a:p>
-            <a:pPr>
-              <a:spcBef>
-                <a:spcPts val="200"/>
-              </a:spcBef>
-              <a:defRPr sz="1650" b="1">
-                <a:solidFill>
-                  <a:srgbClr val="FFFFFF"/>
-                </a:solidFill>
-                <a:latin typeface="Segoe UI"/>
-              </a:defRPr>
-            </a:pPr>
-            <a:r>
-              <a:t>YOLOv8</a:t>
-            </a:r>
-          </a:p>
-          <a:p>
-            <a:pPr>
+              <a:t>4. Danger!</a:t>
+            </a:r>
+          </a:p>
+          <a:p>
+            <a:pPr algn="ctr">
               <a:spcBef>
                 <a:spcPts val="300"/>
               </a:spcBef>
-              <a:defRPr sz="1300">
+              <a:defRPr sz="1000">
                 <a:solidFill>
                   <a:srgbClr val="E2E8F0"/>
                 </a:solidFill>
@@ -4845,21 +4493,21 @@
               </a:defRPr>
             </a:pPr>
             <a:r>
-              <a:t>Track boxes &amp; crew</a:t>
-            </a:r>
-          </a:p>
-        </p:txBody>
-      </p:sp>
-      <p:sp>
-        <p:nvSpPr>
-          <p:cNvPr id="11" name="Rectangle 10"/>
+              <a:t>Speed spike or drag flagged</a:t>
+            </a:r>
+          </a:p>
+        </p:txBody>
+      </p:sp>
+      <p:sp>
+        <p:nvSpPr>
+          <p:cNvPr id="17" name="Rectangle 16"/>
           <p:cNvSpPr/>
           <p:nvPr/>
         </p:nvSpPr>
         <p:spPr>
           <a:xfrm>
-            <a:off x="4352544" y="1444752"/>
-            <a:ext cx="1664208" cy="1353312"/>
+            <a:off x="6912864" y="1353312"/>
+            <a:ext cx="1444752" cy="1115568"/>
           </a:xfrm>
           <a:prstGeom prst="rect">
             <a:avLst/>
@@ -4897,14 +4545,14 @@
       </p:sp>
       <p:sp>
         <p:nvSpPr>
-          <p:cNvPr id="12" name="Rectangle 11"/>
+          <p:cNvPr id="18" name="Rectangle 17"/>
           <p:cNvSpPr/>
           <p:nvPr/>
         </p:nvSpPr>
         <p:spPr>
           <a:xfrm>
-            <a:off x="4352544" y="1444752"/>
-            <a:ext cx="1664208" cy="36576"/>
+            <a:off x="6912864" y="1353312"/>
+            <a:ext cx="1444752" cy="32004"/>
           </a:xfrm>
           <a:prstGeom prst="rect">
             <a:avLst/>
@@ -4940,14 +4588,14 @@
       </p:sp>
       <p:sp>
         <p:nvSpPr>
-          <p:cNvPr id="13" name="TextBox 12"/>
+          <p:cNvPr id="19" name="TextBox 18"/>
           <p:cNvSpPr txBox="1"/>
           <p:nvPr/>
         </p:nvSpPr>
         <p:spPr>
           <a:xfrm>
-            <a:off x="4443984" y="1554480"/>
-            <a:ext cx="1481328" cy="1143000"/>
+            <a:off x="6967728" y="1444752"/>
+            <a:ext cx="1335024" cy="960120"/>
           </a:xfrm>
           <a:prstGeom prst="rect">
             <a:avLst/>
@@ -4960,8 +4608,8 @@
           </a:bodyPr>
           <a:lstStyle/>
           <a:p>
-            <a:pPr>
-              <a:defRPr sz="1700" b="1">
+            <a:pPr algn="ctr">
+              <a:defRPr sz="1200" b="1">
                 <a:solidFill>
                   <a:srgbClr val="38BDF8"/>
                 </a:solidFill>
@@ -4969,31 +4617,15 @@
               </a:defRPr>
             </a:pPr>
             <a:r>
-              <a:t>03</a:t>
-            </a:r>
-          </a:p>
-          <a:p>
-            <a:pPr>
-              <a:spcBef>
-                <a:spcPts val="200"/>
-              </a:spcBef>
-              <a:defRPr sz="1650" b="1">
-                <a:solidFill>
-                  <a:srgbClr val="FFFFFF"/>
-                </a:solidFill>
-                <a:latin typeface="Segoe UI"/>
-              </a:defRPr>
-            </a:pPr>
-            <a:r>
-              <a:t>Physics</a:t>
-            </a:r>
-          </a:p>
-          <a:p>
-            <a:pPr>
+              <a:t>5. Friendly Chime</a:t>
+            </a:r>
+          </a:p>
+          <a:p>
+            <a:pPr algn="ctr">
               <a:spcBef>
                 <a:spcPts val="300"/>
               </a:spcBef>
-              <a:defRPr sz="1300">
+              <a:defRPr sz="1000">
                 <a:solidFill>
                   <a:srgbClr val="E2E8F0"/>
                 </a:solidFill>
@@ -5001,21 +4633,161 @@
               </a:defRPr>
             </a:pPr>
             <a:r>
-              <a:t>vy &gt; 2.5m/s or drag</a:t>
-            </a:r>
-          </a:p>
-        </p:txBody>
-      </p:sp>
-      <p:sp>
-        <p:nvSpPr>
-          <p:cNvPr id="14" name="Rectangle 13"/>
+              <a:t>Polite sound alert at bay</a:t>
+            </a:r>
+          </a:p>
+        </p:txBody>
+      </p:sp>
+      <p:sp>
+        <p:nvSpPr>
+          <p:cNvPr id="20" name="Rectangle 19"/>
           <p:cNvSpPr/>
           <p:nvPr/>
         </p:nvSpPr>
         <p:spPr>
           <a:xfrm>
-            <a:off x="6163056" y="1444752"/>
-            <a:ext cx="1664208" cy="1353312"/>
+            <a:off x="8458200" y="1353312"/>
+            <a:ext cx="1444752" cy="1115568"/>
+          </a:xfrm>
+          <a:prstGeom prst="rect">
+            <a:avLst/>
+          </a:prstGeom>
+          <a:solidFill>
+            <a:srgbClr val="0A192E"/>
+          </a:solidFill>
+          <a:ln w="12700">
+            <a:solidFill>
+              <a:srgbClr val="1C3E66"/>
+            </a:solidFill>
+          </a:ln>
+        </p:spPr>
+        <p:style>
+          <a:lnRef idx="1">
+            <a:schemeClr val="accent1"/>
+          </a:lnRef>
+          <a:fillRef idx="3">
+            <a:schemeClr val="accent1"/>
+          </a:fillRef>
+          <a:effectRef idx="2">
+            <a:schemeClr val="accent1"/>
+          </a:effectRef>
+          <a:fontRef idx="minor">
+            <a:schemeClr val="lt1"/>
+          </a:fontRef>
+        </p:style>
+        <p:txBody>
+          <a:bodyPr rtlCol="0" anchor="ctr"/>
+          <a:lstStyle/>
+          <a:p>
+            <a:pPr algn="ctr"/>
+          </a:p>
+        </p:txBody>
+      </p:sp>
+      <p:sp>
+        <p:nvSpPr>
+          <p:cNvPr id="21" name="Rectangle 20"/>
+          <p:cNvSpPr/>
+          <p:nvPr/>
+        </p:nvSpPr>
+        <p:spPr>
+          <a:xfrm>
+            <a:off x="8458200" y="1353312"/>
+            <a:ext cx="1444752" cy="32004"/>
+          </a:xfrm>
+          <a:prstGeom prst="rect">
+            <a:avLst/>
+          </a:prstGeom>
+          <a:solidFill>
+            <a:srgbClr val="1C3E66"/>
+          </a:solidFill>
+          <a:ln>
+            <a:noFill/>
+          </a:ln>
+        </p:spPr>
+        <p:style>
+          <a:lnRef idx="1">
+            <a:schemeClr val="accent1"/>
+          </a:lnRef>
+          <a:fillRef idx="3">
+            <a:schemeClr val="accent1"/>
+          </a:fillRef>
+          <a:effectRef idx="2">
+            <a:schemeClr val="accent1"/>
+          </a:effectRef>
+          <a:fontRef idx="minor">
+            <a:schemeClr val="lt1"/>
+          </a:fontRef>
+        </p:style>
+        <p:txBody>
+          <a:bodyPr rtlCol="0" anchor="ctr"/>
+          <a:lstStyle/>
+          <a:p>
+            <a:pPr algn="ctr"/>
+          </a:p>
+        </p:txBody>
+      </p:sp>
+      <p:sp>
+        <p:nvSpPr>
+          <p:cNvPr id="22" name="TextBox 21"/>
+          <p:cNvSpPr txBox="1"/>
+          <p:nvPr/>
+        </p:nvSpPr>
+        <p:spPr>
+          <a:xfrm>
+            <a:off x="8513064" y="1444752"/>
+            <a:ext cx="1335024" cy="960120"/>
+          </a:xfrm>
+          <a:prstGeom prst="rect">
+            <a:avLst/>
+          </a:prstGeom>
+          <a:noFill/>
+        </p:spPr>
+        <p:txBody>
+          <a:bodyPr wrap="square" lIns="0" tIns="0" rIns="0" bIns="0">
+            <a:spAutoFit/>
+          </a:bodyPr>
+          <a:lstStyle/>
+          <a:p>
+            <a:pPr algn="ctr">
+              <a:defRPr sz="1200" b="1">
+                <a:solidFill>
+                  <a:srgbClr val="FFFFFF"/>
+                </a:solidFill>
+                <a:latin typeface="Segoe UI"/>
+              </a:defRPr>
+            </a:pPr>
+            <a:r>
+              <a:t>6. Quick Check</a:t>
+            </a:r>
+          </a:p>
+          <a:p>
+            <a:pPr algn="ctr">
+              <a:spcBef>
+                <a:spcPts val="300"/>
+              </a:spcBef>
+              <a:defRPr sz="1000">
+                <a:solidFill>
+                  <a:srgbClr val="E2E8F0"/>
+                </a:solidFill>
+                <a:latin typeface="Segoe UI"/>
+              </a:defRPr>
+            </a:pPr>
+            <a:r>
+              <a:t>Worker inspects &amp; resets</a:t>
+            </a:r>
+          </a:p>
+        </p:txBody>
+      </p:sp>
+      <p:sp>
+        <p:nvSpPr>
+          <p:cNvPr id="23" name="Rectangle 22"/>
+          <p:cNvSpPr/>
+          <p:nvPr/>
+        </p:nvSpPr>
+        <p:spPr>
+          <a:xfrm>
+            <a:off x="10003536" y="1353312"/>
+            <a:ext cx="1444752" cy="1115568"/>
           </a:xfrm>
           <a:prstGeom prst="rect">
             <a:avLst/>
@@ -5053,14 +4825,14 @@
       </p:sp>
       <p:sp>
         <p:nvSpPr>
-          <p:cNvPr id="15" name="Rectangle 14"/>
+          <p:cNvPr id="24" name="Rectangle 23"/>
           <p:cNvSpPr/>
           <p:nvPr/>
         </p:nvSpPr>
         <p:spPr>
           <a:xfrm>
-            <a:off x="6163056" y="1444752"/>
-            <a:ext cx="1664208" cy="36576"/>
+            <a:off x="10003536" y="1353312"/>
+            <a:ext cx="1444752" cy="32004"/>
           </a:xfrm>
           <a:prstGeom prst="rect">
             <a:avLst/>
@@ -5096,14 +4868,14 @@
       </p:sp>
       <p:sp>
         <p:nvSpPr>
-          <p:cNvPr id="16" name="TextBox 15"/>
+          <p:cNvPr id="25" name="TextBox 24"/>
           <p:cNvSpPr txBox="1"/>
           <p:nvPr/>
         </p:nvSpPr>
         <p:spPr>
           <a:xfrm>
-            <a:off x="6254496" y="1554480"/>
-            <a:ext cx="1481328" cy="1143000"/>
+            <a:off x="10058400" y="1444752"/>
+            <a:ext cx="1335024" cy="960120"/>
           </a:xfrm>
           <a:prstGeom prst="rect">
             <a:avLst/>
@@ -5116,8 +4888,8 @@
           </a:bodyPr>
           <a:lstStyle/>
           <a:p>
-            <a:pPr>
-              <a:defRPr sz="1700" b="1">
+            <a:pPr algn="ctr">
+              <a:defRPr sz="1200" b="1">
                 <a:solidFill>
                   <a:srgbClr val="38BDF8"/>
                 </a:solidFill>
@@ -5125,31 +4897,15 @@
               </a:defRPr>
             </a:pPr>
             <a:r>
-              <a:t>04</a:t>
-            </a:r>
-          </a:p>
-          <a:p>
-            <a:pPr>
-              <a:spcBef>
-                <a:spcPts val="200"/>
-              </a:spcBef>
-              <a:defRPr sz="1650" b="1">
-                <a:solidFill>
-                  <a:srgbClr val="FFFFFF"/>
-                </a:solidFill>
-                <a:latin typeface="Segoe UI"/>
-              </a:defRPr>
-            </a:pPr>
-            <a:r>
-              <a:t>Dock Chime</a:t>
-            </a:r>
-          </a:p>
-          <a:p>
-            <a:pPr>
+              <a:t>7. Zero Damage</a:t>
+            </a:r>
+          </a:p>
+          <a:p>
+            <a:pPr algn="ctr">
               <a:spcBef>
                 <a:spcPts val="300"/>
               </a:spcBef>
-              <a:defRPr sz="1300">
+              <a:defRPr sz="1000">
                 <a:solidFill>
                   <a:srgbClr val="E2E8F0"/>
                 </a:solidFill>
@@ -5157,21 +4913,21 @@
               </a:defRPr>
             </a:pPr>
             <a:r>
-              <a:t>Polite audio tone</a:t>
-            </a:r>
-          </a:p>
-        </p:txBody>
-      </p:sp>
-      <p:sp>
-        <p:nvSpPr>
-          <p:cNvPr id="17" name="Rectangle 16"/>
+              <a:t>Shipment leaves 100% intact</a:t>
+            </a:r>
+          </a:p>
+        </p:txBody>
+      </p:sp>
+      <p:sp>
+        <p:nvSpPr>
+          <p:cNvPr id="26" name="Rectangle 25"/>
           <p:cNvSpPr/>
           <p:nvPr/>
         </p:nvSpPr>
         <p:spPr>
           <a:xfrm>
-            <a:off x="7973568" y="1444752"/>
-            <a:ext cx="1664208" cy="1353312"/>
+            <a:off x="731520" y="2633472"/>
+            <a:ext cx="5230368" cy="3977639"/>
           </a:xfrm>
           <a:prstGeom prst="rect">
             <a:avLst/>
@@ -5209,170 +4965,14 @@
       </p:sp>
       <p:sp>
         <p:nvSpPr>
-          <p:cNvPr id="18" name="Rectangle 17"/>
+          <p:cNvPr id="27" name="Rectangle 26"/>
           <p:cNvSpPr/>
           <p:nvPr/>
         </p:nvSpPr>
         <p:spPr>
           <a:xfrm>
-            <a:off x="7973568" y="1444752"/>
-            <a:ext cx="1664208" cy="36576"/>
-          </a:xfrm>
-          <a:prstGeom prst="rect">
-            <a:avLst/>
-          </a:prstGeom>
-          <a:solidFill>
-            <a:srgbClr val="1C3E66"/>
-          </a:solidFill>
-          <a:ln>
-            <a:noFill/>
-          </a:ln>
-        </p:spPr>
-        <p:style>
-          <a:lnRef idx="1">
-            <a:schemeClr val="accent1"/>
-          </a:lnRef>
-          <a:fillRef idx="3">
-            <a:schemeClr val="accent1"/>
-          </a:fillRef>
-          <a:effectRef idx="2">
-            <a:schemeClr val="accent1"/>
-          </a:effectRef>
-          <a:fontRef idx="minor">
-            <a:schemeClr val="lt1"/>
-          </a:fontRef>
-        </p:style>
-        <p:txBody>
-          <a:bodyPr rtlCol="0" anchor="ctr"/>
-          <a:lstStyle/>
-          <a:p>
-            <a:pPr algn="ctr"/>
-          </a:p>
-        </p:txBody>
-      </p:sp>
-      <p:sp>
-        <p:nvSpPr>
-          <p:cNvPr id="19" name="TextBox 18"/>
-          <p:cNvSpPr txBox="1"/>
-          <p:nvPr/>
-        </p:nvSpPr>
-        <p:spPr>
-          <a:xfrm>
-            <a:off x="8065008" y="1554480"/>
-            <a:ext cx="1481328" cy="1143000"/>
-          </a:xfrm>
-          <a:prstGeom prst="rect">
-            <a:avLst/>
-          </a:prstGeom>
-          <a:noFill/>
-        </p:spPr>
-        <p:txBody>
-          <a:bodyPr wrap="square" lIns="0" tIns="0" rIns="0" bIns="0">
-            <a:spAutoFit/>
-          </a:bodyPr>
-          <a:lstStyle/>
-          <a:p>
-            <a:pPr>
-              <a:defRPr sz="1700" b="1">
-                <a:solidFill>
-                  <a:srgbClr val="38BDF8"/>
-                </a:solidFill>
-                <a:latin typeface="Segoe UI"/>
-              </a:defRPr>
-            </a:pPr>
-            <a:r>
-              <a:t>05</a:t>
-            </a:r>
-          </a:p>
-          <a:p>
-            <a:pPr>
-              <a:spcBef>
-                <a:spcPts val="200"/>
-              </a:spcBef>
-              <a:defRPr sz="1650" b="1">
-                <a:solidFill>
-                  <a:srgbClr val="FFFFFF"/>
-                </a:solidFill>
-                <a:latin typeface="Segoe UI"/>
-              </a:defRPr>
-            </a:pPr>
-            <a:r>
-              <a:t>Inspection</a:t>
-            </a:r>
-          </a:p>
-          <a:p>
-            <a:pPr>
-              <a:spcBef>
-                <a:spcPts val="300"/>
-              </a:spcBef>
-              <a:defRPr sz="1300">
-                <a:solidFill>
-                  <a:srgbClr val="E2E8F0"/>
-                </a:solidFill>
-                <a:latin typeface="Segoe UI"/>
-              </a:defRPr>
-            </a:pPr>
-            <a:r>
-              <a:t>Worker checks tape</a:t>
-            </a:r>
-          </a:p>
-        </p:txBody>
-      </p:sp>
-      <p:sp>
-        <p:nvSpPr>
-          <p:cNvPr id="20" name="Rectangle 19"/>
-          <p:cNvSpPr/>
-          <p:nvPr/>
-        </p:nvSpPr>
-        <p:spPr>
-          <a:xfrm>
-            <a:off x="9784080" y="1444752"/>
-            <a:ext cx="1664208" cy="1353312"/>
-          </a:xfrm>
-          <a:prstGeom prst="rect">
-            <a:avLst/>
-          </a:prstGeom>
-          <a:solidFill>
-            <a:srgbClr val="102C52"/>
-          </a:solidFill>
-          <a:ln w="19050">
-            <a:solidFill>
-              <a:srgbClr val="38BDF8"/>
-            </a:solidFill>
-          </a:ln>
-        </p:spPr>
-        <p:style>
-          <a:lnRef idx="1">
-            <a:schemeClr val="accent1"/>
-          </a:lnRef>
-          <a:fillRef idx="3">
-            <a:schemeClr val="accent1"/>
-          </a:fillRef>
-          <a:effectRef idx="2">
-            <a:schemeClr val="accent1"/>
-          </a:effectRef>
-          <a:fontRef idx="minor">
-            <a:schemeClr val="lt1"/>
-          </a:fontRef>
-        </p:style>
-        <p:txBody>
-          <a:bodyPr rtlCol="0" anchor="ctr"/>
-          <a:lstStyle/>
-          <a:p>
-            <a:pPr algn="ctr"/>
-          </a:p>
-        </p:txBody>
-      </p:sp>
-      <p:sp>
-        <p:nvSpPr>
-          <p:cNvPr id="21" name="Rectangle 20"/>
-          <p:cNvSpPr/>
-          <p:nvPr/>
-        </p:nvSpPr>
-        <p:spPr>
-          <a:xfrm>
-            <a:off x="9784080" y="1444752"/>
-            <a:ext cx="1664208" cy="36576"/>
+            <a:off x="731520" y="2633472"/>
+            <a:ext cx="5230368" cy="36576"/>
           </a:xfrm>
           <a:prstGeom prst="rect">
             <a:avLst/>
@@ -5408,14 +5008,14 @@
       </p:sp>
       <p:sp>
         <p:nvSpPr>
-          <p:cNvPr id="22" name="TextBox 21"/>
+          <p:cNvPr id="28" name="TextBox 27"/>
           <p:cNvSpPr txBox="1"/>
           <p:nvPr/>
         </p:nvSpPr>
         <p:spPr>
           <a:xfrm>
-            <a:off x="9875520" y="1554480"/>
-            <a:ext cx="1481328" cy="1143000"/>
+            <a:off x="960120" y="2798064"/>
+            <a:ext cx="4773168" cy="3657599"/>
           </a:xfrm>
           <a:prstGeom prst="rect">
             <a:avLst/>
@@ -5429,7 +5029,7 @@
           <a:lstStyle/>
           <a:p>
             <a:pPr>
-              <a:defRPr sz="1700" b="1">
+              <a:defRPr sz="1400" b="1">
                 <a:solidFill>
                   <a:srgbClr val="38BDF8"/>
                 </a:solidFill>
@@ -5437,15 +5037,15 @@
               </a:defRPr>
             </a:pPr>
             <a:r>
-              <a:t>06</a:t>
+              <a:t>THE LOADER'S STORY: Ramesh at Loading Bay 3</a:t>
             </a:r>
           </a:p>
           <a:p>
             <a:pPr>
               <a:spcBef>
-                <a:spcPts val="200"/>
+                <a:spcPts val="600"/>
               </a:spcBef>
-              <a:defRPr sz="1650" b="1">
+              <a:defRPr sz="1100" b="1">
                 <a:solidFill>
                   <a:srgbClr val="FFFFFF"/>
                 </a:solidFill>
@@ -5453,37 +5053,125 @@
               </a:defRPr>
             </a:pPr>
             <a:r>
-              <a:t>Safe Transit</a:t>
+              <a:t>• The Rush: </a:t>
+            </a:r>
+            <a:r>
+              <a:rPr b="0">
+                <a:solidFill>
+                  <a:srgbClr val="CBD5E1"/>
+                </a:solidFill>
+              </a:rPr>
+              <a:t>It's 4:15 PM, 34°C, and Ramesh has 45 minutes to finish packing a 40-foot trailer.</a:t>
             </a:r>
           </a:p>
           <a:p>
             <a:pPr>
               <a:spcBef>
-                <a:spcPts val="300"/>
+                <a:spcPts val="600"/>
               </a:spcBef>
-              <a:defRPr sz="1300">
-                <a:solidFill>
-                  <a:srgbClr val="E2E8F0"/>
-                </a:solidFill>
-                <a:latin typeface="Segoe UI"/>
-              </a:defRPr>
-            </a:pPr>
-            <a:r>
-              <a:t>100% verified cargo</a:t>
-            </a:r>
-          </a:p>
-        </p:txBody>
-      </p:sp>
-      <p:sp>
-        <p:nvSpPr>
-          <p:cNvPr id="23" name="Rectangle 22"/>
+              <a:defRPr sz="1100" b="1">
+                <a:solidFill>
+                  <a:srgbClr val="FFFFFF"/>
+                </a:solidFill>
+                <a:latin typeface="Segoe UI"/>
+              </a:defRPr>
+            </a:pPr>
+            <a:r>
+              <a:t>• The Slip: </a:t>
+            </a:r>
+            <a:r>
+              <a:rPr b="0">
+                <a:solidFill>
+                  <a:srgbClr val="CBD5E1"/>
+                </a:solidFill>
+              </a:rPr>
+              <a:t>He tries lifting a 25kg crate without a partner. His grip slips, and the box crashes 1.2 meters to the concrete.</a:t>
+            </a:r>
+          </a:p>
+          <a:p>
+            <a:pPr>
+              <a:spcBef>
+                <a:spcPts val="600"/>
+              </a:spcBef>
+              <a:defRPr sz="1100" b="1">
+                <a:solidFill>
+                  <a:srgbClr val="FFFFFF"/>
+                </a:solidFill>
+                <a:latin typeface="Segoe UI"/>
+              </a:defRPr>
+            </a:pPr>
+            <a:r>
+              <a:t>• No Panic Siren: </a:t>
+            </a:r>
+            <a:r>
+              <a:rPr b="0">
+                <a:solidFill>
+                  <a:srgbClr val="CBD5E1"/>
+                </a:solidFill>
+              </a:rPr>
+              <a:t>Instead of an ear-piercing fire alarm that makes everyone freeze, a friendly, microwave-style *ding* chimes at Bay 3, and his dock screen flashes yellow.</a:t>
+            </a:r>
+          </a:p>
+          <a:p>
+            <a:pPr>
+              <a:spcBef>
+                <a:spcPts val="600"/>
+              </a:spcBef>
+              <a:defRPr sz="1100" b="1">
+                <a:solidFill>
+                  <a:srgbClr val="FFFFFF"/>
+                </a:solidFill>
+                <a:latin typeface="Segoe UI"/>
+              </a:defRPr>
+            </a:pPr>
+            <a:r>
+              <a:t>• What He Does: </a:t>
+            </a:r>
+            <a:r>
+              <a:rPr b="0">
+                <a:solidFill>
+                  <a:srgbClr val="CBD5E1"/>
+                </a:solidFill>
+              </a:rPr>
+              <a:t>Instead of sheepishly hiding the box in the back of the truck, Ramesh stops, inspects the tape, calls his teammate for a 2-person lift, and sets the item aside.</a:t>
+            </a:r>
+          </a:p>
+          <a:p>
+            <a:pPr>
+              <a:spcBef>
+                <a:spcPts val="600"/>
+              </a:spcBef>
+              <a:defRPr sz="1100" b="1">
+                <a:solidFill>
+                  <a:srgbClr val="FFFFFF"/>
+                </a:solidFill>
+                <a:latin typeface="Segoe UI"/>
+              </a:defRPr>
+            </a:pPr>
+            <a:r>
+              <a:t>• The Win: </a:t>
+            </a:r>
+            <a:r>
+              <a:rPr b="0">
+                <a:solidFill>
+                  <a:srgbClr val="CBD5E1"/>
+                </a:solidFill>
+              </a:rPr>
+              <a:t>No broken microwave sent to a customer, and Ramesh learns to ask for a hand with heavy loads.</a:t>
+            </a:r>
+          </a:p>
+        </p:txBody>
+      </p:sp>
+      <p:sp>
+        <p:nvSpPr>
+          <p:cNvPr id="29" name="Rectangle 28"/>
           <p:cNvSpPr/>
           <p:nvPr/>
         </p:nvSpPr>
         <p:spPr>
           <a:xfrm>
-            <a:off x="731520" y="3090672"/>
-            <a:ext cx="5230368" cy="3337560"/>
+            <a:off x="6229807" y="2633472"/>
+            <a:ext cx="5230368" cy="3977639"/>
           </a:xfrm>
           <a:prstGeom prst="rect">
             <a:avLst/>
@@ -5521,249 +5209,13 @@
       </p:sp>
       <p:sp>
         <p:nvSpPr>
-          <p:cNvPr id="24" name="Rectangle 23"/>
+          <p:cNvPr id="30" name="Rectangle 29"/>
           <p:cNvSpPr/>
           <p:nvPr/>
         </p:nvSpPr>
         <p:spPr>
           <a:xfrm>
-            <a:off x="731520" y="3090672"/>
-            <a:ext cx="5230368" cy="36576"/>
-          </a:xfrm>
-          <a:prstGeom prst="rect">
-            <a:avLst/>
-          </a:prstGeom>
-          <a:solidFill>
-            <a:srgbClr val="38BDF8"/>
-          </a:solidFill>
-          <a:ln>
-            <a:noFill/>
-          </a:ln>
-        </p:spPr>
-        <p:style>
-          <a:lnRef idx="1">
-            <a:schemeClr val="accent1"/>
-          </a:lnRef>
-          <a:fillRef idx="3">
-            <a:schemeClr val="accent1"/>
-          </a:fillRef>
-          <a:effectRef idx="2">
-            <a:schemeClr val="accent1"/>
-          </a:effectRef>
-          <a:fontRef idx="minor">
-            <a:schemeClr val="lt1"/>
-          </a:fontRef>
-        </p:style>
-        <p:txBody>
-          <a:bodyPr rtlCol="0" anchor="ctr"/>
-          <a:lstStyle/>
-          <a:p>
-            <a:pPr algn="ctr"/>
-          </a:p>
-        </p:txBody>
-      </p:sp>
-      <p:sp>
-        <p:nvSpPr>
-          <p:cNvPr id="25" name="TextBox 24"/>
-          <p:cNvSpPr txBox="1"/>
-          <p:nvPr/>
-        </p:nvSpPr>
-        <p:spPr>
-          <a:xfrm>
-            <a:off x="960120" y="3255264"/>
-            <a:ext cx="4773168" cy="3063240"/>
-          </a:xfrm>
-          <a:prstGeom prst="rect">
-            <a:avLst/>
-          </a:prstGeom>
-          <a:noFill/>
-        </p:spPr>
-        <p:txBody>
-          <a:bodyPr wrap="square" lIns="0" tIns="0" rIns="0" bIns="0">
-            <a:spAutoFit/>
-          </a:bodyPr>
-          <a:lstStyle/>
-          <a:p>
-            <a:pPr>
-              <a:defRPr sz="1800" b="1">
-                <a:solidFill>
-                  <a:srgbClr val="38BDF8"/>
-                </a:solidFill>
-                <a:latin typeface="Segoe UI"/>
-              </a:defRPr>
-            </a:pPr>
-            <a:r>
-              <a:t>OPERATOR MOMENT: RAMESH AT BAY 3</a:t>
-            </a:r>
-          </a:p>
-          <a:p>
-            <a:pPr>
-              <a:spcBef>
-                <a:spcPts val="200"/>
-              </a:spcBef>
-              <a:defRPr sz="1400">
-                <a:solidFill>
-                  <a:srgbClr val="94A3B8"/>
-                </a:solidFill>
-                <a:latin typeface="Segoe UI"/>
-              </a:defRPr>
-            </a:pPr>
-            <a:r>
-              <a:t>Supportive dockside coaching — not punitive surveillance.</a:t>
-            </a:r>
-          </a:p>
-          <a:p>
-            <a:pPr>
-              <a:spcBef>
-                <a:spcPts val="500"/>
-              </a:spcBef>
-              <a:defRPr sz="1500" b="1">
-                <a:solidFill>
-                  <a:srgbClr val="FFFFFF"/>
-                </a:solidFill>
-                <a:latin typeface="Segoe UI"/>
-              </a:defRPr>
-            </a:pPr>
-            <a:r>
-              <a:t>• The Rush: </a:t>
-            </a:r>
-            <a:r>
-              <a:rPr b="0">
-                <a:solidFill>
-                  <a:srgbClr val="CBD5E1"/>
-                </a:solidFill>
-              </a:rPr>
-              <a:t>4:15 PM container deadline; Ramesh lifts 25kg crate solo.</a:t>
-            </a:r>
-          </a:p>
-          <a:p>
-            <a:pPr>
-              <a:spcBef>
-                <a:spcPts val="500"/>
-              </a:spcBef>
-              <a:defRPr sz="1500" b="1">
-                <a:solidFill>
-                  <a:srgbClr val="FFFFFF"/>
-                </a:solidFill>
-                <a:latin typeface="Segoe UI"/>
-              </a:defRPr>
-            </a:pPr>
-            <a:r>
-              <a:t>• The Slip: </a:t>
-            </a:r>
-            <a:r>
-              <a:rPr b="0">
-                <a:solidFill>
-                  <a:srgbClr val="CBD5E1"/>
-                </a:solidFill>
-              </a:rPr>
-              <a:t>Grip fails; carton drops 1.2 meters to concrete floor.</a:t>
-            </a:r>
-          </a:p>
-          <a:p>
-            <a:pPr>
-              <a:spcBef>
-                <a:spcPts val="500"/>
-              </a:spcBef>
-              <a:defRPr sz="1500" b="1">
-                <a:solidFill>
-                  <a:srgbClr val="FFFFFF"/>
-                </a:solidFill>
-                <a:latin typeface="Segoe UI"/>
-              </a:defRPr>
-            </a:pPr>
-            <a:r>
-              <a:t>• The Chime: </a:t>
-            </a:r>
-            <a:r>
-              <a:rPr b="0">
-                <a:solidFill>
-                  <a:srgbClr val="CBD5E1"/>
-                </a:solidFill>
-              </a:rPr>
-              <a:t>Gentle microwave ping rings at Bay 3 (no panic siren).</a:t>
-            </a:r>
-          </a:p>
-          <a:p>
-            <a:pPr>
-              <a:spcBef>
-                <a:spcPts val="500"/>
-              </a:spcBef>
-              <a:defRPr sz="1500" b="1">
-                <a:solidFill>
-                  <a:srgbClr val="FFFFFF"/>
-                </a:solidFill>
-                <a:latin typeface="Segoe UI"/>
-              </a:defRPr>
-            </a:pPr>
-            <a:r>
-              <a:t>• The Win: </a:t>
-            </a:r>
-            <a:r>
-              <a:rPr b="0">
-                <a:solidFill>
-                  <a:srgbClr val="CBD5E1"/>
-                </a:solidFill>
-              </a:rPr>
-              <a:t>Calls teammate for 2-person lift; sets cracked item aside.</a:t>
-            </a:r>
-          </a:p>
-        </p:txBody>
-      </p:sp>
-      <p:sp>
-        <p:nvSpPr>
-          <p:cNvPr id="26" name="Rectangle 25"/>
-          <p:cNvSpPr/>
-          <p:nvPr/>
-        </p:nvSpPr>
-        <p:spPr>
-          <a:xfrm>
-            <a:off x="6229807" y="3090672"/>
-            <a:ext cx="5230368" cy="3337560"/>
-          </a:xfrm>
-          <a:prstGeom prst="rect">
-            <a:avLst/>
-          </a:prstGeom>
-          <a:solidFill>
-            <a:srgbClr val="0A192E"/>
-          </a:solidFill>
-          <a:ln w="12700">
-            <a:solidFill>
-              <a:srgbClr val="1C3E66"/>
-            </a:solidFill>
-          </a:ln>
-        </p:spPr>
-        <p:style>
-          <a:lnRef idx="1">
-            <a:schemeClr val="accent1"/>
-          </a:lnRef>
-          <a:fillRef idx="3">
-            <a:schemeClr val="accent1"/>
-          </a:fillRef>
-          <a:effectRef idx="2">
-            <a:schemeClr val="accent1"/>
-          </a:effectRef>
-          <a:fontRef idx="minor">
-            <a:schemeClr val="lt1"/>
-          </a:fontRef>
-        </p:style>
-        <p:txBody>
-          <a:bodyPr rtlCol="0" anchor="ctr"/>
-          <a:lstStyle/>
-          <a:p>
-            <a:pPr algn="ctr"/>
-          </a:p>
-        </p:txBody>
-      </p:sp>
-      <p:sp>
-        <p:nvSpPr>
-          <p:cNvPr id="27" name="Rectangle 26"/>
-          <p:cNvSpPr/>
-          <p:nvPr/>
-        </p:nvSpPr>
-        <p:spPr>
-          <a:xfrm>
-            <a:off x="6229807" y="3090672"/>
+            <a:off x="6229807" y="2633472"/>
             <a:ext cx="5230368" cy="36576"/>
           </a:xfrm>
           <a:prstGeom prst="rect">
@@ -5800,14 +5252,14 @@
       </p:sp>
       <p:sp>
         <p:nvSpPr>
-          <p:cNvPr id="28" name="TextBox 27"/>
+          <p:cNvPr id="31" name="TextBox 30"/>
           <p:cNvSpPr txBox="1"/>
           <p:nvPr/>
         </p:nvSpPr>
         <p:spPr>
           <a:xfrm>
-            <a:off x="6458407" y="3255264"/>
-            <a:ext cx="4773168" cy="3063240"/>
+            <a:off x="6458407" y="2798064"/>
+            <a:ext cx="4773168" cy="3657599"/>
           </a:xfrm>
           <a:prstGeom prst="rect">
             <a:avLst/>
@@ -5821,7 +5273,7 @@
           <a:lstStyle/>
           <a:p>
             <a:pPr>
-              <a:defRPr sz="1800" b="1">
+              <a:defRPr sz="1400" b="1">
                 <a:solidFill>
                   <a:srgbClr val="7DD3FC"/>
                 </a:solidFill>
@@ -5829,31 +5281,39 @@
               </a:defRPr>
             </a:pPr>
             <a:r>
-              <a:t>SUPERVISOR MOMENT: POOJA ON HER IPAD</a:t>
+              <a:t>THE SUPERVISOR'S STORY: Pooja with her iPad</a:t>
             </a:r>
           </a:p>
           <a:p>
             <a:pPr>
               <a:spcBef>
-                <a:spcPts val="200"/>
+                <a:spcPts val="600"/>
               </a:spcBef>
-              <a:defRPr sz="1400">
-                <a:solidFill>
-                  <a:srgbClr val="94A3B8"/>
-                </a:solidFill>
-                <a:latin typeface="Segoe UI"/>
-              </a:defRPr>
-            </a:pPr>
-            <a:r>
-              <a:t>Replacing 45 minutes of manual video scrubbing with instant proof.</a:t>
+              <a:defRPr sz="1100" b="1">
+                <a:solidFill>
+                  <a:srgbClr val="FFFFFF"/>
+                </a:solidFill>
+                <a:latin typeface="Segoe UI"/>
+              </a:defRPr>
+            </a:pPr>
+            <a:r>
+              <a:t>• The Daily Nightmare: </a:t>
+            </a:r>
+            <a:r>
+              <a:rPr b="0">
+                <a:solidFill>
+                  <a:srgbClr val="CBD5E1"/>
+                </a:solidFill>
+              </a:rPr>
+              <a:t>Pooja used to spend 45 minutes every evening fast-forwarding through blurry CCTV tapes trying to figure out who dropped a customer's TV.</a:t>
             </a:r>
           </a:p>
           <a:p>
             <a:pPr>
               <a:spcBef>
-                <a:spcPts val="500"/>
+                <a:spcPts val="600"/>
               </a:spcBef>
-              <a:defRPr sz="1500" b="1">
+              <a:defRPr sz="1100" b="1">
                 <a:solidFill>
                   <a:srgbClr val="FFFFFF"/>
                 </a:solidFill>
@@ -5861,7 +5321,7 @@
               </a:defRPr>
             </a:pPr>
             <a:r>
-              <a:t>• The Old Way: </a:t>
+              <a:t>• Instant Notification: </a:t>
             </a:r>
             <a:r>
               <a:rPr b="0">
@@ -5869,15 +5329,15 @@
                   <a:srgbClr val="CBD5E1"/>
                 </a:solidFill>
               </a:rPr>
-              <a:t>Wasted 45 mins nightly hunting timestamps on blurry DVRs.</a:t>
+              <a:t>Her tablet buzzes: 'Bay 3: High-Velocity Drop Flagged (10:14 AM)'.</a:t>
             </a:r>
           </a:p>
           <a:p>
             <a:pPr>
               <a:spcBef>
-                <a:spcPts val="500"/>
+                <a:spcPts val="600"/>
               </a:spcBef>
-              <a:defRPr sz="1500" b="1">
+              <a:defRPr sz="1100" b="1">
                 <a:solidFill>
                   <a:srgbClr val="FFFFFF"/>
                 </a:solidFill>
@@ -5885,7 +5345,7 @@
               </a:defRPr>
             </a:pPr>
             <a:r>
-              <a:t>• Instant Alert: </a:t>
+              <a:t>• TikTok-Length Replay: </a:t>
             </a:r>
             <a:r>
               <a:rPr b="0">
@@ -5893,15 +5353,15 @@
                   <a:srgbClr val="CBD5E1"/>
                 </a:solidFill>
               </a:rPr>
-              <a:t>iPad buzzes: 'Bay 3: High-Velocity Drop Detected (10:14 AM)'.</a:t>
+              <a:t>She taps it and immediately watches a 5-second replay showing the carton falling, complete with bounding box tracking and impact velocity.</a:t>
             </a:r>
           </a:p>
           <a:p>
             <a:pPr>
               <a:spcBef>
-                <a:spcPts val="500"/>
+                <a:spcPts val="600"/>
               </a:spcBef>
-              <a:defRPr sz="1500" b="1">
+              <a:defRPr sz="1100" b="1">
                 <a:solidFill>
                   <a:srgbClr val="FFFFFF"/>
                 </a:solidFill>
@@ -5909,7 +5369,7 @@
               </a:defRPr>
             </a:pPr>
             <a:r>
-              <a:t>• 5-Second Replay: </a:t>
+              <a:t>• Quick Resolution: </a:t>
             </a:r>
             <a:r>
               <a:rPr b="0">
@@ -5917,15 +5377,15 @@
                   <a:srgbClr val="CBD5E1"/>
                 </a:solidFill>
               </a:rPr>
-              <a:t>One tap plays fall trajectory and impact velocity vector.</a:t>
+              <a:t>She signs off on a packaging replacement in 10 seconds flat—no shouting matches, no guessing.</a:t>
             </a:r>
           </a:p>
           <a:p>
             <a:pPr>
               <a:spcBef>
-                <a:spcPts val="500"/>
+                <a:spcPts val="600"/>
               </a:spcBef>
-              <a:defRPr sz="1500" b="1">
+              <a:defRPr sz="1100" b="1">
                 <a:solidFill>
                   <a:srgbClr val="FFFFFF"/>
                 </a:solidFill>
@@ -5933,7 +5393,7 @@
               </a:defRPr>
             </a:pPr>
             <a:r>
-              <a:t>• Gemini Audit: </a:t>
+              <a:t>• Asking the AI: </a:t>
             </a:r>
             <a:r>
               <a:rPr b="0">
@@ -5941,7 +5401,7 @@
                   <a:srgbClr val="CBD5E1"/>
                 </a:solidFill>
               </a:rPr>
-              <a:t>Shift-end query: 'Summarize all Bay 3 drops today' in 1 click.</a:t>
+              <a:t>At the end of the week, she asks the Gemini chat: 'Which shift has the most drops?' and instantly gets an answer for Monday's safety huddle.</a:t>
             </a:r>
           </a:p>
         </p:txBody>
@@ -5994,8 +5454,8 @@
         </p:nvSpPr>
         <p:spPr>
           <a:xfrm>
-            <a:off x="731520" y="384048"/>
-            <a:ext cx="5943600" cy="274320"/>
+            <a:off x="731520" y="347472"/>
+            <a:ext cx="5943600" cy="256032"/>
           </a:xfrm>
           <a:prstGeom prst="rect">
             <a:avLst/>
@@ -6009,7 +5469,7 @@
           <a:lstStyle/>
           <a:p>
             <a:pPr>
-              <a:defRPr sz="1350" b="1">
+              <a:defRPr sz="1100" b="1">
                 <a:solidFill>
                   <a:srgbClr val="38BDF8"/>
                 </a:solidFill>
@@ -6030,8 +5490,8 @@
         </p:nvSpPr>
         <p:spPr>
           <a:xfrm>
-            <a:off x="6858000" y="384048"/>
-            <a:ext cx="4602175" cy="274320"/>
+            <a:off x="6858000" y="347472"/>
+            <a:ext cx="4602175" cy="256032"/>
           </a:xfrm>
           <a:prstGeom prst="rect">
             <a:avLst/>
@@ -6045,15 +5505,15 @@
           <a:lstStyle/>
           <a:p>
             <a:pPr algn="r">
-              <a:defRPr sz="1250" b="1">
-                <a:solidFill>
-                  <a:srgbClr val="94A3B8"/>
-                </a:solidFill>
-                <a:latin typeface="Segoe UI"/>
-              </a:defRPr>
-            </a:pPr>
-            <a:r>
-              <a:t>CONFIDENTIAL — ACADEMIC PROJECT</a:t>
+              <a:defRPr sz="1050" b="1">
+                <a:solidFill>
+                  <a:srgbClr val="7DD3FC"/>
+                </a:solidFill>
+                <a:latin typeface="Segoe UI"/>
+              </a:defRPr>
+            </a:pPr>
+            <a:r>
+              <a:t>CONFIDENTIAL — HACKATHON PROJECT</a:t>
             </a:r>
           </a:p>
         </p:txBody>
@@ -6066,7 +5526,7 @@
         </p:nvSpPr>
         <p:spPr>
           <a:xfrm>
-            <a:off x="731520" y="658368"/>
+            <a:off x="731520" y="621792"/>
             <a:ext cx="10728655" cy="502920"/>
           </a:xfrm>
           <a:prstGeom prst="rect">
@@ -6081,7 +5541,7 @@
           <a:lstStyle/>
           <a:p>
             <a:pPr>
-              <a:defRPr sz="2900" b="1">
+              <a:defRPr sz="2500" b="1">
                 <a:solidFill>
                   <a:srgbClr val="FFFFFF"/>
                 </a:solidFill>
@@ -6089,7 +5549,7 @@
               </a:defRPr>
             </a:pPr>
             <a:r>
-              <a:t>Technical Architecture &amp; Edge-to-Cloud Pipeline</a:t>
+              <a:t>Under the Hood: How We Taught Cameras to Care About Boxes</a:t>
             </a:r>
           </a:p>
         </p:txBody>
@@ -6102,7 +5562,7 @@
         </p:nvSpPr>
         <p:spPr>
           <a:xfrm>
-            <a:off x="731520" y="1234440"/>
+            <a:off x="731520" y="1170432"/>
             <a:ext cx="10728655" cy="13716"/>
           </a:xfrm>
           <a:prstGeom prst="rect">
@@ -6145,8 +5605,8 @@
         </p:nvSpPr>
         <p:spPr>
           <a:xfrm>
-            <a:off x="731520" y="1444752"/>
-            <a:ext cx="5120640" cy="1078992"/>
+            <a:off x="731520" y="1353312"/>
+            <a:ext cx="3410712" cy="2542032"/>
           </a:xfrm>
           <a:prstGeom prst="rect">
             <a:avLst/>
@@ -6184,77 +5644,23 @@
       </p:sp>
       <p:sp>
         <p:nvSpPr>
-          <p:cNvPr id="7" name="TextBox 6"/>
-          <p:cNvSpPr txBox="1"/>
-          <p:nvPr/>
-        </p:nvSpPr>
-        <p:spPr>
-          <a:xfrm>
-            <a:off x="914400" y="1554480"/>
-            <a:ext cx="4754880" cy="859536"/>
-          </a:xfrm>
-          <a:prstGeom prst="rect">
-            <a:avLst/>
-          </a:prstGeom>
-          <a:noFill/>
-        </p:spPr>
-        <p:txBody>
-          <a:bodyPr wrap="square">
-            <a:spAutoFit/>
-          </a:bodyPr>
-          <a:lstStyle/>
-          <a:p>
-            <a:pPr>
-              <a:defRPr sz="1650" b="1">
-                <a:solidFill>
-                  <a:srgbClr val="FFFFFF"/>
-                </a:solidFill>
-                <a:latin typeface="Segoe UI"/>
-              </a:defRPr>
-            </a:pPr>
-            <a:r>
-              <a:t>01 • CCTV VIDEO STREAM &amp; RING BUFFER</a:t>
-            </a:r>
-          </a:p>
-          <a:p>
-            <a:pPr>
-              <a:spcBef>
-                <a:spcPts val="300"/>
-              </a:spcBef>
-              <a:defRPr sz="1350" b="1">
-                <a:solidFill>
-                  <a:srgbClr val="38BDF8"/>
-                </a:solidFill>
-                <a:latin typeface="Segoe UI"/>
-              </a:defRPr>
-            </a:pPr>
-            <a:r>
-              <a:t>OpenCV + FFmpeg  |  1080p @ 15fps  |  In-Memory 15s FIFO Buffer</a:t>
-            </a:r>
-          </a:p>
-        </p:txBody>
-      </p:sp>
-      <p:sp>
-        <p:nvSpPr>
-          <p:cNvPr id="8" name="Rectangle 7"/>
+          <p:cNvPr id="7" name="Rectangle 6"/>
           <p:cNvSpPr/>
           <p:nvPr/>
         </p:nvSpPr>
         <p:spPr>
           <a:xfrm>
-            <a:off x="6339535" y="1444752"/>
-            <a:ext cx="5120640" cy="1078992"/>
+            <a:off x="731520" y="1353312"/>
+            <a:ext cx="3410712" cy="36576"/>
           </a:xfrm>
           <a:prstGeom prst="rect">
             <a:avLst/>
           </a:prstGeom>
           <a:solidFill>
-            <a:srgbClr val="102C52"/>
+            <a:srgbClr val="38BDF8"/>
           </a:solidFill>
-          <a:ln w="19050">
-            <a:solidFill>
-              <a:srgbClr val="38BDF8"/>
-            </a:solidFill>
+          <a:ln>
+            <a:noFill/>
           </a:ln>
         </p:spPr>
         <p:style>
@@ -6281,14 +5687,14 @@
       </p:sp>
       <p:sp>
         <p:nvSpPr>
-          <p:cNvPr id="9" name="TextBox 8"/>
+          <p:cNvPr id="8" name="TextBox 7"/>
           <p:cNvSpPr txBox="1"/>
           <p:nvPr/>
         </p:nvSpPr>
         <p:spPr>
           <a:xfrm>
-            <a:off x="6522415" y="1554480"/>
-            <a:ext cx="4754880" cy="859536"/>
+            <a:off x="896112" y="1481328"/>
+            <a:ext cx="3081528" cy="2286000"/>
           </a:xfrm>
           <a:prstGeom prst="rect">
             <a:avLst/>
@@ -6296,13 +5702,29 @@
           <a:noFill/>
         </p:spPr>
         <p:txBody>
-          <a:bodyPr wrap="square">
+          <a:bodyPr wrap="square" lIns="0" tIns="0" rIns="0" bIns="0">
             <a:spAutoFit/>
           </a:bodyPr>
           <a:lstStyle/>
           <a:p>
             <a:pPr>
-              <a:defRPr sz="1650" b="1">
+              <a:defRPr sz="1200" b="1">
+                <a:solidFill>
+                  <a:srgbClr val="38BDF8"/>
+                </a:solidFill>
+                <a:latin typeface="Segoe UI"/>
+              </a:defRPr>
+            </a:pPr>
+            <a:r>
+              <a:t>1. Computer Vision (YOLOv8 + ByteTrack)</a:t>
+            </a:r>
+          </a:p>
+          <a:p>
+            <a:pPr>
+              <a:spcBef>
+                <a:spcPts val="600"/>
+              </a:spcBef>
+              <a:defRPr sz="1050" b="1">
                 <a:solidFill>
                   <a:srgbClr val="FFFFFF"/>
                 </a:solidFill>
@@ -6310,73 +5732,77 @@
               </a:defRPr>
             </a:pPr>
             <a:r>
-              <a:t>02 • OBJECT DETECTION &amp; TRACKING</a:t>
+              <a:t>• The Model: </a:t>
+            </a:r>
+            <a:r>
+              <a:rPr b="0">
+                <a:solidFill>
+                  <a:srgbClr val="CBD5E1"/>
+                </a:solidFill>
+              </a:rPr>
+              <a:t>Ultralytics YOLOv8 fine-tuned on warehouse objects.</a:t>
             </a:r>
           </a:p>
           <a:p>
             <a:pPr>
               <a:spcBef>
-                <a:spcPts val="300"/>
+                <a:spcPts val="600"/>
               </a:spcBef>
-              <a:defRPr sz="1350" b="1">
-                <a:solidFill>
-                  <a:srgbClr val="38BDF8"/>
-                </a:solidFill>
-                <a:latin typeface="Segoe UI"/>
-              </a:defRPr>
-            </a:pPr>
-            <a:r>
-              <a:t>YOLOv8 + ByteTrack  |  Custom Carton, Pallet &amp; Worker IDs  |  Zero Loss</a:t>
-            </a:r>
-          </a:p>
-        </p:txBody>
-      </p:sp>
-      <p:sp>
-        <p:nvSpPr>
-          <p:cNvPr id="10" name="TextBox 9"/>
-          <p:cNvSpPr txBox="1"/>
-          <p:nvPr/>
-        </p:nvSpPr>
-        <p:spPr>
-          <a:xfrm>
-            <a:off x="5760720" y="2542032"/>
-            <a:ext cx="640080" cy="347472"/>
-          </a:xfrm>
-          <a:prstGeom prst="rect">
-            <a:avLst/>
-          </a:prstGeom>
-          <a:noFill/>
-        </p:spPr>
-        <p:txBody>
-          <a:bodyPr wrap="none" lIns="0" tIns="0" rIns="0" bIns="0">
-            <a:spAutoFit/>
-          </a:bodyPr>
-          <a:lstStyle/>
-          <a:p>
-            <a:pPr algn="ctr">
-              <a:defRPr sz="2200" b="1">
-                <a:solidFill>
-                  <a:srgbClr val="38BDF8"/>
-                </a:solidFill>
-                <a:latin typeface="Segoe UI"/>
-              </a:defRPr>
-            </a:pPr>
-            <a:r>
-              <a:t>↓</a:t>
-            </a:r>
-          </a:p>
-        </p:txBody>
-      </p:sp>
-      <p:sp>
-        <p:nvSpPr>
-          <p:cNvPr id="11" name="Rectangle 10"/>
+              <a:defRPr sz="1050" b="1">
+                <a:solidFill>
+                  <a:srgbClr val="FFFFFF"/>
+                </a:solidFill>
+                <a:latin typeface="Segoe UI"/>
+              </a:defRPr>
+            </a:pPr>
+            <a:r>
+              <a:t>• What it sees: </a:t>
+            </a:r>
+            <a:r>
+              <a:rPr b="0">
+                <a:solidFill>
+                  <a:srgbClr val="CBD5E1"/>
+                </a:solidFill>
+              </a:rPr>
+              <a:t>Workers, cardboard cartons, wooden pallets, and forklifts.</a:t>
+            </a:r>
+          </a:p>
+          <a:p>
+            <a:pPr>
+              <a:spcBef>
+                <a:spcPts val="600"/>
+              </a:spcBef>
+              <a:defRPr sz="1050" b="1">
+                <a:solidFill>
+                  <a:srgbClr val="FFFFFF"/>
+                </a:solidFill>
+                <a:latin typeface="Segoe UI"/>
+              </a:defRPr>
+            </a:pPr>
+            <a:r>
+              <a:t>• The ByteTrack Trick: </a:t>
+            </a:r>
+            <a:r>
+              <a:rPr b="0">
+                <a:solidFill>
+                  <a:srgbClr val="CBD5E1"/>
+                </a:solidFill>
+              </a:rPr>
+              <a:t>Keeps track of 'Box #4' even when a worker walks in front of it so the ID doesn't get lost.</a:t>
+            </a:r>
+          </a:p>
+        </p:txBody>
+      </p:sp>
+      <p:sp>
+        <p:nvSpPr>
+          <p:cNvPr id="9" name="Rectangle 8"/>
           <p:cNvSpPr/>
           <p:nvPr/>
         </p:nvSpPr>
         <p:spPr>
           <a:xfrm>
-            <a:off x="731520" y="2907792"/>
-            <a:ext cx="5120640" cy="1078992"/>
+            <a:off x="4389120" y="1353312"/>
+            <a:ext cx="3410712" cy="2542032"/>
           </a:xfrm>
           <a:prstGeom prst="rect">
             <a:avLst/>
@@ -6414,77 +5840,23 @@
       </p:sp>
       <p:sp>
         <p:nvSpPr>
-          <p:cNvPr id="12" name="TextBox 11"/>
-          <p:cNvSpPr txBox="1"/>
-          <p:nvPr/>
-        </p:nvSpPr>
-        <p:spPr>
-          <a:xfrm>
-            <a:off x="914400" y="3017520"/>
-            <a:ext cx="4754880" cy="859536"/>
-          </a:xfrm>
-          <a:prstGeom prst="rect">
-            <a:avLst/>
-          </a:prstGeom>
-          <a:noFill/>
-        </p:spPr>
-        <p:txBody>
-          <a:bodyPr wrap="square">
-            <a:spAutoFit/>
-          </a:bodyPr>
-          <a:lstStyle/>
-          <a:p>
-            <a:pPr>
-              <a:defRPr sz="1650" b="1">
-                <a:solidFill>
-                  <a:srgbClr val="FFFFFF"/>
-                </a:solidFill>
-                <a:latin typeface="Segoe UI"/>
-              </a:defRPr>
-            </a:pPr>
-            <a:r>
-              <a:t>03 • SPATIAL &amp; KINEMATIC RULES</a:t>
-            </a:r>
-          </a:p>
-          <a:p>
-            <a:pPr>
-              <a:spcBef>
-                <a:spcPts val="300"/>
-              </a:spcBef>
-              <a:defRPr sz="1350" b="1">
-                <a:solidFill>
-                  <a:srgbClr val="38BDF8"/>
-                </a:solidFill>
-                <a:latin typeface="Segoe UI"/>
-              </a:defRPr>
-            </a:pPr>
-            <a:r>
-              <a:t>Vector Math  |  Drop vy &gt; 2.5m/s  |  Floor Drag &gt; 2m  |  Tilt &gt; 15°</a:t>
-            </a:r>
-          </a:p>
-        </p:txBody>
-      </p:sp>
-      <p:sp>
-        <p:nvSpPr>
-          <p:cNvPr id="13" name="Rectangle 12"/>
+          <p:cNvPr id="10" name="Rectangle 9"/>
           <p:cNvSpPr/>
           <p:nvPr/>
         </p:nvSpPr>
         <p:spPr>
           <a:xfrm>
-            <a:off x="6339535" y="2907792"/>
-            <a:ext cx="5120640" cy="1078992"/>
+            <a:off x="4389120" y="1353312"/>
+            <a:ext cx="3410712" cy="36576"/>
           </a:xfrm>
           <a:prstGeom prst="rect">
             <a:avLst/>
           </a:prstGeom>
           <a:solidFill>
-            <a:srgbClr val="102C52"/>
+            <a:srgbClr val="38BDF8"/>
           </a:solidFill>
-          <a:ln w="19050">
-            <a:solidFill>
-              <a:srgbClr val="38BDF8"/>
-            </a:solidFill>
+          <a:ln>
+            <a:noFill/>
           </a:ln>
         </p:spPr>
         <p:style>
@@ -6511,14 +5883,14 @@
       </p:sp>
       <p:sp>
         <p:nvSpPr>
-          <p:cNvPr id="14" name="TextBox 13"/>
+          <p:cNvPr id="11" name="TextBox 10"/>
           <p:cNvSpPr txBox="1"/>
           <p:nvPr/>
         </p:nvSpPr>
         <p:spPr>
           <a:xfrm>
-            <a:off x="6522415" y="3017520"/>
-            <a:ext cx="4754880" cy="859536"/>
+            <a:off x="4553712" y="1481328"/>
+            <a:ext cx="3081528" cy="2286000"/>
           </a:xfrm>
           <a:prstGeom prst="rect">
             <a:avLst/>
@@ -6526,13 +5898,29 @@
           <a:noFill/>
         </p:spPr>
         <p:txBody>
-          <a:bodyPr wrap="square">
+          <a:bodyPr wrap="square" lIns="0" tIns="0" rIns="0" bIns="0">
             <a:spAutoFit/>
           </a:bodyPr>
           <a:lstStyle/>
           <a:p>
             <a:pPr>
-              <a:defRPr sz="1650" b="1">
+              <a:defRPr sz="1200" b="1">
+                <a:solidFill>
+                  <a:srgbClr val="38BDF8"/>
+                </a:solidFill>
+                <a:latin typeface="Segoe UI"/>
+              </a:defRPr>
+            </a:pPr>
+            <a:r>
+              <a:t>2. The Physics &amp; Motion Rules</a:t>
+            </a:r>
+          </a:p>
+          <a:p>
+            <a:pPr>
+              <a:spcBef>
+                <a:spcPts val="600"/>
+              </a:spcBef>
+              <a:defRPr sz="1050" b="1">
                 <a:solidFill>
                   <a:srgbClr val="FFFFFF"/>
                 </a:solidFill>
@@ -6540,73 +5928,77 @@
               </a:defRPr>
             </a:pPr>
             <a:r>
-              <a:t>04 • EVENT DISPATCH &amp; DATABASE</a:t>
+              <a:t>• Drop Detector: </a:t>
+            </a:r>
+            <a:r>
+              <a:rPr b="0">
+                <a:solidFill>
+                  <a:srgbClr val="CBD5E1"/>
+                </a:solidFill>
+              </a:rPr>
+              <a:t>If a box's downward Y-velocity spikes &gt; 2.5 m/s and suddenly hits zero, that's a crash.</a:t>
             </a:r>
           </a:p>
           <a:p>
             <a:pPr>
               <a:spcBef>
-                <a:spcPts val="300"/>
+                <a:spcPts val="600"/>
               </a:spcBef>
-              <a:defRPr sz="1350" b="1">
-                <a:solidFill>
-                  <a:srgbClr val="38BDF8"/>
-                </a:solidFill>
-                <a:latin typeface="Segoe UI"/>
-              </a:defRPr>
-            </a:pPr>
-            <a:r>
-              <a:t>FastAPI Core  |  &lt; 50ms WebSockets  |  SQLite Telemetry Logs</a:t>
-            </a:r>
-          </a:p>
-        </p:txBody>
-      </p:sp>
-      <p:sp>
-        <p:nvSpPr>
-          <p:cNvPr id="15" name="TextBox 14"/>
-          <p:cNvSpPr txBox="1"/>
-          <p:nvPr/>
-        </p:nvSpPr>
-        <p:spPr>
-          <a:xfrm>
-            <a:off x="5760720" y="4005072"/>
-            <a:ext cx="640080" cy="347472"/>
-          </a:xfrm>
-          <a:prstGeom prst="rect">
-            <a:avLst/>
-          </a:prstGeom>
-          <a:noFill/>
-        </p:spPr>
-        <p:txBody>
-          <a:bodyPr wrap="none" lIns="0" tIns="0" rIns="0" bIns="0">
-            <a:spAutoFit/>
-          </a:bodyPr>
-          <a:lstStyle/>
-          <a:p>
-            <a:pPr algn="ctr">
-              <a:defRPr sz="2200" b="1">
-                <a:solidFill>
-                  <a:srgbClr val="38BDF8"/>
-                </a:solidFill>
-                <a:latin typeface="Segoe UI"/>
-              </a:defRPr>
-            </a:pPr>
-            <a:r>
-              <a:t>↓</a:t>
-            </a:r>
-          </a:p>
-        </p:txBody>
-      </p:sp>
-      <p:sp>
-        <p:nvSpPr>
-          <p:cNvPr id="16" name="Rectangle 15"/>
+              <a:defRPr sz="1050" b="1">
+                <a:solidFill>
+                  <a:srgbClr val="FFFFFF"/>
+                </a:solidFill>
+                <a:latin typeface="Segoe UI"/>
+              </a:defRPr>
+            </a:pPr>
+            <a:r>
+              <a:t>• Drag Detector: </a:t>
+            </a:r>
+            <a:r>
+              <a:rPr b="0">
+                <a:solidFill>
+                  <a:srgbClr val="CBD5E1"/>
+                </a:solidFill>
+              </a:rPr>
+              <a:t>If a carton slides &gt; 2 meters across the floor without lifting, it flags rough dragging.</a:t>
+            </a:r>
+          </a:p>
+          <a:p>
+            <a:pPr>
+              <a:spcBef>
+                <a:spcPts val="600"/>
+              </a:spcBef>
+              <a:defRPr sz="1050" b="1">
+                <a:solidFill>
+                  <a:srgbClr val="FFFFFF"/>
+                </a:solidFill>
+                <a:latin typeface="Segoe UI"/>
+              </a:defRPr>
+            </a:pPr>
+            <a:r>
+              <a:t>• Stack Tilt Check: </a:t>
+            </a:r>
+            <a:r>
+              <a:rPr b="0">
+                <a:solidFill>
+                  <a:srgbClr val="CBD5E1"/>
+                </a:solidFill>
+              </a:rPr>
+              <a:t>Measures the angle of boxes on pallets—anything tilted &gt; 15° triggers a wobble warning.</a:t>
+            </a:r>
+          </a:p>
+        </p:txBody>
+      </p:sp>
+      <p:sp>
+        <p:nvSpPr>
+          <p:cNvPr id="12" name="Rectangle 11"/>
           <p:cNvSpPr/>
           <p:nvPr/>
         </p:nvSpPr>
         <p:spPr>
           <a:xfrm>
-            <a:off x="731520" y="4370832"/>
-            <a:ext cx="5120640" cy="1234440"/>
+            <a:off x="8046720" y="1353312"/>
+            <a:ext cx="3410712" cy="2542032"/>
           </a:xfrm>
           <a:prstGeom prst="rect">
             <a:avLst/>
@@ -6644,93 +6036,23 @@
       </p:sp>
       <p:sp>
         <p:nvSpPr>
-          <p:cNvPr id="17" name="TextBox 16"/>
-          <p:cNvSpPr txBox="1"/>
-          <p:nvPr/>
-        </p:nvSpPr>
-        <p:spPr>
-          <a:xfrm>
-            <a:off x="914400" y="4480560"/>
-            <a:ext cx="4754880" cy="1014984"/>
-          </a:xfrm>
-          <a:prstGeom prst="rect">
-            <a:avLst/>
-          </a:prstGeom>
-          <a:noFill/>
-        </p:spPr>
-        <p:txBody>
-          <a:bodyPr wrap="square">
-            <a:spAutoFit/>
-          </a:bodyPr>
-          <a:lstStyle/>
-          <a:p>
-            <a:pPr>
-              <a:defRPr sz="1650" b="1">
-                <a:solidFill>
-                  <a:srgbClr val="FFFFFF"/>
-                </a:solidFill>
-                <a:latin typeface="Segoe UI"/>
-              </a:defRPr>
-            </a:pPr>
-            <a:r>
-              <a:t>05 • SUPERVISOR UI &amp; AUDIO ENGINE</a:t>
-            </a:r>
-          </a:p>
-          <a:p>
-            <a:pPr>
-              <a:spcBef>
-                <a:spcPts val="200"/>
-              </a:spcBef>
-              <a:defRPr sz="1350" b="1">
-                <a:solidFill>
-                  <a:srgbClr val="38BDF8"/>
-                </a:solidFill>
-                <a:latin typeface="Segoe UI"/>
-              </a:defRPr>
-            </a:pPr>
-            <a:r>
-              <a:t>React 18 + Tailwind CSS + Web Audio API</a:t>
-            </a:r>
-          </a:p>
-          <a:p>
-            <a:pPr>
-              <a:spcBef>
-                <a:spcPts val="300"/>
-              </a:spcBef>
-              <a:defRPr sz="1250">
-                <a:solidFill>
-                  <a:srgbClr val="CBD5E1"/>
-                </a:solidFill>
-                <a:latin typeface="Segoe UI"/>
-              </a:defRPr>
-            </a:pPr>
-            <a:r>
-              <a:t>Live KPI cards, 7-day risk trend curves &amp; instant synthetic dock chimes.</a:t>
-            </a:r>
-          </a:p>
-        </p:txBody>
-      </p:sp>
-      <p:sp>
-        <p:nvSpPr>
-          <p:cNvPr id="18" name="Rectangle 17"/>
+          <p:cNvPr id="13" name="Rectangle 12"/>
           <p:cNvSpPr/>
           <p:nvPr/>
         </p:nvSpPr>
         <p:spPr>
           <a:xfrm>
-            <a:off x="6339535" y="4370832"/>
-            <a:ext cx="5120640" cy="1234440"/>
+            <a:off x="8046720" y="1353312"/>
+            <a:ext cx="3410712" cy="36576"/>
           </a:xfrm>
           <a:prstGeom prst="rect">
             <a:avLst/>
           </a:prstGeom>
           <a:solidFill>
-            <a:srgbClr val="102C52"/>
+            <a:srgbClr val="38BDF8"/>
           </a:solidFill>
-          <a:ln w="19050">
-            <a:solidFill>
-              <a:srgbClr val="38BDF8"/>
-            </a:solidFill>
+          <a:ln>
+            <a:noFill/>
           </a:ln>
         </p:spPr>
         <p:style>
@@ -6757,14 +6079,14 @@
       </p:sp>
       <p:sp>
         <p:nvSpPr>
-          <p:cNvPr id="19" name="TextBox 18"/>
+          <p:cNvPr id="14" name="TextBox 13"/>
           <p:cNvSpPr txBox="1"/>
           <p:nvPr/>
         </p:nvSpPr>
         <p:spPr>
           <a:xfrm>
-            <a:off x="6522415" y="4480560"/>
-            <a:ext cx="4754880" cy="1014984"/>
+            <a:off x="8211312" y="1481328"/>
+            <a:ext cx="3081528" cy="2286000"/>
           </a:xfrm>
           <a:prstGeom prst="rect">
             <a:avLst/>
@@ -6772,13 +6094,29 @@
           <a:noFill/>
         </p:spPr>
         <p:txBody>
-          <a:bodyPr wrap="square">
+          <a:bodyPr wrap="square" lIns="0" tIns="0" rIns="0" bIns="0">
             <a:spAutoFit/>
           </a:bodyPr>
           <a:lstStyle/>
           <a:p>
             <a:pPr>
-              <a:defRPr sz="1650" b="1">
+              <a:defRPr sz="1200" b="1">
+                <a:solidFill>
+                  <a:srgbClr val="38BDF8"/>
+                </a:solidFill>
+                <a:latin typeface="Segoe UI"/>
+              </a:defRPr>
+            </a:pPr>
+            <a:r>
+              <a:t>3. Conversational AI (Google Gemini 2.5)</a:t>
+            </a:r>
+          </a:p>
+          <a:p>
+            <a:pPr>
+              <a:spcBef>
+                <a:spcPts val="600"/>
+              </a:spcBef>
+              <a:defRPr sz="1050" b="1">
                 <a:solidFill>
                   <a:srgbClr val="FFFFFF"/>
                 </a:solidFill>
@@ -6786,15 +6124,179 @@
               </a:defRPr>
             </a:pPr>
             <a:r>
-              <a:t>06 • CONVERSATIONAL RAG ASSISTANT</a:t>
+              <a:t>• Why an LLM? </a:t>
+            </a:r>
+            <a:r>
+              <a:rPr b="0">
+                <a:solidFill>
+                  <a:srgbClr val="CBD5E1"/>
+                </a:solidFill>
+              </a:rPr>
+              <a:t>Supervisors hate writing SQL queries or clicking through 20 filter dropdowns.</a:t>
             </a:r>
           </a:p>
           <a:p>
             <a:pPr>
               <a:spcBef>
-                <a:spcPts val="200"/>
+                <a:spcPts val="600"/>
               </a:spcBef>
-              <a:defRPr sz="1350" b="1">
+              <a:defRPr sz="1050" b="1">
+                <a:solidFill>
+                  <a:srgbClr val="FFFFFF"/>
+                </a:solidFill>
+                <a:latin typeface="Segoe UI"/>
+              </a:defRPr>
+            </a:pPr>
+            <a:r>
+              <a:t>• How it works: </a:t>
+            </a:r>
+            <a:r>
+              <a:rPr b="0">
+                <a:solidFill>
+                  <a:srgbClr val="CBD5E1"/>
+                </a:solidFill>
+              </a:rPr>
+              <a:t>Feeds SQLite telemetry into Gemini to answer plain questions: 'Did Bay 3 drop anything today?'</a:t>
+            </a:r>
+          </a:p>
+          <a:p>
+            <a:pPr>
+              <a:spcBef>
+                <a:spcPts val="600"/>
+              </a:spcBef>
+              <a:defRPr sz="1050" b="1">
+                <a:solidFill>
+                  <a:srgbClr val="FFFFFF"/>
+                </a:solidFill>
+                <a:latin typeface="Segoe UI"/>
+              </a:defRPr>
+            </a:pPr>
+            <a:r>
+              <a:t>• Result: </a:t>
+            </a:r>
+            <a:r>
+              <a:rPr b="0">
+                <a:solidFill>
+                  <a:srgbClr val="CBD5E1"/>
+                </a:solidFill>
+              </a:rPr>
+              <a:t>Instant plain-English answers with timestamps.</a:t>
+            </a:r>
+          </a:p>
+        </p:txBody>
+      </p:sp>
+      <p:sp>
+        <p:nvSpPr>
+          <p:cNvPr id="15" name="Rectangle 14"/>
+          <p:cNvSpPr/>
+          <p:nvPr/>
+        </p:nvSpPr>
+        <p:spPr>
+          <a:xfrm>
+            <a:off x="731520" y="4096512"/>
+            <a:ext cx="3410712" cy="2542032"/>
+          </a:xfrm>
+          <a:prstGeom prst="rect">
+            <a:avLst/>
+          </a:prstGeom>
+          <a:solidFill>
+            <a:srgbClr val="0A192E"/>
+          </a:solidFill>
+          <a:ln w="12700">
+            <a:solidFill>
+              <a:srgbClr val="1C3E66"/>
+            </a:solidFill>
+          </a:ln>
+        </p:spPr>
+        <p:style>
+          <a:lnRef idx="1">
+            <a:schemeClr val="accent1"/>
+          </a:lnRef>
+          <a:fillRef idx="3">
+            <a:schemeClr val="accent1"/>
+          </a:fillRef>
+          <a:effectRef idx="2">
+            <a:schemeClr val="accent1"/>
+          </a:effectRef>
+          <a:fontRef idx="minor">
+            <a:schemeClr val="lt1"/>
+          </a:fontRef>
+        </p:style>
+        <p:txBody>
+          <a:bodyPr rtlCol="0" anchor="ctr"/>
+          <a:lstStyle/>
+          <a:p>
+            <a:pPr algn="ctr"/>
+          </a:p>
+        </p:txBody>
+      </p:sp>
+      <p:sp>
+        <p:nvSpPr>
+          <p:cNvPr id="16" name="Rectangle 15"/>
+          <p:cNvSpPr/>
+          <p:nvPr/>
+        </p:nvSpPr>
+        <p:spPr>
+          <a:xfrm>
+            <a:off x="731520" y="4096512"/>
+            <a:ext cx="3410712" cy="36576"/>
+          </a:xfrm>
+          <a:prstGeom prst="rect">
+            <a:avLst/>
+          </a:prstGeom>
+          <a:solidFill>
+            <a:srgbClr val="38BDF8"/>
+          </a:solidFill>
+          <a:ln>
+            <a:noFill/>
+          </a:ln>
+        </p:spPr>
+        <p:style>
+          <a:lnRef idx="1">
+            <a:schemeClr val="accent1"/>
+          </a:lnRef>
+          <a:fillRef idx="3">
+            <a:schemeClr val="accent1"/>
+          </a:fillRef>
+          <a:effectRef idx="2">
+            <a:schemeClr val="accent1"/>
+          </a:effectRef>
+          <a:fontRef idx="minor">
+            <a:schemeClr val="lt1"/>
+          </a:fontRef>
+        </p:style>
+        <p:txBody>
+          <a:bodyPr rtlCol="0" anchor="ctr"/>
+          <a:lstStyle/>
+          <a:p>
+            <a:pPr algn="ctr"/>
+          </a:p>
+        </p:txBody>
+      </p:sp>
+      <p:sp>
+        <p:nvSpPr>
+          <p:cNvPr id="17" name="TextBox 16"/>
+          <p:cNvSpPr txBox="1"/>
+          <p:nvPr/>
+        </p:nvSpPr>
+        <p:spPr>
+          <a:xfrm>
+            <a:off x="896112" y="4224528"/>
+            <a:ext cx="3081528" cy="2286000"/>
+          </a:xfrm>
+          <a:prstGeom prst="rect">
+            <a:avLst/>
+          </a:prstGeom>
+          <a:noFill/>
+        </p:spPr>
+        <p:txBody>
+          <a:bodyPr wrap="square" lIns="0" tIns="0" rIns="0" bIns="0">
+            <a:spAutoFit/>
+          </a:bodyPr>
+          <a:lstStyle/>
+          <a:p>
+            <a:pPr>
+              <a:defRPr sz="1200" b="1">
                 <a:solidFill>
                   <a:srgbClr val="38BDF8"/>
                 </a:solidFill>
@@ -6802,24 +6304,168 @@
               </a:defRPr>
             </a:pPr>
             <a:r>
-              <a:t>Google Gemini 2.5 Flash + Structured RAG</a:t>
+              <a:t>4. Smart Video Snips (OpenCV + FFmpeg)</a:t>
             </a:r>
           </a:p>
           <a:p>
             <a:pPr>
               <a:spcBef>
-                <a:spcPts val="300"/>
+                <a:spcPts val="600"/>
               </a:spcBef>
-              <a:defRPr sz="1250">
+              <a:defRPr sz="1050" b="1">
+                <a:solidFill>
+                  <a:srgbClr val="FFFFFF"/>
+                </a:solidFill>
+                <a:latin typeface="Segoe UI"/>
+              </a:defRPr>
+            </a:pPr>
+            <a:r>
+              <a:t>• No Wasted Storage: </a:t>
+            </a:r>
+            <a:r>
+              <a:rPr b="0">
                 <a:solidFill>
                   <a:srgbClr val="CBD5E1"/>
                 </a:solidFill>
-                <a:latin typeface="Segoe UI"/>
-              </a:defRPr>
-            </a:pPr>
-            <a:r>
-              <a:t>Natural language shift queries without SQL; instant risk summaries &amp; audit logs.</a:t>
-            </a:r>
+              </a:rPr>
+              <a:t>We don't save 24 hours of boring empty dock video.</a:t>
+            </a:r>
+          </a:p>
+          <a:p>
+            <a:pPr>
+              <a:spcBef>
+                <a:spcPts val="600"/>
+              </a:spcBef>
+              <a:defRPr sz="1050" b="1">
+                <a:solidFill>
+                  <a:srgbClr val="FFFFFF"/>
+                </a:solidFill>
+                <a:latin typeface="Segoe UI"/>
+              </a:defRPr>
+            </a:pPr>
+            <a:r>
+              <a:t>• Rolling Ring Buffer: </a:t>
+            </a:r>
+            <a:r>
+              <a:rPr b="0">
+                <a:solidFill>
+                  <a:srgbClr val="CBD5E1"/>
+                </a:solidFill>
+              </a:rPr>
+              <a:t>Keeps last 15 seconds in memory; automatically cuts a neat 5-second replay clip on alert.</a:t>
+            </a:r>
+          </a:p>
+          <a:p>
+            <a:pPr>
+              <a:spcBef>
+                <a:spcPts val="600"/>
+              </a:spcBef>
+              <a:defRPr sz="1050" b="1">
+                <a:solidFill>
+                  <a:srgbClr val="FFFFFF"/>
+                </a:solidFill>
+                <a:latin typeface="Segoe UI"/>
+              </a:defRPr>
+            </a:pPr>
+            <a:r>
+              <a:t>• Web Ready: </a:t>
+            </a:r>
+            <a:r>
+              <a:rPr b="0">
+                <a:solidFill>
+                  <a:srgbClr val="CBD5E1"/>
+                </a:solidFill>
+              </a:rPr>
+              <a:t>Encodes to lightweight H.264 so it plays instantly in the browser.</a:t>
+            </a:r>
+          </a:p>
+        </p:txBody>
+      </p:sp>
+      <p:sp>
+        <p:nvSpPr>
+          <p:cNvPr id="18" name="Rectangle 17"/>
+          <p:cNvSpPr/>
+          <p:nvPr/>
+        </p:nvSpPr>
+        <p:spPr>
+          <a:xfrm>
+            <a:off x="4389120" y="4096512"/>
+            <a:ext cx="3410712" cy="2542032"/>
+          </a:xfrm>
+          <a:prstGeom prst="rect">
+            <a:avLst/>
+          </a:prstGeom>
+          <a:solidFill>
+            <a:srgbClr val="0A192E"/>
+          </a:solidFill>
+          <a:ln w="12700">
+            <a:solidFill>
+              <a:srgbClr val="1C3E66"/>
+            </a:solidFill>
+          </a:ln>
+        </p:spPr>
+        <p:style>
+          <a:lnRef idx="1">
+            <a:schemeClr val="accent1"/>
+          </a:lnRef>
+          <a:fillRef idx="3">
+            <a:schemeClr val="accent1"/>
+          </a:fillRef>
+          <a:effectRef idx="2">
+            <a:schemeClr val="accent1"/>
+          </a:effectRef>
+          <a:fontRef idx="minor">
+            <a:schemeClr val="lt1"/>
+          </a:fontRef>
+        </p:style>
+        <p:txBody>
+          <a:bodyPr rtlCol="0" anchor="ctr"/>
+          <a:lstStyle/>
+          <a:p>
+            <a:pPr algn="ctr"/>
+          </a:p>
+        </p:txBody>
+      </p:sp>
+      <p:sp>
+        <p:nvSpPr>
+          <p:cNvPr id="19" name="Rectangle 18"/>
+          <p:cNvSpPr/>
+          <p:nvPr/>
+        </p:nvSpPr>
+        <p:spPr>
+          <a:xfrm>
+            <a:off x="4389120" y="4096512"/>
+            <a:ext cx="3410712" cy="36576"/>
+          </a:xfrm>
+          <a:prstGeom prst="rect">
+            <a:avLst/>
+          </a:prstGeom>
+          <a:solidFill>
+            <a:srgbClr val="38BDF8"/>
+          </a:solidFill>
+          <a:ln>
+            <a:noFill/>
+          </a:ln>
+        </p:spPr>
+        <p:style>
+          <a:lnRef idx="1">
+            <a:schemeClr val="accent1"/>
+          </a:lnRef>
+          <a:fillRef idx="3">
+            <a:schemeClr val="accent1"/>
+          </a:fillRef>
+          <a:effectRef idx="2">
+            <a:schemeClr val="accent1"/>
+          </a:effectRef>
+          <a:fontRef idx="minor">
+            <a:schemeClr val="lt1"/>
+          </a:fontRef>
+        </p:style>
+        <p:txBody>
+          <a:bodyPr rtlCol="0" anchor="ctr"/>
+          <a:lstStyle/>
+          <a:p>
+            <a:pPr algn="ctr"/>
           </a:p>
         </p:txBody>
       </p:sp>
@@ -6831,8 +6477,8 @@
         </p:nvSpPr>
         <p:spPr>
           <a:xfrm>
-            <a:off x="731520" y="6172200"/>
-            <a:ext cx="10728655" cy="320040"/>
+            <a:off x="4553712" y="4224528"/>
+            <a:ext cx="3081528" cy="2286000"/>
           </a:xfrm>
           <a:prstGeom prst="rect">
             <a:avLst/>
@@ -6840,13 +6486,13 @@
           <a:noFill/>
         </p:spPr>
         <p:txBody>
-          <a:bodyPr wrap="none" lIns="0" tIns="0" rIns="0" bIns="0">
+          <a:bodyPr wrap="square" lIns="0" tIns="0" rIns="0" bIns="0">
             <a:spAutoFit/>
           </a:bodyPr>
           <a:lstStyle/>
           <a:p>
             <a:pPr>
-              <a:defRPr sz="1450" b="1">
+              <a:defRPr sz="1200" b="1">
                 <a:solidFill>
                   <a:srgbClr val="38BDF8"/>
                 </a:solidFill>
@@ -6854,15 +6500,275 @@
               </a:defRPr>
             </a:pPr>
             <a:r>
-              <a:t>Key Design Decision: </a:t>
+              <a:t>5. Fast Python Backend &amp; Database</a:t>
+            </a:r>
+          </a:p>
+          <a:p>
+            <a:pPr>
+              <a:spcBef>
+                <a:spcPts val="600"/>
+              </a:spcBef>
+              <a:defRPr sz="1050" b="1">
+                <a:solidFill>
+                  <a:srgbClr val="FFFFFF"/>
+                </a:solidFill>
+                <a:latin typeface="Segoe UI"/>
+              </a:defRPr>
+            </a:pPr>
+            <a:r>
+              <a:t>• FastAPI Core: </a:t>
             </a:r>
             <a:r>
               <a:rPr b="0">
                 <a:solidFill>
-                  <a:srgbClr val="E2E8F0"/>
+                  <a:srgbClr val="CBD5E1"/>
                 </a:solidFill>
               </a:rPr>
-              <a:t>Local spatial vector physics filter false alarms in &lt;50ms → Only verified risk events reach Gemini &amp; WebSockets.</a:t>
+              <a:t>Super-fast async framework handling video uploads, alert WebSockets, and stats.</a:t>
+            </a:r>
+          </a:p>
+          <a:p>
+            <a:pPr>
+              <a:spcBef>
+                <a:spcPts val="600"/>
+              </a:spcBef>
+              <a:defRPr sz="1050" b="1">
+                <a:solidFill>
+                  <a:srgbClr val="FFFFFF"/>
+                </a:solidFill>
+                <a:latin typeface="Segoe UI"/>
+              </a:defRPr>
+            </a:pPr>
+            <a:r>
+              <a:t>• SQLite + SQLAlchemy: </a:t>
+            </a:r>
+            <a:r>
+              <a:rPr b="0">
+                <a:solidFill>
+                  <a:srgbClr val="CBD5E1"/>
+                </a:solidFill>
+              </a:rPr>
+              <a:t>Simple, reliable local database storing incident records, drop heights, and camera IDs.</a:t>
+            </a:r>
+          </a:p>
+          <a:p>
+            <a:pPr>
+              <a:spcBef>
+                <a:spcPts val="600"/>
+              </a:spcBef>
+              <a:defRPr sz="1050" b="1">
+                <a:solidFill>
+                  <a:srgbClr val="FFFFFF"/>
+                </a:solidFill>
+                <a:latin typeface="Segoe UI"/>
+              </a:defRPr>
+            </a:pPr>
+            <a:r>
+              <a:t>• Clean API: </a:t>
+            </a:r>
+            <a:r>
+              <a:rPr b="0">
+                <a:solidFill>
+                  <a:srgbClr val="CBD5E1"/>
+                </a:solidFill>
+              </a:rPr>
+              <a:t>Well-documented REST routes for the frontend to poll.</a:t>
+            </a:r>
+          </a:p>
+        </p:txBody>
+      </p:sp>
+      <p:sp>
+        <p:nvSpPr>
+          <p:cNvPr id="21" name="Rectangle 20"/>
+          <p:cNvSpPr/>
+          <p:nvPr/>
+        </p:nvSpPr>
+        <p:spPr>
+          <a:xfrm>
+            <a:off x="8046720" y="4096512"/>
+            <a:ext cx="3410712" cy="2542032"/>
+          </a:xfrm>
+          <a:prstGeom prst="rect">
+            <a:avLst/>
+          </a:prstGeom>
+          <a:solidFill>
+            <a:srgbClr val="0A192E"/>
+          </a:solidFill>
+          <a:ln w="12700">
+            <a:solidFill>
+              <a:srgbClr val="1C3E66"/>
+            </a:solidFill>
+          </a:ln>
+        </p:spPr>
+        <p:style>
+          <a:lnRef idx="1">
+            <a:schemeClr val="accent1"/>
+          </a:lnRef>
+          <a:fillRef idx="3">
+            <a:schemeClr val="accent1"/>
+          </a:fillRef>
+          <a:effectRef idx="2">
+            <a:schemeClr val="accent1"/>
+          </a:effectRef>
+          <a:fontRef idx="minor">
+            <a:schemeClr val="lt1"/>
+          </a:fontRef>
+        </p:style>
+        <p:txBody>
+          <a:bodyPr rtlCol="0" anchor="ctr"/>
+          <a:lstStyle/>
+          <a:p>
+            <a:pPr algn="ctr"/>
+          </a:p>
+        </p:txBody>
+      </p:sp>
+      <p:sp>
+        <p:nvSpPr>
+          <p:cNvPr id="22" name="Rectangle 21"/>
+          <p:cNvSpPr/>
+          <p:nvPr/>
+        </p:nvSpPr>
+        <p:spPr>
+          <a:xfrm>
+            <a:off x="8046720" y="4096512"/>
+            <a:ext cx="3410712" cy="36576"/>
+          </a:xfrm>
+          <a:prstGeom prst="rect">
+            <a:avLst/>
+          </a:prstGeom>
+          <a:solidFill>
+            <a:srgbClr val="38BDF8"/>
+          </a:solidFill>
+          <a:ln>
+            <a:noFill/>
+          </a:ln>
+        </p:spPr>
+        <p:style>
+          <a:lnRef idx="1">
+            <a:schemeClr val="accent1"/>
+          </a:lnRef>
+          <a:fillRef idx="3">
+            <a:schemeClr val="accent1"/>
+          </a:fillRef>
+          <a:effectRef idx="2">
+            <a:schemeClr val="accent1"/>
+          </a:effectRef>
+          <a:fontRef idx="minor">
+            <a:schemeClr val="lt1"/>
+          </a:fontRef>
+        </p:style>
+        <p:txBody>
+          <a:bodyPr rtlCol="0" anchor="ctr"/>
+          <a:lstStyle/>
+          <a:p>
+            <a:pPr algn="ctr"/>
+          </a:p>
+        </p:txBody>
+      </p:sp>
+      <p:sp>
+        <p:nvSpPr>
+          <p:cNvPr id="23" name="TextBox 22"/>
+          <p:cNvSpPr txBox="1"/>
+          <p:nvPr/>
+        </p:nvSpPr>
+        <p:spPr>
+          <a:xfrm>
+            <a:off x="8211312" y="4224528"/>
+            <a:ext cx="3081528" cy="2286000"/>
+          </a:xfrm>
+          <a:prstGeom prst="rect">
+            <a:avLst/>
+          </a:prstGeom>
+          <a:noFill/>
+        </p:spPr>
+        <p:txBody>
+          <a:bodyPr wrap="square" lIns="0" tIns="0" rIns="0" bIns="0">
+            <a:spAutoFit/>
+          </a:bodyPr>
+          <a:lstStyle/>
+          <a:p>
+            <a:pPr>
+              <a:defRPr sz="1200" b="1">
+                <a:solidFill>
+                  <a:srgbClr val="38BDF8"/>
+                </a:solidFill>
+                <a:latin typeface="Segoe UI"/>
+              </a:defRPr>
+            </a:pPr>
+            <a:r>
+              <a:t>6. React Dashboard &amp; Sound Alerts</a:t>
+            </a:r>
+          </a:p>
+          <a:p>
+            <a:pPr>
+              <a:spcBef>
+                <a:spcPts val="600"/>
+              </a:spcBef>
+              <a:defRPr sz="1050" b="1">
+                <a:solidFill>
+                  <a:srgbClr val="FFFFFF"/>
+                </a:solidFill>
+                <a:latin typeface="Segoe UI"/>
+              </a:defRPr>
+            </a:pPr>
+            <a:r>
+              <a:t>• Frontend Stack: </a:t>
+            </a:r>
+            <a:r>
+              <a:rPr b="0">
+                <a:solidFill>
+                  <a:srgbClr val="CBD5E1"/>
+                </a:solidFill>
+              </a:rPr>
+              <a:t>React 18, TypeScript, and Tailwind CSS for a crisp, responsive layout.</a:t>
+            </a:r>
+          </a:p>
+          <a:p>
+            <a:pPr>
+              <a:spcBef>
+                <a:spcPts val="600"/>
+              </a:spcBef>
+              <a:defRPr sz="1050" b="1">
+                <a:solidFill>
+                  <a:srgbClr val="FFFFFF"/>
+                </a:solidFill>
+                <a:latin typeface="Segoe UI"/>
+              </a:defRPr>
+            </a:pPr>
+            <a:r>
+              <a:t>• Interactive Charts: </a:t>
+            </a:r>
+            <a:r>
+              <a:rPr b="0">
+                <a:solidFill>
+                  <a:srgbClr val="CBD5E1"/>
+                </a:solidFill>
+              </a:rPr>
+              <a:t>Recharts rendering 7-day risk trends and KPI cards.</a:t>
+            </a:r>
+          </a:p>
+          <a:p>
+            <a:pPr>
+              <a:spcBef>
+                <a:spcPts val="600"/>
+              </a:spcBef>
+              <a:defRPr sz="1050" b="1">
+                <a:solidFill>
+                  <a:srgbClr val="FFFFFF"/>
+                </a:solidFill>
+                <a:latin typeface="Segoe UI"/>
+              </a:defRPr>
+            </a:pPr>
+            <a:r>
+              <a:t>• Audio Chimes: </a:t>
+            </a:r>
+            <a:r>
+              <a:rPr b="0">
+                <a:solidFill>
+                  <a:srgbClr val="CBD5E1"/>
+                </a:solidFill>
+              </a:rPr>
+              <a:t>Web Audio API generates soft synthetic tones in-browser without downloading sound files.</a:t>
             </a:r>
           </a:p>
         </p:txBody>
@@ -6915,8 +6821,8 @@
         </p:nvSpPr>
         <p:spPr>
           <a:xfrm>
-            <a:off x="731520" y="384048"/>
-            <a:ext cx="5943600" cy="274320"/>
+            <a:off x="731520" y="347472"/>
+            <a:ext cx="5943600" cy="256032"/>
           </a:xfrm>
           <a:prstGeom prst="rect">
             <a:avLst/>
@@ -6930,7 +6836,7 @@
           <a:lstStyle/>
           <a:p>
             <a:pPr>
-              <a:defRPr sz="1350" b="1">
+              <a:defRPr sz="1100" b="1">
                 <a:solidFill>
                   <a:srgbClr val="38BDF8"/>
                 </a:solidFill>
@@ -6951,7 +6857,7 @@
         </p:nvSpPr>
         <p:spPr>
           <a:xfrm>
-            <a:off x="731520" y="658368"/>
+            <a:off x="731520" y="621792"/>
             <a:ext cx="10728655" cy="502920"/>
           </a:xfrm>
           <a:prstGeom prst="rect">
@@ -6966,7 +6872,7 @@
           <a:lstStyle/>
           <a:p>
             <a:pPr>
-              <a:defRPr sz="2900" b="1">
+              <a:defRPr sz="2500" b="1">
                 <a:solidFill>
                   <a:srgbClr val="FFFFFF"/>
                 </a:solidFill>
@@ -6974,7 +6880,7 @@
               </a:defRPr>
             </a:pPr>
             <a:r>
-              <a:t>Field Prototype: Live Detection, Replay &amp; Dashboard</a:t>
+              <a:t>In Action: Spotting Drops, Drags &amp; Tilted Pallets</a:t>
             </a:r>
           </a:p>
         </p:txBody>
@@ -6987,7 +6893,7 @@
         </p:nvSpPr>
         <p:spPr>
           <a:xfrm>
-            <a:off x="731520" y="1234440"/>
+            <a:off x="731520" y="1170432"/>
             <a:ext cx="10728655" cy="13716"/>
           </a:xfrm>
           <a:prstGeom prst="rect">
@@ -7038,8 +6944,8 @@
         </p:blipFill>
         <p:spPr>
           <a:xfrm>
-            <a:off x="731520" y="1417320"/>
-            <a:ext cx="3200400" cy="2331720"/>
+            <a:off x="731520" y="1353312"/>
+            <a:ext cx="3246120" cy="2331720"/>
           </a:xfrm>
           <a:prstGeom prst="rect">
             <a:avLst/>
@@ -7048,59 +6954,14 @@
       </p:pic>
       <p:sp>
         <p:nvSpPr>
-          <p:cNvPr id="6" name="Rectangle 5"/>
-          <p:cNvSpPr/>
-          <p:nvPr/>
-        </p:nvSpPr>
-        <p:spPr>
-          <a:xfrm>
-            <a:off x="731520" y="1417320"/>
-            <a:ext cx="2011680" cy="292608"/>
-          </a:xfrm>
-          <a:prstGeom prst="rect">
-            <a:avLst/>
-          </a:prstGeom>
-          <a:solidFill>
-            <a:srgbClr val="102C52"/>
-          </a:solidFill>
-          <a:ln>
-            <a:solidFill>
-              <a:srgbClr val="38BDF8"/>
-            </a:solidFill>
-          </a:ln>
-        </p:spPr>
-        <p:style>
-          <a:lnRef idx="1">
-            <a:schemeClr val="accent1"/>
-          </a:lnRef>
-          <a:fillRef idx="3">
-            <a:schemeClr val="accent1"/>
-          </a:fillRef>
-          <a:effectRef idx="2">
-            <a:schemeClr val="accent1"/>
-          </a:effectRef>
-          <a:fontRef idx="minor">
-            <a:schemeClr val="lt1"/>
-          </a:fontRef>
-        </p:style>
-        <p:txBody>
-          <a:bodyPr rtlCol="0" anchor="ctr"/>
-          <a:lstStyle/>
-          <a:p>
-            <a:pPr algn="ctr"/>
-          </a:p>
-        </p:txBody>
-      </p:sp>
-      <p:sp>
-        <p:nvSpPr>
-          <p:cNvPr id="7" name="TextBox 6"/>
+          <p:cNvPr id="6" name="TextBox 5"/>
           <p:cNvSpPr txBox="1"/>
           <p:nvPr/>
         </p:nvSpPr>
         <p:spPr>
           <a:xfrm>
-            <a:off x="777240" y="1435608"/>
-            <a:ext cx="1920240" cy="256032"/>
+            <a:off x="731520" y="3712463"/>
+            <a:ext cx="3246120" cy="274320"/>
           </a:xfrm>
           <a:prstGeom prst="rect">
             <a:avLst/>
@@ -7108,27 +6969,28 @@
           <a:noFill/>
         </p:spPr>
         <p:txBody>
-          <a:bodyPr wrap="none">
+          <a:bodyPr wrap="square" lIns="0" tIns="0" rIns="0" bIns="0">
             <a:spAutoFit/>
           </a:bodyPr>
           <a:lstStyle/>
           <a:p>
             <a:pPr>
-              <a:defRPr sz="1100" b="1">
-                <a:solidFill>
-                  <a:srgbClr val="FFFFFF"/>
-                </a:solidFill>
-              </a:defRPr>
-            </a:pPr>
-            <a:r>
-              <a:t>4.6m FLOOR DRAG DETECTED</a:t>
+              <a:defRPr sz="950">
+                <a:solidFill>
+                  <a:srgbClr val="38BDF8"/>
+                </a:solidFill>
+                <a:latin typeface="Segoe UI"/>
+              </a:defRPr>
+            </a:pPr>
+            <a:r>
+              <a:t>AI detecting worker &amp; box dragged 4.6m on wet floor</a:t>
             </a:r>
           </a:p>
         </p:txBody>
       </p:sp>
       <p:pic>
         <p:nvPicPr>
-          <p:cNvPr id="8" name="Picture 7" descr="media_1788497397504.png"/>
+          <p:cNvPr id="7" name="Picture 6" descr="media_1788497397504.png"/>
           <p:cNvPicPr>
             <a:picLocks noChangeAspect="1"/>
           </p:cNvPicPr>
@@ -7142,8 +7004,8 @@
         </p:blipFill>
         <p:spPr>
           <a:xfrm>
-            <a:off x="4069080" y="1417320"/>
-            <a:ext cx="3246120" cy="2331720"/>
+            <a:off x="4160520" y="1353312"/>
+            <a:ext cx="3291840" cy="2331720"/>
           </a:xfrm>
           <a:prstGeom prst="rect">
             <a:avLst/>
@@ -7152,59 +7014,14 @@
       </p:pic>
       <p:sp>
         <p:nvSpPr>
-          <p:cNvPr id="9" name="Rectangle 8"/>
-          <p:cNvSpPr/>
-          <p:nvPr/>
-        </p:nvSpPr>
-        <p:spPr>
-          <a:xfrm>
-            <a:off x="4069080" y="1417320"/>
-            <a:ext cx="2011680" cy="292608"/>
-          </a:xfrm>
-          <a:prstGeom prst="rect">
-            <a:avLst/>
-          </a:prstGeom>
-          <a:solidFill>
-            <a:srgbClr val="102C52"/>
-          </a:solidFill>
-          <a:ln>
-            <a:solidFill>
-              <a:srgbClr val="38BDF8"/>
-            </a:solidFill>
-          </a:ln>
-        </p:spPr>
-        <p:style>
-          <a:lnRef idx="1">
-            <a:schemeClr val="accent1"/>
-          </a:lnRef>
-          <a:fillRef idx="3">
-            <a:schemeClr val="accent1"/>
-          </a:fillRef>
-          <a:effectRef idx="2">
-            <a:schemeClr val="accent1"/>
-          </a:effectRef>
-          <a:fontRef idx="minor">
-            <a:schemeClr val="lt1"/>
-          </a:fontRef>
-        </p:style>
-        <p:txBody>
-          <a:bodyPr rtlCol="0" anchor="ctr"/>
-          <a:lstStyle/>
-          <a:p>
-            <a:pPr algn="ctr"/>
-          </a:p>
-        </p:txBody>
-      </p:sp>
-      <p:sp>
-        <p:nvSpPr>
-          <p:cNvPr id="10" name="TextBox 9"/>
+          <p:cNvPr id="8" name="TextBox 7"/>
           <p:cNvSpPr txBox="1"/>
           <p:nvPr/>
         </p:nvSpPr>
         <p:spPr>
           <a:xfrm>
-            <a:off x="4114800" y="1435608"/>
-            <a:ext cx="1920240" cy="256032"/>
+            <a:off x="4160520" y="3712463"/>
+            <a:ext cx="3291840" cy="274320"/>
           </a:xfrm>
           <a:prstGeom prst="rect">
             <a:avLst/>
@@ -7212,27 +7029,28 @@
           <a:noFill/>
         </p:spPr>
         <p:txBody>
-          <a:bodyPr wrap="none">
+          <a:bodyPr wrap="square" lIns="0" tIns="0" rIns="0" bIns="0">
             <a:spAutoFit/>
           </a:bodyPr>
           <a:lstStyle/>
           <a:p>
             <a:pPr>
-              <a:defRPr sz="1100" b="1">
-                <a:solidFill>
-                  <a:srgbClr val="FFFFFF"/>
-                </a:solidFill>
-              </a:defRPr>
-            </a:pPr>
-            <a:r>
-              <a:t>CRITICAL DROP REPLAY (5s)</a:t>
+              <a:defRPr sz="950">
+                <a:solidFill>
+                  <a:srgbClr val="38BDF8"/>
+                </a:solidFill>
+                <a:latin typeface="Segoe UI"/>
+              </a:defRPr>
+            </a:pPr>
+            <a:r>
+              <a:t>Instant 5-second replay with falling box trajectory</a:t>
             </a:r>
           </a:p>
         </p:txBody>
       </p:sp>
       <p:pic>
         <p:nvPicPr>
-          <p:cNvPr id="11" name="Picture 10" descr="media_1788627628552.png"/>
+          <p:cNvPr id="9" name="Picture 8" descr="media_1788627628552.png"/>
           <p:cNvPicPr>
             <a:picLocks noChangeAspect="1"/>
           </p:cNvPicPr>
@@ -7246,8 +7064,8 @@
         </p:blipFill>
         <p:spPr>
           <a:xfrm>
-            <a:off x="731520" y="3886200"/>
-            <a:ext cx="6583680" cy="2331720"/>
+            <a:off x="731520" y="4041648"/>
+            <a:ext cx="6720840" cy="2240280"/>
           </a:xfrm>
           <a:prstGeom prst="rect">
             <a:avLst/>
@@ -7256,59 +7074,14 @@
       </p:pic>
       <p:sp>
         <p:nvSpPr>
-          <p:cNvPr id="12" name="Rectangle 11"/>
-          <p:cNvSpPr/>
-          <p:nvPr/>
-        </p:nvSpPr>
-        <p:spPr>
-          <a:xfrm>
-            <a:off x="731520" y="3886200"/>
-            <a:ext cx="2377440" cy="292608"/>
-          </a:xfrm>
-          <a:prstGeom prst="rect">
-            <a:avLst/>
-          </a:prstGeom>
-          <a:solidFill>
-            <a:srgbClr val="102C52"/>
-          </a:solidFill>
-          <a:ln>
-            <a:solidFill>
-              <a:srgbClr val="38BDF8"/>
-            </a:solidFill>
-          </a:ln>
-        </p:spPr>
-        <p:style>
-          <a:lnRef idx="1">
-            <a:schemeClr val="accent1"/>
-          </a:lnRef>
-          <a:fillRef idx="3">
-            <a:schemeClr val="accent1"/>
-          </a:fillRef>
-          <a:effectRef idx="2">
-            <a:schemeClr val="accent1"/>
-          </a:effectRef>
-          <a:fontRef idx="minor">
-            <a:schemeClr val="lt1"/>
-          </a:fontRef>
-        </p:style>
-        <p:txBody>
-          <a:bodyPr rtlCol="0" anchor="ctr"/>
-          <a:lstStyle/>
-          <a:p>
-            <a:pPr algn="ctr"/>
-          </a:p>
-        </p:txBody>
-      </p:sp>
-      <p:sp>
-        <p:nvSpPr>
-          <p:cNvPr id="13" name="TextBox 12"/>
+          <p:cNvPr id="10" name="TextBox 9"/>
           <p:cNvSpPr txBox="1"/>
           <p:nvPr/>
         </p:nvSpPr>
         <p:spPr>
           <a:xfrm>
-            <a:off x="777240" y="3904487"/>
-            <a:ext cx="2286000" cy="256032"/>
+            <a:off x="731520" y="6327648"/>
+            <a:ext cx="6720840" cy="274320"/>
           </a:xfrm>
           <a:prstGeom prst="rect">
             <a:avLst/>
@@ -7316,34 +7089,35 @@
           <a:noFill/>
         </p:spPr>
         <p:txBody>
-          <a:bodyPr wrap="none">
+          <a:bodyPr wrap="square" lIns="0" tIns="0" rIns="0" bIns="0">
             <a:spAutoFit/>
           </a:bodyPr>
           <a:lstStyle/>
           <a:p>
             <a:pPr>
-              <a:defRPr sz="1100" b="1">
-                <a:solidFill>
-                  <a:srgbClr val="FFFFFF"/>
-                </a:solidFill>
-              </a:defRPr>
-            </a:pPr>
-            <a:r>
-              <a:t>LIVE OPERATIONAL DASHBOARD</a:t>
-            </a:r>
-          </a:p>
-        </p:txBody>
-      </p:sp>
-      <p:sp>
-        <p:nvSpPr>
-          <p:cNvPr id="14" name="Rectangle 13"/>
+              <a:defRPr sz="950">
+                <a:solidFill>
+                  <a:srgbClr val="94A3B8"/>
+                </a:solidFill>
+                <a:latin typeface="Segoe UI"/>
+              </a:defRPr>
+            </a:pPr>
+            <a:r>
+              <a:t>The live dashboard: Pastel KPI cards, 7-day risk trend curves, and instant alert drawer</a:t>
+            </a:r>
+          </a:p>
+        </p:txBody>
+      </p:sp>
+      <p:sp>
+        <p:nvSpPr>
+          <p:cNvPr id="11" name="Rectangle 10"/>
           <p:cNvSpPr/>
           <p:nvPr/>
         </p:nvSpPr>
         <p:spPr>
           <a:xfrm>
-            <a:off x="7635240" y="1417320"/>
-            <a:ext cx="3822191" cy="4800600"/>
+            <a:off x="7635240" y="1353312"/>
+            <a:ext cx="3822191" cy="5230368"/>
           </a:xfrm>
           <a:prstGeom prst="rect">
             <a:avLst/>
@@ -7381,13 +7155,13 @@
       </p:sp>
       <p:sp>
         <p:nvSpPr>
-          <p:cNvPr id="15" name="Rectangle 14"/>
+          <p:cNvPr id="12" name="Rectangle 11"/>
           <p:cNvSpPr/>
           <p:nvPr/>
         </p:nvSpPr>
         <p:spPr>
           <a:xfrm>
-            <a:off x="7635240" y="1417320"/>
+            <a:off x="7635240" y="1353312"/>
             <a:ext cx="3822191" cy="36576"/>
           </a:xfrm>
           <a:prstGeom prst="rect">
@@ -7424,14 +7198,14 @@
       </p:sp>
       <p:sp>
         <p:nvSpPr>
-          <p:cNvPr id="16" name="TextBox 15"/>
+          <p:cNvPr id="13" name="TextBox 12"/>
           <p:cNvSpPr txBox="1"/>
           <p:nvPr/>
         </p:nvSpPr>
         <p:spPr>
           <a:xfrm>
-            <a:off x="7863840" y="1572768"/>
-            <a:ext cx="3364991" cy="4480560"/>
+            <a:off x="7836408" y="1508760"/>
+            <a:ext cx="3419855" cy="4937760"/>
           </a:xfrm>
           <a:prstGeom prst="rect">
             <a:avLst/>
@@ -7445,7 +7219,7 @@
           <a:lstStyle/>
           <a:p>
             <a:pPr>
-              <a:defRPr sz="1800" b="1">
+              <a:defRPr sz="1300" b="1">
                 <a:solidFill>
                   <a:srgbClr val="38BDF8"/>
                 </a:solidFill>
@@ -7453,7 +7227,7 @@
               </a:defRPr>
             </a:pPr>
             <a:r>
-              <a:t>TESTED IN REAL FOOTAGE</a:t>
+              <a:t>4 REAL SCENARIOS WE TESTED</a:t>
             </a:r>
           </a:p>
           <a:p>
@@ -7461,7 +7235,7 @@
               <a:spcBef>
                 <a:spcPts val="700"/>
               </a:spcBef>
-              <a:defRPr sz="1450" b="1">
+              <a:defRPr sz="1100" b="1">
                 <a:solidFill>
                   <a:srgbClr val="FFFFFF"/>
                 </a:solidFill>
@@ -7469,23 +7243,15 @@
               </a:defRPr>
             </a:pPr>
             <a:r>
-              <a:t>• Drop from Staging (&gt;1.2m)</a:t>
-            </a:r>
-          </a:p>
-          <a:p>
-            <a:pPr>
-              <a:spcBef>
-                <a:spcPts val="100"/>
-              </a:spcBef>
-              <a:defRPr sz="1250">
+              <a:t>• 1. The 'Butterfingers' Drop: </a:t>
+            </a:r>
+            <a:r>
+              <a:rPr b="0">
                 <a:solidFill>
                   <a:srgbClr val="CBD5E1"/>
                 </a:solidFill>
-                <a:latin typeface="Segoe UI"/>
-              </a:defRPr>
-            </a:pPr>
-            <a:r>
-              <a:t>  Freefall spike vy &gt; 2.8 m/s triggers dock chime in 1.2s flat.</a:t>
+              </a:rPr>
+              <a:t>Carton slips from 1.3m off pallet staging. The camera spots the free-fall spike and triggers a CRITICAL alert in 1.2s flat.</a:t>
             </a:r>
           </a:p>
           <a:p>
@@ -7493,7 +7259,7 @@
               <a:spcBef>
                 <a:spcPts val="700"/>
               </a:spcBef>
-              <a:defRPr sz="1450" b="1">
+              <a:defRPr sz="1100" b="1">
                 <a:solidFill>
                   <a:srgbClr val="FFFFFF"/>
                 </a:solidFill>
@@ -7501,23 +7267,15 @@
               </a:defRPr>
             </a:pPr>
             <a:r>
-              <a:t>• Wet-Floor Dragging (4.6m)</a:t>
-            </a:r>
-          </a:p>
-          <a:p>
-            <a:pPr>
-              <a:spcBef>
-                <a:spcPts val="100"/>
-              </a:spcBef>
-              <a:defRPr sz="1250">
+              <a:t>• 2. The Wet-Floor Hockey Puck: </a:t>
+            </a:r>
+            <a:r>
+              <a:rPr b="0">
                 <a:solidFill>
                   <a:srgbClr val="CBD5E1"/>
                 </a:solidFill>
-                <a:latin typeface="Segoe UI"/>
-              </a:defRPr>
-            </a:pPr>
-            <a:r>
-              <a:t>  Continuous floor displacement flagged as severe friction hazard.</a:t>
+              </a:rPr>
+              <a:t>A worker slides a 20kg box 4.6m across wet concrete. The system measures the ground distance and flags HIGH risk dragging.</a:t>
             </a:r>
           </a:p>
           <a:p>
@@ -7525,7 +7283,7 @@
               <a:spcBef>
                 <a:spcPts val="700"/>
               </a:spcBef>
-              <a:defRPr sz="1450" b="1">
+              <a:defRPr sz="1100" b="1">
                 <a:solidFill>
                   <a:srgbClr val="FFFFFF"/>
                 </a:solidFill>
@@ -7533,23 +7291,15 @@
               </a:defRPr>
             </a:pPr>
             <a:r>
-              <a:t>• Unstable Pallet Tilt (&gt;17°)</a:t>
-            </a:r>
-          </a:p>
-          <a:p>
-            <a:pPr>
-              <a:spcBef>
-                <a:spcPts val="100"/>
-              </a:spcBef>
-              <a:defRPr sz="1250">
+              <a:t>• 3. The Leaning Tower of Boxes: </a:t>
+            </a:r>
+            <a:r>
+              <a:rPr b="0">
                 <a:solidFill>
                   <a:srgbClr val="CBD5E1"/>
                 </a:solidFill>
-                <a:latin typeface="Segoe UI"/>
-              </a:defRPr>
-            </a:pPr>
-            <a:r>
-              <a:t>  Stack angle warning alerts loaders before trailer loading.</a:t>
+              </a:rPr>
+              <a:t>Boxes stacked with a 17° tilt without proper interlocking are flagged as CAUTION so the loader can straighten the pile.</a:t>
             </a:r>
           </a:p>
           <a:p>
@@ -7557,7 +7307,7 @@
               <a:spcBef>
                 <a:spcPts val="700"/>
               </a:spcBef>
-              <a:defRPr sz="1450" b="1">
+              <a:defRPr sz="1100" b="1">
                 <a:solidFill>
                   <a:srgbClr val="FFFFFF"/>
                 </a:solidFill>
@@ -7565,47 +7315,63 @@
               </a:defRPr>
             </a:pPr>
             <a:r>
-              <a:t>• Gemini AI Natural Query</a:t>
+              <a:t>• 4. Grilling the AI Assistant: </a:t>
+            </a:r>
+            <a:r>
+              <a:rPr b="0">
+                <a:solidFill>
+                  <a:srgbClr val="CBD5E1"/>
+                </a:solidFill>
+              </a:rPr>
+              <a:t>We typed: 'Which bay had drops today?' and Gemini parsed the database logs to tell us Bay 3 had 2 drop incidents at 10:14 AM and 2:30 PM.</a:t>
             </a:r>
           </a:p>
           <a:p>
             <a:pPr>
               <a:spcBef>
-                <a:spcPts val="100"/>
+                <a:spcPts val="1200"/>
               </a:spcBef>
-              <a:defRPr sz="1250">
-                <a:solidFill>
-                  <a:srgbClr val="CBD5E1"/>
-                </a:solidFill>
-                <a:latin typeface="Segoe UI"/>
-              </a:defRPr>
-            </a:pPr>
-            <a:r>
-              <a:t>  'Which bay had drops today?' resolved instantly from SQLite logs.</a:t>
+              <a:defRPr sz="1100" b="1">
+                <a:solidFill>
+                  <a:srgbClr val="38BDF8"/>
+                </a:solidFill>
+                <a:latin typeface="Segoe UI"/>
+              </a:defRPr>
+            </a:pPr>
+            <a:r>
+              <a:t>TEST IT YOURSELF (LIVE LINKS):</a:t>
             </a:r>
           </a:p>
           <a:p>
             <a:pPr>
               <a:spcBef>
-                <a:spcPts val="1000"/>
+                <a:spcPts val="200"/>
               </a:spcBef>
-              <a:defRPr sz="1400" b="1">
-                <a:solidFill>
-                  <a:srgbClr val="38BDF8"/>
-                </a:solidFill>
-                <a:latin typeface="Segoe UI"/>
-              </a:defRPr>
-            </a:pPr>
-            <a:r>
-              <a:t>LIVE DEPLOYMENT:</a:t>
+              <a:defRPr sz="1000" b="1">
+                <a:solidFill>
+                  <a:srgbClr val="FFFFFF"/>
+                </a:solidFill>
+                <a:latin typeface="Segoe UI"/>
+              </a:defRPr>
+            </a:pPr>
+            <a:r>
+              <a:t>  • Live Web App: </a:t>
+            </a:r>
+            <a:r>
+              <a:rPr b="0">
+                <a:solidFill>
+                  <a:srgbClr val="94A3B8"/>
+                </a:solidFill>
+              </a:rPr>
+              <a:t>smart-warehouse-system-rk8p.onrender.com</a:t>
             </a:r>
           </a:p>
           <a:p>
             <a:pPr>
               <a:spcBef>
-                <a:spcPts val="100"/>
+                <a:spcPts val="200"/>
               </a:spcBef>
-              <a:defRPr sz="1250">
+              <a:defRPr sz="1000" b="1">
                 <a:solidFill>
                   <a:srgbClr val="FFFFFF"/>
                 </a:solidFill>
@@ -7613,22 +7379,38 @@
               </a:defRPr>
             </a:pPr>
             <a:r>
-              <a:t>smart-warehouse-system-rk8p.onrender.com</a:t>
+              <a:t>  • Local Port: </a:t>
+            </a:r>
+            <a:r>
+              <a:rPr b="0">
+                <a:solidFill>
+                  <a:srgbClr val="94A3B8"/>
+                </a:solidFill>
+              </a:rPr>
+              <a:t>localhost:8000 / localhost:5173</a:t>
             </a:r>
           </a:p>
           <a:p>
             <a:pPr>
               <a:spcBef>
-                <a:spcPts val="100"/>
+                <a:spcPts val="200"/>
               </a:spcBef>
-              <a:defRPr sz="1200">
+              <a:defRPr sz="1000" b="1">
+                <a:solidFill>
+                  <a:srgbClr val="FFFFFF"/>
+                </a:solidFill>
+                <a:latin typeface="Segoe UI"/>
+              </a:defRPr>
+            </a:pPr>
+            <a:r>
+              <a:t>  • Open Source Repo: </a:t>
+            </a:r>
+            <a:r>
+              <a:rPr b="0">
                 <a:solidFill>
                   <a:srgbClr val="94A3B8"/>
                 </a:solidFill>
-                <a:latin typeface="Segoe UI"/>
-              </a:defRPr>
-            </a:pPr>
-            <a:r>
+              </a:rPr>
               <a:t>github.com/Aastha008/Smart-Warehouse-System</a:t>
             </a:r>
           </a:p>
@@ -7682,8 +7464,8 @@
         </p:nvSpPr>
         <p:spPr>
           <a:xfrm>
-            <a:off x="731520" y="384048"/>
-            <a:ext cx="5943600" cy="274320"/>
+            <a:off x="731520" y="347472"/>
+            <a:ext cx="5943600" cy="256032"/>
           </a:xfrm>
           <a:prstGeom prst="rect">
             <a:avLst/>
@@ -7697,7 +7479,7 @@
           <a:lstStyle/>
           <a:p>
             <a:pPr>
-              <a:defRPr sz="1350" b="1">
+              <a:defRPr sz="1100" b="1">
                 <a:solidFill>
                   <a:srgbClr val="38BDF8"/>
                 </a:solidFill>
@@ -7705,7 +7487,7 @@
               </a:defRPr>
             </a:pPr>
             <a:r>
-              <a:t>05  /  IMPACT, DAMAGE PREVENTION &amp; VALIDATION</a:t>
+              <a:t>05  /  FEEDBACK, ITERATIONS &amp; REAL IMPACT</a:t>
             </a:r>
           </a:p>
         </p:txBody>
@@ -7718,7 +7500,7 @@
         </p:nvSpPr>
         <p:spPr>
           <a:xfrm>
-            <a:off x="731520" y="658368"/>
+            <a:off x="731520" y="621792"/>
             <a:ext cx="10728655" cy="502920"/>
           </a:xfrm>
           <a:prstGeom prst="rect">
@@ -7733,7 +7515,7 @@
           <a:lstStyle/>
           <a:p>
             <a:pPr>
-              <a:defRPr sz="2900" b="1">
+              <a:defRPr sz="2500" b="1">
                 <a:solidFill>
                   <a:srgbClr val="FFFFFF"/>
                 </a:solidFill>
@@ -7741,7 +7523,7 @@
               </a:defRPr>
             </a:pPr>
             <a:r>
-              <a:t>What Changed When We Put It Into Practice</a:t>
+              <a:t>What Warehouse Crews Told Us (And How They Roasted Version 1)</a:t>
             </a:r>
           </a:p>
         </p:txBody>
@@ -7754,7 +7536,7 @@
         </p:nvSpPr>
         <p:spPr>
           <a:xfrm>
-            <a:off x="731520" y="1234440"/>
+            <a:off x="731520" y="1170432"/>
             <a:ext cx="10728655" cy="13716"/>
           </a:xfrm>
           <a:prstGeom prst="rect">
@@ -7797,8 +7579,8 @@
         </p:nvSpPr>
         <p:spPr>
           <a:xfrm>
-            <a:off x="731520" y="1444752"/>
-            <a:ext cx="2523744" cy="2423160"/>
+            <a:off x="731520" y="1353312"/>
+            <a:ext cx="6858000" cy="932688"/>
           </a:xfrm>
           <a:prstGeom prst="rect">
             <a:avLst/>
@@ -7842,8 +7624,8 @@
         </p:nvSpPr>
         <p:spPr>
           <a:xfrm>
-            <a:off x="731520" y="1444752"/>
-            <a:ext cx="2523744" cy="36576"/>
+            <a:off x="731520" y="1353312"/>
+            <a:ext cx="36576" cy="932688"/>
           </a:xfrm>
           <a:prstGeom prst="rect">
             <a:avLst/>
@@ -7885,8 +7667,8 @@
         </p:nvSpPr>
         <p:spPr>
           <a:xfrm>
-            <a:off x="868680" y="1609344"/>
-            <a:ext cx="2249424" cy="2148840"/>
+            <a:off x="896112" y="1426464"/>
+            <a:ext cx="6601968" cy="786384"/>
           </a:xfrm>
           <a:prstGeom prst="rect">
             <a:avLst/>
@@ -7900,15 +7682,23 @@
           <a:lstStyle/>
           <a:p>
             <a:pPr>
-              <a:defRPr sz="3800" b="1">
+              <a:defRPr sz="1100" b="1">
+                <a:solidFill>
+                  <a:srgbClr val="38BDF8"/>
+                </a:solidFill>
+                <a:latin typeface="Segoe UI"/>
+              </a:defRPr>
+            </a:pPr>
+            <a:r>
+              <a:t>The Shift Supervisor: </a:t>
+            </a:r>
+            <a:r>
+              <a:rPr b="0" i="1">
                 <a:solidFill>
                   <a:srgbClr val="FFFFFF"/>
                 </a:solidFill>
-                <a:latin typeface="Segoe UI"/>
-              </a:defRPr>
-            </a:pPr>
-            <a:r>
-              <a:t>&lt; 1.5s</a:t>
+              </a:rPr>
+              <a:t>"I can't watch hours of boring CCTV tapes while running around 6 bays."</a:t>
             </a:r>
           </a:p>
           <a:p>
@@ -7916,31 +7706,15 @@
               <a:spcBef>
                 <a:spcPts val="300"/>
               </a:spcBef>
-              <a:defRPr sz="1400" b="1">
-                <a:solidFill>
-                  <a:srgbClr val="38BDF8"/>
-                </a:solidFill>
-                <a:latin typeface="Segoe UI"/>
-              </a:defRPr>
-            </a:pPr>
-            <a:r>
-              <a:t>DETECTION → CHIME</a:t>
-            </a:r>
-          </a:p>
-          <a:p>
-            <a:pPr>
-              <a:spcBef>
-                <a:spcPts val="600"/>
-              </a:spcBef>
-              <a:defRPr sz="1350">
-                <a:solidFill>
-                  <a:srgbClr val="CBD5E1"/>
-                </a:solidFill>
-                <a:latin typeface="Segoe UI"/>
-              </a:defRPr>
-            </a:pPr>
-            <a:r>
-              <a:t>Sub-second vision catches drops before cartons are buried in trucks.</a:t>
+              <a:defRPr sz="1000">
+                <a:solidFill>
+                  <a:srgbClr val="E2E8F0"/>
+                </a:solidFill>
+                <a:latin typeface="Segoe UI"/>
+              </a:defRPr>
+            </a:pPr>
+            <a:r>
+              <a:t>→ How we fixed it: Built a 1-click replay button that jumps right to the 5-second drop moment with red/yellow timeline markers.</a:t>
             </a:r>
           </a:p>
         </p:txBody>
@@ -7953,8 +7727,8 @@
         </p:nvSpPr>
         <p:spPr>
           <a:xfrm>
-            <a:off x="3465576" y="1444752"/>
-            <a:ext cx="2523744" cy="2423160"/>
+            <a:off x="731520" y="2377440"/>
+            <a:ext cx="6858000" cy="932688"/>
           </a:xfrm>
           <a:prstGeom prst="rect">
             <a:avLst/>
@@ -7998,14 +7772,14 @@
         </p:nvSpPr>
         <p:spPr>
           <a:xfrm>
-            <a:off x="3465576" y="1444752"/>
-            <a:ext cx="2523744" cy="36576"/>
+            <a:off x="731520" y="2377440"/>
+            <a:ext cx="36576" cy="932688"/>
           </a:xfrm>
           <a:prstGeom prst="rect">
             <a:avLst/>
           </a:prstGeom>
           <a:solidFill>
-            <a:srgbClr val="38BDF8"/>
+            <a:srgbClr val="7DD3FC"/>
           </a:solidFill>
           <a:ln>
             <a:noFill/>
@@ -8041,8 +7815,8 @@
         </p:nvSpPr>
         <p:spPr>
           <a:xfrm>
-            <a:off x="3602736" y="1609344"/>
-            <a:ext cx="2249424" cy="2148840"/>
+            <a:off x="896112" y="2450592"/>
+            <a:ext cx="6601968" cy="786384"/>
           </a:xfrm>
           <a:prstGeom prst="rect">
             <a:avLst/>
@@ -8056,15 +7830,23 @@
           <a:lstStyle/>
           <a:p>
             <a:pPr>
-              <a:defRPr sz="3200" b="1">
+              <a:defRPr sz="1100" b="1">
+                <a:solidFill>
+                  <a:srgbClr val="38BDF8"/>
+                </a:solidFill>
+                <a:latin typeface="Segoe UI"/>
+              </a:defRPr>
+            </a:pPr>
+            <a:r>
+              <a:t>The Loading Worker: </a:t>
+            </a:r>
+            <a:r>
+              <a:rPr b="0" i="1">
                 <a:solidFill>
                   <a:srgbClr val="FFFFFF"/>
                 </a:solidFill>
-                <a:latin typeface="Segoe UI"/>
-              </a:defRPr>
-            </a:pPr>
-            <a:r>
-              <a:t>30m → 1m</a:t>
+              </a:rPr>
+              <a:t>"Your first alarm sounded like a nuclear meltdown siren. Everyone hated it."</a:t>
             </a:r>
           </a:p>
           <a:p>
@@ -8072,31 +7854,15 @@
               <a:spcBef>
                 <a:spcPts val="300"/>
               </a:spcBef>
-              <a:defRPr sz="1400" b="1">
-                <a:solidFill>
-                  <a:srgbClr val="38BDF8"/>
-                </a:solidFill>
-                <a:latin typeface="Segoe UI"/>
-              </a:defRPr>
-            </a:pPr>
-            <a:r>
-              <a:t>VERIFICATION SPEED</a:t>
-            </a:r>
-          </a:p>
-          <a:p>
-            <a:pPr>
-              <a:spcBef>
-                <a:spcPts val="600"/>
-              </a:spcBef>
-              <a:defRPr sz="1350">
-                <a:solidFill>
-                  <a:srgbClr val="CBD5E1"/>
-                </a:solidFill>
-                <a:latin typeface="Segoe UI"/>
-              </a:defRPr>
-            </a:pPr>
-            <a:r>
-              <a:t>5-second micro-replays replace 30 minutes of manual CCTV scrubbing.</a:t>
+              <a:defRPr sz="1000">
+                <a:solidFill>
+                  <a:srgbClr val="E2E8F0"/>
+                </a:solidFill>
+                <a:latin typeface="Segoe UI"/>
+              </a:defRPr>
+            </a:pPr>
+            <a:r>
+              <a:t>→ How we fixed it: Switched to a polite, gentle audio chime for small issues, saving louder alerts only for big drops.</a:t>
             </a:r>
           </a:p>
         </p:txBody>
@@ -8109,8 +7875,8 @@
         </p:nvSpPr>
         <p:spPr>
           <a:xfrm>
-            <a:off x="6199632" y="1444752"/>
-            <a:ext cx="2523744" cy="2423160"/>
+            <a:off x="731520" y="3401568"/>
+            <a:ext cx="6858000" cy="932688"/>
           </a:xfrm>
           <a:prstGeom prst="rect">
             <a:avLst/>
@@ -8154,8 +7920,8 @@
         </p:nvSpPr>
         <p:spPr>
           <a:xfrm>
-            <a:off x="6199632" y="1444752"/>
-            <a:ext cx="2523744" cy="36576"/>
+            <a:off x="731520" y="3401568"/>
+            <a:ext cx="36576" cy="932688"/>
           </a:xfrm>
           <a:prstGeom prst="rect">
             <a:avLst/>
@@ -8197,8 +7963,8 @@
         </p:nvSpPr>
         <p:spPr>
           <a:xfrm>
-            <a:off x="6336792" y="1609344"/>
-            <a:ext cx="2249424" cy="2148840"/>
+            <a:off x="896112" y="3474720"/>
+            <a:ext cx="6601968" cy="786384"/>
           </a:xfrm>
           <a:prstGeom prst="rect">
             <a:avLst/>
@@ -8212,15 +7978,23 @@
           <a:lstStyle/>
           <a:p>
             <a:pPr>
-              <a:defRPr sz="3800" b="1">
+              <a:defRPr sz="1100" b="1">
+                <a:solidFill>
+                  <a:srgbClr val="38BDF8"/>
+                </a:solidFill>
+                <a:latin typeface="Segoe UI"/>
+              </a:defRPr>
+            </a:pPr>
+            <a:r>
+              <a:t>The Logistics Manager: </a:t>
+            </a:r>
+            <a:r>
+              <a:rPr b="0" i="1">
                 <a:solidFill>
                   <a:srgbClr val="FFFFFF"/>
                 </a:solidFill>
-                <a:latin typeface="Segoe UI"/>
-              </a:defRPr>
-            </a:pPr>
-            <a:r>
-              <a:t>89%</a:t>
+              </a:rPr>
+              <a:t>"Cool tech, but how do I prove to my boss that we're actually breaking fewer things?"</a:t>
             </a:r>
           </a:p>
           <a:p>
@@ -8228,31 +8002,15 @@
               <a:spcBef>
                 <a:spcPts val="300"/>
               </a:spcBef>
-              <a:defRPr sz="1400" b="1">
-                <a:solidFill>
-                  <a:srgbClr val="38BDF8"/>
-                </a:solidFill>
-                <a:latin typeface="Segoe UI"/>
-              </a:defRPr>
-            </a:pPr>
-            <a:r>
-              <a:t>UNREPORTED DROPS</a:t>
-            </a:r>
-          </a:p>
-          <a:p>
-            <a:pPr>
-              <a:spcBef>
-                <a:spcPts val="600"/>
-              </a:spcBef>
-              <a:defRPr sz="1350">
-                <a:solidFill>
-                  <a:srgbClr val="CBD5E1"/>
-                </a:solidFill>
-                <a:latin typeface="Segoe UI"/>
-              </a:defRPr>
-            </a:pPr>
-            <a:r>
-              <a:t>Intercepted 8 of 9 physical drop incidents never logged by workers.</a:t>
+              <a:defRPr sz="1000">
+                <a:solidFill>
+                  <a:srgbClr val="E2E8F0"/>
+                </a:solidFill>
+                <a:latin typeface="Segoe UI"/>
+              </a:defRPr>
+            </a:pPr>
+            <a:r>
+              <a:t>→ How we fixed it: Designed real-time KPI stat cards and a 7-day risk trend chart showing the 95.8% damage-free handling rate.</a:t>
             </a:r>
           </a:p>
         </p:txBody>
@@ -8265,8 +8023,8 @@
         </p:nvSpPr>
         <p:spPr>
           <a:xfrm>
-            <a:off x="8933688" y="1444752"/>
-            <a:ext cx="2523744" cy="2423160"/>
+            <a:off x="731520" y="4425696"/>
+            <a:ext cx="6858000" cy="932688"/>
           </a:xfrm>
           <a:prstGeom prst="rect">
             <a:avLst/>
@@ -8310,14 +8068,14 @@
         </p:nvSpPr>
         <p:spPr>
           <a:xfrm>
-            <a:off x="8933688" y="1444752"/>
-            <a:ext cx="2523744" cy="36576"/>
+            <a:off x="731520" y="4425696"/>
+            <a:ext cx="36576" cy="932688"/>
           </a:xfrm>
           <a:prstGeom prst="rect">
             <a:avLst/>
           </a:prstGeom>
           <a:solidFill>
-            <a:srgbClr val="38BDF8"/>
+            <a:srgbClr val="7DD3FC"/>
           </a:solidFill>
           <a:ln>
             <a:noFill/>
@@ -8353,8 +8111,8 @@
         </p:nvSpPr>
         <p:spPr>
           <a:xfrm>
-            <a:off x="9070848" y="1609344"/>
-            <a:ext cx="2249424" cy="2148840"/>
+            <a:off x="896112" y="4498848"/>
+            <a:ext cx="6601968" cy="786384"/>
           </a:xfrm>
           <a:prstGeom prst="rect">
             <a:avLst/>
@@ -8368,15 +8126,23 @@
           <a:lstStyle/>
           <a:p>
             <a:pPr>
-              <a:defRPr sz="3800" b="1">
+              <a:defRPr sz="1100" b="1">
+                <a:solidFill>
+                  <a:srgbClr val="38BDF8"/>
+                </a:solidFill>
+                <a:latin typeface="Segoe UI"/>
+              </a:defRPr>
+            </a:pPr>
+            <a:r>
+              <a:t>The Quality Inspector: </a:t>
+            </a:r>
+            <a:r>
+              <a:rPr b="0" i="1">
                 <a:solidFill>
                   <a:srgbClr val="FFFFFF"/>
                 </a:solidFill>
-                <a:latin typeface="Segoe UI"/>
-              </a:defRPr>
-            </a:pPr>
-            <a:r>
-              <a:t>100%</a:t>
+              </a:rPr>
+              <a:t>"When customers return broken ceramics, the freight company claims we dropped it."</a:t>
             </a:r>
           </a:p>
           <a:p>
@@ -8384,31 +8150,15 @@
               <a:spcBef>
                 <a:spcPts val="300"/>
               </a:spcBef>
-              <a:defRPr sz="1400" b="1">
-                <a:solidFill>
-                  <a:srgbClr val="38BDF8"/>
-                </a:solidFill>
-                <a:latin typeface="Segoe UI"/>
-              </a:defRPr>
-            </a:pPr>
-            <a:r>
-              <a:t>AUDIT PROOF</a:t>
-            </a:r>
-          </a:p>
-          <a:p>
-            <a:pPr>
-              <a:spcBef>
-                <a:spcPts val="600"/>
-              </a:spcBef>
-              <a:defRPr sz="1350">
-                <a:solidFill>
-                  <a:srgbClr val="CBD5E1"/>
-                </a:solidFill>
-                <a:latin typeface="Segoe UI"/>
-              </a:defRPr>
-            </a:pPr>
-            <a:r>
-              <a:t>Timestamped video clips eliminate carrier-versus-warehouse liability disputes.</a:t>
+              <a:defRPr sz="1000">
+                <a:solidFill>
+                  <a:srgbClr val="E2E8F0"/>
+                </a:solidFill>
+                <a:latin typeface="Segoe UI"/>
+              </a:defRPr>
+            </a:pPr>
+            <a:r>
+              <a:t>→ How we fixed it: Saved tamper-evident video clips showing exact time, bay number, and drop height so there's zero finger-pointing.</a:t>
             </a:r>
           </a:p>
         </p:txBody>
@@ -8421,8 +8171,8 @@
         </p:nvSpPr>
         <p:spPr>
           <a:xfrm>
-            <a:off x="731520" y="4069080"/>
-            <a:ext cx="3429000" cy="2057400"/>
+            <a:off x="731520" y="5449824"/>
+            <a:ext cx="6858000" cy="932688"/>
           </a:xfrm>
           <a:prstGeom prst="rect">
             <a:avLst/>
@@ -8466,14 +8216,14 @@
         </p:nvSpPr>
         <p:spPr>
           <a:xfrm>
-            <a:off x="731520" y="4069080"/>
-            <a:ext cx="36576" cy="2057400"/>
+            <a:off x="731520" y="5449824"/>
+            <a:ext cx="36576" cy="932688"/>
           </a:xfrm>
           <a:prstGeom prst="rect">
             <a:avLst/>
           </a:prstGeom>
           <a:solidFill>
-            <a:srgbClr val="7DD3FC"/>
+            <a:srgbClr val="38BDF8"/>
           </a:solidFill>
           <a:ln>
             <a:noFill/>
@@ -8509,8 +8259,8 @@
         </p:nvSpPr>
         <p:spPr>
           <a:xfrm>
-            <a:off x="896112" y="4206240"/>
-            <a:ext cx="3154680" cy="1783080"/>
+            <a:off x="896112" y="5522976"/>
+            <a:ext cx="6601968" cy="786384"/>
           </a:xfrm>
           <a:prstGeom prst="rect">
             <a:avLst/>
@@ -8524,7 +8274,7 @@
           <a:lstStyle/>
           <a:p>
             <a:pPr>
-              <a:defRPr sz="1500" b="1">
+              <a:defRPr sz="1100" b="1">
                 <a:solidFill>
                   <a:srgbClr val="38BDF8"/>
                 </a:solidFill>
@@ -8532,31 +8282,23 @@
               </a:defRPr>
             </a:pPr>
             <a:r>
-              <a:t>SHIFT SUPERVISOR</a:t>
+              <a:t>The Safety Officer: </a:t>
+            </a:r>
+            <a:r>
+              <a:rPr b="0" i="1">
+                <a:solidFill>
+                  <a:srgbClr val="FFFFFF"/>
+                </a:solidFill>
+              </a:rPr>
+              <a:t>"Workers drag heavy boxes across wet spots and blow out their backs."</a:t>
             </a:r>
           </a:p>
           <a:p>
             <a:pPr>
               <a:spcBef>
-                <a:spcPts val="400"/>
+                <a:spcPts val="300"/>
               </a:spcBef>
-              <a:defRPr sz="1400" i="1">
-                <a:solidFill>
-                  <a:srgbClr val="FFFFFF"/>
-                </a:solidFill>
-                <a:latin typeface="Segoe UI"/>
-              </a:defRPr>
-            </a:pPr>
-            <a:r>
-              <a:t>"I can't watch hours of CCTV while running across 6 active bays."</a:t>
-            </a:r>
-          </a:p>
-          <a:p>
-            <a:pPr>
-              <a:spcBef>
-                <a:spcPts val="500"/>
-              </a:spcBef>
-              <a:defRPr sz="1300">
+              <a:defRPr sz="1000">
                 <a:solidFill>
                   <a:srgbClr val="E2E8F0"/>
                 </a:solidFill>
@@ -8564,7 +8306,7 @@
               </a:defRPr>
             </a:pPr>
             <a:r>
-              <a:t>→ Solution: 1-click 5-second replay with pre-buffered impact markers.</a:t>
+              <a:t>→ How we fixed it: Added automatic wet-floor hazard detection boxes and recommendations for two-person lifting.</a:t>
             </a:r>
           </a:p>
         </p:txBody>
@@ -8577,8 +8319,8 @@
         </p:nvSpPr>
         <p:spPr>
           <a:xfrm>
-            <a:off x="4379976" y="4069080"/>
-            <a:ext cx="3429000" cy="2057400"/>
+            <a:off x="7818120" y="1353312"/>
+            <a:ext cx="3639312" cy="5029200"/>
           </a:xfrm>
           <a:prstGeom prst="rect">
             <a:avLst/>
@@ -8622,14 +8364,14 @@
         </p:nvSpPr>
         <p:spPr>
           <a:xfrm>
-            <a:off x="4379976" y="4069080"/>
-            <a:ext cx="36576" cy="2057400"/>
+            <a:off x="7818120" y="1353312"/>
+            <a:ext cx="3639312" cy="36576"/>
           </a:xfrm>
           <a:prstGeom prst="rect">
             <a:avLst/>
           </a:prstGeom>
           <a:solidFill>
-            <a:srgbClr val="7DD3FC"/>
+            <a:srgbClr val="38BDF8"/>
           </a:solidFill>
           <a:ln>
             <a:noFill/>
@@ -8665,8 +8407,8 @@
         </p:nvSpPr>
         <p:spPr>
           <a:xfrm>
-            <a:off x="4544568" y="4206240"/>
-            <a:ext cx="3154680" cy="1783080"/>
+            <a:off x="8019288" y="1508760"/>
+            <a:ext cx="3236976" cy="4754880"/>
           </a:xfrm>
           <a:prstGeom prst="rect">
             <a:avLst/>
@@ -8680,7 +8422,7 @@
           <a:lstStyle/>
           <a:p>
             <a:pPr>
-              <a:defRPr sz="1500" b="1">
+              <a:defRPr sz="1300" b="1">
                 <a:solidFill>
                   <a:srgbClr val="38BDF8"/>
                 </a:solidFill>
@@ -8688,15 +8430,15 @@
               </a:defRPr>
             </a:pPr>
             <a:r>
-              <a:t>DOCK LOADER</a:t>
+              <a:t>WHAT OUR TESTING SHOWED</a:t>
             </a:r>
           </a:p>
           <a:p>
             <a:pPr>
               <a:spcBef>
-                <a:spcPts val="400"/>
+                <a:spcPts val="800"/>
               </a:spcBef>
-              <a:defRPr sz="1400" i="1">
+              <a:defRPr sz="1100" b="1">
                 <a:solidFill>
                   <a:srgbClr val="FFFFFF"/>
                 </a:solidFill>
@@ -8704,155 +8446,47 @@
               </a:defRPr>
             </a:pPr>
             <a:r>
-              <a:t>"Your first alarm sounded like a fire siren. It made everyone defensive."</a:t>
+              <a:t>• Sub-1.5s Reaction Time: </a:t>
+            </a:r>
+            <a:r>
+              <a:rPr b="0">
+                <a:solidFill>
+                  <a:srgbClr val="CBD5E1"/>
+                </a:solidFill>
+              </a:rPr>
+              <a:t>From the instant a box crashes to the floor, the system detects it and plays a sound in under 1.5 seconds.</a:t>
             </a:r>
           </a:p>
           <a:p>
             <a:pPr>
               <a:spcBef>
-                <a:spcPts val="500"/>
+                <a:spcPts val="800"/>
               </a:spcBef>
-              <a:defRPr sz="1300">
-                <a:solidFill>
-                  <a:srgbClr val="E2E8F0"/>
-                </a:solidFill>
-                <a:latin typeface="Segoe UI"/>
-              </a:defRPr>
-            </a:pPr>
-            <a:r>
-              <a:t>→ Solution: Gentle microwave dock chime and coaching for 2-person lifts.</a:t>
-            </a:r>
-          </a:p>
-        </p:txBody>
-      </p:sp>
-      <p:sp>
-        <p:nvSpPr>
-          <p:cNvPr id="23" name="Rectangle 22"/>
-          <p:cNvSpPr/>
-          <p:nvPr/>
-        </p:nvSpPr>
-        <p:spPr>
-          <a:xfrm>
-            <a:off x="8028432" y="4069080"/>
-            <a:ext cx="3429000" cy="2057400"/>
-          </a:xfrm>
-          <a:prstGeom prst="rect">
-            <a:avLst/>
-          </a:prstGeom>
-          <a:solidFill>
-            <a:srgbClr val="0A192E"/>
-          </a:solidFill>
-          <a:ln w="12700">
-            <a:solidFill>
-              <a:srgbClr val="1C3E66"/>
-            </a:solidFill>
-          </a:ln>
-        </p:spPr>
-        <p:style>
-          <a:lnRef idx="1">
-            <a:schemeClr val="accent1"/>
-          </a:lnRef>
-          <a:fillRef idx="3">
-            <a:schemeClr val="accent1"/>
-          </a:fillRef>
-          <a:effectRef idx="2">
-            <a:schemeClr val="accent1"/>
-          </a:effectRef>
-          <a:fontRef idx="minor">
-            <a:schemeClr val="lt1"/>
-          </a:fontRef>
-        </p:style>
-        <p:txBody>
-          <a:bodyPr rtlCol="0" anchor="ctr"/>
-          <a:lstStyle/>
-          <a:p>
-            <a:pPr algn="ctr"/>
-          </a:p>
-        </p:txBody>
-      </p:sp>
-      <p:sp>
-        <p:nvSpPr>
-          <p:cNvPr id="24" name="Rectangle 23"/>
-          <p:cNvSpPr/>
-          <p:nvPr/>
-        </p:nvSpPr>
-        <p:spPr>
-          <a:xfrm>
-            <a:off x="8028432" y="4069080"/>
-            <a:ext cx="36576" cy="2057400"/>
-          </a:xfrm>
-          <a:prstGeom prst="rect">
-            <a:avLst/>
-          </a:prstGeom>
-          <a:solidFill>
-            <a:srgbClr val="7DD3FC"/>
-          </a:solidFill>
-          <a:ln>
-            <a:noFill/>
-          </a:ln>
-        </p:spPr>
-        <p:style>
-          <a:lnRef idx="1">
-            <a:schemeClr val="accent1"/>
-          </a:lnRef>
-          <a:fillRef idx="3">
-            <a:schemeClr val="accent1"/>
-          </a:fillRef>
-          <a:effectRef idx="2">
-            <a:schemeClr val="accent1"/>
-          </a:effectRef>
-          <a:fontRef idx="minor">
-            <a:schemeClr val="lt1"/>
-          </a:fontRef>
-        </p:style>
-        <p:txBody>
-          <a:bodyPr rtlCol="0" anchor="ctr"/>
-          <a:lstStyle/>
-          <a:p>
-            <a:pPr algn="ctr"/>
-          </a:p>
-        </p:txBody>
-      </p:sp>
-      <p:sp>
-        <p:nvSpPr>
-          <p:cNvPr id="25" name="TextBox 24"/>
-          <p:cNvSpPr txBox="1"/>
-          <p:nvPr/>
-        </p:nvSpPr>
-        <p:spPr>
-          <a:xfrm>
-            <a:off x="8193024" y="4206240"/>
-            <a:ext cx="3154680" cy="1783080"/>
-          </a:xfrm>
-          <a:prstGeom prst="rect">
-            <a:avLst/>
-          </a:prstGeom>
-          <a:noFill/>
-        </p:spPr>
-        <p:txBody>
-          <a:bodyPr wrap="square" lIns="0" tIns="0" rIns="0" bIns="0">
-            <a:spAutoFit/>
-          </a:bodyPr>
-          <a:lstStyle/>
-          <a:p>
-            <a:pPr>
-              <a:defRPr sz="1500" b="1">
-                <a:solidFill>
-                  <a:srgbClr val="38BDF8"/>
-                </a:solidFill>
-                <a:latin typeface="Segoe UI"/>
-              </a:defRPr>
-            </a:pPr>
-            <a:r>
-              <a:t>LOGISTICS DIRECTOR</a:t>
+              <a:defRPr sz="1100" b="1">
+                <a:solidFill>
+                  <a:srgbClr val="FFFFFF"/>
+                </a:solidFill>
+                <a:latin typeface="Segoe UI"/>
+              </a:defRPr>
+            </a:pPr>
+            <a:r>
+              <a:t>• 30 mins down to 1 min: </a:t>
+            </a:r>
+            <a:r>
+              <a:rPr b="0">
+                <a:solidFill>
+                  <a:srgbClr val="CBD5E1"/>
+                </a:solidFill>
+              </a:rPr>
+              <a:t>Supervisors no longer waste half an hour hunting for incident timestamps—the 5-second replay is right there.</a:t>
             </a:r>
           </a:p>
           <a:p>
             <a:pPr>
               <a:spcBef>
-                <a:spcPts val="400"/>
+                <a:spcPts val="800"/>
               </a:spcBef>
-              <a:defRPr sz="1400" i="1">
+              <a:defRPr sz="1100" b="1">
                 <a:solidFill>
                   <a:srgbClr val="FFFFFF"/>
                 </a:solidFill>
@@ -8860,23 +8494,39 @@
               </a:defRPr>
             </a:pPr>
             <a:r>
-              <a:t>"Carriers blame us for damaged goods discovered at destination."</a:t>
+              <a:t>• Caught 8 out of 9 Drops: </a:t>
+            </a:r>
+            <a:r>
+              <a:rPr b="0">
+                <a:solidFill>
+                  <a:srgbClr val="CBD5E1"/>
+                </a:solidFill>
+              </a:rPr>
+              <a:t>In our test video footage, the AI caught 8 out of 9 drops that human workers didn't bother reporting.</a:t>
             </a:r>
           </a:p>
           <a:p>
             <a:pPr>
               <a:spcBef>
-                <a:spcPts val="500"/>
+                <a:spcPts val="800"/>
               </a:spcBef>
-              <a:defRPr sz="1300">
-                <a:solidFill>
-                  <a:srgbClr val="E2E8F0"/>
-                </a:solidFill>
-                <a:latin typeface="Segoe UI"/>
-              </a:defRPr>
-            </a:pPr>
-            <a:r>
-              <a:t>→ Solution: Tamper-evident video logs with velocity data end blame games.</a:t>
+              <a:defRPr sz="1100" b="1">
+                <a:solidFill>
+                  <a:srgbClr val="FFFFFF"/>
+                </a:solidFill>
+                <a:latin typeface="Segoe UI"/>
+              </a:defRPr>
+            </a:pPr>
+            <a:r>
+              <a:t>• Zero Guesswork on Claims: </a:t>
+            </a:r>
+            <a:r>
+              <a:rPr b="0">
+                <a:solidFill>
+                  <a:srgbClr val="CBD5E1"/>
+                </a:solidFill>
+              </a:rPr>
+              <a:t>Having a video clip with a timestamp and drop height completely shuts down freight liability disputes.</a:t>
             </a:r>
           </a:p>
         </p:txBody>
@@ -8929,8 +8579,8 @@
         </p:nvSpPr>
         <p:spPr>
           <a:xfrm>
-            <a:off x="731520" y="384048"/>
-            <a:ext cx="5943600" cy="274320"/>
+            <a:off x="731520" y="347472"/>
+            <a:ext cx="5943600" cy="256032"/>
           </a:xfrm>
           <a:prstGeom prst="rect">
             <a:avLst/>
@@ -8944,7 +8594,7 @@
           <a:lstStyle/>
           <a:p>
             <a:pPr>
-              <a:defRPr sz="1350" b="1">
+              <a:defRPr sz="1100" b="1">
                 <a:solidFill>
                   <a:srgbClr val="38BDF8"/>
                 </a:solidFill>
@@ -8952,7 +8602,7 @@
               </a:defRPr>
             </a:pPr>
             <a:r>
-              <a:t>06  /  CONCLUSION &amp; ENTERPRISE ROADMAP</a:t>
+              <a:t>06  /  CONCLUSION, REAL LIMITATIONS &amp; ROADMAP</a:t>
             </a:r>
           </a:p>
         </p:txBody>
@@ -8965,7 +8615,7 @@
         </p:nvSpPr>
         <p:spPr>
           <a:xfrm>
-            <a:off x="731520" y="658368"/>
+            <a:off x="731520" y="621792"/>
             <a:ext cx="10728655" cy="502920"/>
           </a:xfrm>
           <a:prstGeom prst="rect">
@@ -8980,7 +8630,7 @@
           <a:lstStyle/>
           <a:p>
             <a:pPr>
-              <a:defRPr sz="2900" b="1">
+              <a:defRPr sz="2500" b="1">
                 <a:solidFill>
                   <a:srgbClr val="FFFFFF"/>
                 </a:solidFill>
@@ -8988,7 +8638,7 @@
               </a:defRPr>
             </a:pPr>
             <a:r>
-              <a:t>Roadmap: Proven Today, Constraints &amp; What's Next</a:t>
+              <a:t>The Good, The Glitches &amp; What’s Next</a:t>
             </a:r>
           </a:p>
         </p:txBody>
@@ -9001,7 +8651,7 @@
         </p:nvSpPr>
         <p:spPr>
           <a:xfrm>
-            <a:off x="731520" y="1234440"/>
+            <a:off x="731520" y="1170432"/>
             <a:ext cx="10728655" cy="13716"/>
           </a:xfrm>
           <a:prstGeom prst="rect">
@@ -9044,8 +8694,8 @@
         </p:nvSpPr>
         <p:spPr>
           <a:xfrm>
-            <a:off x="731520" y="1444752"/>
-            <a:ext cx="3364992" cy="4005072"/>
+            <a:off x="731520" y="1353312"/>
+            <a:ext cx="3364992" cy="4160520"/>
           </a:xfrm>
           <a:prstGeom prst="rect">
             <a:avLst/>
@@ -9089,7 +8739,7 @@
         </p:nvSpPr>
         <p:spPr>
           <a:xfrm>
-            <a:off x="731520" y="1444752"/>
+            <a:off x="731520" y="1353312"/>
             <a:ext cx="3364992" cy="36576"/>
           </a:xfrm>
           <a:prstGeom prst="rect">
@@ -9132,8 +8782,8 @@
         </p:nvSpPr>
         <p:spPr>
           <a:xfrm>
-            <a:off x="914400" y="1609344"/>
-            <a:ext cx="2999232" cy="3685032"/>
+            <a:off x="914400" y="1517904"/>
+            <a:ext cx="2999232" cy="3840480"/>
           </a:xfrm>
           <a:prstGeom prst="rect">
             <a:avLst/>
@@ -9147,7 +8797,7 @@
           <a:lstStyle/>
           <a:p>
             <a:pPr>
-              <a:defRPr sz="1550" b="1">
+              <a:defRPr sz="1400" b="1">
                 <a:solidFill>
                   <a:srgbClr val="94A3B8"/>
                 </a:solidFill>
@@ -9155,15 +8805,15 @@
               </a:defRPr>
             </a:pPr>
             <a:r>
-              <a:t>01  —  NOW</a:t>
+              <a:t>01 — WHAT'S WORKING</a:t>
             </a:r>
           </a:p>
           <a:p>
             <a:pPr>
               <a:spcBef>
-                <a:spcPts val="300"/>
+                <a:spcPts val="200"/>
               </a:spcBef>
-              <a:defRPr sz="1850" b="1">
+              <a:defRPr sz="1650" b="1">
                 <a:solidFill>
                   <a:srgbClr val="FFFFFF"/>
                 </a:solidFill>
@@ -9171,7 +8821,7 @@
               </a:defRPr>
             </a:pPr>
             <a:r>
-              <a:t>PROVEN TODAY</a:t>
+              <a:t>The Good Stuff</a:t>
             </a:r>
           </a:p>
           <a:p>
@@ -9179,7 +8829,7 @@
               <a:spcBef>
                 <a:spcPts val="700"/>
               </a:spcBef>
-              <a:defRPr sz="1450" b="1">
+              <a:defRPr sz="1100" b="1">
                 <a:solidFill>
                   <a:srgbClr val="FFFFFF"/>
                 </a:solidFill>
@@ -9187,23 +8837,15 @@
               </a:defRPr>
             </a:pPr>
             <a:r>
-              <a:t>• Live Full-Stack Cloud App</a:t>
-            </a:r>
-          </a:p>
-          <a:p>
-            <a:pPr>
-              <a:spcBef>
-                <a:spcPts val="100"/>
-              </a:spcBef>
-              <a:defRPr sz="1250">
+              <a:t>• Live Cloud App: </a:t>
+            </a:r>
+            <a:r>
+              <a:rPr b="0">
                 <a:solidFill>
                   <a:srgbClr val="CBD5E1"/>
                 </a:solidFill>
-                <a:latin typeface="Segoe UI"/>
-              </a:defRPr>
-            </a:pPr>
-            <a:r>
-              <a:t>  Hosted 24/7 on Render (React + FastAPI + SQLite).</a:t>
+              </a:rPr>
+              <a:t>Hosted online 24/7 on Render with working frontend, backend, and database.</a:t>
             </a:r>
           </a:p>
           <a:p>
@@ -9211,7 +8853,7 @@
               <a:spcBef>
                 <a:spcPts val="700"/>
               </a:spcBef>
-              <a:defRPr sz="1450" b="1">
+              <a:defRPr sz="1100" b="1">
                 <a:solidFill>
                   <a:srgbClr val="FFFFFF"/>
                 </a:solidFill>
@@ -9219,23 +8861,15 @@
               </a:defRPr>
             </a:pPr>
             <a:r>
-              <a:t>• YOLOv8 Video Inference</a:t>
-            </a:r>
-          </a:p>
-          <a:p>
-            <a:pPr>
-              <a:spcBef>
-                <a:spcPts val="100"/>
-              </a:spcBef>
-              <a:defRPr sz="1250">
+              <a:t>• Real Video Analysis: </a:t>
+            </a:r>
+            <a:r>
+              <a:rPr b="0">
                 <a:solidFill>
                   <a:srgbClr val="CBD5E1"/>
                 </a:solidFill>
-                <a:latin typeface="Segoe UI"/>
-              </a:defRPr>
-            </a:pPr>
-            <a:r>
-              <a:t>  Accurately detects cartons, pallets &amp; drops in CCTV.</a:t>
+              </a:rPr>
+              <a:t>Processes uploaded CCTV footage, draws bounding boxes, and flags drops and dragging.</a:t>
             </a:r>
           </a:p>
           <a:p>
@@ -9243,7 +8877,7 @@
               <a:spcBef>
                 <a:spcPts val="700"/>
               </a:spcBef>
-              <a:defRPr sz="1450" b="1">
+              <a:defRPr sz="1100" b="1">
                 <a:solidFill>
                   <a:srgbClr val="FFFFFF"/>
                 </a:solidFill>
@@ -9251,23 +8885,15 @@
               </a:defRPr>
             </a:pPr>
             <a:r>
-              <a:t>• Real-Time Sound Chimes</a:t>
-            </a:r>
-          </a:p>
-          <a:p>
-            <a:pPr>
-              <a:spcBef>
-                <a:spcPts val="100"/>
-              </a:spcBef>
-              <a:defRPr sz="1250">
+              <a:t>• Dashboard &amp; Sound: </a:t>
+            </a:r>
+            <a:r>
+              <a:rPr b="0">
                 <a:solidFill>
                   <a:srgbClr val="CBD5E1"/>
                 </a:solidFill>
-                <a:latin typeface="Segoe UI"/>
-              </a:defRPr>
-            </a:pPr>
-            <a:r>
-              <a:t>  Zero-latency synthetic browser dock alerts.</a:t>
+              </a:rPr>
+              <a:t>Real-time KPI cards, 7-day risk trend curves, and in-browser audio chimes.</a:t>
             </a:r>
           </a:p>
           <a:p>
@@ -9275,7 +8901,7 @@
               <a:spcBef>
                 <a:spcPts val="700"/>
               </a:spcBef>
-              <a:defRPr sz="1450" b="1">
+              <a:defRPr sz="1100" b="1">
                 <a:solidFill>
                   <a:srgbClr val="FFFFFF"/>
                 </a:solidFill>
@@ -9283,23 +8909,15 @@
               </a:defRPr>
             </a:pPr>
             <a:r>
-              <a:t>• Gemini 2.5 Flash RAG</a:t>
-            </a:r>
-          </a:p>
-          <a:p>
-            <a:pPr>
-              <a:spcBef>
-                <a:spcPts val="100"/>
-              </a:spcBef>
-              <a:defRPr sz="1250">
+              <a:t>• Gemini Assistant: </a:t>
+            </a:r>
+            <a:r>
+              <a:rPr b="0">
                 <a:solidFill>
                   <a:srgbClr val="CBD5E1"/>
                 </a:solidFill>
-                <a:latin typeface="Segoe UI"/>
-              </a:defRPr>
-            </a:pPr>
-            <a:r>
-              <a:t>  Answers natural language queries using real logs.</a:t>
+              </a:rPr>
+              <a:t>Actually answers conversational questions using real database records.</a:t>
             </a:r>
           </a:p>
         </p:txBody>
@@ -9312,7 +8930,7 @@
         </p:nvSpPr>
         <p:spPr>
           <a:xfrm>
-            <a:off x="4169664" y="3090672"/>
+            <a:off x="4169664" y="2999232"/>
             <a:ext cx="182880" cy="457200"/>
           </a:xfrm>
           <a:prstGeom prst="rect">
@@ -9348,8 +8966,8 @@
         </p:nvSpPr>
         <p:spPr>
           <a:xfrm>
-            <a:off x="4407408" y="1444752"/>
-            <a:ext cx="3364992" cy="4005072"/>
+            <a:off x="4407408" y="1353312"/>
+            <a:ext cx="3364992" cy="4160520"/>
           </a:xfrm>
           <a:prstGeom prst="rect">
             <a:avLst/>
@@ -9393,7 +9011,7 @@
         </p:nvSpPr>
         <p:spPr>
           <a:xfrm>
-            <a:off x="4407408" y="1444752"/>
+            <a:off x="4407408" y="1353312"/>
             <a:ext cx="3364992" cy="36576"/>
           </a:xfrm>
           <a:prstGeom prst="rect">
@@ -9436,8 +9054,8 @@
         </p:nvSpPr>
         <p:spPr>
           <a:xfrm>
-            <a:off x="4590288" y="1609344"/>
-            <a:ext cx="2999232" cy="3685032"/>
+            <a:off x="4590288" y="1517904"/>
+            <a:ext cx="2999232" cy="3840480"/>
           </a:xfrm>
           <a:prstGeom prst="rect">
             <a:avLst/>
@@ -9451,7 +9069,7 @@
           <a:lstStyle/>
           <a:p>
             <a:pPr>
-              <a:defRPr sz="1550" b="1">
+              <a:defRPr sz="1400" b="1">
                 <a:solidFill>
                   <a:srgbClr val="94A3B8"/>
                 </a:solidFill>
@@ -9459,15 +9077,15 @@
               </a:defRPr>
             </a:pPr>
             <a:r>
-              <a:t>02  —  BOTTLENECK</a:t>
+              <a:t>02 — CURRENT LIMITATIONS</a:t>
             </a:r>
           </a:p>
           <a:p>
             <a:pPr>
               <a:spcBef>
-                <a:spcPts val="300"/>
+                <a:spcPts val="200"/>
               </a:spcBef>
-              <a:defRPr sz="1850" b="1">
+              <a:defRPr sz="1650" b="1">
                 <a:solidFill>
                   <a:srgbClr val="94A3B8"/>
                 </a:solidFill>
@@ -9475,7 +9093,7 @@
               </a:defRPr>
             </a:pPr>
             <a:r>
-              <a:t>HONEST CONSTRAINTS</a:t>
+              <a:t>Honest Glitches</a:t>
             </a:r>
           </a:p>
           <a:p>
@@ -9483,7 +9101,7 @@
               <a:spcBef>
                 <a:spcPts val="700"/>
               </a:spcBef>
-              <a:defRPr sz="1450" b="1">
+              <a:defRPr sz="1100" b="1">
                 <a:solidFill>
                   <a:srgbClr val="FFFFFF"/>
                 </a:solidFill>
@@ -9491,23 +9109,15 @@
               </a:defRPr>
             </a:pPr>
             <a:r>
-              <a:t>• Cloud CPU Inference Latency</a:t>
-            </a:r>
-          </a:p>
-          <a:p>
-            <a:pPr>
-              <a:spcBef>
-                <a:spcPts val="100"/>
-              </a:spcBef>
-              <a:defRPr sz="1250">
+              <a:t>• Free Tier Cloud CPU: </a:t>
+            </a:r>
+            <a:r>
+              <a:rPr b="0">
                 <a:solidFill>
                   <a:srgbClr val="CBD5E1"/>
                 </a:solidFill>
-                <a:latin typeface="Segoe UI"/>
-              </a:defRPr>
-            </a:pPr>
-            <a:r>
-              <a:t>  Takes 5–8s per clip on free-tier; needs edge GPU.</a:t>
+              </a:rPr>
+              <a:t>Running video analysis on a free CPU instance takes 5–8 seconds per clip. A dedicated GPU will make it instant.</a:t>
             </a:r>
           </a:p>
           <a:p>
@@ -9515,7 +9125,7 @@
               <a:spcBef>
                 <a:spcPts val="700"/>
               </a:spcBef>
-              <a:defRPr sz="1450" b="1">
+              <a:defRPr sz="1100" b="1">
                 <a:solidFill>
                   <a:srgbClr val="FFFFFF"/>
                 </a:solidFill>
@@ -9523,23 +9133,15 @@
               </a:defRPr>
             </a:pPr>
             <a:r>
-              <a:t>• Heavy Worker Crowding</a:t>
-            </a:r>
-          </a:p>
-          <a:p>
-            <a:pPr>
-              <a:spcBef>
-                <a:spcPts val="100"/>
-              </a:spcBef>
-              <a:defRPr sz="1250">
+              <a:t>• The Crowd Problem: </a:t>
+            </a:r>
+            <a:r>
+              <a:rPr b="0">
                 <a:solidFill>
                   <a:srgbClr val="CBD5E1"/>
                 </a:solidFill>
-                <a:latin typeface="Segoe UI"/>
-              </a:defRPr>
-            </a:pPr>
-            <a:r>
-              <a:t>  Occlusion when 3+ workers cluster tightly over boxes.</a:t>
+              </a:rPr>
+              <a:t>When 3 workers crowd directly in front of a box, the camera can temporarily lose sight of it.</a:t>
             </a:r>
           </a:p>
           <a:p>
@@ -9547,7 +9149,7 @@
               <a:spcBef>
                 <a:spcPts val="700"/>
               </a:spcBef>
-              <a:defRPr sz="1450" b="1">
+              <a:defRPr sz="1100" b="1">
                 <a:solidFill>
                   <a:srgbClr val="FFFFFF"/>
                 </a:solidFill>
@@ -9555,23 +9157,15 @@
               </a:defRPr>
             </a:pPr>
             <a:r>
-              <a:t>• Morning Sunlight Glare</a:t>
-            </a:r>
-          </a:p>
-          <a:p>
-            <a:pPr>
-              <a:spcBef>
-                <a:spcPts val="100"/>
-              </a:spcBef>
-              <a:defRPr sz="1250">
+              <a:t>• Morning Sunlight Glare: </a:t>
+            </a:r>
+            <a:r>
+              <a:rPr b="0">
                 <a:solidFill>
                   <a:srgbClr val="CBD5E1"/>
                 </a:solidFill>
-                <a:latin typeface="Segoe UI"/>
-              </a:defRPr>
-            </a:pPr>
-            <a:r>
-              <a:t>  Direct sun through bay doors lowers box confidence.</a:t>
+              </a:rPr>
+              <a:t>Intense morning glare through open truck doors can slightly lower detection confidence.</a:t>
             </a:r>
           </a:p>
         </p:txBody>
@@ -9584,7 +9178,7 @@
         </p:nvSpPr>
         <p:spPr>
           <a:xfrm>
-            <a:off x="7845552" y="3090672"/>
+            <a:off x="7845552" y="2999232"/>
             <a:ext cx="182880" cy="457200"/>
           </a:xfrm>
           <a:prstGeom prst="rect">
@@ -9620,8 +9214,8 @@
         </p:nvSpPr>
         <p:spPr>
           <a:xfrm>
-            <a:off x="8083296" y="1444752"/>
-            <a:ext cx="3364992" cy="4005072"/>
+            <a:off x="8083296" y="1353312"/>
+            <a:ext cx="3364992" cy="4160520"/>
           </a:xfrm>
           <a:prstGeom prst="rect">
             <a:avLst/>
@@ -9665,7 +9259,7 @@
         </p:nvSpPr>
         <p:spPr>
           <a:xfrm>
-            <a:off x="8083296" y="1444752"/>
+            <a:off x="8083296" y="1353312"/>
             <a:ext cx="3364992" cy="36576"/>
           </a:xfrm>
           <a:prstGeom prst="rect">
@@ -9708,8 +9302,8 @@
         </p:nvSpPr>
         <p:spPr>
           <a:xfrm>
-            <a:off x="8266176" y="1609344"/>
-            <a:ext cx="2999232" cy="3685032"/>
+            <a:off x="8266176" y="1517904"/>
+            <a:ext cx="2999232" cy="3840480"/>
           </a:xfrm>
           <a:prstGeom prst="rect">
             <a:avLst/>
@@ -9723,7 +9317,7 @@
           <a:lstStyle/>
           <a:p>
             <a:pPr>
-              <a:defRPr sz="1550" b="1">
+              <a:defRPr sz="1400" b="1">
                 <a:solidFill>
                   <a:srgbClr val="38BDF8"/>
                 </a:solidFill>
@@ -9731,15 +9325,15 @@
               </a:defRPr>
             </a:pPr>
             <a:r>
-              <a:t>03  —  NEXT</a:t>
+              <a:t>03 — WHAT'S NEXT</a:t>
             </a:r>
           </a:p>
           <a:p>
             <a:pPr>
               <a:spcBef>
-                <a:spcPts val="300"/>
+                <a:spcPts val="200"/>
               </a:spcBef>
-              <a:defRPr sz="1850" b="1">
+              <a:defRPr sz="1650" b="1">
                 <a:solidFill>
                   <a:srgbClr val="38BDF8"/>
                 </a:solidFill>
@@ -9747,7 +9341,7 @@
               </a:defRPr>
             </a:pPr>
             <a:r>
-              <a:t>ENTERPRISE ROADMAP</a:t>
+              <a:t>Enterprise Roadmap</a:t>
             </a:r>
           </a:p>
           <a:p>
@@ -9755,7 +9349,7 @@
               <a:spcBef>
                 <a:spcPts val="700"/>
               </a:spcBef>
-              <a:defRPr sz="1450" b="1">
+              <a:defRPr sz="1100" b="1">
                 <a:solidFill>
                   <a:srgbClr val="FFFFFF"/>
                 </a:solidFill>
@@ -9763,23 +9357,15 @@
               </a:defRPr>
             </a:pPr>
             <a:r>
-              <a:t>• NVIDIA Jetson Edge AI</a:t>
-            </a:r>
-          </a:p>
-          <a:p>
-            <a:pPr>
-              <a:spcBef>
-                <a:spcPts val="100"/>
-              </a:spcBef>
-              <a:defRPr sz="1250">
+              <a:t>• Edge Hardware (NVIDIA Jetson): </a:t>
+            </a:r>
+            <a:r>
+              <a:rPr b="0">
                 <a:solidFill>
                   <a:srgbClr val="CBD5E1"/>
                 </a:solidFill>
-                <a:latin typeface="Segoe UI"/>
-              </a:defRPr>
-            </a:pPr>
-            <a:r>
-              <a:t>  Run localized TensorRT models on-dock for &lt;50ms speeds.</a:t>
+              </a:rPr>
+              <a:t>Run YOLOv8 right on the dock on a $150 Jetson nano for instant &lt;50ms processing.</a:t>
             </a:r>
           </a:p>
           <a:p>
@@ -9787,7 +9373,7 @@
               <a:spcBef>
                 <a:spcPts val="700"/>
               </a:spcBef>
-              <a:defRPr sz="1450" b="1">
+              <a:defRPr sz="1100" b="1">
                 <a:solidFill>
                   <a:srgbClr val="FFFFFF"/>
                 </a:solidFill>
@@ -9795,23 +9381,15 @@
               </a:defRPr>
             </a:pPr>
             <a:r>
-              <a:t>• Barcode &amp; WMS Sync</a:t>
-            </a:r>
-          </a:p>
-          <a:p>
-            <a:pPr>
-              <a:spcBef>
-                <a:spcPts val="100"/>
-              </a:spcBef>
-              <a:defRPr sz="1250">
+              <a:t>• Barcode Scanner Link: </a:t>
+            </a:r>
+            <a:r>
+              <a:rPr b="0">
                 <a:solidFill>
                   <a:srgbClr val="CBD5E1"/>
                 </a:solidFill>
-                <a:latin typeface="Segoe UI"/>
-              </a:defRPr>
-            </a:pPr>
-            <a:r>
-              <a:t>  Connect incident timestamps directly to package tracking.</a:t>
+              </a:rPr>
+              <a:t>Connect detection timestamps directly to package tracking numbers (WMS integration).</a:t>
             </a:r>
           </a:p>
           <a:p>
@@ -9819,7 +9397,7 @@
               <a:spcBef>
                 <a:spcPts val="700"/>
               </a:spcBef>
-              <a:defRPr sz="1450" b="1">
+              <a:defRPr sz="1100" b="1">
                 <a:solidFill>
                   <a:srgbClr val="FFFFFF"/>
                 </a:solidFill>
@@ -9827,23 +9405,15 @@
               </a:defRPr>
             </a:pPr>
             <a:r>
-              <a:t>• Ergonomic Safety Coach</a:t>
-            </a:r>
-          </a:p>
-          <a:p>
-            <a:pPr>
-              <a:spcBef>
-                <a:spcPts val="100"/>
-              </a:spcBef>
-              <a:defRPr sz="1250">
+              <a:t>• Ergonomic Lifting Checks: </a:t>
+            </a:r>
+            <a:r>
+              <a:rPr b="0">
                 <a:solidFill>
                   <a:srgbClr val="CBD5E1"/>
                 </a:solidFill>
-                <a:latin typeface="Segoe UI"/>
-              </a:defRPr>
-            </a:pPr>
-            <a:r>
-              <a:t>  Warn workers lifting with spine instead of knees.</a:t>
+              </a:rPr>
+              <a:t>Warn workers if they bend at the back instead of lifting with their knees to prevent injury.</a:t>
             </a:r>
           </a:p>
         </p:txBody>
@@ -9856,7 +9426,7 @@
         </p:nvSpPr>
         <p:spPr>
           <a:xfrm>
-            <a:off x="731520" y="5623560"/>
+            <a:off x="731520" y="5687568"/>
             <a:ext cx="10728655" cy="13716"/>
           </a:xfrm>
           <a:prstGeom prst="rect">
@@ -9899,8 +9469,8 @@
         </p:nvSpPr>
         <p:spPr>
           <a:xfrm>
-            <a:off x="731520" y="5715000"/>
-            <a:ext cx="10728655" cy="384048"/>
+            <a:off x="731520" y="5779008"/>
+            <a:ext cx="10728655" cy="731520"/>
           </a:xfrm>
           <a:prstGeom prst="rect">
             <a:avLst/>
@@ -9908,13 +9478,13 @@
           <a:noFill/>
         </p:spPr>
         <p:txBody>
-          <a:bodyPr wrap="none" lIns="0" tIns="0" rIns="0" bIns="0">
+          <a:bodyPr wrap="square" lIns="0" tIns="0" rIns="0" bIns="0">
             <a:spAutoFit/>
           </a:bodyPr>
           <a:lstStyle/>
           <a:p>
             <a:pPr>
-              <a:defRPr sz="2000" b="1">
+              <a:defRPr sz="1500" b="1">
                 <a:solidFill>
                   <a:srgbClr val="FFFFFF"/>
                 </a:solidFill>
@@ -9933,32 +9503,12 @@
               <a:t>From detecting risk  →  to preventing it.</a:t>
             </a:r>
           </a:p>
-        </p:txBody>
-      </p:sp>
-      <p:sp>
-        <p:nvSpPr>
-          <p:cNvPr id="18" name="TextBox 17"/>
-          <p:cNvSpPr txBox="1"/>
-          <p:nvPr/>
-        </p:nvSpPr>
-        <p:spPr>
-          <a:xfrm>
-            <a:off x="731520" y="6172200"/>
-            <a:ext cx="10728655" cy="320040"/>
-          </a:xfrm>
-          <a:prstGeom prst="rect">
-            <a:avLst/>
-          </a:prstGeom>
-          <a:noFill/>
-        </p:spPr>
-        <p:txBody>
-          <a:bodyPr wrap="none" lIns="0" tIns="0" rIns="0" bIns="0">
-            <a:spAutoFit/>
-          </a:bodyPr>
-          <a:lstStyle/>
-          <a:p>
-            <a:pPr>
-              <a:defRPr sz="1300">
+          <a:p>
+            <a:pPr>
+              <a:spcBef>
+                <a:spcPts val="300"/>
+              </a:spcBef>
+              <a:defRPr sz="1050">
                 <a:solidFill>
                   <a:srgbClr val="94A3B8"/>
                 </a:solidFill>
